--- a/99ref/버티카_blog.pptx
+++ b/99ref/버티카_blog.pptx
@@ -4766,7 +4766,6 @@
               <a:rPr lang="en-US" altLang="ko-KR" sz="7200" b="1" dirty="0"/>
               <a:t> Utilization</a:t>
             </a:r>
-            <a:endParaRPr lang="en-US" altLang="ko-KR" sz="7200" b="1" dirty="0"/>
           </a:p>
         </p:txBody>
       </p:sp>
@@ -8156,7 +8155,7 @@
                 <a:gridCol w="158267">
                   <a:extLst>
                     <a:ext uri="{9D8B030D-6E8A-4147-A177-3AD203B41FA5}">
-                      <a16:colId xmlns:a16="http://schemas.microsoft.com/office/drawing/2014/main" xmlns="" val="20000"/>
+                      <a16:colId xmlns="" xmlns:a16="http://schemas.microsoft.com/office/drawing/2014/main" val="20000"/>
                     </a:ext>
                   </a:extLst>
                 </a:gridCol>
@@ -8181,7 +8180,7 @@
                 </a:tc>
                 <a:extLst>
                   <a:ext uri="{0D108BD9-81ED-4DB2-BD59-A6C34878D82A}">
-                    <a16:rowId xmlns:a16="http://schemas.microsoft.com/office/drawing/2014/main" xmlns="" val="10001"/>
+                    <a16:rowId xmlns="" xmlns:a16="http://schemas.microsoft.com/office/drawing/2014/main" val="10001"/>
                   </a:ext>
                 </a:extLst>
               </a:tr>
@@ -8205,7 +8204,7 @@
                 </a:tc>
                 <a:extLst>
                   <a:ext uri="{0D108BD9-81ED-4DB2-BD59-A6C34878D82A}">
-                    <a16:rowId xmlns:a16="http://schemas.microsoft.com/office/drawing/2014/main" xmlns="" val="10002"/>
+                    <a16:rowId xmlns="" xmlns:a16="http://schemas.microsoft.com/office/drawing/2014/main" val="10002"/>
                   </a:ext>
                 </a:extLst>
               </a:tr>
@@ -8229,7 +8228,7 @@
                 </a:tc>
                 <a:extLst>
                   <a:ext uri="{0D108BD9-81ED-4DB2-BD59-A6C34878D82A}">
-                    <a16:rowId xmlns:a16="http://schemas.microsoft.com/office/drawing/2014/main" xmlns="" val="10003"/>
+                    <a16:rowId xmlns="" xmlns:a16="http://schemas.microsoft.com/office/drawing/2014/main" val="10003"/>
                   </a:ext>
                 </a:extLst>
               </a:tr>
@@ -8253,7 +8252,7 @@
                 </a:tc>
                 <a:extLst>
                   <a:ext uri="{0D108BD9-81ED-4DB2-BD59-A6C34878D82A}">
-                    <a16:rowId xmlns:a16="http://schemas.microsoft.com/office/drawing/2014/main" xmlns="" val="10004"/>
+                    <a16:rowId xmlns="" xmlns:a16="http://schemas.microsoft.com/office/drawing/2014/main" val="10004"/>
                   </a:ext>
                 </a:extLst>
               </a:tr>
@@ -8277,7 +8276,7 @@
                 </a:tc>
                 <a:extLst>
                   <a:ext uri="{0D108BD9-81ED-4DB2-BD59-A6C34878D82A}">
-                    <a16:rowId xmlns:a16="http://schemas.microsoft.com/office/drawing/2014/main" xmlns="" val="10005"/>
+                    <a16:rowId xmlns="" xmlns:a16="http://schemas.microsoft.com/office/drawing/2014/main" val="10005"/>
                   </a:ext>
                 </a:extLst>
               </a:tr>
@@ -8313,7 +8312,7 @@
                 <a:gridCol w="158267">
                   <a:extLst>
                     <a:ext uri="{9D8B030D-6E8A-4147-A177-3AD203B41FA5}">
-                      <a16:colId xmlns:a16="http://schemas.microsoft.com/office/drawing/2014/main" xmlns="" val="20000"/>
+                      <a16:colId xmlns="" xmlns:a16="http://schemas.microsoft.com/office/drawing/2014/main" val="20000"/>
                     </a:ext>
                   </a:extLst>
                 </a:gridCol>
@@ -8335,7 +8334,7 @@
                 </a:tc>
                 <a:extLst>
                   <a:ext uri="{0D108BD9-81ED-4DB2-BD59-A6C34878D82A}">
-                    <a16:rowId xmlns:a16="http://schemas.microsoft.com/office/drawing/2014/main" xmlns="" val="10001"/>
+                    <a16:rowId xmlns="" xmlns:a16="http://schemas.microsoft.com/office/drawing/2014/main" val="10001"/>
                   </a:ext>
                 </a:extLst>
               </a:tr>
@@ -8356,7 +8355,7 @@
                 </a:tc>
                 <a:extLst>
                   <a:ext uri="{0D108BD9-81ED-4DB2-BD59-A6C34878D82A}">
-                    <a16:rowId xmlns:a16="http://schemas.microsoft.com/office/drawing/2014/main" xmlns="" val="10002"/>
+                    <a16:rowId xmlns="" xmlns:a16="http://schemas.microsoft.com/office/drawing/2014/main" val="10002"/>
                   </a:ext>
                 </a:extLst>
               </a:tr>
@@ -8377,7 +8376,7 @@
                 </a:tc>
                 <a:extLst>
                   <a:ext uri="{0D108BD9-81ED-4DB2-BD59-A6C34878D82A}">
-                    <a16:rowId xmlns:a16="http://schemas.microsoft.com/office/drawing/2014/main" xmlns="" val="10003"/>
+                    <a16:rowId xmlns="" xmlns:a16="http://schemas.microsoft.com/office/drawing/2014/main" val="10003"/>
                   </a:ext>
                 </a:extLst>
               </a:tr>
@@ -8398,7 +8397,7 @@
                 </a:tc>
                 <a:extLst>
                   <a:ext uri="{0D108BD9-81ED-4DB2-BD59-A6C34878D82A}">
-                    <a16:rowId xmlns:a16="http://schemas.microsoft.com/office/drawing/2014/main" xmlns="" val="10004"/>
+                    <a16:rowId xmlns="" xmlns:a16="http://schemas.microsoft.com/office/drawing/2014/main" val="10004"/>
                   </a:ext>
                 </a:extLst>
               </a:tr>
@@ -8419,7 +8418,7 @@
                 </a:tc>
                 <a:extLst>
                   <a:ext uri="{0D108BD9-81ED-4DB2-BD59-A6C34878D82A}">
-                    <a16:rowId xmlns:a16="http://schemas.microsoft.com/office/drawing/2014/main" xmlns="" val="10005"/>
+                    <a16:rowId xmlns="" xmlns:a16="http://schemas.microsoft.com/office/drawing/2014/main" val="10005"/>
                   </a:ext>
                 </a:extLst>
               </a:tr>
@@ -8455,7 +8454,7 @@
                 <a:gridCol w="158267">
                   <a:extLst>
                     <a:ext uri="{9D8B030D-6E8A-4147-A177-3AD203B41FA5}">
-                      <a16:colId xmlns:a16="http://schemas.microsoft.com/office/drawing/2014/main" xmlns="" val="20000"/>
+                      <a16:colId xmlns="" xmlns:a16="http://schemas.microsoft.com/office/drawing/2014/main" val="20000"/>
                     </a:ext>
                   </a:extLst>
                 </a:gridCol>
@@ -8479,7 +8478,7 @@
                 </a:tc>
                 <a:extLst>
                   <a:ext uri="{0D108BD9-81ED-4DB2-BD59-A6C34878D82A}">
-                    <a16:rowId xmlns:a16="http://schemas.microsoft.com/office/drawing/2014/main" xmlns="" val="10001"/>
+                    <a16:rowId xmlns="" xmlns:a16="http://schemas.microsoft.com/office/drawing/2014/main" val="10001"/>
                   </a:ext>
                 </a:extLst>
               </a:tr>
@@ -8502,7 +8501,7 @@
                 </a:tc>
                 <a:extLst>
                   <a:ext uri="{0D108BD9-81ED-4DB2-BD59-A6C34878D82A}">
-                    <a16:rowId xmlns:a16="http://schemas.microsoft.com/office/drawing/2014/main" xmlns="" val="10002"/>
+                    <a16:rowId xmlns="" xmlns:a16="http://schemas.microsoft.com/office/drawing/2014/main" val="10002"/>
                   </a:ext>
                 </a:extLst>
               </a:tr>
@@ -8525,7 +8524,7 @@
                 </a:tc>
                 <a:extLst>
                   <a:ext uri="{0D108BD9-81ED-4DB2-BD59-A6C34878D82A}">
-                    <a16:rowId xmlns:a16="http://schemas.microsoft.com/office/drawing/2014/main" xmlns="" val="10003"/>
+                    <a16:rowId xmlns="" xmlns:a16="http://schemas.microsoft.com/office/drawing/2014/main" val="10003"/>
                   </a:ext>
                 </a:extLst>
               </a:tr>
@@ -8548,7 +8547,7 @@
                 </a:tc>
                 <a:extLst>
                   <a:ext uri="{0D108BD9-81ED-4DB2-BD59-A6C34878D82A}">
-                    <a16:rowId xmlns:a16="http://schemas.microsoft.com/office/drawing/2014/main" xmlns="" val="10004"/>
+                    <a16:rowId xmlns="" xmlns:a16="http://schemas.microsoft.com/office/drawing/2014/main" val="10004"/>
                   </a:ext>
                 </a:extLst>
               </a:tr>
@@ -8571,7 +8570,7 @@
                 </a:tc>
                 <a:extLst>
                   <a:ext uri="{0D108BD9-81ED-4DB2-BD59-A6C34878D82A}">
-                    <a16:rowId xmlns:a16="http://schemas.microsoft.com/office/drawing/2014/main" xmlns="" val="10005"/>
+                    <a16:rowId xmlns="" xmlns:a16="http://schemas.microsoft.com/office/drawing/2014/main" val="10005"/>
                   </a:ext>
                 </a:extLst>
               </a:tr>
@@ -8607,7 +8606,7 @@
                 <a:gridCol w="158267">
                   <a:extLst>
                     <a:ext uri="{9D8B030D-6E8A-4147-A177-3AD203B41FA5}">
-                      <a16:colId xmlns:a16="http://schemas.microsoft.com/office/drawing/2014/main" xmlns="" val="20000"/>
+                      <a16:colId xmlns="" xmlns:a16="http://schemas.microsoft.com/office/drawing/2014/main" val="20000"/>
                     </a:ext>
                   </a:extLst>
                 </a:gridCol>
@@ -8632,7 +8631,7 @@
                 </a:tc>
                 <a:extLst>
                   <a:ext uri="{0D108BD9-81ED-4DB2-BD59-A6C34878D82A}">
-                    <a16:rowId xmlns:a16="http://schemas.microsoft.com/office/drawing/2014/main" xmlns="" val="10001"/>
+                    <a16:rowId xmlns="" xmlns:a16="http://schemas.microsoft.com/office/drawing/2014/main" val="10001"/>
                   </a:ext>
                 </a:extLst>
               </a:tr>
@@ -8656,7 +8655,7 @@
                 </a:tc>
                 <a:extLst>
                   <a:ext uri="{0D108BD9-81ED-4DB2-BD59-A6C34878D82A}">
-                    <a16:rowId xmlns:a16="http://schemas.microsoft.com/office/drawing/2014/main" xmlns="" val="10002"/>
+                    <a16:rowId xmlns="" xmlns:a16="http://schemas.microsoft.com/office/drawing/2014/main" val="10002"/>
                   </a:ext>
                 </a:extLst>
               </a:tr>
@@ -8680,7 +8679,7 @@
                 </a:tc>
                 <a:extLst>
                   <a:ext uri="{0D108BD9-81ED-4DB2-BD59-A6C34878D82A}">
-                    <a16:rowId xmlns:a16="http://schemas.microsoft.com/office/drawing/2014/main" xmlns="" val="10003"/>
+                    <a16:rowId xmlns="" xmlns:a16="http://schemas.microsoft.com/office/drawing/2014/main" val="10003"/>
                   </a:ext>
                 </a:extLst>
               </a:tr>
@@ -8704,7 +8703,7 @@
                 </a:tc>
                 <a:extLst>
                   <a:ext uri="{0D108BD9-81ED-4DB2-BD59-A6C34878D82A}">
-                    <a16:rowId xmlns:a16="http://schemas.microsoft.com/office/drawing/2014/main" xmlns="" val="10004"/>
+                    <a16:rowId xmlns="" xmlns:a16="http://schemas.microsoft.com/office/drawing/2014/main" val="10004"/>
                   </a:ext>
                 </a:extLst>
               </a:tr>
@@ -8728,7 +8727,7 @@
                 </a:tc>
                 <a:extLst>
                   <a:ext uri="{0D108BD9-81ED-4DB2-BD59-A6C34878D82A}">
-                    <a16:rowId xmlns:a16="http://schemas.microsoft.com/office/drawing/2014/main" xmlns="" val="10005"/>
+                    <a16:rowId xmlns="" xmlns:a16="http://schemas.microsoft.com/office/drawing/2014/main" val="10005"/>
                   </a:ext>
                 </a:extLst>
               </a:tr>
@@ -8764,7 +8763,7 @@
                 <a:gridCol w="157415">
                   <a:extLst>
                     <a:ext uri="{9D8B030D-6E8A-4147-A177-3AD203B41FA5}">
-                      <a16:colId xmlns:a16="http://schemas.microsoft.com/office/drawing/2014/main" xmlns="" val="20000"/>
+                      <a16:colId xmlns="" xmlns:a16="http://schemas.microsoft.com/office/drawing/2014/main" val="20000"/>
                     </a:ext>
                   </a:extLst>
                 </a:gridCol>
@@ -8789,7 +8788,7 @@
                 </a:tc>
                 <a:extLst>
                   <a:ext uri="{0D108BD9-81ED-4DB2-BD59-A6C34878D82A}">
-                    <a16:rowId xmlns:a16="http://schemas.microsoft.com/office/drawing/2014/main" xmlns="" val="10001"/>
+                    <a16:rowId xmlns="" xmlns:a16="http://schemas.microsoft.com/office/drawing/2014/main" val="10001"/>
                   </a:ext>
                 </a:extLst>
               </a:tr>
@@ -8813,7 +8812,7 @@
                 </a:tc>
                 <a:extLst>
                   <a:ext uri="{0D108BD9-81ED-4DB2-BD59-A6C34878D82A}">
-                    <a16:rowId xmlns:a16="http://schemas.microsoft.com/office/drawing/2014/main" xmlns="" val="10002"/>
+                    <a16:rowId xmlns="" xmlns:a16="http://schemas.microsoft.com/office/drawing/2014/main" val="10002"/>
                   </a:ext>
                 </a:extLst>
               </a:tr>
@@ -8837,7 +8836,7 @@
                 </a:tc>
                 <a:extLst>
                   <a:ext uri="{0D108BD9-81ED-4DB2-BD59-A6C34878D82A}">
-                    <a16:rowId xmlns:a16="http://schemas.microsoft.com/office/drawing/2014/main" xmlns="" val="10003"/>
+                    <a16:rowId xmlns="" xmlns:a16="http://schemas.microsoft.com/office/drawing/2014/main" val="10003"/>
                   </a:ext>
                 </a:extLst>
               </a:tr>
@@ -8861,7 +8860,7 @@
                 </a:tc>
                 <a:extLst>
                   <a:ext uri="{0D108BD9-81ED-4DB2-BD59-A6C34878D82A}">
-                    <a16:rowId xmlns:a16="http://schemas.microsoft.com/office/drawing/2014/main" xmlns="" val="10004"/>
+                    <a16:rowId xmlns="" xmlns:a16="http://schemas.microsoft.com/office/drawing/2014/main" val="10004"/>
                   </a:ext>
                 </a:extLst>
               </a:tr>
@@ -8885,7 +8884,7 @@
                 </a:tc>
                 <a:extLst>
                   <a:ext uri="{0D108BD9-81ED-4DB2-BD59-A6C34878D82A}">
-                    <a16:rowId xmlns:a16="http://schemas.microsoft.com/office/drawing/2014/main" xmlns="" val="10005"/>
+                    <a16:rowId xmlns="" xmlns:a16="http://schemas.microsoft.com/office/drawing/2014/main" val="10005"/>
                   </a:ext>
                 </a:extLst>
               </a:tr>
@@ -16956,7 +16955,6 @@
               <a:rPr lang="en-US" altLang="ko-KR" sz="7200" b="1" dirty="0"/>
               <a:t> Fundamentals</a:t>
             </a:r>
-            <a:endParaRPr lang="en-US" altLang="ko-KR" sz="7200" b="1" dirty="0"/>
           </a:p>
         </p:txBody>
       </p:sp>
@@ -17303,7 +17301,7 @@
           <p:cNvPr id="5" name="그림 4">
             <a:extLst>
               <a:ext uri="{FF2B5EF4-FFF2-40B4-BE49-F238E27FC236}">
-                <a16:creationId xmlns="" xmlns:a16="http://schemas.microsoft.com/office/drawing/2014/main" id="{F25A3B3A-32C8-4401-A476-E8CCEB3258D5}"/>
+                <a16:creationId xmlns:a16="http://schemas.microsoft.com/office/drawing/2014/main" xmlns="" id="{F25A3B3A-32C8-4401-A476-E8CCEB3258D5}"/>
               </a:ext>
             </a:extLst>
           </p:cNvPr>
@@ -17346,7 +17344,7 @@
           <p:cNvPr id="6" name="Picture 4">
             <a:extLst>
               <a:ext uri="{FF2B5EF4-FFF2-40B4-BE49-F238E27FC236}">
-                <a16:creationId xmlns="" xmlns:a16="http://schemas.microsoft.com/office/drawing/2014/main" id="{051FB3A4-C7F9-45D0-A73B-557A6E1C4FDF}"/>
+                <a16:creationId xmlns:a16="http://schemas.microsoft.com/office/drawing/2014/main" xmlns="" id="{051FB3A4-C7F9-45D0-A73B-557A6E1C4FDF}"/>
               </a:ext>
             </a:extLst>
           </p:cNvPr>
@@ -22384,7 +22382,7 @@
             <p:cNvPr id="97" name="타원 96">
               <a:extLst>
                 <a:ext uri="{FF2B5EF4-FFF2-40B4-BE49-F238E27FC236}">
-                  <a16:creationId xmlns:a16="http://schemas.microsoft.com/office/drawing/2014/main" xmlns="" id="{2A6A11AC-31D1-C238-469B-B8065561C8B3}"/>
+                  <a16:creationId xmlns="" xmlns:a16="http://schemas.microsoft.com/office/drawing/2014/main" id="{2A6A11AC-31D1-C238-469B-B8065561C8B3}"/>
                 </a:ext>
               </a:extLst>
             </p:cNvPr>
@@ -22455,7 +22453,7 @@
             <p:cNvPr id="98" name="TextBox 97">
               <a:extLst>
                 <a:ext uri="{FF2B5EF4-FFF2-40B4-BE49-F238E27FC236}">
-                  <a16:creationId xmlns:a16="http://schemas.microsoft.com/office/drawing/2014/main" xmlns="" id="{370FDDD1-392F-C3F6-7926-8F5450602B51}"/>
+                  <a16:creationId xmlns="" xmlns:a16="http://schemas.microsoft.com/office/drawing/2014/main" id="{370FDDD1-392F-C3F6-7926-8F5450602B51}"/>
                 </a:ext>
               </a:extLst>
             </p:cNvPr>
@@ -22626,7 +22624,7 @@
             <p:cNvPr id="99" name="타원 98">
               <a:extLst>
                 <a:ext uri="{FF2B5EF4-FFF2-40B4-BE49-F238E27FC236}">
-                  <a16:creationId xmlns:a16="http://schemas.microsoft.com/office/drawing/2014/main" xmlns="" id="{8A596585-4EFC-7C6C-63D0-E577FBF1E255}"/>
+                  <a16:creationId xmlns="" xmlns:a16="http://schemas.microsoft.com/office/drawing/2014/main" id="{8A596585-4EFC-7C6C-63D0-E577FBF1E255}"/>
                 </a:ext>
               </a:extLst>
             </p:cNvPr>
@@ -22711,7 +22709,7 @@
             <p:cNvPr id="100" name="TextBox 99">
               <a:extLst>
                 <a:ext uri="{FF2B5EF4-FFF2-40B4-BE49-F238E27FC236}">
-                  <a16:creationId xmlns:a16="http://schemas.microsoft.com/office/drawing/2014/main" xmlns="" id="{A2DBD73D-1544-9997-4B5E-7BE89DA70BD5}"/>
+                  <a16:creationId xmlns="" xmlns:a16="http://schemas.microsoft.com/office/drawing/2014/main" id="{A2DBD73D-1544-9997-4B5E-7BE89DA70BD5}"/>
                 </a:ext>
               </a:extLst>
             </p:cNvPr>
@@ -22827,7 +22825,7 @@
             <p:cNvPr id="101" name="타원 100">
               <a:extLst>
                 <a:ext uri="{FF2B5EF4-FFF2-40B4-BE49-F238E27FC236}">
-                  <a16:creationId xmlns:a16="http://schemas.microsoft.com/office/drawing/2014/main" xmlns="" id="{D7536991-A61A-F58E-EC18-61A6F108717B}"/>
+                  <a16:creationId xmlns="" xmlns:a16="http://schemas.microsoft.com/office/drawing/2014/main" id="{D7536991-A61A-F58E-EC18-61A6F108717B}"/>
                 </a:ext>
               </a:extLst>
             </p:cNvPr>
@@ -22912,7 +22910,7 @@
             <p:cNvPr id="102" name="TextBox 101">
               <a:extLst>
                 <a:ext uri="{FF2B5EF4-FFF2-40B4-BE49-F238E27FC236}">
-                  <a16:creationId xmlns:a16="http://schemas.microsoft.com/office/drawing/2014/main" xmlns="" id="{688289CD-94AD-1B72-1500-6EAFBCF42BA0}"/>
+                  <a16:creationId xmlns="" xmlns:a16="http://schemas.microsoft.com/office/drawing/2014/main" id="{688289CD-94AD-1B72-1500-6EAFBCF42BA0}"/>
                 </a:ext>
               </a:extLst>
             </p:cNvPr>
@@ -23175,7 +23173,7 @@
             <p:cNvPr id="103" name="타원 102">
               <a:extLst>
                 <a:ext uri="{FF2B5EF4-FFF2-40B4-BE49-F238E27FC236}">
-                  <a16:creationId xmlns:a16="http://schemas.microsoft.com/office/drawing/2014/main" xmlns="" id="{F74DE22F-BE57-990F-10C7-5A28137FF97D}"/>
+                  <a16:creationId xmlns="" xmlns:a16="http://schemas.microsoft.com/office/drawing/2014/main" id="{F74DE22F-BE57-990F-10C7-5A28137FF97D}"/>
                 </a:ext>
               </a:extLst>
             </p:cNvPr>
@@ -23260,7 +23258,7 @@
             <p:cNvPr id="104" name="TextBox 103">
               <a:extLst>
                 <a:ext uri="{FF2B5EF4-FFF2-40B4-BE49-F238E27FC236}">
-                  <a16:creationId xmlns:a16="http://schemas.microsoft.com/office/drawing/2014/main" xmlns="" id="{2709A4DE-7D99-060B-4332-72EAE25DA559}"/>
+                  <a16:creationId xmlns="" xmlns:a16="http://schemas.microsoft.com/office/drawing/2014/main" id="{2709A4DE-7D99-060B-4332-72EAE25DA559}"/>
                 </a:ext>
               </a:extLst>
             </p:cNvPr>
@@ -24294,7 +24292,7 @@
           <p:cNvPr id="6" name="Picture 11" descr="Sandbox Software – In the Cloud | FortiSandbox Cloud">
             <a:extLst>
               <a:ext uri="{FF2B5EF4-FFF2-40B4-BE49-F238E27FC236}">
-                <a16:creationId xmlns="" xmlns:a16="http://schemas.microsoft.com/office/drawing/2014/main" id="{73BBF3D0-6B40-E280-BA30-1E77B5C4F45A}"/>
+                <a16:creationId xmlns:a16="http://schemas.microsoft.com/office/drawing/2014/main" xmlns="" id="{73BBF3D0-6B40-E280-BA30-1E77B5C4F45A}"/>
               </a:ext>
             </a:extLst>
           </p:cNvPr>
@@ -24357,7 +24355,7 @@
           <p:cNvPr id="7" name="Picture 8" descr="cost Icon - Free PNG &amp; SVG 930448 - Noun Project">
             <a:extLst>
               <a:ext uri="{FF2B5EF4-FFF2-40B4-BE49-F238E27FC236}">
-                <a16:creationId xmlns="" xmlns:a16="http://schemas.microsoft.com/office/drawing/2014/main" id="{B89FFE28-AD15-4FA1-FDD1-8DF6F4744923}"/>
+                <a16:creationId xmlns:a16="http://schemas.microsoft.com/office/drawing/2014/main" xmlns="" id="{B89FFE28-AD15-4FA1-FDD1-8DF6F4744923}"/>
               </a:ext>
             </a:extLst>
           </p:cNvPr>
@@ -24423,7 +24421,7 @@
           <p:cNvPr id="8" name="Picture 6" descr="Project Cargo Services | CFA">
             <a:extLst>
               <a:ext uri="{FF2B5EF4-FFF2-40B4-BE49-F238E27FC236}">
-                <a16:creationId xmlns="" xmlns:a16="http://schemas.microsoft.com/office/drawing/2014/main" id="{A9578F59-39A1-6B09-C1A4-24DA78C49B39}"/>
+                <a16:creationId xmlns:a16="http://schemas.microsoft.com/office/drawing/2014/main" xmlns="" id="{A9578F59-39A1-6B09-C1A4-24DA78C49B39}"/>
               </a:ext>
             </a:extLst>
           </p:cNvPr>
@@ -27529,7 +27527,6 @@
               <a:rPr lang="en-US" altLang="ko-KR" sz="7200" b="1" dirty="0"/>
               <a:t> Administration</a:t>
             </a:r>
-            <a:endParaRPr lang="en-US" altLang="ko-KR" sz="7200" b="1" dirty="0"/>
           </a:p>
         </p:txBody>
       </p:sp>
@@ -27631,63 +27628,6 @@
           </a:p>
         </p:txBody>
       </p:sp>
-      <p:sp>
-        <p:nvSpPr>
-          <p:cNvPr id="89" name="직사각형 88"/>
-          <p:cNvSpPr/>
-          <p:nvPr/>
-        </p:nvSpPr>
-        <p:spPr>
-          <a:xfrm>
-            <a:off x="301171" y="422730"/>
-            <a:ext cx="9312729" cy="878532"/>
-          </a:xfrm>
-          <a:prstGeom prst="rect">
-            <a:avLst/>
-          </a:prstGeom>
-          <a:noFill/>
-          <a:ln>
-            <a:noFill/>
-          </a:ln>
-        </p:spPr>
-        <p:style>
-          <a:lnRef idx="2">
-            <a:schemeClr val="accent1">
-              <a:shade val="50000"/>
-            </a:schemeClr>
-          </a:lnRef>
-          <a:fillRef idx="1">
-            <a:schemeClr val="accent1"/>
-          </a:fillRef>
-          <a:effectRef idx="0">
-            <a:schemeClr val="accent1"/>
-          </a:effectRef>
-          <a:fontRef idx="minor">
-            <a:schemeClr val="lt1"/>
-          </a:fontRef>
-        </p:style>
-        <p:txBody>
-          <a:bodyPr rtlCol="0" anchor="ctr"/>
-          <a:lstStyle/>
-          <a:p>
-            <a:r>
-              <a:rPr lang="en-US" altLang="ko-KR" sz="1400" dirty="0" smtClean="0">
-                <a:solidFill>
-                  <a:schemeClr val="tx1"/>
-                </a:solidFill>
-                <a:latin typeface="+mn-ea"/>
-              </a:rPr>
-              <a:t>xxx</a:t>
-            </a:r>
-            <a:endParaRPr lang="en-US" altLang="ko-KR" sz="1400" dirty="0">
-              <a:solidFill>
-                <a:schemeClr val="tx1"/>
-              </a:solidFill>
-              <a:latin typeface="+mn-ea"/>
-            </a:endParaRPr>
-          </a:p>
-        </p:txBody>
-      </p:sp>
       <p:cxnSp>
         <p:nvCxnSpPr>
           <p:cNvPr id="90" name="직선 연결선 89"/>
@@ -27723,6 +27663,3895 @@
           </a:fontRef>
         </p:style>
       </p:cxnSp>
+      <p:sp>
+        <p:nvSpPr>
+          <p:cNvPr id="5" name="Content Placeholder 4"/>
+          <p:cNvSpPr txBox="1">
+            <a:spLocks/>
+          </p:cNvSpPr>
+          <p:nvPr/>
+        </p:nvSpPr>
+        <p:spPr>
+          <a:xfrm>
+            <a:off x="110441" y="674079"/>
+            <a:ext cx="4496728" cy="3968259"/>
+          </a:xfrm>
+          <a:prstGeom prst="rect">
+            <a:avLst/>
+          </a:prstGeom>
+        </p:spPr>
+        <p:txBody>
+          <a:bodyPr/>
+          <a:lstStyle>
+            <a:lvl1pPr marL="228600" indent="-228600" algn="l" defTabSz="914400" rtl="0" eaLnBrk="1" latinLnBrk="0" hangingPunct="1">
+              <a:lnSpc>
+                <a:spcPct val="90000"/>
+              </a:lnSpc>
+              <a:spcBef>
+                <a:spcPts val="0"/>
+              </a:spcBef>
+              <a:spcAft>
+                <a:spcPts val="1200"/>
+              </a:spcAft>
+              <a:buFont typeface="Wingdings" panose="05000000000000000000" pitchFamily="2" charset="2"/>
+              <a:buChar char="§"/>
+              <a:defRPr sz="2200" kern="1200">
+                <a:solidFill>
+                  <a:schemeClr val="tx1"/>
+                </a:solidFill>
+                <a:latin typeface="+mn-lt"/>
+                <a:ea typeface="+mn-ea"/>
+                <a:cs typeface="+mn-cs"/>
+              </a:defRPr>
+            </a:lvl1pPr>
+            <a:lvl2pPr marL="400050" indent="-171450" algn="l" defTabSz="914400" rtl="0" eaLnBrk="1" latinLnBrk="0" hangingPunct="1">
+              <a:lnSpc>
+                <a:spcPct val="90000"/>
+              </a:lnSpc>
+              <a:spcBef>
+                <a:spcPts val="0"/>
+              </a:spcBef>
+              <a:spcAft>
+                <a:spcPts val="1200"/>
+              </a:spcAft>
+              <a:buFont typeface="Calibri" panose="020F0502020204030204" pitchFamily="34" charset="0"/>
+              <a:buChar char="-"/>
+              <a:defRPr sz="2000" kern="1200">
+                <a:solidFill>
+                  <a:schemeClr val="tx1"/>
+                </a:solidFill>
+                <a:latin typeface="+mn-lt"/>
+                <a:ea typeface="+mn-ea"/>
+                <a:cs typeface="+mn-cs"/>
+              </a:defRPr>
+            </a:lvl2pPr>
+            <a:lvl3pPr marL="571500" indent="-171450" algn="l" defTabSz="914400" rtl="0" eaLnBrk="1" latinLnBrk="0" hangingPunct="1">
+              <a:lnSpc>
+                <a:spcPct val="90000"/>
+              </a:lnSpc>
+              <a:spcBef>
+                <a:spcPts val="0"/>
+              </a:spcBef>
+              <a:spcAft>
+                <a:spcPts val="1200"/>
+              </a:spcAft>
+              <a:buFont typeface="Calibri" panose="020F0502020204030204" pitchFamily="34" charset="0"/>
+              <a:buChar char="-"/>
+              <a:defRPr sz="1800" kern="1200">
+                <a:solidFill>
+                  <a:schemeClr val="tx1"/>
+                </a:solidFill>
+                <a:latin typeface="+mn-lt"/>
+                <a:ea typeface="+mn-ea"/>
+                <a:cs typeface="+mn-cs"/>
+              </a:defRPr>
+            </a:lvl3pPr>
+            <a:lvl4pPr marL="742950" indent="-171450" algn="l" defTabSz="914400" rtl="0" eaLnBrk="1" latinLnBrk="0" hangingPunct="1">
+              <a:lnSpc>
+                <a:spcPct val="90000"/>
+              </a:lnSpc>
+              <a:spcBef>
+                <a:spcPts val="0"/>
+              </a:spcBef>
+              <a:spcAft>
+                <a:spcPts val="1200"/>
+              </a:spcAft>
+              <a:buFont typeface="Arial" panose="020B0604020202020204" pitchFamily="34" charset="0"/>
+              <a:buChar char="•"/>
+              <a:defRPr sz="1600" kern="1200">
+                <a:solidFill>
+                  <a:schemeClr val="tx1"/>
+                </a:solidFill>
+                <a:latin typeface="+mn-lt"/>
+                <a:ea typeface="+mn-ea"/>
+                <a:cs typeface="+mn-cs"/>
+              </a:defRPr>
+            </a:lvl4pPr>
+            <a:lvl5pPr marL="914400" indent="-171450" algn="l" defTabSz="914400" rtl="0" eaLnBrk="1" latinLnBrk="0" hangingPunct="1">
+              <a:lnSpc>
+                <a:spcPct val="90000"/>
+              </a:lnSpc>
+              <a:spcBef>
+                <a:spcPts val="0"/>
+              </a:spcBef>
+              <a:spcAft>
+                <a:spcPts val="1200"/>
+              </a:spcAft>
+              <a:buFont typeface="Arial" panose="020B0604020202020204" pitchFamily="34" charset="0"/>
+              <a:buChar char="•"/>
+              <a:defRPr sz="1400" kern="1200">
+                <a:solidFill>
+                  <a:schemeClr val="tx1"/>
+                </a:solidFill>
+                <a:latin typeface="+mn-lt"/>
+                <a:ea typeface="+mn-ea"/>
+                <a:cs typeface="+mn-cs"/>
+              </a:defRPr>
+            </a:lvl5pPr>
+            <a:lvl6pPr marL="2514600" indent="-228600" algn="l" defTabSz="914400" rtl="0" eaLnBrk="1" latinLnBrk="0" hangingPunct="1">
+              <a:lnSpc>
+                <a:spcPct val="90000"/>
+              </a:lnSpc>
+              <a:spcBef>
+                <a:spcPts val="500"/>
+              </a:spcBef>
+              <a:buFont typeface="Arial" panose="020B0604020202020204" pitchFamily="34" charset="0"/>
+              <a:buChar char="•"/>
+              <a:defRPr sz="1800" kern="1200">
+                <a:solidFill>
+                  <a:schemeClr val="tx1"/>
+                </a:solidFill>
+                <a:latin typeface="+mn-lt"/>
+                <a:ea typeface="+mn-ea"/>
+                <a:cs typeface="+mn-cs"/>
+              </a:defRPr>
+            </a:lvl6pPr>
+            <a:lvl7pPr marL="2971800" indent="-228600" algn="l" defTabSz="914400" rtl="0" eaLnBrk="1" latinLnBrk="0" hangingPunct="1">
+              <a:lnSpc>
+                <a:spcPct val="90000"/>
+              </a:lnSpc>
+              <a:spcBef>
+                <a:spcPts val="500"/>
+              </a:spcBef>
+              <a:buFont typeface="Arial" panose="020B0604020202020204" pitchFamily="34" charset="0"/>
+              <a:buChar char="•"/>
+              <a:defRPr sz="1800" kern="1200">
+                <a:solidFill>
+                  <a:schemeClr val="tx1"/>
+                </a:solidFill>
+                <a:latin typeface="+mn-lt"/>
+                <a:ea typeface="+mn-ea"/>
+                <a:cs typeface="+mn-cs"/>
+              </a:defRPr>
+            </a:lvl7pPr>
+            <a:lvl8pPr marL="3429000" indent="-228600" algn="l" defTabSz="914400" rtl="0" eaLnBrk="1" latinLnBrk="0" hangingPunct="1">
+              <a:lnSpc>
+                <a:spcPct val="90000"/>
+              </a:lnSpc>
+              <a:spcBef>
+                <a:spcPts val="500"/>
+              </a:spcBef>
+              <a:buFont typeface="Arial" panose="020B0604020202020204" pitchFamily="34" charset="0"/>
+              <a:buChar char="•"/>
+              <a:defRPr sz="1800" kern="1200">
+                <a:solidFill>
+                  <a:schemeClr val="tx1"/>
+                </a:solidFill>
+                <a:latin typeface="+mn-lt"/>
+                <a:ea typeface="+mn-ea"/>
+                <a:cs typeface="+mn-cs"/>
+              </a:defRPr>
+            </a:lvl8pPr>
+            <a:lvl9pPr marL="3886200" indent="-228600" algn="l" defTabSz="914400" rtl="0" eaLnBrk="1" latinLnBrk="0" hangingPunct="1">
+              <a:lnSpc>
+                <a:spcPct val="90000"/>
+              </a:lnSpc>
+              <a:spcBef>
+                <a:spcPts val="500"/>
+              </a:spcBef>
+              <a:buFont typeface="Arial" panose="020B0604020202020204" pitchFamily="34" charset="0"/>
+              <a:buChar char="•"/>
+              <a:defRPr sz="1800" kern="1200">
+                <a:solidFill>
+                  <a:schemeClr val="tx1"/>
+                </a:solidFill>
+                <a:latin typeface="+mn-lt"/>
+                <a:ea typeface="+mn-ea"/>
+                <a:cs typeface="+mn-cs"/>
+              </a:defRPr>
+            </a:lvl9pPr>
+          </a:lstStyle>
+          <a:p>
+            <a:pPr marL="0" indent="0">
+              <a:lnSpc>
+                <a:spcPct val="100000"/>
+              </a:lnSpc>
+              <a:spcAft>
+                <a:spcPts val="0"/>
+              </a:spcAft>
+              <a:buNone/>
+            </a:pPr>
+            <a:r>
+              <a:rPr lang="en-US" altLang="ko-KR" sz="1100" b="1" dirty="0" smtClean="0"/>
+              <a:t>Table</a:t>
+            </a:r>
+          </a:p>
+          <a:p>
+            <a:pPr lvl="1">
+              <a:lnSpc>
+                <a:spcPct val="100000"/>
+              </a:lnSpc>
+              <a:spcAft>
+                <a:spcPts val="0"/>
+              </a:spcAft>
+              <a:buFont typeface="Arial" pitchFamily="34" charset="0"/>
+              <a:buChar char="•"/>
+            </a:pPr>
+            <a:r>
+              <a:rPr lang="ko-KR" altLang="en-US" sz="1100" dirty="0" smtClean="0"/>
+              <a:t>데이터 논리 모델링의 오브젝트</a:t>
+            </a:r>
+            <a:endParaRPr lang="en-US" altLang="ko-KR" sz="1100" dirty="0" smtClean="0"/>
+          </a:p>
+          <a:p>
+            <a:pPr lvl="1">
+              <a:lnSpc>
+                <a:spcPct val="100000"/>
+              </a:lnSpc>
+              <a:spcAft>
+                <a:spcPts val="0"/>
+              </a:spcAft>
+              <a:buFont typeface="Arial" pitchFamily="34" charset="0"/>
+              <a:buChar char="•"/>
+            </a:pPr>
+            <a:r>
+              <a:rPr lang="ko-KR" altLang="en-US" sz="1100" dirty="0" smtClean="0"/>
+              <a:t>대부분의 </a:t>
+            </a:r>
+            <a:r>
+              <a:rPr lang="ko-KR" altLang="en-US" sz="1100" dirty="0"/>
+              <a:t>상용 </a:t>
+            </a:r>
+            <a:r>
+              <a:rPr lang="en-US" altLang="ko-KR" sz="1100" dirty="0"/>
+              <a:t>DB</a:t>
+            </a:r>
+            <a:r>
+              <a:rPr lang="ko-KR" altLang="en-US" sz="1100" dirty="0"/>
+              <a:t>의 데이터 타입과 호환</a:t>
+            </a:r>
+            <a:endParaRPr lang="en-US" altLang="ko-KR" sz="1100" dirty="0"/>
+          </a:p>
+          <a:p>
+            <a:pPr lvl="1">
+              <a:lnSpc>
+                <a:spcPct val="100000"/>
+              </a:lnSpc>
+              <a:spcAft>
+                <a:spcPts val="0"/>
+              </a:spcAft>
+              <a:buFont typeface="Arial" pitchFamily="34" charset="0"/>
+              <a:buChar char="•"/>
+            </a:pPr>
+            <a:r>
+              <a:rPr lang="ko-KR" altLang="en-US" sz="1100" dirty="0"/>
+              <a:t>데이터 타입</a:t>
+            </a:r>
+            <a:endParaRPr lang="en-US" altLang="ko-KR" sz="1100" dirty="0"/>
+          </a:p>
+          <a:p>
+            <a:pPr lvl="2">
+              <a:lnSpc>
+                <a:spcPct val="100000"/>
+              </a:lnSpc>
+              <a:spcAft>
+                <a:spcPts val="0"/>
+              </a:spcAft>
+              <a:buFont typeface="Arial" pitchFamily="34" charset="0"/>
+              <a:buChar char="•"/>
+            </a:pPr>
+            <a:r>
+              <a:rPr lang="en-US" altLang="ko-KR" sz="1100" dirty="0"/>
+              <a:t>Character Type</a:t>
+            </a:r>
+          </a:p>
+          <a:p>
+            <a:pPr lvl="3">
+              <a:lnSpc>
+                <a:spcPct val="100000"/>
+              </a:lnSpc>
+              <a:spcAft>
+                <a:spcPts val="0"/>
+              </a:spcAft>
+            </a:pPr>
+            <a:r>
+              <a:rPr lang="en-US" altLang="ko-KR" sz="1100" dirty="0"/>
+              <a:t>CHAR : 1-65,000</a:t>
+            </a:r>
+          </a:p>
+          <a:p>
+            <a:pPr lvl="3">
+              <a:lnSpc>
+                <a:spcPct val="100000"/>
+              </a:lnSpc>
+              <a:spcAft>
+                <a:spcPts val="0"/>
+              </a:spcAft>
+            </a:pPr>
+            <a:r>
+              <a:rPr lang="en-US" altLang="ko-KR" sz="1100" dirty="0"/>
+              <a:t>VARCHAR : 1-65,000</a:t>
+            </a:r>
+          </a:p>
+          <a:p>
+            <a:pPr lvl="3">
+              <a:lnSpc>
+                <a:spcPct val="100000"/>
+              </a:lnSpc>
+              <a:spcAft>
+                <a:spcPts val="0"/>
+              </a:spcAft>
+            </a:pPr>
+            <a:r>
+              <a:rPr lang="en-US" altLang="ko-KR" sz="1100" dirty="0"/>
+              <a:t>LONG VARCHAR : 1-32,000,000 </a:t>
+            </a:r>
+          </a:p>
+          <a:p>
+            <a:pPr lvl="2">
+              <a:lnSpc>
+                <a:spcPct val="100000"/>
+              </a:lnSpc>
+              <a:spcAft>
+                <a:spcPts val="0"/>
+              </a:spcAft>
+              <a:buFont typeface="Arial" pitchFamily="34" charset="0"/>
+              <a:buChar char="•"/>
+            </a:pPr>
+            <a:r>
+              <a:rPr lang="en-US" altLang="ko-KR" sz="1100" dirty="0"/>
+              <a:t>Date/Time Type</a:t>
+            </a:r>
+          </a:p>
+          <a:p>
+            <a:pPr lvl="3">
+              <a:lnSpc>
+                <a:spcPct val="100000"/>
+              </a:lnSpc>
+              <a:spcAft>
+                <a:spcPts val="0"/>
+              </a:spcAft>
+            </a:pPr>
+            <a:r>
+              <a:rPr lang="en-US" altLang="ko-KR" sz="1100" dirty="0"/>
+              <a:t>DATE </a:t>
+            </a:r>
+          </a:p>
+          <a:p>
+            <a:pPr lvl="3">
+              <a:lnSpc>
+                <a:spcPct val="100000"/>
+              </a:lnSpc>
+              <a:spcAft>
+                <a:spcPts val="0"/>
+              </a:spcAft>
+            </a:pPr>
+            <a:r>
+              <a:rPr lang="en-US" altLang="ko-KR" sz="1100" dirty="0"/>
+              <a:t>DATETIME = TIMESTAMP</a:t>
+            </a:r>
+          </a:p>
+          <a:p>
+            <a:pPr lvl="3">
+              <a:lnSpc>
+                <a:spcPct val="100000"/>
+              </a:lnSpc>
+              <a:spcAft>
+                <a:spcPts val="0"/>
+              </a:spcAft>
+            </a:pPr>
+            <a:r>
+              <a:rPr lang="en-US" altLang="ko-KR" sz="1100" dirty="0"/>
+              <a:t>INTERVAL</a:t>
+            </a:r>
+          </a:p>
+          <a:p>
+            <a:pPr lvl="2">
+              <a:lnSpc>
+                <a:spcPct val="100000"/>
+              </a:lnSpc>
+              <a:spcAft>
+                <a:spcPts val="0"/>
+              </a:spcAft>
+              <a:buFont typeface="Arial" pitchFamily="34" charset="0"/>
+              <a:buChar char="•"/>
+            </a:pPr>
+            <a:r>
+              <a:rPr lang="en-US" altLang="ko-KR" sz="1100" dirty="0"/>
+              <a:t>Approximate numeric types  </a:t>
+            </a:r>
+          </a:p>
+          <a:p>
+            <a:pPr lvl="3">
+              <a:lnSpc>
+                <a:spcPct val="100000"/>
+              </a:lnSpc>
+              <a:spcAft>
+                <a:spcPts val="0"/>
+              </a:spcAft>
+            </a:pPr>
+            <a:r>
+              <a:rPr lang="en-US" altLang="ko-KR" sz="1100" dirty="0"/>
+              <a:t>Signed 64-bit IEEE floating point number</a:t>
+            </a:r>
+          </a:p>
+          <a:p>
+            <a:pPr lvl="3">
+              <a:lnSpc>
+                <a:spcPct val="100000"/>
+              </a:lnSpc>
+              <a:spcAft>
+                <a:spcPts val="0"/>
+              </a:spcAft>
+            </a:pPr>
+            <a:r>
+              <a:rPr lang="en-US" altLang="ko-KR" sz="1100" dirty="0"/>
+              <a:t>DOUBLE PRECISION</a:t>
+            </a:r>
+          </a:p>
+          <a:p>
+            <a:pPr lvl="3">
+              <a:lnSpc>
+                <a:spcPct val="100000"/>
+              </a:lnSpc>
+              <a:spcAft>
+                <a:spcPts val="0"/>
+              </a:spcAft>
+            </a:pPr>
+            <a:r>
+              <a:rPr lang="en-US" altLang="ko-KR" sz="1100" dirty="0"/>
+              <a:t>FLOAT / FLOAT(n) / FLOAT8 / REAL</a:t>
+            </a:r>
+          </a:p>
+          <a:p>
+            <a:pPr lvl="2">
+              <a:lnSpc>
+                <a:spcPct val="100000"/>
+              </a:lnSpc>
+              <a:spcAft>
+                <a:spcPts val="0"/>
+              </a:spcAft>
+              <a:buFont typeface="Arial" pitchFamily="34" charset="0"/>
+              <a:buChar char="•"/>
+            </a:pPr>
+            <a:r>
+              <a:rPr lang="en-US" altLang="ko-KR" sz="1100" dirty="0"/>
+              <a:t>Exact numeric types  </a:t>
+            </a:r>
+          </a:p>
+          <a:p>
+            <a:pPr lvl="3">
+              <a:lnSpc>
+                <a:spcPct val="100000"/>
+              </a:lnSpc>
+              <a:spcAft>
+                <a:spcPts val="0"/>
+              </a:spcAft>
+            </a:pPr>
+            <a:r>
+              <a:rPr lang="en-US" altLang="ko-KR" sz="1100" dirty="0"/>
+              <a:t>INT / INTEGER / BIGINT / INT8 / SMALLINT / TINYINT</a:t>
+            </a:r>
+          </a:p>
+          <a:p>
+            <a:pPr lvl="3">
+              <a:lnSpc>
+                <a:spcPct val="100000"/>
+              </a:lnSpc>
+              <a:spcAft>
+                <a:spcPts val="0"/>
+              </a:spcAft>
+            </a:pPr>
+            <a:r>
+              <a:rPr lang="en-US" altLang="ko-KR" sz="1100" dirty="0"/>
+              <a:t>DECIMAL / NUMERIC / NUMBER</a:t>
+            </a:r>
+          </a:p>
+          <a:p>
+            <a:pPr lvl="1">
+              <a:lnSpc>
+                <a:spcPct val="100000"/>
+              </a:lnSpc>
+              <a:spcAft>
+                <a:spcPts val="0"/>
+              </a:spcAft>
+              <a:buFont typeface="Arial" pitchFamily="34" charset="0"/>
+              <a:buChar char="•"/>
+            </a:pPr>
+            <a:r>
+              <a:rPr lang="ko-KR" altLang="en-US" sz="1100" dirty="0"/>
+              <a:t>테이블 정의에 특별한 옵션이 필요하지 않고</a:t>
+            </a:r>
+            <a:r>
+              <a:rPr lang="en-US" altLang="ko-KR" sz="1100" dirty="0"/>
+              <a:t>, </a:t>
+            </a:r>
+            <a:r>
+              <a:rPr lang="ko-KR" altLang="en-US" sz="1100" dirty="0"/>
+              <a:t>대부분 </a:t>
+            </a:r>
+            <a:r>
+              <a:rPr lang="ko-KR" altLang="en-US" sz="1100" dirty="0" err="1"/>
+              <a:t>프로젝션</a:t>
+            </a:r>
+            <a:r>
+              <a:rPr lang="ko-KR" altLang="en-US" sz="1100" dirty="0"/>
+              <a:t> 생성 단계에서 정의하고 테이블 생성 단계에서 필요한 부가적인 옵션은 파티션 구문 정도</a:t>
+            </a:r>
+            <a:endParaRPr lang="en-US" altLang="ko-KR" sz="1100" dirty="0"/>
+          </a:p>
+          <a:p>
+            <a:pPr>
+              <a:lnSpc>
+                <a:spcPct val="100000"/>
+              </a:lnSpc>
+              <a:spcAft>
+                <a:spcPts val="0"/>
+              </a:spcAft>
+            </a:pPr>
+            <a:endParaRPr lang="ko-KR" altLang="en-US" sz="1100" dirty="0"/>
+          </a:p>
+        </p:txBody>
+      </p:sp>
+      <p:sp>
+        <p:nvSpPr>
+          <p:cNvPr id="8" name="Content Placeholder 3"/>
+          <p:cNvSpPr txBox="1">
+            <a:spLocks/>
+          </p:cNvSpPr>
+          <p:nvPr/>
+        </p:nvSpPr>
+        <p:spPr>
+          <a:xfrm>
+            <a:off x="4630614" y="674078"/>
+            <a:ext cx="4810077" cy="3921368"/>
+          </a:xfrm>
+          <a:prstGeom prst="rect">
+            <a:avLst/>
+          </a:prstGeom>
+        </p:spPr>
+        <p:txBody>
+          <a:bodyPr vert="horz" lIns="91440" tIns="45720" rIns="91440" bIns="45720" rtlCol="0">
+            <a:noAutofit/>
+          </a:bodyPr>
+          <a:lstStyle>
+            <a:lvl1pPr marL="228600" indent="-228600" algn="l" defTabSz="914400" rtl="0" eaLnBrk="1" latinLnBrk="0" hangingPunct="1">
+              <a:lnSpc>
+                <a:spcPct val="90000"/>
+              </a:lnSpc>
+              <a:spcBef>
+                <a:spcPts val="0"/>
+              </a:spcBef>
+              <a:spcAft>
+                <a:spcPts val="1200"/>
+              </a:spcAft>
+              <a:buFont typeface="Wingdings" panose="05000000000000000000" pitchFamily="2" charset="2"/>
+              <a:buChar char="§"/>
+              <a:defRPr sz="2200" kern="1200">
+                <a:solidFill>
+                  <a:schemeClr val="tx1"/>
+                </a:solidFill>
+                <a:latin typeface="+mn-lt"/>
+                <a:ea typeface="+mn-ea"/>
+                <a:cs typeface="+mn-cs"/>
+              </a:defRPr>
+            </a:lvl1pPr>
+            <a:lvl2pPr marL="400050" indent="-171450" algn="l" defTabSz="914400" rtl="0" eaLnBrk="1" latinLnBrk="0" hangingPunct="1">
+              <a:lnSpc>
+                <a:spcPct val="90000"/>
+              </a:lnSpc>
+              <a:spcBef>
+                <a:spcPts val="0"/>
+              </a:spcBef>
+              <a:spcAft>
+                <a:spcPts val="1200"/>
+              </a:spcAft>
+              <a:buFont typeface="Calibri" panose="020F0502020204030204" pitchFamily="34" charset="0"/>
+              <a:buChar char="-"/>
+              <a:defRPr sz="2000" kern="1200">
+                <a:solidFill>
+                  <a:schemeClr val="tx1"/>
+                </a:solidFill>
+                <a:latin typeface="+mn-lt"/>
+                <a:ea typeface="+mn-ea"/>
+                <a:cs typeface="+mn-cs"/>
+              </a:defRPr>
+            </a:lvl2pPr>
+            <a:lvl3pPr marL="571500" indent="-171450" algn="l" defTabSz="914400" rtl="0" eaLnBrk="1" latinLnBrk="0" hangingPunct="1">
+              <a:lnSpc>
+                <a:spcPct val="90000"/>
+              </a:lnSpc>
+              <a:spcBef>
+                <a:spcPts val="0"/>
+              </a:spcBef>
+              <a:spcAft>
+                <a:spcPts val="1200"/>
+              </a:spcAft>
+              <a:buFont typeface="Calibri" panose="020F0502020204030204" pitchFamily="34" charset="0"/>
+              <a:buChar char="-"/>
+              <a:defRPr sz="1800" kern="1200">
+                <a:solidFill>
+                  <a:schemeClr val="tx1"/>
+                </a:solidFill>
+                <a:latin typeface="+mn-lt"/>
+                <a:ea typeface="+mn-ea"/>
+                <a:cs typeface="+mn-cs"/>
+              </a:defRPr>
+            </a:lvl3pPr>
+            <a:lvl4pPr marL="742950" indent="-171450" algn="l" defTabSz="914400" rtl="0" eaLnBrk="1" latinLnBrk="0" hangingPunct="1">
+              <a:lnSpc>
+                <a:spcPct val="90000"/>
+              </a:lnSpc>
+              <a:spcBef>
+                <a:spcPts val="0"/>
+              </a:spcBef>
+              <a:spcAft>
+                <a:spcPts val="1200"/>
+              </a:spcAft>
+              <a:buFont typeface="Arial" panose="020B0604020202020204" pitchFamily="34" charset="0"/>
+              <a:buChar char="•"/>
+              <a:defRPr sz="1600" kern="1200">
+                <a:solidFill>
+                  <a:schemeClr val="tx1"/>
+                </a:solidFill>
+                <a:latin typeface="+mn-lt"/>
+                <a:ea typeface="+mn-ea"/>
+                <a:cs typeface="+mn-cs"/>
+              </a:defRPr>
+            </a:lvl4pPr>
+            <a:lvl5pPr marL="914400" indent="-171450" algn="l" defTabSz="914400" rtl="0" eaLnBrk="1" latinLnBrk="0" hangingPunct="1">
+              <a:lnSpc>
+                <a:spcPct val="90000"/>
+              </a:lnSpc>
+              <a:spcBef>
+                <a:spcPts val="0"/>
+              </a:spcBef>
+              <a:spcAft>
+                <a:spcPts val="1200"/>
+              </a:spcAft>
+              <a:buFont typeface="Arial" panose="020B0604020202020204" pitchFamily="34" charset="0"/>
+              <a:buChar char="•"/>
+              <a:defRPr sz="1400" kern="1200">
+                <a:solidFill>
+                  <a:schemeClr val="tx1"/>
+                </a:solidFill>
+                <a:latin typeface="+mn-lt"/>
+                <a:ea typeface="+mn-ea"/>
+                <a:cs typeface="+mn-cs"/>
+              </a:defRPr>
+            </a:lvl5pPr>
+            <a:lvl6pPr marL="2514600" indent="-228600" algn="l" defTabSz="914400" rtl="0" eaLnBrk="1" latinLnBrk="0" hangingPunct="1">
+              <a:lnSpc>
+                <a:spcPct val="90000"/>
+              </a:lnSpc>
+              <a:spcBef>
+                <a:spcPts val="500"/>
+              </a:spcBef>
+              <a:buFont typeface="Arial" panose="020B0604020202020204" pitchFamily="34" charset="0"/>
+              <a:buChar char="•"/>
+              <a:defRPr sz="1800" kern="1200">
+                <a:solidFill>
+                  <a:schemeClr val="tx1"/>
+                </a:solidFill>
+                <a:latin typeface="+mn-lt"/>
+                <a:ea typeface="+mn-ea"/>
+                <a:cs typeface="+mn-cs"/>
+              </a:defRPr>
+            </a:lvl6pPr>
+            <a:lvl7pPr marL="2971800" indent="-228600" algn="l" defTabSz="914400" rtl="0" eaLnBrk="1" latinLnBrk="0" hangingPunct="1">
+              <a:lnSpc>
+                <a:spcPct val="90000"/>
+              </a:lnSpc>
+              <a:spcBef>
+                <a:spcPts val="500"/>
+              </a:spcBef>
+              <a:buFont typeface="Arial" panose="020B0604020202020204" pitchFamily="34" charset="0"/>
+              <a:buChar char="•"/>
+              <a:defRPr sz="1800" kern="1200">
+                <a:solidFill>
+                  <a:schemeClr val="tx1"/>
+                </a:solidFill>
+                <a:latin typeface="+mn-lt"/>
+                <a:ea typeface="+mn-ea"/>
+                <a:cs typeface="+mn-cs"/>
+              </a:defRPr>
+            </a:lvl7pPr>
+            <a:lvl8pPr marL="3429000" indent="-228600" algn="l" defTabSz="914400" rtl="0" eaLnBrk="1" latinLnBrk="0" hangingPunct="1">
+              <a:lnSpc>
+                <a:spcPct val="90000"/>
+              </a:lnSpc>
+              <a:spcBef>
+                <a:spcPts val="500"/>
+              </a:spcBef>
+              <a:buFont typeface="Arial" panose="020B0604020202020204" pitchFamily="34" charset="0"/>
+              <a:buChar char="•"/>
+              <a:defRPr sz="1800" kern="1200">
+                <a:solidFill>
+                  <a:schemeClr val="tx1"/>
+                </a:solidFill>
+                <a:latin typeface="+mn-lt"/>
+                <a:ea typeface="+mn-ea"/>
+                <a:cs typeface="+mn-cs"/>
+              </a:defRPr>
+            </a:lvl8pPr>
+            <a:lvl9pPr marL="3886200" indent="-228600" algn="l" defTabSz="914400" rtl="0" eaLnBrk="1" latinLnBrk="0" hangingPunct="1">
+              <a:lnSpc>
+                <a:spcPct val="90000"/>
+              </a:lnSpc>
+              <a:spcBef>
+                <a:spcPts val="500"/>
+              </a:spcBef>
+              <a:buFont typeface="Arial" panose="020B0604020202020204" pitchFamily="34" charset="0"/>
+              <a:buChar char="•"/>
+              <a:defRPr sz="1800" kern="1200">
+                <a:solidFill>
+                  <a:schemeClr val="tx1"/>
+                </a:solidFill>
+                <a:latin typeface="+mn-lt"/>
+                <a:ea typeface="+mn-ea"/>
+                <a:cs typeface="+mn-cs"/>
+              </a:defRPr>
+            </a:lvl9pPr>
+          </a:lstStyle>
+          <a:p>
+            <a:pPr marL="0" marR="0" lvl="0" indent="0" algn="l" defTabSz="914400" rtl="0" eaLnBrk="1" fontAlgn="auto" latinLnBrk="0" hangingPunct="1">
+              <a:lnSpc>
+                <a:spcPct val="100000"/>
+              </a:lnSpc>
+              <a:spcBef>
+                <a:spcPts val="0"/>
+              </a:spcBef>
+              <a:spcAft>
+                <a:spcPts val="0"/>
+              </a:spcAft>
+              <a:buClrTx/>
+              <a:buSzTx/>
+              <a:buFont typeface="Wingdings" panose="05000000000000000000" pitchFamily="2" charset="2"/>
+              <a:buNone/>
+              <a:tabLst/>
+              <a:defRPr/>
+            </a:pPr>
+            <a:r>
+              <a:rPr kumimoji="0" lang="en-US" altLang="ko-KR" sz="1100" b="1" i="0" u="none" strike="noStrike" kern="1200" cap="none" spc="0" normalizeH="0" baseline="0" noProof="0" dirty="0" smtClean="0">
+                <a:ln>
+                  <a:noFill/>
+                </a:ln>
+                <a:solidFill>
+                  <a:srgbClr val="212E35"/>
+                </a:solidFill>
+                <a:effectLst/>
+                <a:uLnTx/>
+                <a:uFillTx/>
+                <a:latin typeface="Calibri"/>
+                <a:ea typeface="맑은 고딕" panose="020B0503020000020004" pitchFamily="50" charset="-127"/>
+              </a:rPr>
+              <a:t>Projection</a:t>
+            </a:r>
+          </a:p>
+          <a:p>
+            <a:pPr marL="400050" marR="0" lvl="1" indent="-171450" algn="l" defTabSz="914400" rtl="0" eaLnBrk="1" fontAlgn="auto" latinLnBrk="0" hangingPunct="1">
+              <a:lnSpc>
+                <a:spcPct val="100000"/>
+              </a:lnSpc>
+              <a:spcBef>
+                <a:spcPts val="0"/>
+              </a:spcBef>
+              <a:spcAft>
+                <a:spcPts val="0"/>
+              </a:spcAft>
+              <a:buClrTx/>
+              <a:buSzTx/>
+              <a:buFont typeface="Arial" pitchFamily="34" charset="0"/>
+              <a:buChar char="•"/>
+              <a:tabLst/>
+              <a:defRPr/>
+            </a:pPr>
+            <a:r>
+              <a:rPr kumimoji="0" lang="ko-KR" altLang="en-US" sz="1100" b="0" i="0" u="none" strike="noStrike" kern="1200" cap="none" spc="0" normalizeH="0" baseline="0" noProof="0" dirty="0" smtClean="0">
+                <a:ln>
+                  <a:noFill/>
+                </a:ln>
+                <a:solidFill>
+                  <a:srgbClr val="212E35"/>
+                </a:solidFill>
+                <a:effectLst/>
+                <a:uLnTx/>
+                <a:uFillTx/>
+                <a:latin typeface="Calibri"/>
+                <a:ea typeface="맑은 고딕" panose="020B0503020000020004" pitchFamily="50" charset="-127"/>
+              </a:rPr>
+              <a:t>실제 테이블 데이터가 저장되는 오브젝트</a:t>
+            </a:r>
+            <a:endParaRPr kumimoji="0" lang="en-US" altLang="ko-KR" sz="1100" b="0" i="0" u="none" strike="noStrike" kern="1200" cap="none" spc="0" normalizeH="0" baseline="0" noProof="0" dirty="0" smtClean="0">
+              <a:ln>
+                <a:noFill/>
+              </a:ln>
+              <a:solidFill>
+                <a:srgbClr val="212E35"/>
+              </a:solidFill>
+              <a:effectLst/>
+              <a:uLnTx/>
+              <a:uFillTx/>
+              <a:latin typeface="Calibri"/>
+              <a:ea typeface="맑은 고딕" panose="020B0503020000020004" pitchFamily="50" charset="-127"/>
+            </a:endParaRPr>
+          </a:p>
+          <a:p>
+            <a:pPr marL="400050" marR="0" lvl="1" indent="-171450" algn="l" defTabSz="914400" rtl="0" eaLnBrk="1" fontAlgn="auto" latinLnBrk="0" hangingPunct="1">
+              <a:lnSpc>
+                <a:spcPct val="100000"/>
+              </a:lnSpc>
+              <a:spcBef>
+                <a:spcPts val="0"/>
+              </a:spcBef>
+              <a:spcAft>
+                <a:spcPts val="0"/>
+              </a:spcAft>
+              <a:buClrTx/>
+              <a:buSzTx/>
+              <a:buFont typeface="Arial" pitchFamily="34" charset="0"/>
+              <a:buChar char="•"/>
+              <a:tabLst/>
+              <a:defRPr/>
+            </a:pPr>
+            <a:r>
+              <a:rPr kumimoji="0" lang="ko-KR" altLang="en-US" sz="1100" b="0" i="0" u="none" strike="noStrike" kern="1200" cap="none" spc="0" normalizeH="0" baseline="0" noProof="0" dirty="0" err="1" smtClean="0">
+                <a:ln>
+                  <a:noFill/>
+                </a:ln>
+                <a:solidFill>
+                  <a:srgbClr val="212E35"/>
+                </a:solidFill>
+                <a:effectLst/>
+                <a:uLnTx/>
+                <a:uFillTx/>
+                <a:latin typeface="Calibri"/>
+                <a:ea typeface="맑은 고딕" panose="020B0503020000020004" pitchFamily="50" charset="-127"/>
+              </a:rPr>
+              <a:t>프로젝션이</a:t>
+            </a:r>
+            <a:r>
+              <a:rPr kumimoji="0" lang="ko-KR" altLang="en-US" sz="1100" b="0" i="0" u="none" strike="noStrike" kern="1200" cap="none" spc="0" normalizeH="0" baseline="0" noProof="0" dirty="0" smtClean="0">
+                <a:ln>
+                  <a:noFill/>
+                </a:ln>
+                <a:solidFill>
+                  <a:srgbClr val="212E35"/>
+                </a:solidFill>
+                <a:effectLst/>
+                <a:uLnTx/>
+                <a:uFillTx/>
+                <a:latin typeface="Calibri"/>
+                <a:ea typeface="맑은 고딕" panose="020B0503020000020004" pitchFamily="50" charset="-127"/>
+              </a:rPr>
+              <a:t> 만들어지는 시기</a:t>
+            </a:r>
+            <a:endParaRPr kumimoji="0" lang="en-US" altLang="ko-KR" sz="1100" b="0" i="0" u="none" strike="noStrike" kern="1200" cap="none" spc="0" normalizeH="0" baseline="0" noProof="0" dirty="0" smtClean="0">
+              <a:ln>
+                <a:noFill/>
+              </a:ln>
+              <a:solidFill>
+                <a:srgbClr val="212E35"/>
+              </a:solidFill>
+              <a:effectLst/>
+              <a:uLnTx/>
+              <a:uFillTx/>
+              <a:latin typeface="Calibri"/>
+              <a:ea typeface="맑은 고딕" panose="020B0503020000020004" pitchFamily="50" charset="-127"/>
+            </a:endParaRPr>
+          </a:p>
+          <a:p>
+            <a:pPr marL="571500" marR="0" lvl="2" indent="-171450" algn="l" defTabSz="914400" rtl="0" eaLnBrk="1" fontAlgn="auto" latinLnBrk="0" hangingPunct="1">
+              <a:lnSpc>
+                <a:spcPct val="100000"/>
+              </a:lnSpc>
+              <a:spcBef>
+                <a:spcPts val="0"/>
+              </a:spcBef>
+              <a:spcAft>
+                <a:spcPts val="0"/>
+              </a:spcAft>
+              <a:buClrTx/>
+              <a:buSzTx/>
+              <a:buFont typeface="Calibri" panose="020F0502020204030204" pitchFamily="34" charset="0"/>
+              <a:buChar char="⁻"/>
+              <a:tabLst/>
+              <a:defRPr/>
+            </a:pPr>
+            <a:r>
+              <a:rPr kumimoji="0" lang="ko-KR" altLang="en-US" sz="1100" b="0" i="0" u="none" strike="noStrike" kern="1200" cap="none" spc="0" normalizeH="0" baseline="0" noProof="0" dirty="0" smtClean="0">
+                <a:ln>
+                  <a:noFill/>
+                </a:ln>
+                <a:solidFill>
+                  <a:srgbClr val="212E35"/>
+                </a:solidFill>
+                <a:effectLst/>
+                <a:uLnTx/>
+                <a:uFillTx/>
+                <a:latin typeface="Calibri"/>
+                <a:ea typeface="맑은 고딕" panose="020B0503020000020004" pitchFamily="50" charset="-127"/>
+              </a:rPr>
+              <a:t>테이블 생성 후 처음으로 데이터가 저장될 때</a:t>
+            </a:r>
+            <a:endParaRPr kumimoji="0" lang="en-US" altLang="ko-KR" sz="1100" b="0" i="0" u="none" strike="noStrike" kern="1200" cap="none" spc="0" normalizeH="0" baseline="0" noProof="0" dirty="0" smtClean="0">
+              <a:ln>
+                <a:noFill/>
+              </a:ln>
+              <a:solidFill>
+                <a:srgbClr val="212E35"/>
+              </a:solidFill>
+              <a:effectLst/>
+              <a:uLnTx/>
+              <a:uFillTx/>
+              <a:latin typeface="Calibri"/>
+              <a:ea typeface="맑은 고딕" panose="020B0503020000020004" pitchFamily="50" charset="-127"/>
+            </a:endParaRPr>
+          </a:p>
+          <a:p>
+            <a:pPr marL="571500" marR="0" lvl="2" indent="-171450" algn="l" defTabSz="914400" rtl="0" eaLnBrk="1" fontAlgn="auto" latinLnBrk="0" hangingPunct="1">
+              <a:lnSpc>
+                <a:spcPct val="100000"/>
+              </a:lnSpc>
+              <a:spcBef>
+                <a:spcPts val="0"/>
+              </a:spcBef>
+              <a:spcAft>
+                <a:spcPts val="0"/>
+              </a:spcAft>
+              <a:buClrTx/>
+              <a:buSzTx/>
+              <a:buFont typeface="Calibri" panose="020F0502020204030204" pitchFamily="34" charset="0"/>
+              <a:buChar char="⁻"/>
+              <a:tabLst/>
+              <a:defRPr/>
+            </a:pPr>
+            <a:r>
+              <a:rPr kumimoji="0" lang="ko-KR" altLang="en-US" sz="1100" b="0" i="0" u="none" strike="noStrike" kern="1200" cap="none" spc="0" normalizeH="0" baseline="0" noProof="0" dirty="0" smtClean="0">
+                <a:ln>
+                  <a:noFill/>
+                </a:ln>
+                <a:solidFill>
+                  <a:srgbClr val="212E35"/>
+                </a:solidFill>
+                <a:effectLst/>
+                <a:uLnTx/>
+                <a:uFillTx/>
+                <a:latin typeface="Calibri"/>
+                <a:ea typeface="맑은 고딕" panose="020B0503020000020004" pitchFamily="50" charset="-127"/>
+              </a:rPr>
+              <a:t>명시적으로 </a:t>
+            </a:r>
+            <a:r>
+              <a:rPr kumimoji="0" lang="ko-KR" altLang="en-US" sz="1100" b="0" i="0" u="none" strike="noStrike" kern="1200" cap="none" spc="0" normalizeH="0" baseline="0" noProof="0" dirty="0" err="1" smtClean="0">
+                <a:ln>
+                  <a:noFill/>
+                </a:ln>
+                <a:solidFill>
+                  <a:srgbClr val="212E35"/>
+                </a:solidFill>
+                <a:effectLst/>
+                <a:uLnTx/>
+                <a:uFillTx/>
+                <a:latin typeface="Calibri"/>
+                <a:ea typeface="맑은 고딕" panose="020B0503020000020004" pitchFamily="50" charset="-127"/>
+              </a:rPr>
+              <a:t>프로젝션을</a:t>
+            </a:r>
+            <a:r>
+              <a:rPr kumimoji="0" lang="ko-KR" altLang="en-US" sz="1100" b="0" i="0" u="none" strike="noStrike" kern="1200" cap="none" spc="0" normalizeH="0" baseline="0" noProof="0" dirty="0" smtClean="0">
+                <a:ln>
+                  <a:noFill/>
+                </a:ln>
+                <a:solidFill>
+                  <a:srgbClr val="212E35"/>
+                </a:solidFill>
+                <a:effectLst/>
+                <a:uLnTx/>
+                <a:uFillTx/>
+                <a:latin typeface="Calibri"/>
+                <a:ea typeface="맑은 고딕" panose="020B0503020000020004" pitchFamily="50" charset="-127"/>
+              </a:rPr>
+              <a:t> 생성할 때 </a:t>
+            </a:r>
+            <a:r>
+              <a:rPr kumimoji="0" lang="en-US" altLang="ko-KR" sz="1100" b="0" i="0" u="none" strike="noStrike" kern="1200" cap="none" spc="0" normalizeH="0" baseline="0" noProof="0" dirty="0" smtClean="0">
+                <a:ln>
+                  <a:noFill/>
+                </a:ln>
+                <a:solidFill>
+                  <a:srgbClr val="212E35"/>
+                </a:solidFill>
+                <a:effectLst/>
+                <a:uLnTx/>
+                <a:uFillTx/>
+                <a:latin typeface="Calibri"/>
+                <a:ea typeface="맑은 고딕" panose="020B0503020000020004" pitchFamily="50" charset="-127"/>
+              </a:rPr>
+              <a:t>(CREATE PROJECTION)</a:t>
+            </a:r>
+          </a:p>
+          <a:p>
+            <a:pPr marL="571500" marR="0" lvl="2" indent="-171450" algn="l" defTabSz="914400" rtl="0" eaLnBrk="1" fontAlgn="auto" latinLnBrk="0" hangingPunct="1">
+              <a:lnSpc>
+                <a:spcPct val="100000"/>
+              </a:lnSpc>
+              <a:spcBef>
+                <a:spcPts val="0"/>
+              </a:spcBef>
+              <a:spcAft>
+                <a:spcPts val="0"/>
+              </a:spcAft>
+              <a:buClrTx/>
+              <a:buSzTx/>
+              <a:buFont typeface="Calibri" panose="020F0502020204030204" pitchFamily="34" charset="0"/>
+              <a:buChar char="⁻"/>
+              <a:tabLst/>
+              <a:defRPr/>
+            </a:pPr>
+            <a:r>
+              <a:rPr kumimoji="0" lang="en-US" altLang="ko-KR" sz="1100" b="0" i="0" u="none" strike="noStrike" kern="1200" cap="none" spc="0" normalizeH="0" baseline="0" noProof="0" dirty="0" smtClean="0">
+                <a:ln>
+                  <a:noFill/>
+                </a:ln>
+                <a:solidFill>
+                  <a:srgbClr val="212E35"/>
+                </a:solidFill>
+                <a:effectLst/>
+                <a:uLnTx/>
+                <a:uFillTx/>
+                <a:latin typeface="Calibri"/>
+                <a:ea typeface="맑은 고딕" panose="020B0503020000020004" pitchFamily="50" charset="-127"/>
+              </a:rPr>
+              <a:t>Database Designer (DBD)</a:t>
+            </a:r>
+            <a:r>
+              <a:rPr kumimoji="0" lang="ko-KR" altLang="en-US" sz="1100" b="0" i="0" u="none" strike="noStrike" kern="1200" cap="none" spc="0" normalizeH="0" baseline="0" noProof="0" dirty="0" smtClean="0">
+                <a:ln>
+                  <a:noFill/>
+                </a:ln>
+                <a:solidFill>
+                  <a:srgbClr val="212E35"/>
+                </a:solidFill>
+                <a:effectLst/>
+                <a:uLnTx/>
+                <a:uFillTx/>
+                <a:latin typeface="Calibri"/>
+                <a:ea typeface="맑은 고딕" panose="020B0503020000020004" pitchFamily="50" charset="-127"/>
+              </a:rPr>
+              <a:t>에 의해 생성될 때</a:t>
+            </a:r>
+            <a:endParaRPr kumimoji="0" lang="en-US" altLang="ko-KR" sz="1100" b="0" i="0" u="none" strike="noStrike" kern="1200" cap="none" spc="0" normalizeH="0" baseline="0" noProof="0" dirty="0" smtClean="0">
+              <a:ln>
+                <a:noFill/>
+              </a:ln>
+              <a:solidFill>
+                <a:srgbClr val="212E35"/>
+              </a:solidFill>
+              <a:effectLst/>
+              <a:uLnTx/>
+              <a:uFillTx/>
+              <a:latin typeface="Calibri"/>
+              <a:ea typeface="맑은 고딕" panose="020B0503020000020004" pitchFamily="50" charset="-127"/>
+            </a:endParaRPr>
+          </a:p>
+          <a:p>
+            <a:pPr marL="571500" marR="0" lvl="2" indent="-171450" algn="l" defTabSz="914400" rtl="0" eaLnBrk="1" fontAlgn="auto" latinLnBrk="0" hangingPunct="1">
+              <a:lnSpc>
+                <a:spcPct val="100000"/>
+              </a:lnSpc>
+              <a:spcBef>
+                <a:spcPts val="0"/>
+              </a:spcBef>
+              <a:spcAft>
+                <a:spcPts val="0"/>
+              </a:spcAft>
+              <a:buClrTx/>
+              <a:buSzTx/>
+              <a:buFont typeface="Calibri" panose="020F0502020204030204" pitchFamily="34" charset="0"/>
+              <a:buChar char="⁻"/>
+              <a:tabLst/>
+              <a:defRPr/>
+            </a:pPr>
+            <a:r>
+              <a:rPr kumimoji="0" lang="ko-KR" altLang="en-US" sz="1100" b="0" i="0" u="none" strike="noStrike" kern="1200" cap="none" spc="0" normalizeH="0" baseline="0" noProof="0" dirty="0" smtClean="0">
+                <a:ln>
+                  <a:noFill/>
+                </a:ln>
+                <a:solidFill>
+                  <a:srgbClr val="212E35"/>
+                </a:solidFill>
+                <a:effectLst/>
+                <a:uLnTx/>
+                <a:uFillTx/>
+                <a:latin typeface="Calibri"/>
+                <a:ea typeface="맑은 고딕" panose="020B0503020000020004" pitchFamily="50" charset="-127"/>
+              </a:rPr>
+              <a:t>테이블을 생성할 때 </a:t>
+            </a:r>
+            <a:r>
+              <a:rPr kumimoji="0" lang="ko-KR" altLang="en-US" sz="1100" b="0" i="0" u="none" strike="noStrike" kern="1200" cap="none" spc="0" normalizeH="0" baseline="0" noProof="0" dirty="0" err="1" smtClean="0">
+                <a:ln>
+                  <a:noFill/>
+                </a:ln>
+                <a:solidFill>
+                  <a:srgbClr val="212E35"/>
+                </a:solidFill>
+                <a:effectLst/>
+                <a:uLnTx/>
+                <a:uFillTx/>
+                <a:latin typeface="Calibri"/>
+                <a:ea typeface="맑은 고딕" panose="020B0503020000020004" pitchFamily="50" charset="-127"/>
+              </a:rPr>
+              <a:t>프로젝션</a:t>
+            </a:r>
+            <a:r>
+              <a:rPr kumimoji="0" lang="ko-KR" altLang="en-US" sz="1100" b="0" i="0" u="none" strike="noStrike" kern="1200" cap="none" spc="0" normalizeH="0" baseline="0" noProof="0" dirty="0" smtClean="0">
+                <a:ln>
+                  <a:noFill/>
+                </a:ln>
+                <a:solidFill>
+                  <a:srgbClr val="212E35"/>
+                </a:solidFill>
+                <a:effectLst/>
+                <a:uLnTx/>
+                <a:uFillTx/>
+                <a:latin typeface="Calibri"/>
+                <a:ea typeface="맑은 고딕" panose="020B0503020000020004" pitchFamily="50" charset="-127"/>
+              </a:rPr>
+              <a:t> 속성을 함께 지정할 때 </a:t>
+            </a:r>
+            <a:r>
+              <a:rPr kumimoji="0" lang="en-US" altLang="ko-KR" sz="1100" b="0" i="0" u="none" strike="noStrike" kern="1200" cap="none" spc="0" normalizeH="0" baseline="0" noProof="0" dirty="0" smtClean="0">
+                <a:ln>
+                  <a:noFill/>
+                </a:ln>
+                <a:solidFill>
+                  <a:srgbClr val="212E35"/>
+                </a:solidFill>
+                <a:effectLst/>
+                <a:uLnTx/>
+                <a:uFillTx/>
+                <a:latin typeface="Calibri"/>
+                <a:ea typeface="맑은 고딕" panose="020B0503020000020004" pitchFamily="50" charset="-127"/>
+              </a:rPr>
+              <a:t>(</a:t>
+            </a:r>
+            <a:r>
+              <a:rPr kumimoji="0" lang="ko-KR" altLang="en-US" sz="1100" b="0" i="0" u="none" strike="noStrike" kern="1200" cap="none" spc="0" normalizeH="0" baseline="0" noProof="0" dirty="0" smtClean="0">
+                <a:ln>
+                  <a:noFill/>
+                </a:ln>
+                <a:solidFill>
+                  <a:srgbClr val="212E35"/>
+                </a:solidFill>
+                <a:effectLst/>
+                <a:uLnTx/>
+                <a:uFillTx/>
+                <a:latin typeface="Calibri"/>
+                <a:ea typeface="맑은 고딕" panose="020B0503020000020004" pitchFamily="50" charset="-127"/>
+              </a:rPr>
+              <a:t>예</a:t>
+            </a:r>
+            <a:r>
+              <a:rPr kumimoji="0" lang="en-US" altLang="ko-KR" sz="1100" b="0" i="0" u="none" strike="noStrike" kern="1200" cap="none" spc="0" normalizeH="0" baseline="0" noProof="0" dirty="0" smtClean="0">
+                <a:ln>
+                  <a:noFill/>
+                </a:ln>
+                <a:solidFill>
+                  <a:srgbClr val="212E35"/>
+                </a:solidFill>
+                <a:effectLst/>
+                <a:uLnTx/>
+                <a:uFillTx/>
+                <a:latin typeface="Calibri"/>
+                <a:ea typeface="맑은 고딕" panose="020B0503020000020004" pitchFamily="50" charset="-127"/>
+              </a:rPr>
+              <a:t>, Segment, Order, </a:t>
+            </a:r>
+            <a:r>
+              <a:rPr kumimoji="0" lang="en-US" altLang="ko-KR" sz="1100" b="0" i="0" u="none" strike="noStrike" kern="1200" cap="none" spc="0" normalizeH="0" baseline="0" noProof="0" dirty="0" err="1" smtClean="0">
+                <a:ln>
+                  <a:noFill/>
+                </a:ln>
+                <a:solidFill>
+                  <a:srgbClr val="212E35"/>
+                </a:solidFill>
+                <a:effectLst/>
+                <a:uLnTx/>
+                <a:uFillTx/>
+                <a:latin typeface="Calibri"/>
+                <a:ea typeface="맑은 고딕" panose="020B0503020000020004" pitchFamily="50" charset="-127"/>
+              </a:rPr>
+              <a:t>Ksafe</a:t>
+            </a:r>
+            <a:r>
+              <a:rPr kumimoji="0" lang="en-US" altLang="ko-KR" sz="1100" b="0" i="0" u="none" strike="noStrike" kern="1200" cap="none" spc="0" normalizeH="0" baseline="0" noProof="0" dirty="0" smtClean="0">
+                <a:ln>
+                  <a:noFill/>
+                </a:ln>
+                <a:solidFill>
+                  <a:srgbClr val="212E35"/>
+                </a:solidFill>
+                <a:effectLst/>
+                <a:uLnTx/>
+                <a:uFillTx/>
+                <a:latin typeface="Calibri"/>
+                <a:ea typeface="맑은 고딕" panose="020B0503020000020004" pitchFamily="50" charset="-127"/>
+              </a:rPr>
+              <a:t> </a:t>
+            </a:r>
+            <a:r>
+              <a:rPr kumimoji="0" lang="ko-KR" altLang="en-US" sz="1100" b="0" i="0" u="none" strike="noStrike" kern="1200" cap="none" spc="0" normalizeH="0" baseline="0" noProof="0" dirty="0" smtClean="0">
+                <a:ln>
+                  <a:noFill/>
+                </a:ln>
+                <a:solidFill>
+                  <a:srgbClr val="212E35"/>
+                </a:solidFill>
+                <a:effectLst/>
+                <a:uLnTx/>
+                <a:uFillTx/>
+                <a:latin typeface="Calibri"/>
+                <a:ea typeface="맑은 고딕" panose="020B0503020000020004" pitchFamily="50" charset="-127"/>
+              </a:rPr>
+              <a:t>등</a:t>
+            </a:r>
+            <a:r>
+              <a:rPr kumimoji="0" lang="en-US" altLang="ko-KR" sz="1100" b="0" i="0" u="none" strike="noStrike" kern="1200" cap="none" spc="0" normalizeH="0" baseline="0" noProof="0" dirty="0" smtClean="0">
+                <a:ln>
+                  <a:noFill/>
+                </a:ln>
+                <a:solidFill>
+                  <a:srgbClr val="212E35"/>
+                </a:solidFill>
+                <a:effectLst/>
+                <a:uLnTx/>
+                <a:uFillTx/>
+                <a:latin typeface="Calibri"/>
+                <a:ea typeface="맑은 고딕" panose="020B0503020000020004" pitchFamily="50" charset="-127"/>
+              </a:rPr>
+              <a:t>)</a:t>
+            </a:r>
+          </a:p>
+          <a:p>
+            <a:pPr marL="228600" marR="0" lvl="0" indent="-228600" algn="l" defTabSz="914400" rtl="0" eaLnBrk="1" fontAlgn="auto" latinLnBrk="0" hangingPunct="1">
+              <a:lnSpc>
+                <a:spcPct val="100000"/>
+              </a:lnSpc>
+              <a:spcBef>
+                <a:spcPts val="0"/>
+              </a:spcBef>
+              <a:spcAft>
+                <a:spcPts val="0"/>
+              </a:spcAft>
+              <a:buClrTx/>
+              <a:buSzTx/>
+              <a:buFont typeface="Arial" pitchFamily="34" charset="0"/>
+              <a:buChar char="•"/>
+              <a:tabLst/>
+              <a:defRPr/>
+            </a:pPr>
+            <a:endParaRPr kumimoji="0" lang="en-US" altLang="ko-KR" sz="1100" b="0" i="0" u="none" strike="noStrike" kern="1200" cap="none" spc="0" normalizeH="0" baseline="0" noProof="0" dirty="0" smtClean="0">
+              <a:ln>
+                <a:noFill/>
+              </a:ln>
+              <a:solidFill>
+                <a:srgbClr val="212E35"/>
+              </a:solidFill>
+              <a:effectLst/>
+              <a:uLnTx/>
+              <a:uFillTx/>
+              <a:latin typeface="Calibri"/>
+              <a:ea typeface="맑은 고딕" panose="020B0503020000020004" pitchFamily="50" charset="-127"/>
+            </a:endParaRPr>
+          </a:p>
+          <a:p>
+            <a:pPr marL="0" lvl="0" indent="0">
+              <a:lnSpc>
+                <a:spcPct val="100000"/>
+              </a:lnSpc>
+              <a:spcAft>
+                <a:spcPts val="0"/>
+              </a:spcAft>
+              <a:buNone/>
+            </a:pPr>
+            <a:r>
+              <a:rPr lang="en-US" altLang="ko-KR" sz="1100" b="1" dirty="0">
+                <a:solidFill>
+                  <a:srgbClr val="212E35"/>
+                </a:solidFill>
+              </a:rPr>
+              <a:t>Projection </a:t>
+            </a:r>
+            <a:r>
+              <a:rPr lang="en-US" altLang="ko-KR" sz="1100" b="1" dirty="0" smtClean="0">
+                <a:solidFill>
+                  <a:srgbClr val="212E35"/>
+                </a:solidFill>
+              </a:rPr>
+              <a:t> </a:t>
+            </a:r>
+            <a:r>
+              <a:rPr kumimoji="0" lang="ko-KR" altLang="en-US" sz="1100" b="1" i="0" u="none" strike="noStrike" kern="1200" cap="none" spc="0" normalizeH="0" baseline="0" noProof="0" dirty="0" smtClean="0">
+                <a:ln>
+                  <a:noFill/>
+                </a:ln>
+                <a:solidFill>
+                  <a:srgbClr val="212E35"/>
+                </a:solidFill>
+                <a:effectLst/>
+                <a:uLnTx/>
+                <a:uFillTx/>
+                <a:latin typeface="Calibri"/>
+                <a:ea typeface="맑은 고딕" panose="020B0503020000020004" pitchFamily="50" charset="-127"/>
+              </a:rPr>
+              <a:t>속성</a:t>
+            </a:r>
+            <a:endParaRPr kumimoji="0" lang="en-US" altLang="ko-KR" sz="1100" b="1" i="0" u="none" strike="noStrike" kern="1200" cap="none" spc="0" normalizeH="0" baseline="0" noProof="0" dirty="0" smtClean="0">
+              <a:ln>
+                <a:noFill/>
+              </a:ln>
+              <a:solidFill>
+                <a:srgbClr val="212E35"/>
+              </a:solidFill>
+              <a:effectLst/>
+              <a:uLnTx/>
+              <a:uFillTx/>
+              <a:latin typeface="Calibri"/>
+              <a:ea typeface="맑은 고딕" panose="020B0503020000020004" pitchFamily="50" charset="-127"/>
+            </a:endParaRPr>
+          </a:p>
+          <a:p>
+            <a:pPr marL="400050" marR="0" lvl="1" indent="-171450" algn="l" defTabSz="914400" rtl="0" eaLnBrk="1" fontAlgn="auto" latinLnBrk="0" hangingPunct="1">
+              <a:lnSpc>
+                <a:spcPct val="100000"/>
+              </a:lnSpc>
+              <a:spcBef>
+                <a:spcPts val="0"/>
+              </a:spcBef>
+              <a:spcAft>
+                <a:spcPts val="0"/>
+              </a:spcAft>
+              <a:buClrTx/>
+              <a:buSzTx/>
+              <a:buFont typeface="Arial" pitchFamily="34" charset="0"/>
+              <a:buChar char="•"/>
+              <a:tabLst/>
+              <a:defRPr/>
+            </a:pPr>
+            <a:r>
+              <a:rPr kumimoji="0" lang="ko-KR" altLang="en-US" sz="1100" b="0" i="0" u="none" strike="noStrike" kern="1200" cap="none" spc="0" normalizeH="0" baseline="0" noProof="0" dirty="0" err="1" smtClean="0">
+                <a:ln>
+                  <a:noFill/>
+                </a:ln>
+                <a:solidFill>
+                  <a:srgbClr val="212E35"/>
+                </a:solidFill>
+                <a:effectLst/>
+                <a:uLnTx/>
+                <a:uFillTx/>
+                <a:latin typeface="Calibri"/>
+                <a:ea typeface="맑은 고딕" panose="020B0503020000020004" pitchFamily="50" charset="-127"/>
+              </a:rPr>
+              <a:t>컬럼</a:t>
+            </a:r>
+            <a:r>
+              <a:rPr kumimoji="0" lang="ko-KR" altLang="en-US" sz="1100" b="0" i="0" u="none" strike="noStrike" kern="1200" cap="none" spc="0" normalizeH="0" baseline="0" noProof="0" dirty="0" smtClean="0">
+                <a:ln>
+                  <a:noFill/>
+                </a:ln>
+                <a:solidFill>
+                  <a:srgbClr val="212E35"/>
+                </a:solidFill>
+                <a:effectLst/>
+                <a:uLnTx/>
+                <a:uFillTx/>
+                <a:latin typeface="Calibri"/>
+                <a:ea typeface="맑은 고딕" panose="020B0503020000020004" pitchFamily="50" charset="-127"/>
+              </a:rPr>
+              <a:t> </a:t>
+            </a:r>
+            <a:r>
+              <a:rPr kumimoji="0" lang="ko-KR" altLang="en-US" sz="1100" b="0" i="0" u="none" strike="noStrike" kern="1200" cap="none" spc="0" normalizeH="0" baseline="0" noProof="0" dirty="0" err="1" smtClean="0">
+                <a:ln>
+                  <a:noFill/>
+                </a:ln>
+                <a:solidFill>
+                  <a:srgbClr val="212E35"/>
+                </a:solidFill>
+                <a:effectLst/>
+                <a:uLnTx/>
+                <a:uFillTx/>
+                <a:latin typeface="Calibri"/>
+                <a:ea typeface="맑은 고딕" panose="020B0503020000020004" pitchFamily="50" charset="-127"/>
+              </a:rPr>
+              <a:t>인코딩</a:t>
+            </a:r>
+            <a:r>
+              <a:rPr kumimoji="0" lang="ko-KR" altLang="en-US" sz="1100" b="0" i="0" u="none" strike="noStrike" kern="1200" cap="none" spc="0" normalizeH="0" baseline="0" noProof="0" dirty="0" smtClean="0">
+                <a:ln>
+                  <a:noFill/>
+                </a:ln>
+                <a:solidFill>
+                  <a:srgbClr val="212E35"/>
+                </a:solidFill>
+                <a:effectLst/>
+                <a:uLnTx/>
+                <a:uFillTx/>
+                <a:latin typeface="Calibri"/>
+                <a:ea typeface="맑은 고딕" panose="020B0503020000020004" pitchFamily="50" charset="-127"/>
+              </a:rPr>
+              <a:t> 및 압축 정의 </a:t>
+            </a:r>
+            <a:r>
+              <a:rPr kumimoji="0" lang="en-US" altLang="ko-KR" sz="1100" b="0" i="0" u="none" strike="noStrike" kern="1200" cap="none" spc="0" normalizeH="0" baseline="0" noProof="0" dirty="0" smtClean="0">
+                <a:ln>
+                  <a:noFill/>
+                </a:ln>
+                <a:solidFill>
+                  <a:srgbClr val="212E35"/>
+                </a:solidFill>
+                <a:effectLst/>
+                <a:uLnTx/>
+                <a:uFillTx/>
+                <a:latin typeface="Calibri"/>
+                <a:ea typeface="맑은 고딕" panose="020B0503020000020004" pitchFamily="50" charset="-127"/>
+              </a:rPr>
+              <a:t>(encoding)</a:t>
+            </a:r>
+          </a:p>
+          <a:p>
+            <a:pPr marL="571500" marR="0" lvl="2" indent="-171450" algn="l" defTabSz="914400" rtl="0" eaLnBrk="1" fontAlgn="auto" latinLnBrk="0" hangingPunct="1">
+              <a:lnSpc>
+                <a:spcPct val="100000"/>
+              </a:lnSpc>
+              <a:spcBef>
+                <a:spcPts val="0"/>
+              </a:spcBef>
+              <a:spcAft>
+                <a:spcPts val="0"/>
+              </a:spcAft>
+              <a:buClrTx/>
+              <a:buSzTx/>
+              <a:buFont typeface="Calibri" panose="020F0502020204030204" pitchFamily="34" charset="0"/>
+              <a:buChar char="⁻"/>
+              <a:tabLst/>
+              <a:defRPr/>
+            </a:pPr>
+            <a:r>
+              <a:rPr kumimoji="0" lang="ko-KR" altLang="en-US" sz="1100" b="0" i="0" u="none" strike="noStrike" kern="1200" cap="none" spc="0" normalizeH="0" baseline="0" noProof="0" dirty="0" err="1" smtClean="0">
+                <a:ln>
+                  <a:noFill/>
+                </a:ln>
+                <a:solidFill>
+                  <a:srgbClr val="212E35"/>
+                </a:solidFill>
+                <a:effectLst/>
+                <a:uLnTx/>
+                <a:uFillTx/>
+                <a:latin typeface="Calibri"/>
+                <a:ea typeface="맑은 고딕" panose="020B0503020000020004" pitchFamily="50" charset="-127"/>
+              </a:rPr>
+              <a:t>매뉴얼하게</a:t>
+            </a:r>
+            <a:r>
+              <a:rPr kumimoji="0" lang="ko-KR" altLang="en-US" sz="1100" b="0" i="0" u="none" strike="noStrike" kern="1200" cap="none" spc="0" normalizeH="0" baseline="0" noProof="0" dirty="0" smtClean="0">
+                <a:ln>
+                  <a:noFill/>
+                </a:ln>
+                <a:solidFill>
+                  <a:srgbClr val="212E35"/>
+                </a:solidFill>
+                <a:effectLst/>
+                <a:uLnTx/>
+                <a:uFillTx/>
+                <a:latin typeface="Calibri"/>
+                <a:ea typeface="맑은 고딕" panose="020B0503020000020004" pitchFamily="50" charset="-127"/>
+              </a:rPr>
+              <a:t> 정의 가능하지만 보통 </a:t>
+            </a:r>
+            <a:r>
+              <a:rPr kumimoji="0" lang="en-US" altLang="ko-KR" sz="1100" b="0" i="0" u="none" strike="noStrike" kern="1200" cap="none" spc="0" normalizeH="0" baseline="0" noProof="0" dirty="0" smtClean="0">
+                <a:ln>
+                  <a:noFill/>
+                </a:ln>
+                <a:solidFill>
+                  <a:srgbClr val="212E35"/>
+                </a:solidFill>
+                <a:effectLst/>
+                <a:uLnTx/>
+                <a:uFillTx/>
+                <a:latin typeface="Calibri"/>
+                <a:ea typeface="맑은 고딕" panose="020B0503020000020004" pitchFamily="50" charset="-127"/>
+              </a:rPr>
+              <a:t>DBD</a:t>
+            </a:r>
+            <a:r>
+              <a:rPr kumimoji="0" lang="ko-KR" altLang="en-US" sz="1100" b="0" i="0" u="none" strike="noStrike" kern="1200" cap="none" spc="0" normalizeH="0" baseline="0" noProof="0" dirty="0" smtClean="0">
+                <a:ln>
+                  <a:noFill/>
+                </a:ln>
+                <a:solidFill>
+                  <a:srgbClr val="212E35"/>
+                </a:solidFill>
+                <a:effectLst/>
+                <a:uLnTx/>
+                <a:uFillTx/>
+                <a:latin typeface="Calibri"/>
+                <a:ea typeface="맑은 고딕" panose="020B0503020000020004" pitchFamily="50" charset="-127"/>
+              </a:rPr>
+              <a:t>의 가이드로 재 정의</a:t>
+            </a:r>
+            <a:endParaRPr kumimoji="0" lang="en-US" altLang="ko-KR" sz="1100" b="0" i="0" u="none" strike="noStrike" kern="1200" cap="none" spc="0" normalizeH="0" baseline="0" noProof="0" dirty="0" smtClean="0">
+              <a:ln>
+                <a:noFill/>
+              </a:ln>
+              <a:solidFill>
+                <a:srgbClr val="212E35"/>
+              </a:solidFill>
+              <a:effectLst/>
+              <a:uLnTx/>
+              <a:uFillTx/>
+              <a:latin typeface="Calibri"/>
+              <a:ea typeface="맑은 고딕" panose="020B0503020000020004" pitchFamily="50" charset="-127"/>
+            </a:endParaRPr>
+          </a:p>
+          <a:p>
+            <a:pPr marL="571500" marR="0" lvl="2" indent="-171450" algn="l" defTabSz="914400" rtl="0" eaLnBrk="1" fontAlgn="auto" latinLnBrk="0" hangingPunct="1">
+              <a:lnSpc>
+                <a:spcPct val="100000"/>
+              </a:lnSpc>
+              <a:spcBef>
+                <a:spcPts val="0"/>
+              </a:spcBef>
+              <a:spcAft>
+                <a:spcPts val="0"/>
+              </a:spcAft>
+              <a:buClrTx/>
+              <a:buSzTx/>
+              <a:buFont typeface="Calibri" panose="020F0502020204030204" pitchFamily="34" charset="0"/>
+              <a:buChar char="⁻"/>
+              <a:tabLst/>
+              <a:defRPr/>
+            </a:pPr>
+            <a:r>
+              <a:rPr kumimoji="0" lang="en-US" altLang="ko-KR" sz="1100" b="0" i="0" u="none" strike="noStrike" kern="1200" cap="none" spc="0" normalizeH="0" baseline="0" noProof="0" dirty="0" smtClean="0">
+                <a:ln>
+                  <a:noFill/>
+                </a:ln>
+                <a:solidFill>
+                  <a:srgbClr val="212E35"/>
+                </a:solidFill>
+                <a:effectLst/>
+                <a:uLnTx/>
+                <a:uFillTx/>
+                <a:latin typeface="Calibri"/>
+                <a:ea typeface="맑은 고딕" panose="020B0503020000020004" pitchFamily="50" charset="-127"/>
+              </a:rPr>
+              <a:t>DBD</a:t>
+            </a:r>
+            <a:r>
+              <a:rPr kumimoji="0" lang="ko-KR" altLang="en-US" sz="1100" b="0" i="0" u="none" strike="noStrike" kern="1200" cap="none" spc="0" normalizeH="0" baseline="0" noProof="0" dirty="0" smtClean="0">
+                <a:ln>
+                  <a:noFill/>
+                </a:ln>
+                <a:solidFill>
+                  <a:srgbClr val="212E35"/>
+                </a:solidFill>
+                <a:effectLst/>
+                <a:uLnTx/>
+                <a:uFillTx/>
+                <a:latin typeface="Calibri"/>
+                <a:ea typeface="맑은 고딕" panose="020B0503020000020004" pitchFamily="50" charset="-127"/>
+              </a:rPr>
+              <a:t>가 </a:t>
+            </a:r>
+            <a:r>
+              <a:rPr kumimoji="0" lang="ko-KR" altLang="en-US" sz="1100" b="0" i="0" u="none" strike="noStrike" kern="1200" cap="none" spc="0" normalizeH="0" baseline="0" noProof="0" dirty="0" err="1" smtClean="0">
+                <a:ln>
+                  <a:noFill/>
+                </a:ln>
+                <a:solidFill>
+                  <a:srgbClr val="212E35"/>
+                </a:solidFill>
+                <a:effectLst/>
+                <a:uLnTx/>
+                <a:uFillTx/>
+                <a:latin typeface="Calibri"/>
+                <a:ea typeface="맑은 고딕" panose="020B0503020000020004" pitchFamily="50" charset="-127"/>
+              </a:rPr>
+              <a:t>인코딩</a:t>
+            </a:r>
+            <a:r>
+              <a:rPr kumimoji="0" lang="ko-KR" altLang="en-US" sz="1100" b="0" i="0" u="none" strike="noStrike" kern="1200" cap="none" spc="0" normalizeH="0" baseline="0" noProof="0" dirty="0" smtClean="0">
+                <a:ln>
+                  <a:noFill/>
+                </a:ln>
+                <a:solidFill>
+                  <a:srgbClr val="212E35"/>
+                </a:solidFill>
+                <a:effectLst/>
+                <a:uLnTx/>
+                <a:uFillTx/>
+                <a:latin typeface="Calibri"/>
+                <a:ea typeface="맑은 고딕" panose="020B0503020000020004" pitchFamily="50" charset="-127"/>
+              </a:rPr>
+              <a:t> 정보를 정확히 추천하기 위해서는 데이터가 적절히 저장되어 있어야 함 </a:t>
+            </a:r>
+            <a:r>
+              <a:rPr kumimoji="0" lang="en-US" altLang="ko-KR" sz="1100" b="0" i="0" u="none" strike="noStrike" kern="1200" cap="none" spc="0" normalizeH="0" baseline="0" noProof="0" dirty="0" smtClean="0">
+                <a:ln>
+                  <a:noFill/>
+                </a:ln>
+                <a:solidFill>
+                  <a:srgbClr val="212E35"/>
+                </a:solidFill>
+                <a:effectLst/>
+                <a:uLnTx/>
+                <a:uFillTx/>
+                <a:latin typeface="Calibri"/>
+                <a:ea typeface="맑은 고딕" panose="020B0503020000020004" pitchFamily="50" charset="-127"/>
+              </a:rPr>
+              <a:t>(</a:t>
+            </a:r>
+            <a:r>
+              <a:rPr kumimoji="0" lang="ko-KR" altLang="en-US" sz="1100" b="0" i="0" u="none" strike="noStrike" kern="1200" cap="none" spc="0" normalizeH="0" baseline="0" noProof="0" dirty="0" smtClean="0">
+                <a:ln>
+                  <a:noFill/>
+                </a:ln>
+                <a:solidFill>
+                  <a:srgbClr val="212E35"/>
+                </a:solidFill>
+                <a:effectLst/>
+                <a:uLnTx/>
+                <a:uFillTx/>
+                <a:latin typeface="Calibri"/>
+                <a:ea typeface="맑은 고딕" panose="020B0503020000020004" pitchFamily="50" charset="-127"/>
+              </a:rPr>
+              <a:t>실제 데이터 값</a:t>
+            </a:r>
+            <a:r>
+              <a:rPr kumimoji="0" lang="en-US" altLang="ko-KR" sz="1100" b="0" i="0" u="none" strike="noStrike" kern="1200" cap="none" spc="0" normalizeH="0" baseline="0" noProof="0" dirty="0" smtClean="0">
+                <a:ln>
+                  <a:noFill/>
+                </a:ln>
+                <a:solidFill>
+                  <a:srgbClr val="212E35"/>
+                </a:solidFill>
+                <a:effectLst/>
+                <a:uLnTx/>
+                <a:uFillTx/>
+                <a:latin typeface="Calibri"/>
+                <a:ea typeface="맑은 고딕" panose="020B0503020000020004" pitchFamily="50" charset="-127"/>
+              </a:rPr>
+              <a:t>, </a:t>
+            </a:r>
+            <a:r>
+              <a:rPr kumimoji="0" lang="ko-KR" altLang="en-US" sz="1100" b="0" i="0" u="none" strike="noStrike" kern="1200" cap="none" spc="0" normalizeH="0" baseline="0" noProof="0" dirty="0" smtClean="0">
+                <a:ln>
+                  <a:noFill/>
+                </a:ln>
+                <a:solidFill>
+                  <a:srgbClr val="212E35"/>
+                </a:solidFill>
+                <a:effectLst/>
+                <a:uLnTx/>
+                <a:uFillTx/>
+                <a:latin typeface="Calibri"/>
+                <a:ea typeface="맑은 고딕" panose="020B0503020000020004" pitchFamily="50" charset="-127"/>
+              </a:rPr>
+              <a:t>데이터의 분포 고려</a:t>
+            </a:r>
+            <a:r>
+              <a:rPr kumimoji="0" lang="en-US" altLang="ko-KR" sz="1100" b="0" i="0" u="none" strike="noStrike" kern="1200" cap="none" spc="0" normalizeH="0" baseline="0" noProof="0" dirty="0" smtClean="0">
+                <a:ln>
+                  <a:noFill/>
+                </a:ln>
+                <a:solidFill>
+                  <a:srgbClr val="212E35"/>
+                </a:solidFill>
+                <a:effectLst/>
+                <a:uLnTx/>
+                <a:uFillTx/>
+                <a:latin typeface="Calibri"/>
+                <a:ea typeface="맑은 고딕" panose="020B0503020000020004" pitchFamily="50" charset="-127"/>
+              </a:rPr>
+              <a:t>)</a:t>
+            </a:r>
+          </a:p>
+          <a:p>
+            <a:pPr marL="400050" marR="0" lvl="1" indent="-171450" algn="l" defTabSz="914400" rtl="0" eaLnBrk="1" fontAlgn="auto" latinLnBrk="0" hangingPunct="1">
+              <a:lnSpc>
+                <a:spcPct val="100000"/>
+              </a:lnSpc>
+              <a:spcBef>
+                <a:spcPts val="0"/>
+              </a:spcBef>
+              <a:spcAft>
+                <a:spcPts val="0"/>
+              </a:spcAft>
+              <a:buClrTx/>
+              <a:buSzTx/>
+              <a:buFont typeface="Arial" pitchFamily="34" charset="0"/>
+              <a:buChar char="•"/>
+              <a:tabLst/>
+              <a:defRPr/>
+            </a:pPr>
+            <a:endParaRPr kumimoji="0" lang="en-US" altLang="ko-KR" sz="1100" b="0" i="0" u="none" strike="noStrike" kern="1200" cap="none" spc="0" normalizeH="0" baseline="0" noProof="0" dirty="0" smtClean="0">
+              <a:ln>
+                <a:noFill/>
+              </a:ln>
+              <a:solidFill>
+                <a:srgbClr val="212E35"/>
+              </a:solidFill>
+              <a:effectLst/>
+              <a:uLnTx/>
+              <a:uFillTx/>
+              <a:latin typeface="Calibri"/>
+              <a:ea typeface="맑은 고딕" panose="020B0503020000020004" pitchFamily="50" charset="-127"/>
+            </a:endParaRPr>
+          </a:p>
+          <a:p>
+            <a:pPr marL="400050" marR="0" lvl="1" indent="-171450" algn="l" defTabSz="914400" rtl="0" eaLnBrk="1" fontAlgn="auto" latinLnBrk="0" hangingPunct="1">
+              <a:lnSpc>
+                <a:spcPct val="100000"/>
+              </a:lnSpc>
+              <a:spcBef>
+                <a:spcPts val="0"/>
+              </a:spcBef>
+              <a:spcAft>
+                <a:spcPts val="0"/>
+              </a:spcAft>
+              <a:buClrTx/>
+              <a:buSzTx/>
+              <a:buFont typeface="Arial" pitchFamily="34" charset="0"/>
+              <a:buChar char="•"/>
+              <a:tabLst/>
+              <a:defRPr/>
+            </a:pPr>
+            <a:r>
+              <a:rPr kumimoji="0" lang="ko-KR" altLang="en-US" sz="1100" b="0" i="0" u="none" strike="noStrike" kern="1200" cap="none" spc="0" normalizeH="0" baseline="0" noProof="0" dirty="0" err="1" smtClean="0">
+                <a:ln>
+                  <a:noFill/>
+                </a:ln>
+                <a:solidFill>
+                  <a:srgbClr val="212E35"/>
+                </a:solidFill>
+                <a:effectLst/>
+                <a:uLnTx/>
+                <a:uFillTx/>
+                <a:latin typeface="Calibri"/>
+                <a:ea typeface="맑은 고딕" panose="020B0503020000020004" pitchFamily="50" charset="-127"/>
+              </a:rPr>
+              <a:t>컬럼</a:t>
+            </a:r>
+            <a:r>
+              <a:rPr kumimoji="0" lang="ko-KR" altLang="en-US" sz="1100" b="0" i="0" u="none" strike="noStrike" kern="1200" cap="none" spc="0" normalizeH="0" baseline="0" noProof="0" dirty="0" smtClean="0">
+                <a:ln>
+                  <a:noFill/>
+                </a:ln>
+                <a:solidFill>
+                  <a:srgbClr val="212E35"/>
+                </a:solidFill>
+                <a:effectLst/>
+                <a:uLnTx/>
+                <a:uFillTx/>
+                <a:latin typeface="Calibri"/>
+                <a:ea typeface="맑은 고딕" panose="020B0503020000020004" pitchFamily="50" charset="-127"/>
+              </a:rPr>
+              <a:t> 정렬 저장 순서 </a:t>
+            </a:r>
+            <a:r>
+              <a:rPr kumimoji="0" lang="en-US" altLang="ko-KR" sz="1100" b="0" i="0" u="none" strike="noStrike" kern="1200" cap="none" spc="0" normalizeH="0" baseline="0" noProof="0" dirty="0" smtClean="0">
+                <a:ln>
+                  <a:noFill/>
+                </a:ln>
+                <a:solidFill>
+                  <a:srgbClr val="212E35"/>
+                </a:solidFill>
+                <a:effectLst/>
+                <a:uLnTx/>
+                <a:uFillTx/>
+                <a:latin typeface="Calibri"/>
+                <a:ea typeface="맑은 고딕" panose="020B0503020000020004" pitchFamily="50" charset="-127"/>
+              </a:rPr>
+              <a:t>(order by)</a:t>
+            </a:r>
+          </a:p>
+          <a:p>
+            <a:pPr marL="571500" marR="0" lvl="2" indent="-171450" algn="l" defTabSz="914400" rtl="0" eaLnBrk="1" fontAlgn="auto" latinLnBrk="0" hangingPunct="1">
+              <a:lnSpc>
+                <a:spcPct val="100000"/>
+              </a:lnSpc>
+              <a:spcBef>
+                <a:spcPts val="0"/>
+              </a:spcBef>
+              <a:spcAft>
+                <a:spcPts val="0"/>
+              </a:spcAft>
+              <a:buClrTx/>
+              <a:buSzTx/>
+              <a:buFont typeface="Calibri" panose="020F0502020204030204" pitchFamily="34" charset="0"/>
+              <a:buChar char="⁻"/>
+              <a:tabLst/>
+              <a:defRPr/>
+            </a:pPr>
+            <a:r>
+              <a:rPr kumimoji="0" lang="ko-KR" altLang="en-US" sz="1100" b="0" i="0" u="none" strike="noStrike" kern="1200" cap="none" spc="0" normalizeH="0" baseline="0" noProof="0" dirty="0" smtClean="0">
+                <a:ln>
+                  <a:noFill/>
+                </a:ln>
+                <a:solidFill>
+                  <a:srgbClr val="212E35"/>
+                </a:solidFill>
+                <a:effectLst/>
+                <a:uLnTx/>
+                <a:uFillTx/>
+                <a:latin typeface="Calibri"/>
+                <a:ea typeface="맑은 고딕" panose="020B0503020000020004" pitchFamily="50" charset="-127"/>
+              </a:rPr>
+              <a:t>데이터가 물리적으로 정렬되어 저장하여 조회 및 조인 속도를 높일 때 사용한다</a:t>
+            </a:r>
+            <a:r>
+              <a:rPr kumimoji="0" lang="en-US" altLang="ko-KR" sz="1100" b="0" i="0" u="none" strike="noStrike" kern="1200" cap="none" spc="0" normalizeH="0" baseline="0" noProof="0" dirty="0" smtClean="0">
+                <a:ln>
+                  <a:noFill/>
+                </a:ln>
+                <a:solidFill>
+                  <a:srgbClr val="212E35"/>
+                </a:solidFill>
+                <a:effectLst/>
+                <a:uLnTx/>
+                <a:uFillTx/>
+                <a:latin typeface="Calibri"/>
+                <a:ea typeface="맑은 고딕" panose="020B0503020000020004" pitchFamily="50" charset="-127"/>
+              </a:rPr>
+              <a:t>.</a:t>
+            </a:r>
+          </a:p>
+          <a:p>
+            <a:pPr marL="400050" marR="0" lvl="1" indent="-171450" algn="l" defTabSz="914400" rtl="0" eaLnBrk="1" fontAlgn="auto" latinLnBrk="0" hangingPunct="1">
+              <a:lnSpc>
+                <a:spcPct val="100000"/>
+              </a:lnSpc>
+              <a:spcBef>
+                <a:spcPts val="0"/>
+              </a:spcBef>
+              <a:spcAft>
+                <a:spcPts val="0"/>
+              </a:spcAft>
+              <a:buClrTx/>
+              <a:buSzTx/>
+              <a:buFont typeface="Arial" pitchFamily="34" charset="0"/>
+              <a:buChar char="•"/>
+              <a:tabLst/>
+              <a:defRPr/>
+            </a:pPr>
+            <a:endParaRPr kumimoji="0" lang="en-US" altLang="ko-KR" sz="1100" b="0" i="0" u="none" strike="noStrike" kern="1200" cap="none" spc="0" normalizeH="0" baseline="0" noProof="0" dirty="0" smtClean="0">
+              <a:ln>
+                <a:noFill/>
+              </a:ln>
+              <a:solidFill>
+                <a:srgbClr val="212E35"/>
+              </a:solidFill>
+              <a:effectLst/>
+              <a:uLnTx/>
+              <a:uFillTx/>
+              <a:latin typeface="Calibri"/>
+              <a:ea typeface="맑은 고딕" panose="020B0503020000020004" pitchFamily="50" charset="-127"/>
+            </a:endParaRPr>
+          </a:p>
+          <a:p>
+            <a:pPr marL="400050" marR="0" lvl="1" indent="-171450" algn="l" defTabSz="914400" rtl="0" eaLnBrk="1" fontAlgn="auto" latinLnBrk="0" hangingPunct="1">
+              <a:lnSpc>
+                <a:spcPct val="100000"/>
+              </a:lnSpc>
+              <a:spcBef>
+                <a:spcPts val="0"/>
+              </a:spcBef>
+              <a:spcAft>
+                <a:spcPts val="0"/>
+              </a:spcAft>
+              <a:buClrTx/>
+              <a:buSzTx/>
+              <a:buFont typeface="Arial" pitchFamily="34" charset="0"/>
+              <a:buChar char="•"/>
+              <a:tabLst/>
+              <a:defRPr/>
+            </a:pPr>
+            <a:r>
+              <a:rPr kumimoji="0" lang="ko-KR" altLang="en-US" sz="1100" b="0" i="0" u="none" strike="noStrike" kern="1200" cap="none" spc="0" normalizeH="0" baseline="0" noProof="0" dirty="0" smtClean="0">
+                <a:ln>
+                  <a:noFill/>
+                </a:ln>
+                <a:solidFill>
+                  <a:srgbClr val="212E35"/>
+                </a:solidFill>
+                <a:effectLst/>
+                <a:uLnTx/>
+                <a:uFillTx/>
+                <a:latin typeface="Calibri"/>
+                <a:ea typeface="맑은 고딕" panose="020B0503020000020004" pitchFamily="50" charset="-127"/>
+              </a:rPr>
+              <a:t>데이터 분산 정책 </a:t>
+            </a:r>
+            <a:r>
+              <a:rPr kumimoji="0" lang="en-US" altLang="ko-KR" sz="1100" b="0" i="0" u="none" strike="noStrike" kern="1200" cap="none" spc="0" normalizeH="0" baseline="0" noProof="0" dirty="0" smtClean="0">
+                <a:ln>
+                  <a:noFill/>
+                </a:ln>
+                <a:solidFill>
+                  <a:srgbClr val="212E35"/>
+                </a:solidFill>
+                <a:effectLst/>
+                <a:uLnTx/>
+                <a:uFillTx/>
+                <a:latin typeface="Calibri"/>
+                <a:ea typeface="맑은 고딕" panose="020B0503020000020004" pitchFamily="50" charset="-127"/>
+              </a:rPr>
+              <a:t>(segmentation)</a:t>
+            </a:r>
+          </a:p>
+          <a:p>
+            <a:pPr marL="571500" marR="0" lvl="2" indent="-171450" algn="l" defTabSz="914400" rtl="0" eaLnBrk="1" fontAlgn="auto" latinLnBrk="0" hangingPunct="1">
+              <a:lnSpc>
+                <a:spcPct val="100000"/>
+              </a:lnSpc>
+              <a:spcBef>
+                <a:spcPts val="0"/>
+              </a:spcBef>
+              <a:spcAft>
+                <a:spcPts val="0"/>
+              </a:spcAft>
+              <a:buClrTx/>
+              <a:buSzTx/>
+              <a:buFont typeface="Calibri" panose="020F0502020204030204" pitchFamily="34" charset="0"/>
+              <a:buChar char="⁻"/>
+              <a:tabLst/>
+              <a:defRPr/>
+            </a:pPr>
+            <a:r>
+              <a:rPr kumimoji="0" lang="ko-KR" altLang="en-US" sz="1100" b="0" i="0" u="none" strike="noStrike" kern="1200" cap="none" spc="0" normalizeH="0" baseline="0" noProof="0" dirty="0" smtClean="0">
+                <a:ln>
+                  <a:noFill/>
+                </a:ln>
+                <a:solidFill>
+                  <a:srgbClr val="212E35"/>
+                </a:solidFill>
+                <a:effectLst/>
+                <a:uLnTx/>
+                <a:uFillTx/>
+                <a:latin typeface="Calibri"/>
+                <a:ea typeface="맑은 고딕" panose="020B0503020000020004" pitchFamily="50" charset="-127"/>
+              </a:rPr>
+              <a:t>멀티 </a:t>
+            </a:r>
+            <a:r>
+              <a:rPr kumimoji="0" lang="ko-KR" altLang="en-US" sz="1100" b="0" i="0" u="none" strike="noStrike" kern="1200" cap="none" spc="0" normalizeH="0" baseline="0" noProof="0" dirty="0" err="1" smtClean="0">
+                <a:ln>
+                  <a:noFill/>
+                </a:ln>
+                <a:solidFill>
+                  <a:srgbClr val="212E35"/>
+                </a:solidFill>
+                <a:effectLst/>
+                <a:uLnTx/>
+                <a:uFillTx/>
+                <a:latin typeface="Calibri"/>
+                <a:ea typeface="맑은 고딕" panose="020B0503020000020004" pitchFamily="50" charset="-127"/>
+              </a:rPr>
+              <a:t>노드에</a:t>
+            </a:r>
+            <a:r>
+              <a:rPr kumimoji="0" lang="ko-KR" altLang="en-US" sz="1100" b="0" i="0" u="none" strike="noStrike" kern="1200" cap="none" spc="0" normalizeH="0" baseline="0" noProof="0" dirty="0" smtClean="0">
+                <a:ln>
+                  <a:noFill/>
+                </a:ln>
+                <a:solidFill>
+                  <a:srgbClr val="212E35"/>
+                </a:solidFill>
+                <a:effectLst/>
+                <a:uLnTx/>
+                <a:uFillTx/>
+                <a:latin typeface="Calibri"/>
+                <a:ea typeface="맑은 고딕" panose="020B0503020000020004" pitchFamily="50" charset="-127"/>
+              </a:rPr>
+              <a:t> 데이터를 분산시키기 위한 기준 </a:t>
+            </a:r>
+            <a:r>
+              <a:rPr kumimoji="0" lang="ko-KR" altLang="en-US" sz="1100" b="0" i="0" u="none" strike="noStrike" kern="1200" cap="none" spc="0" normalizeH="0" baseline="0" noProof="0" dirty="0" err="1" smtClean="0">
+                <a:ln>
+                  <a:noFill/>
+                </a:ln>
+                <a:solidFill>
+                  <a:srgbClr val="212E35"/>
+                </a:solidFill>
+                <a:effectLst/>
+                <a:uLnTx/>
+                <a:uFillTx/>
+                <a:latin typeface="Calibri"/>
+                <a:ea typeface="맑은 고딕" panose="020B0503020000020004" pitchFamily="50" charset="-127"/>
+              </a:rPr>
+              <a:t>컬럼을</a:t>
+            </a:r>
+            <a:r>
+              <a:rPr kumimoji="0" lang="ko-KR" altLang="en-US" sz="1100" b="0" i="0" u="none" strike="noStrike" kern="1200" cap="none" spc="0" normalizeH="0" baseline="0" noProof="0" dirty="0" smtClean="0">
+                <a:ln>
+                  <a:noFill/>
+                </a:ln>
+                <a:solidFill>
+                  <a:srgbClr val="212E35"/>
+                </a:solidFill>
+                <a:effectLst/>
+                <a:uLnTx/>
+                <a:uFillTx/>
+                <a:latin typeface="Calibri"/>
+                <a:ea typeface="맑은 고딕" panose="020B0503020000020004" pitchFamily="50" charset="-127"/>
+              </a:rPr>
+              <a:t> 지정</a:t>
+            </a:r>
+            <a:endParaRPr kumimoji="0" lang="en-US" altLang="ko-KR" sz="1100" b="0" i="0" u="none" strike="noStrike" kern="1200" cap="none" spc="0" normalizeH="0" baseline="0" noProof="0" dirty="0" smtClean="0">
+              <a:ln>
+                <a:noFill/>
+              </a:ln>
+              <a:solidFill>
+                <a:srgbClr val="212E35"/>
+              </a:solidFill>
+              <a:effectLst/>
+              <a:uLnTx/>
+              <a:uFillTx/>
+              <a:latin typeface="Calibri"/>
+              <a:ea typeface="맑은 고딕" panose="020B0503020000020004" pitchFamily="50" charset="-127"/>
+            </a:endParaRPr>
+          </a:p>
+          <a:p>
+            <a:pPr marL="571500" marR="0" lvl="2" indent="-171450" algn="l" defTabSz="914400" rtl="0" eaLnBrk="1" fontAlgn="auto" latinLnBrk="0" hangingPunct="1">
+              <a:lnSpc>
+                <a:spcPct val="100000"/>
+              </a:lnSpc>
+              <a:spcBef>
+                <a:spcPts val="0"/>
+              </a:spcBef>
+              <a:spcAft>
+                <a:spcPts val="0"/>
+              </a:spcAft>
+              <a:buClrTx/>
+              <a:buSzTx/>
+              <a:buFont typeface="Calibri" panose="020F0502020204030204" pitchFamily="34" charset="0"/>
+              <a:buChar char="⁻"/>
+              <a:tabLst/>
+              <a:defRPr/>
+            </a:pPr>
+            <a:r>
+              <a:rPr kumimoji="0" lang="ko-KR" altLang="en-US" sz="1100" b="0" i="0" u="none" strike="noStrike" kern="1200" cap="none" spc="0" normalizeH="0" baseline="0" noProof="0" dirty="0" smtClean="0">
+                <a:ln>
+                  <a:noFill/>
+                </a:ln>
+                <a:solidFill>
+                  <a:srgbClr val="212E35"/>
+                </a:solidFill>
+                <a:effectLst/>
+                <a:uLnTx/>
+                <a:uFillTx/>
+                <a:latin typeface="Calibri"/>
+                <a:ea typeface="맑은 고딕" panose="020B0503020000020004" pitchFamily="50" charset="-127"/>
+              </a:rPr>
+              <a:t>데이터를 모든 </a:t>
+            </a:r>
+            <a:r>
+              <a:rPr kumimoji="0" lang="ko-KR" altLang="en-US" sz="1100" b="0" i="0" u="none" strike="noStrike" kern="1200" cap="none" spc="0" normalizeH="0" baseline="0" noProof="0" dirty="0" err="1" smtClean="0">
+                <a:ln>
+                  <a:noFill/>
+                </a:ln>
+                <a:solidFill>
+                  <a:srgbClr val="212E35"/>
+                </a:solidFill>
+                <a:effectLst/>
+                <a:uLnTx/>
+                <a:uFillTx/>
+                <a:latin typeface="Calibri"/>
+                <a:ea typeface="맑은 고딕" panose="020B0503020000020004" pitchFamily="50" charset="-127"/>
+              </a:rPr>
+              <a:t>노드</a:t>
+            </a:r>
+            <a:r>
+              <a:rPr kumimoji="0" lang="ko-KR" altLang="en-US" sz="1100" b="0" i="0" u="none" strike="noStrike" kern="1200" cap="none" spc="0" normalizeH="0" baseline="0" noProof="0" dirty="0" smtClean="0">
+                <a:ln>
+                  <a:noFill/>
+                </a:ln>
+                <a:solidFill>
+                  <a:srgbClr val="212E35"/>
+                </a:solidFill>
+                <a:effectLst/>
+                <a:uLnTx/>
+                <a:uFillTx/>
+                <a:latin typeface="Calibri"/>
+                <a:ea typeface="맑은 고딕" panose="020B0503020000020004" pitchFamily="50" charset="-127"/>
+              </a:rPr>
+              <a:t> 또는 일부 </a:t>
+            </a:r>
+            <a:r>
+              <a:rPr kumimoji="0" lang="ko-KR" altLang="en-US" sz="1100" b="0" i="0" u="none" strike="noStrike" kern="1200" cap="none" spc="0" normalizeH="0" baseline="0" noProof="0" dirty="0" err="1" smtClean="0">
+                <a:ln>
+                  <a:noFill/>
+                </a:ln>
+                <a:solidFill>
+                  <a:srgbClr val="212E35"/>
+                </a:solidFill>
+                <a:effectLst/>
+                <a:uLnTx/>
+                <a:uFillTx/>
+                <a:latin typeface="Calibri"/>
+                <a:ea typeface="맑은 고딕" panose="020B0503020000020004" pitchFamily="50" charset="-127"/>
+              </a:rPr>
+              <a:t>노드에</a:t>
+            </a:r>
+            <a:r>
+              <a:rPr kumimoji="0" lang="ko-KR" altLang="en-US" sz="1100" b="0" i="0" u="none" strike="noStrike" kern="1200" cap="none" spc="0" normalizeH="0" baseline="0" noProof="0" dirty="0" smtClean="0">
+                <a:ln>
+                  <a:noFill/>
+                </a:ln>
+                <a:solidFill>
+                  <a:srgbClr val="212E35"/>
+                </a:solidFill>
+                <a:effectLst/>
+                <a:uLnTx/>
+                <a:uFillTx/>
+                <a:latin typeface="Calibri"/>
+                <a:ea typeface="맑은 고딕" panose="020B0503020000020004" pitchFamily="50" charset="-127"/>
+              </a:rPr>
+              <a:t> 복제 가능</a:t>
+            </a:r>
+            <a:endParaRPr kumimoji="0" lang="en-US" altLang="ko-KR" sz="1100" b="0" i="0" u="none" strike="noStrike" kern="1200" cap="none" spc="0" normalizeH="0" baseline="0" noProof="0" dirty="0" smtClean="0">
+              <a:ln>
+                <a:noFill/>
+              </a:ln>
+              <a:solidFill>
+                <a:srgbClr val="212E35"/>
+              </a:solidFill>
+              <a:effectLst/>
+              <a:uLnTx/>
+              <a:uFillTx/>
+              <a:latin typeface="Calibri"/>
+              <a:ea typeface="맑은 고딕" panose="020B0503020000020004" pitchFamily="50" charset="-127"/>
+            </a:endParaRPr>
+          </a:p>
+          <a:p>
+            <a:pPr marL="400050" marR="0" lvl="1" indent="-171450" algn="l" defTabSz="914400" rtl="0" eaLnBrk="1" fontAlgn="auto" latinLnBrk="0" hangingPunct="1">
+              <a:lnSpc>
+                <a:spcPct val="100000"/>
+              </a:lnSpc>
+              <a:spcBef>
+                <a:spcPts val="0"/>
+              </a:spcBef>
+              <a:spcAft>
+                <a:spcPts val="0"/>
+              </a:spcAft>
+              <a:buClrTx/>
+              <a:buSzTx/>
+              <a:buFont typeface="Arial" pitchFamily="34" charset="0"/>
+              <a:buChar char="•"/>
+              <a:tabLst/>
+              <a:defRPr/>
+            </a:pPr>
+            <a:endParaRPr kumimoji="0" lang="ko-KR" altLang="en-US" sz="1100" b="0" i="0" u="none" strike="noStrike" kern="1200" cap="none" spc="0" normalizeH="0" baseline="0" noProof="0" dirty="0">
+              <a:ln>
+                <a:noFill/>
+              </a:ln>
+              <a:solidFill>
+                <a:srgbClr val="212E35"/>
+              </a:solidFill>
+              <a:effectLst/>
+              <a:uLnTx/>
+              <a:uFillTx/>
+              <a:latin typeface="Calibri"/>
+              <a:ea typeface="맑은 고딕" panose="020B0503020000020004" pitchFamily="50" charset="-127"/>
+            </a:endParaRPr>
+          </a:p>
+        </p:txBody>
+      </p:sp>
+      <p:cxnSp>
+        <p:nvCxnSpPr>
+          <p:cNvPr id="9" name="직선 연결선 8"/>
+          <p:cNvCxnSpPr/>
+          <p:nvPr/>
+        </p:nvCxnSpPr>
+        <p:spPr>
+          <a:xfrm>
+            <a:off x="4566261" y="689149"/>
+            <a:ext cx="0" cy="3601497"/>
+          </a:xfrm>
+          <a:prstGeom prst="line">
+            <a:avLst/>
+          </a:prstGeom>
+          <a:ln w="19050">
+            <a:solidFill>
+              <a:schemeClr val="accent1"/>
+            </a:solidFill>
+          </a:ln>
+        </p:spPr>
+        <p:style>
+          <a:lnRef idx="1">
+            <a:schemeClr val="accent1"/>
+          </a:lnRef>
+          <a:fillRef idx="0">
+            <a:schemeClr val="accent1"/>
+          </a:fillRef>
+          <a:effectRef idx="0">
+            <a:schemeClr val="accent1"/>
+          </a:effectRef>
+          <a:fontRef idx="minor">
+            <a:schemeClr val="tx1"/>
+          </a:fontRef>
+        </p:style>
+      </p:cxnSp>
+      <p:sp>
+        <p:nvSpPr>
+          <p:cNvPr id="12" name="Content Placeholder 4"/>
+          <p:cNvSpPr txBox="1">
+            <a:spLocks/>
+          </p:cNvSpPr>
+          <p:nvPr/>
+        </p:nvSpPr>
+        <p:spPr>
+          <a:xfrm>
+            <a:off x="93784" y="4659926"/>
+            <a:ext cx="9437077" cy="2948352"/>
+          </a:xfrm>
+          <a:prstGeom prst="rect">
+            <a:avLst/>
+          </a:prstGeom>
+        </p:spPr>
+        <p:txBody>
+          <a:bodyPr/>
+          <a:lstStyle>
+            <a:lvl1pPr marL="228600" indent="-228600" algn="l" defTabSz="914400" rtl="0" eaLnBrk="1" latinLnBrk="0" hangingPunct="1">
+              <a:lnSpc>
+                <a:spcPct val="90000"/>
+              </a:lnSpc>
+              <a:spcBef>
+                <a:spcPts val="0"/>
+              </a:spcBef>
+              <a:spcAft>
+                <a:spcPts val="1200"/>
+              </a:spcAft>
+              <a:buFont typeface="Wingdings" panose="05000000000000000000" pitchFamily="2" charset="2"/>
+              <a:buChar char="§"/>
+              <a:defRPr sz="2200" kern="1200">
+                <a:solidFill>
+                  <a:schemeClr val="tx1"/>
+                </a:solidFill>
+                <a:latin typeface="+mn-lt"/>
+                <a:ea typeface="+mn-ea"/>
+                <a:cs typeface="+mn-cs"/>
+              </a:defRPr>
+            </a:lvl1pPr>
+            <a:lvl2pPr marL="400050" indent="-171450" algn="l" defTabSz="914400" rtl="0" eaLnBrk="1" latinLnBrk="0" hangingPunct="1">
+              <a:lnSpc>
+                <a:spcPct val="90000"/>
+              </a:lnSpc>
+              <a:spcBef>
+                <a:spcPts val="0"/>
+              </a:spcBef>
+              <a:spcAft>
+                <a:spcPts val="1200"/>
+              </a:spcAft>
+              <a:buFont typeface="Calibri" panose="020F0502020204030204" pitchFamily="34" charset="0"/>
+              <a:buChar char="-"/>
+              <a:defRPr sz="2000" kern="1200">
+                <a:solidFill>
+                  <a:schemeClr val="tx1"/>
+                </a:solidFill>
+                <a:latin typeface="+mn-lt"/>
+                <a:ea typeface="+mn-ea"/>
+                <a:cs typeface="+mn-cs"/>
+              </a:defRPr>
+            </a:lvl2pPr>
+            <a:lvl3pPr marL="571500" indent="-171450" algn="l" defTabSz="914400" rtl="0" eaLnBrk="1" latinLnBrk="0" hangingPunct="1">
+              <a:lnSpc>
+                <a:spcPct val="90000"/>
+              </a:lnSpc>
+              <a:spcBef>
+                <a:spcPts val="0"/>
+              </a:spcBef>
+              <a:spcAft>
+                <a:spcPts val="1200"/>
+              </a:spcAft>
+              <a:buFont typeface="Calibri" panose="020F0502020204030204" pitchFamily="34" charset="0"/>
+              <a:buChar char="-"/>
+              <a:defRPr sz="1800" kern="1200">
+                <a:solidFill>
+                  <a:schemeClr val="tx1"/>
+                </a:solidFill>
+                <a:latin typeface="+mn-lt"/>
+                <a:ea typeface="+mn-ea"/>
+                <a:cs typeface="+mn-cs"/>
+              </a:defRPr>
+            </a:lvl3pPr>
+            <a:lvl4pPr marL="742950" indent="-171450" algn="l" defTabSz="914400" rtl="0" eaLnBrk="1" latinLnBrk="0" hangingPunct="1">
+              <a:lnSpc>
+                <a:spcPct val="90000"/>
+              </a:lnSpc>
+              <a:spcBef>
+                <a:spcPts val="0"/>
+              </a:spcBef>
+              <a:spcAft>
+                <a:spcPts val="1200"/>
+              </a:spcAft>
+              <a:buFont typeface="Arial" panose="020B0604020202020204" pitchFamily="34" charset="0"/>
+              <a:buChar char="•"/>
+              <a:defRPr sz="1600" kern="1200">
+                <a:solidFill>
+                  <a:schemeClr val="tx1"/>
+                </a:solidFill>
+                <a:latin typeface="+mn-lt"/>
+                <a:ea typeface="+mn-ea"/>
+                <a:cs typeface="+mn-cs"/>
+              </a:defRPr>
+            </a:lvl4pPr>
+            <a:lvl5pPr marL="914400" indent="-171450" algn="l" defTabSz="914400" rtl="0" eaLnBrk="1" latinLnBrk="0" hangingPunct="1">
+              <a:lnSpc>
+                <a:spcPct val="90000"/>
+              </a:lnSpc>
+              <a:spcBef>
+                <a:spcPts val="0"/>
+              </a:spcBef>
+              <a:spcAft>
+                <a:spcPts val="1200"/>
+              </a:spcAft>
+              <a:buFont typeface="Arial" panose="020B0604020202020204" pitchFamily="34" charset="0"/>
+              <a:buChar char="•"/>
+              <a:defRPr sz="1400" kern="1200">
+                <a:solidFill>
+                  <a:schemeClr val="tx1"/>
+                </a:solidFill>
+                <a:latin typeface="+mn-lt"/>
+                <a:ea typeface="+mn-ea"/>
+                <a:cs typeface="+mn-cs"/>
+              </a:defRPr>
+            </a:lvl5pPr>
+            <a:lvl6pPr marL="2514600" indent="-228600" algn="l" defTabSz="914400" rtl="0" eaLnBrk="1" latinLnBrk="0" hangingPunct="1">
+              <a:lnSpc>
+                <a:spcPct val="90000"/>
+              </a:lnSpc>
+              <a:spcBef>
+                <a:spcPts val="500"/>
+              </a:spcBef>
+              <a:buFont typeface="Arial" panose="020B0604020202020204" pitchFamily="34" charset="0"/>
+              <a:buChar char="•"/>
+              <a:defRPr sz="1800" kern="1200">
+                <a:solidFill>
+                  <a:schemeClr val="tx1"/>
+                </a:solidFill>
+                <a:latin typeface="+mn-lt"/>
+                <a:ea typeface="+mn-ea"/>
+                <a:cs typeface="+mn-cs"/>
+              </a:defRPr>
+            </a:lvl6pPr>
+            <a:lvl7pPr marL="2971800" indent="-228600" algn="l" defTabSz="914400" rtl="0" eaLnBrk="1" latinLnBrk="0" hangingPunct="1">
+              <a:lnSpc>
+                <a:spcPct val="90000"/>
+              </a:lnSpc>
+              <a:spcBef>
+                <a:spcPts val="500"/>
+              </a:spcBef>
+              <a:buFont typeface="Arial" panose="020B0604020202020204" pitchFamily="34" charset="0"/>
+              <a:buChar char="•"/>
+              <a:defRPr sz="1800" kern="1200">
+                <a:solidFill>
+                  <a:schemeClr val="tx1"/>
+                </a:solidFill>
+                <a:latin typeface="+mn-lt"/>
+                <a:ea typeface="+mn-ea"/>
+                <a:cs typeface="+mn-cs"/>
+              </a:defRPr>
+            </a:lvl7pPr>
+            <a:lvl8pPr marL="3429000" indent="-228600" algn="l" defTabSz="914400" rtl="0" eaLnBrk="1" latinLnBrk="0" hangingPunct="1">
+              <a:lnSpc>
+                <a:spcPct val="90000"/>
+              </a:lnSpc>
+              <a:spcBef>
+                <a:spcPts val="500"/>
+              </a:spcBef>
+              <a:buFont typeface="Arial" panose="020B0604020202020204" pitchFamily="34" charset="0"/>
+              <a:buChar char="•"/>
+              <a:defRPr sz="1800" kern="1200">
+                <a:solidFill>
+                  <a:schemeClr val="tx1"/>
+                </a:solidFill>
+                <a:latin typeface="+mn-lt"/>
+                <a:ea typeface="+mn-ea"/>
+                <a:cs typeface="+mn-cs"/>
+              </a:defRPr>
+            </a:lvl8pPr>
+            <a:lvl9pPr marL="3886200" indent="-228600" algn="l" defTabSz="914400" rtl="0" eaLnBrk="1" latinLnBrk="0" hangingPunct="1">
+              <a:lnSpc>
+                <a:spcPct val="90000"/>
+              </a:lnSpc>
+              <a:spcBef>
+                <a:spcPts val="500"/>
+              </a:spcBef>
+              <a:buFont typeface="Arial" panose="020B0604020202020204" pitchFamily="34" charset="0"/>
+              <a:buChar char="•"/>
+              <a:defRPr sz="1800" kern="1200">
+                <a:solidFill>
+                  <a:schemeClr val="tx1"/>
+                </a:solidFill>
+                <a:latin typeface="+mn-lt"/>
+                <a:ea typeface="+mn-ea"/>
+                <a:cs typeface="+mn-cs"/>
+              </a:defRPr>
+            </a:lvl9pPr>
+          </a:lstStyle>
+          <a:p>
+            <a:pPr marL="0" marR="0" lvl="0" indent="0" algn="l" defTabSz="914400" rtl="0" eaLnBrk="1" fontAlgn="auto" latinLnBrk="0" hangingPunct="1">
+              <a:lnSpc>
+                <a:spcPct val="100000"/>
+              </a:lnSpc>
+              <a:spcBef>
+                <a:spcPts val="0"/>
+              </a:spcBef>
+              <a:spcAft>
+                <a:spcPts val="0"/>
+              </a:spcAft>
+              <a:buClrTx/>
+              <a:buSzTx/>
+              <a:buFont typeface="Wingdings" panose="05000000000000000000" pitchFamily="2" charset="2"/>
+              <a:buNone/>
+              <a:tabLst/>
+              <a:defRPr/>
+            </a:pPr>
+            <a:r>
+              <a:rPr kumimoji="0" lang="en-US" altLang="ko-KR" sz="1100" b="1" i="0" u="none" strike="noStrike" kern="1200" cap="none" spc="0" normalizeH="0" baseline="0" noProof="0" dirty="0" smtClean="0">
+                <a:ln>
+                  <a:noFill/>
+                </a:ln>
+                <a:solidFill>
+                  <a:srgbClr val="212E35"/>
+                </a:solidFill>
+                <a:effectLst/>
+                <a:uLnTx/>
+                <a:uFillTx/>
+                <a:latin typeface="Calibri"/>
+                <a:ea typeface="맑은 고딕" panose="020B0503020000020004" pitchFamily="50" charset="-127"/>
+              </a:rPr>
+              <a:t>Projection</a:t>
+            </a:r>
+            <a:r>
+              <a:rPr kumimoji="0" lang="en-US" altLang="ko-KR" sz="1100" b="1" i="0" u="none" strike="noStrike" kern="1200" cap="none" spc="0" normalizeH="0" noProof="0" dirty="0" smtClean="0">
+                <a:ln>
+                  <a:noFill/>
+                </a:ln>
+                <a:solidFill>
+                  <a:srgbClr val="212E35"/>
+                </a:solidFill>
+                <a:effectLst/>
+                <a:uLnTx/>
+                <a:uFillTx/>
+                <a:latin typeface="Calibri"/>
+                <a:ea typeface="맑은 고딕" panose="020B0503020000020004" pitchFamily="50" charset="-127"/>
+              </a:rPr>
+              <a:t> </a:t>
+            </a:r>
+            <a:r>
+              <a:rPr kumimoji="0" lang="ko-KR" altLang="en-US" sz="1100" b="1" i="0" u="none" strike="noStrike" kern="1200" cap="none" spc="0" normalizeH="0" baseline="0" noProof="0" dirty="0" smtClean="0">
+                <a:ln>
+                  <a:noFill/>
+                </a:ln>
+                <a:solidFill>
+                  <a:srgbClr val="212E35"/>
+                </a:solidFill>
+                <a:effectLst/>
+                <a:uLnTx/>
+                <a:uFillTx/>
+                <a:latin typeface="Calibri"/>
+                <a:ea typeface="맑은 고딕" panose="020B0503020000020004" pitchFamily="50" charset="-127"/>
+              </a:rPr>
+              <a:t>종류</a:t>
+            </a:r>
+            <a:endParaRPr kumimoji="0" lang="en-US" altLang="ko-KR" sz="1100" b="1" i="0" u="none" strike="noStrike" kern="1200" cap="none" spc="0" normalizeH="0" baseline="0" noProof="0" dirty="0">
+              <a:ln>
+                <a:noFill/>
+              </a:ln>
+              <a:solidFill>
+                <a:srgbClr val="212E35"/>
+              </a:solidFill>
+              <a:effectLst/>
+              <a:uLnTx/>
+              <a:uFillTx/>
+              <a:latin typeface="Calibri"/>
+              <a:ea typeface="맑은 고딕" panose="020B0503020000020004" pitchFamily="50" charset="-127"/>
+            </a:endParaRPr>
+          </a:p>
+          <a:p>
+            <a:pPr marL="400050" marR="0" lvl="1" indent="-171450" algn="l" defTabSz="914400" rtl="0" eaLnBrk="1" fontAlgn="auto" latinLnBrk="0" hangingPunct="1">
+              <a:lnSpc>
+                <a:spcPct val="100000"/>
+              </a:lnSpc>
+              <a:spcBef>
+                <a:spcPts val="0"/>
+              </a:spcBef>
+              <a:spcAft>
+                <a:spcPts val="0"/>
+              </a:spcAft>
+              <a:buClrTx/>
+              <a:buSzTx/>
+              <a:buFont typeface="Arial" pitchFamily="34" charset="0"/>
+              <a:buChar char="•"/>
+              <a:tabLst/>
+              <a:defRPr/>
+            </a:pPr>
+            <a:r>
+              <a:rPr kumimoji="0" lang="en-US" altLang="ko-KR" sz="1100" b="0" i="0" u="none" strike="noStrike" kern="1200" cap="none" spc="0" normalizeH="0" baseline="0" noProof="0" dirty="0">
+                <a:ln>
+                  <a:noFill/>
+                </a:ln>
+                <a:solidFill>
+                  <a:srgbClr val="212E35"/>
+                </a:solidFill>
+                <a:effectLst/>
+                <a:uLnTx/>
+                <a:uFillTx/>
+                <a:latin typeface="Calibri"/>
+                <a:ea typeface="맑은 고딕" panose="020B0503020000020004" pitchFamily="50" charset="-127"/>
+              </a:rPr>
+              <a:t>Super </a:t>
+            </a:r>
+            <a:r>
+              <a:rPr kumimoji="0" lang="ko-KR" altLang="en-US" sz="1100" b="0" i="0" u="none" strike="noStrike" kern="1200" cap="none" spc="0" normalizeH="0" baseline="0" noProof="0" dirty="0" err="1">
+                <a:ln>
+                  <a:noFill/>
+                </a:ln>
+                <a:solidFill>
+                  <a:srgbClr val="212E35"/>
+                </a:solidFill>
+                <a:effectLst/>
+                <a:uLnTx/>
+                <a:uFillTx/>
+                <a:latin typeface="Calibri"/>
+                <a:ea typeface="맑은 고딕" panose="020B0503020000020004" pitchFamily="50" charset="-127"/>
+              </a:rPr>
+              <a:t>프로젝션</a:t>
+            </a:r>
+            <a:endParaRPr kumimoji="0" lang="en-US" altLang="ko-KR" sz="1100" b="0" i="0" u="none" strike="noStrike" kern="1200" cap="none" spc="0" normalizeH="0" baseline="0" noProof="0" dirty="0">
+              <a:ln>
+                <a:noFill/>
+              </a:ln>
+              <a:solidFill>
+                <a:srgbClr val="212E35"/>
+              </a:solidFill>
+              <a:effectLst/>
+              <a:uLnTx/>
+              <a:uFillTx/>
+              <a:latin typeface="Calibri"/>
+              <a:ea typeface="맑은 고딕" panose="020B0503020000020004" pitchFamily="50" charset="-127"/>
+            </a:endParaRPr>
+          </a:p>
+          <a:p>
+            <a:pPr marL="571500" marR="0" lvl="2" indent="-171450" algn="l" defTabSz="914400" rtl="0" eaLnBrk="1" fontAlgn="auto" latinLnBrk="0" hangingPunct="1">
+              <a:lnSpc>
+                <a:spcPct val="100000"/>
+              </a:lnSpc>
+              <a:spcBef>
+                <a:spcPts val="0"/>
+              </a:spcBef>
+              <a:spcAft>
+                <a:spcPts val="0"/>
+              </a:spcAft>
+              <a:buClrTx/>
+              <a:buSzTx/>
+              <a:buFont typeface="Calibri" panose="020F0502020204030204" pitchFamily="34" charset="0"/>
+              <a:buChar char="-"/>
+              <a:tabLst/>
+              <a:defRPr/>
+            </a:pPr>
+            <a:r>
+              <a:rPr kumimoji="0" lang="ko-KR" altLang="en-US" sz="1100" b="0" i="0" u="none" strike="noStrike" kern="1200" cap="none" spc="0" normalizeH="0" baseline="0" noProof="0" dirty="0">
+                <a:ln>
+                  <a:noFill/>
+                </a:ln>
+                <a:solidFill>
+                  <a:srgbClr val="212E35"/>
+                </a:solidFill>
+                <a:effectLst/>
+                <a:uLnTx/>
+                <a:uFillTx/>
+                <a:latin typeface="Calibri"/>
+                <a:ea typeface="맑은 고딕" panose="020B0503020000020004" pitchFamily="50" charset="-127"/>
+              </a:rPr>
+              <a:t>테이블의 모든 </a:t>
+            </a:r>
+            <a:r>
+              <a:rPr kumimoji="0" lang="ko-KR" altLang="en-US" sz="1100" b="0" i="0" u="none" strike="noStrike" kern="1200" cap="none" spc="0" normalizeH="0" baseline="0" noProof="0" dirty="0" err="1">
+                <a:ln>
+                  <a:noFill/>
+                </a:ln>
+                <a:solidFill>
+                  <a:srgbClr val="212E35"/>
+                </a:solidFill>
+                <a:effectLst/>
+                <a:uLnTx/>
+                <a:uFillTx/>
+                <a:latin typeface="Calibri"/>
+                <a:ea typeface="맑은 고딕" panose="020B0503020000020004" pitchFamily="50" charset="-127"/>
+              </a:rPr>
+              <a:t>컬럼을</a:t>
+            </a:r>
+            <a:r>
+              <a:rPr kumimoji="0" lang="ko-KR" altLang="en-US" sz="1100" b="0" i="0" u="none" strike="noStrike" kern="1200" cap="none" spc="0" normalizeH="0" baseline="0" noProof="0" dirty="0">
+                <a:ln>
+                  <a:noFill/>
+                </a:ln>
+                <a:solidFill>
+                  <a:srgbClr val="212E35"/>
+                </a:solidFill>
+                <a:effectLst/>
+                <a:uLnTx/>
+                <a:uFillTx/>
+                <a:latin typeface="Calibri"/>
+                <a:ea typeface="맑은 고딕" panose="020B0503020000020004" pitchFamily="50" charset="-127"/>
+              </a:rPr>
+              <a:t> 포함</a:t>
+            </a:r>
+            <a:endParaRPr kumimoji="0" lang="en-US" altLang="ko-KR" sz="1100" b="0" i="0" u="none" strike="noStrike" kern="1200" cap="none" spc="0" normalizeH="0" baseline="0" noProof="0" dirty="0">
+              <a:ln>
+                <a:noFill/>
+              </a:ln>
+              <a:solidFill>
+                <a:srgbClr val="212E35"/>
+              </a:solidFill>
+              <a:effectLst/>
+              <a:uLnTx/>
+              <a:uFillTx/>
+              <a:latin typeface="Calibri"/>
+              <a:ea typeface="맑은 고딕" panose="020B0503020000020004" pitchFamily="50" charset="-127"/>
+            </a:endParaRPr>
+          </a:p>
+          <a:p>
+            <a:pPr marL="571500" marR="0" lvl="2" indent="-171450" algn="l" defTabSz="914400" rtl="0" eaLnBrk="1" fontAlgn="auto" latinLnBrk="0" hangingPunct="1">
+              <a:lnSpc>
+                <a:spcPct val="100000"/>
+              </a:lnSpc>
+              <a:spcBef>
+                <a:spcPts val="0"/>
+              </a:spcBef>
+              <a:spcAft>
+                <a:spcPts val="0"/>
+              </a:spcAft>
+              <a:buClrTx/>
+              <a:buSzTx/>
+              <a:buFont typeface="Calibri" panose="020F0502020204030204" pitchFamily="34" charset="0"/>
+              <a:buChar char="-"/>
+              <a:tabLst/>
+              <a:defRPr/>
+            </a:pPr>
+            <a:r>
+              <a:rPr kumimoji="0" lang="ko-KR" altLang="en-US" sz="1100" b="0" i="0" u="none" strike="noStrike" kern="1200" cap="none" spc="0" normalizeH="0" baseline="0" noProof="0" dirty="0">
+                <a:ln>
+                  <a:noFill/>
+                </a:ln>
+                <a:solidFill>
+                  <a:srgbClr val="212E35"/>
+                </a:solidFill>
+                <a:effectLst/>
+                <a:uLnTx/>
+                <a:uFillTx/>
+                <a:latin typeface="Calibri"/>
+                <a:ea typeface="맑은 고딕" panose="020B0503020000020004" pitchFamily="50" charset="-127"/>
+              </a:rPr>
+              <a:t>다른 속성의 </a:t>
+            </a:r>
+            <a:r>
+              <a:rPr kumimoji="0" lang="en-US" altLang="ko-KR" sz="1100" b="0" i="0" u="none" strike="noStrike" kern="1200" cap="none" spc="0" normalizeH="0" baseline="0" noProof="0" dirty="0">
+                <a:ln>
+                  <a:noFill/>
+                </a:ln>
+                <a:solidFill>
+                  <a:srgbClr val="212E35"/>
+                </a:solidFill>
+                <a:effectLst/>
+                <a:uLnTx/>
+                <a:uFillTx/>
+                <a:latin typeface="Calibri"/>
+                <a:ea typeface="맑은 고딕" panose="020B0503020000020004" pitchFamily="50" charset="-127"/>
+              </a:rPr>
+              <a:t>Super</a:t>
+            </a:r>
+            <a:r>
+              <a:rPr kumimoji="0" lang="ko-KR" altLang="en-US" sz="1100" b="0" i="0" u="none" strike="noStrike" kern="1200" cap="none" spc="0" normalizeH="0" baseline="0" noProof="0" dirty="0" err="1">
+                <a:ln>
+                  <a:noFill/>
+                </a:ln>
+                <a:solidFill>
+                  <a:srgbClr val="212E35"/>
+                </a:solidFill>
+                <a:effectLst/>
+                <a:uLnTx/>
+                <a:uFillTx/>
+                <a:latin typeface="Calibri"/>
+                <a:ea typeface="맑은 고딕" panose="020B0503020000020004" pitchFamily="50" charset="-127"/>
+              </a:rPr>
+              <a:t>프로젝션을</a:t>
+            </a:r>
+            <a:r>
+              <a:rPr kumimoji="0" lang="ko-KR" altLang="en-US" sz="1100" b="0" i="0" u="none" strike="noStrike" kern="1200" cap="none" spc="0" normalizeH="0" baseline="0" noProof="0" dirty="0">
+                <a:ln>
+                  <a:noFill/>
+                </a:ln>
+                <a:solidFill>
+                  <a:srgbClr val="212E35"/>
+                </a:solidFill>
+                <a:effectLst/>
+                <a:uLnTx/>
+                <a:uFillTx/>
+                <a:latin typeface="Calibri"/>
+                <a:ea typeface="맑은 고딕" panose="020B0503020000020004" pitchFamily="50" charset="-127"/>
+              </a:rPr>
+              <a:t> 만들어 데이터를 동기화 시킨 후에 만 기존 </a:t>
+            </a:r>
+            <a:r>
+              <a:rPr kumimoji="0" lang="en-US" altLang="ko-KR" sz="1100" b="0" i="0" u="none" strike="noStrike" kern="1200" cap="none" spc="0" normalizeH="0" baseline="0" noProof="0" dirty="0">
+                <a:ln>
+                  <a:noFill/>
+                </a:ln>
+                <a:solidFill>
+                  <a:srgbClr val="212E35"/>
+                </a:solidFill>
+                <a:effectLst/>
+                <a:uLnTx/>
+                <a:uFillTx/>
+                <a:latin typeface="Calibri"/>
+                <a:ea typeface="맑은 고딕" panose="020B0503020000020004" pitchFamily="50" charset="-127"/>
+              </a:rPr>
+              <a:t>Super</a:t>
+            </a:r>
+            <a:r>
+              <a:rPr kumimoji="0" lang="ko-KR" altLang="en-US" sz="1100" b="0" i="0" u="none" strike="noStrike" kern="1200" cap="none" spc="0" normalizeH="0" baseline="0" noProof="0" dirty="0" err="1">
+                <a:ln>
+                  <a:noFill/>
+                </a:ln>
+                <a:solidFill>
+                  <a:srgbClr val="212E35"/>
+                </a:solidFill>
+                <a:effectLst/>
+                <a:uLnTx/>
+                <a:uFillTx/>
+                <a:latin typeface="Calibri"/>
+                <a:ea typeface="맑은 고딕" panose="020B0503020000020004" pitchFamily="50" charset="-127"/>
+              </a:rPr>
+              <a:t>프로젝션</a:t>
+            </a:r>
+            <a:r>
+              <a:rPr kumimoji="0" lang="ko-KR" altLang="en-US" sz="1100" b="0" i="0" u="none" strike="noStrike" kern="1200" cap="none" spc="0" normalizeH="0" baseline="0" noProof="0" dirty="0">
+                <a:ln>
+                  <a:noFill/>
+                </a:ln>
+                <a:solidFill>
+                  <a:srgbClr val="212E35"/>
+                </a:solidFill>
+                <a:effectLst/>
+                <a:uLnTx/>
+                <a:uFillTx/>
+                <a:latin typeface="Calibri"/>
+                <a:ea typeface="맑은 고딕" panose="020B0503020000020004" pitchFamily="50" charset="-127"/>
+              </a:rPr>
+              <a:t> 삭제 가능</a:t>
+            </a:r>
+            <a:endParaRPr kumimoji="0" lang="en-US" altLang="ko-KR" sz="1100" b="0" i="0" u="none" strike="noStrike" kern="1200" cap="none" spc="0" normalizeH="0" baseline="0" noProof="0" dirty="0">
+              <a:ln>
+                <a:noFill/>
+              </a:ln>
+              <a:solidFill>
+                <a:srgbClr val="212E35"/>
+              </a:solidFill>
+              <a:effectLst/>
+              <a:uLnTx/>
+              <a:uFillTx/>
+              <a:latin typeface="Calibri"/>
+              <a:ea typeface="맑은 고딕" panose="020B0503020000020004" pitchFamily="50" charset="-127"/>
+            </a:endParaRPr>
+          </a:p>
+          <a:p>
+            <a:pPr marL="400050" marR="0" lvl="1" indent="-171450" algn="l" defTabSz="914400" rtl="0" eaLnBrk="1" fontAlgn="auto" latinLnBrk="0" hangingPunct="1">
+              <a:lnSpc>
+                <a:spcPct val="100000"/>
+              </a:lnSpc>
+              <a:spcBef>
+                <a:spcPts val="0"/>
+              </a:spcBef>
+              <a:spcAft>
+                <a:spcPts val="0"/>
+              </a:spcAft>
+              <a:buClrTx/>
+              <a:buSzTx/>
+              <a:buFont typeface="Arial" pitchFamily="34" charset="0"/>
+              <a:buChar char="•"/>
+              <a:tabLst/>
+              <a:defRPr/>
+            </a:pPr>
+            <a:r>
+              <a:rPr kumimoji="0" lang="en-US" altLang="ko-KR" sz="1100" b="0" i="0" u="none" strike="noStrike" kern="1200" cap="none" spc="0" normalizeH="0" baseline="0" noProof="0" dirty="0">
+                <a:ln>
+                  <a:noFill/>
+                </a:ln>
+                <a:solidFill>
+                  <a:srgbClr val="212E35"/>
+                </a:solidFill>
+                <a:effectLst/>
+                <a:uLnTx/>
+                <a:uFillTx/>
+                <a:latin typeface="Calibri"/>
+                <a:ea typeface="맑은 고딕" panose="020B0503020000020004" pitchFamily="50" charset="-127"/>
+              </a:rPr>
+              <a:t>Query-specific </a:t>
+            </a:r>
+            <a:r>
+              <a:rPr kumimoji="0" lang="ko-KR" altLang="en-US" sz="1100" b="0" i="0" u="none" strike="noStrike" kern="1200" cap="none" spc="0" normalizeH="0" baseline="0" noProof="0" dirty="0" err="1">
+                <a:ln>
+                  <a:noFill/>
+                </a:ln>
+                <a:solidFill>
+                  <a:srgbClr val="212E35"/>
+                </a:solidFill>
+                <a:effectLst/>
+                <a:uLnTx/>
+                <a:uFillTx/>
+                <a:latin typeface="Calibri"/>
+                <a:ea typeface="맑은 고딕" panose="020B0503020000020004" pitchFamily="50" charset="-127"/>
+              </a:rPr>
+              <a:t>프로젝션</a:t>
+            </a:r>
+            <a:endParaRPr kumimoji="0" lang="en-US" altLang="ko-KR" sz="1100" b="0" i="0" u="none" strike="noStrike" kern="1200" cap="none" spc="0" normalizeH="0" baseline="0" noProof="0" dirty="0">
+              <a:ln>
+                <a:noFill/>
+              </a:ln>
+              <a:solidFill>
+                <a:srgbClr val="212E35"/>
+              </a:solidFill>
+              <a:effectLst/>
+              <a:uLnTx/>
+              <a:uFillTx/>
+              <a:latin typeface="Calibri"/>
+              <a:ea typeface="맑은 고딕" panose="020B0503020000020004" pitchFamily="50" charset="-127"/>
+            </a:endParaRPr>
+          </a:p>
+          <a:p>
+            <a:pPr marL="571500" marR="0" lvl="2" indent="-171450" algn="l" defTabSz="914400" rtl="0" eaLnBrk="1" fontAlgn="auto" latinLnBrk="0" hangingPunct="1">
+              <a:lnSpc>
+                <a:spcPct val="100000"/>
+              </a:lnSpc>
+              <a:spcBef>
+                <a:spcPts val="0"/>
+              </a:spcBef>
+              <a:spcAft>
+                <a:spcPts val="0"/>
+              </a:spcAft>
+              <a:buClrTx/>
+              <a:buSzTx/>
+              <a:buFont typeface="Calibri" panose="020F0502020204030204" pitchFamily="34" charset="0"/>
+              <a:buChar char="-"/>
+              <a:tabLst/>
+              <a:defRPr/>
+            </a:pPr>
+            <a:r>
+              <a:rPr kumimoji="0" lang="ko-KR" altLang="en-US" sz="1100" b="0" i="0" u="none" strike="noStrike" kern="1200" cap="none" spc="0" normalizeH="0" baseline="0" noProof="0" dirty="0">
+                <a:ln>
+                  <a:noFill/>
+                </a:ln>
+                <a:solidFill>
+                  <a:srgbClr val="212E35"/>
+                </a:solidFill>
+                <a:effectLst/>
+                <a:uLnTx/>
+                <a:uFillTx/>
+                <a:latin typeface="Calibri"/>
+                <a:ea typeface="맑은 고딕" panose="020B0503020000020004" pitchFamily="50" charset="-127"/>
+              </a:rPr>
+              <a:t>특정 쿼리 튜닝을 위해 추가된 </a:t>
+            </a:r>
+            <a:r>
+              <a:rPr kumimoji="0" lang="ko-KR" altLang="en-US" sz="1100" b="0" i="0" u="none" strike="noStrike" kern="1200" cap="none" spc="0" normalizeH="0" baseline="0" noProof="0" dirty="0" err="1">
+                <a:ln>
+                  <a:noFill/>
+                </a:ln>
+                <a:solidFill>
+                  <a:srgbClr val="212E35"/>
+                </a:solidFill>
+                <a:effectLst/>
+                <a:uLnTx/>
+                <a:uFillTx/>
+                <a:latin typeface="Calibri"/>
+                <a:ea typeface="맑은 고딕" panose="020B0503020000020004" pitchFamily="50" charset="-127"/>
+              </a:rPr>
+              <a:t>프로젝션</a:t>
+            </a:r>
+            <a:endParaRPr kumimoji="0" lang="en-US" altLang="ko-KR" sz="1100" b="0" i="0" u="none" strike="noStrike" kern="1200" cap="none" spc="0" normalizeH="0" baseline="0" noProof="0" dirty="0">
+              <a:ln>
+                <a:noFill/>
+              </a:ln>
+              <a:solidFill>
+                <a:srgbClr val="212E35"/>
+              </a:solidFill>
+              <a:effectLst/>
+              <a:uLnTx/>
+              <a:uFillTx/>
+              <a:latin typeface="Calibri"/>
+              <a:ea typeface="맑은 고딕" panose="020B0503020000020004" pitchFamily="50" charset="-127"/>
+            </a:endParaRPr>
+          </a:p>
+          <a:p>
+            <a:pPr marL="571500" marR="0" lvl="2" indent="-171450" algn="l" defTabSz="914400" rtl="0" eaLnBrk="1" fontAlgn="auto" latinLnBrk="0" hangingPunct="1">
+              <a:lnSpc>
+                <a:spcPct val="100000"/>
+              </a:lnSpc>
+              <a:spcBef>
+                <a:spcPts val="0"/>
+              </a:spcBef>
+              <a:spcAft>
+                <a:spcPts val="0"/>
+              </a:spcAft>
+              <a:buClrTx/>
+              <a:buSzTx/>
+              <a:buFont typeface="Calibri" panose="020F0502020204030204" pitchFamily="34" charset="0"/>
+              <a:buChar char="-"/>
+              <a:tabLst/>
+              <a:defRPr/>
+            </a:pPr>
+            <a:r>
+              <a:rPr kumimoji="0" lang="ko-KR" altLang="en-US" sz="1100" b="0" i="0" u="none" strike="noStrike" kern="1200" cap="none" spc="0" normalizeH="0" baseline="0" noProof="0" dirty="0">
+                <a:ln>
+                  <a:noFill/>
+                </a:ln>
+                <a:solidFill>
+                  <a:srgbClr val="212E35"/>
+                </a:solidFill>
+                <a:effectLst/>
+                <a:uLnTx/>
+                <a:uFillTx/>
+                <a:latin typeface="Calibri"/>
+                <a:ea typeface="맑은 고딕" panose="020B0503020000020004" pitchFamily="50" charset="-127"/>
+              </a:rPr>
+              <a:t>일부 </a:t>
+            </a:r>
+            <a:r>
+              <a:rPr kumimoji="0" lang="ko-KR" altLang="en-US" sz="1100" b="0" i="0" u="none" strike="noStrike" kern="1200" cap="none" spc="0" normalizeH="0" baseline="0" noProof="0" dirty="0" err="1">
+                <a:ln>
+                  <a:noFill/>
+                </a:ln>
+                <a:solidFill>
+                  <a:srgbClr val="212E35"/>
+                </a:solidFill>
+                <a:effectLst/>
+                <a:uLnTx/>
+                <a:uFillTx/>
+                <a:latin typeface="Calibri"/>
+                <a:ea typeface="맑은 고딕" panose="020B0503020000020004" pitchFamily="50" charset="-127"/>
+              </a:rPr>
+              <a:t>컬럼만으로</a:t>
+            </a:r>
+            <a:r>
+              <a:rPr kumimoji="0" lang="ko-KR" altLang="en-US" sz="1100" b="0" i="0" u="none" strike="noStrike" kern="1200" cap="none" spc="0" normalizeH="0" baseline="0" noProof="0" dirty="0">
+                <a:ln>
+                  <a:noFill/>
+                </a:ln>
+                <a:solidFill>
+                  <a:srgbClr val="212E35"/>
+                </a:solidFill>
+                <a:effectLst/>
+                <a:uLnTx/>
+                <a:uFillTx/>
+                <a:latin typeface="Calibri"/>
+                <a:ea typeface="맑은 고딕" panose="020B0503020000020004" pitchFamily="50" charset="-127"/>
+              </a:rPr>
+              <a:t> 생성 가능</a:t>
+            </a:r>
+            <a:endParaRPr kumimoji="0" lang="en-US" altLang="ko-KR" sz="1100" b="0" i="0" u="none" strike="noStrike" kern="1200" cap="none" spc="0" normalizeH="0" baseline="0" noProof="0" dirty="0">
+              <a:ln>
+                <a:noFill/>
+              </a:ln>
+              <a:solidFill>
+                <a:srgbClr val="212E35"/>
+              </a:solidFill>
+              <a:effectLst/>
+              <a:uLnTx/>
+              <a:uFillTx/>
+              <a:latin typeface="Calibri"/>
+              <a:ea typeface="맑은 고딕" panose="020B0503020000020004" pitchFamily="50" charset="-127"/>
+            </a:endParaRPr>
+          </a:p>
+          <a:p>
+            <a:pPr marL="400050" marR="0" lvl="1" indent="-171450" algn="l" defTabSz="914400" rtl="0" eaLnBrk="1" fontAlgn="auto" latinLnBrk="0" hangingPunct="1">
+              <a:lnSpc>
+                <a:spcPct val="100000"/>
+              </a:lnSpc>
+              <a:spcBef>
+                <a:spcPts val="0"/>
+              </a:spcBef>
+              <a:spcAft>
+                <a:spcPts val="0"/>
+              </a:spcAft>
+              <a:buClrTx/>
+              <a:buSzTx/>
+              <a:buFont typeface="Arial" pitchFamily="34" charset="0"/>
+              <a:buChar char="•"/>
+              <a:tabLst/>
+              <a:defRPr/>
+            </a:pPr>
+            <a:r>
+              <a:rPr kumimoji="0" lang="en-US" altLang="ko-KR" sz="1100" b="0" i="0" u="none" strike="noStrike" kern="1200" cap="none" spc="0" normalizeH="0" baseline="0" noProof="0" dirty="0">
+                <a:ln>
+                  <a:noFill/>
+                </a:ln>
+                <a:solidFill>
+                  <a:srgbClr val="212E35"/>
+                </a:solidFill>
+                <a:effectLst/>
+                <a:uLnTx/>
+                <a:uFillTx/>
+                <a:latin typeface="Calibri"/>
+                <a:ea typeface="맑은 고딕" panose="020B0503020000020004" pitchFamily="50" charset="-127"/>
+              </a:rPr>
+              <a:t>Aggregate </a:t>
+            </a:r>
+            <a:r>
+              <a:rPr kumimoji="0" lang="ko-KR" altLang="en-US" sz="1100" b="0" i="0" u="none" strike="noStrike" kern="1200" cap="none" spc="0" normalizeH="0" baseline="0" noProof="0" dirty="0" err="1">
+                <a:ln>
+                  <a:noFill/>
+                </a:ln>
+                <a:solidFill>
+                  <a:srgbClr val="212E35"/>
+                </a:solidFill>
+                <a:effectLst/>
+                <a:uLnTx/>
+                <a:uFillTx/>
+                <a:latin typeface="Calibri"/>
+                <a:ea typeface="맑은 고딕" panose="020B0503020000020004" pitchFamily="50" charset="-127"/>
+              </a:rPr>
+              <a:t>프로젝션</a:t>
+            </a:r>
+            <a:endParaRPr kumimoji="0" lang="en-US" altLang="ko-KR" sz="1100" b="0" i="0" u="none" strike="noStrike" kern="1200" cap="none" spc="0" normalizeH="0" baseline="0" noProof="0" dirty="0">
+              <a:ln>
+                <a:noFill/>
+              </a:ln>
+              <a:solidFill>
+                <a:srgbClr val="212E35"/>
+              </a:solidFill>
+              <a:effectLst/>
+              <a:uLnTx/>
+              <a:uFillTx/>
+              <a:latin typeface="Calibri"/>
+              <a:ea typeface="맑은 고딕" panose="020B0503020000020004" pitchFamily="50" charset="-127"/>
+            </a:endParaRPr>
+          </a:p>
+          <a:p>
+            <a:pPr marL="571500" marR="0" lvl="2" indent="-171450" algn="l" defTabSz="914400" rtl="0" eaLnBrk="1" fontAlgn="auto" latinLnBrk="0" hangingPunct="1">
+              <a:lnSpc>
+                <a:spcPct val="100000"/>
+              </a:lnSpc>
+              <a:spcBef>
+                <a:spcPts val="0"/>
+              </a:spcBef>
+              <a:spcAft>
+                <a:spcPts val="0"/>
+              </a:spcAft>
+              <a:buClrTx/>
+              <a:buSzTx/>
+              <a:buFont typeface="Calibri" panose="020F0502020204030204" pitchFamily="34" charset="0"/>
+              <a:buChar char="-"/>
+              <a:tabLst/>
+              <a:defRPr/>
+            </a:pPr>
+            <a:r>
+              <a:rPr kumimoji="0" lang="en-US" altLang="ko-KR" sz="1100" b="0" i="0" u="none" strike="noStrike" kern="1200" cap="none" spc="0" normalizeH="0" baseline="0" noProof="0" dirty="0">
+                <a:ln>
+                  <a:noFill/>
+                </a:ln>
+                <a:solidFill>
+                  <a:srgbClr val="212E35"/>
+                </a:solidFill>
+                <a:effectLst/>
+                <a:uLnTx/>
+                <a:uFillTx/>
+                <a:latin typeface="Calibri"/>
+                <a:ea typeface="맑은 고딕" panose="020B0503020000020004" pitchFamily="50" charset="-127"/>
+              </a:rPr>
+              <a:t>SUM, COUNT</a:t>
+            </a:r>
+            <a:r>
+              <a:rPr kumimoji="0" lang="ko-KR" altLang="en-US" sz="1100" b="0" i="0" u="none" strike="noStrike" kern="1200" cap="none" spc="0" normalizeH="0" baseline="0" noProof="0" dirty="0">
+                <a:ln>
+                  <a:noFill/>
+                </a:ln>
+                <a:solidFill>
+                  <a:srgbClr val="212E35"/>
+                </a:solidFill>
+                <a:effectLst/>
+                <a:uLnTx/>
+                <a:uFillTx/>
+                <a:latin typeface="Calibri"/>
+                <a:ea typeface="맑은 고딕" panose="020B0503020000020004" pitchFamily="50" charset="-127"/>
+              </a:rPr>
+              <a:t>와 같은 </a:t>
+            </a:r>
+            <a:r>
+              <a:rPr kumimoji="0" lang="ko-KR" altLang="en-US" sz="1100" b="0" i="0" u="none" strike="noStrike" kern="1200" cap="none" spc="0" normalizeH="0" baseline="0" noProof="0" dirty="0" err="1">
+                <a:ln>
+                  <a:noFill/>
+                </a:ln>
+                <a:solidFill>
+                  <a:srgbClr val="212E35"/>
+                </a:solidFill>
+                <a:effectLst/>
+                <a:uLnTx/>
+                <a:uFillTx/>
+                <a:latin typeface="Calibri"/>
+                <a:ea typeface="맑은 고딕" panose="020B0503020000020004" pitchFamily="50" charset="-127"/>
+              </a:rPr>
+              <a:t>표현식</a:t>
+            </a:r>
+            <a:r>
+              <a:rPr kumimoji="0" lang="ko-KR" altLang="en-US" sz="1100" b="0" i="0" u="none" strike="noStrike" kern="1200" cap="none" spc="0" normalizeH="0" baseline="0" noProof="0" dirty="0">
+                <a:ln>
+                  <a:noFill/>
+                </a:ln>
+                <a:solidFill>
+                  <a:srgbClr val="212E35"/>
+                </a:solidFill>
+                <a:effectLst/>
+                <a:uLnTx/>
+                <a:uFillTx/>
+                <a:latin typeface="Calibri"/>
+                <a:ea typeface="맑은 고딕" panose="020B0503020000020004" pitchFamily="50" charset="-127"/>
+              </a:rPr>
+              <a:t> 또는 집계함수를 포함하고 있는 </a:t>
+            </a:r>
+            <a:r>
+              <a:rPr kumimoji="0" lang="ko-KR" altLang="en-US" sz="1100" b="0" i="0" u="none" strike="noStrike" kern="1200" cap="none" spc="0" normalizeH="0" baseline="0" noProof="0" dirty="0" err="1">
+                <a:ln>
+                  <a:noFill/>
+                </a:ln>
+                <a:solidFill>
+                  <a:srgbClr val="212E35"/>
+                </a:solidFill>
+                <a:effectLst/>
+                <a:uLnTx/>
+                <a:uFillTx/>
+                <a:latin typeface="Calibri"/>
+                <a:ea typeface="맑은 고딕" panose="020B0503020000020004" pitchFamily="50" charset="-127"/>
+              </a:rPr>
+              <a:t>프로젝션</a:t>
+            </a:r>
+            <a:endParaRPr kumimoji="0" lang="en-US" altLang="ko-KR" sz="1100" b="0" i="0" u="none" strike="noStrike" kern="1200" cap="none" spc="0" normalizeH="0" baseline="0" noProof="0" dirty="0">
+              <a:ln>
+                <a:noFill/>
+              </a:ln>
+              <a:solidFill>
+                <a:srgbClr val="212E35"/>
+              </a:solidFill>
+              <a:effectLst/>
+              <a:uLnTx/>
+              <a:uFillTx/>
+              <a:latin typeface="Calibri"/>
+              <a:ea typeface="맑은 고딕" panose="020B0503020000020004" pitchFamily="50" charset="-127"/>
+            </a:endParaRPr>
+          </a:p>
+          <a:p>
+            <a:pPr marL="571500" marR="0" lvl="2" indent="-171450" algn="l" defTabSz="914400" rtl="0" eaLnBrk="1" fontAlgn="auto" latinLnBrk="0" hangingPunct="1">
+              <a:lnSpc>
+                <a:spcPct val="100000"/>
+              </a:lnSpc>
+              <a:spcBef>
+                <a:spcPts val="0"/>
+              </a:spcBef>
+              <a:spcAft>
+                <a:spcPts val="0"/>
+              </a:spcAft>
+              <a:buClrTx/>
+              <a:buSzTx/>
+              <a:buFont typeface="Calibri" panose="020F0502020204030204" pitchFamily="34" charset="0"/>
+              <a:buChar char="-"/>
+              <a:tabLst/>
+              <a:defRPr/>
+            </a:pPr>
+            <a:r>
+              <a:rPr kumimoji="0" lang="ko-KR" altLang="en-US" sz="1100" b="0" i="0" u="none" strike="noStrike" kern="1200" cap="none" spc="0" normalizeH="0" baseline="0" noProof="0" dirty="0">
+                <a:ln>
+                  <a:noFill/>
+                </a:ln>
+                <a:solidFill>
+                  <a:srgbClr val="212E35"/>
+                </a:solidFill>
+                <a:effectLst/>
+                <a:uLnTx/>
+                <a:uFillTx/>
+                <a:latin typeface="Calibri"/>
+                <a:ea typeface="맑은 고딕" panose="020B0503020000020004" pitchFamily="50" charset="-127"/>
+              </a:rPr>
+              <a:t>이미 집계된 데이터가 포함되어 </a:t>
+            </a:r>
+            <a:endParaRPr kumimoji="0" lang="en-US" altLang="ko-KR" sz="1100" b="0" i="0" u="none" strike="noStrike" kern="1200" cap="none" spc="0" normalizeH="0" baseline="0" noProof="0" dirty="0">
+              <a:ln>
+                <a:noFill/>
+              </a:ln>
+              <a:solidFill>
+                <a:srgbClr val="212E35"/>
+              </a:solidFill>
+              <a:effectLst/>
+              <a:uLnTx/>
+              <a:uFillTx/>
+              <a:latin typeface="Calibri"/>
+              <a:ea typeface="맑은 고딕" panose="020B0503020000020004" pitchFamily="50" charset="-127"/>
+            </a:endParaRPr>
+          </a:p>
+          <a:p>
+            <a:pPr marL="400050" marR="0" lvl="1" indent="-171450" algn="l" defTabSz="914400" rtl="0" eaLnBrk="1" fontAlgn="auto" latinLnBrk="0" hangingPunct="1">
+              <a:lnSpc>
+                <a:spcPct val="100000"/>
+              </a:lnSpc>
+              <a:spcBef>
+                <a:spcPts val="0"/>
+              </a:spcBef>
+              <a:spcAft>
+                <a:spcPts val="0"/>
+              </a:spcAft>
+              <a:buClrTx/>
+              <a:buSzTx/>
+              <a:buFont typeface="Arial" pitchFamily="34" charset="0"/>
+              <a:buChar char="•"/>
+              <a:tabLst/>
+              <a:defRPr/>
+            </a:pPr>
+            <a:r>
+              <a:rPr kumimoji="0" lang="en-US" altLang="ko-KR" sz="1100" b="0" i="0" u="none" strike="noStrike" kern="1200" cap="none" spc="0" normalizeH="0" baseline="0" noProof="0" dirty="0">
+                <a:ln>
+                  <a:noFill/>
+                </a:ln>
+                <a:solidFill>
+                  <a:srgbClr val="212E35"/>
+                </a:solidFill>
+                <a:effectLst/>
+                <a:uLnTx/>
+                <a:uFillTx/>
+                <a:latin typeface="Calibri"/>
+                <a:ea typeface="맑은 고딕" panose="020B0503020000020004" pitchFamily="50" charset="-127"/>
+              </a:rPr>
+              <a:t>Buddy </a:t>
+            </a:r>
+            <a:r>
+              <a:rPr kumimoji="0" lang="ko-KR" altLang="en-US" sz="1100" b="0" i="0" u="none" strike="noStrike" kern="1200" cap="none" spc="0" normalizeH="0" baseline="0" noProof="0" dirty="0" err="1">
+                <a:ln>
+                  <a:noFill/>
+                </a:ln>
+                <a:solidFill>
+                  <a:srgbClr val="212E35"/>
+                </a:solidFill>
+                <a:effectLst/>
+                <a:uLnTx/>
+                <a:uFillTx/>
+                <a:latin typeface="Calibri"/>
+                <a:ea typeface="맑은 고딕" panose="020B0503020000020004" pitchFamily="50" charset="-127"/>
+              </a:rPr>
+              <a:t>프로젝션</a:t>
+            </a:r>
+            <a:endParaRPr kumimoji="0" lang="en-US" altLang="ko-KR" sz="1100" b="0" i="0" u="none" strike="noStrike" kern="1200" cap="none" spc="0" normalizeH="0" baseline="0" noProof="0" dirty="0">
+              <a:ln>
+                <a:noFill/>
+              </a:ln>
+              <a:solidFill>
+                <a:srgbClr val="212E35"/>
+              </a:solidFill>
+              <a:effectLst/>
+              <a:uLnTx/>
+              <a:uFillTx/>
+              <a:latin typeface="Calibri"/>
+              <a:ea typeface="맑은 고딕" panose="020B0503020000020004" pitchFamily="50" charset="-127"/>
+            </a:endParaRPr>
+          </a:p>
+          <a:p>
+            <a:pPr marL="571500" marR="0" lvl="2" indent="-171450" algn="l" defTabSz="914400" rtl="0" eaLnBrk="1" fontAlgn="auto" latinLnBrk="0" hangingPunct="1">
+              <a:lnSpc>
+                <a:spcPct val="100000"/>
+              </a:lnSpc>
+              <a:spcBef>
+                <a:spcPts val="0"/>
+              </a:spcBef>
+              <a:spcAft>
+                <a:spcPts val="0"/>
+              </a:spcAft>
+              <a:buClrTx/>
+              <a:buSzTx/>
+              <a:buFont typeface="Calibri" panose="020F0502020204030204" pitchFamily="34" charset="0"/>
+              <a:buChar char="-"/>
+              <a:tabLst/>
+              <a:defRPr/>
+            </a:pPr>
+            <a:r>
+              <a:rPr kumimoji="0" lang="ko-KR" altLang="en-US" sz="1100" b="0" i="0" u="none" strike="noStrike" kern="1200" cap="none" spc="0" normalizeH="0" baseline="0" noProof="0" dirty="0" err="1">
+                <a:ln>
+                  <a:noFill/>
+                </a:ln>
+                <a:solidFill>
+                  <a:srgbClr val="212E35"/>
+                </a:solidFill>
+                <a:effectLst/>
+                <a:uLnTx/>
+                <a:uFillTx/>
+                <a:latin typeface="Calibri"/>
+                <a:ea typeface="맑은 고딕" panose="020B0503020000020004" pitchFamily="50" charset="-127"/>
+              </a:rPr>
+              <a:t>프로젝션</a:t>
+            </a:r>
+            <a:r>
+              <a:rPr kumimoji="0" lang="ko-KR" altLang="en-US" sz="1100" b="0" i="0" u="none" strike="noStrike" kern="1200" cap="none" spc="0" normalizeH="0" baseline="0" noProof="0" dirty="0">
+                <a:ln>
+                  <a:noFill/>
+                </a:ln>
+                <a:solidFill>
+                  <a:srgbClr val="212E35"/>
+                </a:solidFill>
+                <a:effectLst/>
+                <a:uLnTx/>
+                <a:uFillTx/>
+                <a:latin typeface="Calibri"/>
+                <a:ea typeface="맑은 고딕" panose="020B0503020000020004" pitchFamily="50" charset="-127"/>
+              </a:rPr>
+              <a:t> 속성의 </a:t>
+            </a:r>
+            <a:r>
+              <a:rPr kumimoji="0" lang="en-US" altLang="ko-KR" sz="1100" b="0" i="0" u="none" strike="noStrike" kern="1200" cap="none" spc="0" normalizeH="0" baseline="0" noProof="0" dirty="0">
+                <a:ln>
+                  <a:noFill/>
+                </a:ln>
+                <a:solidFill>
+                  <a:srgbClr val="212E35"/>
+                </a:solidFill>
+                <a:effectLst/>
+                <a:uLnTx/>
+                <a:uFillTx/>
+                <a:latin typeface="Calibri"/>
+                <a:ea typeface="맑은 고딕" panose="020B0503020000020004" pitchFamily="50" charset="-127"/>
+              </a:rPr>
+              <a:t>KSAFE </a:t>
+            </a:r>
+            <a:r>
+              <a:rPr kumimoji="0" lang="ko-KR" altLang="en-US" sz="1100" b="0" i="0" u="none" strike="noStrike" kern="1200" cap="none" spc="0" normalizeH="0" baseline="0" noProof="0" dirty="0">
+                <a:ln>
+                  <a:noFill/>
+                </a:ln>
+                <a:solidFill>
+                  <a:srgbClr val="212E35"/>
+                </a:solidFill>
+                <a:effectLst/>
+                <a:uLnTx/>
+                <a:uFillTx/>
+                <a:latin typeface="Calibri"/>
+                <a:ea typeface="맑은 고딕" panose="020B0503020000020004" pitchFamily="50" charset="-127"/>
+              </a:rPr>
+              <a:t>로 데이터를 이중화 또는 삼중화할 때 다른 </a:t>
+            </a:r>
+            <a:r>
+              <a:rPr kumimoji="0" lang="ko-KR" altLang="en-US" sz="1100" b="0" i="0" u="none" strike="noStrike" kern="1200" cap="none" spc="0" normalizeH="0" baseline="0" noProof="0" dirty="0" err="1">
+                <a:ln>
+                  <a:noFill/>
+                </a:ln>
+                <a:solidFill>
+                  <a:srgbClr val="212E35"/>
+                </a:solidFill>
+                <a:effectLst/>
+                <a:uLnTx/>
+                <a:uFillTx/>
+                <a:latin typeface="Calibri"/>
+                <a:ea typeface="맑은 고딕" panose="020B0503020000020004" pitchFamily="50" charset="-127"/>
+              </a:rPr>
+              <a:t>노드에</a:t>
+            </a:r>
+            <a:r>
+              <a:rPr kumimoji="0" lang="ko-KR" altLang="en-US" sz="1100" b="0" i="0" u="none" strike="noStrike" kern="1200" cap="none" spc="0" normalizeH="0" baseline="0" noProof="0" dirty="0">
+                <a:ln>
+                  <a:noFill/>
+                </a:ln>
+                <a:solidFill>
+                  <a:srgbClr val="212E35"/>
+                </a:solidFill>
+                <a:effectLst/>
+                <a:uLnTx/>
+                <a:uFillTx/>
+                <a:latin typeface="Calibri"/>
+                <a:ea typeface="맑은 고딕" panose="020B0503020000020004" pitchFamily="50" charset="-127"/>
+              </a:rPr>
+              <a:t> 복제되는 </a:t>
+            </a:r>
+            <a:r>
+              <a:rPr kumimoji="0" lang="ko-KR" altLang="en-US" sz="1100" b="0" i="0" u="none" strike="noStrike" kern="1200" cap="none" spc="0" normalizeH="0" baseline="0" noProof="0" dirty="0" err="1">
+                <a:ln>
+                  <a:noFill/>
+                </a:ln>
+                <a:solidFill>
+                  <a:srgbClr val="212E35"/>
+                </a:solidFill>
+                <a:effectLst/>
+                <a:uLnTx/>
+                <a:uFillTx/>
+                <a:latin typeface="Calibri"/>
+                <a:ea typeface="맑은 고딕" panose="020B0503020000020004" pitchFamily="50" charset="-127"/>
+              </a:rPr>
+              <a:t>프로젝션</a:t>
+            </a:r>
+            <a:endParaRPr kumimoji="0" lang="en-US" altLang="ko-KR" sz="1100" b="0" i="0" u="none" strike="noStrike" kern="1200" cap="none" spc="0" normalizeH="0" baseline="0" noProof="0" dirty="0">
+              <a:ln>
+                <a:noFill/>
+              </a:ln>
+              <a:solidFill>
+                <a:srgbClr val="212E35"/>
+              </a:solidFill>
+              <a:effectLst/>
+              <a:uLnTx/>
+              <a:uFillTx/>
+              <a:latin typeface="Calibri"/>
+              <a:ea typeface="맑은 고딕" panose="020B0503020000020004" pitchFamily="50" charset="-127"/>
+            </a:endParaRPr>
+          </a:p>
+          <a:p>
+            <a:pPr marL="571500" marR="0" lvl="2" indent="-171450" algn="l" defTabSz="914400" rtl="0" eaLnBrk="1" fontAlgn="auto" latinLnBrk="0" hangingPunct="1">
+              <a:lnSpc>
+                <a:spcPct val="100000"/>
+              </a:lnSpc>
+              <a:spcBef>
+                <a:spcPts val="0"/>
+              </a:spcBef>
+              <a:spcAft>
+                <a:spcPts val="0"/>
+              </a:spcAft>
+              <a:buClrTx/>
+              <a:buSzTx/>
+              <a:buFont typeface="Calibri" panose="020F0502020204030204" pitchFamily="34" charset="0"/>
+              <a:buChar char="-"/>
+              <a:tabLst/>
+              <a:defRPr/>
+            </a:pPr>
+            <a:endParaRPr kumimoji="0" lang="en-US" altLang="ko-KR" sz="1100" b="0" i="0" u="none" strike="noStrike" kern="1200" cap="none" spc="0" normalizeH="0" baseline="0" noProof="0" dirty="0">
+              <a:ln>
+                <a:noFill/>
+              </a:ln>
+              <a:solidFill>
+                <a:srgbClr val="212E35"/>
+              </a:solidFill>
+              <a:effectLst/>
+              <a:uLnTx/>
+              <a:uFillTx/>
+              <a:latin typeface="Calibri"/>
+              <a:ea typeface="맑은 고딕" panose="020B0503020000020004" pitchFamily="50" charset="-127"/>
+            </a:endParaRPr>
+          </a:p>
+          <a:p>
+            <a:pPr marL="0" lvl="0" indent="0">
+              <a:lnSpc>
+                <a:spcPct val="100000"/>
+              </a:lnSpc>
+              <a:spcAft>
+                <a:spcPts val="0"/>
+              </a:spcAft>
+              <a:buNone/>
+            </a:pPr>
+            <a:r>
+              <a:rPr lang="en-US" altLang="ko-KR" sz="1100" b="1" dirty="0">
+                <a:solidFill>
+                  <a:srgbClr val="212E35"/>
+                </a:solidFill>
+              </a:rPr>
+              <a:t>Projection </a:t>
+            </a:r>
+            <a:r>
+              <a:rPr kumimoji="0" lang="ko-KR" altLang="en-US" sz="1100" b="1" i="0" u="none" strike="noStrike" kern="1200" cap="none" spc="0" normalizeH="0" baseline="0" noProof="0" dirty="0" smtClean="0">
+                <a:ln>
+                  <a:noFill/>
+                </a:ln>
+                <a:solidFill>
+                  <a:srgbClr val="212E35"/>
+                </a:solidFill>
+                <a:effectLst/>
+                <a:uLnTx/>
+                <a:uFillTx/>
+                <a:latin typeface="Calibri"/>
+                <a:ea typeface="맑은 고딕" panose="020B0503020000020004" pitchFamily="50" charset="-127"/>
+              </a:rPr>
+              <a:t>관리</a:t>
+            </a:r>
+            <a:endParaRPr kumimoji="0" lang="en-US" altLang="ko-KR" sz="1100" b="1" i="0" u="none" strike="noStrike" kern="1200" cap="none" spc="0" normalizeH="0" baseline="0" noProof="0" dirty="0">
+              <a:ln>
+                <a:noFill/>
+              </a:ln>
+              <a:solidFill>
+                <a:srgbClr val="212E35"/>
+              </a:solidFill>
+              <a:effectLst/>
+              <a:uLnTx/>
+              <a:uFillTx/>
+              <a:latin typeface="Calibri"/>
+              <a:ea typeface="맑은 고딕" panose="020B0503020000020004" pitchFamily="50" charset="-127"/>
+            </a:endParaRPr>
+          </a:p>
+          <a:p>
+            <a:pPr marL="400050" marR="0" lvl="1" indent="-171450" algn="l" defTabSz="914400" rtl="0" eaLnBrk="1" fontAlgn="auto" latinLnBrk="0" hangingPunct="1">
+              <a:lnSpc>
+                <a:spcPct val="100000"/>
+              </a:lnSpc>
+              <a:spcBef>
+                <a:spcPts val="0"/>
+              </a:spcBef>
+              <a:spcAft>
+                <a:spcPts val="0"/>
+              </a:spcAft>
+              <a:buClrTx/>
+              <a:buSzTx/>
+              <a:buFont typeface="Arial" pitchFamily="34" charset="0"/>
+              <a:buChar char="•"/>
+              <a:tabLst/>
+              <a:defRPr/>
+            </a:pPr>
+            <a:r>
+              <a:rPr kumimoji="0" lang="ko-KR" altLang="en-US" sz="1100" b="0" i="0" u="none" strike="noStrike" kern="1200" cap="none" spc="0" normalizeH="0" baseline="0" noProof="0" dirty="0" err="1">
+                <a:ln>
+                  <a:noFill/>
+                </a:ln>
+                <a:solidFill>
+                  <a:srgbClr val="212E35"/>
+                </a:solidFill>
+                <a:effectLst/>
+                <a:uLnTx/>
+                <a:uFillTx/>
+                <a:latin typeface="Calibri"/>
+                <a:ea typeface="맑은 고딕" panose="020B0503020000020004" pitchFamily="50" charset="-127"/>
+              </a:rPr>
+              <a:t>프로젝션은</a:t>
+            </a:r>
+            <a:r>
+              <a:rPr kumimoji="0" lang="ko-KR" altLang="en-US" sz="1100" b="0" i="0" u="none" strike="noStrike" kern="1200" cap="none" spc="0" normalizeH="0" baseline="0" noProof="0" dirty="0">
+                <a:ln>
+                  <a:noFill/>
+                </a:ln>
+                <a:solidFill>
+                  <a:srgbClr val="212E35"/>
+                </a:solidFill>
+                <a:effectLst/>
+                <a:uLnTx/>
+                <a:uFillTx/>
+                <a:latin typeface="Calibri"/>
+                <a:ea typeface="맑은 고딕" panose="020B0503020000020004" pitchFamily="50" charset="-127"/>
+              </a:rPr>
+              <a:t> 테이블 당 복수개가 가능하지만 너무 많은 </a:t>
+            </a:r>
+            <a:r>
+              <a:rPr kumimoji="0" lang="ko-KR" altLang="en-US" sz="1100" b="0" i="0" u="none" strike="noStrike" kern="1200" cap="none" spc="0" normalizeH="0" baseline="0" noProof="0" dirty="0" err="1">
+                <a:ln>
+                  <a:noFill/>
+                </a:ln>
+                <a:solidFill>
+                  <a:srgbClr val="212E35"/>
+                </a:solidFill>
+                <a:effectLst/>
+                <a:uLnTx/>
+                <a:uFillTx/>
+                <a:latin typeface="Calibri"/>
+                <a:ea typeface="맑은 고딕" panose="020B0503020000020004" pitchFamily="50" charset="-127"/>
+              </a:rPr>
+              <a:t>프로젝션은</a:t>
+            </a:r>
+            <a:r>
+              <a:rPr kumimoji="0" lang="ko-KR" altLang="en-US" sz="1100" b="0" i="0" u="none" strike="noStrike" kern="1200" cap="none" spc="0" normalizeH="0" baseline="0" noProof="0" dirty="0">
+                <a:ln>
+                  <a:noFill/>
+                </a:ln>
+                <a:solidFill>
+                  <a:srgbClr val="212E35"/>
+                </a:solidFill>
+                <a:effectLst/>
+                <a:uLnTx/>
+                <a:uFillTx/>
+                <a:latin typeface="Calibri"/>
+                <a:ea typeface="맑은 고딕" panose="020B0503020000020004" pitchFamily="50" charset="-127"/>
+              </a:rPr>
+              <a:t> 데이터 적재 속도에 영향을 미침</a:t>
+            </a:r>
+            <a:endParaRPr kumimoji="0" lang="en-US" altLang="ko-KR" sz="1100" b="0" i="0" u="none" strike="noStrike" kern="1200" cap="none" spc="0" normalizeH="0" baseline="0" noProof="0" dirty="0">
+              <a:ln>
+                <a:noFill/>
+              </a:ln>
+              <a:solidFill>
+                <a:srgbClr val="212E35"/>
+              </a:solidFill>
+              <a:effectLst/>
+              <a:uLnTx/>
+              <a:uFillTx/>
+              <a:latin typeface="Calibri"/>
+              <a:ea typeface="맑은 고딕" panose="020B0503020000020004" pitchFamily="50" charset="-127"/>
+            </a:endParaRPr>
+          </a:p>
+          <a:p>
+            <a:pPr marL="400050" marR="0" lvl="1" indent="-171450" algn="l" defTabSz="914400" rtl="0" eaLnBrk="1" fontAlgn="auto" latinLnBrk="0" hangingPunct="1">
+              <a:lnSpc>
+                <a:spcPct val="100000"/>
+              </a:lnSpc>
+              <a:spcBef>
+                <a:spcPts val="0"/>
+              </a:spcBef>
+              <a:spcAft>
+                <a:spcPts val="0"/>
+              </a:spcAft>
+              <a:buClrTx/>
+              <a:buSzTx/>
+              <a:buFont typeface="Arial" pitchFamily="34" charset="0"/>
+              <a:buChar char="•"/>
+              <a:tabLst/>
+              <a:defRPr/>
+            </a:pPr>
+            <a:r>
+              <a:rPr kumimoji="0" lang="ko-KR" altLang="en-US" sz="1100" b="0" i="0" u="none" strike="noStrike" kern="1200" cap="none" spc="0" normalizeH="0" baseline="0" noProof="0" dirty="0">
+                <a:ln>
+                  <a:noFill/>
+                </a:ln>
+                <a:solidFill>
+                  <a:srgbClr val="212E35"/>
+                </a:solidFill>
+                <a:effectLst/>
+                <a:uLnTx/>
+                <a:uFillTx/>
+                <a:latin typeface="Calibri"/>
+                <a:ea typeface="맑은 고딕" panose="020B0503020000020004" pitchFamily="50" charset="-127"/>
+              </a:rPr>
+              <a:t>테이블 당 </a:t>
+            </a:r>
+            <a:r>
+              <a:rPr kumimoji="0" lang="en-US" altLang="ko-KR" sz="1100" b="0" i="0" u="none" strike="noStrike" kern="1200" cap="none" spc="0" normalizeH="0" baseline="0" noProof="0" dirty="0">
+                <a:ln>
+                  <a:noFill/>
+                </a:ln>
+                <a:solidFill>
+                  <a:srgbClr val="212E35"/>
+                </a:solidFill>
+                <a:effectLst/>
+                <a:uLnTx/>
+                <a:uFillTx/>
+                <a:latin typeface="Calibri"/>
+                <a:ea typeface="맑은 고딕" panose="020B0503020000020004" pitchFamily="50" charset="-127"/>
+              </a:rPr>
+              <a:t>2-4</a:t>
+            </a:r>
+            <a:r>
+              <a:rPr kumimoji="0" lang="ko-KR" altLang="en-US" sz="1100" b="0" i="0" u="none" strike="noStrike" kern="1200" cap="none" spc="0" normalizeH="0" baseline="0" noProof="0" dirty="0">
+                <a:ln>
+                  <a:noFill/>
+                </a:ln>
+                <a:solidFill>
+                  <a:srgbClr val="212E35"/>
+                </a:solidFill>
+                <a:effectLst/>
+                <a:uLnTx/>
+                <a:uFillTx/>
+                <a:latin typeface="Calibri"/>
+                <a:ea typeface="맑은 고딕" panose="020B0503020000020004" pitchFamily="50" charset="-127"/>
+              </a:rPr>
+              <a:t>개 이내의 </a:t>
+            </a:r>
+            <a:r>
+              <a:rPr kumimoji="0" lang="ko-KR" altLang="en-US" sz="1100" b="0" i="0" u="none" strike="noStrike" kern="1200" cap="none" spc="0" normalizeH="0" baseline="0" noProof="0" dirty="0" err="1">
+                <a:ln>
+                  <a:noFill/>
+                </a:ln>
+                <a:solidFill>
+                  <a:srgbClr val="212E35"/>
+                </a:solidFill>
+                <a:effectLst/>
+                <a:uLnTx/>
+                <a:uFillTx/>
+                <a:latin typeface="Calibri"/>
+                <a:ea typeface="맑은 고딕" panose="020B0503020000020004" pitchFamily="50" charset="-127"/>
+              </a:rPr>
+              <a:t>프로젝션</a:t>
+            </a:r>
+            <a:r>
+              <a:rPr kumimoji="0" lang="ko-KR" altLang="en-US" sz="1100" b="0" i="0" u="none" strike="noStrike" kern="1200" cap="none" spc="0" normalizeH="0" baseline="0" noProof="0" dirty="0">
+                <a:ln>
+                  <a:noFill/>
+                </a:ln>
+                <a:solidFill>
+                  <a:srgbClr val="212E35"/>
+                </a:solidFill>
+                <a:effectLst/>
+                <a:uLnTx/>
+                <a:uFillTx/>
+                <a:latin typeface="Calibri"/>
+                <a:ea typeface="맑은 고딕" panose="020B0503020000020004" pitchFamily="50" charset="-127"/>
+              </a:rPr>
+              <a:t> 권장</a:t>
+            </a:r>
+            <a:endParaRPr kumimoji="0" lang="en-US" altLang="ko-KR" sz="1100" b="0" i="0" u="none" strike="noStrike" kern="1200" cap="none" spc="0" normalizeH="0" baseline="0" noProof="0" dirty="0">
+              <a:ln>
+                <a:noFill/>
+              </a:ln>
+              <a:solidFill>
+                <a:srgbClr val="212E35"/>
+              </a:solidFill>
+              <a:effectLst/>
+              <a:uLnTx/>
+              <a:uFillTx/>
+              <a:latin typeface="Calibri"/>
+              <a:ea typeface="맑은 고딕" panose="020B0503020000020004" pitchFamily="50" charset="-127"/>
+            </a:endParaRPr>
+          </a:p>
+          <a:p>
+            <a:pPr marL="400050" marR="0" lvl="1" indent="-171450" algn="l" defTabSz="914400" rtl="0" eaLnBrk="1" fontAlgn="auto" latinLnBrk="0" hangingPunct="1">
+              <a:lnSpc>
+                <a:spcPct val="100000"/>
+              </a:lnSpc>
+              <a:spcBef>
+                <a:spcPts val="0"/>
+              </a:spcBef>
+              <a:spcAft>
+                <a:spcPts val="0"/>
+              </a:spcAft>
+              <a:buClrTx/>
+              <a:buSzTx/>
+              <a:buFont typeface="Arial" pitchFamily="34" charset="0"/>
+              <a:buChar char="•"/>
+              <a:tabLst/>
+              <a:defRPr/>
+            </a:pPr>
+            <a:r>
+              <a:rPr kumimoji="0" lang="ko-KR" altLang="en-US" sz="1100" b="0" i="0" u="none" strike="noStrike" kern="1200" cap="none" spc="0" normalizeH="0" baseline="0" noProof="0" dirty="0" err="1">
+                <a:ln>
+                  <a:noFill/>
+                </a:ln>
+                <a:solidFill>
+                  <a:srgbClr val="212E35"/>
+                </a:solidFill>
+                <a:effectLst/>
+                <a:uLnTx/>
+                <a:uFillTx/>
+                <a:latin typeface="Calibri"/>
+                <a:ea typeface="맑은 고딕" panose="020B0503020000020004" pitchFamily="50" charset="-127"/>
+              </a:rPr>
+              <a:t>프로젝션</a:t>
+            </a:r>
+            <a:r>
+              <a:rPr kumimoji="0" lang="ko-KR" altLang="en-US" sz="1100" b="0" i="0" u="none" strike="noStrike" kern="1200" cap="none" spc="0" normalizeH="0" baseline="0" noProof="0" dirty="0">
+                <a:ln>
+                  <a:noFill/>
+                </a:ln>
+                <a:solidFill>
+                  <a:srgbClr val="212E35"/>
+                </a:solidFill>
+                <a:effectLst/>
+                <a:uLnTx/>
+                <a:uFillTx/>
+                <a:latin typeface="Calibri"/>
+                <a:ea typeface="맑은 고딕" panose="020B0503020000020004" pitchFamily="50" charset="-127"/>
+              </a:rPr>
+              <a:t> 추가 생성 및 동기화</a:t>
+            </a:r>
+            <a:r>
+              <a:rPr kumimoji="0" lang="en-US" altLang="ko-KR" sz="1100" b="0" i="0" u="none" strike="noStrike" kern="1200" cap="none" spc="0" normalizeH="0" baseline="0" noProof="0" dirty="0">
+                <a:ln>
+                  <a:noFill/>
+                </a:ln>
+                <a:solidFill>
+                  <a:srgbClr val="212E35"/>
+                </a:solidFill>
+                <a:effectLst/>
+                <a:uLnTx/>
+                <a:uFillTx/>
+                <a:latin typeface="Calibri"/>
+                <a:ea typeface="맑은 고딕" panose="020B0503020000020004" pitchFamily="50" charset="-127"/>
+              </a:rPr>
+              <a:t>, </a:t>
+            </a:r>
+            <a:r>
+              <a:rPr kumimoji="0" lang="ko-KR" altLang="en-US" sz="1100" b="0" i="0" u="none" strike="noStrike" kern="1200" cap="none" spc="0" normalizeH="0" baseline="0" noProof="0" dirty="0">
+                <a:ln>
+                  <a:noFill/>
+                </a:ln>
+                <a:solidFill>
+                  <a:srgbClr val="212E35"/>
+                </a:solidFill>
+                <a:effectLst/>
+                <a:uLnTx/>
+                <a:uFillTx/>
+                <a:latin typeface="Calibri"/>
+                <a:ea typeface="맑은 고딕" panose="020B0503020000020004" pitchFamily="50" charset="-127"/>
+              </a:rPr>
+              <a:t>삭제 등의 과정은 기존 </a:t>
+            </a:r>
+            <a:r>
+              <a:rPr kumimoji="0" lang="ko-KR" altLang="en-US" sz="1100" b="0" i="0" u="none" strike="noStrike" kern="1200" cap="none" spc="0" normalizeH="0" baseline="0" noProof="0" dirty="0" err="1">
+                <a:ln>
+                  <a:noFill/>
+                </a:ln>
+                <a:solidFill>
+                  <a:srgbClr val="212E35"/>
+                </a:solidFill>
+                <a:effectLst/>
+                <a:uLnTx/>
+                <a:uFillTx/>
+                <a:latin typeface="Calibri"/>
+                <a:ea typeface="맑은 고딕" panose="020B0503020000020004" pitchFamily="50" charset="-127"/>
+              </a:rPr>
+              <a:t>프로젝션이</a:t>
+            </a:r>
+            <a:r>
+              <a:rPr kumimoji="0" lang="ko-KR" altLang="en-US" sz="1100" b="0" i="0" u="none" strike="noStrike" kern="1200" cap="none" spc="0" normalizeH="0" baseline="0" noProof="0" dirty="0">
+                <a:ln>
+                  <a:noFill/>
+                </a:ln>
+                <a:solidFill>
+                  <a:srgbClr val="212E35"/>
+                </a:solidFill>
+                <a:effectLst/>
+                <a:uLnTx/>
+                <a:uFillTx/>
+                <a:latin typeface="Calibri"/>
+                <a:ea typeface="맑은 고딕" panose="020B0503020000020004" pitchFamily="50" charset="-127"/>
+              </a:rPr>
+              <a:t> 사용 중인 상태에서 가능한 온라인 작업</a:t>
+            </a:r>
+            <a:endParaRPr kumimoji="0" lang="en-US" altLang="ko-KR" sz="1100" b="0" i="0" u="none" strike="noStrike" kern="1200" cap="none" spc="0" normalizeH="0" baseline="0" noProof="0" dirty="0">
+              <a:ln>
+                <a:noFill/>
+              </a:ln>
+              <a:solidFill>
+                <a:srgbClr val="212E35"/>
+              </a:solidFill>
+              <a:effectLst/>
+              <a:uLnTx/>
+              <a:uFillTx/>
+              <a:latin typeface="Calibri"/>
+              <a:ea typeface="맑은 고딕" panose="020B0503020000020004" pitchFamily="50" charset="-127"/>
+            </a:endParaRPr>
+          </a:p>
+          <a:p>
+            <a:pPr marL="400050" marR="0" lvl="1" indent="-171450" algn="l" defTabSz="914400" rtl="0" eaLnBrk="1" fontAlgn="auto" latinLnBrk="0" hangingPunct="1">
+              <a:lnSpc>
+                <a:spcPct val="100000"/>
+              </a:lnSpc>
+              <a:spcBef>
+                <a:spcPts val="0"/>
+              </a:spcBef>
+              <a:spcAft>
+                <a:spcPts val="0"/>
+              </a:spcAft>
+              <a:buClrTx/>
+              <a:buSzTx/>
+              <a:buFont typeface="Calibri" panose="020F0502020204030204" pitchFamily="34" charset="0"/>
+              <a:buChar char="-"/>
+              <a:tabLst/>
+              <a:defRPr/>
+            </a:pPr>
+            <a:endParaRPr kumimoji="0" lang="ko-KR" altLang="en-US" sz="1100" b="0" i="0" u="none" strike="noStrike" kern="1200" cap="none" spc="0" normalizeH="0" baseline="0" noProof="0" dirty="0">
+              <a:ln>
+                <a:noFill/>
+              </a:ln>
+              <a:solidFill>
+                <a:srgbClr val="212E35"/>
+              </a:solidFill>
+              <a:effectLst/>
+              <a:uLnTx/>
+              <a:uFillTx/>
+              <a:latin typeface="Calibri"/>
+              <a:ea typeface="맑은 고딕" panose="020B0503020000020004" pitchFamily="50" charset="-127"/>
+            </a:endParaRPr>
+          </a:p>
+        </p:txBody>
+      </p:sp>
     </p:spTree>
     <p:extLst>
       <p:ext uri="{BB962C8B-B14F-4D97-AF65-F5344CB8AC3E}">

--- a/99ref/버티카_blog.pptx
+++ b/99ref/버티카_blog.pptx
@@ -16,7 +16,7 @@
     <p:sldId id="260" r:id="rId7"/>
     <p:sldId id="269" r:id="rId8"/>
     <p:sldId id="266" r:id="rId9"/>
-    <p:sldId id="267" r:id="rId10"/>
+    <p:sldId id="282" r:id="rId10"/>
     <p:sldId id="263" r:id="rId11"/>
     <p:sldId id="264" r:id="rId12"/>
     <p:sldId id="265" r:id="rId13"/>
@@ -16872,6 +16872,59 @@
           </a:fontRef>
         </p:style>
       </p:cxnSp>
+      <p:pic>
+        <p:nvPicPr>
+          <p:cNvPr id="5" name="그림 4"/>
+          <p:cNvPicPr>
+            <a:picLocks noChangeAspect="1"/>
+          </p:cNvPicPr>
+          <p:nvPr/>
+        </p:nvPicPr>
+        <p:blipFill>
+          <a:blip r:embed="rId2" cstate="print">
+            <a:extLst>
+              <a:ext uri="{28A0092B-C50C-407E-A947-70E740481C1C}">
+                <a14:useLocalDpi xmlns:a14="http://schemas.microsoft.com/office/drawing/2010/main" val="0"/>
+              </a:ext>
+            </a:extLst>
+          </a:blip>
+          <a:stretch>
+            <a:fillRect/>
+          </a:stretch>
+        </p:blipFill>
+        <p:spPr>
+          <a:xfrm>
+            <a:off x="1048380" y="658797"/>
+            <a:ext cx="7494434" cy="4609888"/>
+          </a:xfrm>
+          <a:prstGeom prst="rect">
+            <a:avLst/>
+          </a:prstGeom>
+        </p:spPr>
+      </p:pic>
+      <p:pic>
+        <p:nvPicPr>
+          <p:cNvPr id="2" name="그림 1"/>
+          <p:cNvPicPr>
+            <a:picLocks noChangeAspect="1"/>
+          </p:cNvPicPr>
+          <p:nvPr/>
+        </p:nvPicPr>
+        <p:blipFill rotWithShape="1">
+          <a:blip r:embed="rId3"/>
+          <a:srcRect r="1140"/>
+          <a:stretch/>
+        </p:blipFill>
+        <p:spPr>
+          <a:xfrm>
+            <a:off x="1073106" y="4637314"/>
+            <a:ext cx="7888120" cy="4122738"/>
+          </a:xfrm>
+          <a:prstGeom prst="rect">
+            <a:avLst/>
+          </a:prstGeom>
+        </p:spPr>
+      </p:pic>
     </p:spTree>
     <p:extLst>
       <p:ext uri="{BB962C8B-B14F-4D97-AF65-F5344CB8AC3E}">
@@ -17497,7 +17550,7 @@
           <p:cNvPr id="5" name="그림 4">
             <a:extLst>
               <a:ext uri="{FF2B5EF4-FFF2-40B4-BE49-F238E27FC236}">
-                <a16:creationId xmlns:a16="http://schemas.microsoft.com/office/drawing/2014/main" xmlns="" id="{F25A3B3A-32C8-4401-A476-E8CCEB3258D5}"/>
+                <a16:creationId xmlns="" xmlns:a16="http://schemas.microsoft.com/office/drawing/2014/main" id="{F25A3B3A-32C8-4401-A476-E8CCEB3258D5}"/>
               </a:ext>
             </a:extLst>
           </p:cNvPr>
@@ -17540,7 +17593,7 @@
           <p:cNvPr id="6" name="Picture 4">
             <a:extLst>
               <a:ext uri="{FF2B5EF4-FFF2-40B4-BE49-F238E27FC236}">
-                <a16:creationId xmlns:a16="http://schemas.microsoft.com/office/drawing/2014/main" xmlns="" id="{051FB3A4-C7F9-45D0-A73B-557A6E1C4FDF}"/>
+                <a16:creationId xmlns="" xmlns:a16="http://schemas.microsoft.com/office/drawing/2014/main" id="{051FB3A4-C7F9-45D0-A73B-557A6E1C4FDF}"/>
               </a:ext>
             </a:extLst>
           </p:cNvPr>
@@ -18663,7 +18716,7 @@
               <p:cNvPr id="34" name="Freeform 117">
                 <a:extLst>
                   <a:ext uri="{FF2B5EF4-FFF2-40B4-BE49-F238E27FC236}">
-                    <a16:creationId xmlns:a16="http://schemas.microsoft.com/office/drawing/2014/main" xmlns="" id="{ACB5F511-0467-4F80-BCD6-94BAC36031EE}"/>
+                    <a16:creationId xmlns="" xmlns:a16="http://schemas.microsoft.com/office/drawing/2014/main" id="{ACB5F511-0467-4F80-BCD6-94BAC36031EE}"/>
                   </a:ext>
                 </a:extLst>
               </p:cNvPr>
@@ -18843,7 +18896,7 @@
               <p:cNvPr id="35" name="Freeform 118">
                 <a:extLst>
                   <a:ext uri="{FF2B5EF4-FFF2-40B4-BE49-F238E27FC236}">
-                    <a16:creationId xmlns:a16="http://schemas.microsoft.com/office/drawing/2014/main" xmlns="" id="{8F3B04C3-D501-4070-B0AC-5FB6C26F8066}"/>
+                    <a16:creationId xmlns="" xmlns:a16="http://schemas.microsoft.com/office/drawing/2014/main" id="{8F3B04C3-D501-4070-B0AC-5FB6C26F8066}"/>
                   </a:ext>
                 </a:extLst>
               </p:cNvPr>
@@ -18985,7 +19038,7 @@
               <p:cNvPr id="36" name="Freeform 119">
                 <a:extLst>
                   <a:ext uri="{FF2B5EF4-FFF2-40B4-BE49-F238E27FC236}">
-                    <a16:creationId xmlns:a16="http://schemas.microsoft.com/office/drawing/2014/main" xmlns="" id="{36E9553A-4692-4D5B-A665-94CC09C4A62F}"/>
+                    <a16:creationId xmlns="" xmlns:a16="http://schemas.microsoft.com/office/drawing/2014/main" id="{36E9553A-4692-4D5B-A665-94CC09C4A62F}"/>
                   </a:ext>
                 </a:extLst>
               </p:cNvPr>
@@ -19165,7 +19218,7 @@
               <p:cNvPr id="37" name="Freeform 120">
                 <a:extLst>
                   <a:ext uri="{FF2B5EF4-FFF2-40B4-BE49-F238E27FC236}">
-                    <a16:creationId xmlns:a16="http://schemas.microsoft.com/office/drawing/2014/main" xmlns="" id="{936475C6-EBDB-47C8-8ADD-312FB8E3E615}"/>
+                    <a16:creationId xmlns="" xmlns:a16="http://schemas.microsoft.com/office/drawing/2014/main" id="{936475C6-EBDB-47C8-8ADD-312FB8E3E615}"/>
                   </a:ext>
                 </a:extLst>
               </p:cNvPr>
@@ -19307,7 +19360,7 @@
               <p:cNvPr id="38" name="Freeform 121">
                 <a:extLst>
                   <a:ext uri="{FF2B5EF4-FFF2-40B4-BE49-F238E27FC236}">
-                    <a16:creationId xmlns:a16="http://schemas.microsoft.com/office/drawing/2014/main" xmlns="" id="{169A2FBC-0956-4DC7-ADF8-83D5DC60949B}"/>
+                    <a16:creationId xmlns="" xmlns:a16="http://schemas.microsoft.com/office/drawing/2014/main" id="{169A2FBC-0956-4DC7-ADF8-83D5DC60949B}"/>
                   </a:ext>
                 </a:extLst>
               </p:cNvPr>
@@ -19487,7 +19540,7 @@
               <p:cNvPr id="39" name="Freeform 122">
                 <a:extLst>
                   <a:ext uri="{FF2B5EF4-FFF2-40B4-BE49-F238E27FC236}">
-                    <a16:creationId xmlns:a16="http://schemas.microsoft.com/office/drawing/2014/main" xmlns="" id="{59EA31B7-D7DB-4DBF-B245-2AE82627F51A}"/>
+                    <a16:creationId xmlns="" xmlns:a16="http://schemas.microsoft.com/office/drawing/2014/main" id="{59EA31B7-D7DB-4DBF-B245-2AE82627F51A}"/>
                   </a:ext>
                 </a:extLst>
               </p:cNvPr>
@@ -19629,7 +19682,7 @@
               <p:cNvPr id="40" name="Freeform 123">
                 <a:extLst>
                   <a:ext uri="{FF2B5EF4-FFF2-40B4-BE49-F238E27FC236}">
-                    <a16:creationId xmlns:a16="http://schemas.microsoft.com/office/drawing/2014/main" xmlns="" id="{07115F20-4892-4DCD-A419-4CD8D03F5E62}"/>
+                    <a16:creationId xmlns="" xmlns:a16="http://schemas.microsoft.com/office/drawing/2014/main" id="{07115F20-4892-4DCD-A419-4CD8D03F5E62}"/>
                   </a:ext>
                 </a:extLst>
               </p:cNvPr>
@@ -20187,7 +20240,7 @@
               <p:cNvPr id="41" name="Freeform 124">
                 <a:extLst>
                   <a:ext uri="{FF2B5EF4-FFF2-40B4-BE49-F238E27FC236}">
-                    <a16:creationId xmlns:a16="http://schemas.microsoft.com/office/drawing/2014/main" xmlns="" id="{9EA60E95-59DD-4A01-B0FA-42513BEAF8E7}"/>
+                    <a16:creationId xmlns="" xmlns:a16="http://schemas.microsoft.com/office/drawing/2014/main" id="{9EA60E95-59DD-4A01-B0FA-42513BEAF8E7}"/>
                   </a:ext>
                 </a:extLst>
               </p:cNvPr>
@@ -20367,7 +20420,7 @@
               <p:cNvPr id="42" name="Freeform 125">
                 <a:extLst>
                   <a:ext uri="{FF2B5EF4-FFF2-40B4-BE49-F238E27FC236}">
-                    <a16:creationId xmlns:a16="http://schemas.microsoft.com/office/drawing/2014/main" xmlns="" id="{277C2BFE-7B2E-4B06-836A-8103FB641491}"/>
+                    <a16:creationId xmlns="" xmlns:a16="http://schemas.microsoft.com/office/drawing/2014/main" id="{277C2BFE-7B2E-4B06-836A-8103FB641491}"/>
                   </a:ext>
                 </a:extLst>
               </p:cNvPr>
@@ -20524,7 +20577,7 @@
               <p:cNvPr id="32" name="Freeform 111">
                 <a:extLst>
                   <a:ext uri="{FF2B5EF4-FFF2-40B4-BE49-F238E27FC236}">
-                    <a16:creationId xmlns:a16="http://schemas.microsoft.com/office/drawing/2014/main" xmlns="" id="{BC11850A-92B9-404F-BF5E-D6215717A644}"/>
+                    <a16:creationId xmlns="" xmlns:a16="http://schemas.microsoft.com/office/drawing/2014/main" id="{BC11850A-92B9-404F-BF5E-D6215717A644}"/>
                   </a:ext>
                 </a:extLst>
               </p:cNvPr>
@@ -20742,7 +20795,7 @@
               <p:cNvPr id="33" name="Freeform 112">
                 <a:extLst>
                   <a:ext uri="{FF2B5EF4-FFF2-40B4-BE49-F238E27FC236}">
-                    <a16:creationId xmlns:a16="http://schemas.microsoft.com/office/drawing/2014/main" xmlns="" id="{9BB65042-15E8-4757-A437-CB30B736B658}"/>
+                    <a16:creationId xmlns="" xmlns:a16="http://schemas.microsoft.com/office/drawing/2014/main" id="{9BB65042-15E8-4757-A437-CB30B736B658}"/>
                   </a:ext>
                 </a:extLst>
               </p:cNvPr>
@@ -22149,7 +22202,7 @@
             <p:cNvPr id="43" name="Straight Connector 64">
               <a:extLst>
                 <a:ext uri="{FF2B5EF4-FFF2-40B4-BE49-F238E27FC236}">
-                  <a16:creationId xmlns:a16="http://schemas.microsoft.com/office/drawing/2014/main" xmlns="" id="{D22F4E57-90BA-4899-909E-5829E7A9C72A}"/>
+                  <a16:creationId xmlns="" xmlns:a16="http://schemas.microsoft.com/office/drawing/2014/main" id="{D22F4E57-90BA-4899-909E-5829E7A9C72A}"/>
                 </a:ext>
               </a:extLst>
             </p:cNvPr>
@@ -26289,7 +26342,7 @@
             <p:cNvPr id="97" name="타원 96">
               <a:extLst>
                 <a:ext uri="{FF2B5EF4-FFF2-40B4-BE49-F238E27FC236}">
-                  <a16:creationId xmlns="" xmlns:a16="http://schemas.microsoft.com/office/drawing/2014/main" id="{2A6A11AC-31D1-C238-469B-B8065561C8B3}"/>
+                  <a16:creationId xmlns:a16="http://schemas.microsoft.com/office/drawing/2014/main" xmlns="" id="{2A6A11AC-31D1-C238-469B-B8065561C8B3}"/>
                 </a:ext>
               </a:extLst>
             </p:cNvPr>
@@ -26360,7 +26413,7 @@
             <p:cNvPr id="98" name="TextBox 97">
               <a:extLst>
                 <a:ext uri="{FF2B5EF4-FFF2-40B4-BE49-F238E27FC236}">
-                  <a16:creationId xmlns="" xmlns:a16="http://schemas.microsoft.com/office/drawing/2014/main" id="{370FDDD1-392F-C3F6-7926-8F5450602B51}"/>
+                  <a16:creationId xmlns:a16="http://schemas.microsoft.com/office/drawing/2014/main" xmlns="" id="{370FDDD1-392F-C3F6-7926-8F5450602B51}"/>
                 </a:ext>
               </a:extLst>
             </p:cNvPr>
@@ -26531,7 +26584,7 @@
             <p:cNvPr id="99" name="타원 98">
               <a:extLst>
                 <a:ext uri="{FF2B5EF4-FFF2-40B4-BE49-F238E27FC236}">
-                  <a16:creationId xmlns="" xmlns:a16="http://schemas.microsoft.com/office/drawing/2014/main" id="{8A596585-4EFC-7C6C-63D0-E577FBF1E255}"/>
+                  <a16:creationId xmlns:a16="http://schemas.microsoft.com/office/drawing/2014/main" xmlns="" id="{8A596585-4EFC-7C6C-63D0-E577FBF1E255}"/>
                 </a:ext>
               </a:extLst>
             </p:cNvPr>
@@ -26615,7 +26668,7 @@
             <p:cNvPr id="100" name="TextBox 99">
               <a:extLst>
                 <a:ext uri="{FF2B5EF4-FFF2-40B4-BE49-F238E27FC236}">
-                  <a16:creationId xmlns="" xmlns:a16="http://schemas.microsoft.com/office/drawing/2014/main" id="{A2DBD73D-1544-9997-4B5E-7BE89DA70BD5}"/>
+                  <a16:creationId xmlns:a16="http://schemas.microsoft.com/office/drawing/2014/main" xmlns="" id="{A2DBD73D-1544-9997-4B5E-7BE89DA70BD5}"/>
                 </a:ext>
               </a:extLst>
             </p:cNvPr>
@@ -26731,7 +26784,7 @@
             <p:cNvPr id="101" name="타원 100">
               <a:extLst>
                 <a:ext uri="{FF2B5EF4-FFF2-40B4-BE49-F238E27FC236}">
-                  <a16:creationId xmlns="" xmlns:a16="http://schemas.microsoft.com/office/drawing/2014/main" id="{D7536991-A61A-F58E-EC18-61A6F108717B}"/>
+                  <a16:creationId xmlns:a16="http://schemas.microsoft.com/office/drawing/2014/main" xmlns="" id="{D7536991-A61A-F58E-EC18-61A6F108717B}"/>
                 </a:ext>
               </a:extLst>
             </p:cNvPr>
@@ -26815,7 +26868,7 @@
             <p:cNvPr id="102" name="TextBox 101">
               <a:extLst>
                 <a:ext uri="{FF2B5EF4-FFF2-40B4-BE49-F238E27FC236}">
-                  <a16:creationId xmlns="" xmlns:a16="http://schemas.microsoft.com/office/drawing/2014/main" id="{688289CD-94AD-1B72-1500-6EAFBCF42BA0}"/>
+                  <a16:creationId xmlns:a16="http://schemas.microsoft.com/office/drawing/2014/main" xmlns="" id="{688289CD-94AD-1B72-1500-6EAFBCF42BA0}"/>
                 </a:ext>
               </a:extLst>
             </p:cNvPr>
@@ -27078,7 +27131,7 @@
             <p:cNvPr id="103" name="타원 102">
               <a:extLst>
                 <a:ext uri="{FF2B5EF4-FFF2-40B4-BE49-F238E27FC236}">
-                  <a16:creationId xmlns="" xmlns:a16="http://schemas.microsoft.com/office/drawing/2014/main" id="{F74DE22F-BE57-990F-10C7-5A28137FF97D}"/>
+                  <a16:creationId xmlns:a16="http://schemas.microsoft.com/office/drawing/2014/main" xmlns="" id="{F74DE22F-BE57-990F-10C7-5A28137FF97D}"/>
                 </a:ext>
               </a:extLst>
             </p:cNvPr>
@@ -27162,7 +27215,7 @@
             <p:cNvPr id="104" name="TextBox 103">
               <a:extLst>
                 <a:ext uri="{FF2B5EF4-FFF2-40B4-BE49-F238E27FC236}">
-                  <a16:creationId xmlns="" xmlns:a16="http://schemas.microsoft.com/office/drawing/2014/main" id="{2709A4DE-7D99-060B-4332-72EAE25DA559}"/>
+                  <a16:creationId xmlns:a16="http://schemas.microsoft.com/office/drawing/2014/main" xmlns="" id="{2709A4DE-7D99-060B-4332-72EAE25DA559}"/>
                 </a:ext>
               </a:extLst>
             </p:cNvPr>
@@ -28256,7 +28309,7 @@
             <p:cNvPr id="6" name="Picture 11" descr="Sandbox Software – In the Cloud | FortiSandbox Cloud">
               <a:extLst>
                 <a:ext uri="{FF2B5EF4-FFF2-40B4-BE49-F238E27FC236}">
-                  <a16:creationId xmlns:a16="http://schemas.microsoft.com/office/drawing/2014/main" xmlns="" id="{73BBF3D0-6B40-E280-BA30-1E77B5C4F45A}"/>
+                  <a16:creationId xmlns="" xmlns:a16="http://schemas.microsoft.com/office/drawing/2014/main" id="{73BBF3D0-6B40-E280-BA30-1E77B5C4F45A}"/>
                 </a:ext>
               </a:extLst>
             </p:cNvPr>
@@ -28374,7 +28427,7 @@
             <p:cNvPr id="7" name="Picture 8" descr="cost Icon - Free PNG &amp; SVG 930448 - Noun Project">
               <a:extLst>
                 <a:ext uri="{FF2B5EF4-FFF2-40B4-BE49-F238E27FC236}">
-                  <a16:creationId xmlns:a16="http://schemas.microsoft.com/office/drawing/2014/main" xmlns="" id="{B89FFE28-AD15-4FA1-FDD1-8DF6F4744923}"/>
+                  <a16:creationId xmlns="" xmlns:a16="http://schemas.microsoft.com/office/drawing/2014/main" id="{B89FFE28-AD15-4FA1-FDD1-8DF6F4744923}"/>
                 </a:ext>
               </a:extLst>
             </p:cNvPr>
@@ -28504,7 +28557,7 @@
             <p:cNvPr id="8" name="Picture 6" descr="Project Cargo Services | CFA">
               <a:extLst>
                 <a:ext uri="{FF2B5EF4-FFF2-40B4-BE49-F238E27FC236}">
-                  <a16:creationId xmlns:a16="http://schemas.microsoft.com/office/drawing/2014/main" xmlns="" id="{A9578F59-39A1-6B09-C1A4-24DA78C49B39}"/>
+                  <a16:creationId xmlns="" xmlns:a16="http://schemas.microsoft.com/office/drawing/2014/main" id="{A9578F59-39A1-6B09-C1A4-24DA78C49B39}"/>
                 </a:ext>
               </a:extLst>
             </p:cNvPr>
@@ -42655,19 +42708,6 @@
                   </a:rPr>
                   <a:t>SEGMENTED BY HASH (C1,C2) </a:t>
                 </a:r>
-                <a:endParaRPr kumimoji="0" lang="en-US" altLang="ko-KR" sz="700" b="0" i="0" u="none" strike="noStrike" kern="0" cap="none" spc="0" normalizeH="0" baseline="0" noProof="0" dirty="0" smtClean="0">
-                  <a:ln>
-                    <a:noFill/>
-                  </a:ln>
-                  <a:solidFill>
-                    <a:srgbClr val="212E35"/>
-                  </a:solidFill>
-                  <a:effectLst/>
-                  <a:uLnTx/>
-                  <a:uFillTx/>
-                  <a:latin typeface="+mj-ea"/>
-                  <a:ea typeface="+mj-ea"/>
-                </a:endParaRPr>
               </a:p>
               <a:p>
                 <a:pPr marL="0" marR="0" lvl="0" indent="0" defTabSz="914400" eaLnBrk="1" fontAlgn="auto" latinLnBrk="0" hangingPunct="1">
@@ -42701,23 +42741,7 @@
                     <a:latin typeface="+mj-ea"/>
                     <a:ea typeface="+mj-ea"/>
                   </a:rPr>
-                  <a:t>ALL </a:t>
-                </a:r>
-                <a:r>
-                  <a:rPr kumimoji="0" lang="en-US" altLang="ko-KR" sz="700" b="0" i="0" u="none" strike="noStrike" kern="0" cap="none" spc="0" normalizeH="0" baseline="0" noProof="0" dirty="0" smtClean="0">
-                    <a:ln>
-                      <a:noFill/>
-                    </a:ln>
-                    <a:solidFill>
-                      <a:srgbClr val="212E35"/>
-                    </a:solidFill>
-                    <a:effectLst/>
-                    <a:uLnTx/>
-                    <a:uFillTx/>
-                    <a:latin typeface="+mj-ea"/>
-                    <a:ea typeface="+mj-ea"/>
-                  </a:rPr>
-                  <a:t>NODES; </a:t>
+                  <a:t>ALL NODES; </a:t>
                 </a:r>
                 <a:endParaRPr kumimoji="0" lang="ko-KR" altLang="en-US" sz="700" b="0" i="0" u="none" strike="noStrike" kern="0" cap="none" spc="0" normalizeH="0" baseline="0" noProof="0" dirty="0" err="1" smtClean="0">
                   <a:ln>
@@ -43050,7 +43074,7 @@
     </p:spTree>
     <p:extLst>
       <p:ext uri="{BB962C8B-B14F-4D97-AF65-F5344CB8AC3E}">
-        <p14:creationId xmlns:p14="http://schemas.microsoft.com/office/powerpoint/2010/main" val="2360246129"/>
+        <p14:creationId xmlns:p14="http://schemas.microsoft.com/office/powerpoint/2010/main" val="527370829"/>
       </p:ext>
     </p:extLst>
   </p:cSld>

--- a/99ref/버티카_blog.pptx
+++ b/99ref/버티카_blog.pptx
@@ -16780,63 +16780,6 @@
           </a:p>
         </p:txBody>
       </p:sp>
-      <p:sp>
-        <p:nvSpPr>
-          <p:cNvPr id="89" name="직사각형 88"/>
-          <p:cNvSpPr/>
-          <p:nvPr/>
-        </p:nvSpPr>
-        <p:spPr>
-          <a:xfrm>
-            <a:off x="301171" y="422730"/>
-            <a:ext cx="9312729" cy="357414"/>
-          </a:xfrm>
-          <a:prstGeom prst="rect">
-            <a:avLst/>
-          </a:prstGeom>
-          <a:noFill/>
-          <a:ln>
-            <a:noFill/>
-          </a:ln>
-        </p:spPr>
-        <p:style>
-          <a:lnRef idx="2">
-            <a:schemeClr val="accent1">
-              <a:shade val="50000"/>
-            </a:schemeClr>
-          </a:lnRef>
-          <a:fillRef idx="1">
-            <a:schemeClr val="accent1"/>
-          </a:fillRef>
-          <a:effectRef idx="0">
-            <a:schemeClr val="accent1"/>
-          </a:effectRef>
-          <a:fontRef idx="minor">
-            <a:schemeClr val="lt1"/>
-          </a:fontRef>
-        </p:style>
-        <p:txBody>
-          <a:bodyPr rtlCol="0" anchor="ctr"/>
-          <a:lstStyle/>
-          <a:p>
-            <a:r>
-              <a:rPr lang="en-US" altLang="ko-KR" sz="1400" dirty="0" smtClean="0">
-                <a:solidFill>
-                  <a:schemeClr val="tx1"/>
-                </a:solidFill>
-                <a:latin typeface="+mn-ea"/>
-              </a:rPr>
-              <a:t>xxx</a:t>
-            </a:r>
-            <a:endParaRPr lang="en-US" altLang="ko-KR" sz="1400" dirty="0">
-              <a:solidFill>
-                <a:schemeClr val="tx1"/>
-              </a:solidFill>
-              <a:latin typeface="+mn-ea"/>
-            </a:endParaRPr>
-          </a:p>
-        </p:txBody>
-      </p:sp>
       <p:cxnSp>
         <p:nvCxnSpPr>
           <p:cNvPr id="90" name="직선 연결선 89"/>
@@ -16894,37 +16837,213 @@
         </p:blipFill>
         <p:spPr>
           <a:xfrm>
-            <a:off x="1048380" y="658797"/>
-            <a:ext cx="7494434" cy="4609888"/>
+            <a:off x="231319" y="599005"/>
+            <a:ext cx="6809274" cy="4188440"/>
           </a:xfrm>
           <a:prstGeom prst="rect">
             <a:avLst/>
           </a:prstGeom>
         </p:spPr>
       </p:pic>
-      <p:pic>
-        <p:nvPicPr>
-          <p:cNvPr id="2" name="그림 1"/>
-          <p:cNvPicPr>
-            <a:picLocks noChangeAspect="1"/>
-          </p:cNvPicPr>
+      <p:grpSp>
+        <p:nvGrpSpPr>
+          <p:cNvPr id="3" name="그룹 2"/>
+          <p:cNvGrpSpPr/>
           <p:nvPr/>
-        </p:nvPicPr>
-        <p:blipFill rotWithShape="1">
-          <a:blip r:embed="rId3"/>
-          <a:srcRect r="1140"/>
-          <a:stretch/>
-        </p:blipFill>
+        </p:nvGrpSpPr>
+        <p:grpSpPr>
+          <a:xfrm>
+            <a:off x="2864781" y="4811098"/>
+            <a:ext cx="6855482" cy="4188440"/>
+            <a:chOff x="8192364" y="1224564"/>
+            <a:chExt cx="6281349" cy="3960000"/>
+          </a:xfrm>
+        </p:grpSpPr>
+        <p:pic>
+          <p:nvPicPr>
+            <p:cNvPr id="7" name="그림 6"/>
+            <p:cNvPicPr>
+              <a:picLocks noChangeAspect="1"/>
+            </p:cNvPicPr>
+            <p:nvPr/>
+          </p:nvPicPr>
+          <p:blipFill rotWithShape="1">
+            <a:blip r:embed="rId3"/>
+            <a:srcRect l="16961" r="1140"/>
+            <a:stretch/>
+          </p:blipFill>
+          <p:spPr>
+            <a:xfrm>
+              <a:off x="8196943" y="1224564"/>
+              <a:ext cx="6276770" cy="3960000"/>
+            </a:xfrm>
+            <a:prstGeom prst="rect">
+              <a:avLst/>
+            </a:prstGeom>
+          </p:spPr>
+        </p:pic>
+        <p:pic>
+          <p:nvPicPr>
+            <p:cNvPr id="2" name="그림 1"/>
+            <p:cNvPicPr>
+              <a:picLocks noChangeAspect="1"/>
+            </p:cNvPicPr>
+            <p:nvPr/>
+          </p:nvPicPr>
+          <p:blipFill rotWithShape="1">
+            <a:blip r:embed="rId3"/>
+            <a:srcRect l="-1" r="78636" b="92747"/>
+            <a:stretch/>
+          </p:blipFill>
+          <p:spPr>
+            <a:xfrm>
+              <a:off x="8192364" y="1235450"/>
+              <a:ext cx="1637437" cy="288550"/>
+            </a:xfrm>
+            <a:prstGeom prst="rect">
+              <a:avLst/>
+            </a:prstGeom>
+          </p:spPr>
+        </p:pic>
+      </p:grpSp>
+      <p:sp>
+        <p:nvSpPr>
+          <p:cNvPr id="4" name="직사각형 3"/>
+          <p:cNvSpPr/>
+          <p:nvPr/>
+        </p:nvSpPr>
         <p:spPr>
           <a:xfrm>
-            <a:off x="1073106" y="4637314"/>
-            <a:ext cx="7888120" cy="4122738"/>
+            <a:off x="590550" y="1212850"/>
+            <a:ext cx="660400" cy="82550"/>
           </a:xfrm>
           <a:prstGeom prst="rect">
             <a:avLst/>
           </a:prstGeom>
+          <a:solidFill>
+            <a:srgbClr val="181B1F"/>
+          </a:solidFill>
+          <a:ln>
+            <a:noFill/>
+          </a:ln>
         </p:spPr>
-      </p:pic>
+        <p:style>
+          <a:lnRef idx="2">
+            <a:schemeClr val="accent1">
+              <a:shade val="50000"/>
+            </a:schemeClr>
+          </a:lnRef>
+          <a:fillRef idx="1">
+            <a:schemeClr val="accent1"/>
+          </a:fillRef>
+          <a:effectRef idx="0">
+            <a:schemeClr val="accent1"/>
+          </a:effectRef>
+          <a:fontRef idx="minor">
+            <a:schemeClr val="lt1"/>
+          </a:fontRef>
+        </p:style>
+        <p:txBody>
+          <a:bodyPr rtlCol="0" anchor="ctr"/>
+          <a:lstStyle/>
+          <a:p>
+            <a:pPr algn="ctr"/>
+            <a:endParaRPr lang="ko-KR" altLang="en-US"/>
+          </a:p>
+        </p:txBody>
+      </p:sp>
+      <p:sp>
+        <p:nvSpPr>
+          <p:cNvPr id="10" name="직사각형 9"/>
+          <p:cNvSpPr/>
+          <p:nvPr/>
+        </p:nvSpPr>
+        <p:spPr>
+          <a:xfrm>
+            <a:off x="2070100" y="4006850"/>
+            <a:ext cx="533400" cy="596900"/>
+          </a:xfrm>
+          <a:prstGeom prst="rect">
+            <a:avLst/>
+          </a:prstGeom>
+          <a:solidFill>
+            <a:srgbClr val="181B1F"/>
+          </a:solidFill>
+          <a:ln>
+            <a:noFill/>
+          </a:ln>
+        </p:spPr>
+        <p:style>
+          <a:lnRef idx="2">
+            <a:schemeClr val="accent1">
+              <a:shade val="50000"/>
+            </a:schemeClr>
+          </a:lnRef>
+          <a:fillRef idx="1">
+            <a:schemeClr val="accent1"/>
+          </a:fillRef>
+          <a:effectRef idx="0">
+            <a:schemeClr val="accent1"/>
+          </a:effectRef>
+          <a:fontRef idx="minor">
+            <a:schemeClr val="lt1"/>
+          </a:fontRef>
+        </p:style>
+        <p:txBody>
+          <a:bodyPr rtlCol="0" anchor="ctr"/>
+          <a:lstStyle/>
+          <a:p>
+            <a:pPr algn="ctr"/>
+            <a:endParaRPr lang="ko-KR" altLang="en-US"/>
+          </a:p>
+        </p:txBody>
+      </p:sp>
+      <p:sp>
+        <p:nvSpPr>
+          <p:cNvPr id="11" name="직사각형 10"/>
+          <p:cNvSpPr/>
+          <p:nvPr/>
+        </p:nvSpPr>
+        <p:spPr>
+          <a:xfrm>
+            <a:off x="8674100" y="5340350"/>
+            <a:ext cx="660400" cy="82550"/>
+          </a:xfrm>
+          <a:prstGeom prst="rect">
+            <a:avLst/>
+          </a:prstGeom>
+          <a:solidFill>
+            <a:srgbClr val="FAFAFA"/>
+          </a:solidFill>
+          <a:ln>
+            <a:noFill/>
+          </a:ln>
+        </p:spPr>
+        <p:style>
+          <a:lnRef idx="2">
+            <a:schemeClr val="accent1">
+              <a:shade val="50000"/>
+            </a:schemeClr>
+          </a:lnRef>
+          <a:fillRef idx="1">
+            <a:schemeClr val="accent1"/>
+          </a:fillRef>
+          <a:effectRef idx="0">
+            <a:schemeClr val="accent1"/>
+          </a:effectRef>
+          <a:fontRef idx="minor">
+            <a:schemeClr val="lt1"/>
+          </a:fontRef>
+        </p:style>
+        <p:txBody>
+          <a:bodyPr rtlCol="0" anchor="ctr"/>
+          <a:lstStyle/>
+          <a:p>
+            <a:pPr algn="ctr"/>
+            <a:endParaRPr lang="ko-KR" altLang="en-US"/>
+          </a:p>
+        </p:txBody>
+      </p:sp>
     </p:spTree>
     <p:extLst>
       <p:ext uri="{BB962C8B-B14F-4D97-AF65-F5344CB8AC3E}">
@@ -17550,7 +17669,7 @@
           <p:cNvPr id="5" name="그림 4">
             <a:extLst>
               <a:ext uri="{FF2B5EF4-FFF2-40B4-BE49-F238E27FC236}">
-                <a16:creationId xmlns="" xmlns:a16="http://schemas.microsoft.com/office/drawing/2014/main" id="{F25A3B3A-32C8-4401-A476-E8CCEB3258D5}"/>
+                <a16:creationId xmlns:a16="http://schemas.microsoft.com/office/drawing/2014/main" xmlns="" id="{F25A3B3A-32C8-4401-A476-E8CCEB3258D5}"/>
               </a:ext>
             </a:extLst>
           </p:cNvPr>
@@ -17593,7 +17712,7 @@
           <p:cNvPr id="6" name="Picture 4">
             <a:extLst>
               <a:ext uri="{FF2B5EF4-FFF2-40B4-BE49-F238E27FC236}">
-                <a16:creationId xmlns="" xmlns:a16="http://schemas.microsoft.com/office/drawing/2014/main" id="{051FB3A4-C7F9-45D0-A73B-557A6E1C4FDF}"/>
+                <a16:creationId xmlns:a16="http://schemas.microsoft.com/office/drawing/2014/main" xmlns="" id="{051FB3A4-C7F9-45D0-A73B-557A6E1C4FDF}"/>
               </a:ext>
             </a:extLst>
           </p:cNvPr>
@@ -18716,7 +18835,7 @@
               <p:cNvPr id="34" name="Freeform 117">
                 <a:extLst>
                   <a:ext uri="{FF2B5EF4-FFF2-40B4-BE49-F238E27FC236}">
-                    <a16:creationId xmlns="" xmlns:a16="http://schemas.microsoft.com/office/drawing/2014/main" id="{ACB5F511-0467-4F80-BCD6-94BAC36031EE}"/>
+                    <a16:creationId xmlns:a16="http://schemas.microsoft.com/office/drawing/2014/main" xmlns="" id="{ACB5F511-0467-4F80-BCD6-94BAC36031EE}"/>
                   </a:ext>
                 </a:extLst>
               </p:cNvPr>
@@ -18896,7 +19015,7 @@
               <p:cNvPr id="35" name="Freeform 118">
                 <a:extLst>
                   <a:ext uri="{FF2B5EF4-FFF2-40B4-BE49-F238E27FC236}">
-                    <a16:creationId xmlns="" xmlns:a16="http://schemas.microsoft.com/office/drawing/2014/main" id="{8F3B04C3-D501-4070-B0AC-5FB6C26F8066}"/>
+                    <a16:creationId xmlns:a16="http://schemas.microsoft.com/office/drawing/2014/main" xmlns="" id="{8F3B04C3-D501-4070-B0AC-5FB6C26F8066}"/>
                   </a:ext>
                 </a:extLst>
               </p:cNvPr>
@@ -19038,7 +19157,7 @@
               <p:cNvPr id="36" name="Freeform 119">
                 <a:extLst>
                   <a:ext uri="{FF2B5EF4-FFF2-40B4-BE49-F238E27FC236}">
-                    <a16:creationId xmlns="" xmlns:a16="http://schemas.microsoft.com/office/drawing/2014/main" id="{36E9553A-4692-4D5B-A665-94CC09C4A62F}"/>
+                    <a16:creationId xmlns:a16="http://schemas.microsoft.com/office/drawing/2014/main" xmlns="" id="{36E9553A-4692-4D5B-A665-94CC09C4A62F}"/>
                   </a:ext>
                 </a:extLst>
               </p:cNvPr>
@@ -19218,7 +19337,7 @@
               <p:cNvPr id="37" name="Freeform 120">
                 <a:extLst>
                   <a:ext uri="{FF2B5EF4-FFF2-40B4-BE49-F238E27FC236}">
-                    <a16:creationId xmlns="" xmlns:a16="http://schemas.microsoft.com/office/drawing/2014/main" id="{936475C6-EBDB-47C8-8ADD-312FB8E3E615}"/>
+                    <a16:creationId xmlns:a16="http://schemas.microsoft.com/office/drawing/2014/main" xmlns="" id="{936475C6-EBDB-47C8-8ADD-312FB8E3E615}"/>
                   </a:ext>
                 </a:extLst>
               </p:cNvPr>
@@ -19360,7 +19479,7 @@
               <p:cNvPr id="38" name="Freeform 121">
                 <a:extLst>
                   <a:ext uri="{FF2B5EF4-FFF2-40B4-BE49-F238E27FC236}">
-                    <a16:creationId xmlns="" xmlns:a16="http://schemas.microsoft.com/office/drawing/2014/main" id="{169A2FBC-0956-4DC7-ADF8-83D5DC60949B}"/>
+                    <a16:creationId xmlns:a16="http://schemas.microsoft.com/office/drawing/2014/main" xmlns="" id="{169A2FBC-0956-4DC7-ADF8-83D5DC60949B}"/>
                   </a:ext>
                 </a:extLst>
               </p:cNvPr>
@@ -19540,7 +19659,7 @@
               <p:cNvPr id="39" name="Freeform 122">
                 <a:extLst>
                   <a:ext uri="{FF2B5EF4-FFF2-40B4-BE49-F238E27FC236}">
-                    <a16:creationId xmlns="" xmlns:a16="http://schemas.microsoft.com/office/drawing/2014/main" id="{59EA31B7-D7DB-4DBF-B245-2AE82627F51A}"/>
+                    <a16:creationId xmlns:a16="http://schemas.microsoft.com/office/drawing/2014/main" xmlns="" id="{59EA31B7-D7DB-4DBF-B245-2AE82627F51A}"/>
                   </a:ext>
                 </a:extLst>
               </p:cNvPr>
@@ -19682,7 +19801,7 @@
               <p:cNvPr id="40" name="Freeform 123">
                 <a:extLst>
                   <a:ext uri="{FF2B5EF4-FFF2-40B4-BE49-F238E27FC236}">
-                    <a16:creationId xmlns="" xmlns:a16="http://schemas.microsoft.com/office/drawing/2014/main" id="{07115F20-4892-4DCD-A419-4CD8D03F5E62}"/>
+                    <a16:creationId xmlns:a16="http://schemas.microsoft.com/office/drawing/2014/main" xmlns="" id="{07115F20-4892-4DCD-A419-4CD8D03F5E62}"/>
                   </a:ext>
                 </a:extLst>
               </p:cNvPr>
@@ -20240,7 +20359,7 @@
               <p:cNvPr id="41" name="Freeform 124">
                 <a:extLst>
                   <a:ext uri="{FF2B5EF4-FFF2-40B4-BE49-F238E27FC236}">
-                    <a16:creationId xmlns="" xmlns:a16="http://schemas.microsoft.com/office/drawing/2014/main" id="{9EA60E95-59DD-4A01-B0FA-42513BEAF8E7}"/>
+                    <a16:creationId xmlns:a16="http://schemas.microsoft.com/office/drawing/2014/main" xmlns="" id="{9EA60E95-59DD-4A01-B0FA-42513BEAF8E7}"/>
                   </a:ext>
                 </a:extLst>
               </p:cNvPr>
@@ -20420,7 +20539,7 @@
               <p:cNvPr id="42" name="Freeform 125">
                 <a:extLst>
                   <a:ext uri="{FF2B5EF4-FFF2-40B4-BE49-F238E27FC236}">
-                    <a16:creationId xmlns="" xmlns:a16="http://schemas.microsoft.com/office/drawing/2014/main" id="{277C2BFE-7B2E-4B06-836A-8103FB641491}"/>
+                    <a16:creationId xmlns:a16="http://schemas.microsoft.com/office/drawing/2014/main" xmlns="" id="{277C2BFE-7B2E-4B06-836A-8103FB641491}"/>
                   </a:ext>
                 </a:extLst>
               </p:cNvPr>
@@ -20577,7 +20696,7 @@
               <p:cNvPr id="32" name="Freeform 111">
                 <a:extLst>
                   <a:ext uri="{FF2B5EF4-FFF2-40B4-BE49-F238E27FC236}">
-                    <a16:creationId xmlns="" xmlns:a16="http://schemas.microsoft.com/office/drawing/2014/main" id="{BC11850A-92B9-404F-BF5E-D6215717A644}"/>
+                    <a16:creationId xmlns:a16="http://schemas.microsoft.com/office/drawing/2014/main" xmlns="" id="{BC11850A-92B9-404F-BF5E-D6215717A644}"/>
                   </a:ext>
                 </a:extLst>
               </p:cNvPr>
@@ -20795,7 +20914,7 @@
               <p:cNvPr id="33" name="Freeform 112">
                 <a:extLst>
                   <a:ext uri="{FF2B5EF4-FFF2-40B4-BE49-F238E27FC236}">
-                    <a16:creationId xmlns="" xmlns:a16="http://schemas.microsoft.com/office/drawing/2014/main" id="{9BB65042-15E8-4757-A437-CB30B736B658}"/>
+                    <a16:creationId xmlns:a16="http://schemas.microsoft.com/office/drawing/2014/main" xmlns="" id="{9BB65042-15E8-4757-A437-CB30B736B658}"/>
                   </a:ext>
                 </a:extLst>
               </p:cNvPr>
@@ -22202,7 +22321,7 @@
             <p:cNvPr id="43" name="Straight Connector 64">
               <a:extLst>
                 <a:ext uri="{FF2B5EF4-FFF2-40B4-BE49-F238E27FC236}">
-                  <a16:creationId xmlns="" xmlns:a16="http://schemas.microsoft.com/office/drawing/2014/main" id="{D22F4E57-90BA-4899-909E-5829E7A9C72A}"/>
+                  <a16:creationId xmlns:a16="http://schemas.microsoft.com/office/drawing/2014/main" xmlns="" id="{D22F4E57-90BA-4899-909E-5829E7A9C72A}"/>
                 </a:ext>
               </a:extLst>
             </p:cNvPr>
@@ -26342,7 +26461,7 @@
             <p:cNvPr id="97" name="타원 96">
               <a:extLst>
                 <a:ext uri="{FF2B5EF4-FFF2-40B4-BE49-F238E27FC236}">
-                  <a16:creationId xmlns:a16="http://schemas.microsoft.com/office/drawing/2014/main" xmlns="" id="{2A6A11AC-31D1-C238-469B-B8065561C8B3}"/>
+                  <a16:creationId xmlns="" xmlns:a16="http://schemas.microsoft.com/office/drawing/2014/main" id="{2A6A11AC-31D1-C238-469B-B8065561C8B3}"/>
                 </a:ext>
               </a:extLst>
             </p:cNvPr>
@@ -26413,7 +26532,7 @@
             <p:cNvPr id="98" name="TextBox 97">
               <a:extLst>
                 <a:ext uri="{FF2B5EF4-FFF2-40B4-BE49-F238E27FC236}">
-                  <a16:creationId xmlns:a16="http://schemas.microsoft.com/office/drawing/2014/main" xmlns="" id="{370FDDD1-392F-C3F6-7926-8F5450602B51}"/>
+                  <a16:creationId xmlns="" xmlns:a16="http://schemas.microsoft.com/office/drawing/2014/main" id="{370FDDD1-392F-C3F6-7926-8F5450602B51}"/>
                 </a:ext>
               </a:extLst>
             </p:cNvPr>
@@ -26584,7 +26703,7 @@
             <p:cNvPr id="99" name="타원 98">
               <a:extLst>
                 <a:ext uri="{FF2B5EF4-FFF2-40B4-BE49-F238E27FC236}">
-                  <a16:creationId xmlns:a16="http://schemas.microsoft.com/office/drawing/2014/main" xmlns="" id="{8A596585-4EFC-7C6C-63D0-E577FBF1E255}"/>
+                  <a16:creationId xmlns="" xmlns:a16="http://schemas.microsoft.com/office/drawing/2014/main" id="{8A596585-4EFC-7C6C-63D0-E577FBF1E255}"/>
                 </a:ext>
               </a:extLst>
             </p:cNvPr>
@@ -26668,7 +26787,7 @@
             <p:cNvPr id="100" name="TextBox 99">
               <a:extLst>
                 <a:ext uri="{FF2B5EF4-FFF2-40B4-BE49-F238E27FC236}">
-                  <a16:creationId xmlns:a16="http://schemas.microsoft.com/office/drawing/2014/main" xmlns="" id="{A2DBD73D-1544-9997-4B5E-7BE89DA70BD5}"/>
+                  <a16:creationId xmlns="" xmlns:a16="http://schemas.microsoft.com/office/drawing/2014/main" id="{A2DBD73D-1544-9997-4B5E-7BE89DA70BD5}"/>
                 </a:ext>
               </a:extLst>
             </p:cNvPr>
@@ -26784,7 +26903,7 @@
             <p:cNvPr id="101" name="타원 100">
               <a:extLst>
                 <a:ext uri="{FF2B5EF4-FFF2-40B4-BE49-F238E27FC236}">
-                  <a16:creationId xmlns:a16="http://schemas.microsoft.com/office/drawing/2014/main" xmlns="" id="{D7536991-A61A-F58E-EC18-61A6F108717B}"/>
+                  <a16:creationId xmlns="" xmlns:a16="http://schemas.microsoft.com/office/drawing/2014/main" id="{D7536991-A61A-F58E-EC18-61A6F108717B}"/>
                 </a:ext>
               </a:extLst>
             </p:cNvPr>
@@ -26868,7 +26987,7 @@
             <p:cNvPr id="102" name="TextBox 101">
               <a:extLst>
                 <a:ext uri="{FF2B5EF4-FFF2-40B4-BE49-F238E27FC236}">
-                  <a16:creationId xmlns:a16="http://schemas.microsoft.com/office/drawing/2014/main" xmlns="" id="{688289CD-94AD-1B72-1500-6EAFBCF42BA0}"/>
+                  <a16:creationId xmlns="" xmlns:a16="http://schemas.microsoft.com/office/drawing/2014/main" id="{688289CD-94AD-1B72-1500-6EAFBCF42BA0}"/>
                 </a:ext>
               </a:extLst>
             </p:cNvPr>
@@ -27131,7 +27250,7 @@
             <p:cNvPr id="103" name="타원 102">
               <a:extLst>
                 <a:ext uri="{FF2B5EF4-FFF2-40B4-BE49-F238E27FC236}">
-                  <a16:creationId xmlns:a16="http://schemas.microsoft.com/office/drawing/2014/main" xmlns="" id="{F74DE22F-BE57-990F-10C7-5A28137FF97D}"/>
+                  <a16:creationId xmlns="" xmlns:a16="http://schemas.microsoft.com/office/drawing/2014/main" id="{F74DE22F-BE57-990F-10C7-5A28137FF97D}"/>
                 </a:ext>
               </a:extLst>
             </p:cNvPr>
@@ -27215,7 +27334,7 @@
             <p:cNvPr id="104" name="TextBox 103">
               <a:extLst>
                 <a:ext uri="{FF2B5EF4-FFF2-40B4-BE49-F238E27FC236}">
-                  <a16:creationId xmlns:a16="http://schemas.microsoft.com/office/drawing/2014/main" xmlns="" id="{2709A4DE-7D99-060B-4332-72EAE25DA559}"/>
+                  <a16:creationId xmlns="" xmlns:a16="http://schemas.microsoft.com/office/drawing/2014/main" id="{2709A4DE-7D99-060B-4332-72EAE25DA559}"/>
                 </a:ext>
               </a:extLst>
             </p:cNvPr>
@@ -28309,7 +28428,7 @@
             <p:cNvPr id="6" name="Picture 11" descr="Sandbox Software – In the Cloud | FortiSandbox Cloud">
               <a:extLst>
                 <a:ext uri="{FF2B5EF4-FFF2-40B4-BE49-F238E27FC236}">
-                  <a16:creationId xmlns="" xmlns:a16="http://schemas.microsoft.com/office/drawing/2014/main" id="{73BBF3D0-6B40-E280-BA30-1E77B5C4F45A}"/>
+                  <a16:creationId xmlns:a16="http://schemas.microsoft.com/office/drawing/2014/main" xmlns="" id="{73BBF3D0-6B40-E280-BA30-1E77B5C4F45A}"/>
                 </a:ext>
               </a:extLst>
             </p:cNvPr>
@@ -28427,7 +28546,7 @@
             <p:cNvPr id="7" name="Picture 8" descr="cost Icon - Free PNG &amp; SVG 930448 - Noun Project">
               <a:extLst>
                 <a:ext uri="{FF2B5EF4-FFF2-40B4-BE49-F238E27FC236}">
-                  <a16:creationId xmlns="" xmlns:a16="http://schemas.microsoft.com/office/drawing/2014/main" id="{B89FFE28-AD15-4FA1-FDD1-8DF6F4744923}"/>
+                  <a16:creationId xmlns:a16="http://schemas.microsoft.com/office/drawing/2014/main" xmlns="" id="{B89FFE28-AD15-4FA1-FDD1-8DF6F4744923}"/>
                 </a:ext>
               </a:extLst>
             </p:cNvPr>
@@ -28557,7 +28676,7 @@
             <p:cNvPr id="8" name="Picture 6" descr="Project Cargo Services | CFA">
               <a:extLst>
                 <a:ext uri="{FF2B5EF4-FFF2-40B4-BE49-F238E27FC236}">
-                  <a16:creationId xmlns="" xmlns:a16="http://schemas.microsoft.com/office/drawing/2014/main" id="{A9578F59-39A1-6B09-C1A4-24DA78C49B39}"/>
+                  <a16:creationId xmlns:a16="http://schemas.microsoft.com/office/drawing/2014/main" xmlns="" id="{A9578F59-39A1-6B09-C1A4-24DA78C49B39}"/>
                 </a:ext>
               </a:extLst>
             </p:cNvPr>

--- a/99ref/버티카_blog.pptx
+++ b/99ref/버티카_blog.pptx
@@ -234,7 +234,7 @@
           <a:p>
             <a:fld id="{69E94B31-9877-4AE9-B54F-895ACA0C6140}" type="datetimeFigureOut">
               <a:rPr lang="ko-KR" altLang="en-US" smtClean="0"/>
-              <a:t>2026-04-28</a:t>
+              <a:t>2026-04-29</a:t>
             </a:fld>
             <a:endParaRPr lang="ko-KR" altLang="en-US"/>
           </a:p>
@@ -717,7 +717,7 @@
           <a:p>
             <a:fld id="{7BB46140-E90A-48B1-9E02-0E867CD1ADA8}" type="datetimeFigureOut">
               <a:rPr lang="ko-KR" altLang="en-US" smtClean="0"/>
-              <a:t>2026-04-28</a:t>
+              <a:t>2026-04-29</a:t>
             </a:fld>
             <a:endParaRPr lang="ko-KR" altLang="en-US"/>
           </a:p>
@@ -887,7 +887,7 @@
           <a:p>
             <a:fld id="{7BB46140-E90A-48B1-9E02-0E867CD1ADA8}" type="datetimeFigureOut">
               <a:rPr lang="ko-KR" altLang="en-US" smtClean="0"/>
-              <a:t>2026-04-28</a:t>
+              <a:t>2026-04-29</a:t>
             </a:fld>
             <a:endParaRPr lang="ko-KR" altLang="en-US"/>
           </a:p>
@@ -1067,7 +1067,7 @@
           <a:p>
             <a:fld id="{7BB46140-E90A-48B1-9E02-0E867CD1ADA8}" type="datetimeFigureOut">
               <a:rPr lang="ko-KR" altLang="en-US" smtClean="0"/>
-              <a:t>2026-04-28</a:t>
+              <a:t>2026-04-29</a:t>
             </a:fld>
             <a:endParaRPr lang="ko-KR" altLang="en-US"/>
           </a:p>
@@ -1237,7 +1237,7 @@
           <a:p>
             <a:fld id="{7BB46140-E90A-48B1-9E02-0E867CD1ADA8}" type="datetimeFigureOut">
               <a:rPr lang="ko-KR" altLang="en-US" smtClean="0"/>
-              <a:t>2026-04-28</a:t>
+              <a:t>2026-04-29</a:t>
             </a:fld>
             <a:endParaRPr lang="ko-KR" altLang="en-US"/>
           </a:p>
@@ -1481,7 +1481,7 @@
           <a:p>
             <a:fld id="{7BB46140-E90A-48B1-9E02-0E867CD1ADA8}" type="datetimeFigureOut">
               <a:rPr lang="ko-KR" altLang="en-US" smtClean="0"/>
-              <a:t>2026-04-28</a:t>
+              <a:t>2026-04-29</a:t>
             </a:fld>
             <a:endParaRPr lang="ko-KR" altLang="en-US"/>
           </a:p>
@@ -1713,7 +1713,7 @@
           <a:p>
             <a:fld id="{7BB46140-E90A-48B1-9E02-0E867CD1ADA8}" type="datetimeFigureOut">
               <a:rPr lang="ko-KR" altLang="en-US" smtClean="0"/>
-              <a:t>2026-04-28</a:t>
+              <a:t>2026-04-29</a:t>
             </a:fld>
             <a:endParaRPr lang="ko-KR" altLang="en-US"/>
           </a:p>
@@ -2080,7 +2080,7 @@
           <a:p>
             <a:fld id="{7BB46140-E90A-48B1-9E02-0E867CD1ADA8}" type="datetimeFigureOut">
               <a:rPr lang="ko-KR" altLang="en-US" smtClean="0"/>
-              <a:t>2026-04-28</a:t>
+              <a:t>2026-04-29</a:t>
             </a:fld>
             <a:endParaRPr lang="ko-KR" altLang="en-US"/>
           </a:p>
@@ -2198,7 +2198,7 @@
           <a:p>
             <a:fld id="{7BB46140-E90A-48B1-9E02-0E867CD1ADA8}" type="datetimeFigureOut">
               <a:rPr lang="ko-KR" altLang="en-US" smtClean="0"/>
-              <a:t>2026-04-28</a:t>
+              <a:t>2026-04-29</a:t>
             </a:fld>
             <a:endParaRPr lang="ko-KR" altLang="en-US"/>
           </a:p>
@@ -2293,7 +2293,7 @@
           <a:p>
             <a:fld id="{7BB46140-E90A-48B1-9E02-0E867CD1ADA8}" type="datetimeFigureOut">
               <a:rPr lang="ko-KR" altLang="en-US" smtClean="0"/>
-              <a:t>2026-04-28</a:t>
+              <a:t>2026-04-29</a:t>
             </a:fld>
             <a:endParaRPr lang="ko-KR" altLang="en-US"/>
           </a:p>
@@ -2570,7 +2570,7 @@
           <a:p>
             <a:fld id="{7BB46140-E90A-48B1-9E02-0E867CD1ADA8}" type="datetimeFigureOut">
               <a:rPr lang="ko-KR" altLang="en-US" smtClean="0"/>
-              <a:t>2026-04-28</a:t>
+              <a:t>2026-04-29</a:t>
             </a:fld>
             <a:endParaRPr lang="ko-KR" altLang="en-US"/>
           </a:p>
@@ -2827,7 +2827,7 @@
           <a:p>
             <a:fld id="{7BB46140-E90A-48B1-9E02-0E867CD1ADA8}" type="datetimeFigureOut">
               <a:rPr lang="ko-KR" altLang="en-US" smtClean="0"/>
-              <a:t>2026-04-28</a:t>
+              <a:t>2026-04-29</a:t>
             </a:fld>
             <a:endParaRPr lang="ko-KR" altLang="en-US"/>
           </a:p>
@@ -3040,7 +3040,7 @@
           <a:p>
             <a:fld id="{7BB46140-E90A-48B1-9E02-0E867CD1ADA8}" type="datetimeFigureOut">
               <a:rPr lang="ko-KR" altLang="en-US" smtClean="0"/>
-              <a:t>2026-04-28</a:t>
+              <a:t>2026-04-29</a:t>
             </a:fld>
             <a:endParaRPr lang="ko-KR" altLang="en-US"/>
           </a:p>
@@ -17669,7 +17669,7 @@
           <p:cNvPr id="5" name="그림 4">
             <a:extLst>
               <a:ext uri="{FF2B5EF4-FFF2-40B4-BE49-F238E27FC236}">
-                <a16:creationId xmlns:a16="http://schemas.microsoft.com/office/drawing/2014/main" xmlns="" id="{F25A3B3A-32C8-4401-A476-E8CCEB3258D5}"/>
+                <a16:creationId xmlns="" xmlns:a16="http://schemas.microsoft.com/office/drawing/2014/main" id="{F25A3B3A-32C8-4401-A476-E8CCEB3258D5}"/>
               </a:ext>
             </a:extLst>
           </p:cNvPr>
@@ -17712,7 +17712,7 @@
           <p:cNvPr id="6" name="Picture 4">
             <a:extLst>
               <a:ext uri="{FF2B5EF4-FFF2-40B4-BE49-F238E27FC236}">
-                <a16:creationId xmlns:a16="http://schemas.microsoft.com/office/drawing/2014/main" xmlns="" id="{051FB3A4-C7F9-45D0-A73B-557A6E1C4FDF}"/>
+                <a16:creationId xmlns="" xmlns:a16="http://schemas.microsoft.com/office/drawing/2014/main" id="{051FB3A4-C7F9-45D0-A73B-557A6E1C4FDF}"/>
               </a:ext>
             </a:extLst>
           </p:cNvPr>
@@ -18835,7 +18835,7 @@
               <p:cNvPr id="34" name="Freeform 117">
                 <a:extLst>
                   <a:ext uri="{FF2B5EF4-FFF2-40B4-BE49-F238E27FC236}">
-                    <a16:creationId xmlns:a16="http://schemas.microsoft.com/office/drawing/2014/main" xmlns="" id="{ACB5F511-0467-4F80-BCD6-94BAC36031EE}"/>
+                    <a16:creationId xmlns="" xmlns:a16="http://schemas.microsoft.com/office/drawing/2014/main" id="{ACB5F511-0467-4F80-BCD6-94BAC36031EE}"/>
                   </a:ext>
                 </a:extLst>
               </p:cNvPr>
@@ -19015,7 +19015,7 @@
               <p:cNvPr id="35" name="Freeform 118">
                 <a:extLst>
                   <a:ext uri="{FF2B5EF4-FFF2-40B4-BE49-F238E27FC236}">
-                    <a16:creationId xmlns:a16="http://schemas.microsoft.com/office/drawing/2014/main" xmlns="" id="{8F3B04C3-D501-4070-B0AC-5FB6C26F8066}"/>
+                    <a16:creationId xmlns="" xmlns:a16="http://schemas.microsoft.com/office/drawing/2014/main" id="{8F3B04C3-D501-4070-B0AC-5FB6C26F8066}"/>
                   </a:ext>
                 </a:extLst>
               </p:cNvPr>
@@ -19157,7 +19157,7 @@
               <p:cNvPr id="36" name="Freeform 119">
                 <a:extLst>
                   <a:ext uri="{FF2B5EF4-FFF2-40B4-BE49-F238E27FC236}">
-                    <a16:creationId xmlns:a16="http://schemas.microsoft.com/office/drawing/2014/main" xmlns="" id="{36E9553A-4692-4D5B-A665-94CC09C4A62F}"/>
+                    <a16:creationId xmlns="" xmlns:a16="http://schemas.microsoft.com/office/drawing/2014/main" id="{36E9553A-4692-4D5B-A665-94CC09C4A62F}"/>
                   </a:ext>
                 </a:extLst>
               </p:cNvPr>
@@ -19337,7 +19337,7 @@
               <p:cNvPr id="37" name="Freeform 120">
                 <a:extLst>
                   <a:ext uri="{FF2B5EF4-FFF2-40B4-BE49-F238E27FC236}">
-                    <a16:creationId xmlns:a16="http://schemas.microsoft.com/office/drawing/2014/main" xmlns="" id="{936475C6-EBDB-47C8-8ADD-312FB8E3E615}"/>
+                    <a16:creationId xmlns="" xmlns:a16="http://schemas.microsoft.com/office/drawing/2014/main" id="{936475C6-EBDB-47C8-8ADD-312FB8E3E615}"/>
                   </a:ext>
                 </a:extLst>
               </p:cNvPr>
@@ -19479,7 +19479,7 @@
               <p:cNvPr id="38" name="Freeform 121">
                 <a:extLst>
                   <a:ext uri="{FF2B5EF4-FFF2-40B4-BE49-F238E27FC236}">
-                    <a16:creationId xmlns:a16="http://schemas.microsoft.com/office/drawing/2014/main" xmlns="" id="{169A2FBC-0956-4DC7-ADF8-83D5DC60949B}"/>
+                    <a16:creationId xmlns="" xmlns:a16="http://schemas.microsoft.com/office/drawing/2014/main" id="{169A2FBC-0956-4DC7-ADF8-83D5DC60949B}"/>
                   </a:ext>
                 </a:extLst>
               </p:cNvPr>
@@ -19659,7 +19659,7 @@
               <p:cNvPr id="39" name="Freeform 122">
                 <a:extLst>
                   <a:ext uri="{FF2B5EF4-FFF2-40B4-BE49-F238E27FC236}">
-                    <a16:creationId xmlns:a16="http://schemas.microsoft.com/office/drawing/2014/main" xmlns="" id="{59EA31B7-D7DB-4DBF-B245-2AE82627F51A}"/>
+                    <a16:creationId xmlns="" xmlns:a16="http://schemas.microsoft.com/office/drawing/2014/main" id="{59EA31B7-D7DB-4DBF-B245-2AE82627F51A}"/>
                   </a:ext>
                 </a:extLst>
               </p:cNvPr>
@@ -19801,7 +19801,7 @@
               <p:cNvPr id="40" name="Freeform 123">
                 <a:extLst>
                   <a:ext uri="{FF2B5EF4-FFF2-40B4-BE49-F238E27FC236}">
-                    <a16:creationId xmlns:a16="http://schemas.microsoft.com/office/drawing/2014/main" xmlns="" id="{07115F20-4892-4DCD-A419-4CD8D03F5E62}"/>
+                    <a16:creationId xmlns="" xmlns:a16="http://schemas.microsoft.com/office/drawing/2014/main" id="{07115F20-4892-4DCD-A419-4CD8D03F5E62}"/>
                   </a:ext>
                 </a:extLst>
               </p:cNvPr>
@@ -20359,7 +20359,7 @@
               <p:cNvPr id="41" name="Freeform 124">
                 <a:extLst>
                   <a:ext uri="{FF2B5EF4-FFF2-40B4-BE49-F238E27FC236}">
-                    <a16:creationId xmlns:a16="http://schemas.microsoft.com/office/drawing/2014/main" xmlns="" id="{9EA60E95-59DD-4A01-B0FA-42513BEAF8E7}"/>
+                    <a16:creationId xmlns="" xmlns:a16="http://schemas.microsoft.com/office/drawing/2014/main" id="{9EA60E95-59DD-4A01-B0FA-42513BEAF8E7}"/>
                   </a:ext>
                 </a:extLst>
               </p:cNvPr>
@@ -20539,7 +20539,7 @@
               <p:cNvPr id="42" name="Freeform 125">
                 <a:extLst>
                   <a:ext uri="{FF2B5EF4-FFF2-40B4-BE49-F238E27FC236}">
-                    <a16:creationId xmlns:a16="http://schemas.microsoft.com/office/drawing/2014/main" xmlns="" id="{277C2BFE-7B2E-4B06-836A-8103FB641491}"/>
+                    <a16:creationId xmlns="" xmlns:a16="http://schemas.microsoft.com/office/drawing/2014/main" id="{277C2BFE-7B2E-4B06-836A-8103FB641491}"/>
                   </a:ext>
                 </a:extLst>
               </p:cNvPr>
@@ -20696,7 +20696,7 @@
               <p:cNvPr id="32" name="Freeform 111">
                 <a:extLst>
                   <a:ext uri="{FF2B5EF4-FFF2-40B4-BE49-F238E27FC236}">
-                    <a16:creationId xmlns:a16="http://schemas.microsoft.com/office/drawing/2014/main" xmlns="" id="{BC11850A-92B9-404F-BF5E-D6215717A644}"/>
+                    <a16:creationId xmlns="" xmlns:a16="http://schemas.microsoft.com/office/drawing/2014/main" id="{BC11850A-92B9-404F-BF5E-D6215717A644}"/>
                   </a:ext>
                 </a:extLst>
               </p:cNvPr>
@@ -20914,7 +20914,7 @@
               <p:cNvPr id="33" name="Freeform 112">
                 <a:extLst>
                   <a:ext uri="{FF2B5EF4-FFF2-40B4-BE49-F238E27FC236}">
-                    <a16:creationId xmlns:a16="http://schemas.microsoft.com/office/drawing/2014/main" xmlns="" id="{9BB65042-15E8-4757-A437-CB30B736B658}"/>
+                    <a16:creationId xmlns="" xmlns:a16="http://schemas.microsoft.com/office/drawing/2014/main" id="{9BB65042-15E8-4757-A437-CB30B736B658}"/>
                   </a:ext>
                 </a:extLst>
               </p:cNvPr>
@@ -22321,7 +22321,7 @@
             <p:cNvPr id="43" name="Straight Connector 64">
               <a:extLst>
                 <a:ext uri="{FF2B5EF4-FFF2-40B4-BE49-F238E27FC236}">
-                  <a16:creationId xmlns:a16="http://schemas.microsoft.com/office/drawing/2014/main" xmlns="" id="{D22F4E57-90BA-4899-909E-5829E7A9C72A}"/>
+                  <a16:creationId xmlns="" xmlns:a16="http://schemas.microsoft.com/office/drawing/2014/main" id="{D22F4E57-90BA-4899-909E-5829E7A9C72A}"/>
                 </a:ext>
               </a:extLst>
             </p:cNvPr>
@@ -26461,7 +26461,7 @@
             <p:cNvPr id="97" name="타원 96">
               <a:extLst>
                 <a:ext uri="{FF2B5EF4-FFF2-40B4-BE49-F238E27FC236}">
-                  <a16:creationId xmlns="" xmlns:a16="http://schemas.microsoft.com/office/drawing/2014/main" id="{2A6A11AC-31D1-C238-469B-B8065561C8B3}"/>
+                  <a16:creationId xmlns:a16="http://schemas.microsoft.com/office/drawing/2014/main" xmlns="" id="{2A6A11AC-31D1-C238-469B-B8065561C8B3}"/>
                 </a:ext>
               </a:extLst>
             </p:cNvPr>
@@ -26532,7 +26532,7 @@
             <p:cNvPr id="98" name="TextBox 97">
               <a:extLst>
                 <a:ext uri="{FF2B5EF4-FFF2-40B4-BE49-F238E27FC236}">
-                  <a16:creationId xmlns="" xmlns:a16="http://schemas.microsoft.com/office/drawing/2014/main" id="{370FDDD1-392F-C3F6-7926-8F5450602B51}"/>
+                  <a16:creationId xmlns:a16="http://schemas.microsoft.com/office/drawing/2014/main" xmlns="" id="{370FDDD1-392F-C3F6-7926-8F5450602B51}"/>
                 </a:ext>
               </a:extLst>
             </p:cNvPr>
@@ -26703,7 +26703,7 @@
             <p:cNvPr id="99" name="타원 98">
               <a:extLst>
                 <a:ext uri="{FF2B5EF4-FFF2-40B4-BE49-F238E27FC236}">
-                  <a16:creationId xmlns="" xmlns:a16="http://schemas.microsoft.com/office/drawing/2014/main" id="{8A596585-4EFC-7C6C-63D0-E577FBF1E255}"/>
+                  <a16:creationId xmlns:a16="http://schemas.microsoft.com/office/drawing/2014/main" xmlns="" id="{8A596585-4EFC-7C6C-63D0-E577FBF1E255}"/>
                 </a:ext>
               </a:extLst>
             </p:cNvPr>
@@ -26787,7 +26787,7 @@
             <p:cNvPr id="100" name="TextBox 99">
               <a:extLst>
                 <a:ext uri="{FF2B5EF4-FFF2-40B4-BE49-F238E27FC236}">
-                  <a16:creationId xmlns="" xmlns:a16="http://schemas.microsoft.com/office/drawing/2014/main" id="{A2DBD73D-1544-9997-4B5E-7BE89DA70BD5}"/>
+                  <a16:creationId xmlns:a16="http://schemas.microsoft.com/office/drawing/2014/main" xmlns="" id="{A2DBD73D-1544-9997-4B5E-7BE89DA70BD5}"/>
                 </a:ext>
               </a:extLst>
             </p:cNvPr>
@@ -26903,7 +26903,7 @@
             <p:cNvPr id="101" name="타원 100">
               <a:extLst>
                 <a:ext uri="{FF2B5EF4-FFF2-40B4-BE49-F238E27FC236}">
-                  <a16:creationId xmlns="" xmlns:a16="http://schemas.microsoft.com/office/drawing/2014/main" id="{D7536991-A61A-F58E-EC18-61A6F108717B}"/>
+                  <a16:creationId xmlns:a16="http://schemas.microsoft.com/office/drawing/2014/main" xmlns="" id="{D7536991-A61A-F58E-EC18-61A6F108717B}"/>
                 </a:ext>
               </a:extLst>
             </p:cNvPr>
@@ -26987,7 +26987,7 @@
             <p:cNvPr id="102" name="TextBox 101">
               <a:extLst>
                 <a:ext uri="{FF2B5EF4-FFF2-40B4-BE49-F238E27FC236}">
-                  <a16:creationId xmlns="" xmlns:a16="http://schemas.microsoft.com/office/drawing/2014/main" id="{688289CD-94AD-1B72-1500-6EAFBCF42BA0}"/>
+                  <a16:creationId xmlns:a16="http://schemas.microsoft.com/office/drawing/2014/main" xmlns="" id="{688289CD-94AD-1B72-1500-6EAFBCF42BA0}"/>
                 </a:ext>
               </a:extLst>
             </p:cNvPr>
@@ -27250,7 +27250,7 @@
             <p:cNvPr id="103" name="타원 102">
               <a:extLst>
                 <a:ext uri="{FF2B5EF4-FFF2-40B4-BE49-F238E27FC236}">
-                  <a16:creationId xmlns="" xmlns:a16="http://schemas.microsoft.com/office/drawing/2014/main" id="{F74DE22F-BE57-990F-10C7-5A28137FF97D}"/>
+                  <a16:creationId xmlns:a16="http://schemas.microsoft.com/office/drawing/2014/main" xmlns="" id="{F74DE22F-BE57-990F-10C7-5A28137FF97D}"/>
                 </a:ext>
               </a:extLst>
             </p:cNvPr>
@@ -27334,7 +27334,7 @@
             <p:cNvPr id="104" name="TextBox 103">
               <a:extLst>
                 <a:ext uri="{FF2B5EF4-FFF2-40B4-BE49-F238E27FC236}">
-                  <a16:creationId xmlns="" xmlns:a16="http://schemas.microsoft.com/office/drawing/2014/main" id="{2709A4DE-7D99-060B-4332-72EAE25DA559}"/>
+                  <a16:creationId xmlns:a16="http://schemas.microsoft.com/office/drawing/2014/main" xmlns="" id="{2709A4DE-7D99-060B-4332-72EAE25DA559}"/>
                 </a:ext>
               </a:extLst>
             </p:cNvPr>
@@ -28428,7 +28428,7 @@
             <p:cNvPr id="6" name="Picture 11" descr="Sandbox Software – In the Cloud | FortiSandbox Cloud">
               <a:extLst>
                 <a:ext uri="{FF2B5EF4-FFF2-40B4-BE49-F238E27FC236}">
-                  <a16:creationId xmlns:a16="http://schemas.microsoft.com/office/drawing/2014/main" xmlns="" id="{73BBF3D0-6B40-E280-BA30-1E77B5C4F45A}"/>
+                  <a16:creationId xmlns="" xmlns:a16="http://schemas.microsoft.com/office/drawing/2014/main" id="{73BBF3D0-6B40-E280-BA30-1E77B5C4F45A}"/>
                 </a:ext>
               </a:extLst>
             </p:cNvPr>
@@ -28546,7 +28546,7 @@
             <p:cNvPr id="7" name="Picture 8" descr="cost Icon - Free PNG &amp; SVG 930448 - Noun Project">
               <a:extLst>
                 <a:ext uri="{FF2B5EF4-FFF2-40B4-BE49-F238E27FC236}">
-                  <a16:creationId xmlns:a16="http://schemas.microsoft.com/office/drawing/2014/main" xmlns="" id="{B89FFE28-AD15-4FA1-FDD1-8DF6F4744923}"/>
+                  <a16:creationId xmlns="" xmlns:a16="http://schemas.microsoft.com/office/drawing/2014/main" id="{B89FFE28-AD15-4FA1-FDD1-8DF6F4744923}"/>
                 </a:ext>
               </a:extLst>
             </p:cNvPr>
@@ -28676,7 +28676,7 @@
             <p:cNvPr id="8" name="Picture 6" descr="Project Cargo Services | CFA">
               <a:extLst>
                 <a:ext uri="{FF2B5EF4-FFF2-40B4-BE49-F238E27FC236}">
-                  <a16:creationId xmlns:a16="http://schemas.microsoft.com/office/drawing/2014/main" xmlns="" id="{A9578F59-39A1-6B09-C1A4-24DA78C49B39}"/>
+                  <a16:creationId xmlns="" xmlns:a16="http://schemas.microsoft.com/office/drawing/2014/main" id="{A9578F59-39A1-6B09-C1A4-24DA78C49B39}"/>
                 </a:ext>
               </a:extLst>
             </p:cNvPr>
@@ -38709,35 +38709,35 @@
       </p:sp>
       <p:grpSp>
         <p:nvGrpSpPr>
-          <p:cNvPr id="7" name="그룹 6"/>
+          <p:cNvPr id="80" name="그룹 79"/>
           <p:cNvGrpSpPr/>
           <p:nvPr/>
         </p:nvGrpSpPr>
         <p:grpSpPr>
           <a:xfrm>
-            <a:off x="440690" y="7879080"/>
-            <a:ext cx="4008120" cy="899160"/>
-            <a:chOff x="440690" y="7879080"/>
-            <a:chExt cx="4008120" cy="899160"/>
+            <a:off x="631190" y="7898130"/>
+            <a:ext cx="3456000" cy="899160"/>
+            <a:chOff x="624840" y="7879080"/>
+            <a:chExt cx="3456000" cy="899160"/>
           </a:xfrm>
         </p:grpSpPr>
         <p:grpSp>
           <p:nvGrpSpPr>
-            <p:cNvPr id="29" name="그룹 28"/>
+            <p:cNvPr id="81" name="그룹 80"/>
             <p:cNvGrpSpPr/>
             <p:nvPr/>
           </p:nvGrpSpPr>
           <p:grpSpPr>
             <a:xfrm>
-              <a:off x="656455" y="7953144"/>
-              <a:ext cx="3425394" cy="793031"/>
+              <a:off x="656455" y="7953148"/>
+              <a:ext cx="3186547" cy="810760"/>
               <a:chOff x="840832" y="4355911"/>
-              <a:chExt cx="3425394" cy="980453"/>
+              <a:chExt cx="3186547" cy="1002371"/>
             </a:xfrm>
           </p:grpSpPr>
           <p:sp>
             <p:nvSpPr>
-              <p:cNvPr id="30" name="Rounded Rectangle 32"/>
+              <p:cNvPr id="83" name="Rounded Rectangle 32"/>
               <p:cNvSpPr/>
               <p:nvPr/>
             </p:nvSpPr>
@@ -38832,7 +38832,7 @@
           </p:sp>
           <p:sp>
             <p:nvSpPr>
-              <p:cNvPr id="31" name="Rounded Rectangle 33"/>
+              <p:cNvPr id="84" name="Rounded Rectangle 33"/>
               <p:cNvSpPr/>
               <p:nvPr/>
             </p:nvSpPr>
@@ -38927,7 +38927,7 @@
           </p:sp>
           <p:sp>
             <p:nvSpPr>
-              <p:cNvPr id="32" name="Rounded Rectangle 34"/>
+              <p:cNvPr id="85" name="Rounded Rectangle 34"/>
               <p:cNvSpPr/>
               <p:nvPr/>
             </p:nvSpPr>
@@ -39022,13 +39022,13 @@
           </p:sp>
           <p:sp>
             <p:nvSpPr>
-              <p:cNvPr id="33" name="TextBox 32"/>
+              <p:cNvPr id="86" name="TextBox 85"/>
               <p:cNvSpPr txBox="1"/>
               <p:nvPr/>
             </p:nvSpPr>
             <p:spPr>
               <a:xfrm>
-                <a:off x="2434033" y="5225564"/>
+                <a:off x="2434033" y="5209862"/>
                 <a:ext cx="229230" cy="110800"/>
               </a:xfrm>
               <a:prstGeom prst="rect">
@@ -39096,7 +39096,7 @@
           </p:sp>
           <p:sp>
             <p:nvSpPr>
-              <p:cNvPr id="34" name="Rectangle 36"/>
+              <p:cNvPr id="87" name="Rectangle 36"/>
               <p:cNvSpPr/>
               <p:nvPr/>
             </p:nvSpPr>
@@ -39159,7 +39159,7 @@
           </p:sp>
           <p:sp>
             <p:nvSpPr>
-              <p:cNvPr id="35" name="Rectangle 39"/>
+              <p:cNvPr id="89" name="Rectangle 39"/>
               <p:cNvSpPr/>
               <p:nvPr/>
             </p:nvSpPr>
@@ -39222,10 +39222,10 @@
           </p:sp>
           <p:cxnSp>
             <p:nvCxnSpPr>
-              <p:cNvPr id="36" name="Straight Arrow Connector 42"/>
+              <p:cNvPr id="91" name="Straight Arrow Connector 42"/>
               <p:cNvCxnSpPr>
-                <a:stCxn id="34" idx="1"/>
-                <a:endCxn id="40" idx="2"/>
+                <a:stCxn id="87" idx="1"/>
+                <a:endCxn id="95" idx="2"/>
               </p:cNvCxnSpPr>
               <p:nvPr/>
             </p:nvCxnSpPr>
@@ -39251,9 +39251,9 @@
           </p:cxnSp>
           <p:cxnSp>
             <p:nvCxnSpPr>
-              <p:cNvPr id="37" name="Straight Arrow Connector 43"/>
+              <p:cNvPr id="92" name="Straight Arrow Connector 43"/>
               <p:cNvCxnSpPr>
-                <a:stCxn id="34" idx="0"/>
+                <a:stCxn id="87" idx="0"/>
               </p:cNvCxnSpPr>
               <p:nvPr/>
             </p:nvCxnSpPr>
@@ -39279,10 +39279,10 @@
           </p:cxnSp>
           <p:cxnSp>
             <p:nvCxnSpPr>
-              <p:cNvPr id="38" name="Straight Arrow Connector 44"/>
+              <p:cNvPr id="93" name="Straight Arrow Connector 44"/>
               <p:cNvCxnSpPr>
-                <a:stCxn id="34" idx="3"/>
-                <a:endCxn id="41" idx="2"/>
+                <a:stCxn id="87" idx="3"/>
+                <a:endCxn id="96" idx="2"/>
               </p:cNvCxnSpPr>
               <p:nvPr/>
             </p:nvCxnSpPr>
@@ -39308,7 +39308,7 @@
           </p:cxnSp>
           <p:sp>
             <p:nvSpPr>
-              <p:cNvPr id="39" name="TextBox 38"/>
+              <p:cNvPr id="94" name="TextBox 93"/>
               <p:cNvSpPr txBox="1"/>
               <p:nvPr/>
             </p:nvSpPr>
@@ -39382,7 +39382,7 @@
           </p:sp>
           <p:sp>
             <p:nvSpPr>
-              <p:cNvPr id="40" name="Rectangle 46"/>
+              <p:cNvPr id="95" name="Rectangle 46"/>
               <p:cNvSpPr/>
               <p:nvPr/>
             </p:nvSpPr>
@@ -39445,7 +39445,7 @@
           </p:sp>
           <p:sp>
             <p:nvSpPr>
-              <p:cNvPr id="41" name="Rectangle 47"/>
+              <p:cNvPr id="96" name="Rectangle 47"/>
               <p:cNvSpPr/>
               <p:nvPr/>
             </p:nvSpPr>
@@ -39508,14 +39508,14 @@
           </p:sp>
           <p:sp>
             <p:nvSpPr>
-              <p:cNvPr id="42" name="TextBox 41"/>
+              <p:cNvPr id="97" name="TextBox 96"/>
               <p:cNvSpPr txBox="1"/>
               <p:nvPr/>
             </p:nvSpPr>
             <p:spPr>
               <a:xfrm>
-                <a:off x="3063974" y="5022248"/>
-                <a:ext cx="1202252" cy="239724"/>
+                <a:off x="3063974" y="4998695"/>
+                <a:ext cx="963405" cy="359587"/>
               </a:xfrm>
               <a:prstGeom prst="rect">
                 <a:avLst/>
@@ -39597,7 +39597,71 @@
                     <a:latin typeface="+mj-ea"/>
                     <a:ea typeface="+mj-ea"/>
                   </a:rPr>
-                  <a:t>UNSEGMENTED ALL NODES; </a:t>
+                  <a:t>UNSEGMENTED </a:t>
+                </a:r>
+                <a:endParaRPr kumimoji="0" lang="en-US" altLang="ko-KR" sz="700" b="0" i="0" u="none" strike="noStrike" kern="0" cap="none" spc="0" normalizeH="0" baseline="0" noProof="0" dirty="0" smtClean="0">
+                  <a:ln>
+                    <a:noFill/>
+                  </a:ln>
+                  <a:solidFill>
+                    <a:srgbClr val="212E35"/>
+                  </a:solidFill>
+                  <a:effectLst/>
+                  <a:uLnTx/>
+                  <a:uFillTx/>
+                  <a:latin typeface="+mj-ea"/>
+                  <a:ea typeface="+mj-ea"/>
+                </a:endParaRPr>
+              </a:p>
+              <a:p>
+                <a:pPr marL="0" marR="0" lvl="0" indent="0" defTabSz="914400" eaLnBrk="1" fontAlgn="auto" latinLnBrk="0" hangingPunct="1">
+                  <a:lnSpc>
+                    <a:spcPct val="90000"/>
+                  </a:lnSpc>
+                  <a:spcBef>
+                    <a:spcPts val="0"/>
+                  </a:spcBef>
+                  <a:spcAft>
+                    <a:spcPts val="0"/>
+                  </a:spcAft>
+                  <a:buClrTx/>
+                  <a:buSzTx/>
+                  <a:buFontTx/>
+                  <a:buNone/>
+                  <a:tabLst/>
+                  <a:defRPr/>
+                </a:pPr>
+                <a:r>
+                  <a:rPr kumimoji="0" lang="en-US" altLang="ko-KR" sz="700" b="0" i="0" u="none" strike="noStrike" kern="0" cap="none" spc="0" normalizeH="0" baseline="0" noProof="0" dirty="0" smtClean="0">
+                    <a:ln>
+                      <a:noFill/>
+                    </a:ln>
+                    <a:solidFill>
+                      <a:srgbClr val="212E35"/>
+                    </a:solidFill>
+                    <a:effectLst/>
+                    <a:uLnTx/>
+                    <a:uFillTx/>
+                    <a:latin typeface="+mj-ea"/>
+                    <a:ea typeface="+mj-ea"/>
+                  </a:rPr>
+                  <a:t>ALL </a:t>
+                </a:r>
+                <a:r>
+                  <a:rPr kumimoji="0" lang="en-US" altLang="ko-KR" sz="700" b="0" i="0" u="none" strike="noStrike" kern="0" cap="none" spc="0" normalizeH="0" baseline="0" noProof="0" dirty="0" smtClean="0">
+                    <a:ln>
+                      <a:noFill/>
+                    </a:ln>
+                    <a:solidFill>
+                      <a:srgbClr val="212E35"/>
+                    </a:solidFill>
+                    <a:effectLst/>
+                    <a:uLnTx/>
+                    <a:uFillTx/>
+                    <a:latin typeface="+mj-ea"/>
+                    <a:ea typeface="+mj-ea"/>
+                  </a:rPr>
+                  <a:t>NODES; </a:t>
                 </a:r>
                 <a:endParaRPr kumimoji="0" lang="ko-KR" altLang="en-US" sz="700" b="0" i="0" u="none" strike="noStrike" kern="0" cap="none" spc="0" normalizeH="0" baseline="0" noProof="0" dirty="0" err="1" smtClean="0">
                   <a:ln>
@@ -39618,23 +39682,21 @@
         </p:grpSp>
         <p:sp>
           <p:nvSpPr>
-            <p:cNvPr id="75" name="직사각형 74"/>
+            <p:cNvPr id="82" name="직사각형 81"/>
             <p:cNvSpPr/>
             <p:nvPr/>
           </p:nvSpPr>
           <p:spPr>
             <a:xfrm>
-              <a:off x="440690" y="7879080"/>
-              <a:ext cx="4008120" cy="899160"/>
+              <a:off x="624840" y="7879080"/>
+              <a:ext cx="3456000" cy="899160"/>
             </a:xfrm>
             <a:prstGeom prst="rect">
               <a:avLst/>
             </a:prstGeom>
             <a:noFill/>
             <a:ln>
-              <a:solidFill>
-                <a:schemeClr val="bg1"/>
-              </a:solidFill>
+              <a:noFill/>
             </a:ln>
           </p:spPr>
           <p:style>
@@ -39665,35 +39727,35 @@
       </p:grpSp>
       <p:grpSp>
         <p:nvGrpSpPr>
-          <p:cNvPr id="4" name="그룹 3"/>
+          <p:cNvPr id="98" name="그룹 97"/>
           <p:cNvGrpSpPr/>
           <p:nvPr/>
         </p:nvGrpSpPr>
         <p:grpSpPr>
           <a:xfrm>
-            <a:off x="5447030" y="5981700"/>
-            <a:ext cx="4008120" cy="899160"/>
-            <a:chOff x="5447030" y="5981700"/>
-            <a:chExt cx="4008120" cy="899160"/>
+            <a:off x="5694680" y="6075132"/>
+            <a:ext cx="3456000" cy="899160"/>
+            <a:chOff x="5713730" y="5981700"/>
+            <a:chExt cx="3456000" cy="899160"/>
           </a:xfrm>
         </p:grpSpPr>
         <p:grpSp>
           <p:nvGrpSpPr>
-            <p:cNvPr id="43" name="그룹 42"/>
+            <p:cNvPr id="99" name="그룹 98"/>
             <p:cNvGrpSpPr/>
             <p:nvPr/>
           </p:nvGrpSpPr>
           <p:grpSpPr>
             <a:xfrm>
-              <a:off x="6143598" y="6065333"/>
-              <a:ext cx="3044807" cy="786135"/>
+              <a:off x="6143598" y="6065332"/>
+              <a:ext cx="2976751" cy="798518"/>
               <a:chOff x="6736976" y="1810107"/>
-              <a:chExt cx="2997514" cy="980453"/>
+              <a:chExt cx="2930515" cy="995898"/>
             </a:xfrm>
           </p:grpSpPr>
           <p:sp>
             <p:nvSpPr>
-              <p:cNvPr id="44" name="Rounded Rectangle 53"/>
+              <p:cNvPr id="101" name="Rounded Rectangle 53"/>
               <p:cNvSpPr/>
               <p:nvPr/>
             </p:nvSpPr>
@@ -39788,7 +39850,7 @@
           </p:sp>
           <p:sp>
             <p:nvSpPr>
-              <p:cNvPr id="45" name="Rounded Rectangle 54"/>
+              <p:cNvPr id="102" name="Rounded Rectangle 54"/>
               <p:cNvSpPr/>
               <p:nvPr/>
             </p:nvSpPr>
@@ -39883,7 +39945,7 @@
           </p:sp>
           <p:sp>
             <p:nvSpPr>
-              <p:cNvPr id="46" name="Rounded Rectangle 55"/>
+              <p:cNvPr id="103" name="Rounded Rectangle 55"/>
               <p:cNvSpPr/>
               <p:nvPr/>
             </p:nvSpPr>
@@ -39978,13 +40040,13 @@
           </p:sp>
           <p:sp>
             <p:nvSpPr>
-              <p:cNvPr id="47" name="TextBox 46"/>
+              <p:cNvPr id="104" name="TextBox 103"/>
               <p:cNvSpPr txBox="1"/>
               <p:nvPr/>
             </p:nvSpPr>
             <p:spPr>
               <a:xfrm>
-                <a:off x="7869931" y="2679760"/>
+                <a:off x="7869931" y="2663921"/>
                 <a:ext cx="229230" cy="110800"/>
               </a:xfrm>
               <a:prstGeom prst="rect">
@@ -40052,7 +40114,7 @@
           </p:sp>
           <p:sp>
             <p:nvSpPr>
-              <p:cNvPr id="48" name="Rectangle 57"/>
+              <p:cNvPr id="105" name="Rectangle 57"/>
               <p:cNvSpPr/>
               <p:nvPr/>
             </p:nvSpPr>
@@ -40115,10 +40177,10 @@
           </p:sp>
           <p:cxnSp>
             <p:nvCxnSpPr>
-              <p:cNvPr id="49" name="Straight Arrow Connector 61"/>
+              <p:cNvPr id="106" name="Straight Arrow Connector 61"/>
               <p:cNvCxnSpPr>
-                <a:stCxn id="48" idx="3"/>
-                <a:endCxn id="51" idx="2"/>
+                <a:stCxn id="105" idx="3"/>
+                <a:endCxn id="108" idx="2"/>
               </p:cNvCxnSpPr>
               <p:nvPr/>
             </p:nvCxnSpPr>
@@ -40144,7 +40206,7 @@
           </p:cxnSp>
           <p:sp>
             <p:nvSpPr>
-              <p:cNvPr id="50" name="TextBox 49"/>
+              <p:cNvPr id="107" name="TextBox 106"/>
               <p:cNvSpPr txBox="1"/>
               <p:nvPr/>
             </p:nvSpPr>
@@ -40218,7 +40280,7 @@
           </p:sp>
           <p:sp>
             <p:nvSpPr>
-              <p:cNvPr id="51" name="Rectangle 64"/>
+              <p:cNvPr id="108" name="Rectangle 64"/>
               <p:cNvSpPr/>
               <p:nvPr/>
             </p:nvSpPr>
@@ -40281,14 +40343,14 @@
           </p:sp>
           <p:sp>
             <p:nvSpPr>
-              <p:cNvPr id="52" name="TextBox 51"/>
+              <p:cNvPr id="109" name="TextBox 108"/>
               <p:cNvSpPr txBox="1"/>
               <p:nvPr/>
             </p:nvSpPr>
             <p:spPr>
               <a:xfrm>
-                <a:off x="8484632" y="2467022"/>
-                <a:ext cx="1249858" cy="241827"/>
+                <a:off x="8522141" y="2443263"/>
+                <a:ext cx="948441" cy="362742"/>
               </a:xfrm>
               <a:prstGeom prst="rect">
                 <a:avLst/>
@@ -40370,7 +40432,55 @@
                     <a:latin typeface="+mj-ea"/>
                     <a:ea typeface="+mj-ea"/>
                   </a:rPr>
-                  <a:t>UNSEGMENTED NODE </a:t>
+                  <a:t>UNSEGMENTED </a:t>
+                </a:r>
+                <a:endParaRPr kumimoji="0" lang="en-US" altLang="ko-KR" sz="700" b="0" i="0" u="none" strike="noStrike" kern="0" cap="none" spc="0" normalizeH="0" baseline="0" noProof="0" dirty="0" smtClean="0">
+                  <a:ln>
+                    <a:noFill/>
+                  </a:ln>
+                  <a:solidFill>
+                    <a:srgbClr val="212E35"/>
+                  </a:solidFill>
+                  <a:effectLst/>
+                  <a:uLnTx/>
+                  <a:uFillTx/>
+                  <a:latin typeface="+mj-ea"/>
+                  <a:ea typeface="+mj-ea"/>
+                </a:endParaRPr>
+              </a:p>
+              <a:p>
+                <a:pPr marL="0" marR="0" lvl="0" indent="0" defTabSz="914400" eaLnBrk="1" fontAlgn="auto" latinLnBrk="0" hangingPunct="1">
+                  <a:lnSpc>
+                    <a:spcPct val="90000"/>
+                  </a:lnSpc>
+                  <a:spcBef>
+                    <a:spcPts val="0"/>
+                  </a:spcBef>
+                  <a:spcAft>
+                    <a:spcPts val="0"/>
+                  </a:spcAft>
+                  <a:buClrTx/>
+                  <a:buSzTx/>
+                  <a:buFontTx/>
+                  <a:buNone/>
+                  <a:tabLst/>
+                  <a:defRPr/>
+                </a:pPr>
+                <a:r>
+                  <a:rPr kumimoji="0" lang="en-US" altLang="ko-KR" sz="700" b="0" i="0" u="none" strike="noStrike" kern="0" cap="none" spc="0" normalizeH="0" baseline="0" noProof="0" dirty="0" smtClean="0">
+                    <a:ln>
+                      <a:noFill/>
+                    </a:ln>
+                    <a:solidFill>
+                      <a:srgbClr val="212E35"/>
+                    </a:solidFill>
+                    <a:effectLst/>
+                    <a:uLnTx/>
+                    <a:uFillTx/>
+                    <a:latin typeface="+mj-ea"/>
+                    <a:ea typeface="+mj-ea"/>
+                  </a:rPr>
+                  <a:t>NODE </a:t>
                 </a:r>
                 <a:r>
                   <a:rPr kumimoji="0" lang="ko-KR" altLang="en-US" sz="700" b="0" i="0" u="none" strike="noStrike" kern="0" cap="none" spc="0" normalizeH="0" baseline="0" noProof="0" dirty="0" smtClean="0">
@@ -40423,23 +40533,21 @@
         </p:grpSp>
         <p:sp>
           <p:nvSpPr>
-            <p:cNvPr id="77" name="직사각형 76"/>
+            <p:cNvPr id="100" name="직사각형 99"/>
             <p:cNvSpPr/>
             <p:nvPr/>
           </p:nvSpPr>
           <p:spPr>
             <a:xfrm>
-              <a:off x="5447030" y="5981700"/>
-              <a:ext cx="4008120" cy="899160"/>
+              <a:off x="5713730" y="5981700"/>
+              <a:ext cx="3456000" cy="899160"/>
             </a:xfrm>
             <a:prstGeom prst="rect">
               <a:avLst/>
             </a:prstGeom>
             <a:noFill/>
             <a:ln>
-              <a:solidFill>
-                <a:schemeClr val="bg1"/>
-              </a:solidFill>
+              <a:noFill/>
             </a:ln>
           </p:spPr>
           <p:style>
@@ -40470,35 +40578,35 @@
       </p:grpSp>
       <p:grpSp>
         <p:nvGrpSpPr>
-          <p:cNvPr id="6" name="그룹 5"/>
+          <p:cNvPr id="110" name="그룹 109"/>
           <p:cNvGrpSpPr/>
           <p:nvPr/>
         </p:nvGrpSpPr>
         <p:grpSpPr>
           <a:xfrm>
-            <a:off x="5515610" y="7924800"/>
-            <a:ext cx="4016998" cy="899160"/>
-            <a:chOff x="5515610" y="7924800"/>
-            <a:chExt cx="4016998" cy="899160"/>
+            <a:off x="5756910" y="7943850"/>
+            <a:ext cx="3456000" cy="899160"/>
+            <a:chOff x="5750560" y="7924800"/>
+            <a:chExt cx="3456000" cy="899160"/>
           </a:xfrm>
         </p:grpSpPr>
         <p:grpSp>
           <p:nvGrpSpPr>
-            <p:cNvPr id="53" name="그룹 52"/>
+            <p:cNvPr id="111" name="그룹 110"/>
             <p:cNvGrpSpPr/>
             <p:nvPr/>
           </p:nvGrpSpPr>
           <p:grpSpPr>
             <a:xfrm>
-              <a:off x="5549709" y="7960804"/>
-              <a:ext cx="3982899" cy="832676"/>
-              <a:chOff x="5999827" y="4313092"/>
-              <a:chExt cx="4116347" cy="1317132"/>
+              <a:off x="5835652" y="7929067"/>
+              <a:ext cx="3282950" cy="851713"/>
+              <a:chOff x="6295350" y="4262891"/>
+              <a:chExt cx="3392945" cy="1347245"/>
             </a:xfrm>
           </p:grpSpPr>
           <p:sp>
             <p:nvSpPr>
-              <p:cNvPr id="54" name="Rounded Rectangle 66"/>
+              <p:cNvPr id="113" name="Rounded Rectangle 66"/>
               <p:cNvSpPr/>
               <p:nvPr/>
             </p:nvSpPr>
@@ -40593,7 +40701,7 @@
           </p:sp>
           <p:sp>
             <p:nvSpPr>
-              <p:cNvPr id="55" name="Rounded Rectangle 67"/>
+              <p:cNvPr id="114" name="Rounded Rectangle 67"/>
               <p:cNvSpPr/>
               <p:nvPr/>
             </p:nvSpPr>
@@ -40688,7 +40796,7 @@
           </p:sp>
           <p:sp>
             <p:nvSpPr>
-              <p:cNvPr id="56" name="Rounded Rectangle 68"/>
+              <p:cNvPr id="115" name="Rounded Rectangle 68"/>
               <p:cNvSpPr/>
               <p:nvPr/>
             </p:nvSpPr>
@@ -40783,14 +40891,14 @@
           </p:sp>
           <p:sp>
             <p:nvSpPr>
-              <p:cNvPr id="57" name="TextBox 56"/>
+              <p:cNvPr id="116" name="TextBox 115"/>
               <p:cNvSpPr txBox="1"/>
               <p:nvPr/>
             </p:nvSpPr>
             <p:spPr>
               <a:xfrm>
-                <a:off x="7881824" y="5519424"/>
-                <a:ext cx="229230" cy="110800"/>
+                <a:off x="7881825" y="5499335"/>
+                <a:ext cx="229230" cy="110801"/>
               </a:xfrm>
               <a:prstGeom prst="rect">
                 <a:avLst/>
@@ -40857,7 +40965,7 @@
           </p:sp>
           <p:sp>
             <p:nvSpPr>
-              <p:cNvPr id="58" name="Rectangle 70"/>
+              <p:cNvPr id="117" name="Rectangle 70"/>
               <p:cNvSpPr/>
               <p:nvPr/>
             </p:nvSpPr>
@@ -40920,7 +41028,7 @@
           </p:sp>
           <p:sp>
             <p:nvSpPr>
-              <p:cNvPr id="59" name="Rectangle 71"/>
+              <p:cNvPr id="118" name="Rectangle 71"/>
               <p:cNvSpPr/>
               <p:nvPr/>
             </p:nvSpPr>
@@ -40990,7 +41098,7 @@
           </p:sp>
           <p:sp>
             <p:nvSpPr>
-              <p:cNvPr id="60" name="Rectangle 72"/>
+              <p:cNvPr id="119" name="Rectangle 72"/>
               <p:cNvSpPr/>
               <p:nvPr/>
             </p:nvSpPr>
@@ -41060,7 +41168,7 @@
           </p:sp>
           <p:sp>
             <p:nvSpPr>
-              <p:cNvPr id="61" name="Rectangle 73"/>
+              <p:cNvPr id="120" name="Rectangle 73"/>
               <p:cNvSpPr/>
               <p:nvPr/>
             </p:nvSpPr>
@@ -41123,7 +41231,7 @@
           </p:sp>
           <p:sp>
             <p:nvSpPr>
-              <p:cNvPr id="62" name="Rectangle 74"/>
+              <p:cNvPr id="121" name="Rectangle 74"/>
               <p:cNvSpPr/>
               <p:nvPr/>
             </p:nvSpPr>
@@ -41193,7 +41301,7 @@
           </p:sp>
           <p:sp>
             <p:nvSpPr>
-              <p:cNvPr id="63" name="Rectangle 75"/>
+              <p:cNvPr id="122" name="Rectangle 75"/>
               <p:cNvSpPr/>
               <p:nvPr/>
             </p:nvSpPr>
@@ -41263,10 +41371,10 @@
           </p:sp>
           <p:cxnSp>
             <p:nvCxnSpPr>
-              <p:cNvPr id="64" name="Straight Arrow Connector 76"/>
+              <p:cNvPr id="123" name="Straight Arrow Connector 76"/>
               <p:cNvCxnSpPr>
-                <a:stCxn id="59" idx="1"/>
-                <a:endCxn id="62" idx="2"/>
+                <a:stCxn id="118" idx="1"/>
+                <a:endCxn id="121" idx="2"/>
               </p:cNvCxnSpPr>
               <p:nvPr/>
             </p:nvCxnSpPr>
@@ -41292,9 +41400,9 @@
           </p:cxnSp>
           <p:cxnSp>
             <p:nvCxnSpPr>
-              <p:cNvPr id="65" name="Straight Arrow Connector 77"/>
+              <p:cNvPr id="124" name="Straight Arrow Connector 77"/>
               <p:cNvCxnSpPr>
-                <a:stCxn id="58" idx="0"/>
+                <a:stCxn id="117" idx="0"/>
               </p:cNvCxnSpPr>
               <p:nvPr/>
             </p:nvCxnSpPr>
@@ -41320,10 +41428,10 @@
           </p:cxnSp>
           <p:cxnSp>
             <p:nvCxnSpPr>
-              <p:cNvPr id="66" name="Straight Arrow Connector 78"/>
+              <p:cNvPr id="125" name="Straight Arrow Connector 78"/>
               <p:cNvCxnSpPr>
-                <a:stCxn id="60" idx="3"/>
-                <a:endCxn id="63" idx="2"/>
+                <a:stCxn id="119" idx="3"/>
+                <a:endCxn id="122" idx="2"/>
               </p:cNvCxnSpPr>
               <p:nvPr/>
             </p:nvCxnSpPr>
@@ -41349,14 +41457,14 @@
           </p:cxnSp>
           <p:sp>
             <p:nvSpPr>
-              <p:cNvPr id="67" name="TextBox 66"/>
+              <p:cNvPr id="126" name="TextBox 125"/>
               <p:cNvSpPr txBox="1"/>
               <p:nvPr/>
             </p:nvSpPr>
             <p:spPr>
               <a:xfrm>
-                <a:off x="8592816" y="5140445"/>
-                <a:ext cx="1523358" cy="460067"/>
+                <a:off x="8533754" y="5140445"/>
+                <a:ext cx="1154541" cy="460067"/>
               </a:xfrm>
               <a:prstGeom prst="rect">
                 <a:avLst/>
@@ -41438,7 +41546,119 @@
                     <a:latin typeface="+mj-ea"/>
                     <a:ea typeface="+mj-ea"/>
                   </a:rPr>
-                  <a:t>SEGMENTED BY HASH (C1,C2) ALL NODES KSAFE 1;</a:t>
+                  <a:t>SEGMENTED BY </a:t>
+                </a:r>
+                <a:endParaRPr kumimoji="0" lang="en-US" altLang="ko-KR" sz="700" b="0" i="0" u="none" strike="noStrike" kern="0" cap="none" spc="0" normalizeH="0" baseline="0" noProof="0" dirty="0" smtClean="0">
+                  <a:ln>
+                    <a:noFill/>
+                  </a:ln>
+                  <a:solidFill>
+                    <a:srgbClr val="212E35"/>
+                  </a:solidFill>
+                  <a:effectLst/>
+                  <a:uLnTx/>
+                  <a:uFillTx/>
+                  <a:latin typeface="+mj-ea"/>
+                  <a:ea typeface="+mj-ea"/>
+                </a:endParaRPr>
+              </a:p>
+              <a:p>
+                <a:pPr marL="0" marR="0" lvl="0" indent="0" defTabSz="914400" eaLnBrk="1" fontAlgn="auto" latinLnBrk="0" hangingPunct="1">
+                  <a:lnSpc>
+                    <a:spcPct val="90000"/>
+                  </a:lnSpc>
+                  <a:spcBef>
+                    <a:spcPts val="0"/>
+                  </a:spcBef>
+                  <a:spcAft>
+                    <a:spcPts val="0"/>
+                  </a:spcAft>
+                  <a:buClrTx/>
+                  <a:buSzTx/>
+                  <a:buFontTx/>
+                  <a:buNone/>
+                  <a:tabLst/>
+                  <a:defRPr/>
+                </a:pPr>
+                <a:r>
+                  <a:rPr kumimoji="0" lang="en-US" altLang="ko-KR" sz="700" b="0" i="0" u="none" strike="noStrike" kern="0" cap="none" spc="0" normalizeH="0" baseline="0" noProof="0" dirty="0" smtClean="0">
+                    <a:ln>
+                      <a:noFill/>
+                    </a:ln>
+                    <a:solidFill>
+                      <a:srgbClr val="212E35"/>
+                    </a:solidFill>
+                    <a:effectLst/>
+                    <a:uLnTx/>
+                    <a:uFillTx/>
+                    <a:latin typeface="+mj-ea"/>
+                    <a:ea typeface="+mj-ea"/>
+                  </a:rPr>
+                  <a:t>HASH </a:t>
+                </a:r>
+                <a:r>
+                  <a:rPr kumimoji="0" lang="en-US" altLang="ko-KR" sz="700" b="0" i="0" u="none" strike="noStrike" kern="0" cap="none" spc="0" normalizeH="0" baseline="0" noProof="0" dirty="0" smtClean="0">
+                    <a:ln>
+                      <a:noFill/>
+                    </a:ln>
+                    <a:solidFill>
+                      <a:srgbClr val="212E35"/>
+                    </a:solidFill>
+                    <a:effectLst/>
+                    <a:uLnTx/>
+                    <a:uFillTx/>
+                    <a:latin typeface="+mj-ea"/>
+                    <a:ea typeface="+mj-ea"/>
+                  </a:rPr>
+                  <a:t>(C1,C2) </a:t>
+                </a:r>
+                <a:r>
+                  <a:rPr kumimoji="0" lang="en-US" altLang="ko-KR" sz="700" b="0" i="0" u="none" strike="noStrike" kern="0" cap="none" spc="0" normalizeH="0" baseline="0" noProof="0" dirty="0" smtClean="0">
+                    <a:ln>
+                      <a:noFill/>
+                    </a:ln>
+                    <a:solidFill>
+                      <a:srgbClr val="212E35"/>
+                    </a:solidFill>
+                    <a:effectLst/>
+                    <a:uLnTx/>
+                    <a:uFillTx/>
+                    <a:latin typeface="+mj-ea"/>
+                    <a:ea typeface="+mj-ea"/>
+                  </a:rPr>
+                  <a:t>ALL </a:t>
+                </a:r>
+                <a:r>
+                  <a:rPr kumimoji="0" lang="en-US" altLang="ko-KR" sz="700" b="0" i="0" u="none" strike="noStrike" kern="0" cap="none" spc="0" normalizeH="0" baseline="0" noProof="0" dirty="0" smtClean="0">
+                    <a:ln>
+                      <a:noFill/>
+                    </a:ln>
+                    <a:solidFill>
+                      <a:srgbClr val="212E35"/>
+                    </a:solidFill>
+                    <a:effectLst/>
+                    <a:uLnTx/>
+                    <a:uFillTx/>
+                    <a:latin typeface="+mj-ea"/>
+                    <a:ea typeface="+mj-ea"/>
+                  </a:rPr>
+                  <a:t>NODES </a:t>
+                </a:r>
+                <a:r>
+                  <a:rPr kumimoji="0" lang="en-US" altLang="ko-KR" sz="700" b="0" i="0" u="none" strike="noStrike" kern="0" cap="none" spc="0" normalizeH="0" baseline="0" noProof="0" dirty="0" smtClean="0">
+                    <a:ln>
+                      <a:noFill/>
+                    </a:ln>
+                    <a:solidFill>
+                      <a:srgbClr val="212E35"/>
+                    </a:solidFill>
+                    <a:effectLst/>
+                    <a:uLnTx/>
+                    <a:uFillTx/>
+                    <a:latin typeface="+mj-ea"/>
+                    <a:ea typeface="+mj-ea"/>
+                  </a:rPr>
+                  <a:t>;</a:t>
                 </a:r>
                 <a:endParaRPr kumimoji="0" lang="ko-KR" altLang="en-US" sz="700" b="0" i="0" u="none" strike="noStrike" kern="0" cap="none" spc="0" normalizeH="0" baseline="0" noProof="0" dirty="0" err="1" smtClean="0">
                   <a:ln>
@@ -41458,13 +41678,13 @@
           </p:sp>
           <p:sp>
             <p:nvSpPr>
-              <p:cNvPr id="68" name="TextBox 67"/>
+              <p:cNvPr id="127" name="TextBox 126"/>
               <p:cNvSpPr txBox="1"/>
               <p:nvPr/>
             </p:nvSpPr>
             <p:spPr>
               <a:xfrm>
-                <a:off x="6277706" y="4705027"/>
+                <a:off x="6303957" y="4745206"/>
                 <a:ext cx="425775" cy="153356"/>
               </a:xfrm>
               <a:prstGeom prst="rect">
@@ -41532,7 +41752,7 @@
           </p:sp>
           <p:sp>
             <p:nvSpPr>
-              <p:cNvPr id="69" name="Rectangle 82"/>
+              <p:cNvPr id="128" name="Rectangle 82"/>
               <p:cNvSpPr/>
               <p:nvPr/>
             </p:nvSpPr>
@@ -41602,7 +41822,7 @@
           </p:sp>
           <p:sp>
             <p:nvSpPr>
-              <p:cNvPr id="70" name="Rectangle 83"/>
+              <p:cNvPr id="129" name="Rectangle 83"/>
               <p:cNvSpPr/>
               <p:nvPr/>
             </p:nvSpPr>
@@ -41665,7 +41885,7 @@
           </p:sp>
           <p:sp>
             <p:nvSpPr>
-              <p:cNvPr id="71" name="Rectangle 85"/>
+              <p:cNvPr id="130" name="Rectangle 85"/>
               <p:cNvSpPr/>
               <p:nvPr/>
             </p:nvSpPr>
@@ -41735,14 +41955,14 @@
           </p:sp>
           <p:sp>
             <p:nvSpPr>
-              <p:cNvPr id="72" name="TextBox 71"/>
+              <p:cNvPr id="131" name="TextBox 130"/>
               <p:cNvSpPr txBox="1"/>
               <p:nvPr/>
             </p:nvSpPr>
             <p:spPr>
               <a:xfrm>
-                <a:off x="5999827" y="4353290"/>
-                <a:ext cx="735213" cy="153356"/>
+                <a:off x="6295350" y="4262891"/>
+                <a:ext cx="498768" cy="306711"/>
               </a:xfrm>
               <a:prstGeom prst="rect">
                 <a:avLst/>
@@ -41789,7 +42009,42 @@
                     <a:latin typeface="+mj-ea"/>
                     <a:ea typeface="+mj-ea"/>
                   </a:rPr>
-                  <a:t>Buddy projection</a:t>
+                  <a:t>Buddy</a:t>
+                </a:r>
+              </a:p>
+              <a:p>
+                <a:pPr marL="0" marR="0" lvl="0" indent="0" defTabSz="914400" eaLnBrk="1" fontAlgn="auto" latinLnBrk="0" hangingPunct="1">
+                  <a:lnSpc>
+                    <a:spcPct val="90000"/>
+                  </a:lnSpc>
+                  <a:spcBef>
+                    <a:spcPts val="0"/>
+                  </a:spcBef>
+                  <a:spcAft>
+                    <a:spcPts val="0"/>
+                  </a:spcAft>
+                  <a:buClrTx/>
+                  <a:buSzTx/>
+                  <a:buFontTx/>
+                  <a:buNone/>
+                  <a:tabLst/>
+                  <a:defRPr/>
+                </a:pPr>
+                <a:r>
+                  <a:rPr kumimoji="0" lang="en-US" altLang="ko-KR" sz="700" b="0" i="0" u="none" strike="noStrike" kern="0" cap="none" spc="0" normalizeH="0" baseline="0" noProof="0" dirty="0" smtClean="0">
+                    <a:ln>
+                      <a:noFill/>
+                    </a:ln>
+                    <a:solidFill>
+                      <a:srgbClr val="212E35"/>
+                    </a:solidFill>
+                    <a:effectLst/>
+                    <a:uLnTx/>
+                    <a:uFillTx/>
+                    <a:latin typeface="+mj-ea"/>
+                    <a:ea typeface="+mj-ea"/>
+                  </a:rPr>
+                  <a:t>projection</a:t>
                 </a:r>
                 <a:endParaRPr kumimoji="0" lang="ko-KR" altLang="en-US" sz="700" b="0" i="0" u="none" strike="noStrike" kern="0" cap="none" spc="0" normalizeH="0" baseline="0" noProof="0" dirty="0" err="1" smtClean="0">
                   <a:ln>
@@ -41810,23 +42065,21 @@
         </p:grpSp>
         <p:sp>
           <p:nvSpPr>
-            <p:cNvPr id="78" name="직사각형 77"/>
+            <p:cNvPr id="112" name="직사각형 111"/>
             <p:cNvSpPr/>
             <p:nvPr/>
           </p:nvSpPr>
           <p:spPr>
             <a:xfrm>
-              <a:off x="5515610" y="7924800"/>
-              <a:ext cx="4008120" cy="899160"/>
+              <a:off x="5750560" y="7924800"/>
+              <a:ext cx="3456000" cy="899160"/>
             </a:xfrm>
             <a:prstGeom prst="rect">
               <a:avLst/>
             </a:prstGeom>
             <a:noFill/>
             <a:ln>
-              <a:solidFill>
-                <a:schemeClr val="bg1"/>
-              </a:solidFill>
+              <a:noFill/>
             </a:ln>
           </p:spPr>
           <p:style>
@@ -41857,35 +42110,35 @@
       </p:grpSp>
       <p:grpSp>
         <p:nvGrpSpPr>
-          <p:cNvPr id="3" name="그룹 2"/>
+          <p:cNvPr id="132" name="그룹 131"/>
           <p:cNvGrpSpPr/>
           <p:nvPr/>
         </p:nvGrpSpPr>
         <p:grpSpPr>
           <a:xfrm>
-            <a:off x="463550" y="6217920"/>
-            <a:ext cx="4008120" cy="899160"/>
-            <a:chOff x="463550" y="6217920"/>
-            <a:chExt cx="4008120" cy="899160"/>
+            <a:off x="628650" y="6236970"/>
+            <a:ext cx="3456000" cy="899160"/>
+            <a:chOff x="622300" y="6217920"/>
+            <a:chExt cx="3456000" cy="899160"/>
           </a:xfrm>
         </p:grpSpPr>
         <p:grpSp>
           <p:nvGrpSpPr>
-            <p:cNvPr id="13" name="그룹 12"/>
+            <p:cNvPr id="133" name="그룹 132"/>
             <p:cNvGrpSpPr/>
             <p:nvPr/>
           </p:nvGrpSpPr>
           <p:grpSpPr>
             <a:xfrm>
               <a:off x="640073" y="6262318"/>
-              <a:ext cx="3695707" cy="816662"/>
+              <a:ext cx="3411227" cy="823349"/>
               <a:chOff x="843046" y="1895424"/>
-              <a:chExt cx="3695707" cy="1268861"/>
+              <a:chExt cx="3411227" cy="1279251"/>
             </a:xfrm>
           </p:grpSpPr>
           <p:sp>
             <p:nvSpPr>
-              <p:cNvPr id="14" name="Rounded Rectangle 6"/>
+              <p:cNvPr id="135" name="Rounded Rectangle 6"/>
               <p:cNvSpPr/>
               <p:nvPr/>
             </p:nvSpPr>
@@ -41980,7 +42233,7 @@
           </p:sp>
           <p:sp>
             <p:nvSpPr>
-              <p:cNvPr id="15" name="Rounded Rectangle 7"/>
+              <p:cNvPr id="136" name="Rounded Rectangle 7"/>
               <p:cNvSpPr/>
               <p:nvPr/>
             </p:nvSpPr>
@@ -42075,7 +42328,7 @@
           </p:sp>
           <p:sp>
             <p:nvSpPr>
-              <p:cNvPr id="16" name="Rounded Rectangle 8"/>
+              <p:cNvPr id="137" name="Rounded Rectangle 8"/>
               <p:cNvSpPr/>
               <p:nvPr/>
             </p:nvSpPr>
@@ -42170,13 +42423,13 @@
           </p:sp>
           <p:sp>
             <p:nvSpPr>
-              <p:cNvPr id="17" name="TextBox 16"/>
+              <p:cNvPr id="138" name="TextBox 137"/>
               <p:cNvSpPr txBox="1"/>
               <p:nvPr/>
             </p:nvSpPr>
             <p:spPr>
               <a:xfrm>
-                <a:off x="2432347" y="3053485"/>
+                <a:off x="2432347" y="3014021"/>
                 <a:ext cx="229230" cy="110800"/>
               </a:xfrm>
               <a:prstGeom prst="rect">
@@ -42244,7 +42497,7 @@
           </p:sp>
           <p:sp>
             <p:nvSpPr>
-              <p:cNvPr id="18" name="Rectangle 10"/>
+              <p:cNvPr id="139" name="Rectangle 10"/>
               <p:cNvSpPr/>
               <p:nvPr/>
             </p:nvSpPr>
@@ -42307,7 +42560,7 @@
           </p:sp>
           <p:sp>
             <p:nvSpPr>
-              <p:cNvPr id="19" name="Rectangle 11"/>
+              <p:cNvPr id="140" name="Rectangle 11"/>
               <p:cNvSpPr/>
               <p:nvPr/>
             </p:nvSpPr>
@@ -42377,7 +42630,7 @@
           </p:sp>
           <p:sp>
             <p:nvSpPr>
-              <p:cNvPr id="20" name="Rectangle 12"/>
+              <p:cNvPr id="141" name="Rectangle 12"/>
               <p:cNvSpPr/>
               <p:nvPr/>
             </p:nvSpPr>
@@ -42447,7 +42700,7 @@
           </p:sp>
           <p:sp>
             <p:nvSpPr>
-              <p:cNvPr id="21" name="Rectangle 13"/>
+              <p:cNvPr id="142" name="Rectangle 13"/>
               <p:cNvSpPr/>
               <p:nvPr/>
             </p:nvSpPr>
@@ -42510,7 +42763,7 @@
           </p:sp>
           <p:sp>
             <p:nvSpPr>
-              <p:cNvPr id="22" name="Rectangle 14"/>
+              <p:cNvPr id="143" name="Rectangle 14"/>
               <p:cNvSpPr/>
               <p:nvPr/>
             </p:nvSpPr>
@@ -42580,7 +42833,7 @@
           </p:sp>
           <p:sp>
             <p:nvSpPr>
-              <p:cNvPr id="23" name="Rectangle 15"/>
+              <p:cNvPr id="144" name="Rectangle 15"/>
               <p:cNvSpPr/>
               <p:nvPr/>
             </p:nvSpPr>
@@ -42650,10 +42903,10 @@
           </p:sp>
           <p:cxnSp>
             <p:nvCxnSpPr>
-              <p:cNvPr id="24" name="Straight Arrow Connector 16"/>
+              <p:cNvPr id="145" name="Straight Arrow Connector 16"/>
               <p:cNvCxnSpPr>
-                <a:stCxn id="19" idx="1"/>
-                <a:endCxn id="22" idx="2"/>
+                <a:stCxn id="140" idx="1"/>
+                <a:endCxn id="143" idx="2"/>
               </p:cNvCxnSpPr>
               <p:nvPr/>
             </p:nvCxnSpPr>
@@ -42679,9 +42932,9 @@
           </p:cxnSp>
           <p:cxnSp>
             <p:nvCxnSpPr>
-              <p:cNvPr id="25" name="Straight Arrow Connector 17"/>
+              <p:cNvPr id="146" name="Straight Arrow Connector 17"/>
               <p:cNvCxnSpPr>
-                <a:stCxn id="18" idx="0"/>
+                <a:stCxn id="139" idx="0"/>
               </p:cNvCxnSpPr>
               <p:nvPr/>
             </p:nvCxnSpPr>
@@ -42707,10 +42960,10 @@
           </p:cxnSp>
           <p:cxnSp>
             <p:nvCxnSpPr>
-              <p:cNvPr id="26" name="Straight Arrow Connector 18"/>
+              <p:cNvPr id="147" name="Straight Arrow Connector 18"/>
               <p:cNvCxnSpPr>
-                <a:stCxn id="20" idx="3"/>
-                <a:endCxn id="23" idx="2"/>
+                <a:stCxn id="141" idx="3"/>
+                <a:endCxn id="144" idx="2"/>
               </p:cNvCxnSpPr>
               <p:nvPr/>
             </p:nvCxnSpPr>
@@ -42736,14 +42989,14 @@
           </p:cxnSp>
           <p:sp>
             <p:nvSpPr>
-              <p:cNvPr id="27" name="TextBox 26"/>
+              <p:cNvPr id="148" name="TextBox 147"/>
               <p:cNvSpPr txBox="1"/>
               <p:nvPr/>
             </p:nvSpPr>
             <p:spPr>
               <a:xfrm>
-                <a:off x="3140174" y="2673448"/>
-                <a:ext cx="1398579" cy="451897"/>
+                <a:off x="3032224" y="2722778"/>
+                <a:ext cx="1222049" cy="451897"/>
               </a:xfrm>
               <a:prstGeom prst="rect">
                 <a:avLst/>
@@ -42880,7 +43133,7 @@
           </p:sp>
           <p:sp>
             <p:nvSpPr>
-              <p:cNvPr id="28" name="TextBox 27"/>
+              <p:cNvPr id="149" name="TextBox 148"/>
               <p:cNvSpPr txBox="1"/>
               <p:nvPr/>
             </p:nvSpPr>
@@ -42955,23 +43208,21 @@
         </p:grpSp>
         <p:sp>
           <p:nvSpPr>
-            <p:cNvPr id="79" name="직사각형 78"/>
+            <p:cNvPr id="134" name="직사각형 133"/>
             <p:cNvSpPr/>
             <p:nvPr/>
           </p:nvSpPr>
           <p:spPr>
             <a:xfrm>
-              <a:off x="463550" y="6217920"/>
-              <a:ext cx="4008120" cy="899160"/>
+              <a:off x="622300" y="6217920"/>
+              <a:ext cx="3456000" cy="899160"/>
             </a:xfrm>
             <a:prstGeom prst="rect">
               <a:avLst/>
             </a:prstGeom>
             <a:noFill/>
             <a:ln>
-              <a:solidFill>
-                <a:schemeClr val="bg1"/>
-              </a:solidFill>
+              <a:noFill/>
             </a:ln>
           </p:spPr>
           <p:style>

--- a/99ref/버티카_blog.pptx
+++ b/99ref/버티카_blog.pptx
@@ -5,7 +5,7 @@
     <p:sldMasterId id="2147483672" r:id="rId1"/>
   </p:sldMasterIdLst>
   <p:notesMasterIdLst>
-    <p:notesMasterId r:id="rId26"/>
+    <p:notesMasterId r:id="rId27"/>
   </p:notesMasterIdLst>
   <p:sldIdLst>
     <p:sldId id="268" r:id="rId2"/>
@@ -16,22 +16,23 @@
     <p:sldId id="260" r:id="rId7"/>
     <p:sldId id="269" r:id="rId8"/>
     <p:sldId id="266" r:id="rId9"/>
-    <p:sldId id="282" r:id="rId10"/>
+    <p:sldId id="283" r:id="rId10"/>
     <p:sldId id="263" r:id="rId11"/>
     <p:sldId id="264" r:id="rId12"/>
     <p:sldId id="265" r:id="rId13"/>
     <p:sldId id="270" r:id="rId14"/>
     <p:sldId id="271" r:id="rId15"/>
-    <p:sldId id="274" r:id="rId16"/>
-    <p:sldId id="272" r:id="rId17"/>
-    <p:sldId id="273" r:id="rId18"/>
-    <p:sldId id="275" r:id="rId19"/>
-    <p:sldId id="276" r:id="rId20"/>
-    <p:sldId id="277" r:id="rId21"/>
-    <p:sldId id="278" r:id="rId22"/>
-    <p:sldId id="279" r:id="rId23"/>
-    <p:sldId id="280" r:id="rId24"/>
-    <p:sldId id="281" r:id="rId25"/>
+    <p:sldId id="282" r:id="rId16"/>
+    <p:sldId id="274" r:id="rId17"/>
+    <p:sldId id="272" r:id="rId18"/>
+    <p:sldId id="273" r:id="rId19"/>
+    <p:sldId id="275" r:id="rId20"/>
+    <p:sldId id="276" r:id="rId21"/>
+    <p:sldId id="277" r:id="rId22"/>
+    <p:sldId id="278" r:id="rId23"/>
+    <p:sldId id="279" r:id="rId24"/>
+    <p:sldId id="280" r:id="rId25"/>
+    <p:sldId id="281" r:id="rId26"/>
   </p:sldIdLst>
   <p:sldSz cx="9720263" cy="8999538"/>
   <p:notesSz cx="6858000" cy="9144000"/>
@@ -4489,6 +4490,547 @@
       </p:grpSpPr>
       <p:sp>
         <p:nvSpPr>
+          <p:cNvPr id="88" name="직사각형 87"/>
+          <p:cNvSpPr/>
+          <p:nvPr/>
+        </p:nvSpPr>
+        <p:spPr>
+          <a:xfrm>
+            <a:off x="152400" y="125187"/>
+            <a:ext cx="2667000" cy="312964"/>
+          </a:xfrm>
+          <a:prstGeom prst="rect">
+            <a:avLst/>
+          </a:prstGeom>
+          <a:noFill/>
+          <a:ln>
+            <a:noFill/>
+          </a:ln>
+        </p:spPr>
+        <p:style>
+          <a:lnRef idx="2">
+            <a:schemeClr val="accent1">
+              <a:shade val="50000"/>
+            </a:schemeClr>
+          </a:lnRef>
+          <a:fillRef idx="1">
+            <a:schemeClr val="accent1"/>
+          </a:fillRef>
+          <a:effectRef idx="0">
+            <a:schemeClr val="accent1"/>
+          </a:effectRef>
+          <a:fontRef idx="minor">
+            <a:schemeClr val="lt1"/>
+          </a:fontRef>
+        </p:style>
+        <p:txBody>
+          <a:bodyPr rtlCol="0" anchor="ctr"/>
+          <a:lstStyle/>
+          <a:p>
+            <a:r>
+              <a:rPr lang="en-US" altLang="ko-KR" sz="1600" b="1" dirty="0">
+                <a:solidFill>
+                  <a:schemeClr val="accent1">
+                    <a:lumMod val="75000"/>
+                  </a:schemeClr>
+                </a:solidFill>
+                <a:latin typeface="+mn-ea"/>
+              </a:rPr>
+              <a:t>Cluster Operation</a:t>
+            </a:r>
+            <a:endParaRPr lang="ko-KR" altLang="en-US" sz="1600" b="1" dirty="0">
+              <a:solidFill>
+                <a:schemeClr val="accent1">
+                  <a:lumMod val="75000"/>
+                </a:schemeClr>
+              </a:solidFill>
+              <a:latin typeface="+mn-ea"/>
+            </a:endParaRPr>
+          </a:p>
+        </p:txBody>
+      </p:sp>
+      <p:cxnSp>
+        <p:nvCxnSpPr>
+          <p:cNvPr id="90" name="직선 연결선 89"/>
+          <p:cNvCxnSpPr/>
+          <p:nvPr/>
+        </p:nvCxnSpPr>
+        <p:spPr>
+          <a:xfrm flipV="1">
+            <a:off x="215900" y="469900"/>
+            <a:ext cx="9156700" cy="0"/>
+          </a:xfrm>
+          <a:prstGeom prst="line">
+            <a:avLst/>
+          </a:prstGeom>
+          <a:ln w="19050">
+            <a:solidFill>
+              <a:schemeClr val="accent1"/>
+            </a:solidFill>
+          </a:ln>
+        </p:spPr>
+        <p:style>
+          <a:lnRef idx="1">
+            <a:schemeClr val="accent1"/>
+          </a:lnRef>
+          <a:fillRef idx="0">
+            <a:schemeClr val="accent1"/>
+          </a:fillRef>
+          <a:effectRef idx="0">
+            <a:schemeClr val="accent1"/>
+          </a:effectRef>
+          <a:fontRef idx="minor">
+            <a:schemeClr val="tx1"/>
+          </a:fontRef>
+        </p:style>
+      </p:cxnSp>
+      <p:pic>
+        <p:nvPicPr>
+          <p:cNvPr id="1027" name="Picture 3"/>
+          <p:cNvPicPr>
+            <a:picLocks noChangeAspect="1" noChangeArrowheads="1"/>
+          </p:cNvPicPr>
+          <p:nvPr/>
+        </p:nvPicPr>
+        <p:blipFill rotWithShape="1">
+          <a:blip r:embed="rId2">
+            <a:extLst>
+              <a:ext uri="{28A0092B-C50C-407E-A947-70E740481C1C}">
+                <a14:useLocalDpi xmlns:a14="http://schemas.microsoft.com/office/drawing/2010/main" val="0"/>
+              </a:ext>
+            </a:extLst>
+          </a:blip>
+          <a:srcRect r="48536" b="75167"/>
+          <a:stretch/>
+        </p:blipFill>
+        <p:spPr bwMode="auto">
+          <a:xfrm>
+            <a:off x="618218" y="986066"/>
+            <a:ext cx="4623254" cy="1517649"/>
+          </a:xfrm>
+          <a:prstGeom prst="rect">
+            <a:avLst/>
+          </a:prstGeom>
+          <a:noFill/>
+          <a:ln w="9525">
+            <a:noFill/>
+            <a:miter lim="800000"/>
+            <a:headEnd/>
+            <a:tailEnd/>
+          </a:ln>
+          <a:extLst>
+            <a:ext uri="{909E8E84-426E-40DD-AFC4-6F175D3DCCD1}">
+              <a14:hiddenFill xmlns:a14="http://schemas.microsoft.com/office/drawing/2010/main">
+                <a:solidFill>
+                  <a:srgbClr val="FFFFFF"/>
+                </a:solidFill>
+              </a14:hiddenFill>
+            </a:ext>
+          </a:extLst>
+        </p:spPr>
+      </p:pic>
+      <p:pic>
+        <p:nvPicPr>
+          <p:cNvPr id="7" name="Picture 3"/>
+          <p:cNvPicPr>
+            <a:picLocks noChangeAspect="1" noChangeArrowheads="1"/>
+          </p:cNvPicPr>
+          <p:nvPr/>
+        </p:nvPicPr>
+        <p:blipFill rotWithShape="1">
+          <a:blip r:embed="rId2">
+            <a:extLst>
+              <a:ext uri="{28A0092B-C50C-407E-A947-70E740481C1C}">
+                <a14:useLocalDpi xmlns:a14="http://schemas.microsoft.com/office/drawing/2010/main" val="0"/>
+              </a:ext>
+            </a:extLst>
+          </a:blip>
+          <a:srcRect t="24655" r="50111" b="51477"/>
+          <a:stretch/>
+        </p:blipFill>
+        <p:spPr bwMode="auto">
+          <a:xfrm>
+            <a:off x="688976" y="2645229"/>
+            <a:ext cx="4481739" cy="1458686"/>
+          </a:xfrm>
+          <a:prstGeom prst="rect">
+            <a:avLst/>
+          </a:prstGeom>
+          <a:noFill/>
+          <a:ln w="9525">
+            <a:noFill/>
+            <a:miter lim="800000"/>
+            <a:headEnd/>
+            <a:tailEnd/>
+          </a:ln>
+          <a:extLst>
+            <a:ext uri="{909E8E84-426E-40DD-AFC4-6F175D3DCCD1}">
+              <a14:hiddenFill xmlns:a14="http://schemas.microsoft.com/office/drawing/2010/main">
+                <a:solidFill>
+                  <a:srgbClr val="FFFFFF"/>
+                </a:solidFill>
+              </a14:hiddenFill>
+            </a:ext>
+          </a:extLst>
+        </p:spPr>
+      </p:pic>
+      <p:pic>
+        <p:nvPicPr>
+          <p:cNvPr id="8" name="Picture 3"/>
+          <p:cNvPicPr>
+            <a:picLocks noChangeAspect="1" noChangeArrowheads="1"/>
+          </p:cNvPicPr>
+          <p:nvPr/>
+        </p:nvPicPr>
+        <p:blipFill rotWithShape="1">
+          <a:blip r:embed="rId2">
+            <a:extLst>
+              <a:ext uri="{28A0092B-C50C-407E-A947-70E740481C1C}">
+                <a14:useLocalDpi xmlns:a14="http://schemas.microsoft.com/office/drawing/2010/main" val="0"/>
+              </a:ext>
+            </a:extLst>
+          </a:blip>
+          <a:srcRect t="48523" r="48415" b="26184"/>
+          <a:stretch/>
+        </p:blipFill>
+        <p:spPr bwMode="auto">
+          <a:xfrm>
+            <a:off x="612776" y="4278086"/>
+            <a:ext cx="4634139" cy="1545772"/>
+          </a:xfrm>
+          <a:prstGeom prst="rect">
+            <a:avLst/>
+          </a:prstGeom>
+          <a:noFill/>
+          <a:ln w="9525">
+            <a:noFill/>
+            <a:miter lim="800000"/>
+            <a:headEnd/>
+            <a:tailEnd/>
+          </a:ln>
+          <a:extLst>
+            <a:ext uri="{909E8E84-426E-40DD-AFC4-6F175D3DCCD1}">
+              <a14:hiddenFill xmlns:a14="http://schemas.microsoft.com/office/drawing/2010/main">
+                <a:solidFill>
+                  <a:srgbClr val="FFFFFF"/>
+                </a:solidFill>
+              </a14:hiddenFill>
+            </a:ext>
+          </a:extLst>
+        </p:spPr>
+      </p:pic>
+      <p:pic>
+        <p:nvPicPr>
+          <p:cNvPr id="9" name="Picture 3"/>
+          <p:cNvPicPr>
+            <a:picLocks noChangeAspect="1" noChangeArrowheads="1"/>
+          </p:cNvPicPr>
+          <p:nvPr/>
+        </p:nvPicPr>
+        <p:blipFill rotWithShape="1">
+          <a:blip r:embed="rId2">
+            <a:extLst>
+              <a:ext uri="{28A0092B-C50C-407E-A947-70E740481C1C}">
+                <a14:useLocalDpi xmlns:a14="http://schemas.microsoft.com/office/drawing/2010/main" val="0"/>
+              </a:ext>
+            </a:extLst>
+          </a:blip>
+          <a:srcRect t="73638" r="48900"/>
+          <a:stretch/>
+        </p:blipFill>
+        <p:spPr bwMode="auto">
+          <a:xfrm>
+            <a:off x="634547" y="5856513"/>
+            <a:ext cx="4590596" cy="1611087"/>
+          </a:xfrm>
+          <a:prstGeom prst="rect">
+            <a:avLst/>
+          </a:prstGeom>
+          <a:noFill/>
+          <a:ln w="9525">
+            <a:noFill/>
+            <a:miter lim="800000"/>
+            <a:headEnd/>
+            <a:tailEnd/>
+          </a:ln>
+          <a:extLst>
+            <a:ext uri="{909E8E84-426E-40DD-AFC4-6F175D3DCCD1}">
+              <a14:hiddenFill xmlns:a14="http://schemas.microsoft.com/office/drawing/2010/main">
+                <a:solidFill>
+                  <a:srgbClr val="FFFFFF"/>
+                </a:solidFill>
+              </a14:hiddenFill>
+            </a:ext>
+          </a:extLst>
+        </p:spPr>
+      </p:pic>
+      <p:pic>
+        <p:nvPicPr>
+          <p:cNvPr id="10" name="Picture 3"/>
+          <p:cNvPicPr>
+            <a:picLocks noChangeAspect="1" noChangeArrowheads="1"/>
+          </p:cNvPicPr>
+          <p:nvPr/>
+        </p:nvPicPr>
+        <p:blipFill rotWithShape="1">
+          <a:blip r:embed="rId2">
+            <a:extLst>
+              <a:ext uri="{28A0092B-C50C-407E-A947-70E740481C1C}">
+                <a14:useLocalDpi xmlns:a14="http://schemas.microsoft.com/office/drawing/2010/main" val="0"/>
+              </a:ext>
+            </a:extLst>
+          </a:blip>
+          <a:srcRect l="54372"/>
+          <a:stretch/>
+        </p:blipFill>
+        <p:spPr bwMode="auto">
+          <a:xfrm>
+            <a:off x="5223782" y="1198337"/>
+            <a:ext cx="4098980" cy="6111421"/>
+          </a:xfrm>
+          <a:prstGeom prst="rect">
+            <a:avLst/>
+          </a:prstGeom>
+          <a:noFill/>
+          <a:ln>
+            <a:noFill/>
+          </a:ln>
+          <a:extLst>
+            <a:ext uri="{909E8E84-426E-40DD-AFC4-6F175D3DCCD1}">
+              <a14:hiddenFill xmlns:a14="http://schemas.microsoft.com/office/drawing/2010/main">
+                <a:solidFill>
+                  <a:srgbClr val="FFFFFF"/>
+                </a:solidFill>
+              </a14:hiddenFill>
+            </a:ext>
+            <a:ext uri="{91240B29-F687-4F45-9708-019B960494DF}">
+              <a14:hiddenLine xmlns:a14="http://schemas.microsoft.com/office/drawing/2010/main" w="9525">
+                <a:solidFill>
+                  <a:srgbClr val="000000"/>
+                </a:solidFill>
+                <a:miter lim="800000"/>
+                <a:headEnd/>
+                <a:tailEnd/>
+              </a14:hiddenLine>
+            </a:ext>
+          </a:extLst>
+        </p:spPr>
+      </p:pic>
+      <p:sp>
+        <p:nvSpPr>
+          <p:cNvPr id="2" name="직사각형 1"/>
+          <p:cNvSpPr/>
+          <p:nvPr/>
+        </p:nvSpPr>
+        <p:spPr>
+          <a:xfrm>
+            <a:off x="707571" y="970189"/>
+            <a:ext cx="4452258" cy="1525361"/>
+          </a:xfrm>
+          <a:prstGeom prst="rect">
+            <a:avLst/>
+          </a:prstGeom>
+          <a:noFill/>
+          <a:ln w="19050">
+            <a:noFill/>
+          </a:ln>
+        </p:spPr>
+        <p:style>
+          <a:lnRef idx="2">
+            <a:schemeClr val="accent1">
+              <a:shade val="50000"/>
+            </a:schemeClr>
+          </a:lnRef>
+          <a:fillRef idx="1">
+            <a:schemeClr val="accent1"/>
+          </a:fillRef>
+          <a:effectRef idx="0">
+            <a:schemeClr val="accent1"/>
+          </a:effectRef>
+          <a:fontRef idx="minor">
+            <a:schemeClr val="lt1"/>
+          </a:fontRef>
+        </p:style>
+        <p:txBody>
+          <a:bodyPr rtlCol="0" anchor="ctr"/>
+          <a:lstStyle/>
+          <a:p>
+            <a:pPr algn="ctr"/>
+            <a:endParaRPr lang="ko-KR" altLang="en-US"/>
+          </a:p>
+        </p:txBody>
+      </p:sp>
+      <p:sp>
+        <p:nvSpPr>
+          <p:cNvPr id="13" name="직사각형 12"/>
+          <p:cNvSpPr/>
+          <p:nvPr/>
+        </p:nvSpPr>
+        <p:spPr>
+          <a:xfrm>
+            <a:off x="764721" y="2608489"/>
+            <a:ext cx="4452258" cy="1525361"/>
+          </a:xfrm>
+          <a:prstGeom prst="rect">
+            <a:avLst/>
+          </a:prstGeom>
+          <a:noFill/>
+          <a:ln w="19050">
+            <a:noFill/>
+          </a:ln>
+        </p:spPr>
+        <p:style>
+          <a:lnRef idx="2">
+            <a:schemeClr val="accent1">
+              <a:shade val="50000"/>
+            </a:schemeClr>
+          </a:lnRef>
+          <a:fillRef idx="1">
+            <a:schemeClr val="accent1"/>
+          </a:fillRef>
+          <a:effectRef idx="0">
+            <a:schemeClr val="accent1"/>
+          </a:effectRef>
+          <a:fontRef idx="minor">
+            <a:schemeClr val="lt1"/>
+          </a:fontRef>
+        </p:style>
+        <p:txBody>
+          <a:bodyPr rtlCol="0" anchor="ctr"/>
+          <a:lstStyle/>
+          <a:p>
+            <a:pPr algn="ctr"/>
+            <a:endParaRPr lang="ko-KR" altLang="en-US"/>
+          </a:p>
+        </p:txBody>
+      </p:sp>
+      <p:sp>
+        <p:nvSpPr>
+          <p:cNvPr id="14" name="직사각형 13"/>
+          <p:cNvSpPr/>
+          <p:nvPr/>
+        </p:nvSpPr>
+        <p:spPr>
+          <a:xfrm>
+            <a:off x="707571" y="4256314"/>
+            <a:ext cx="4452258" cy="1525361"/>
+          </a:xfrm>
+          <a:prstGeom prst="rect">
+            <a:avLst/>
+          </a:prstGeom>
+          <a:noFill/>
+          <a:ln w="19050">
+            <a:noFill/>
+          </a:ln>
+        </p:spPr>
+        <p:style>
+          <a:lnRef idx="2">
+            <a:schemeClr val="accent1">
+              <a:shade val="50000"/>
+            </a:schemeClr>
+          </a:lnRef>
+          <a:fillRef idx="1">
+            <a:schemeClr val="accent1"/>
+          </a:fillRef>
+          <a:effectRef idx="0">
+            <a:schemeClr val="accent1"/>
+          </a:effectRef>
+          <a:fontRef idx="minor">
+            <a:schemeClr val="lt1"/>
+          </a:fontRef>
+        </p:style>
+        <p:txBody>
+          <a:bodyPr rtlCol="0" anchor="ctr"/>
+          <a:lstStyle/>
+          <a:p>
+            <a:pPr algn="ctr"/>
+            <a:endParaRPr lang="ko-KR" altLang="en-US"/>
+          </a:p>
+        </p:txBody>
+      </p:sp>
+      <p:sp>
+        <p:nvSpPr>
+          <p:cNvPr id="15" name="직사각형 14"/>
+          <p:cNvSpPr/>
+          <p:nvPr/>
+        </p:nvSpPr>
+        <p:spPr>
+          <a:xfrm>
+            <a:off x="745671" y="5856514"/>
+            <a:ext cx="4452258" cy="1525361"/>
+          </a:xfrm>
+          <a:prstGeom prst="rect">
+            <a:avLst/>
+          </a:prstGeom>
+          <a:noFill/>
+          <a:ln w="19050">
+            <a:noFill/>
+          </a:ln>
+        </p:spPr>
+        <p:style>
+          <a:lnRef idx="2">
+            <a:schemeClr val="accent1">
+              <a:shade val="50000"/>
+            </a:schemeClr>
+          </a:lnRef>
+          <a:fillRef idx="1">
+            <a:schemeClr val="accent1"/>
+          </a:fillRef>
+          <a:effectRef idx="0">
+            <a:schemeClr val="accent1"/>
+          </a:effectRef>
+          <a:fontRef idx="minor">
+            <a:schemeClr val="lt1"/>
+          </a:fontRef>
+        </p:style>
+        <p:txBody>
+          <a:bodyPr rtlCol="0" anchor="ctr"/>
+          <a:lstStyle/>
+          <a:p>
+            <a:pPr algn="ctr"/>
+            <a:endParaRPr lang="ko-KR" altLang="en-US"/>
+          </a:p>
+        </p:txBody>
+      </p:sp>
+    </p:spTree>
+    <p:extLst>
+      <p:ext uri="{BB962C8B-B14F-4D97-AF65-F5344CB8AC3E}">
+        <p14:creationId xmlns:p14="http://schemas.microsoft.com/office/powerpoint/2010/main" val="527370829"/>
+      </p:ext>
+    </p:extLst>
+  </p:cSld>
+  <p:clrMapOvr>
+    <a:masterClrMapping/>
+  </p:clrMapOvr>
+  <p:timing>
+    <p:tnLst>
+      <p:par>
+        <p:cTn id="1" dur="indefinite" restart="never" nodeType="tmRoot"/>
+      </p:par>
+    </p:tnLst>
+  </p:timing>
+</p:sld>
+</file>
+
+<file path=ppt/slides/slide16.xml><?xml version="1.0" encoding="utf-8"?>
+<p:sld xmlns:a="http://schemas.openxmlformats.org/drawingml/2006/main" xmlns:r="http://schemas.openxmlformats.org/officeDocument/2006/relationships" xmlns:p="http://schemas.openxmlformats.org/presentationml/2006/main">
+  <p:cSld>
+    <p:spTree>
+      <p:nvGrpSpPr>
+        <p:cNvPr id="1" name=""/>
+        <p:cNvGrpSpPr/>
+        <p:nvPr/>
+      </p:nvGrpSpPr>
+      <p:grpSpPr>
+        <a:xfrm>
+          <a:off x="0" y="0"/>
+          <a:ext cx="0" cy="0"/>
+          <a:chOff x="0" y="0"/>
+          <a:chExt cx="0" cy="0"/>
+        </a:xfrm>
+      </p:grpSpPr>
+      <p:sp>
+        <p:nvSpPr>
           <p:cNvPr id="89" name="직사각형 88"/>
           <p:cNvSpPr/>
           <p:nvPr/>
@@ -4551,196 +5093,6 @@
     <p:extLst>
       <p:ext uri="{BB962C8B-B14F-4D97-AF65-F5344CB8AC3E}">
         <p14:creationId xmlns:p14="http://schemas.microsoft.com/office/powerpoint/2010/main" val="3681055818"/>
-      </p:ext>
-    </p:extLst>
-  </p:cSld>
-  <p:clrMapOvr>
-    <a:masterClrMapping/>
-  </p:clrMapOvr>
-  <p:timing>
-    <p:tnLst>
-      <p:par>
-        <p:cTn id="1" dur="indefinite" restart="never" nodeType="tmRoot"/>
-      </p:par>
-    </p:tnLst>
-  </p:timing>
-</p:sld>
-</file>
-
-<file path=ppt/slides/slide16.xml><?xml version="1.0" encoding="utf-8"?>
-<p:sld xmlns:a="http://schemas.openxmlformats.org/drawingml/2006/main" xmlns:r="http://schemas.openxmlformats.org/officeDocument/2006/relationships" xmlns:p="http://schemas.openxmlformats.org/presentationml/2006/main">
-  <p:cSld>
-    <p:spTree>
-      <p:nvGrpSpPr>
-        <p:cNvPr id="1" name=""/>
-        <p:cNvGrpSpPr/>
-        <p:nvPr/>
-      </p:nvGrpSpPr>
-      <p:grpSpPr>
-        <a:xfrm>
-          <a:off x="0" y="0"/>
-          <a:ext cx="0" cy="0"/>
-          <a:chOff x="0" y="0"/>
-          <a:chExt cx="0" cy="0"/>
-        </a:xfrm>
-      </p:grpSpPr>
-      <p:sp>
-        <p:nvSpPr>
-          <p:cNvPr id="88" name="직사각형 87"/>
-          <p:cNvSpPr/>
-          <p:nvPr/>
-        </p:nvSpPr>
-        <p:spPr>
-          <a:xfrm>
-            <a:off x="152400" y="125187"/>
-            <a:ext cx="2667000" cy="312964"/>
-          </a:xfrm>
-          <a:prstGeom prst="rect">
-            <a:avLst/>
-          </a:prstGeom>
-          <a:noFill/>
-          <a:ln>
-            <a:noFill/>
-          </a:ln>
-        </p:spPr>
-        <p:style>
-          <a:lnRef idx="2">
-            <a:schemeClr val="accent1">
-              <a:shade val="50000"/>
-            </a:schemeClr>
-          </a:lnRef>
-          <a:fillRef idx="1">
-            <a:schemeClr val="accent1"/>
-          </a:fillRef>
-          <a:effectRef idx="0">
-            <a:schemeClr val="accent1"/>
-          </a:effectRef>
-          <a:fontRef idx="minor">
-            <a:schemeClr val="lt1"/>
-          </a:fontRef>
-        </p:style>
-        <p:txBody>
-          <a:bodyPr rtlCol="0" anchor="ctr"/>
-          <a:lstStyle/>
-          <a:p>
-            <a:r>
-              <a:rPr lang="en-US" altLang="ko-KR" sz="1600" b="1" dirty="0" err="1" smtClean="0">
-                <a:solidFill>
-                  <a:schemeClr val="accent1">
-                    <a:lumMod val="75000"/>
-                  </a:schemeClr>
-                </a:solidFill>
-                <a:latin typeface="+mn-ea"/>
-              </a:rPr>
-              <a:t>vsql</a:t>
-            </a:r>
-            <a:endParaRPr lang="ko-KR" altLang="en-US" sz="1600" b="1" dirty="0">
-              <a:solidFill>
-                <a:schemeClr val="accent1">
-                  <a:lumMod val="75000"/>
-                </a:schemeClr>
-              </a:solidFill>
-              <a:latin typeface="+mn-ea"/>
-            </a:endParaRPr>
-          </a:p>
-        </p:txBody>
-      </p:sp>
-      <p:sp>
-        <p:nvSpPr>
-          <p:cNvPr id="89" name="직사각형 88"/>
-          <p:cNvSpPr/>
-          <p:nvPr/>
-        </p:nvSpPr>
-        <p:spPr>
-          <a:xfrm>
-            <a:off x="301171" y="422730"/>
-            <a:ext cx="9312729" cy="357414"/>
-          </a:xfrm>
-          <a:prstGeom prst="rect">
-            <a:avLst/>
-          </a:prstGeom>
-          <a:noFill/>
-          <a:ln>
-            <a:noFill/>
-          </a:ln>
-        </p:spPr>
-        <p:style>
-          <a:lnRef idx="2">
-            <a:schemeClr val="accent1">
-              <a:shade val="50000"/>
-            </a:schemeClr>
-          </a:lnRef>
-          <a:fillRef idx="1">
-            <a:schemeClr val="accent1"/>
-          </a:fillRef>
-          <a:effectRef idx="0">
-            <a:schemeClr val="accent1"/>
-          </a:effectRef>
-          <a:fontRef idx="minor">
-            <a:schemeClr val="lt1"/>
-          </a:fontRef>
-        </p:style>
-        <p:txBody>
-          <a:bodyPr rtlCol="0" anchor="ctr"/>
-          <a:lstStyle/>
-          <a:p>
-            <a:r>
-              <a:rPr lang="en-US" altLang="ko-KR" sz="1400" dirty="0" smtClean="0">
-                <a:solidFill>
-                  <a:schemeClr val="tx1"/>
-                </a:solidFill>
-                <a:latin typeface="+mn-ea"/>
-              </a:rPr>
-              <a:t>xxx</a:t>
-            </a:r>
-            <a:endParaRPr lang="en-US" altLang="ko-KR" sz="1400" dirty="0">
-              <a:solidFill>
-                <a:schemeClr val="tx1"/>
-              </a:solidFill>
-              <a:latin typeface="+mn-ea"/>
-            </a:endParaRPr>
-          </a:p>
-        </p:txBody>
-      </p:sp>
-      <p:cxnSp>
-        <p:nvCxnSpPr>
-          <p:cNvPr id="90" name="직선 연결선 89"/>
-          <p:cNvCxnSpPr/>
-          <p:nvPr/>
-        </p:nvCxnSpPr>
-        <p:spPr>
-          <a:xfrm flipV="1">
-            <a:off x="215900" y="469900"/>
-            <a:ext cx="9156700" cy="0"/>
-          </a:xfrm>
-          <a:prstGeom prst="line">
-            <a:avLst/>
-          </a:prstGeom>
-          <a:ln w="19050">
-            <a:solidFill>
-              <a:schemeClr val="accent1"/>
-            </a:solidFill>
-          </a:ln>
-        </p:spPr>
-        <p:style>
-          <a:lnRef idx="1">
-            <a:schemeClr val="accent1"/>
-          </a:lnRef>
-          <a:fillRef idx="0">
-            <a:schemeClr val="accent1"/>
-          </a:fillRef>
-          <a:effectRef idx="0">
-            <a:schemeClr val="accent1"/>
-          </a:effectRef>
-          <a:fontRef idx="minor">
-            <a:schemeClr val="tx1"/>
-          </a:fontRef>
-        </p:style>
-      </p:cxnSp>
-    </p:spTree>
-    <p:extLst>
-      <p:ext uri="{BB962C8B-B14F-4D97-AF65-F5344CB8AC3E}">
-        <p14:creationId xmlns:p14="http://schemas.microsoft.com/office/powerpoint/2010/main" val="3480977301"/>
       </p:ext>
     </p:extLst>
   </p:cSld>
@@ -4814,7 +5166,7 @@
           <a:lstStyle/>
           <a:p>
             <a:r>
-              <a:rPr lang="en-US" altLang="ko-KR" sz="1600" b="1" dirty="0" smtClean="0">
+              <a:rPr lang="en-US" altLang="ko-KR" sz="1600" b="1" dirty="0" err="1" smtClean="0">
                 <a:solidFill>
                   <a:schemeClr val="accent1">
                     <a:lumMod val="75000"/>
@@ -4822,7 +5174,7 @@
                 </a:solidFill>
                 <a:latin typeface="+mn-ea"/>
               </a:rPr>
-              <a:t>Copy</a:t>
+              <a:t>vsql</a:t>
             </a:r>
             <a:endParaRPr lang="ko-KR" altLang="en-US" sz="1600" b="1" dirty="0">
               <a:solidFill>
@@ -4930,7 +5282,7 @@
     </p:spTree>
     <p:extLst>
       <p:ext uri="{BB962C8B-B14F-4D97-AF65-F5344CB8AC3E}">
-        <p14:creationId xmlns:p14="http://schemas.microsoft.com/office/powerpoint/2010/main" val="3028978472"/>
+        <p14:creationId xmlns:p14="http://schemas.microsoft.com/office/powerpoint/2010/main" val="3480977301"/>
       </p:ext>
     </p:extLst>
   </p:cSld>
@@ -5012,7 +5364,7 @@
                 </a:solidFill>
                 <a:latin typeface="+mn-ea"/>
               </a:rPr>
-              <a:t>Export</a:t>
+              <a:t>Copy</a:t>
             </a:r>
             <a:endParaRPr lang="ko-KR" altLang="en-US" sz="1600" b="1" dirty="0">
               <a:solidFill>
@@ -5120,7 +5472,7 @@
     </p:spTree>
     <p:extLst>
       <p:ext uri="{BB962C8B-B14F-4D97-AF65-F5344CB8AC3E}">
-        <p14:creationId xmlns:p14="http://schemas.microsoft.com/office/powerpoint/2010/main" val="1891172521"/>
+        <p14:creationId xmlns:p14="http://schemas.microsoft.com/office/powerpoint/2010/main" val="3028978472"/>
       </p:ext>
     </p:extLst>
   </p:cSld>
@@ -5156,23 +5508,19 @@
       </p:grpSpPr>
       <p:sp>
         <p:nvSpPr>
-          <p:cNvPr id="89" name="직사각형 88"/>
+          <p:cNvPr id="88" name="직사각형 87"/>
           <p:cNvSpPr/>
           <p:nvPr/>
         </p:nvSpPr>
         <p:spPr>
           <a:xfrm>
-            <a:off x="1" y="0"/>
-            <a:ext cx="9720262" cy="8999538"/>
+            <a:off x="152400" y="125187"/>
+            <a:ext cx="2667000" cy="312964"/>
           </a:xfrm>
           <a:prstGeom prst="rect">
             <a:avLst/>
           </a:prstGeom>
-          <a:solidFill>
-            <a:schemeClr val="accent1">
-              <a:lumMod val="75000"/>
-            </a:schemeClr>
-          </a:solidFill>
+          <a:noFill/>
           <a:ln>
             <a:noFill/>
           </a:ln>
@@ -5197,22 +5545,124 @@
           <a:bodyPr rtlCol="0" anchor="ctr"/>
           <a:lstStyle/>
           <a:p>
-            <a:pPr algn="ctr"/>
-            <a:r>
-              <a:rPr lang="en-US" altLang="ko-KR" sz="7200" b="1" dirty="0" err="1"/>
-              <a:t>Vertica</a:t>
-            </a:r>
-            <a:r>
-              <a:rPr lang="en-US" altLang="ko-KR" sz="7200" b="1" dirty="0"/>
-              <a:t> Utilization</a:t>
-            </a:r>
+            <a:r>
+              <a:rPr lang="en-US" altLang="ko-KR" sz="1600" b="1" dirty="0" smtClean="0">
+                <a:solidFill>
+                  <a:schemeClr val="accent1">
+                    <a:lumMod val="75000"/>
+                  </a:schemeClr>
+                </a:solidFill>
+                <a:latin typeface="+mn-ea"/>
+              </a:rPr>
+              <a:t>Export</a:t>
+            </a:r>
+            <a:endParaRPr lang="ko-KR" altLang="en-US" sz="1600" b="1" dirty="0">
+              <a:solidFill>
+                <a:schemeClr val="accent1">
+                  <a:lumMod val="75000"/>
+                </a:schemeClr>
+              </a:solidFill>
+              <a:latin typeface="+mn-ea"/>
+            </a:endParaRPr>
           </a:p>
         </p:txBody>
       </p:sp>
+      <p:sp>
+        <p:nvSpPr>
+          <p:cNvPr id="89" name="직사각형 88"/>
+          <p:cNvSpPr/>
+          <p:nvPr/>
+        </p:nvSpPr>
+        <p:spPr>
+          <a:xfrm>
+            <a:off x="301171" y="422730"/>
+            <a:ext cx="9312729" cy="357414"/>
+          </a:xfrm>
+          <a:prstGeom prst="rect">
+            <a:avLst/>
+          </a:prstGeom>
+          <a:noFill/>
+          <a:ln>
+            <a:noFill/>
+          </a:ln>
+        </p:spPr>
+        <p:style>
+          <a:lnRef idx="2">
+            <a:schemeClr val="accent1">
+              <a:shade val="50000"/>
+            </a:schemeClr>
+          </a:lnRef>
+          <a:fillRef idx="1">
+            <a:schemeClr val="accent1"/>
+          </a:fillRef>
+          <a:effectRef idx="0">
+            <a:schemeClr val="accent1"/>
+          </a:effectRef>
+          <a:fontRef idx="minor">
+            <a:schemeClr val="lt1"/>
+          </a:fontRef>
+        </p:style>
+        <p:txBody>
+          <a:bodyPr rtlCol="0" anchor="ctr"/>
+          <a:lstStyle/>
+          <a:p>
+            <a:r>
+              <a:rPr lang="en-US" altLang="ko-KR" sz="1400" dirty="0" smtClean="0">
+                <a:solidFill>
+                  <a:schemeClr val="tx1"/>
+                </a:solidFill>
+                <a:latin typeface="+mn-ea"/>
+              </a:rPr>
+              <a:t>xxx</a:t>
+            </a:r>
+            <a:endParaRPr lang="en-US" altLang="ko-KR" sz="1400" dirty="0">
+              <a:solidFill>
+                <a:schemeClr val="tx1"/>
+              </a:solidFill>
+              <a:latin typeface="+mn-ea"/>
+            </a:endParaRPr>
+          </a:p>
+        </p:txBody>
+      </p:sp>
+      <p:cxnSp>
+        <p:nvCxnSpPr>
+          <p:cNvPr id="90" name="직선 연결선 89"/>
+          <p:cNvCxnSpPr/>
+          <p:nvPr/>
+        </p:nvCxnSpPr>
+        <p:spPr>
+          <a:xfrm flipV="1">
+            <a:off x="215900" y="469900"/>
+            <a:ext cx="9156700" cy="0"/>
+          </a:xfrm>
+          <a:prstGeom prst="line">
+            <a:avLst/>
+          </a:prstGeom>
+          <a:ln w="19050">
+            <a:solidFill>
+              <a:schemeClr val="accent1"/>
+            </a:solidFill>
+          </a:ln>
+        </p:spPr>
+        <p:style>
+          <a:lnRef idx="1">
+            <a:schemeClr val="accent1"/>
+          </a:lnRef>
+          <a:fillRef idx="0">
+            <a:schemeClr val="accent1"/>
+          </a:fillRef>
+          <a:effectRef idx="0">
+            <a:schemeClr val="accent1"/>
+          </a:effectRef>
+          <a:fontRef idx="minor">
+            <a:schemeClr val="tx1"/>
+          </a:fontRef>
+        </p:style>
+      </p:cxnSp>
     </p:spTree>
     <p:extLst>
       <p:ext uri="{BB962C8B-B14F-4D97-AF65-F5344CB8AC3E}">
-        <p14:creationId xmlns:p14="http://schemas.microsoft.com/office/powerpoint/2010/main" val="1195544019"/>
+        <p14:creationId xmlns:p14="http://schemas.microsoft.com/office/powerpoint/2010/main" val="1891172521"/>
       </p:ext>
     </p:extLst>
   </p:cSld>
@@ -16531,6 +16981,98 @@
       </p:grpSpPr>
       <p:sp>
         <p:nvSpPr>
+          <p:cNvPr id="89" name="직사각형 88"/>
+          <p:cNvSpPr/>
+          <p:nvPr/>
+        </p:nvSpPr>
+        <p:spPr>
+          <a:xfrm>
+            <a:off x="1" y="0"/>
+            <a:ext cx="9720262" cy="8999538"/>
+          </a:xfrm>
+          <a:prstGeom prst="rect">
+            <a:avLst/>
+          </a:prstGeom>
+          <a:solidFill>
+            <a:schemeClr val="accent1">
+              <a:lumMod val="75000"/>
+            </a:schemeClr>
+          </a:solidFill>
+          <a:ln>
+            <a:noFill/>
+          </a:ln>
+        </p:spPr>
+        <p:style>
+          <a:lnRef idx="2">
+            <a:schemeClr val="accent1">
+              <a:shade val="50000"/>
+            </a:schemeClr>
+          </a:lnRef>
+          <a:fillRef idx="1">
+            <a:schemeClr val="accent1"/>
+          </a:fillRef>
+          <a:effectRef idx="0">
+            <a:schemeClr val="accent1"/>
+          </a:effectRef>
+          <a:fontRef idx="minor">
+            <a:schemeClr val="lt1"/>
+          </a:fontRef>
+        </p:style>
+        <p:txBody>
+          <a:bodyPr rtlCol="0" anchor="ctr"/>
+          <a:lstStyle/>
+          <a:p>
+            <a:pPr algn="ctr"/>
+            <a:r>
+              <a:rPr lang="en-US" altLang="ko-KR" sz="7200" b="1" dirty="0" err="1"/>
+              <a:t>Vertica</a:t>
+            </a:r>
+            <a:r>
+              <a:rPr lang="en-US" altLang="ko-KR" sz="7200" b="1" dirty="0"/>
+              <a:t> Utilization</a:t>
+            </a:r>
+          </a:p>
+        </p:txBody>
+      </p:sp>
+    </p:spTree>
+    <p:extLst>
+      <p:ext uri="{BB962C8B-B14F-4D97-AF65-F5344CB8AC3E}">
+        <p14:creationId xmlns:p14="http://schemas.microsoft.com/office/powerpoint/2010/main" val="1195544019"/>
+      </p:ext>
+    </p:extLst>
+  </p:cSld>
+  <p:clrMapOvr>
+    <a:masterClrMapping/>
+  </p:clrMapOvr>
+  <p:timing>
+    <p:tnLst>
+      <p:par>
+        <p:cTn id="1" dur="indefinite" restart="never" nodeType="tmRoot"/>
+      </p:par>
+    </p:tnLst>
+  </p:timing>
+</p:sld>
+</file>
+
+<file path=ppt/slides/slide21.xml><?xml version="1.0" encoding="utf-8"?>
+<p:sld xmlns:a="http://schemas.openxmlformats.org/drawingml/2006/main" xmlns:r="http://schemas.openxmlformats.org/officeDocument/2006/relationships" xmlns:p="http://schemas.openxmlformats.org/presentationml/2006/main">
+  <p:cSld>
+    <p:spTree>
+      <p:nvGrpSpPr>
+        <p:cNvPr id="1" name=""/>
+        <p:cNvGrpSpPr/>
+        <p:nvPr/>
+      </p:nvGrpSpPr>
+      <p:grpSpPr>
+        <a:xfrm>
+          <a:off x="0" y="0"/>
+          <a:ext cx="0" cy="0"/>
+          <a:chOff x="0" y="0"/>
+          <a:chExt cx="0" cy="0"/>
+        </a:xfrm>
+      </p:grpSpPr>
+      <p:sp>
+        <p:nvSpPr>
           <p:cNvPr id="88" name="직사각형 87"/>
           <p:cNvSpPr/>
           <p:nvPr/>
@@ -16702,7 +17244,7 @@
 </p:sld>
 </file>
 
-<file path=ppt/slides/slide21.xml><?xml version="1.0" encoding="utf-8"?>
+<file path=ppt/slides/slide22.xml><?xml version="1.0" encoding="utf-8"?>
 <p:sld xmlns:a="http://schemas.openxmlformats.org/drawingml/2006/main" xmlns:r="http://schemas.openxmlformats.org/officeDocument/2006/relationships" xmlns:p="http://schemas.openxmlformats.org/presentationml/2006/main">
   <p:cSld>
     <p:spTree>
@@ -17064,7 +17606,7 @@
 </p:sld>
 </file>
 
-<file path=ppt/slides/slide22.xml><?xml version="1.0" encoding="utf-8"?>
+<file path=ppt/slides/slide23.xml><?xml version="1.0" encoding="utf-8"?>
 <p:sld xmlns:a="http://schemas.openxmlformats.org/drawingml/2006/main" xmlns:r="http://schemas.openxmlformats.org/officeDocument/2006/relationships" xmlns:p="http://schemas.openxmlformats.org/presentationml/2006/main">
   <p:cSld>
     <p:spTree>
@@ -17254,7 +17796,7 @@
 </p:sld>
 </file>
 
-<file path=ppt/slides/slide23.xml><?xml version="1.0" encoding="utf-8"?>
+<file path=ppt/slides/slide24.xml><?xml version="1.0" encoding="utf-8"?>
 <p:sld xmlns:a="http://schemas.openxmlformats.org/drawingml/2006/main" xmlns:r="http://schemas.openxmlformats.org/officeDocument/2006/relationships" xmlns:p="http://schemas.openxmlformats.org/presentationml/2006/main">
   <p:cSld>
     <p:spTree>
@@ -17346,7 +17888,7 @@
 </p:sld>
 </file>
 
-<file path=ppt/slides/slide24.xml><?xml version="1.0" encoding="utf-8"?>
+<file path=ppt/slides/slide25.xml><?xml version="1.0" encoding="utf-8"?>
 <p:sld xmlns:a="http://schemas.openxmlformats.org/drawingml/2006/main" xmlns:r="http://schemas.openxmlformats.org/officeDocument/2006/relationships" xmlns:p="http://schemas.openxmlformats.org/presentationml/2006/main">
   <p:cSld>
     <p:spTree>
@@ -17669,7 +18211,7 @@
           <p:cNvPr id="5" name="그림 4">
             <a:extLst>
               <a:ext uri="{FF2B5EF4-FFF2-40B4-BE49-F238E27FC236}">
-                <a16:creationId xmlns="" xmlns:a16="http://schemas.microsoft.com/office/drawing/2014/main" id="{F25A3B3A-32C8-4401-A476-E8CCEB3258D5}"/>
+                <a16:creationId xmlns:a16="http://schemas.microsoft.com/office/drawing/2014/main" xmlns="" id="{F25A3B3A-32C8-4401-A476-E8CCEB3258D5}"/>
               </a:ext>
             </a:extLst>
           </p:cNvPr>
@@ -17712,7 +18254,7 @@
           <p:cNvPr id="6" name="Picture 4">
             <a:extLst>
               <a:ext uri="{FF2B5EF4-FFF2-40B4-BE49-F238E27FC236}">
-                <a16:creationId xmlns="" xmlns:a16="http://schemas.microsoft.com/office/drawing/2014/main" id="{051FB3A4-C7F9-45D0-A73B-557A6E1C4FDF}"/>
+                <a16:creationId xmlns:a16="http://schemas.microsoft.com/office/drawing/2014/main" xmlns="" id="{051FB3A4-C7F9-45D0-A73B-557A6E1C4FDF}"/>
               </a:ext>
             </a:extLst>
           </p:cNvPr>
@@ -18835,7 +19377,7 @@
               <p:cNvPr id="34" name="Freeform 117">
                 <a:extLst>
                   <a:ext uri="{FF2B5EF4-FFF2-40B4-BE49-F238E27FC236}">
-                    <a16:creationId xmlns="" xmlns:a16="http://schemas.microsoft.com/office/drawing/2014/main" id="{ACB5F511-0467-4F80-BCD6-94BAC36031EE}"/>
+                    <a16:creationId xmlns:a16="http://schemas.microsoft.com/office/drawing/2014/main" xmlns="" id="{ACB5F511-0467-4F80-BCD6-94BAC36031EE}"/>
                   </a:ext>
                 </a:extLst>
               </p:cNvPr>
@@ -19015,7 +19557,7 @@
               <p:cNvPr id="35" name="Freeform 118">
                 <a:extLst>
                   <a:ext uri="{FF2B5EF4-FFF2-40B4-BE49-F238E27FC236}">
-                    <a16:creationId xmlns="" xmlns:a16="http://schemas.microsoft.com/office/drawing/2014/main" id="{8F3B04C3-D501-4070-B0AC-5FB6C26F8066}"/>
+                    <a16:creationId xmlns:a16="http://schemas.microsoft.com/office/drawing/2014/main" xmlns="" id="{8F3B04C3-D501-4070-B0AC-5FB6C26F8066}"/>
                   </a:ext>
                 </a:extLst>
               </p:cNvPr>
@@ -19157,7 +19699,7 @@
               <p:cNvPr id="36" name="Freeform 119">
                 <a:extLst>
                   <a:ext uri="{FF2B5EF4-FFF2-40B4-BE49-F238E27FC236}">
-                    <a16:creationId xmlns="" xmlns:a16="http://schemas.microsoft.com/office/drawing/2014/main" id="{36E9553A-4692-4D5B-A665-94CC09C4A62F}"/>
+                    <a16:creationId xmlns:a16="http://schemas.microsoft.com/office/drawing/2014/main" xmlns="" id="{36E9553A-4692-4D5B-A665-94CC09C4A62F}"/>
                   </a:ext>
                 </a:extLst>
               </p:cNvPr>
@@ -19337,7 +19879,7 @@
               <p:cNvPr id="37" name="Freeform 120">
                 <a:extLst>
                   <a:ext uri="{FF2B5EF4-FFF2-40B4-BE49-F238E27FC236}">
-                    <a16:creationId xmlns="" xmlns:a16="http://schemas.microsoft.com/office/drawing/2014/main" id="{936475C6-EBDB-47C8-8ADD-312FB8E3E615}"/>
+                    <a16:creationId xmlns:a16="http://schemas.microsoft.com/office/drawing/2014/main" xmlns="" id="{936475C6-EBDB-47C8-8ADD-312FB8E3E615}"/>
                   </a:ext>
                 </a:extLst>
               </p:cNvPr>
@@ -19479,7 +20021,7 @@
               <p:cNvPr id="38" name="Freeform 121">
                 <a:extLst>
                   <a:ext uri="{FF2B5EF4-FFF2-40B4-BE49-F238E27FC236}">
-                    <a16:creationId xmlns="" xmlns:a16="http://schemas.microsoft.com/office/drawing/2014/main" id="{169A2FBC-0956-4DC7-ADF8-83D5DC60949B}"/>
+                    <a16:creationId xmlns:a16="http://schemas.microsoft.com/office/drawing/2014/main" xmlns="" id="{169A2FBC-0956-4DC7-ADF8-83D5DC60949B}"/>
                   </a:ext>
                 </a:extLst>
               </p:cNvPr>
@@ -19659,7 +20201,7 @@
               <p:cNvPr id="39" name="Freeform 122">
                 <a:extLst>
                   <a:ext uri="{FF2B5EF4-FFF2-40B4-BE49-F238E27FC236}">
-                    <a16:creationId xmlns="" xmlns:a16="http://schemas.microsoft.com/office/drawing/2014/main" id="{59EA31B7-D7DB-4DBF-B245-2AE82627F51A}"/>
+                    <a16:creationId xmlns:a16="http://schemas.microsoft.com/office/drawing/2014/main" xmlns="" id="{59EA31B7-D7DB-4DBF-B245-2AE82627F51A}"/>
                   </a:ext>
                 </a:extLst>
               </p:cNvPr>
@@ -19801,7 +20343,7 @@
               <p:cNvPr id="40" name="Freeform 123">
                 <a:extLst>
                   <a:ext uri="{FF2B5EF4-FFF2-40B4-BE49-F238E27FC236}">
-                    <a16:creationId xmlns="" xmlns:a16="http://schemas.microsoft.com/office/drawing/2014/main" id="{07115F20-4892-4DCD-A419-4CD8D03F5E62}"/>
+                    <a16:creationId xmlns:a16="http://schemas.microsoft.com/office/drawing/2014/main" xmlns="" id="{07115F20-4892-4DCD-A419-4CD8D03F5E62}"/>
                   </a:ext>
                 </a:extLst>
               </p:cNvPr>
@@ -20359,7 +20901,7 @@
               <p:cNvPr id="41" name="Freeform 124">
                 <a:extLst>
                   <a:ext uri="{FF2B5EF4-FFF2-40B4-BE49-F238E27FC236}">
-                    <a16:creationId xmlns="" xmlns:a16="http://schemas.microsoft.com/office/drawing/2014/main" id="{9EA60E95-59DD-4A01-B0FA-42513BEAF8E7}"/>
+                    <a16:creationId xmlns:a16="http://schemas.microsoft.com/office/drawing/2014/main" xmlns="" id="{9EA60E95-59DD-4A01-B0FA-42513BEAF8E7}"/>
                   </a:ext>
                 </a:extLst>
               </p:cNvPr>
@@ -20539,7 +21081,7 @@
               <p:cNvPr id="42" name="Freeform 125">
                 <a:extLst>
                   <a:ext uri="{FF2B5EF4-FFF2-40B4-BE49-F238E27FC236}">
-                    <a16:creationId xmlns="" xmlns:a16="http://schemas.microsoft.com/office/drawing/2014/main" id="{277C2BFE-7B2E-4B06-836A-8103FB641491}"/>
+                    <a16:creationId xmlns:a16="http://schemas.microsoft.com/office/drawing/2014/main" xmlns="" id="{277C2BFE-7B2E-4B06-836A-8103FB641491}"/>
                   </a:ext>
                 </a:extLst>
               </p:cNvPr>
@@ -20696,7 +21238,7 @@
               <p:cNvPr id="32" name="Freeform 111">
                 <a:extLst>
                   <a:ext uri="{FF2B5EF4-FFF2-40B4-BE49-F238E27FC236}">
-                    <a16:creationId xmlns="" xmlns:a16="http://schemas.microsoft.com/office/drawing/2014/main" id="{BC11850A-92B9-404F-BF5E-D6215717A644}"/>
+                    <a16:creationId xmlns:a16="http://schemas.microsoft.com/office/drawing/2014/main" xmlns="" id="{BC11850A-92B9-404F-BF5E-D6215717A644}"/>
                   </a:ext>
                 </a:extLst>
               </p:cNvPr>
@@ -20914,7 +21456,7 @@
               <p:cNvPr id="33" name="Freeform 112">
                 <a:extLst>
                   <a:ext uri="{FF2B5EF4-FFF2-40B4-BE49-F238E27FC236}">
-                    <a16:creationId xmlns="" xmlns:a16="http://schemas.microsoft.com/office/drawing/2014/main" id="{9BB65042-15E8-4757-A437-CB30B736B658}"/>
+                    <a16:creationId xmlns:a16="http://schemas.microsoft.com/office/drawing/2014/main" xmlns="" id="{9BB65042-15E8-4757-A437-CB30B736B658}"/>
                   </a:ext>
                 </a:extLst>
               </p:cNvPr>
@@ -22321,7 +22863,7 @@
             <p:cNvPr id="43" name="Straight Connector 64">
               <a:extLst>
                 <a:ext uri="{FF2B5EF4-FFF2-40B4-BE49-F238E27FC236}">
-                  <a16:creationId xmlns="" xmlns:a16="http://schemas.microsoft.com/office/drawing/2014/main" id="{D22F4E57-90BA-4899-909E-5829E7A9C72A}"/>
+                  <a16:creationId xmlns:a16="http://schemas.microsoft.com/office/drawing/2014/main" xmlns="" id="{D22F4E57-90BA-4899-909E-5829E7A9C72A}"/>
                 </a:ext>
               </a:extLst>
             </p:cNvPr>
@@ -26461,7 +27003,7 @@
             <p:cNvPr id="97" name="타원 96">
               <a:extLst>
                 <a:ext uri="{FF2B5EF4-FFF2-40B4-BE49-F238E27FC236}">
-                  <a16:creationId xmlns:a16="http://schemas.microsoft.com/office/drawing/2014/main" xmlns="" id="{2A6A11AC-31D1-C238-469B-B8065561C8B3}"/>
+                  <a16:creationId xmlns="" xmlns:a16="http://schemas.microsoft.com/office/drawing/2014/main" id="{2A6A11AC-31D1-C238-469B-B8065561C8B3}"/>
                 </a:ext>
               </a:extLst>
             </p:cNvPr>
@@ -26532,7 +27074,7 @@
             <p:cNvPr id="98" name="TextBox 97">
               <a:extLst>
                 <a:ext uri="{FF2B5EF4-FFF2-40B4-BE49-F238E27FC236}">
-                  <a16:creationId xmlns:a16="http://schemas.microsoft.com/office/drawing/2014/main" xmlns="" id="{370FDDD1-392F-C3F6-7926-8F5450602B51}"/>
+                  <a16:creationId xmlns="" xmlns:a16="http://schemas.microsoft.com/office/drawing/2014/main" id="{370FDDD1-392F-C3F6-7926-8F5450602B51}"/>
                 </a:ext>
               </a:extLst>
             </p:cNvPr>
@@ -26703,7 +27245,7 @@
             <p:cNvPr id="99" name="타원 98">
               <a:extLst>
                 <a:ext uri="{FF2B5EF4-FFF2-40B4-BE49-F238E27FC236}">
-                  <a16:creationId xmlns:a16="http://schemas.microsoft.com/office/drawing/2014/main" xmlns="" id="{8A596585-4EFC-7C6C-63D0-E577FBF1E255}"/>
+                  <a16:creationId xmlns="" xmlns:a16="http://schemas.microsoft.com/office/drawing/2014/main" id="{8A596585-4EFC-7C6C-63D0-E577FBF1E255}"/>
                 </a:ext>
               </a:extLst>
             </p:cNvPr>
@@ -26787,7 +27329,7 @@
             <p:cNvPr id="100" name="TextBox 99">
               <a:extLst>
                 <a:ext uri="{FF2B5EF4-FFF2-40B4-BE49-F238E27FC236}">
-                  <a16:creationId xmlns:a16="http://schemas.microsoft.com/office/drawing/2014/main" xmlns="" id="{A2DBD73D-1544-9997-4B5E-7BE89DA70BD5}"/>
+                  <a16:creationId xmlns="" xmlns:a16="http://schemas.microsoft.com/office/drawing/2014/main" id="{A2DBD73D-1544-9997-4B5E-7BE89DA70BD5}"/>
                 </a:ext>
               </a:extLst>
             </p:cNvPr>
@@ -26903,7 +27445,7 @@
             <p:cNvPr id="101" name="타원 100">
               <a:extLst>
                 <a:ext uri="{FF2B5EF4-FFF2-40B4-BE49-F238E27FC236}">
-                  <a16:creationId xmlns:a16="http://schemas.microsoft.com/office/drawing/2014/main" xmlns="" id="{D7536991-A61A-F58E-EC18-61A6F108717B}"/>
+                  <a16:creationId xmlns="" xmlns:a16="http://schemas.microsoft.com/office/drawing/2014/main" id="{D7536991-A61A-F58E-EC18-61A6F108717B}"/>
                 </a:ext>
               </a:extLst>
             </p:cNvPr>
@@ -26987,7 +27529,7 @@
             <p:cNvPr id="102" name="TextBox 101">
               <a:extLst>
                 <a:ext uri="{FF2B5EF4-FFF2-40B4-BE49-F238E27FC236}">
-                  <a16:creationId xmlns:a16="http://schemas.microsoft.com/office/drawing/2014/main" xmlns="" id="{688289CD-94AD-1B72-1500-6EAFBCF42BA0}"/>
+                  <a16:creationId xmlns="" xmlns:a16="http://schemas.microsoft.com/office/drawing/2014/main" id="{688289CD-94AD-1B72-1500-6EAFBCF42BA0}"/>
                 </a:ext>
               </a:extLst>
             </p:cNvPr>
@@ -27250,7 +27792,7 @@
             <p:cNvPr id="103" name="타원 102">
               <a:extLst>
                 <a:ext uri="{FF2B5EF4-FFF2-40B4-BE49-F238E27FC236}">
-                  <a16:creationId xmlns:a16="http://schemas.microsoft.com/office/drawing/2014/main" xmlns="" id="{F74DE22F-BE57-990F-10C7-5A28137FF97D}"/>
+                  <a16:creationId xmlns="" xmlns:a16="http://schemas.microsoft.com/office/drawing/2014/main" id="{F74DE22F-BE57-990F-10C7-5A28137FF97D}"/>
                 </a:ext>
               </a:extLst>
             </p:cNvPr>
@@ -27334,7 +27876,7 @@
             <p:cNvPr id="104" name="TextBox 103">
               <a:extLst>
                 <a:ext uri="{FF2B5EF4-FFF2-40B4-BE49-F238E27FC236}">
-                  <a16:creationId xmlns:a16="http://schemas.microsoft.com/office/drawing/2014/main" xmlns="" id="{2709A4DE-7D99-060B-4332-72EAE25DA559}"/>
+                  <a16:creationId xmlns="" xmlns:a16="http://schemas.microsoft.com/office/drawing/2014/main" id="{2709A4DE-7D99-060B-4332-72EAE25DA559}"/>
                 </a:ext>
               </a:extLst>
             </p:cNvPr>
@@ -28428,7 +28970,7 @@
             <p:cNvPr id="6" name="Picture 11" descr="Sandbox Software – In the Cloud | FortiSandbox Cloud">
               <a:extLst>
                 <a:ext uri="{FF2B5EF4-FFF2-40B4-BE49-F238E27FC236}">
-                  <a16:creationId xmlns="" xmlns:a16="http://schemas.microsoft.com/office/drawing/2014/main" id="{73BBF3D0-6B40-E280-BA30-1E77B5C4F45A}"/>
+                  <a16:creationId xmlns:a16="http://schemas.microsoft.com/office/drawing/2014/main" xmlns="" id="{73BBF3D0-6B40-E280-BA30-1E77B5C4F45A}"/>
                 </a:ext>
               </a:extLst>
             </p:cNvPr>
@@ -28546,7 +29088,7 @@
             <p:cNvPr id="7" name="Picture 8" descr="cost Icon - Free PNG &amp; SVG 930448 - Noun Project">
               <a:extLst>
                 <a:ext uri="{FF2B5EF4-FFF2-40B4-BE49-F238E27FC236}">
-                  <a16:creationId xmlns="" xmlns:a16="http://schemas.microsoft.com/office/drawing/2014/main" id="{B89FFE28-AD15-4FA1-FDD1-8DF6F4744923}"/>
+                  <a16:creationId xmlns:a16="http://schemas.microsoft.com/office/drawing/2014/main" xmlns="" id="{B89FFE28-AD15-4FA1-FDD1-8DF6F4744923}"/>
                 </a:ext>
               </a:extLst>
             </p:cNvPr>
@@ -28676,7 +29218,7 @@
             <p:cNvPr id="8" name="Picture 6" descr="Project Cargo Services | CFA">
               <a:extLst>
                 <a:ext uri="{FF2B5EF4-FFF2-40B4-BE49-F238E27FC236}">
-                  <a16:creationId xmlns="" xmlns:a16="http://schemas.microsoft.com/office/drawing/2014/main" id="{A9578F59-39A1-6B09-C1A4-24DA78C49B39}"/>
+                  <a16:creationId xmlns:a16="http://schemas.microsoft.com/office/drawing/2014/main" xmlns="" id="{A9578F59-39A1-6B09-C1A4-24DA78C49B39}"/>
                 </a:ext>
               </a:extLst>
             </p:cNvPr>
@@ -39599,19 +40141,6 @@
                   </a:rPr>
                   <a:t>UNSEGMENTED </a:t>
                 </a:r>
-                <a:endParaRPr kumimoji="0" lang="en-US" altLang="ko-KR" sz="700" b="0" i="0" u="none" strike="noStrike" kern="0" cap="none" spc="0" normalizeH="0" baseline="0" noProof="0" dirty="0" smtClean="0">
-                  <a:ln>
-                    <a:noFill/>
-                  </a:ln>
-                  <a:solidFill>
-                    <a:srgbClr val="212E35"/>
-                  </a:solidFill>
-                  <a:effectLst/>
-                  <a:uLnTx/>
-                  <a:uFillTx/>
-                  <a:latin typeface="+mj-ea"/>
-                  <a:ea typeface="+mj-ea"/>
-                </a:endParaRPr>
               </a:p>
               <a:p>
                 <a:pPr marL="0" marR="0" lvl="0" indent="0" defTabSz="914400" eaLnBrk="1" fontAlgn="auto" latinLnBrk="0" hangingPunct="1">
@@ -39645,23 +40174,7 @@
                     <a:latin typeface="+mj-ea"/>
                     <a:ea typeface="+mj-ea"/>
                   </a:rPr>
-                  <a:t>ALL </a:t>
-                </a:r>
-                <a:r>
-                  <a:rPr kumimoji="0" lang="en-US" altLang="ko-KR" sz="700" b="0" i="0" u="none" strike="noStrike" kern="0" cap="none" spc="0" normalizeH="0" baseline="0" noProof="0" dirty="0" smtClean="0">
-                    <a:ln>
-                      <a:noFill/>
-                    </a:ln>
-                    <a:solidFill>
-                      <a:srgbClr val="212E35"/>
-                    </a:solidFill>
-                    <a:effectLst/>
-                    <a:uLnTx/>
-                    <a:uFillTx/>
-                    <a:latin typeface="+mj-ea"/>
-                    <a:ea typeface="+mj-ea"/>
-                  </a:rPr>
-                  <a:t>NODES; </a:t>
+                  <a:t>ALL NODES; </a:t>
                 </a:r>
                 <a:endParaRPr kumimoji="0" lang="ko-KR" altLang="en-US" sz="700" b="0" i="0" u="none" strike="noStrike" kern="0" cap="none" spc="0" normalizeH="0" baseline="0" noProof="0" dirty="0" err="1" smtClean="0">
                   <a:ln>
@@ -40434,19 +40947,6 @@
                   </a:rPr>
                   <a:t>UNSEGMENTED </a:t>
                 </a:r>
-                <a:endParaRPr kumimoji="0" lang="en-US" altLang="ko-KR" sz="700" b="0" i="0" u="none" strike="noStrike" kern="0" cap="none" spc="0" normalizeH="0" baseline="0" noProof="0" dirty="0" smtClean="0">
-                  <a:ln>
-                    <a:noFill/>
-                  </a:ln>
-                  <a:solidFill>
-                    <a:srgbClr val="212E35"/>
-                  </a:solidFill>
-                  <a:effectLst/>
-                  <a:uLnTx/>
-                  <a:uFillTx/>
-                  <a:latin typeface="+mj-ea"/>
-                  <a:ea typeface="+mj-ea"/>
-                </a:endParaRPr>
               </a:p>
               <a:p>
                 <a:pPr marL="0" marR="0" lvl="0" indent="0" defTabSz="914400" eaLnBrk="1" fontAlgn="auto" latinLnBrk="0" hangingPunct="1">
@@ -41548,19 +42048,6 @@
                   </a:rPr>
                   <a:t>SEGMENTED BY </a:t>
                 </a:r>
-                <a:endParaRPr kumimoji="0" lang="en-US" altLang="ko-KR" sz="700" b="0" i="0" u="none" strike="noStrike" kern="0" cap="none" spc="0" normalizeH="0" baseline="0" noProof="0" dirty="0" smtClean="0">
-                  <a:ln>
-                    <a:noFill/>
-                  </a:ln>
-                  <a:solidFill>
-                    <a:srgbClr val="212E35"/>
-                  </a:solidFill>
-                  <a:effectLst/>
-                  <a:uLnTx/>
-                  <a:uFillTx/>
-                  <a:latin typeface="+mj-ea"/>
-                  <a:ea typeface="+mj-ea"/>
-                </a:endParaRPr>
               </a:p>
               <a:p>
                 <a:pPr marL="0" marR="0" lvl="0" indent="0" defTabSz="914400" eaLnBrk="1" fontAlgn="auto" latinLnBrk="0" hangingPunct="1">
@@ -41594,71 +42081,7 @@
                     <a:latin typeface="+mj-ea"/>
                     <a:ea typeface="+mj-ea"/>
                   </a:rPr>
-                  <a:t>HASH </a:t>
-                </a:r>
-                <a:r>
-                  <a:rPr kumimoji="0" lang="en-US" altLang="ko-KR" sz="700" b="0" i="0" u="none" strike="noStrike" kern="0" cap="none" spc="0" normalizeH="0" baseline="0" noProof="0" dirty="0" smtClean="0">
-                    <a:ln>
-                      <a:noFill/>
-                    </a:ln>
-                    <a:solidFill>
-                      <a:srgbClr val="212E35"/>
-                    </a:solidFill>
-                    <a:effectLst/>
-                    <a:uLnTx/>
-                    <a:uFillTx/>
-                    <a:latin typeface="+mj-ea"/>
-                    <a:ea typeface="+mj-ea"/>
-                  </a:rPr>
-                  <a:t>(C1,C2) </a:t>
-                </a:r>
-                <a:r>
-                  <a:rPr kumimoji="0" lang="en-US" altLang="ko-KR" sz="700" b="0" i="0" u="none" strike="noStrike" kern="0" cap="none" spc="0" normalizeH="0" baseline="0" noProof="0" dirty="0" smtClean="0">
-                    <a:ln>
-                      <a:noFill/>
-                    </a:ln>
-                    <a:solidFill>
-                      <a:srgbClr val="212E35"/>
-                    </a:solidFill>
-                    <a:effectLst/>
-                    <a:uLnTx/>
-                    <a:uFillTx/>
-                    <a:latin typeface="+mj-ea"/>
-                    <a:ea typeface="+mj-ea"/>
-                  </a:rPr>
-                  <a:t>ALL </a:t>
-                </a:r>
-                <a:r>
-                  <a:rPr kumimoji="0" lang="en-US" altLang="ko-KR" sz="700" b="0" i="0" u="none" strike="noStrike" kern="0" cap="none" spc="0" normalizeH="0" baseline="0" noProof="0" dirty="0" smtClean="0">
-                    <a:ln>
-                      <a:noFill/>
-                    </a:ln>
-                    <a:solidFill>
-                      <a:srgbClr val="212E35"/>
-                    </a:solidFill>
-                    <a:effectLst/>
-                    <a:uLnTx/>
-                    <a:uFillTx/>
-                    <a:latin typeface="+mj-ea"/>
-                    <a:ea typeface="+mj-ea"/>
-                  </a:rPr>
-                  <a:t>NODES </a:t>
-                </a:r>
-                <a:r>
-                  <a:rPr kumimoji="0" lang="en-US" altLang="ko-KR" sz="700" b="0" i="0" u="none" strike="noStrike" kern="0" cap="none" spc="0" normalizeH="0" baseline="0" noProof="0" dirty="0" smtClean="0">
-                    <a:ln>
-                      <a:noFill/>
-                    </a:ln>
-                    <a:solidFill>
-                      <a:srgbClr val="212E35"/>
-                    </a:solidFill>
-                    <a:effectLst/>
-                    <a:uLnTx/>
-                    <a:uFillTx/>
-                    <a:latin typeface="+mj-ea"/>
-                    <a:ea typeface="+mj-ea"/>
-                  </a:rPr>
-                  <a:t>;</a:t>
+                  <a:t>HASH (C1,C2) ALL NODES ;</a:t>
                 </a:r>
                 <a:endParaRPr kumimoji="0" lang="ko-KR" altLang="en-US" sz="700" b="0" i="0" u="none" strike="noStrike" kern="0" cap="none" spc="0" normalizeH="0" baseline="0" noProof="0" dirty="0" err="1" smtClean="0">
                   <a:ln>
@@ -43444,7 +43867,7 @@
     </p:spTree>
     <p:extLst>
       <p:ext uri="{BB962C8B-B14F-4D97-AF65-F5344CB8AC3E}">
-        <p14:creationId xmlns:p14="http://schemas.microsoft.com/office/powerpoint/2010/main" val="527370829"/>
+        <p14:creationId xmlns:p14="http://schemas.microsoft.com/office/powerpoint/2010/main" val="1622312844"/>
       </p:ext>
     </p:extLst>
   </p:cSld>

--- a/99ref/버티카_blog.pptx
+++ b/99ref/버티카_blog.pptx
@@ -18211,7 +18211,7 @@
           <p:cNvPr id="5" name="그림 4">
             <a:extLst>
               <a:ext uri="{FF2B5EF4-FFF2-40B4-BE49-F238E27FC236}">
-                <a16:creationId xmlns:a16="http://schemas.microsoft.com/office/drawing/2014/main" xmlns="" id="{F25A3B3A-32C8-4401-A476-E8CCEB3258D5}"/>
+                <a16:creationId xmlns="" xmlns:a16="http://schemas.microsoft.com/office/drawing/2014/main" id="{F25A3B3A-32C8-4401-A476-E8CCEB3258D5}"/>
               </a:ext>
             </a:extLst>
           </p:cNvPr>
@@ -18254,7 +18254,7 @@
           <p:cNvPr id="6" name="Picture 4">
             <a:extLst>
               <a:ext uri="{FF2B5EF4-FFF2-40B4-BE49-F238E27FC236}">
-                <a16:creationId xmlns:a16="http://schemas.microsoft.com/office/drawing/2014/main" xmlns="" id="{051FB3A4-C7F9-45D0-A73B-557A6E1C4FDF}"/>
+                <a16:creationId xmlns="" xmlns:a16="http://schemas.microsoft.com/office/drawing/2014/main" id="{051FB3A4-C7F9-45D0-A73B-557A6E1C4FDF}"/>
               </a:ext>
             </a:extLst>
           </p:cNvPr>
@@ -19298,3822 +19298,3783 @@
           </a:fontRef>
         </p:style>
       </p:cxnSp>
+      <p:sp>
+        <p:nvSpPr>
+          <p:cNvPr id="23" name="직사각형 22"/>
+          <p:cNvSpPr/>
+          <p:nvPr/>
+        </p:nvSpPr>
+        <p:spPr>
+          <a:xfrm>
+            <a:off x="7600950" y="3474720"/>
+            <a:ext cx="948690" cy="845820"/>
+          </a:xfrm>
+          <a:prstGeom prst="rect">
+            <a:avLst/>
+          </a:prstGeom>
+          <a:solidFill>
+            <a:schemeClr val="bg1"/>
+          </a:solidFill>
+          <a:ln>
+            <a:noFill/>
+          </a:ln>
+        </p:spPr>
+        <p:style>
+          <a:lnRef idx="2">
+            <a:schemeClr val="accent1">
+              <a:shade val="50000"/>
+            </a:schemeClr>
+          </a:lnRef>
+          <a:fillRef idx="1">
+            <a:schemeClr val="accent1"/>
+          </a:fillRef>
+          <a:effectRef idx="0">
+            <a:schemeClr val="accent1"/>
+          </a:effectRef>
+          <a:fontRef idx="minor">
+            <a:schemeClr val="lt1"/>
+          </a:fontRef>
+        </p:style>
+        <p:txBody>
+          <a:bodyPr rtlCol="0" anchor="ctr"/>
+          <a:lstStyle/>
+          <a:p>
+            <a:pPr algn="ctr"/>
+            <a:endParaRPr lang="ko-KR" altLang="en-US"/>
+          </a:p>
+        </p:txBody>
+      </p:sp>
       <p:grpSp>
         <p:nvGrpSpPr>
-          <p:cNvPr id="51" name="그룹 50"/>
+          <p:cNvPr id="15" name="그룹 14"/>
           <p:cNvGrpSpPr/>
           <p:nvPr/>
         </p:nvGrpSpPr>
         <p:grpSpPr>
           <a:xfrm>
-            <a:off x="7481295" y="3368040"/>
-            <a:ext cx="1188000" cy="1059180"/>
-            <a:chOff x="7572919" y="3368040"/>
-            <a:chExt cx="1188000" cy="1059180"/>
+            <a:off x="8100688" y="3600514"/>
+            <a:ext cx="420188" cy="628751"/>
+            <a:chOff x="9486498" y="3832860"/>
+            <a:chExt cx="526182" cy="785151"/>
           </a:xfrm>
         </p:grpSpPr>
         <p:sp>
           <p:nvSpPr>
-            <p:cNvPr id="23" name="직사각형 22"/>
-            <p:cNvSpPr/>
+            <p:cNvPr id="34" name="Freeform 117">
+              <a:extLst>
+                <a:ext uri="{FF2B5EF4-FFF2-40B4-BE49-F238E27FC236}">
+                  <a16:creationId xmlns="" xmlns:a16="http://schemas.microsoft.com/office/drawing/2014/main" id="{ACB5F511-0467-4F80-BCD6-94BAC36031EE}"/>
+                </a:ext>
+              </a:extLst>
+            </p:cNvPr>
+            <p:cNvSpPr>
+              <a:spLocks noChangeArrowheads="1"/>
+            </p:cNvSpPr>
             <p:nvPr/>
           </p:nvSpPr>
-          <p:spPr>
+          <p:spPr bwMode="auto">
             <a:xfrm>
-              <a:off x="7572919" y="3368040"/>
-              <a:ext cx="1188000" cy="1059180"/>
+              <a:off x="9799787" y="3889214"/>
+              <a:ext cx="81940" cy="92051"/>
             </a:xfrm>
-            <a:prstGeom prst="rect">
+            <a:custGeom>
               <a:avLst/>
-            </a:prstGeom>
+              <a:gdLst>
+                <a:gd name="T0" fmla="*/ 39 w 76"/>
+                <a:gd name="T1" fmla="*/ 0 h 76"/>
+                <a:gd name="T2" fmla="*/ 39 w 76"/>
+                <a:gd name="T3" fmla="*/ 0 h 76"/>
+                <a:gd name="T4" fmla="*/ 0 w 76"/>
+                <a:gd name="T5" fmla="*/ 38 h 76"/>
+                <a:gd name="T6" fmla="*/ 39 w 76"/>
+                <a:gd name="T7" fmla="*/ 75 h 76"/>
+                <a:gd name="T8" fmla="*/ 75 w 76"/>
+                <a:gd name="T9" fmla="*/ 38 h 76"/>
+                <a:gd name="T10" fmla="*/ 39 w 76"/>
+                <a:gd name="T11" fmla="*/ 0 h 76"/>
+                <a:gd name="T12" fmla="*/ 39 w 76"/>
+                <a:gd name="T13" fmla="*/ 54 h 76"/>
+                <a:gd name="T14" fmla="*/ 39 w 76"/>
+                <a:gd name="T15" fmla="*/ 54 h 76"/>
+                <a:gd name="T16" fmla="*/ 22 w 76"/>
+                <a:gd name="T17" fmla="*/ 38 h 76"/>
+                <a:gd name="T18" fmla="*/ 39 w 76"/>
+                <a:gd name="T19" fmla="*/ 22 h 76"/>
+                <a:gd name="T20" fmla="*/ 53 w 76"/>
+                <a:gd name="T21" fmla="*/ 38 h 76"/>
+                <a:gd name="T22" fmla="*/ 39 w 76"/>
+                <a:gd name="T23" fmla="*/ 54 h 76"/>
+              </a:gdLst>
+              <a:ahLst/>
+              <a:cxnLst>
+                <a:cxn ang="0">
+                  <a:pos x="T0" y="T1"/>
+                </a:cxn>
+                <a:cxn ang="0">
+                  <a:pos x="T2" y="T3"/>
+                </a:cxn>
+                <a:cxn ang="0">
+                  <a:pos x="T4" y="T5"/>
+                </a:cxn>
+                <a:cxn ang="0">
+                  <a:pos x="T6" y="T7"/>
+                </a:cxn>
+                <a:cxn ang="0">
+                  <a:pos x="T8" y="T9"/>
+                </a:cxn>
+                <a:cxn ang="0">
+                  <a:pos x="T10" y="T11"/>
+                </a:cxn>
+                <a:cxn ang="0">
+                  <a:pos x="T12" y="T13"/>
+                </a:cxn>
+                <a:cxn ang="0">
+                  <a:pos x="T14" y="T15"/>
+                </a:cxn>
+                <a:cxn ang="0">
+                  <a:pos x="T16" y="T17"/>
+                </a:cxn>
+                <a:cxn ang="0">
+                  <a:pos x="T18" y="T19"/>
+                </a:cxn>
+                <a:cxn ang="0">
+                  <a:pos x="T20" y="T21"/>
+                </a:cxn>
+                <a:cxn ang="0">
+                  <a:pos x="T22" y="T23"/>
+                </a:cxn>
+              </a:cxnLst>
+              <a:rect l="0" t="0" r="r" b="b"/>
+              <a:pathLst>
+                <a:path w="76" h="76">
+                  <a:moveTo>
+                    <a:pt x="39" y="0"/>
+                  </a:moveTo>
+                  <a:lnTo>
+                    <a:pt x="39" y="0"/>
+                  </a:lnTo>
+                  <a:cubicBezTo>
+                    <a:pt x="18" y="0"/>
+                    <a:pt x="0" y="17"/>
+                    <a:pt x="0" y="38"/>
+                  </a:cubicBezTo>
+                  <a:cubicBezTo>
+                    <a:pt x="0" y="58"/>
+                    <a:pt x="18" y="75"/>
+                    <a:pt x="39" y="75"/>
+                  </a:cubicBezTo>
+                  <a:cubicBezTo>
+                    <a:pt x="59" y="75"/>
+                    <a:pt x="75" y="58"/>
+                    <a:pt x="75" y="38"/>
+                  </a:cubicBezTo>
+                  <a:cubicBezTo>
+                    <a:pt x="75" y="17"/>
+                    <a:pt x="59" y="0"/>
+                    <a:pt x="39" y="0"/>
+                  </a:cubicBezTo>
+                  <a:close/>
+                  <a:moveTo>
+                    <a:pt x="39" y="54"/>
+                  </a:moveTo>
+                  <a:lnTo>
+                    <a:pt x="39" y="54"/>
+                  </a:lnTo>
+                  <a:cubicBezTo>
+                    <a:pt x="29" y="54"/>
+                    <a:pt x="22" y="47"/>
+                    <a:pt x="22" y="38"/>
+                  </a:cubicBezTo>
+                  <a:cubicBezTo>
+                    <a:pt x="22" y="28"/>
+                    <a:pt x="29" y="22"/>
+                    <a:pt x="39" y="22"/>
+                  </a:cubicBezTo>
+                  <a:cubicBezTo>
+                    <a:pt x="47" y="22"/>
+                    <a:pt x="53" y="28"/>
+                    <a:pt x="53" y="38"/>
+                  </a:cubicBezTo>
+                  <a:cubicBezTo>
+                    <a:pt x="53" y="47"/>
+                    <a:pt x="47" y="54"/>
+                    <a:pt x="39" y="54"/>
+                  </a:cubicBezTo>
+                  <a:close/>
+                </a:path>
+              </a:pathLst>
+            </a:custGeom>
             <a:solidFill>
               <a:schemeClr val="bg1"/>
             </a:solidFill>
-            <a:ln>
-              <a:noFill/>
+            <a:ln w="19050" cap="flat">
+              <a:solidFill>
+                <a:srgbClr val="98B6FE"/>
+              </a:solidFill>
+              <a:bevel/>
+              <a:headEnd/>
+              <a:tailEnd/>
             </a:ln>
+            <a:effectLst/>
+            <a:extLst>
+              <a:ext uri="{AF507438-7753-43E0-B8FC-AC1667EBCBE1}">
+                <a14:hiddenEffects xmlns:a14="http://schemas.microsoft.com/office/drawing/2010/main">
+                  <a:effectLst>
+                    <a:outerShdw blurRad="63500" dist="38099" dir="2700000" algn="ctr" rotWithShape="0">
+                      <a:srgbClr val="000000">
+                        <a:alpha val="74998"/>
+                      </a:srgbClr>
+                    </a:outerShdw>
+                  </a:effectLst>
+                </a14:hiddenEffects>
+              </a:ext>
+            </a:extLst>
           </p:spPr>
-          <p:style>
-            <a:lnRef idx="2">
-              <a:schemeClr val="accent1">
-                <a:shade val="50000"/>
-              </a:schemeClr>
-            </a:lnRef>
-            <a:fillRef idx="1">
-              <a:schemeClr val="accent1"/>
-            </a:fillRef>
-            <a:effectRef idx="0">
-              <a:schemeClr val="accent1"/>
-            </a:effectRef>
-            <a:fontRef idx="minor">
-              <a:schemeClr val="lt1"/>
-            </a:fontRef>
-          </p:style>
           <p:txBody>
-            <a:bodyPr rtlCol="0" anchor="ctr"/>
+            <a:bodyPr wrap="none" anchor="ctr"/>
             <a:lstStyle/>
             <a:p>
-              <a:pPr algn="ctr"/>
-              <a:endParaRPr lang="ko-KR" altLang="en-US"/>
+              <a:endParaRPr lang="en-US" sz="964"/>
             </a:p>
           </p:txBody>
         </p:sp>
-        <p:grpSp>
-          <p:nvGrpSpPr>
-            <p:cNvPr id="15" name="그룹 14"/>
-            <p:cNvGrpSpPr/>
-            <p:nvPr/>
-          </p:nvGrpSpPr>
-          <p:grpSpPr>
-            <a:xfrm>
-              <a:off x="8198718" y="3525566"/>
-              <a:ext cx="526182" cy="787355"/>
-              <a:chOff x="9486498" y="3832860"/>
-              <a:chExt cx="526182" cy="785151"/>
-            </a:xfrm>
-          </p:grpSpPr>
-          <p:sp>
-            <p:nvSpPr>
-              <p:cNvPr id="34" name="Freeform 117">
-                <a:extLst>
-                  <a:ext uri="{FF2B5EF4-FFF2-40B4-BE49-F238E27FC236}">
-                    <a16:creationId xmlns:a16="http://schemas.microsoft.com/office/drawing/2014/main" xmlns="" id="{ACB5F511-0467-4F80-BCD6-94BAC36031EE}"/>
-                  </a:ext>
-                </a:extLst>
-              </p:cNvPr>
-              <p:cNvSpPr>
-                <a:spLocks noChangeArrowheads="1"/>
-              </p:cNvSpPr>
-              <p:nvPr/>
-            </p:nvSpPr>
-            <p:spPr bwMode="auto">
-              <a:xfrm>
-                <a:off x="9799787" y="3889214"/>
-                <a:ext cx="81940" cy="92051"/>
-              </a:xfrm>
-              <a:custGeom>
-                <a:avLst/>
-                <a:gdLst>
-                  <a:gd name="T0" fmla="*/ 39 w 76"/>
-                  <a:gd name="T1" fmla="*/ 0 h 76"/>
-                  <a:gd name="T2" fmla="*/ 39 w 76"/>
-                  <a:gd name="T3" fmla="*/ 0 h 76"/>
-                  <a:gd name="T4" fmla="*/ 0 w 76"/>
-                  <a:gd name="T5" fmla="*/ 38 h 76"/>
-                  <a:gd name="T6" fmla="*/ 39 w 76"/>
-                  <a:gd name="T7" fmla="*/ 75 h 76"/>
-                  <a:gd name="T8" fmla="*/ 75 w 76"/>
-                  <a:gd name="T9" fmla="*/ 38 h 76"/>
-                  <a:gd name="T10" fmla="*/ 39 w 76"/>
-                  <a:gd name="T11" fmla="*/ 0 h 76"/>
-                  <a:gd name="T12" fmla="*/ 39 w 76"/>
-                  <a:gd name="T13" fmla="*/ 54 h 76"/>
-                  <a:gd name="T14" fmla="*/ 39 w 76"/>
-                  <a:gd name="T15" fmla="*/ 54 h 76"/>
-                  <a:gd name="T16" fmla="*/ 22 w 76"/>
-                  <a:gd name="T17" fmla="*/ 38 h 76"/>
-                  <a:gd name="T18" fmla="*/ 39 w 76"/>
-                  <a:gd name="T19" fmla="*/ 22 h 76"/>
-                  <a:gd name="T20" fmla="*/ 53 w 76"/>
-                  <a:gd name="T21" fmla="*/ 38 h 76"/>
-                  <a:gd name="T22" fmla="*/ 39 w 76"/>
-                  <a:gd name="T23" fmla="*/ 54 h 76"/>
-                </a:gdLst>
-                <a:ahLst/>
-                <a:cxnLst>
-                  <a:cxn ang="0">
-                    <a:pos x="T0" y="T1"/>
-                  </a:cxn>
-                  <a:cxn ang="0">
-                    <a:pos x="T2" y="T3"/>
-                  </a:cxn>
-                  <a:cxn ang="0">
-                    <a:pos x="T4" y="T5"/>
-                  </a:cxn>
-                  <a:cxn ang="0">
-                    <a:pos x="T6" y="T7"/>
-                  </a:cxn>
-                  <a:cxn ang="0">
-                    <a:pos x="T8" y="T9"/>
-                  </a:cxn>
-                  <a:cxn ang="0">
-                    <a:pos x="T10" y="T11"/>
-                  </a:cxn>
-                  <a:cxn ang="0">
-                    <a:pos x="T12" y="T13"/>
-                  </a:cxn>
-                  <a:cxn ang="0">
-                    <a:pos x="T14" y="T15"/>
-                  </a:cxn>
-                  <a:cxn ang="0">
-                    <a:pos x="T16" y="T17"/>
-                  </a:cxn>
-                  <a:cxn ang="0">
-                    <a:pos x="T18" y="T19"/>
-                  </a:cxn>
-                  <a:cxn ang="0">
-                    <a:pos x="T20" y="T21"/>
-                  </a:cxn>
-                  <a:cxn ang="0">
-                    <a:pos x="T22" y="T23"/>
-                  </a:cxn>
-                </a:cxnLst>
-                <a:rect l="0" t="0" r="r" b="b"/>
-                <a:pathLst>
-                  <a:path w="76" h="76">
-                    <a:moveTo>
-                      <a:pt x="39" y="0"/>
-                    </a:moveTo>
-                    <a:lnTo>
-                      <a:pt x="39" y="0"/>
-                    </a:lnTo>
-                    <a:cubicBezTo>
-                      <a:pt x="18" y="0"/>
-                      <a:pt x="0" y="17"/>
-                      <a:pt x="0" y="38"/>
-                    </a:cubicBezTo>
-                    <a:cubicBezTo>
-                      <a:pt x="0" y="58"/>
-                      <a:pt x="18" y="75"/>
-                      <a:pt x="39" y="75"/>
-                    </a:cubicBezTo>
-                    <a:cubicBezTo>
-                      <a:pt x="59" y="75"/>
-                      <a:pt x="75" y="58"/>
-                      <a:pt x="75" y="38"/>
-                    </a:cubicBezTo>
-                    <a:cubicBezTo>
-                      <a:pt x="75" y="17"/>
-                      <a:pt x="59" y="0"/>
-                      <a:pt x="39" y="0"/>
-                    </a:cubicBezTo>
-                    <a:close/>
-                    <a:moveTo>
-                      <a:pt x="39" y="54"/>
-                    </a:moveTo>
-                    <a:lnTo>
-                      <a:pt x="39" y="54"/>
-                    </a:lnTo>
-                    <a:cubicBezTo>
-                      <a:pt x="29" y="54"/>
-                      <a:pt x="22" y="47"/>
-                      <a:pt x="22" y="38"/>
-                    </a:cubicBezTo>
-                    <a:cubicBezTo>
-                      <a:pt x="22" y="28"/>
-                      <a:pt x="29" y="22"/>
-                      <a:pt x="39" y="22"/>
-                    </a:cubicBezTo>
-                    <a:cubicBezTo>
-                      <a:pt x="47" y="22"/>
-                      <a:pt x="53" y="28"/>
-                      <a:pt x="53" y="38"/>
-                    </a:cubicBezTo>
-                    <a:cubicBezTo>
-                      <a:pt x="53" y="47"/>
-                      <a:pt x="47" y="54"/>
-                      <a:pt x="39" y="54"/>
-                    </a:cubicBezTo>
-                    <a:close/>
-                  </a:path>
-                </a:pathLst>
-              </a:custGeom>
-              <a:solidFill>
-                <a:schemeClr val="bg1"/>
-              </a:solidFill>
-              <a:ln w="19050" cap="flat">
-                <a:solidFill>
-                  <a:srgbClr val="618153"/>
-                </a:solidFill>
-                <a:bevel/>
-                <a:headEnd/>
-                <a:tailEnd/>
-              </a:ln>
-              <a:effectLst/>
-              <a:extLst>
-                <a:ext uri="{AF507438-7753-43E0-B8FC-AC1667EBCBE1}">
-                  <a14:hiddenEffects xmlns:a14="http://schemas.microsoft.com/office/drawing/2010/main">
-                    <a:effectLst>
-                      <a:outerShdw blurRad="63500" dist="38099" dir="2700000" algn="ctr" rotWithShape="0">
-                        <a:srgbClr val="000000">
-                          <a:alpha val="74998"/>
-                        </a:srgbClr>
-                      </a:outerShdw>
-                    </a:effectLst>
-                  </a14:hiddenEffects>
-                </a:ext>
-              </a:extLst>
-            </p:spPr>
-            <p:txBody>
-              <a:bodyPr wrap="none" anchor="ctr"/>
-              <a:lstStyle/>
-              <a:p>
-                <a:endParaRPr lang="en-US" sz="964"/>
-              </a:p>
-            </p:txBody>
-          </p:sp>
-          <p:sp>
-            <p:nvSpPr>
-              <p:cNvPr id="35" name="Freeform 118">
-                <a:extLst>
-                  <a:ext uri="{FF2B5EF4-FFF2-40B4-BE49-F238E27FC236}">
-                    <a16:creationId xmlns:a16="http://schemas.microsoft.com/office/drawing/2014/main" xmlns="" id="{8F3B04C3-D501-4070-B0AC-5FB6C26F8066}"/>
-                  </a:ext>
-                </a:extLst>
-              </p:cNvPr>
-              <p:cNvSpPr>
-                <a:spLocks noChangeArrowheads="1"/>
-              </p:cNvSpPr>
-              <p:nvPr/>
-            </p:nvSpPr>
-            <p:spPr bwMode="auto">
-              <a:xfrm>
-                <a:off x="9560812" y="3912883"/>
-                <a:ext cx="216000" cy="36000"/>
-              </a:xfrm>
-              <a:custGeom>
-                <a:avLst/>
-                <a:gdLst>
-                  <a:gd name="T0" fmla="*/ 160 w 171"/>
-                  <a:gd name="T1" fmla="*/ 0 h 23"/>
-                  <a:gd name="T2" fmla="*/ 160 w 171"/>
-                  <a:gd name="T3" fmla="*/ 0 h 23"/>
-                  <a:gd name="T4" fmla="*/ 11 w 171"/>
-                  <a:gd name="T5" fmla="*/ 0 h 23"/>
-                  <a:gd name="T6" fmla="*/ 0 w 171"/>
-                  <a:gd name="T7" fmla="*/ 10 h 23"/>
-                  <a:gd name="T8" fmla="*/ 11 w 171"/>
-                  <a:gd name="T9" fmla="*/ 22 h 23"/>
-                  <a:gd name="T10" fmla="*/ 160 w 171"/>
-                  <a:gd name="T11" fmla="*/ 22 h 23"/>
-                  <a:gd name="T12" fmla="*/ 170 w 171"/>
-                  <a:gd name="T13" fmla="*/ 10 h 23"/>
-                  <a:gd name="T14" fmla="*/ 160 w 171"/>
-                  <a:gd name="T15" fmla="*/ 0 h 23"/>
-                </a:gdLst>
-                <a:ahLst/>
-                <a:cxnLst>
-                  <a:cxn ang="0">
-                    <a:pos x="T0" y="T1"/>
-                  </a:cxn>
-                  <a:cxn ang="0">
-                    <a:pos x="T2" y="T3"/>
-                  </a:cxn>
-                  <a:cxn ang="0">
-                    <a:pos x="T4" y="T5"/>
-                  </a:cxn>
-                  <a:cxn ang="0">
-                    <a:pos x="T6" y="T7"/>
-                  </a:cxn>
-                  <a:cxn ang="0">
-                    <a:pos x="T8" y="T9"/>
-                  </a:cxn>
-                  <a:cxn ang="0">
-                    <a:pos x="T10" y="T11"/>
-                  </a:cxn>
-                  <a:cxn ang="0">
-                    <a:pos x="T12" y="T13"/>
-                  </a:cxn>
-                  <a:cxn ang="0">
-                    <a:pos x="T14" y="T15"/>
-                  </a:cxn>
-                </a:cxnLst>
-                <a:rect l="0" t="0" r="r" b="b"/>
-                <a:pathLst>
-                  <a:path w="171" h="23">
-                    <a:moveTo>
-                      <a:pt x="160" y="0"/>
-                    </a:moveTo>
-                    <a:lnTo>
-                      <a:pt x="160" y="0"/>
-                    </a:lnTo>
-                    <a:cubicBezTo>
-                      <a:pt x="11" y="0"/>
-                      <a:pt x="11" y="0"/>
-                      <a:pt x="11" y="0"/>
-                    </a:cubicBezTo>
-                    <a:cubicBezTo>
-                      <a:pt x="4" y="0"/>
-                      <a:pt x="0" y="4"/>
-                      <a:pt x="0" y="10"/>
-                    </a:cubicBezTo>
-                    <a:cubicBezTo>
-                      <a:pt x="0" y="17"/>
-                      <a:pt x="4" y="22"/>
-                      <a:pt x="11" y="22"/>
-                    </a:cubicBezTo>
-                    <a:cubicBezTo>
-                      <a:pt x="160" y="22"/>
-                      <a:pt x="160" y="22"/>
-                      <a:pt x="160" y="22"/>
-                    </a:cubicBezTo>
-                    <a:cubicBezTo>
-                      <a:pt x="166" y="22"/>
-                      <a:pt x="170" y="17"/>
-                      <a:pt x="170" y="10"/>
-                    </a:cubicBezTo>
-                    <a:cubicBezTo>
-                      <a:pt x="170" y="4"/>
-                      <a:pt x="166" y="0"/>
-                      <a:pt x="160" y="0"/>
-                    </a:cubicBezTo>
-                  </a:path>
-                </a:pathLst>
-              </a:custGeom>
-              <a:solidFill>
-                <a:schemeClr val="bg1"/>
-              </a:solidFill>
-              <a:ln w="19050" cap="flat">
-                <a:solidFill>
-                  <a:srgbClr val="618153"/>
-                </a:solidFill>
-                <a:bevel/>
-                <a:headEnd/>
-                <a:tailEnd/>
-              </a:ln>
-              <a:effectLst/>
-              <a:extLst>
-                <a:ext uri="{AF507438-7753-43E0-B8FC-AC1667EBCBE1}">
-                  <a14:hiddenEffects xmlns:a14="http://schemas.microsoft.com/office/drawing/2010/main">
-                    <a:effectLst>
-                      <a:outerShdw blurRad="63500" dist="38099" dir="2700000" algn="ctr" rotWithShape="0">
-                        <a:srgbClr val="000000">
-                          <a:alpha val="74998"/>
-                        </a:srgbClr>
-                      </a:outerShdw>
-                    </a:effectLst>
-                  </a14:hiddenEffects>
-                </a:ext>
-              </a:extLst>
-            </p:spPr>
-            <p:txBody>
-              <a:bodyPr wrap="none" anchor="ctr"/>
-              <a:lstStyle/>
-              <a:p>
-                <a:endParaRPr lang="en-US" sz="964"/>
-              </a:p>
-            </p:txBody>
-          </p:sp>
-          <p:sp>
-            <p:nvSpPr>
-              <p:cNvPr id="36" name="Freeform 119">
-                <a:extLst>
-                  <a:ext uri="{FF2B5EF4-FFF2-40B4-BE49-F238E27FC236}">
-                    <a16:creationId xmlns:a16="http://schemas.microsoft.com/office/drawing/2014/main" xmlns="" id="{36E9553A-4692-4D5B-A665-94CC09C4A62F}"/>
-                  </a:ext>
-                </a:extLst>
-              </p:cNvPr>
-              <p:cNvSpPr>
-                <a:spLocks noChangeArrowheads="1"/>
-              </p:cNvSpPr>
-              <p:nvPr/>
-            </p:nvSpPr>
-            <p:spPr bwMode="auto">
-              <a:xfrm>
-                <a:off x="9799787" y="4053464"/>
-                <a:ext cx="81940" cy="92051"/>
-              </a:xfrm>
-              <a:custGeom>
-                <a:avLst/>
-                <a:gdLst>
-                  <a:gd name="T0" fmla="*/ 39 w 76"/>
-                  <a:gd name="T1" fmla="*/ 0 h 75"/>
-                  <a:gd name="T2" fmla="*/ 39 w 76"/>
-                  <a:gd name="T3" fmla="*/ 0 h 75"/>
-                  <a:gd name="T4" fmla="*/ 0 w 76"/>
-                  <a:gd name="T5" fmla="*/ 37 h 75"/>
-                  <a:gd name="T6" fmla="*/ 39 w 76"/>
-                  <a:gd name="T7" fmla="*/ 74 h 75"/>
-                  <a:gd name="T8" fmla="*/ 75 w 76"/>
-                  <a:gd name="T9" fmla="*/ 37 h 75"/>
-                  <a:gd name="T10" fmla="*/ 39 w 76"/>
-                  <a:gd name="T11" fmla="*/ 0 h 75"/>
-                  <a:gd name="T12" fmla="*/ 39 w 76"/>
-                  <a:gd name="T13" fmla="*/ 53 h 75"/>
-                  <a:gd name="T14" fmla="*/ 39 w 76"/>
-                  <a:gd name="T15" fmla="*/ 53 h 75"/>
-                  <a:gd name="T16" fmla="*/ 22 w 76"/>
-                  <a:gd name="T17" fmla="*/ 37 h 75"/>
-                  <a:gd name="T18" fmla="*/ 39 w 76"/>
-                  <a:gd name="T19" fmla="*/ 21 h 75"/>
-                  <a:gd name="T20" fmla="*/ 53 w 76"/>
-                  <a:gd name="T21" fmla="*/ 37 h 75"/>
-                  <a:gd name="T22" fmla="*/ 39 w 76"/>
-                  <a:gd name="T23" fmla="*/ 53 h 75"/>
-                </a:gdLst>
-                <a:ahLst/>
-                <a:cxnLst>
-                  <a:cxn ang="0">
-                    <a:pos x="T0" y="T1"/>
-                  </a:cxn>
-                  <a:cxn ang="0">
-                    <a:pos x="T2" y="T3"/>
-                  </a:cxn>
-                  <a:cxn ang="0">
-                    <a:pos x="T4" y="T5"/>
-                  </a:cxn>
-                  <a:cxn ang="0">
-                    <a:pos x="T6" y="T7"/>
-                  </a:cxn>
-                  <a:cxn ang="0">
-                    <a:pos x="T8" y="T9"/>
-                  </a:cxn>
-                  <a:cxn ang="0">
-                    <a:pos x="T10" y="T11"/>
-                  </a:cxn>
-                  <a:cxn ang="0">
-                    <a:pos x="T12" y="T13"/>
-                  </a:cxn>
-                  <a:cxn ang="0">
-                    <a:pos x="T14" y="T15"/>
-                  </a:cxn>
-                  <a:cxn ang="0">
-                    <a:pos x="T16" y="T17"/>
-                  </a:cxn>
-                  <a:cxn ang="0">
-                    <a:pos x="T18" y="T19"/>
-                  </a:cxn>
-                  <a:cxn ang="0">
-                    <a:pos x="T20" y="T21"/>
-                  </a:cxn>
-                  <a:cxn ang="0">
-                    <a:pos x="T22" y="T23"/>
-                  </a:cxn>
-                </a:cxnLst>
-                <a:rect l="0" t="0" r="r" b="b"/>
-                <a:pathLst>
-                  <a:path w="76" h="75">
-                    <a:moveTo>
-                      <a:pt x="39" y="0"/>
-                    </a:moveTo>
-                    <a:lnTo>
-                      <a:pt x="39" y="0"/>
-                    </a:lnTo>
-                    <a:cubicBezTo>
-                      <a:pt x="18" y="0"/>
-                      <a:pt x="0" y="16"/>
-                      <a:pt x="0" y="37"/>
-                    </a:cubicBezTo>
-                    <a:cubicBezTo>
-                      <a:pt x="0" y="58"/>
-                      <a:pt x="18" y="74"/>
-                      <a:pt x="39" y="74"/>
-                    </a:cubicBezTo>
-                    <a:cubicBezTo>
-                      <a:pt x="59" y="74"/>
-                      <a:pt x="75" y="58"/>
-                      <a:pt x="75" y="37"/>
-                    </a:cubicBezTo>
-                    <a:cubicBezTo>
-                      <a:pt x="75" y="16"/>
-                      <a:pt x="59" y="0"/>
-                      <a:pt x="39" y="0"/>
-                    </a:cubicBezTo>
-                    <a:close/>
-                    <a:moveTo>
-                      <a:pt x="39" y="53"/>
-                    </a:moveTo>
-                    <a:lnTo>
-                      <a:pt x="39" y="53"/>
-                    </a:lnTo>
-                    <a:cubicBezTo>
-                      <a:pt x="29" y="53"/>
-                      <a:pt x="22" y="46"/>
-                      <a:pt x="22" y="37"/>
-                    </a:cubicBezTo>
-                    <a:cubicBezTo>
-                      <a:pt x="22" y="29"/>
-                      <a:pt x="29" y="21"/>
-                      <a:pt x="39" y="21"/>
-                    </a:cubicBezTo>
-                    <a:cubicBezTo>
-                      <a:pt x="47" y="21"/>
-                      <a:pt x="53" y="29"/>
-                      <a:pt x="53" y="37"/>
-                    </a:cubicBezTo>
-                    <a:cubicBezTo>
-                      <a:pt x="53" y="46"/>
-                      <a:pt x="47" y="53"/>
-                      <a:pt x="39" y="53"/>
-                    </a:cubicBezTo>
-                    <a:close/>
-                  </a:path>
-                </a:pathLst>
-              </a:custGeom>
-              <a:solidFill>
-                <a:schemeClr val="bg1"/>
-              </a:solidFill>
-              <a:ln w="19050" cap="flat">
-                <a:solidFill>
-                  <a:srgbClr val="618153"/>
-                </a:solidFill>
-                <a:bevel/>
-                <a:headEnd/>
-                <a:tailEnd/>
-              </a:ln>
-              <a:effectLst/>
-              <a:extLst>
-                <a:ext uri="{AF507438-7753-43E0-B8FC-AC1667EBCBE1}">
-                  <a14:hiddenEffects xmlns:a14="http://schemas.microsoft.com/office/drawing/2010/main">
-                    <a:effectLst>
-                      <a:outerShdw blurRad="63500" dist="38099" dir="2700000" algn="ctr" rotWithShape="0">
-                        <a:srgbClr val="000000">
-                          <a:alpha val="74998"/>
-                        </a:srgbClr>
-                      </a:outerShdw>
-                    </a:effectLst>
-                  </a14:hiddenEffects>
-                </a:ext>
-              </a:extLst>
-            </p:spPr>
-            <p:txBody>
-              <a:bodyPr wrap="none" anchor="ctr"/>
-              <a:lstStyle/>
-              <a:p>
-                <a:endParaRPr lang="en-US" sz="964"/>
-              </a:p>
-            </p:txBody>
-          </p:sp>
-          <p:sp>
-            <p:nvSpPr>
-              <p:cNvPr id="37" name="Freeform 120">
-                <a:extLst>
-                  <a:ext uri="{FF2B5EF4-FFF2-40B4-BE49-F238E27FC236}">
-                    <a16:creationId xmlns:a16="http://schemas.microsoft.com/office/drawing/2014/main" xmlns="" id="{936475C6-EBDB-47C8-8ADD-312FB8E3E615}"/>
-                  </a:ext>
-                </a:extLst>
-              </p:cNvPr>
-              <p:cNvSpPr>
-                <a:spLocks noChangeArrowheads="1"/>
-              </p:cNvSpPr>
-              <p:nvPr/>
-            </p:nvSpPr>
-            <p:spPr bwMode="auto">
-              <a:xfrm>
-                <a:off x="9560812" y="4078936"/>
-                <a:ext cx="216000" cy="36000"/>
-              </a:xfrm>
-              <a:custGeom>
-                <a:avLst/>
-                <a:gdLst>
-                  <a:gd name="T0" fmla="*/ 160 w 171"/>
-                  <a:gd name="T1" fmla="*/ 0 h 22"/>
-                  <a:gd name="T2" fmla="*/ 160 w 171"/>
-                  <a:gd name="T3" fmla="*/ 0 h 22"/>
-                  <a:gd name="T4" fmla="*/ 11 w 171"/>
-                  <a:gd name="T5" fmla="*/ 0 h 22"/>
-                  <a:gd name="T6" fmla="*/ 0 w 171"/>
-                  <a:gd name="T7" fmla="*/ 10 h 22"/>
-                  <a:gd name="T8" fmla="*/ 11 w 171"/>
-                  <a:gd name="T9" fmla="*/ 21 h 22"/>
-                  <a:gd name="T10" fmla="*/ 160 w 171"/>
-                  <a:gd name="T11" fmla="*/ 21 h 22"/>
-                  <a:gd name="T12" fmla="*/ 170 w 171"/>
-                  <a:gd name="T13" fmla="*/ 10 h 22"/>
-                  <a:gd name="T14" fmla="*/ 160 w 171"/>
-                  <a:gd name="T15" fmla="*/ 0 h 22"/>
-                </a:gdLst>
-                <a:ahLst/>
-                <a:cxnLst>
-                  <a:cxn ang="0">
-                    <a:pos x="T0" y="T1"/>
-                  </a:cxn>
-                  <a:cxn ang="0">
-                    <a:pos x="T2" y="T3"/>
-                  </a:cxn>
-                  <a:cxn ang="0">
-                    <a:pos x="T4" y="T5"/>
-                  </a:cxn>
-                  <a:cxn ang="0">
-                    <a:pos x="T6" y="T7"/>
-                  </a:cxn>
-                  <a:cxn ang="0">
-                    <a:pos x="T8" y="T9"/>
-                  </a:cxn>
-                  <a:cxn ang="0">
-                    <a:pos x="T10" y="T11"/>
-                  </a:cxn>
-                  <a:cxn ang="0">
-                    <a:pos x="T12" y="T13"/>
-                  </a:cxn>
-                  <a:cxn ang="0">
-                    <a:pos x="T14" y="T15"/>
-                  </a:cxn>
-                </a:cxnLst>
-                <a:rect l="0" t="0" r="r" b="b"/>
-                <a:pathLst>
-                  <a:path w="171" h="22">
-                    <a:moveTo>
-                      <a:pt x="160" y="0"/>
-                    </a:moveTo>
-                    <a:lnTo>
-                      <a:pt x="160" y="0"/>
-                    </a:lnTo>
-                    <a:cubicBezTo>
-                      <a:pt x="11" y="0"/>
-                      <a:pt x="11" y="0"/>
-                      <a:pt x="11" y="0"/>
-                    </a:cubicBezTo>
-                    <a:cubicBezTo>
-                      <a:pt x="4" y="0"/>
-                      <a:pt x="0" y="5"/>
-                      <a:pt x="0" y="10"/>
-                    </a:cubicBezTo>
-                    <a:cubicBezTo>
-                      <a:pt x="0" y="16"/>
-                      <a:pt x="4" y="21"/>
-                      <a:pt x="11" y="21"/>
-                    </a:cubicBezTo>
-                    <a:cubicBezTo>
-                      <a:pt x="160" y="21"/>
-                      <a:pt x="160" y="21"/>
-                      <a:pt x="160" y="21"/>
-                    </a:cubicBezTo>
-                    <a:cubicBezTo>
-                      <a:pt x="166" y="21"/>
-                      <a:pt x="170" y="16"/>
-                      <a:pt x="170" y="10"/>
-                    </a:cubicBezTo>
-                    <a:cubicBezTo>
-                      <a:pt x="170" y="5"/>
-                      <a:pt x="166" y="0"/>
-                      <a:pt x="160" y="0"/>
-                    </a:cubicBezTo>
-                  </a:path>
-                </a:pathLst>
-              </a:custGeom>
-              <a:solidFill>
-                <a:schemeClr val="bg1"/>
-              </a:solidFill>
-              <a:ln w="19050" cap="flat">
-                <a:solidFill>
-                  <a:srgbClr val="618153"/>
-                </a:solidFill>
-                <a:bevel/>
-                <a:headEnd/>
-                <a:tailEnd/>
-              </a:ln>
-              <a:effectLst/>
-              <a:extLst>
-                <a:ext uri="{AF507438-7753-43E0-B8FC-AC1667EBCBE1}">
-                  <a14:hiddenEffects xmlns:a14="http://schemas.microsoft.com/office/drawing/2010/main">
-                    <a:effectLst>
-                      <a:outerShdw blurRad="63500" dist="38099" dir="2700000" algn="ctr" rotWithShape="0">
-                        <a:srgbClr val="000000">
-                          <a:alpha val="74998"/>
-                        </a:srgbClr>
-                      </a:outerShdw>
-                    </a:effectLst>
-                  </a14:hiddenEffects>
-                </a:ext>
-              </a:extLst>
-            </p:spPr>
-            <p:txBody>
-              <a:bodyPr wrap="none" anchor="ctr"/>
-              <a:lstStyle/>
-              <a:p>
-                <a:endParaRPr lang="en-US" sz="964"/>
-              </a:p>
-            </p:txBody>
-          </p:sp>
-          <p:sp>
-            <p:nvSpPr>
-              <p:cNvPr id="38" name="Freeform 121">
-                <a:extLst>
-                  <a:ext uri="{FF2B5EF4-FFF2-40B4-BE49-F238E27FC236}">
-                    <a16:creationId xmlns:a16="http://schemas.microsoft.com/office/drawing/2014/main" xmlns="" id="{169A2FBC-0956-4DC7-ADF8-83D5DC60949B}"/>
-                  </a:ext>
-                </a:extLst>
-              </p:cNvPr>
-              <p:cNvSpPr>
-                <a:spLocks noChangeArrowheads="1"/>
-              </p:cNvSpPr>
-              <p:nvPr/>
-            </p:nvSpPr>
-            <p:spPr bwMode="auto">
-              <a:xfrm>
-                <a:off x="9799787" y="4217714"/>
-                <a:ext cx="81940" cy="92051"/>
-              </a:xfrm>
-              <a:custGeom>
-                <a:avLst/>
-                <a:gdLst>
-                  <a:gd name="T0" fmla="*/ 39 w 76"/>
-                  <a:gd name="T1" fmla="*/ 0 h 76"/>
-                  <a:gd name="T2" fmla="*/ 39 w 76"/>
-                  <a:gd name="T3" fmla="*/ 0 h 76"/>
-                  <a:gd name="T4" fmla="*/ 0 w 76"/>
-                  <a:gd name="T5" fmla="*/ 37 h 76"/>
-                  <a:gd name="T6" fmla="*/ 39 w 76"/>
-                  <a:gd name="T7" fmla="*/ 75 h 76"/>
-                  <a:gd name="T8" fmla="*/ 75 w 76"/>
-                  <a:gd name="T9" fmla="*/ 37 h 76"/>
-                  <a:gd name="T10" fmla="*/ 39 w 76"/>
-                  <a:gd name="T11" fmla="*/ 0 h 76"/>
-                  <a:gd name="T12" fmla="*/ 39 w 76"/>
-                  <a:gd name="T13" fmla="*/ 54 h 76"/>
-                  <a:gd name="T14" fmla="*/ 39 w 76"/>
-                  <a:gd name="T15" fmla="*/ 54 h 76"/>
-                  <a:gd name="T16" fmla="*/ 22 w 76"/>
-                  <a:gd name="T17" fmla="*/ 37 h 76"/>
-                  <a:gd name="T18" fmla="*/ 39 w 76"/>
-                  <a:gd name="T19" fmla="*/ 21 h 76"/>
-                  <a:gd name="T20" fmla="*/ 53 w 76"/>
-                  <a:gd name="T21" fmla="*/ 37 h 76"/>
-                  <a:gd name="T22" fmla="*/ 39 w 76"/>
-                  <a:gd name="T23" fmla="*/ 54 h 76"/>
-                </a:gdLst>
-                <a:ahLst/>
-                <a:cxnLst>
-                  <a:cxn ang="0">
-                    <a:pos x="T0" y="T1"/>
-                  </a:cxn>
-                  <a:cxn ang="0">
-                    <a:pos x="T2" y="T3"/>
-                  </a:cxn>
-                  <a:cxn ang="0">
-                    <a:pos x="T4" y="T5"/>
-                  </a:cxn>
-                  <a:cxn ang="0">
-                    <a:pos x="T6" y="T7"/>
-                  </a:cxn>
-                  <a:cxn ang="0">
-                    <a:pos x="T8" y="T9"/>
-                  </a:cxn>
-                  <a:cxn ang="0">
-                    <a:pos x="T10" y="T11"/>
-                  </a:cxn>
-                  <a:cxn ang="0">
-                    <a:pos x="T12" y="T13"/>
-                  </a:cxn>
-                  <a:cxn ang="0">
-                    <a:pos x="T14" y="T15"/>
-                  </a:cxn>
-                  <a:cxn ang="0">
-                    <a:pos x="T16" y="T17"/>
-                  </a:cxn>
-                  <a:cxn ang="0">
-                    <a:pos x="T18" y="T19"/>
-                  </a:cxn>
-                  <a:cxn ang="0">
-                    <a:pos x="T20" y="T21"/>
-                  </a:cxn>
-                  <a:cxn ang="0">
-                    <a:pos x="T22" y="T23"/>
-                  </a:cxn>
-                </a:cxnLst>
-                <a:rect l="0" t="0" r="r" b="b"/>
-                <a:pathLst>
-                  <a:path w="76" h="76">
-                    <a:moveTo>
-                      <a:pt x="39" y="0"/>
-                    </a:moveTo>
-                    <a:lnTo>
-                      <a:pt x="39" y="0"/>
-                    </a:lnTo>
-                    <a:cubicBezTo>
-                      <a:pt x="18" y="0"/>
-                      <a:pt x="0" y="16"/>
-                      <a:pt x="0" y="37"/>
-                    </a:cubicBezTo>
-                    <a:cubicBezTo>
-                      <a:pt x="0" y="58"/>
-                      <a:pt x="18" y="75"/>
-                      <a:pt x="39" y="75"/>
-                    </a:cubicBezTo>
-                    <a:cubicBezTo>
-                      <a:pt x="59" y="75"/>
-                      <a:pt x="75" y="58"/>
-                      <a:pt x="75" y="37"/>
-                    </a:cubicBezTo>
-                    <a:cubicBezTo>
-                      <a:pt x="75" y="16"/>
-                      <a:pt x="59" y="0"/>
-                      <a:pt x="39" y="0"/>
-                    </a:cubicBezTo>
-                    <a:close/>
-                    <a:moveTo>
-                      <a:pt x="39" y="54"/>
-                    </a:moveTo>
-                    <a:lnTo>
-                      <a:pt x="39" y="54"/>
-                    </a:lnTo>
-                    <a:cubicBezTo>
-                      <a:pt x="29" y="54"/>
-                      <a:pt x="22" y="45"/>
-                      <a:pt x="22" y="37"/>
-                    </a:cubicBezTo>
-                    <a:cubicBezTo>
-                      <a:pt x="22" y="29"/>
-                      <a:pt x="29" y="21"/>
-                      <a:pt x="39" y="21"/>
-                    </a:cubicBezTo>
-                    <a:cubicBezTo>
-                      <a:pt x="47" y="21"/>
-                      <a:pt x="53" y="29"/>
-                      <a:pt x="53" y="37"/>
-                    </a:cubicBezTo>
-                    <a:cubicBezTo>
-                      <a:pt x="53" y="45"/>
-                      <a:pt x="47" y="54"/>
-                      <a:pt x="39" y="54"/>
-                    </a:cubicBezTo>
-                    <a:close/>
-                  </a:path>
-                </a:pathLst>
-              </a:custGeom>
-              <a:solidFill>
-                <a:schemeClr val="bg1"/>
-              </a:solidFill>
-              <a:ln w="19050" cap="flat">
-                <a:solidFill>
-                  <a:srgbClr val="618153"/>
-                </a:solidFill>
-                <a:bevel/>
-                <a:headEnd/>
-                <a:tailEnd/>
-              </a:ln>
-              <a:effectLst/>
-              <a:extLst>
-                <a:ext uri="{AF507438-7753-43E0-B8FC-AC1667EBCBE1}">
-                  <a14:hiddenEffects xmlns:a14="http://schemas.microsoft.com/office/drawing/2010/main">
-                    <a:effectLst>
-                      <a:outerShdw blurRad="63500" dist="38099" dir="2700000" algn="ctr" rotWithShape="0">
-                        <a:srgbClr val="000000">
-                          <a:alpha val="74998"/>
-                        </a:srgbClr>
-                      </a:outerShdw>
-                    </a:effectLst>
-                  </a14:hiddenEffects>
-                </a:ext>
-              </a:extLst>
-            </p:spPr>
-            <p:txBody>
-              <a:bodyPr wrap="none" anchor="ctr"/>
-              <a:lstStyle/>
-              <a:p>
-                <a:endParaRPr lang="en-US" sz="964"/>
-              </a:p>
-            </p:txBody>
-          </p:sp>
-          <p:sp>
-            <p:nvSpPr>
-              <p:cNvPr id="39" name="Freeform 122">
-                <a:extLst>
-                  <a:ext uri="{FF2B5EF4-FFF2-40B4-BE49-F238E27FC236}">
-                    <a16:creationId xmlns:a16="http://schemas.microsoft.com/office/drawing/2014/main" xmlns="" id="{59EA31B7-D7DB-4DBF-B245-2AE82627F51A}"/>
-                  </a:ext>
-                </a:extLst>
-              </p:cNvPr>
-              <p:cNvSpPr>
-                <a:spLocks noChangeArrowheads="1"/>
-              </p:cNvSpPr>
-              <p:nvPr/>
-            </p:nvSpPr>
-            <p:spPr bwMode="auto">
-              <a:xfrm>
-                <a:off x="9560812" y="4244993"/>
-                <a:ext cx="216000" cy="36000"/>
-              </a:xfrm>
-              <a:custGeom>
-                <a:avLst/>
-                <a:gdLst>
-                  <a:gd name="T0" fmla="*/ 160 w 171"/>
-                  <a:gd name="T1" fmla="*/ 0 h 23"/>
-                  <a:gd name="T2" fmla="*/ 160 w 171"/>
-                  <a:gd name="T3" fmla="*/ 0 h 23"/>
-                  <a:gd name="T4" fmla="*/ 11 w 171"/>
-                  <a:gd name="T5" fmla="*/ 0 h 23"/>
-                  <a:gd name="T6" fmla="*/ 0 w 171"/>
-                  <a:gd name="T7" fmla="*/ 10 h 23"/>
-                  <a:gd name="T8" fmla="*/ 11 w 171"/>
-                  <a:gd name="T9" fmla="*/ 22 h 23"/>
-                  <a:gd name="T10" fmla="*/ 160 w 171"/>
-                  <a:gd name="T11" fmla="*/ 22 h 23"/>
-                  <a:gd name="T12" fmla="*/ 170 w 171"/>
-                  <a:gd name="T13" fmla="*/ 10 h 23"/>
-                  <a:gd name="T14" fmla="*/ 160 w 171"/>
-                  <a:gd name="T15" fmla="*/ 0 h 23"/>
-                </a:gdLst>
-                <a:ahLst/>
-                <a:cxnLst>
-                  <a:cxn ang="0">
-                    <a:pos x="T0" y="T1"/>
-                  </a:cxn>
-                  <a:cxn ang="0">
-                    <a:pos x="T2" y="T3"/>
-                  </a:cxn>
-                  <a:cxn ang="0">
-                    <a:pos x="T4" y="T5"/>
-                  </a:cxn>
-                  <a:cxn ang="0">
-                    <a:pos x="T6" y="T7"/>
-                  </a:cxn>
-                  <a:cxn ang="0">
-                    <a:pos x="T8" y="T9"/>
-                  </a:cxn>
-                  <a:cxn ang="0">
-                    <a:pos x="T10" y="T11"/>
-                  </a:cxn>
-                  <a:cxn ang="0">
-                    <a:pos x="T12" y="T13"/>
-                  </a:cxn>
-                  <a:cxn ang="0">
-                    <a:pos x="T14" y="T15"/>
-                  </a:cxn>
-                </a:cxnLst>
-                <a:rect l="0" t="0" r="r" b="b"/>
-                <a:pathLst>
-                  <a:path w="171" h="23">
-                    <a:moveTo>
-                      <a:pt x="160" y="0"/>
-                    </a:moveTo>
-                    <a:lnTo>
-                      <a:pt x="160" y="0"/>
-                    </a:lnTo>
-                    <a:cubicBezTo>
-                      <a:pt x="11" y="0"/>
-                      <a:pt x="11" y="0"/>
-                      <a:pt x="11" y="0"/>
-                    </a:cubicBezTo>
-                    <a:cubicBezTo>
-                      <a:pt x="4" y="0"/>
-                      <a:pt x="0" y="5"/>
-                      <a:pt x="0" y="10"/>
-                    </a:cubicBezTo>
-                    <a:cubicBezTo>
-                      <a:pt x="0" y="18"/>
-                      <a:pt x="4" y="22"/>
-                      <a:pt x="11" y="22"/>
-                    </a:cubicBezTo>
-                    <a:cubicBezTo>
-                      <a:pt x="160" y="22"/>
-                      <a:pt x="160" y="22"/>
-                      <a:pt x="160" y="22"/>
-                    </a:cubicBezTo>
-                    <a:cubicBezTo>
-                      <a:pt x="166" y="22"/>
-                      <a:pt x="170" y="18"/>
-                      <a:pt x="170" y="10"/>
-                    </a:cubicBezTo>
-                    <a:cubicBezTo>
-                      <a:pt x="170" y="5"/>
-                      <a:pt x="166" y="0"/>
-                      <a:pt x="160" y="0"/>
-                    </a:cubicBezTo>
-                  </a:path>
-                </a:pathLst>
-              </a:custGeom>
-              <a:solidFill>
-                <a:schemeClr val="bg1"/>
-              </a:solidFill>
-              <a:ln w="19050" cap="flat">
-                <a:solidFill>
-                  <a:srgbClr val="618153"/>
-                </a:solidFill>
-                <a:bevel/>
-                <a:headEnd/>
-                <a:tailEnd/>
-              </a:ln>
-              <a:effectLst/>
-              <a:extLst>
-                <a:ext uri="{AF507438-7753-43E0-B8FC-AC1667EBCBE1}">
-                  <a14:hiddenEffects xmlns:a14="http://schemas.microsoft.com/office/drawing/2010/main">
-                    <a:effectLst>
-                      <a:outerShdw blurRad="63500" dist="38099" dir="2700000" algn="ctr" rotWithShape="0">
-                        <a:srgbClr val="000000">
-                          <a:alpha val="74998"/>
-                        </a:srgbClr>
-                      </a:outerShdw>
-                    </a:effectLst>
-                  </a14:hiddenEffects>
-                </a:ext>
-              </a:extLst>
-            </p:spPr>
-            <p:txBody>
-              <a:bodyPr wrap="none" anchor="ctr"/>
-              <a:lstStyle/>
-              <a:p>
-                <a:endParaRPr lang="en-US" sz="964"/>
-              </a:p>
-            </p:txBody>
-          </p:sp>
-          <p:sp>
-            <p:nvSpPr>
-              <p:cNvPr id="40" name="Freeform 123">
-                <a:extLst>
-                  <a:ext uri="{FF2B5EF4-FFF2-40B4-BE49-F238E27FC236}">
-                    <a16:creationId xmlns:a16="http://schemas.microsoft.com/office/drawing/2014/main" xmlns="" id="{07115F20-4892-4DCD-A419-4CD8D03F5E62}"/>
-                  </a:ext>
-                </a:extLst>
-              </p:cNvPr>
-              <p:cNvSpPr>
-                <a:spLocks noChangeArrowheads="1"/>
-              </p:cNvSpPr>
-              <p:nvPr/>
-            </p:nvSpPr>
-            <p:spPr bwMode="auto">
-              <a:xfrm>
-                <a:off x="9486498" y="3832860"/>
-                <a:ext cx="526182" cy="785151"/>
-              </a:xfrm>
-              <a:custGeom>
-                <a:avLst/>
-                <a:gdLst>
-                  <a:gd name="T0" fmla="*/ 398 w 426"/>
-                  <a:gd name="T1" fmla="*/ 640 h 641"/>
-                  <a:gd name="T2" fmla="*/ 398 w 426"/>
-                  <a:gd name="T3" fmla="*/ 640 h 641"/>
-                  <a:gd name="T4" fmla="*/ 425 w 426"/>
-                  <a:gd name="T5" fmla="*/ 612 h 641"/>
-                  <a:gd name="T6" fmla="*/ 425 w 426"/>
-                  <a:gd name="T7" fmla="*/ 544 h 641"/>
-                  <a:gd name="T8" fmla="*/ 425 w 426"/>
-                  <a:gd name="T9" fmla="*/ 416 h 641"/>
-                  <a:gd name="T10" fmla="*/ 425 w 426"/>
-                  <a:gd name="T11" fmla="*/ 288 h 641"/>
-                  <a:gd name="T12" fmla="*/ 425 w 426"/>
-                  <a:gd name="T13" fmla="*/ 139 h 641"/>
-                  <a:gd name="T14" fmla="*/ 425 w 426"/>
-                  <a:gd name="T15" fmla="*/ 27 h 641"/>
-                  <a:gd name="T16" fmla="*/ 398 w 426"/>
-                  <a:gd name="T17" fmla="*/ 0 h 641"/>
-                  <a:gd name="T18" fmla="*/ 27 w 426"/>
-                  <a:gd name="T19" fmla="*/ 0 h 641"/>
-                  <a:gd name="T20" fmla="*/ 0 w 426"/>
-                  <a:gd name="T21" fmla="*/ 27 h 641"/>
-                  <a:gd name="T22" fmla="*/ 0 w 426"/>
-                  <a:gd name="T23" fmla="*/ 139 h 641"/>
-                  <a:gd name="T24" fmla="*/ 0 w 426"/>
-                  <a:gd name="T25" fmla="*/ 288 h 641"/>
-                  <a:gd name="T26" fmla="*/ 0 w 426"/>
-                  <a:gd name="T27" fmla="*/ 416 h 641"/>
-                  <a:gd name="T28" fmla="*/ 0 w 426"/>
-                  <a:gd name="T29" fmla="*/ 544 h 641"/>
-                  <a:gd name="T30" fmla="*/ 0 w 426"/>
-                  <a:gd name="T31" fmla="*/ 612 h 641"/>
-                  <a:gd name="T32" fmla="*/ 27 w 426"/>
-                  <a:gd name="T33" fmla="*/ 640 h 641"/>
-                  <a:gd name="T34" fmla="*/ 398 w 426"/>
-                  <a:gd name="T35" fmla="*/ 640 h 641"/>
-                  <a:gd name="T36" fmla="*/ 21 w 426"/>
-                  <a:gd name="T37" fmla="*/ 27 h 641"/>
-                  <a:gd name="T38" fmla="*/ 21 w 426"/>
-                  <a:gd name="T39" fmla="*/ 27 h 641"/>
-                  <a:gd name="T40" fmla="*/ 27 w 426"/>
-                  <a:gd name="T41" fmla="*/ 22 h 641"/>
-                  <a:gd name="T42" fmla="*/ 398 w 426"/>
-                  <a:gd name="T43" fmla="*/ 22 h 641"/>
-                  <a:gd name="T44" fmla="*/ 404 w 426"/>
-                  <a:gd name="T45" fmla="*/ 27 h 641"/>
-                  <a:gd name="T46" fmla="*/ 404 w 426"/>
-                  <a:gd name="T47" fmla="*/ 129 h 641"/>
-                  <a:gd name="T48" fmla="*/ 21 w 426"/>
-                  <a:gd name="T49" fmla="*/ 129 h 641"/>
-                  <a:gd name="T50" fmla="*/ 21 w 426"/>
-                  <a:gd name="T51" fmla="*/ 27 h 641"/>
-                  <a:gd name="T52" fmla="*/ 21 w 426"/>
-                  <a:gd name="T53" fmla="*/ 150 h 641"/>
-                  <a:gd name="T54" fmla="*/ 21 w 426"/>
-                  <a:gd name="T55" fmla="*/ 150 h 641"/>
-                  <a:gd name="T56" fmla="*/ 404 w 426"/>
-                  <a:gd name="T57" fmla="*/ 150 h 641"/>
-                  <a:gd name="T58" fmla="*/ 404 w 426"/>
-                  <a:gd name="T59" fmla="*/ 277 h 641"/>
-                  <a:gd name="T60" fmla="*/ 21 w 426"/>
-                  <a:gd name="T61" fmla="*/ 277 h 641"/>
-                  <a:gd name="T62" fmla="*/ 21 w 426"/>
-                  <a:gd name="T63" fmla="*/ 150 h 641"/>
-                  <a:gd name="T64" fmla="*/ 21 w 426"/>
-                  <a:gd name="T65" fmla="*/ 298 h 641"/>
-                  <a:gd name="T66" fmla="*/ 21 w 426"/>
-                  <a:gd name="T67" fmla="*/ 298 h 641"/>
-                  <a:gd name="T68" fmla="*/ 404 w 426"/>
-                  <a:gd name="T69" fmla="*/ 298 h 641"/>
-                  <a:gd name="T70" fmla="*/ 404 w 426"/>
-                  <a:gd name="T71" fmla="*/ 406 h 641"/>
-                  <a:gd name="T72" fmla="*/ 21 w 426"/>
-                  <a:gd name="T73" fmla="*/ 406 h 641"/>
-                  <a:gd name="T74" fmla="*/ 21 w 426"/>
-                  <a:gd name="T75" fmla="*/ 298 h 641"/>
-                  <a:gd name="T76" fmla="*/ 21 w 426"/>
-                  <a:gd name="T77" fmla="*/ 427 h 641"/>
-                  <a:gd name="T78" fmla="*/ 21 w 426"/>
-                  <a:gd name="T79" fmla="*/ 427 h 641"/>
-                  <a:gd name="T80" fmla="*/ 404 w 426"/>
-                  <a:gd name="T81" fmla="*/ 427 h 641"/>
-                  <a:gd name="T82" fmla="*/ 404 w 426"/>
-                  <a:gd name="T83" fmla="*/ 533 h 641"/>
-                  <a:gd name="T84" fmla="*/ 21 w 426"/>
-                  <a:gd name="T85" fmla="*/ 533 h 641"/>
-                  <a:gd name="T86" fmla="*/ 21 w 426"/>
-                  <a:gd name="T87" fmla="*/ 427 h 641"/>
-                  <a:gd name="T88" fmla="*/ 21 w 426"/>
-                  <a:gd name="T89" fmla="*/ 612 h 641"/>
-                  <a:gd name="T90" fmla="*/ 21 w 426"/>
-                  <a:gd name="T91" fmla="*/ 612 h 641"/>
-                  <a:gd name="T92" fmla="*/ 21 w 426"/>
-                  <a:gd name="T93" fmla="*/ 554 h 641"/>
-                  <a:gd name="T94" fmla="*/ 404 w 426"/>
-                  <a:gd name="T95" fmla="*/ 554 h 641"/>
-                  <a:gd name="T96" fmla="*/ 404 w 426"/>
-                  <a:gd name="T97" fmla="*/ 612 h 641"/>
-                  <a:gd name="T98" fmla="*/ 398 w 426"/>
-                  <a:gd name="T99" fmla="*/ 619 h 641"/>
-                  <a:gd name="T100" fmla="*/ 27 w 426"/>
-                  <a:gd name="T101" fmla="*/ 619 h 641"/>
-                  <a:gd name="T102" fmla="*/ 21 w 426"/>
-                  <a:gd name="T103" fmla="*/ 612 h 641"/>
-                </a:gdLst>
-                <a:ahLst/>
-                <a:cxnLst>
-                  <a:cxn ang="0">
-                    <a:pos x="T0" y="T1"/>
-                  </a:cxn>
-                  <a:cxn ang="0">
-                    <a:pos x="T2" y="T3"/>
-                  </a:cxn>
-                  <a:cxn ang="0">
-                    <a:pos x="T4" y="T5"/>
-                  </a:cxn>
-                  <a:cxn ang="0">
-                    <a:pos x="T6" y="T7"/>
-                  </a:cxn>
-                  <a:cxn ang="0">
-                    <a:pos x="T8" y="T9"/>
-                  </a:cxn>
-                  <a:cxn ang="0">
-                    <a:pos x="T10" y="T11"/>
-                  </a:cxn>
-                  <a:cxn ang="0">
-                    <a:pos x="T12" y="T13"/>
-                  </a:cxn>
-                  <a:cxn ang="0">
-                    <a:pos x="T14" y="T15"/>
-                  </a:cxn>
-                  <a:cxn ang="0">
-                    <a:pos x="T16" y="T17"/>
-                  </a:cxn>
-                  <a:cxn ang="0">
-                    <a:pos x="T18" y="T19"/>
-                  </a:cxn>
-                  <a:cxn ang="0">
-                    <a:pos x="T20" y="T21"/>
-                  </a:cxn>
-                  <a:cxn ang="0">
-                    <a:pos x="T22" y="T23"/>
-                  </a:cxn>
-                  <a:cxn ang="0">
-                    <a:pos x="T24" y="T25"/>
-                  </a:cxn>
-                  <a:cxn ang="0">
-                    <a:pos x="T26" y="T27"/>
-                  </a:cxn>
-                  <a:cxn ang="0">
-                    <a:pos x="T28" y="T29"/>
-                  </a:cxn>
-                  <a:cxn ang="0">
-                    <a:pos x="T30" y="T31"/>
-                  </a:cxn>
-                  <a:cxn ang="0">
-                    <a:pos x="T32" y="T33"/>
-                  </a:cxn>
-                  <a:cxn ang="0">
-                    <a:pos x="T34" y="T35"/>
-                  </a:cxn>
-                  <a:cxn ang="0">
-                    <a:pos x="T36" y="T37"/>
-                  </a:cxn>
-                  <a:cxn ang="0">
-                    <a:pos x="T38" y="T39"/>
-                  </a:cxn>
-                  <a:cxn ang="0">
-                    <a:pos x="T40" y="T41"/>
-                  </a:cxn>
-                  <a:cxn ang="0">
-                    <a:pos x="T42" y="T43"/>
-                  </a:cxn>
-                  <a:cxn ang="0">
-                    <a:pos x="T44" y="T45"/>
-                  </a:cxn>
-                  <a:cxn ang="0">
-                    <a:pos x="T46" y="T47"/>
-                  </a:cxn>
-                  <a:cxn ang="0">
-                    <a:pos x="T48" y="T49"/>
-                  </a:cxn>
-                  <a:cxn ang="0">
-                    <a:pos x="T50" y="T51"/>
-                  </a:cxn>
-                  <a:cxn ang="0">
-                    <a:pos x="T52" y="T53"/>
-                  </a:cxn>
-                  <a:cxn ang="0">
-                    <a:pos x="T54" y="T55"/>
-                  </a:cxn>
-                  <a:cxn ang="0">
-                    <a:pos x="T56" y="T57"/>
-                  </a:cxn>
-                  <a:cxn ang="0">
-                    <a:pos x="T58" y="T59"/>
-                  </a:cxn>
-                  <a:cxn ang="0">
-                    <a:pos x="T60" y="T61"/>
-                  </a:cxn>
-                  <a:cxn ang="0">
-                    <a:pos x="T62" y="T63"/>
-                  </a:cxn>
-                  <a:cxn ang="0">
-                    <a:pos x="T64" y="T65"/>
-                  </a:cxn>
-                  <a:cxn ang="0">
-                    <a:pos x="T66" y="T67"/>
-                  </a:cxn>
-                  <a:cxn ang="0">
-                    <a:pos x="T68" y="T69"/>
-                  </a:cxn>
-                  <a:cxn ang="0">
-                    <a:pos x="T70" y="T71"/>
-                  </a:cxn>
-                  <a:cxn ang="0">
-                    <a:pos x="T72" y="T73"/>
-                  </a:cxn>
-                  <a:cxn ang="0">
-                    <a:pos x="T74" y="T75"/>
-                  </a:cxn>
-                  <a:cxn ang="0">
-                    <a:pos x="T76" y="T77"/>
-                  </a:cxn>
-                  <a:cxn ang="0">
-                    <a:pos x="T78" y="T79"/>
-                  </a:cxn>
-                  <a:cxn ang="0">
-                    <a:pos x="T80" y="T81"/>
-                  </a:cxn>
-                  <a:cxn ang="0">
-                    <a:pos x="T82" y="T83"/>
-                  </a:cxn>
-                  <a:cxn ang="0">
-                    <a:pos x="T84" y="T85"/>
-                  </a:cxn>
-                  <a:cxn ang="0">
-                    <a:pos x="T86" y="T87"/>
-                  </a:cxn>
-                  <a:cxn ang="0">
-                    <a:pos x="T88" y="T89"/>
-                  </a:cxn>
-                  <a:cxn ang="0">
-                    <a:pos x="T90" y="T91"/>
-                  </a:cxn>
-                  <a:cxn ang="0">
-                    <a:pos x="T92" y="T93"/>
-                  </a:cxn>
-                  <a:cxn ang="0">
-                    <a:pos x="T94" y="T95"/>
-                  </a:cxn>
-                  <a:cxn ang="0">
-                    <a:pos x="T96" y="T97"/>
-                  </a:cxn>
-                  <a:cxn ang="0">
-                    <a:pos x="T98" y="T99"/>
-                  </a:cxn>
-                  <a:cxn ang="0">
-                    <a:pos x="T100" y="T101"/>
-                  </a:cxn>
-                  <a:cxn ang="0">
-                    <a:pos x="T102" y="T103"/>
-                  </a:cxn>
-                </a:cxnLst>
-                <a:rect l="0" t="0" r="r" b="b"/>
-                <a:pathLst>
-                  <a:path w="426" h="641">
-                    <a:moveTo>
-                      <a:pt x="398" y="640"/>
-                    </a:moveTo>
-                    <a:lnTo>
-                      <a:pt x="398" y="640"/>
-                    </a:lnTo>
-                    <a:cubicBezTo>
-                      <a:pt x="413" y="640"/>
-                      <a:pt x="425" y="627"/>
-                      <a:pt x="425" y="612"/>
-                    </a:cubicBezTo>
-                    <a:cubicBezTo>
-                      <a:pt x="425" y="544"/>
-                      <a:pt x="425" y="544"/>
-                      <a:pt x="425" y="544"/>
-                    </a:cubicBezTo>
-                    <a:cubicBezTo>
-                      <a:pt x="425" y="416"/>
-                      <a:pt x="425" y="416"/>
-                      <a:pt x="425" y="416"/>
-                    </a:cubicBezTo>
-                    <a:cubicBezTo>
-                      <a:pt x="425" y="288"/>
-                      <a:pt x="425" y="288"/>
-                      <a:pt x="425" y="288"/>
-                    </a:cubicBezTo>
-                    <a:cubicBezTo>
-                      <a:pt x="425" y="139"/>
-                      <a:pt x="425" y="139"/>
-                      <a:pt x="425" y="139"/>
-                    </a:cubicBezTo>
-                    <a:cubicBezTo>
-                      <a:pt x="425" y="27"/>
-                      <a:pt x="425" y="27"/>
-                      <a:pt x="425" y="27"/>
-                    </a:cubicBezTo>
-                    <a:cubicBezTo>
-                      <a:pt x="425" y="13"/>
-                      <a:pt x="413" y="0"/>
-                      <a:pt x="398" y="0"/>
-                    </a:cubicBezTo>
-                    <a:cubicBezTo>
-                      <a:pt x="27" y="0"/>
-                      <a:pt x="27" y="0"/>
-                      <a:pt x="27" y="0"/>
-                    </a:cubicBezTo>
-                    <a:cubicBezTo>
-                      <a:pt x="12" y="0"/>
-                      <a:pt x="0" y="13"/>
-                      <a:pt x="0" y="27"/>
-                    </a:cubicBezTo>
-                    <a:cubicBezTo>
-                      <a:pt x="0" y="139"/>
-                      <a:pt x="0" y="139"/>
-                      <a:pt x="0" y="139"/>
-                    </a:cubicBezTo>
-                    <a:cubicBezTo>
-                      <a:pt x="0" y="288"/>
-                      <a:pt x="0" y="288"/>
-                      <a:pt x="0" y="288"/>
-                    </a:cubicBezTo>
-                    <a:cubicBezTo>
-                      <a:pt x="0" y="416"/>
-                      <a:pt x="0" y="416"/>
-                      <a:pt x="0" y="416"/>
-                    </a:cubicBezTo>
-                    <a:cubicBezTo>
-                      <a:pt x="0" y="544"/>
-                      <a:pt x="0" y="544"/>
-                      <a:pt x="0" y="544"/>
-                    </a:cubicBezTo>
-                    <a:cubicBezTo>
-                      <a:pt x="0" y="612"/>
-                      <a:pt x="0" y="612"/>
-                      <a:pt x="0" y="612"/>
-                    </a:cubicBezTo>
-                    <a:cubicBezTo>
-                      <a:pt x="0" y="627"/>
-                      <a:pt x="12" y="640"/>
-                      <a:pt x="27" y="640"/>
-                    </a:cubicBezTo>
-                    <a:lnTo>
-                      <a:pt x="398" y="640"/>
-                    </a:lnTo>
-                    <a:close/>
-                    <a:moveTo>
-                      <a:pt x="21" y="27"/>
-                    </a:moveTo>
-                    <a:lnTo>
-                      <a:pt x="21" y="27"/>
-                    </a:lnTo>
-                    <a:cubicBezTo>
-                      <a:pt x="21" y="25"/>
-                      <a:pt x="23" y="22"/>
-                      <a:pt x="27" y="22"/>
-                    </a:cubicBezTo>
-                    <a:cubicBezTo>
-                      <a:pt x="398" y="22"/>
-                      <a:pt x="398" y="22"/>
-                      <a:pt x="398" y="22"/>
-                    </a:cubicBezTo>
-                    <a:cubicBezTo>
-                      <a:pt x="401" y="22"/>
-                      <a:pt x="404" y="25"/>
-                      <a:pt x="404" y="27"/>
-                    </a:cubicBezTo>
-                    <a:cubicBezTo>
-                      <a:pt x="404" y="129"/>
-                      <a:pt x="404" y="129"/>
-                      <a:pt x="404" y="129"/>
-                    </a:cubicBezTo>
-                    <a:cubicBezTo>
-                      <a:pt x="21" y="129"/>
-                      <a:pt x="21" y="129"/>
-                      <a:pt x="21" y="129"/>
-                    </a:cubicBezTo>
-                    <a:lnTo>
-                      <a:pt x="21" y="27"/>
-                    </a:lnTo>
-                    <a:close/>
-                    <a:moveTo>
-                      <a:pt x="21" y="150"/>
-                    </a:moveTo>
-                    <a:lnTo>
-                      <a:pt x="21" y="150"/>
-                    </a:lnTo>
-                    <a:cubicBezTo>
-                      <a:pt x="404" y="150"/>
-                      <a:pt x="404" y="150"/>
-                      <a:pt x="404" y="150"/>
-                    </a:cubicBezTo>
-                    <a:cubicBezTo>
-                      <a:pt x="404" y="277"/>
-                      <a:pt x="404" y="277"/>
-                      <a:pt x="404" y="277"/>
-                    </a:cubicBezTo>
-                    <a:cubicBezTo>
-                      <a:pt x="21" y="277"/>
-                      <a:pt x="21" y="277"/>
-                      <a:pt x="21" y="277"/>
-                    </a:cubicBezTo>
-                    <a:lnTo>
-                      <a:pt x="21" y="150"/>
-                    </a:lnTo>
-                    <a:close/>
-                    <a:moveTo>
-                      <a:pt x="21" y="298"/>
-                    </a:moveTo>
-                    <a:lnTo>
-                      <a:pt x="21" y="298"/>
-                    </a:lnTo>
-                    <a:cubicBezTo>
-                      <a:pt x="404" y="298"/>
-                      <a:pt x="404" y="298"/>
-                      <a:pt x="404" y="298"/>
-                    </a:cubicBezTo>
-                    <a:cubicBezTo>
-                      <a:pt x="404" y="406"/>
-                      <a:pt x="404" y="406"/>
-                      <a:pt x="404" y="406"/>
-                    </a:cubicBezTo>
-                    <a:cubicBezTo>
-                      <a:pt x="21" y="406"/>
-                      <a:pt x="21" y="406"/>
-                      <a:pt x="21" y="406"/>
-                    </a:cubicBezTo>
-                    <a:lnTo>
-                      <a:pt x="21" y="298"/>
-                    </a:lnTo>
-                    <a:close/>
-                    <a:moveTo>
-                      <a:pt x="21" y="427"/>
-                    </a:moveTo>
-                    <a:lnTo>
-                      <a:pt x="21" y="427"/>
-                    </a:lnTo>
-                    <a:cubicBezTo>
-                      <a:pt x="404" y="427"/>
-                      <a:pt x="404" y="427"/>
-                      <a:pt x="404" y="427"/>
-                    </a:cubicBezTo>
-                    <a:cubicBezTo>
-                      <a:pt x="404" y="533"/>
-                      <a:pt x="404" y="533"/>
-                      <a:pt x="404" y="533"/>
-                    </a:cubicBezTo>
-                    <a:cubicBezTo>
-                      <a:pt x="21" y="533"/>
-                      <a:pt x="21" y="533"/>
-                      <a:pt x="21" y="533"/>
-                    </a:cubicBezTo>
-                    <a:lnTo>
-                      <a:pt x="21" y="427"/>
-                    </a:lnTo>
-                    <a:close/>
-                    <a:moveTo>
-                      <a:pt x="21" y="612"/>
-                    </a:moveTo>
-                    <a:lnTo>
-                      <a:pt x="21" y="612"/>
-                    </a:lnTo>
-                    <a:cubicBezTo>
-                      <a:pt x="21" y="554"/>
-                      <a:pt x="21" y="554"/>
-                      <a:pt x="21" y="554"/>
-                    </a:cubicBezTo>
-                    <a:cubicBezTo>
-                      <a:pt x="404" y="554"/>
-                      <a:pt x="404" y="554"/>
-                      <a:pt x="404" y="554"/>
-                    </a:cubicBezTo>
-                    <a:cubicBezTo>
-                      <a:pt x="404" y="612"/>
-                      <a:pt x="404" y="612"/>
-                      <a:pt x="404" y="612"/>
-                    </a:cubicBezTo>
-                    <a:cubicBezTo>
-                      <a:pt x="404" y="616"/>
-                      <a:pt x="401" y="619"/>
-                      <a:pt x="398" y="619"/>
-                    </a:cubicBezTo>
-                    <a:cubicBezTo>
-                      <a:pt x="27" y="619"/>
-                      <a:pt x="27" y="619"/>
-                      <a:pt x="27" y="619"/>
-                    </a:cubicBezTo>
-                    <a:cubicBezTo>
-                      <a:pt x="23" y="619"/>
-                      <a:pt x="21" y="616"/>
-                      <a:pt x="21" y="612"/>
-                    </a:cubicBezTo>
-                    <a:close/>
-                  </a:path>
-                </a:pathLst>
-              </a:custGeom>
-              <a:solidFill>
-                <a:schemeClr val="bg1"/>
-              </a:solidFill>
-              <a:ln w="19050" cap="flat">
-                <a:solidFill>
-                  <a:srgbClr val="618153"/>
-                </a:solidFill>
-                <a:bevel/>
-                <a:headEnd/>
-                <a:tailEnd/>
-              </a:ln>
-              <a:effectLst/>
-              <a:extLst>
-                <a:ext uri="{AF507438-7753-43E0-B8FC-AC1667EBCBE1}">
-                  <a14:hiddenEffects xmlns:a14="http://schemas.microsoft.com/office/drawing/2010/main">
-                    <a:effectLst>
-                      <a:outerShdw blurRad="63500" dist="38099" dir="2700000" algn="ctr" rotWithShape="0">
-                        <a:srgbClr val="000000">
-                          <a:alpha val="74998"/>
-                        </a:srgbClr>
-                      </a:outerShdw>
-                    </a:effectLst>
-                  </a14:hiddenEffects>
-                </a:ext>
-              </a:extLst>
-            </p:spPr>
-            <p:txBody>
-              <a:bodyPr wrap="none" anchor="ctr"/>
-              <a:lstStyle/>
-              <a:p>
-                <a:endParaRPr lang="en-US" sz="964"/>
-              </a:p>
-            </p:txBody>
-          </p:sp>
-          <p:sp>
-            <p:nvSpPr>
-              <p:cNvPr id="41" name="Freeform 124">
-                <a:extLst>
-                  <a:ext uri="{FF2B5EF4-FFF2-40B4-BE49-F238E27FC236}">
-                    <a16:creationId xmlns:a16="http://schemas.microsoft.com/office/drawing/2014/main" xmlns="" id="{9EA60E95-59DD-4A01-B0FA-42513BEAF8E7}"/>
-                  </a:ext>
-                </a:extLst>
-              </p:cNvPr>
-              <p:cNvSpPr>
-                <a:spLocks noChangeArrowheads="1"/>
-              </p:cNvSpPr>
-              <p:nvPr/>
-            </p:nvSpPr>
-            <p:spPr bwMode="auto">
-              <a:xfrm>
-                <a:off x="9799787" y="4381963"/>
-                <a:ext cx="81940" cy="92054"/>
-              </a:xfrm>
-              <a:custGeom>
-                <a:avLst/>
-                <a:gdLst>
-                  <a:gd name="T0" fmla="*/ 39 w 76"/>
-                  <a:gd name="T1" fmla="*/ 0 h 75"/>
-                  <a:gd name="T2" fmla="*/ 39 w 76"/>
-                  <a:gd name="T3" fmla="*/ 0 h 75"/>
-                  <a:gd name="T4" fmla="*/ 0 w 76"/>
-                  <a:gd name="T5" fmla="*/ 37 h 75"/>
-                  <a:gd name="T6" fmla="*/ 39 w 76"/>
-                  <a:gd name="T7" fmla="*/ 74 h 75"/>
-                  <a:gd name="T8" fmla="*/ 75 w 76"/>
-                  <a:gd name="T9" fmla="*/ 37 h 75"/>
-                  <a:gd name="T10" fmla="*/ 39 w 76"/>
-                  <a:gd name="T11" fmla="*/ 0 h 75"/>
-                  <a:gd name="T12" fmla="*/ 39 w 76"/>
-                  <a:gd name="T13" fmla="*/ 54 h 75"/>
-                  <a:gd name="T14" fmla="*/ 39 w 76"/>
-                  <a:gd name="T15" fmla="*/ 54 h 75"/>
-                  <a:gd name="T16" fmla="*/ 22 w 76"/>
-                  <a:gd name="T17" fmla="*/ 37 h 75"/>
-                  <a:gd name="T18" fmla="*/ 39 w 76"/>
-                  <a:gd name="T19" fmla="*/ 21 h 75"/>
-                  <a:gd name="T20" fmla="*/ 53 w 76"/>
-                  <a:gd name="T21" fmla="*/ 37 h 75"/>
-                  <a:gd name="T22" fmla="*/ 39 w 76"/>
-                  <a:gd name="T23" fmla="*/ 54 h 75"/>
-                </a:gdLst>
-                <a:ahLst/>
-                <a:cxnLst>
-                  <a:cxn ang="0">
-                    <a:pos x="T0" y="T1"/>
-                  </a:cxn>
-                  <a:cxn ang="0">
-                    <a:pos x="T2" y="T3"/>
-                  </a:cxn>
-                  <a:cxn ang="0">
-                    <a:pos x="T4" y="T5"/>
-                  </a:cxn>
-                  <a:cxn ang="0">
-                    <a:pos x="T6" y="T7"/>
-                  </a:cxn>
-                  <a:cxn ang="0">
-                    <a:pos x="T8" y="T9"/>
-                  </a:cxn>
-                  <a:cxn ang="0">
-                    <a:pos x="T10" y="T11"/>
-                  </a:cxn>
-                  <a:cxn ang="0">
-                    <a:pos x="T12" y="T13"/>
-                  </a:cxn>
-                  <a:cxn ang="0">
-                    <a:pos x="T14" y="T15"/>
-                  </a:cxn>
-                  <a:cxn ang="0">
-                    <a:pos x="T16" y="T17"/>
-                  </a:cxn>
-                  <a:cxn ang="0">
-                    <a:pos x="T18" y="T19"/>
-                  </a:cxn>
-                  <a:cxn ang="0">
-                    <a:pos x="T20" y="T21"/>
-                  </a:cxn>
-                  <a:cxn ang="0">
-                    <a:pos x="T22" y="T23"/>
-                  </a:cxn>
-                </a:cxnLst>
-                <a:rect l="0" t="0" r="r" b="b"/>
-                <a:pathLst>
-                  <a:path w="76" h="75">
-                    <a:moveTo>
-                      <a:pt x="39" y="0"/>
-                    </a:moveTo>
-                    <a:lnTo>
-                      <a:pt x="39" y="0"/>
-                    </a:lnTo>
-                    <a:cubicBezTo>
-                      <a:pt x="18" y="0"/>
-                      <a:pt x="0" y="17"/>
-                      <a:pt x="0" y="37"/>
-                    </a:cubicBezTo>
-                    <a:cubicBezTo>
-                      <a:pt x="0" y="58"/>
-                      <a:pt x="18" y="74"/>
-                      <a:pt x="39" y="74"/>
-                    </a:cubicBezTo>
-                    <a:cubicBezTo>
-                      <a:pt x="59" y="74"/>
-                      <a:pt x="75" y="58"/>
-                      <a:pt x="75" y="37"/>
-                    </a:cubicBezTo>
-                    <a:cubicBezTo>
-                      <a:pt x="75" y="17"/>
-                      <a:pt x="59" y="0"/>
-                      <a:pt x="39" y="0"/>
-                    </a:cubicBezTo>
-                    <a:close/>
-                    <a:moveTo>
-                      <a:pt x="39" y="54"/>
-                    </a:moveTo>
-                    <a:lnTo>
-                      <a:pt x="39" y="54"/>
-                    </a:lnTo>
-                    <a:cubicBezTo>
-                      <a:pt x="29" y="54"/>
-                      <a:pt x="22" y="46"/>
-                      <a:pt x="22" y="37"/>
-                    </a:cubicBezTo>
-                    <a:cubicBezTo>
-                      <a:pt x="22" y="28"/>
-                      <a:pt x="29" y="21"/>
-                      <a:pt x="39" y="21"/>
-                    </a:cubicBezTo>
-                    <a:cubicBezTo>
-                      <a:pt x="47" y="21"/>
-                      <a:pt x="53" y="28"/>
-                      <a:pt x="53" y="37"/>
-                    </a:cubicBezTo>
-                    <a:cubicBezTo>
-                      <a:pt x="53" y="46"/>
-                      <a:pt x="47" y="54"/>
-                      <a:pt x="39" y="54"/>
-                    </a:cubicBezTo>
-                    <a:close/>
-                  </a:path>
-                </a:pathLst>
-              </a:custGeom>
-              <a:solidFill>
-                <a:schemeClr val="bg1"/>
-              </a:solidFill>
-              <a:ln w="19050" cap="flat">
-                <a:solidFill>
-                  <a:srgbClr val="618153"/>
-                </a:solidFill>
-                <a:bevel/>
-                <a:headEnd/>
-                <a:tailEnd/>
-              </a:ln>
-              <a:effectLst/>
-              <a:extLst>
-                <a:ext uri="{AF507438-7753-43E0-B8FC-AC1667EBCBE1}">
-                  <a14:hiddenEffects xmlns:a14="http://schemas.microsoft.com/office/drawing/2010/main">
-                    <a:effectLst>
-                      <a:outerShdw blurRad="63500" dist="38099" dir="2700000" algn="ctr" rotWithShape="0">
-                        <a:srgbClr val="000000">
-                          <a:alpha val="74998"/>
-                        </a:srgbClr>
-                      </a:outerShdw>
-                    </a:effectLst>
-                  </a14:hiddenEffects>
-                </a:ext>
-              </a:extLst>
-            </p:spPr>
-            <p:txBody>
-              <a:bodyPr wrap="none" anchor="ctr"/>
-              <a:lstStyle/>
-              <a:p>
-                <a:endParaRPr lang="en-US" sz="964"/>
-              </a:p>
-            </p:txBody>
-          </p:sp>
-          <p:sp>
-            <p:nvSpPr>
-              <p:cNvPr id="42" name="Freeform 125">
-                <a:extLst>
-                  <a:ext uri="{FF2B5EF4-FFF2-40B4-BE49-F238E27FC236}">
-                    <a16:creationId xmlns:a16="http://schemas.microsoft.com/office/drawing/2014/main" xmlns="" id="{277C2BFE-7B2E-4B06-836A-8103FB641491}"/>
-                  </a:ext>
-                </a:extLst>
-              </p:cNvPr>
-              <p:cNvSpPr>
-                <a:spLocks noChangeArrowheads="1"/>
-              </p:cNvSpPr>
-              <p:nvPr/>
-            </p:nvSpPr>
-            <p:spPr bwMode="auto">
-              <a:xfrm>
-                <a:off x="9560812" y="4411046"/>
-                <a:ext cx="216000" cy="36000"/>
-              </a:xfrm>
-              <a:custGeom>
-                <a:avLst/>
-                <a:gdLst>
-                  <a:gd name="T0" fmla="*/ 160 w 171"/>
-                  <a:gd name="T1" fmla="*/ 0 h 23"/>
-                  <a:gd name="T2" fmla="*/ 160 w 171"/>
-                  <a:gd name="T3" fmla="*/ 0 h 23"/>
-                  <a:gd name="T4" fmla="*/ 11 w 171"/>
-                  <a:gd name="T5" fmla="*/ 0 h 23"/>
-                  <a:gd name="T6" fmla="*/ 0 w 171"/>
-                  <a:gd name="T7" fmla="*/ 11 h 23"/>
-                  <a:gd name="T8" fmla="*/ 11 w 171"/>
-                  <a:gd name="T9" fmla="*/ 22 h 23"/>
-                  <a:gd name="T10" fmla="*/ 160 w 171"/>
-                  <a:gd name="T11" fmla="*/ 22 h 23"/>
-                  <a:gd name="T12" fmla="*/ 170 w 171"/>
-                  <a:gd name="T13" fmla="*/ 11 h 23"/>
-                  <a:gd name="T14" fmla="*/ 160 w 171"/>
-                  <a:gd name="T15" fmla="*/ 0 h 23"/>
-                </a:gdLst>
-                <a:ahLst/>
-                <a:cxnLst>
-                  <a:cxn ang="0">
-                    <a:pos x="T0" y="T1"/>
-                  </a:cxn>
-                  <a:cxn ang="0">
-                    <a:pos x="T2" y="T3"/>
-                  </a:cxn>
-                  <a:cxn ang="0">
-                    <a:pos x="T4" y="T5"/>
-                  </a:cxn>
-                  <a:cxn ang="0">
-                    <a:pos x="T6" y="T7"/>
-                  </a:cxn>
-                  <a:cxn ang="0">
-                    <a:pos x="T8" y="T9"/>
-                  </a:cxn>
-                  <a:cxn ang="0">
-                    <a:pos x="T10" y="T11"/>
-                  </a:cxn>
-                  <a:cxn ang="0">
-                    <a:pos x="T12" y="T13"/>
-                  </a:cxn>
-                  <a:cxn ang="0">
-                    <a:pos x="T14" y="T15"/>
-                  </a:cxn>
-                </a:cxnLst>
-                <a:rect l="0" t="0" r="r" b="b"/>
-                <a:pathLst>
-                  <a:path w="171" h="23">
-                    <a:moveTo>
-                      <a:pt x="160" y="0"/>
-                    </a:moveTo>
-                    <a:lnTo>
-                      <a:pt x="160" y="0"/>
-                    </a:lnTo>
-                    <a:cubicBezTo>
-                      <a:pt x="11" y="0"/>
-                      <a:pt x="11" y="0"/>
-                      <a:pt x="11" y="0"/>
-                    </a:cubicBezTo>
-                    <a:cubicBezTo>
-                      <a:pt x="4" y="0"/>
-                      <a:pt x="0" y="6"/>
-                      <a:pt x="0" y="11"/>
-                    </a:cubicBezTo>
-                    <a:cubicBezTo>
-                      <a:pt x="0" y="17"/>
-                      <a:pt x="4" y="22"/>
-                      <a:pt x="11" y="22"/>
-                    </a:cubicBezTo>
-                    <a:cubicBezTo>
-                      <a:pt x="160" y="22"/>
-                      <a:pt x="160" y="22"/>
-                      <a:pt x="160" y="22"/>
-                    </a:cubicBezTo>
-                    <a:cubicBezTo>
-                      <a:pt x="166" y="22"/>
-                      <a:pt x="170" y="17"/>
-                      <a:pt x="170" y="11"/>
-                    </a:cubicBezTo>
-                    <a:cubicBezTo>
-                      <a:pt x="170" y="6"/>
-                      <a:pt x="166" y="0"/>
-                      <a:pt x="160" y="0"/>
-                    </a:cubicBezTo>
-                  </a:path>
-                </a:pathLst>
-              </a:custGeom>
-              <a:solidFill>
-                <a:schemeClr val="bg1"/>
-              </a:solidFill>
-              <a:ln w="19050" cap="flat">
-                <a:solidFill>
-                  <a:srgbClr val="618153"/>
-                </a:solidFill>
-                <a:bevel/>
-                <a:headEnd/>
-                <a:tailEnd/>
-              </a:ln>
-              <a:effectLst/>
-              <a:extLst>
-                <a:ext uri="{AF507438-7753-43E0-B8FC-AC1667EBCBE1}">
-                  <a14:hiddenEffects xmlns:a14="http://schemas.microsoft.com/office/drawing/2010/main">
-                    <a:effectLst>
-                      <a:outerShdw blurRad="63500" dist="38099" dir="2700000" algn="ctr" rotWithShape="0">
-                        <a:srgbClr val="000000">
-                          <a:alpha val="74998"/>
-                        </a:srgbClr>
-                      </a:outerShdw>
-                    </a:effectLst>
-                  </a14:hiddenEffects>
-                </a:ext>
-              </a:extLst>
-            </p:spPr>
-            <p:txBody>
-              <a:bodyPr wrap="none" anchor="ctr"/>
-              <a:lstStyle/>
-              <a:p>
-                <a:endParaRPr lang="en-US" sz="964"/>
-              </a:p>
-            </p:txBody>
-          </p:sp>
-        </p:grpSp>
-        <p:grpSp>
-          <p:nvGrpSpPr>
-            <p:cNvPr id="9" name="그룹 8"/>
-            <p:cNvGrpSpPr/>
-            <p:nvPr/>
-          </p:nvGrpSpPr>
-          <p:grpSpPr>
-            <a:xfrm>
-              <a:off x="7615589" y="3587138"/>
-              <a:ext cx="461612" cy="683618"/>
-              <a:chOff x="7539389" y="3807187"/>
-              <a:chExt cx="416888" cy="451880"/>
-            </a:xfrm>
-          </p:grpSpPr>
-          <p:sp>
-            <p:nvSpPr>
-              <p:cNvPr id="32" name="Freeform 111">
-                <a:extLst>
-                  <a:ext uri="{FF2B5EF4-FFF2-40B4-BE49-F238E27FC236}">
-                    <a16:creationId xmlns:a16="http://schemas.microsoft.com/office/drawing/2014/main" xmlns="" id="{BC11850A-92B9-404F-BF5E-D6215717A644}"/>
-                  </a:ext>
-                </a:extLst>
-              </p:cNvPr>
-              <p:cNvSpPr>
-                <a:spLocks noChangeArrowheads="1"/>
-              </p:cNvSpPr>
-              <p:nvPr/>
-            </p:nvSpPr>
-            <p:spPr bwMode="auto">
-              <a:xfrm>
-                <a:off x="7649742" y="3926802"/>
-                <a:ext cx="193118" cy="209326"/>
-              </a:xfrm>
-              <a:custGeom>
-                <a:avLst/>
-                <a:gdLst>
-                  <a:gd name="T0" fmla="*/ 268 w 279"/>
-                  <a:gd name="T1" fmla="*/ 0 h 278"/>
-                  <a:gd name="T2" fmla="*/ 268 w 279"/>
-                  <a:gd name="T3" fmla="*/ 0 h 278"/>
-                  <a:gd name="T4" fmla="*/ 12 w 279"/>
-                  <a:gd name="T5" fmla="*/ 0 h 278"/>
-                  <a:gd name="T6" fmla="*/ 0 w 279"/>
-                  <a:gd name="T7" fmla="*/ 11 h 278"/>
-                  <a:gd name="T8" fmla="*/ 0 w 279"/>
-                  <a:gd name="T9" fmla="*/ 266 h 278"/>
-                  <a:gd name="T10" fmla="*/ 12 w 279"/>
-                  <a:gd name="T11" fmla="*/ 277 h 278"/>
-                  <a:gd name="T12" fmla="*/ 268 w 279"/>
-                  <a:gd name="T13" fmla="*/ 277 h 278"/>
-                  <a:gd name="T14" fmla="*/ 278 w 279"/>
-                  <a:gd name="T15" fmla="*/ 266 h 278"/>
-                  <a:gd name="T16" fmla="*/ 278 w 279"/>
-                  <a:gd name="T17" fmla="*/ 11 h 278"/>
-                  <a:gd name="T18" fmla="*/ 268 w 279"/>
-                  <a:gd name="T19" fmla="*/ 0 h 278"/>
-                  <a:gd name="T20" fmla="*/ 256 w 279"/>
-                  <a:gd name="T21" fmla="*/ 255 h 278"/>
-                  <a:gd name="T22" fmla="*/ 256 w 279"/>
-                  <a:gd name="T23" fmla="*/ 255 h 278"/>
-                  <a:gd name="T24" fmla="*/ 22 w 279"/>
-                  <a:gd name="T25" fmla="*/ 255 h 278"/>
-                  <a:gd name="T26" fmla="*/ 22 w 279"/>
-                  <a:gd name="T27" fmla="*/ 21 h 278"/>
-                  <a:gd name="T28" fmla="*/ 256 w 279"/>
-                  <a:gd name="T29" fmla="*/ 21 h 278"/>
-                  <a:gd name="T30" fmla="*/ 256 w 279"/>
-                  <a:gd name="T31" fmla="*/ 255 h 278"/>
-                </a:gdLst>
-                <a:ahLst/>
-                <a:cxnLst>
-                  <a:cxn ang="0">
-                    <a:pos x="T0" y="T1"/>
-                  </a:cxn>
-                  <a:cxn ang="0">
-                    <a:pos x="T2" y="T3"/>
-                  </a:cxn>
-                  <a:cxn ang="0">
-                    <a:pos x="T4" y="T5"/>
-                  </a:cxn>
-                  <a:cxn ang="0">
-                    <a:pos x="T6" y="T7"/>
-                  </a:cxn>
-                  <a:cxn ang="0">
-                    <a:pos x="T8" y="T9"/>
-                  </a:cxn>
-                  <a:cxn ang="0">
-                    <a:pos x="T10" y="T11"/>
-                  </a:cxn>
-                  <a:cxn ang="0">
-                    <a:pos x="T12" y="T13"/>
-                  </a:cxn>
-                  <a:cxn ang="0">
-                    <a:pos x="T14" y="T15"/>
-                  </a:cxn>
-                  <a:cxn ang="0">
-                    <a:pos x="T16" y="T17"/>
-                  </a:cxn>
-                  <a:cxn ang="0">
-                    <a:pos x="T18" y="T19"/>
-                  </a:cxn>
-                  <a:cxn ang="0">
-                    <a:pos x="T20" y="T21"/>
-                  </a:cxn>
-                  <a:cxn ang="0">
-                    <a:pos x="T22" y="T23"/>
-                  </a:cxn>
-                  <a:cxn ang="0">
-                    <a:pos x="T24" y="T25"/>
-                  </a:cxn>
-                  <a:cxn ang="0">
-                    <a:pos x="T26" y="T27"/>
-                  </a:cxn>
-                  <a:cxn ang="0">
-                    <a:pos x="T28" y="T29"/>
-                  </a:cxn>
-                  <a:cxn ang="0">
-                    <a:pos x="T30" y="T31"/>
-                  </a:cxn>
-                </a:cxnLst>
-                <a:rect l="0" t="0" r="r" b="b"/>
-                <a:pathLst>
-                  <a:path w="279" h="278">
-                    <a:moveTo>
-                      <a:pt x="268" y="0"/>
-                    </a:moveTo>
-                    <a:lnTo>
-                      <a:pt x="268" y="0"/>
-                    </a:lnTo>
-                    <a:cubicBezTo>
-                      <a:pt x="12" y="0"/>
-                      <a:pt x="12" y="0"/>
-                      <a:pt x="12" y="0"/>
-                    </a:cubicBezTo>
-                    <a:cubicBezTo>
-                      <a:pt x="5" y="0"/>
-                      <a:pt x="0" y="4"/>
-                      <a:pt x="0" y="11"/>
-                    </a:cubicBezTo>
-                    <a:cubicBezTo>
-                      <a:pt x="0" y="266"/>
-                      <a:pt x="0" y="266"/>
-                      <a:pt x="0" y="266"/>
-                    </a:cubicBezTo>
-                    <a:cubicBezTo>
-                      <a:pt x="0" y="273"/>
-                      <a:pt x="5" y="277"/>
-                      <a:pt x="12" y="277"/>
-                    </a:cubicBezTo>
-                    <a:cubicBezTo>
-                      <a:pt x="268" y="277"/>
-                      <a:pt x="268" y="277"/>
-                      <a:pt x="268" y="277"/>
-                    </a:cubicBezTo>
-                    <a:cubicBezTo>
-                      <a:pt x="273" y="277"/>
-                      <a:pt x="278" y="273"/>
-                      <a:pt x="278" y="266"/>
-                    </a:cubicBezTo>
-                    <a:cubicBezTo>
-                      <a:pt x="278" y="11"/>
-                      <a:pt x="278" y="11"/>
-                      <a:pt x="278" y="11"/>
-                    </a:cubicBezTo>
-                    <a:cubicBezTo>
-                      <a:pt x="278" y="4"/>
-                      <a:pt x="273" y="0"/>
-                      <a:pt x="268" y="0"/>
-                    </a:cubicBezTo>
-                    <a:close/>
-                    <a:moveTo>
-                      <a:pt x="256" y="255"/>
-                    </a:moveTo>
-                    <a:lnTo>
-                      <a:pt x="256" y="255"/>
-                    </a:lnTo>
-                    <a:cubicBezTo>
-                      <a:pt x="22" y="255"/>
-                      <a:pt x="22" y="255"/>
-                      <a:pt x="22" y="255"/>
-                    </a:cubicBezTo>
-                    <a:cubicBezTo>
-                      <a:pt x="22" y="21"/>
-                      <a:pt x="22" y="21"/>
-                      <a:pt x="22" y="21"/>
-                    </a:cubicBezTo>
-                    <a:cubicBezTo>
-                      <a:pt x="256" y="21"/>
-                      <a:pt x="256" y="21"/>
-                      <a:pt x="256" y="21"/>
-                    </a:cubicBezTo>
-                    <a:lnTo>
-                      <a:pt x="256" y="255"/>
-                    </a:lnTo>
-                    <a:close/>
-                  </a:path>
-                </a:pathLst>
-              </a:custGeom>
-              <a:solidFill>
-                <a:schemeClr val="bg1"/>
-              </a:solidFill>
-              <a:ln w="19050" cap="flat">
-                <a:solidFill>
-                  <a:srgbClr val="618153"/>
-                </a:solidFill>
-                <a:bevel/>
-                <a:headEnd/>
-                <a:tailEnd/>
-              </a:ln>
-              <a:effectLst/>
-              <a:extLst>
-                <a:ext uri="{AF507438-7753-43E0-B8FC-AC1667EBCBE1}">
-                  <a14:hiddenEffects xmlns:a14="http://schemas.microsoft.com/office/drawing/2010/main">
-                    <a:effectLst>
-                      <a:outerShdw blurRad="63500" dist="38099" dir="2700000" algn="ctr" rotWithShape="0">
-                        <a:srgbClr val="000000">
-                          <a:alpha val="74998"/>
-                        </a:srgbClr>
-                      </a:outerShdw>
-                    </a:effectLst>
-                  </a14:hiddenEffects>
-                </a:ext>
-              </a:extLst>
-            </p:spPr>
-            <p:txBody>
-              <a:bodyPr wrap="none" anchor="ctr"/>
-              <a:lstStyle/>
-              <a:p>
-                <a:endParaRPr lang="en-US" sz="964"/>
-              </a:p>
-            </p:txBody>
-          </p:sp>
-          <p:sp>
-            <p:nvSpPr>
-              <p:cNvPr id="33" name="Freeform 112">
-                <a:extLst>
-                  <a:ext uri="{FF2B5EF4-FFF2-40B4-BE49-F238E27FC236}">
-                    <a16:creationId xmlns:a16="http://schemas.microsoft.com/office/drawing/2014/main" xmlns="" id="{9BB65042-15E8-4757-A437-CB30B736B658}"/>
-                  </a:ext>
-                </a:extLst>
-              </p:cNvPr>
-              <p:cNvSpPr>
-                <a:spLocks noChangeArrowheads="1"/>
-              </p:cNvSpPr>
-              <p:nvPr/>
-            </p:nvSpPr>
-            <p:spPr bwMode="auto">
-              <a:xfrm>
-                <a:off x="7539389" y="3807187"/>
-                <a:ext cx="416888" cy="451880"/>
-              </a:xfrm>
-              <a:custGeom>
-                <a:avLst/>
-                <a:gdLst>
-                  <a:gd name="T0" fmla="*/ 11 w 598"/>
-                  <a:gd name="T1" fmla="*/ 501 h 598"/>
-                  <a:gd name="T2" fmla="*/ 96 w 598"/>
-                  <a:gd name="T3" fmla="*/ 522 h 598"/>
-                  <a:gd name="T4" fmla="*/ 117 w 598"/>
-                  <a:gd name="T5" fmla="*/ 522 h 598"/>
-                  <a:gd name="T6" fmla="*/ 160 w 598"/>
-                  <a:gd name="T7" fmla="*/ 586 h 598"/>
-                  <a:gd name="T8" fmla="*/ 192 w 598"/>
-                  <a:gd name="T9" fmla="*/ 597 h 598"/>
-                  <a:gd name="T10" fmla="*/ 225 w 598"/>
-                  <a:gd name="T11" fmla="*/ 586 h 598"/>
-                  <a:gd name="T12" fmla="*/ 267 w 598"/>
-                  <a:gd name="T13" fmla="*/ 522 h 598"/>
-                  <a:gd name="T14" fmla="*/ 289 w 598"/>
-                  <a:gd name="T15" fmla="*/ 522 h 598"/>
-                  <a:gd name="T16" fmla="*/ 331 w 598"/>
-                  <a:gd name="T17" fmla="*/ 586 h 598"/>
-                  <a:gd name="T18" fmla="*/ 363 w 598"/>
-                  <a:gd name="T19" fmla="*/ 597 h 598"/>
-                  <a:gd name="T20" fmla="*/ 395 w 598"/>
-                  <a:gd name="T21" fmla="*/ 586 h 598"/>
-                  <a:gd name="T22" fmla="*/ 438 w 598"/>
-                  <a:gd name="T23" fmla="*/ 522 h 598"/>
-                  <a:gd name="T24" fmla="*/ 459 w 598"/>
-                  <a:gd name="T25" fmla="*/ 522 h 598"/>
-                  <a:gd name="T26" fmla="*/ 501 w 598"/>
-                  <a:gd name="T27" fmla="*/ 586 h 598"/>
-                  <a:gd name="T28" fmla="*/ 523 w 598"/>
-                  <a:gd name="T29" fmla="*/ 501 h 598"/>
-                  <a:gd name="T30" fmla="*/ 523 w 598"/>
-                  <a:gd name="T31" fmla="*/ 479 h 598"/>
-                  <a:gd name="T32" fmla="*/ 586 w 598"/>
-                  <a:gd name="T33" fmla="*/ 437 h 598"/>
-                  <a:gd name="T34" fmla="*/ 597 w 598"/>
-                  <a:gd name="T35" fmla="*/ 405 h 598"/>
-                  <a:gd name="T36" fmla="*/ 586 w 598"/>
-                  <a:gd name="T37" fmla="*/ 372 h 598"/>
-                  <a:gd name="T38" fmla="*/ 523 w 598"/>
-                  <a:gd name="T39" fmla="*/ 329 h 598"/>
-                  <a:gd name="T40" fmla="*/ 523 w 598"/>
-                  <a:gd name="T41" fmla="*/ 308 h 598"/>
-                  <a:gd name="T42" fmla="*/ 586 w 598"/>
-                  <a:gd name="T43" fmla="*/ 266 h 598"/>
-                  <a:gd name="T44" fmla="*/ 597 w 598"/>
-                  <a:gd name="T45" fmla="*/ 234 h 598"/>
-                  <a:gd name="T46" fmla="*/ 586 w 598"/>
-                  <a:gd name="T47" fmla="*/ 202 h 598"/>
-                  <a:gd name="T48" fmla="*/ 523 w 598"/>
-                  <a:gd name="T49" fmla="*/ 160 h 598"/>
-                  <a:gd name="T50" fmla="*/ 523 w 598"/>
-                  <a:gd name="T51" fmla="*/ 139 h 598"/>
-                  <a:gd name="T52" fmla="*/ 586 w 598"/>
-                  <a:gd name="T53" fmla="*/ 96 h 598"/>
-                  <a:gd name="T54" fmla="*/ 501 w 598"/>
-                  <a:gd name="T55" fmla="*/ 74 h 598"/>
-                  <a:gd name="T56" fmla="*/ 480 w 598"/>
-                  <a:gd name="T57" fmla="*/ 74 h 598"/>
-                  <a:gd name="T58" fmla="*/ 438 w 598"/>
-                  <a:gd name="T59" fmla="*/ 11 h 598"/>
-                  <a:gd name="T60" fmla="*/ 406 w 598"/>
-                  <a:gd name="T61" fmla="*/ 0 h 598"/>
-                  <a:gd name="T62" fmla="*/ 374 w 598"/>
-                  <a:gd name="T63" fmla="*/ 11 h 598"/>
-                  <a:gd name="T64" fmla="*/ 331 w 598"/>
-                  <a:gd name="T65" fmla="*/ 74 h 598"/>
-                  <a:gd name="T66" fmla="*/ 309 w 598"/>
-                  <a:gd name="T67" fmla="*/ 74 h 598"/>
-                  <a:gd name="T68" fmla="*/ 267 w 598"/>
-                  <a:gd name="T69" fmla="*/ 11 h 598"/>
-                  <a:gd name="T70" fmla="*/ 235 w 598"/>
-                  <a:gd name="T71" fmla="*/ 0 h 598"/>
-                  <a:gd name="T72" fmla="*/ 203 w 598"/>
-                  <a:gd name="T73" fmla="*/ 11 h 598"/>
-                  <a:gd name="T74" fmla="*/ 160 w 598"/>
-                  <a:gd name="T75" fmla="*/ 74 h 598"/>
-                  <a:gd name="T76" fmla="*/ 139 w 598"/>
-                  <a:gd name="T77" fmla="*/ 74 h 598"/>
-                  <a:gd name="T78" fmla="*/ 96 w 598"/>
-                  <a:gd name="T79" fmla="*/ 11 h 598"/>
-                  <a:gd name="T80" fmla="*/ 75 w 598"/>
-                  <a:gd name="T81" fmla="*/ 96 h 598"/>
-                  <a:gd name="T82" fmla="*/ 75 w 598"/>
-                  <a:gd name="T83" fmla="*/ 117 h 598"/>
-                  <a:gd name="T84" fmla="*/ 11 w 598"/>
-                  <a:gd name="T85" fmla="*/ 160 h 598"/>
-                  <a:gd name="T86" fmla="*/ 0 w 598"/>
-                  <a:gd name="T87" fmla="*/ 192 h 598"/>
-                  <a:gd name="T88" fmla="*/ 11 w 598"/>
-                  <a:gd name="T89" fmla="*/ 223 h 598"/>
-                  <a:gd name="T90" fmla="*/ 75 w 598"/>
-                  <a:gd name="T91" fmla="*/ 266 h 598"/>
-                  <a:gd name="T92" fmla="*/ 75 w 598"/>
-                  <a:gd name="T93" fmla="*/ 288 h 598"/>
-                  <a:gd name="T94" fmla="*/ 11 w 598"/>
-                  <a:gd name="T95" fmla="*/ 329 h 598"/>
-                  <a:gd name="T96" fmla="*/ 0 w 598"/>
-                  <a:gd name="T97" fmla="*/ 362 h 598"/>
-                  <a:gd name="T98" fmla="*/ 11 w 598"/>
-                  <a:gd name="T99" fmla="*/ 394 h 598"/>
-                  <a:gd name="T100" fmla="*/ 75 w 598"/>
-                  <a:gd name="T101" fmla="*/ 437 h 598"/>
-                  <a:gd name="T102" fmla="*/ 75 w 598"/>
-                  <a:gd name="T103" fmla="*/ 458 h 598"/>
-                  <a:gd name="T104" fmla="*/ 96 w 598"/>
-                  <a:gd name="T105" fmla="*/ 96 h 598"/>
-                  <a:gd name="T106" fmla="*/ 96 w 598"/>
-                  <a:gd name="T107" fmla="*/ 96 h 598"/>
-                </a:gdLst>
-                <a:ahLst/>
-                <a:cxnLst>
-                  <a:cxn ang="0">
-                    <a:pos x="T0" y="T1"/>
-                  </a:cxn>
-                  <a:cxn ang="0">
-                    <a:pos x="T2" y="T3"/>
-                  </a:cxn>
-                  <a:cxn ang="0">
-                    <a:pos x="T4" y="T5"/>
-                  </a:cxn>
-                  <a:cxn ang="0">
-                    <a:pos x="T6" y="T7"/>
-                  </a:cxn>
-                  <a:cxn ang="0">
-                    <a:pos x="T8" y="T9"/>
-                  </a:cxn>
-                  <a:cxn ang="0">
-                    <a:pos x="T10" y="T11"/>
-                  </a:cxn>
-                  <a:cxn ang="0">
-                    <a:pos x="T12" y="T13"/>
-                  </a:cxn>
-                  <a:cxn ang="0">
-                    <a:pos x="T14" y="T15"/>
-                  </a:cxn>
-                  <a:cxn ang="0">
-                    <a:pos x="T16" y="T17"/>
-                  </a:cxn>
-                  <a:cxn ang="0">
-                    <a:pos x="T18" y="T19"/>
-                  </a:cxn>
-                  <a:cxn ang="0">
-                    <a:pos x="T20" y="T21"/>
-                  </a:cxn>
-                  <a:cxn ang="0">
-                    <a:pos x="T22" y="T23"/>
-                  </a:cxn>
-                  <a:cxn ang="0">
-                    <a:pos x="T24" y="T25"/>
-                  </a:cxn>
-                  <a:cxn ang="0">
-                    <a:pos x="T26" y="T27"/>
-                  </a:cxn>
-                  <a:cxn ang="0">
-                    <a:pos x="T28" y="T29"/>
-                  </a:cxn>
-                  <a:cxn ang="0">
-                    <a:pos x="T30" y="T31"/>
-                  </a:cxn>
-                  <a:cxn ang="0">
-                    <a:pos x="T32" y="T33"/>
-                  </a:cxn>
-                  <a:cxn ang="0">
-                    <a:pos x="T34" y="T35"/>
-                  </a:cxn>
-                  <a:cxn ang="0">
-                    <a:pos x="T36" y="T37"/>
-                  </a:cxn>
-                  <a:cxn ang="0">
-                    <a:pos x="T38" y="T39"/>
-                  </a:cxn>
-                  <a:cxn ang="0">
-                    <a:pos x="T40" y="T41"/>
-                  </a:cxn>
-                  <a:cxn ang="0">
-                    <a:pos x="T42" y="T43"/>
-                  </a:cxn>
-                  <a:cxn ang="0">
-                    <a:pos x="T44" y="T45"/>
-                  </a:cxn>
-                  <a:cxn ang="0">
-                    <a:pos x="T46" y="T47"/>
-                  </a:cxn>
-                  <a:cxn ang="0">
-                    <a:pos x="T48" y="T49"/>
-                  </a:cxn>
-                  <a:cxn ang="0">
-                    <a:pos x="T50" y="T51"/>
-                  </a:cxn>
-                  <a:cxn ang="0">
-                    <a:pos x="T52" y="T53"/>
-                  </a:cxn>
-                  <a:cxn ang="0">
-                    <a:pos x="T54" y="T55"/>
-                  </a:cxn>
-                  <a:cxn ang="0">
-                    <a:pos x="T56" y="T57"/>
-                  </a:cxn>
-                  <a:cxn ang="0">
-                    <a:pos x="T58" y="T59"/>
-                  </a:cxn>
-                  <a:cxn ang="0">
-                    <a:pos x="T60" y="T61"/>
-                  </a:cxn>
-                  <a:cxn ang="0">
-                    <a:pos x="T62" y="T63"/>
-                  </a:cxn>
-                  <a:cxn ang="0">
-                    <a:pos x="T64" y="T65"/>
-                  </a:cxn>
-                  <a:cxn ang="0">
-                    <a:pos x="T66" y="T67"/>
-                  </a:cxn>
-                  <a:cxn ang="0">
-                    <a:pos x="T68" y="T69"/>
-                  </a:cxn>
-                  <a:cxn ang="0">
-                    <a:pos x="T70" y="T71"/>
-                  </a:cxn>
-                  <a:cxn ang="0">
-                    <a:pos x="T72" y="T73"/>
-                  </a:cxn>
-                  <a:cxn ang="0">
-                    <a:pos x="T74" y="T75"/>
-                  </a:cxn>
-                  <a:cxn ang="0">
-                    <a:pos x="T76" y="T77"/>
-                  </a:cxn>
-                  <a:cxn ang="0">
-                    <a:pos x="T78" y="T79"/>
-                  </a:cxn>
-                  <a:cxn ang="0">
-                    <a:pos x="T80" y="T81"/>
-                  </a:cxn>
-                  <a:cxn ang="0">
-                    <a:pos x="T82" y="T83"/>
-                  </a:cxn>
-                  <a:cxn ang="0">
-                    <a:pos x="T84" y="T85"/>
-                  </a:cxn>
-                  <a:cxn ang="0">
-                    <a:pos x="T86" y="T87"/>
-                  </a:cxn>
-                  <a:cxn ang="0">
-                    <a:pos x="T88" y="T89"/>
-                  </a:cxn>
-                  <a:cxn ang="0">
-                    <a:pos x="T90" y="T91"/>
-                  </a:cxn>
-                  <a:cxn ang="0">
-                    <a:pos x="T92" y="T93"/>
-                  </a:cxn>
-                  <a:cxn ang="0">
-                    <a:pos x="T94" y="T95"/>
-                  </a:cxn>
-                  <a:cxn ang="0">
-                    <a:pos x="T96" y="T97"/>
-                  </a:cxn>
-                  <a:cxn ang="0">
-                    <a:pos x="T98" y="T99"/>
-                  </a:cxn>
-                  <a:cxn ang="0">
-                    <a:pos x="T100" y="T101"/>
-                  </a:cxn>
-                  <a:cxn ang="0">
-                    <a:pos x="T102" y="T103"/>
-                  </a:cxn>
-                  <a:cxn ang="0">
-                    <a:pos x="T104" y="T105"/>
-                  </a:cxn>
-                  <a:cxn ang="0">
-                    <a:pos x="T106" y="T107"/>
-                  </a:cxn>
-                </a:cxnLst>
-                <a:rect l="0" t="0" r="r" b="b"/>
-                <a:pathLst>
-                  <a:path w="598" h="598">
-                    <a:moveTo>
-                      <a:pt x="11" y="479"/>
-                    </a:moveTo>
-                    <a:lnTo>
-                      <a:pt x="11" y="479"/>
-                    </a:lnTo>
-                    <a:cubicBezTo>
-                      <a:pt x="5" y="479"/>
-                      <a:pt x="0" y="484"/>
-                      <a:pt x="0" y="490"/>
-                    </a:cubicBezTo>
-                    <a:cubicBezTo>
-                      <a:pt x="0" y="496"/>
-                      <a:pt x="5" y="501"/>
-                      <a:pt x="11" y="501"/>
-                    </a:cubicBezTo>
-                    <a:cubicBezTo>
-                      <a:pt x="75" y="501"/>
-                      <a:pt x="75" y="501"/>
-                      <a:pt x="75" y="501"/>
-                    </a:cubicBezTo>
-                    <a:cubicBezTo>
-                      <a:pt x="75" y="511"/>
-                      <a:pt x="75" y="511"/>
-                      <a:pt x="75" y="511"/>
-                    </a:cubicBezTo>
-                    <a:cubicBezTo>
-                      <a:pt x="75" y="517"/>
-                      <a:pt x="81" y="522"/>
-                      <a:pt x="86" y="522"/>
-                    </a:cubicBezTo>
-                    <a:cubicBezTo>
-                      <a:pt x="96" y="522"/>
-                      <a:pt x="96" y="522"/>
-                      <a:pt x="96" y="522"/>
-                    </a:cubicBezTo>
-                    <a:cubicBezTo>
-                      <a:pt x="96" y="586"/>
-                      <a:pt x="96" y="586"/>
-                      <a:pt x="96" y="586"/>
-                    </a:cubicBezTo>
-                    <a:cubicBezTo>
-                      <a:pt x="96" y="592"/>
-                      <a:pt x="101" y="597"/>
-                      <a:pt x="107" y="597"/>
-                    </a:cubicBezTo>
-                    <a:cubicBezTo>
-                      <a:pt x="113" y="597"/>
-                      <a:pt x="117" y="592"/>
-                      <a:pt x="117" y="586"/>
-                    </a:cubicBezTo>
-                    <a:cubicBezTo>
-                      <a:pt x="117" y="522"/>
-                      <a:pt x="117" y="522"/>
-                      <a:pt x="117" y="522"/>
-                    </a:cubicBezTo>
-                    <a:cubicBezTo>
-                      <a:pt x="139" y="522"/>
-                      <a:pt x="139" y="522"/>
-                      <a:pt x="139" y="522"/>
-                    </a:cubicBezTo>
-                    <a:cubicBezTo>
-                      <a:pt x="139" y="586"/>
-                      <a:pt x="139" y="586"/>
-                      <a:pt x="139" y="586"/>
-                    </a:cubicBezTo>
-                    <a:cubicBezTo>
-                      <a:pt x="139" y="592"/>
-                      <a:pt x="144" y="597"/>
-                      <a:pt x="150" y="597"/>
-                    </a:cubicBezTo>
-                    <a:cubicBezTo>
-                      <a:pt x="155" y="597"/>
-                      <a:pt x="160" y="592"/>
-                      <a:pt x="160" y="586"/>
-                    </a:cubicBezTo>
-                    <a:cubicBezTo>
-                      <a:pt x="160" y="522"/>
-                      <a:pt x="160" y="522"/>
-                      <a:pt x="160" y="522"/>
-                    </a:cubicBezTo>
-                    <a:cubicBezTo>
-                      <a:pt x="182" y="522"/>
-                      <a:pt x="182" y="522"/>
-                      <a:pt x="182" y="522"/>
-                    </a:cubicBezTo>
-                    <a:cubicBezTo>
-                      <a:pt x="182" y="586"/>
-                      <a:pt x="182" y="586"/>
-                      <a:pt x="182" y="586"/>
-                    </a:cubicBezTo>
-                    <a:cubicBezTo>
-                      <a:pt x="182" y="592"/>
-                      <a:pt x="187" y="597"/>
-                      <a:pt x="192" y="597"/>
-                    </a:cubicBezTo>
-                    <a:cubicBezTo>
-                      <a:pt x="198" y="597"/>
-                      <a:pt x="203" y="592"/>
-                      <a:pt x="203" y="586"/>
-                    </a:cubicBezTo>
-                    <a:cubicBezTo>
-                      <a:pt x="203" y="522"/>
-                      <a:pt x="203" y="522"/>
-                      <a:pt x="203" y="522"/>
-                    </a:cubicBezTo>
-                    <a:cubicBezTo>
-                      <a:pt x="225" y="522"/>
-                      <a:pt x="225" y="522"/>
-                      <a:pt x="225" y="522"/>
-                    </a:cubicBezTo>
-                    <a:cubicBezTo>
-                      <a:pt x="225" y="586"/>
-                      <a:pt x="225" y="586"/>
-                      <a:pt x="225" y="586"/>
-                    </a:cubicBezTo>
-                    <a:cubicBezTo>
-                      <a:pt x="225" y="592"/>
-                      <a:pt x="229" y="597"/>
-                      <a:pt x="235" y="597"/>
-                    </a:cubicBezTo>
-                    <a:cubicBezTo>
-                      <a:pt x="241" y="597"/>
-                      <a:pt x="246" y="592"/>
-                      <a:pt x="246" y="586"/>
-                    </a:cubicBezTo>
-                    <a:cubicBezTo>
-                      <a:pt x="246" y="522"/>
-                      <a:pt x="246" y="522"/>
-                      <a:pt x="246" y="522"/>
-                    </a:cubicBezTo>
-                    <a:cubicBezTo>
-                      <a:pt x="267" y="522"/>
-                      <a:pt x="267" y="522"/>
-                      <a:pt x="267" y="522"/>
-                    </a:cubicBezTo>
-                    <a:cubicBezTo>
-                      <a:pt x="267" y="586"/>
-                      <a:pt x="267" y="586"/>
-                      <a:pt x="267" y="586"/>
-                    </a:cubicBezTo>
-                    <a:cubicBezTo>
-                      <a:pt x="267" y="592"/>
-                      <a:pt x="271" y="597"/>
-                      <a:pt x="278" y="597"/>
-                    </a:cubicBezTo>
-                    <a:cubicBezTo>
-                      <a:pt x="283" y="597"/>
-                      <a:pt x="289" y="592"/>
-                      <a:pt x="289" y="586"/>
-                    </a:cubicBezTo>
-                    <a:cubicBezTo>
-                      <a:pt x="289" y="522"/>
-                      <a:pt x="289" y="522"/>
-                      <a:pt x="289" y="522"/>
-                    </a:cubicBezTo>
-                    <a:cubicBezTo>
-                      <a:pt x="309" y="522"/>
-                      <a:pt x="309" y="522"/>
-                      <a:pt x="309" y="522"/>
-                    </a:cubicBezTo>
-                    <a:cubicBezTo>
-                      <a:pt x="309" y="586"/>
-                      <a:pt x="309" y="586"/>
-                      <a:pt x="309" y="586"/>
-                    </a:cubicBezTo>
-                    <a:cubicBezTo>
-                      <a:pt x="309" y="592"/>
-                      <a:pt x="314" y="597"/>
-                      <a:pt x="320" y="597"/>
-                    </a:cubicBezTo>
-                    <a:cubicBezTo>
-                      <a:pt x="326" y="597"/>
-                      <a:pt x="331" y="592"/>
-                      <a:pt x="331" y="586"/>
-                    </a:cubicBezTo>
-                    <a:cubicBezTo>
-                      <a:pt x="331" y="522"/>
-                      <a:pt x="331" y="522"/>
-                      <a:pt x="331" y="522"/>
-                    </a:cubicBezTo>
-                    <a:cubicBezTo>
-                      <a:pt x="352" y="522"/>
-                      <a:pt x="352" y="522"/>
-                      <a:pt x="352" y="522"/>
-                    </a:cubicBezTo>
-                    <a:cubicBezTo>
-                      <a:pt x="352" y="586"/>
-                      <a:pt x="352" y="586"/>
-                      <a:pt x="352" y="586"/>
-                    </a:cubicBezTo>
-                    <a:cubicBezTo>
-                      <a:pt x="352" y="592"/>
-                      <a:pt x="357" y="597"/>
-                      <a:pt x="363" y="597"/>
-                    </a:cubicBezTo>
-                    <a:cubicBezTo>
-                      <a:pt x="369" y="597"/>
-                      <a:pt x="374" y="592"/>
-                      <a:pt x="374" y="586"/>
-                    </a:cubicBezTo>
-                    <a:cubicBezTo>
-                      <a:pt x="374" y="522"/>
-                      <a:pt x="374" y="522"/>
-                      <a:pt x="374" y="522"/>
-                    </a:cubicBezTo>
-                    <a:cubicBezTo>
-                      <a:pt x="395" y="522"/>
-                      <a:pt x="395" y="522"/>
-                      <a:pt x="395" y="522"/>
-                    </a:cubicBezTo>
-                    <a:cubicBezTo>
-                      <a:pt x="395" y="586"/>
-                      <a:pt x="395" y="586"/>
-                      <a:pt x="395" y="586"/>
-                    </a:cubicBezTo>
-                    <a:cubicBezTo>
-                      <a:pt x="395" y="592"/>
-                      <a:pt x="399" y="597"/>
-                      <a:pt x="406" y="597"/>
-                    </a:cubicBezTo>
-                    <a:cubicBezTo>
-                      <a:pt x="411" y="597"/>
-                      <a:pt x="416" y="592"/>
-                      <a:pt x="416" y="586"/>
-                    </a:cubicBezTo>
-                    <a:cubicBezTo>
-                      <a:pt x="416" y="522"/>
-                      <a:pt x="416" y="522"/>
-                      <a:pt x="416" y="522"/>
-                    </a:cubicBezTo>
-                    <a:cubicBezTo>
-                      <a:pt x="438" y="522"/>
-                      <a:pt x="438" y="522"/>
-                      <a:pt x="438" y="522"/>
-                    </a:cubicBezTo>
-                    <a:cubicBezTo>
-                      <a:pt x="438" y="586"/>
-                      <a:pt x="438" y="586"/>
-                      <a:pt x="438" y="586"/>
-                    </a:cubicBezTo>
-                    <a:cubicBezTo>
-                      <a:pt x="438" y="592"/>
-                      <a:pt x="442" y="597"/>
-                      <a:pt x="448" y="597"/>
-                    </a:cubicBezTo>
-                    <a:cubicBezTo>
-                      <a:pt x="454" y="597"/>
-                      <a:pt x="459" y="592"/>
-                      <a:pt x="459" y="586"/>
-                    </a:cubicBezTo>
-                    <a:cubicBezTo>
-                      <a:pt x="459" y="522"/>
-                      <a:pt x="459" y="522"/>
-                      <a:pt x="459" y="522"/>
-                    </a:cubicBezTo>
-                    <a:cubicBezTo>
-                      <a:pt x="480" y="522"/>
-                      <a:pt x="480" y="522"/>
-                      <a:pt x="480" y="522"/>
-                    </a:cubicBezTo>
-                    <a:cubicBezTo>
-                      <a:pt x="480" y="586"/>
-                      <a:pt x="480" y="586"/>
-                      <a:pt x="480" y="586"/>
-                    </a:cubicBezTo>
-                    <a:cubicBezTo>
-                      <a:pt x="480" y="592"/>
-                      <a:pt x="485" y="597"/>
-                      <a:pt x="491" y="597"/>
-                    </a:cubicBezTo>
-                    <a:cubicBezTo>
-                      <a:pt x="497" y="597"/>
-                      <a:pt x="501" y="592"/>
-                      <a:pt x="501" y="586"/>
-                    </a:cubicBezTo>
-                    <a:cubicBezTo>
-                      <a:pt x="501" y="522"/>
-                      <a:pt x="501" y="522"/>
-                      <a:pt x="501" y="522"/>
-                    </a:cubicBezTo>
-                    <a:cubicBezTo>
-                      <a:pt x="512" y="522"/>
-                      <a:pt x="512" y="522"/>
-                      <a:pt x="512" y="522"/>
-                    </a:cubicBezTo>
-                    <a:cubicBezTo>
-                      <a:pt x="519" y="522"/>
-                      <a:pt x="523" y="517"/>
-                      <a:pt x="523" y="511"/>
-                    </a:cubicBezTo>
-                    <a:cubicBezTo>
-                      <a:pt x="523" y="501"/>
-                      <a:pt x="523" y="501"/>
-                      <a:pt x="523" y="501"/>
-                    </a:cubicBezTo>
-                    <a:cubicBezTo>
-                      <a:pt x="586" y="501"/>
-                      <a:pt x="586" y="501"/>
-                      <a:pt x="586" y="501"/>
-                    </a:cubicBezTo>
-                    <a:cubicBezTo>
-                      <a:pt x="593" y="501"/>
-                      <a:pt x="597" y="496"/>
-                      <a:pt x="597" y="490"/>
-                    </a:cubicBezTo>
-                    <a:cubicBezTo>
-                      <a:pt x="597" y="484"/>
-                      <a:pt x="593" y="479"/>
-                      <a:pt x="586" y="479"/>
-                    </a:cubicBezTo>
-                    <a:cubicBezTo>
-                      <a:pt x="523" y="479"/>
-                      <a:pt x="523" y="479"/>
-                      <a:pt x="523" y="479"/>
-                    </a:cubicBezTo>
-                    <a:cubicBezTo>
-                      <a:pt x="523" y="458"/>
-                      <a:pt x="523" y="458"/>
-                      <a:pt x="523" y="458"/>
-                    </a:cubicBezTo>
-                    <a:cubicBezTo>
-                      <a:pt x="586" y="458"/>
-                      <a:pt x="586" y="458"/>
-                      <a:pt x="586" y="458"/>
-                    </a:cubicBezTo>
-                    <a:cubicBezTo>
-                      <a:pt x="593" y="458"/>
-                      <a:pt x="597" y="454"/>
-                      <a:pt x="597" y="448"/>
-                    </a:cubicBezTo>
-                    <a:cubicBezTo>
-                      <a:pt x="597" y="442"/>
-                      <a:pt x="593" y="437"/>
-                      <a:pt x="586" y="437"/>
-                    </a:cubicBezTo>
-                    <a:cubicBezTo>
-                      <a:pt x="523" y="437"/>
-                      <a:pt x="523" y="437"/>
-                      <a:pt x="523" y="437"/>
-                    </a:cubicBezTo>
-                    <a:cubicBezTo>
-                      <a:pt x="523" y="415"/>
-                      <a:pt x="523" y="415"/>
-                      <a:pt x="523" y="415"/>
-                    </a:cubicBezTo>
-                    <a:cubicBezTo>
-                      <a:pt x="586" y="415"/>
-                      <a:pt x="586" y="415"/>
-                      <a:pt x="586" y="415"/>
-                    </a:cubicBezTo>
-                    <a:cubicBezTo>
-                      <a:pt x="593" y="415"/>
-                      <a:pt x="597" y="411"/>
-                      <a:pt x="597" y="405"/>
-                    </a:cubicBezTo>
-                    <a:cubicBezTo>
-                      <a:pt x="597" y="399"/>
-                      <a:pt x="593" y="394"/>
-                      <a:pt x="586" y="394"/>
-                    </a:cubicBezTo>
-                    <a:cubicBezTo>
-                      <a:pt x="523" y="394"/>
-                      <a:pt x="523" y="394"/>
-                      <a:pt x="523" y="394"/>
-                    </a:cubicBezTo>
-                    <a:cubicBezTo>
-                      <a:pt x="523" y="372"/>
-                      <a:pt x="523" y="372"/>
-                      <a:pt x="523" y="372"/>
-                    </a:cubicBezTo>
-                    <a:cubicBezTo>
-                      <a:pt x="586" y="372"/>
-                      <a:pt x="586" y="372"/>
-                      <a:pt x="586" y="372"/>
-                    </a:cubicBezTo>
-                    <a:cubicBezTo>
-                      <a:pt x="593" y="372"/>
-                      <a:pt x="597" y="368"/>
-                      <a:pt x="597" y="362"/>
-                    </a:cubicBezTo>
-                    <a:cubicBezTo>
-                      <a:pt x="597" y="357"/>
-                      <a:pt x="593" y="351"/>
-                      <a:pt x="586" y="351"/>
-                    </a:cubicBezTo>
-                    <a:cubicBezTo>
-                      <a:pt x="523" y="351"/>
-                      <a:pt x="523" y="351"/>
-                      <a:pt x="523" y="351"/>
-                    </a:cubicBezTo>
-                    <a:cubicBezTo>
-                      <a:pt x="523" y="329"/>
-                      <a:pt x="523" y="329"/>
-                      <a:pt x="523" y="329"/>
-                    </a:cubicBezTo>
-                    <a:cubicBezTo>
-                      <a:pt x="586" y="329"/>
-                      <a:pt x="586" y="329"/>
-                      <a:pt x="586" y="329"/>
-                    </a:cubicBezTo>
-                    <a:cubicBezTo>
-                      <a:pt x="593" y="329"/>
-                      <a:pt x="597" y="325"/>
-                      <a:pt x="597" y="319"/>
-                    </a:cubicBezTo>
-                    <a:cubicBezTo>
-                      <a:pt x="597" y="314"/>
-                      <a:pt x="593" y="308"/>
-                      <a:pt x="586" y="308"/>
-                    </a:cubicBezTo>
-                    <a:cubicBezTo>
-                      <a:pt x="523" y="308"/>
-                      <a:pt x="523" y="308"/>
-                      <a:pt x="523" y="308"/>
-                    </a:cubicBezTo>
-                    <a:cubicBezTo>
-                      <a:pt x="523" y="288"/>
-                      <a:pt x="523" y="288"/>
-                      <a:pt x="523" y="288"/>
-                    </a:cubicBezTo>
-                    <a:cubicBezTo>
-                      <a:pt x="586" y="288"/>
-                      <a:pt x="586" y="288"/>
-                      <a:pt x="586" y="288"/>
-                    </a:cubicBezTo>
-                    <a:cubicBezTo>
-                      <a:pt x="593" y="288"/>
-                      <a:pt x="597" y="283"/>
-                      <a:pt x="597" y="276"/>
-                    </a:cubicBezTo>
-                    <a:cubicBezTo>
-                      <a:pt x="597" y="271"/>
-                      <a:pt x="593" y="266"/>
-                      <a:pt x="586" y="266"/>
-                    </a:cubicBezTo>
-                    <a:cubicBezTo>
-                      <a:pt x="523" y="266"/>
-                      <a:pt x="523" y="266"/>
-                      <a:pt x="523" y="266"/>
-                    </a:cubicBezTo>
-                    <a:cubicBezTo>
-                      <a:pt x="523" y="245"/>
-                      <a:pt x="523" y="245"/>
-                      <a:pt x="523" y="245"/>
-                    </a:cubicBezTo>
-                    <a:cubicBezTo>
-                      <a:pt x="586" y="245"/>
-                      <a:pt x="586" y="245"/>
-                      <a:pt x="586" y="245"/>
-                    </a:cubicBezTo>
-                    <a:cubicBezTo>
-                      <a:pt x="593" y="245"/>
-                      <a:pt x="597" y="241"/>
-                      <a:pt x="597" y="234"/>
-                    </a:cubicBezTo>
-                    <a:cubicBezTo>
-                      <a:pt x="597" y="228"/>
-                      <a:pt x="593" y="223"/>
-                      <a:pt x="586" y="223"/>
-                    </a:cubicBezTo>
-                    <a:cubicBezTo>
-                      <a:pt x="523" y="223"/>
-                      <a:pt x="523" y="223"/>
-                      <a:pt x="523" y="223"/>
-                    </a:cubicBezTo>
-                    <a:cubicBezTo>
-                      <a:pt x="523" y="202"/>
-                      <a:pt x="523" y="202"/>
-                      <a:pt x="523" y="202"/>
-                    </a:cubicBezTo>
-                    <a:cubicBezTo>
-                      <a:pt x="586" y="202"/>
-                      <a:pt x="586" y="202"/>
-                      <a:pt x="586" y="202"/>
-                    </a:cubicBezTo>
-                    <a:cubicBezTo>
-                      <a:pt x="593" y="202"/>
-                      <a:pt x="597" y="198"/>
-                      <a:pt x="597" y="192"/>
-                    </a:cubicBezTo>
-                    <a:cubicBezTo>
-                      <a:pt x="597" y="186"/>
-                      <a:pt x="593" y="181"/>
-                      <a:pt x="586" y="181"/>
-                    </a:cubicBezTo>
-                    <a:cubicBezTo>
-                      <a:pt x="523" y="181"/>
-                      <a:pt x="523" y="181"/>
-                      <a:pt x="523" y="181"/>
-                    </a:cubicBezTo>
-                    <a:cubicBezTo>
-                      <a:pt x="523" y="160"/>
-                      <a:pt x="523" y="160"/>
-                      <a:pt x="523" y="160"/>
-                    </a:cubicBezTo>
-                    <a:cubicBezTo>
-                      <a:pt x="586" y="160"/>
-                      <a:pt x="586" y="160"/>
-                      <a:pt x="586" y="160"/>
-                    </a:cubicBezTo>
-                    <a:cubicBezTo>
-                      <a:pt x="593" y="160"/>
-                      <a:pt x="597" y="155"/>
-                      <a:pt x="597" y="150"/>
-                    </a:cubicBezTo>
-                    <a:cubicBezTo>
-                      <a:pt x="597" y="143"/>
-                      <a:pt x="593" y="139"/>
-                      <a:pt x="586" y="139"/>
-                    </a:cubicBezTo>
-                    <a:cubicBezTo>
-                      <a:pt x="523" y="139"/>
-                      <a:pt x="523" y="139"/>
-                      <a:pt x="523" y="139"/>
-                    </a:cubicBezTo>
-                    <a:cubicBezTo>
-                      <a:pt x="523" y="117"/>
-                      <a:pt x="523" y="117"/>
-                      <a:pt x="523" y="117"/>
-                    </a:cubicBezTo>
-                    <a:cubicBezTo>
-                      <a:pt x="586" y="117"/>
-                      <a:pt x="586" y="117"/>
-                      <a:pt x="586" y="117"/>
-                    </a:cubicBezTo>
-                    <a:cubicBezTo>
-                      <a:pt x="593" y="117"/>
-                      <a:pt x="597" y="112"/>
-                      <a:pt x="597" y="107"/>
-                    </a:cubicBezTo>
-                    <a:cubicBezTo>
-                      <a:pt x="597" y="101"/>
-                      <a:pt x="593" y="96"/>
-                      <a:pt x="586" y="96"/>
-                    </a:cubicBezTo>
-                    <a:cubicBezTo>
-                      <a:pt x="523" y="96"/>
-                      <a:pt x="523" y="96"/>
-                      <a:pt x="523" y="96"/>
-                    </a:cubicBezTo>
-                    <a:cubicBezTo>
-                      <a:pt x="523" y="86"/>
-                      <a:pt x="523" y="86"/>
-                      <a:pt x="523" y="86"/>
-                    </a:cubicBezTo>
-                    <a:cubicBezTo>
-                      <a:pt x="523" y="79"/>
-                      <a:pt x="519" y="74"/>
-                      <a:pt x="512" y="74"/>
-                    </a:cubicBezTo>
-                    <a:cubicBezTo>
-                      <a:pt x="501" y="74"/>
-                      <a:pt x="501" y="74"/>
-                      <a:pt x="501" y="74"/>
-                    </a:cubicBezTo>
-                    <a:cubicBezTo>
-                      <a:pt x="501" y="11"/>
-                      <a:pt x="501" y="11"/>
-                      <a:pt x="501" y="11"/>
-                    </a:cubicBezTo>
-                    <a:cubicBezTo>
-                      <a:pt x="501" y="4"/>
-                      <a:pt x="497" y="0"/>
-                      <a:pt x="491" y="0"/>
-                    </a:cubicBezTo>
-                    <a:cubicBezTo>
-                      <a:pt x="485" y="0"/>
-                      <a:pt x="480" y="4"/>
-                      <a:pt x="480" y="11"/>
-                    </a:cubicBezTo>
-                    <a:cubicBezTo>
-                      <a:pt x="480" y="74"/>
-                      <a:pt x="480" y="74"/>
-                      <a:pt x="480" y="74"/>
-                    </a:cubicBezTo>
-                    <a:cubicBezTo>
-                      <a:pt x="459" y="74"/>
-                      <a:pt x="459" y="74"/>
-                      <a:pt x="459" y="74"/>
-                    </a:cubicBezTo>
-                    <a:cubicBezTo>
-                      <a:pt x="459" y="11"/>
-                      <a:pt x="459" y="11"/>
-                      <a:pt x="459" y="11"/>
-                    </a:cubicBezTo>
-                    <a:cubicBezTo>
-                      <a:pt x="459" y="4"/>
-                      <a:pt x="454" y="0"/>
-                      <a:pt x="448" y="0"/>
-                    </a:cubicBezTo>
-                    <a:cubicBezTo>
-                      <a:pt x="442" y="0"/>
-                      <a:pt x="438" y="4"/>
-                      <a:pt x="438" y="11"/>
-                    </a:cubicBezTo>
-                    <a:cubicBezTo>
-                      <a:pt x="438" y="74"/>
-                      <a:pt x="438" y="74"/>
-                      <a:pt x="438" y="74"/>
-                    </a:cubicBezTo>
-                    <a:cubicBezTo>
-                      <a:pt x="416" y="74"/>
-                      <a:pt x="416" y="74"/>
-                      <a:pt x="416" y="74"/>
-                    </a:cubicBezTo>
-                    <a:cubicBezTo>
-                      <a:pt x="416" y="11"/>
-                      <a:pt x="416" y="11"/>
-                      <a:pt x="416" y="11"/>
-                    </a:cubicBezTo>
-                    <a:cubicBezTo>
-                      <a:pt x="416" y="4"/>
-                      <a:pt x="411" y="0"/>
-                      <a:pt x="406" y="0"/>
-                    </a:cubicBezTo>
-                    <a:cubicBezTo>
-                      <a:pt x="399" y="0"/>
-                      <a:pt x="395" y="4"/>
-                      <a:pt x="395" y="11"/>
-                    </a:cubicBezTo>
-                    <a:cubicBezTo>
-                      <a:pt x="395" y="74"/>
-                      <a:pt x="395" y="74"/>
-                      <a:pt x="395" y="74"/>
-                    </a:cubicBezTo>
-                    <a:cubicBezTo>
-                      <a:pt x="374" y="74"/>
-                      <a:pt x="374" y="74"/>
-                      <a:pt x="374" y="74"/>
-                    </a:cubicBezTo>
-                    <a:cubicBezTo>
-                      <a:pt x="374" y="11"/>
-                      <a:pt x="374" y="11"/>
-                      <a:pt x="374" y="11"/>
-                    </a:cubicBezTo>
-                    <a:cubicBezTo>
-                      <a:pt x="374" y="4"/>
-                      <a:pt x="369" y="0"/>
-                      <a:pt x="363" y="0"/>
-                    </a:cubicBezTo>
-                    <a:cubicBezTo>
-                      <a:pt x="357" y="0"/>
-                      <a:pt x="352" y="4"/>
-                      <a:pt x="352" y="11"/>
-                    </a:cubicBezTo>
-                    <a:cubicBezTo>
-                      <a:pt x="352" y="74"/>
-                      <a:pt x="352" y="74"/>
-                      <a:pt x="352" y="74"/>
-                    </a:cubicBezTo>
-                    <a:cubicBezTo>
-                      <a:pt x="331" y="74"/>
-                      <a:pt x="331" y="74"/>
-                      <a:pt x="331" y="74"/>
-                    </a:cubicBezTo>
-                    <a:cubicBezTo>
-                      <a:pt x="331" y="11"/>
-                      <a:pt x="331" y="11"/>
-                      <a:pt x="331" y="11"/>
-                    </a:cubicBezTo>
-                    <a:cubicBezTo>
-                      <a:pt x="331" y="4"/>
-                      <a:pt x="326" y="0"/>
-                      <a:pt x="320" y="0"/>
-                    </a:cubicBezTo>
-                    <a:cubicBezTo>
-                      <a:pt x="314" y="0"/>
-                      <a:pt x="309" y="4"/>
-                      <a:pt x="309" y="11"/>
-                    </a:cubicBezTo>
-                    <a:cubicBezTo>
-                      <a:pt x="309" y="74"/>
-                      <a:pt x="309" y="74"/>
-                      <a:pt x="309" y="74"/>
-                    </a:cubicBezTo>
-                    <a:cubicBezTo>
-                      <a:pt x="289" y="74"/>
-                      <a:pt x="289" y="74"/>
-                      <a:pt x="289" y="74"/>
-                    </a:cubicBezTo>
-                    <a:cubicBezTo>
-                      <a:pt x="289" y="11"/>
-                      <a:pt x="289" y="11"/>
-                      <a:pt x="289" y="11"/>
-                    </a:cubicBezTo>
-                    <a:cubicBezTo>
-                      <a:pt x="289" y="4"/>
-                      <a:pt x="283" y="0"/>
-                      <a:pt x="278" y="0"/>
-                    </a:cubicBezTo>
-                    <a:cubicBezTo>
-                      <a:pt x="271" y="0"/>
-                      <a:pt x="267" y="4"/>
-                      <a:pt x="267" y="11"/>
-                    </a:cubicBezTo>
-                    <a:cubicBezTo>
-                      <a:pt x="267" y="74"/>
-                      <a:pt x="267" y="74"/>
-                      <a:pt x="267" y="74"/>
-                    </a:cubicBezTo>
-                    <a:cubicBezTo>
-                      <a:pt x="246" y="74"/>
-                      <a:pt x="246" y="74"/>
-                      <a:pt x="246" y="74"/>
-                    </a:cubicBezTo>
-                    <a:cubicBezTo>
-                      <a:pt x="246" y="11"/>
-                      <a:pt x="246" y="11"/>
-                      <a:pt x="246" y="11"/>
-                    </a:cubicBezTo>
-                    <a:cubicBezTo>
-                      <a:pt x="246" y="4"/>
-                      <a:pt x="241" y="0"/>
-                      <a:pt x="235" y="0"/>
-                    </a:cubicBezTo>
-                    <a:cubicBezTo>
-                      <a:pt x="229" y="0"/>
-                      <a:pt x="225" y="4"/>
-                      <a:pt x="225" y="11"/>
-                    </a:cubicBezTo>
-                    <a:cubicBezTo>
-                      <a:pt x="225" y="74"/>
-                      <a:pt x="225" y="74"/>
-                      <a:pt x="225" y="74"/>
-                    </a:cubicBezTo>
-                    <a:cubicBezTo>
-                      <a:pt x="203" y="74"/>
-                      <a:pt x="203" y="74"/>
-                      <a:pt x="203" y="74"/>
-                    </a:cubicBezTo>
-                    <a:cubicBezTo>
-                      <a:pt x="203" y="11"/>
-                      <a:pt x="203" y="11"/>
-                      <a:pt x="203" y="11"/>
-                    </a:cubicBezTo>
-                    <a:cubicBezTo>
-                      <a:pt x="203" y="4"/>
-                      <a:pt x="198" y="0"/>
-                      <a:pt x="192" y="0"/>
-                    </a:cubicBezTo>
-                    <a:cubicBezTo>
-                      <a:pt x="187" y="0"/>
-                      <a:pt x="182" y="4"/>
-                      <a:pt x="182" y="11"/>
-                    </a:cubicBezTo>
-                    <a:cubicBezTo>
-                      <a:pt x="182" y="74"/>
-                      <a:pt x="182" y="74"/>
-                      <a:pt x="182" y="74"/>
-                    </a:cubicBezTo>
-                    <a:cubicBezTo>
-                      <a:pt x="160" y="74"/>
-                      <a:pt x="160" y="74"/>
-                      <a:pt x="160" y="74"/>
-                    </a:cubicBezTo>
-                    <a:cubicBezTo>
-                      <a:pt x="160" y="11"/>
-                      <a:pt x="160" y="11"/>
-                      <a:pt x="160" y="11"/>
-                    </a:cubicBezTo>
-                    <a:cubicBezTo>
-                      <a:pt x="160" y="4"/>
-                      <a:pt x="155" y="0"/>
-                      <a:pt x="150" y="0"/>
-                    </a:cubicBezTo>
-                    <a:cubicBezTo>
-                      <a:pt x="144" y="0"/>
-                      <a:pt x="139" y="4"/>
-                      <a:pt x="139" y="11"/>
-                    </a:cubicBezTo>
-                    <a:cubicBezTo>
-                      <a:pt x="139" y="74"/>
-                      <a:pt x="139" y="74"/>
-                      <a:pt x="139" y="74"/>
-                    </a:cubicBezTo>
-                    <a:cubicBezTo>
-                      <a:pt x="117" y="74"/>
-                      <a:pt x="117" y="74"/>
-                      <a:pt x="117" y="74"/>
-                    </a:cubicBezTo>
-                    <a:cubicBezTo>
-                      <a:pt x="117" y="11"/>
-                      <a:pt x="117" y="11"/>
-                      <a:pt x="117" y="11"/>
-                    </a:cubicBezTo>
-                    <a:cubicBezTo>
-                      <a:pt x="117" y="4"/>
-                      <a:pt x="113" y="0"/>
-                      <a:pt x="107" y="0"/>
-                    </a:cubicBezTo>
-                    <a:cubicBezTo>
-                      <a:pt x="101" y="0"/>
-                      <a:pt x="96" y="4"/>
-                      <a:pt x="96" y="11"/>
-                    </a:cubicBezTo>
-                    <a:cubicBezTo>
-                      <a:pt x="96" y="74"/>
-                      <a:pt x="96" y="74"/>
-                      <a:pt x="96" y="74"/>
-                    </a:cubicBezTo>
-                    <a:cubicBezTo>
-                      <a:pt x="86" y="74"/>
-                      <a:pt x="86" y="74"/>
-                      <a:pt x="86" y="74"/>
-                    </a:cubicBezTo>
-                    <a:cubicBezTo>
-                      <a:pt x="81" y="74"/>
-                      <a:pt x="75" y="79"/>
-                      <a:pt x="75" y="86"/>
-                    </a:cubicBezTo>
-                    <a:cubicBezTo>
-                      <a:pt x="75" y="96"/>
-                      <a:pt x="75" y="96"/>
-                      <a:pt x="75" y="96"/>
-                    </a:cubicBezTo>
-                    <a:cubicBezTo>
-                      <a:pt x="11" y="96"/>
-                      <a:pt x="11" y="96"/>
-                      <a:pt x="11" y="96"/>
-                    </a:cubicBezTo>
-                    <a:cubicBezTo>
-                      <a:pt x="5" y="96"/>
-                      <a:pt x="0" y="101"/>
-                      <a:pt x="0" y="107"/>
-                    </a:cubicBezTo>
-                    <a:cubicBezTo>
-                      <a:pt x="0" y="112"/>
-                      <a:pt x="5" y="117"/>
-                      <a:pt x="11" y="117"/>
-                    </a:cubicBezTo>
-                    <a:cubicBezTo>
-                      <a:pt x="75" y="117"/>
-                      <a:pt x="75" y="117"/>
-                      <a:pt x="75" y="117"/>
-                    </a:cubicBezTo>
-                    <a:cubicBezTo>
-                      <a:pt x="75" y="139"/>
-                      <a:pt x="75" y="139"/>
-                      <a:pt x="75" y="139"/>
-                    </a:cubicBezTo>
-                    <a:cubicBezTo>
-                      <a:pt x="11" y="139"/>
-                      <a:pt x="11" y="139"/>
-                      <a:pt x="11" y="139"/>
-                    </a:cubicBezTo>
-                    <a:cubicBezTo>
-                      <a:pt x="5" y="139"/>
-                      <a:pt x="0" y="143"/>
-                      <a:pt x="0" y="150"/>
-                    </a:cubicBezTo>
-                    <a:cubicBezTo>
-                      <a:pt x="0" y="155"/>
-                      <a:pt x="5" y="160"/>
-                      <a:pt x="11" y="160"/>
-                    </a:cubicBezTo>
-                    <a:cubicBezTo>
-                      <a:pt x="75" y="160"/>
-                      <a:pt x="75" y="160"/>
-                      <a:pt x="75" y="160"/>
-                    </a:cubicBezTo>
-                    <a:cubicBezTo>
-                      <a:pt x="75" y="181"/>
-                      <a:pt x="75" y="181"/>
-                      <a:pt x="75" y="181"/>
-                    </a:cubicBezTo>
-                    <a:cubicBezTo>
-                      <a:pt x="11" y="181"/>
-                      <a:pt x="11" y="181"/>
-                      <a:pt x="11" y="181"/>
-                    </a:cubicBezTo>
-                    <a:cubicBezTo>
-                      <a:pt x="5" y="181"/>
-                      <a:pt x="0" y="186"/>
-                      <a:pt x="0" y="192"/>
-                    </a:cubicBezTo>
-                    <a:cubicBezTo>
-                      <a:pt x="0" y="198"/>
-                      <a:pt x="5" y="202"/>
-                      <a:pt x="11" y="202"/>
-                    </a:cubicBezTo>
-                    <a:cubicBezTo>
-                      <a:pt x="75" y="202"/>
-                      <a:pt x="75" y="202"/>
-                      <a:pt x="75" y="202"/>
-                    </a:cubicBezTo>
-                    <a:cubicBezTo>
-                      <a:pt x="75" y="223"/>
-                      <a:pt x="75" y="223"/>
-                      <a:pt x="75" y="223"/>
-                    </a:cubicBezTo>
-                    <a:cubicBezTo>
-                      <a:pt x="11" y="223"/>
-                      <a:pt x="11" y="223"/>
-                      <a:pt x="11" y="223"/>
-                    </a:cubicBezTo>
-                    <a:cubicBezTo>
-                      <a:pt x="5" y="223"/>
-                      <a:pt x="0" y="228"/>
-                      <a:pt x="0" y="234"/>
-                    </a:cubicBezTo>
-                    <a:cubicBezTo>
-                      <a:pt x="0" y="241"/>
-                      <a:pt x="5" y="245"/>
-                      <a:pt x="11" y="245"/>
-                    </a:cubicBezTo>
-                    <a:cubicBezTo>
-                      <a:pt x="75" y="245"/>
-                      <a:pt x="75" y="245"/>
-                      <a:pt x="75" y="245"/>
-                    </a:cubicBezTo>
-                    <a:cubicBezTo>
-                      <a:pt x="75" y="266"/>
-                      <a:pt x="75" y="266"/>
-                      <a:pt x="75" y="266"/>
-                    </a:cubicBezTo>
-                    <a:cubicBezTo>
-                      <a:pt x="11" y="266"/>
-                      <a:pt x="11" y="266"/>
-                      <a:pt x="11" y="266"/>
-                    </a:cubicBezTo>
-                    <a:cubicBezTo>
-                      <a:pt x="5" y="266"/>
-                      <a:pt x="0" y="271"/>
-                      <a:pt x="0" y="276"/>
-                    </a:cubicBezTo>
-                    <a:cubicBezTo>
-                      <a:pt x="0" y="283"/>
-                      <a:pt x="5" y="288"/>
-                      <a:pt x="11" y="288"/>
-                    </a:cubicBezTo>
-                    <a:cubicBezTo>
-                      <a:pt x="75" y="288"/>
-                      <a:pt x="75" y="288"/>
-                      <a:pt x="75" y="288"/>
-                    </a:cubicBezTo>
-                    <a:cubicBezTo>
-                      <a:pt x="75" y="308"/>
-                      <a:pt x="75" y="308"/>
-                      <a:pt x="75" y="308"/>
-                    </a:cubicBezTo>
-                    <a:cubicBezTo>
-                      <a:pt x="11" y="308"/>
-                      <a:pt x="11" y="308"/>
-                      <a:pt x="11" y="308"/>
-                    </a:cubicBezTo>
-                    <a:cubicBezTo>
-                      <a:pt x="5" y="308"/>
-                      <a:pt x="0" y="314"/>
-                      <a:pt x="0" y="319"/>
-                    </a:cubicBezTo>
-                    <a:cubicBezTo>
-                      <a:pt x="0" y="325"/>
-                      <a:pt x="5" y="329"/>
-                      <a:pt x="11" y="329"/>
-                    </a:cubicBezTo>
-                    <a:cubicBezTo>
-                      <a:pt x="75" y="329"/>
-                      <a:pt x="75" y="329"/>
-                      <a:pt x="75" y="329"/>
-                    </a:cubicBezTo>
-                    <a:cubicBezTo>
-                      <a:pt x="75" y="351"/>
-                      <a:pt x="75" y="351"/>
-                      <a:pt x="75" y="351"/>
-                    </a:cubicBezTo>
-                    <a:cubicBezTo>
-                      <a:pt x="11" y="351"/>
-                      <a:pt x="11" y="351"/>
-                      <a:pt x="11" y="351"/>
-                    </a:cubicBezTo>
-                    <a:cubicBezTo>
-                      <a:pt x="5" y="351"/>
-                      <a:pt x="0" y="357"/>
-                      <a:pt x="0" y="362"/>
-                    </a:cubicBezTo>
-                    <a:cubicBezTo>
-                      <a:pt x="0" y="368"/>
-                      <a:pt x="5" y="372"/>
-                      <a:pt x="11" y="372"/>
-                    </a:cubicBezTo>
-                    <a:cubicBezTo>
-                      <a:pt x="75" y="372"/>
-                      <a:pt x="75" y="372"/>
-                      <a:pt x="75" y="372"/>
-                    </a:cubicBezTo>
-                    <a:cubicBezTo>
-                      <a:pt x="75" y="394"/>
-                      <a:pt x="75" y="394"/>
-                      <a:pt x="75" y="394"/>
-                    </a:cubicBezTo>
-                    <a:cubicBezTo>
-                      <a:pt x="11" y="394"/>
-                      <a:pt x="11" y="394"/>
-                      <a:pt x="11" y="394"/>
-                    </a:cubicBezTo>
-                    <a:cubicBezTo>
-                      <a:pt x="5" y="394"/>
-                      <a:pt x="0" y="399"/>
-                      <a:pt x="0" y="405"/>
-                    </a:cubicBezTo>
-                    <a:cubicBezTo>
-                      <a:pt x="0" y="411"/>
-                      <a:pt x="5" y="415"/>
-                      <a:pt x="11" y="415"/>
-                    </a:cubicBezTo>
-                    <a:cubicBezTo>
-                      <a:pt x="75" y="415"/>
-                      <a:pt x="75" y="415"/>
-                      <a:pt x="75" y="415"/>
-                    </a:cubicBezTo>
-                    <a:cubicBezTo>
-                      <a:pt x="75" y="437"/>
-                      <a:pt x="75" y="437"/>
-                      <a:pt x="75" y="437"/>
-                    </a:cubicBezTo>
-                    <a:cubicBezTo>
-                      <a:pt x="11" y="437"/>
-                      <a:pt x="11" y="437"/>
-                      <a:pt x="11" y="437"/>
-                    </a:cubicBezTo>
-                    <a:cubicBezTo>
-                      <a:pt x="5" y="437"/>
-                      <a:pt x="0" y="442"/>
-                      <a:pt x="0" y="448"/>
-                    </a:cubicBezTo>
-                    <a:cubicBezTo>
-                      <a:pt x="0" y="454"/>
-                      <a:pt x="5" y="458"/>
-                      <a:pt x="11" y="458"/>
-                    </a:cubicBezTo>
-                    <a:cubicBezTo>
-                      <a:pt x="75" y="458"/>
-                      <a:pt x="75" y="458"/>
-                      <a:pt x="75" y="458"/>
-                    </a:cubicBezTo>
-                    <a:cubicBezTo>
-                      <a:pt x="75" y="479"/>
-                      <a:pt x="75" y="479"/>
-                      <a:pt x="75" y="479"/>
-                    </a:cubicBezTo>
-                    <a:lnTo>
-                      <a:pt x="11" y="479"/>
-                    </a:lnTo>
-                    <a:close/>
-                    <a:moveTo>
-                      <a:pt x="96" y="96"/>
-                    </a:moveTo>
-                    <a:lnTo>
-                      <a:pt x="96" y="96"/>
-                    </a:lnTo>
-                    <a:cubicBezTo>
-                      <a:pt x="501" y="96"/>
-                      <a:pt x="501" y="96"/>
-                      <a:pt x="501" y="96"/>
-                    </a:cubicBezTo>
-                    <a:cubicBezTo>
-                      <a:pt x="501" y="501"/>
-                      <a:pt x="501" y="501"/>
-                      <a:pt x="501" y="501"/>
-                    </a:cubicBezTo>
-                    <a:cubicBezTo>
-                      <a:pt x="96" y="501"/>
-                      <a:pt x="96" y="501"/>
-                      <a:pt x="96" y="501"/>
-                    </a:cubicBezTo>
-                    <a:lnTo>
-                      <a:pt x="96" y="96"/>
-                    </a:lnTo>
-                    <a:close/>
-                  </a:path>
-                </a:pathLst>
-              </a:custGeom>
-              <a:solidFill>
-                <a:schemeClr val="bg1"/>
-              </a:solidFill>
-              <a:ln w="19050" cap="flat">
-                <a:solidFill>
-                  <a:srgbClr val="618153"/>
-                </a:solidFill>
-                <a:bevel/>
-                <a:headEnd/>
-                <a:tailEnd/>
-              </a:ln>
-              <a:effectLst/>
-              <a:extLst>
-                <a:ext uri="{AF507438-7753-43E0-B8FC-AC1667EBCBE1}">
-                  <a14:hiddenEffects xmlns:a14="http://schemas.microsoft.com/office/drawing/2010/main">
-                    <a:effectLst>
-                      <a:outerShdw blurRad="63500" dist="38099" dir="2700000" algn="ctr" rotWithShape="0">
-                        <a:srgbClr val="000000">
-                          <a:alpha val="74998"/>
-                        </a:srgbClr>
-                      </a:outerShdw>
-                    </a:effectLst>
-                  </a14:hiddenEffects>
-                </a:ext>
-              </a:extLst>
-            </p:spPr>
-            <p:txBody>
-              <a:bodyPr wrap="none" anchor="ctr"/>
-              <a:lstStyle/>
-              <a:p>
-                <a:endParaRPr lang="en-US" sz="964"/>
-              </a:p>
-            </p:txBody>
-          </p:sp>
-        </p:grpSp>
-        <p:cxnSp>
-          <p:nvCxnSpPr>
-            <p:cNvPr id="43" name="Straight Connector 64">
+        <p:sp>
+          <p:nvSpPr>
+            <p:cNvPr id="35" name="Freeform 118">
               <a:extLst>
                 <a:ext uri="{FF2B5EF4-FFF2-40B4-BE49-F238E27FC236}">
-                  <a16:creationId xmlns:a16="http://schemas.microsoft.com/office/drawing/2014/main" xmlns="" id="{D22F4E57-90BA-4899-909E-5829E7A9C72A}"/>
+                  <a16:creationId xmlns="" xmlns:a16="http://schemas.microsoft.com/office/drawing/2014/main" id="{8F3B04C3-D501-4070-B0AC-5FB6C26F8066}"/>
                 </a:ext>
               </a:extLst>
             </p:cNvPr>
-            <p:cNvCxnSpPr/>
+            <p:cNvSpPr>
+              <a:spLocks noChangeArrowheads="1"/>
+            </p:cNvSpPr>
             <p:nvPr/>
-          </p:nvCxnSpPr>
-          <p:spPr>
-            <a:xfrm flipH="1">
-              <a:off x="8135667" y="3598633"/>
-              <a:ext cx="1" cy="664248"/>
+          </p:nvSpPr>
+          <p:spPr bwMode="auto">
+            <a:xfrm>
+              <a:off x="9560812" y="3912883"/>
+              <a:ext cx="216000" cy="36000"/>
             </a:xfrm>
-            <a:prstGeom prst="line">
+            <a:custGeom>
               <a:avLst/>
-            </a:prstGeom>
-            <a:ln w="19050">
+              <a:gdLst>
+                <a:gd name="T0" fmla="*/ 160 w 171"/>
+                <a:gd name="T1" fmla="*/ 0 h 23"/>
+                <a:gd name="T2" fmla="*/ 160 w 171"/>
+                <a:gd name="T3" fmla="*/ 0 h 23"/>
+                <a:gd name="T4" fmla="*/ 11 w 171"/>
+                <a:gd name="T5" fmla="*/ 0 h 23"/>
+                <a:gd name="T6" fmla="*/ 0 w 171"/>
+                <a:gd name="T7" fmla="*/ 10 h 23"/>
+                <a:gd name="T8" fmla="*/ 11 w 171"/>
+                <a:gd name="T9" fmla="*/ 22 h 23"/>
+                <a:gd name="T10" fmla="*/ 160 w 171"/>
+                <a:gd name="T11" fmla="*/ 22 h 23"/>
+                <a:gd name="T12" fmla="*/ 170 w 171"/>
+                <a:gd name="T13" fmla="*/ 10 h 23"/>
+                <a:gd name="T14" fmla="*/ 160 w 171"/>
+                <a:gd name="T15" fmla="*/ 0 h 23"/>
+              </a:gdLst>
+              <a:ahLst/>
+              <a:cxnLst>
+                <a:cxn ang="0">
+                  <a:pos x="T0" y="T1"/>
+                </a:cxn>
+                <a:cxn ang="0">
+                  <a:pos x="T2" y="T3"/>
+                </a:cxn>
+                <a:cxn ang="0">
+                  <a:pos x="T4" y="T5"/>
+                </a:cxn>
+                <a:cxn ang="0">
+                  <a:pos x="T6" y="T7"/>
+                </a:cxn>
+                <a:cxn ang="0">
+                  <a:pos x="T8" y="T9"/>
+                </a:cxn>
+                <a:cxn ang="0">
+                  <a:pos x="T10" y="T11"/>
+                </a:cxn>
+                <a:cxn ang="0">
+                  <a:pos x="T12" y="T13"/>
+                </a:cxn>
+                <a:cxn ang="0">
+                  <a:pos x="T14" y="T15"/>
+                </a:cxn>
+              </a:cxnLst>
+              <a:rect l="0" t="0" r="r" b="b"/>
+              <a:pathLst>
+                <a:path w="171" h="23">
+                  <a:moveTo>
+                    <a:pt x="160" y="0"/>
+                  </a:moveTo>
+                  <a:lnTo>
+                    <a:pt x="160" y="0"/>
+                  </a:lnTo>
+                  <a:cubicBezTo>
+                    <a:pt x="11" y="0"/>
+                    <a:pt x="11" y="0"/>
+                    <a:pt x="11" y="0"/>
+                  </a:cubicBezTo>
+                  <a:cubicBezTo>
+                    <a:pt x="4" y="0"/>
+                    <a:pt x="0" y="4"/>
+                    <a:pt x="0" y="10"/>
+                  </a:cubicBezTo>
+                  <a:cubicBezTo>
+                    <a:pt x="0" y="17"/>
+                    <a:pt x="4" y="22"/>
+                    <a:pt x="11" y="22"/>
+                  </a:cubicBezTo>
+                  <a:cubicBezTo>
+                    <a:pt x="160" y="22"/>
+                    <a:pt x="160" y="22"/>
+                    <a:pt x="160" y="22"/>
+                  </a:cubicBezTo>
+                  <a:cubicBezTo>
+                    <a:pt x="166" y="22"/>
+                    <a:pt x="170" y="17"/>
+                    <a:pt x="170" y="10"/>
+                  </a:cubicBezTo>
+                  <a:cubicBezTo>
+                    <a:pt x="170" y="4"/>
+                    <a:pt x="166" y="0"/>
+                    <a:pt x="160" y="0"/>
+                  </a:cubicBezTo>
+                </a:path>
+              </a:pathLst>
+            </a:custGeom>
+            <a:solidFill>
+              <a:schemeClr val="bg1"/>
+            </a:solidFill>
+            <a:ln w="19050" cap="flat">
               <a:solidFill>
-                <a:srgbClr val="618153"/>
+                <a:srgbClr val="98B6FE"/>
               </a:solidFill>
+              <a:bevel/>
+              <a:headEnd/>
+              <a:tailEnd/>
             </a:ln>
+            <a:effectLst/>
+            <a:extLst>
+              <a:ext uri="{AF507438-7753-43E0-B8FC-AC1667EBCBE1}">
+                <a14:hiddenEffects xmlns:a14="http://schemas.microsoft.com/office/drawing/2010/main">
+                  <a:effectLst>
+                    <a:outerShdw blurRad="63500" dist="38099" dir="2700000" algn="ctr" rotWithShape="0">
+                      <a:srgbClr val="000000">
+                        <a:alpha val="74998"/>
+                      </a:srgbClr>
+                    </a:outerShdw>
+                  </a:effectLst>
+                </a14:hiddenEffects>
+              </a:ext>
+            </a:extLst>
           </p:spPr>
-          <p:style>
-            <a:lnRef idx="1">
-              <a:schemeClr val="accent1"/>
-            </a:lnRef>
-            <a:fillRef idx="0">
-              <a:schemeClr val="accent1"/>
-            </a:fillRef>
-            <a:effectRef idx="0">
-              <a:schemeClr val="accent1"/>
-            </a:effectRef>
-            <a:fontRef idx="minor">
-              <a:schemeClr val="tx1"/>
-            </a:fontRef>
-          </p:style>
-        </p:cxnSp>
+          <p:txBody>
+            <a:bodyPr wrap="none" anchor="ctr"/>
+            <a:lstStyle/>
+            <a:p>
+              <a:endParaRPr lang="en-US" sz="964"/>
+            </a:p>
+          </p:txBody>
+        </p:sp>
+        <p:sp>
+          <p:nvSpPr>
+            <p:cNvPr id="36" name="Freeform 119">
+              <a:extLst>
+                <a:ext uri="{FF2B5EF4-FFF2-40B4-BE49-F238E27FC236}">
+                  <a16:creationId xmlns="" xmlns:a16="http://schemas.microsoft.com/office/drawing/2014/main" id="{36E9553A-4692-4D5B-A665-94CC09C4A62F}"/>
+                </a:ext>
+              </a:extLst>
+            </p:cNvPr>
+            <p:cNvSpPr>
+              <a:spLocks noChangeArrowheads="1"/>
+            </p:cNvSpPr>
+            <p:nvPr/>
+          </p:nvSpPr>
+          <p:spPr bwMode="auto">
+            <a:xfrm>
+              <a:off x="9799787" y="4053464"/>
+              <a:ext cx="81940" cy="92051"/>
+            </a:xfrm>
+            <a:custGeom>
+              <a:avLst/>
+              <a:gdLst>
+                <a:gd name="T0" fmla="*/ 39 w 76"/>
+                <a:gd name="T1" fmla="*/ 0 h 75"/>
+                <a:gd name="T2" fmla="*/ 39 w 76"/>
+                <a:gd name="T3" fmla="*/ 0 h 75"/>
+                <a:gd name="T4" fmla="*/ 0 w 76"/>
+                <a:gd name="T5" fmla="*/ 37 h 75"/>
+                <a:gd name="T6" fmla="*/ 39 w 76"/>
+                <a:gd name="T7" fmla="*/ 74 h 75"/>
+                <a:gd name="T8" fmla="*/ 75 w 76"/>
+                <a:gd name="T9" fmla="*/ 37 h 75"/>
+                <a:gd name="T10" fmla="*/ 39 w 76"/>
+                <a:gd name="T11" fmla="*/ 0 h 75"/>
+                <a:gd name="T12" fmla="*/ 39 w 76"/>
+                <a:gd name="T13" fmla="*/ 53 h 75"/>
+                <a:gd name="T14" fmla="*/ 39 w 76"/>
+                <a:gd name="T15" fmla="*/ 53 h 75"/>
+                <a:gd name="T16" fmla="*/ 22 w 76"/>
+                <a:gd name="T17" fmla="*/ 37 h 75"/>
+                <a:gd name="T18" fmla="*/ 39 w 76"/>
+                <a:gd name="T19" fmla="*/ 21 h 75"/>
+                <a:gd name="T20" fmla="*/ 53 w 76"/>
+                <a:gd name="T21" fmla="*/ 37 h 75"/>
+                <a:gd name="T22" fmla="*/ 39 w 76"/>
+                <a:gd name="T23" fmla="*/ 53 h 75"/>
+              </a:gdLst>
+              <a:ahLst/>
+              <a:cxnLst>
+                <a:cxn ang="0">
+                  <a:pos x="T0" y="T1"/>
+                </a:cxn>
+                <a:cxn ang="0">
+                  <a:pos x="T2" y="T3"/>
+                </a:cxn>
+                <a:cxn ang="0">
+                  <a:pos x="T4" y="T5"/>
+                </a:cxn>
+                <a:cxn ang="0">
+                  <a:pos x="T6" y="T7"/>
+                </a:cxn>
+                <a:cxn ang="0">
+                  <a:pos x="T8" y="T9"/>
+                </a:cxn>
+                <a:cxn ang="0">
+                  <a:pos x="T10" y="T11"/>
+                </a:cxn>
+                <a:cxn ang="0">
+                  <a:pos x="T12" y="T13"/>
+                </a:cxn>
+                <a:cxn ang="0">
+                  <a:pos x="T14" y="T15"/>
+                </a:cxn>
+                <a:cxn ang="0">
+                  <a:pos x="T16" y="T17"/>
+                </a:cxn>
+                <a:cxn ang="0">
+                  <a:pos x="T18" y="T19"/>
+                </a:cxn>
+                <a:cxn ang="0">
+                  <a:pos x="T20" y="T21"/>
+                </a:cxn>
+                <a:cxn ang="0">
+                  <a:pos x="T22" y="T23"/>
+                </a:cxn>
+              </a:cxnLst>
+              <a:rect l="0" t="0" r="r" b="b"/>
+              <a:pathLst>
+                <a:path w="76" h="75">
+                  <a:moveTo>
+                    <a:pt x="39" y="0"/>
+                  </a:moveTo>
+                  <a:lnTo>
+                    <a:pt x="39" y="0"/>
+                  </a:lnTo>
+                  <a:cubicBezTo>
+                    <a:pt x="18" y="0"/>
+                    <a:pt x="0" y="16"/>
+                    <a:pt x="0" y="37"/>
+                  </a:cubicBezTo>
+                  <a:cubicBezTo>
+                    <a:pt x="0" y="58"/>
+                    <a:pt x="18" y="74"/>
+                    <a:pt x="39" y="74"/>
+                  </a:cubicBezTo>
+                  <a:cubicBezTo>
+                    <a:pt x="59" y="74"/>
+                    <a:pt x="75" y="58"/>
+                    <a:pt x="75" y="37"/>
+                  </a:cubicBezTo>
+                  <a:cubicBezTo>
+                    <a:pt x="75" y="16"/>
+                    <a:pt x="59" y="0"/>
+                    <a:pt x="39" y="0"/>
+                  </a:cubicBezTo>
+                  <a:close/>
+                  <a:moveTo>
+                    <a:pt x="39" y="53"/>
+                  </a:moveTo>
+                  <a:lnTo>
+                    <a:pt x="39" y="53"/>
+                  </a:lnTo>
+                  <a:cubicBezTo>
+                    <a:pt x="29" y="53"/>
+                    <a:pt x="22" y="46"/>
+                    <a:pt x="22" y="37"/>
+                  </a:cubicBezTo>
+                  <a:cubicBezTo>
+                    <a:pt x="22" y="29"/>
+                    <a:pt x="29" y="21"/>
+                    <a:pt x="39" y="21"/>
+                  </a:cubicBezTo>
+                  <a:cubicBezTo>
+                    <a:pt x="47" y="21"/>
+                    <a:pt x="53" y="29"/>
+                    <a:pt x="53" y="37"/>
+                  </a:cubicBezTo>
+                  <a:cubicBezTo>
+                    <a:pt x="53" y="46"/>
+                    <a:pt x="47" y="53"/>
+                    <a:pt x="39" y="53"/>
+                  </a:cubicBezTo>
+                  <a:close/>
+                </a:path>
+              </a:pathLst>
+            </a:custGeom>
+            <a:solidFill>
+              <a:schemeClr val="bg1"/>
+            </a:solidFill>
+            <a:ln w="19050" cap="flat">
+              <a:solidFill>
+                <a:srgbClr val="98B6FE"/>
+              </a:solidFill>
+              <a:bevel/>
+              <a:headEnd/>
+              <a:tailEnd/>
+            </a:ln>
+            <a:effectLst/>
+            <a:extLst>
+              <a:ext uri="{AF507438-7753-43E0-B8FC-AC1667EBCBE1}">
+                <a14:hiddenEffects xmlns:a14="http://schemas.microsoft.com/office/drawing/2010/main">
+                  <a:effectLst>
+                    <a:outerShdw blurRad="63500" dist="38099" dir="2700000" algn="ctr" rotWithShape="0">
+                      <a:srgbClr val="000000">
+                        <a:alpha val="74998"/>
+                      </a:srgbClr>
+                    </a:outerShdw>
+                  </a:effectLst>
+                </a14:hiddenEffects>
+              </a:ext>
+            </a:extLst>
+          </p:spPr>
+          <p:txBody>
+            <a:bodyPr wrap="none" anchor="ctr"/>
+            <a:lstStyle/>
+            <a:p>
+              <a:endParaRPr lang="en-US" sz="964"/>
+            </a:p>
+          </p:txBody>
+        </p:sp>
+        <p:sp>
+          <p:nvSpPr>
+            <p:cNvPr id="37" name="Freeform 120">
+              <a:extLst>
+                <a:ext uri="{FF2B5EF4-FFF2-40B4-BE49-F238E27FC236}">
+                  <a16:creationId xmlns="" xmlns:a16="http://schemas.microsoft.com/office/drawing/2014/main" id="{936475C6-EBDB-47C8-8ADD-312FB8E3E615}"/>
+                </a:ext>
+              </a:extLst>
+            </p:cNvPr>
+            <p:cNvSpPr>
+              <a:spLocks noChangeArrowheads="1"/>
+            </p:cNvSpPr>
+            <p:nvPr/>
+          </p:nvSpPr>
+          <p:spPr bwMode="auto">
+            <a:xfrm>
+              <a:off x="9560812" y="4078936"/>
+              <a:ext cx="216000" cy="36000"/>
+            </a:xfrm>
+            <a:custGeom>
+              <a:avLst/>
+              <a:gdLst>
+                <a:gd name="T0" fmla="*/ 160 w 171"/>
+                <a:gd name="T1" fmla="*/ 0 h 22"/>
+                <a:gd name="T2" fmla="*/ 160 w 171"/>
+                <a:gd name="T3" fmla="*/ 0 h 22"/>
+                <a:gd name="T4" fmla="*/ 11 w 171"/>
+                <a:gd name="T5" fmla="*/ 0 h 22"/>
+                <a:gd name="T6" fmla="*/ 0 w 171"/>
+                <a:gd name="T7" fmla="*/ 10 h 22"/>
+                <a:gd name="T8" fmla="*/ 11 w 171"/>
+                <a:gd name="T9" fmla="*/ 21 h 22"/>
+                <a:gd name="T10" fmla="*/ 160 w 171"/>
+                <a:gd name="T11" fmla="*/ 21 h 22"/>
+                <a:gd name="T12" fmla="*/ 170 w 171"/>
+                <a:gd name="T13" fmla="*/ 10 h 22"/>
+                <a:gd name="T14" fmla="*/ 160 w 171"/>
+                <a:gd name="T15" fmla="*/ 0 h 22"/>
+              </a:gdLst>
+              <a:ahLst/>
+              <a:cxnLst>
+                <a:cxn ang="0">
+                  <a:pos x="T0" y="T1"/>
+                </a:cxn>
+                <a:cxn ang="0">
+                  <a:pos x="T2" y="T3"/>
+                </a:cxn>
+                <a:cxn ang="0">
+                  <a:pos x="T4" y="T5"/>
+                </a:cxn>
+                <a:cxn ang="0">
+                  <a:pos x="T6" y="T7"/>
+                </a:cxn>
+                <a:cxn ang="0">
+                  <a:pos x="T8" y="T9"/>
+                </a:cxn>
+                <a:cxn ang="0">
+                  <a:pos x="T10" y="T11"/>
+                </a:cxn>
+                <a:cxn ang="0">
+                  <a:pos x="T12" y="T13"/>
+                </a:cxn>
+                <a:cxn ang="0">
+                  <a:pos x="T14" y="T15"/>
+                </a:cxn>
+              </a:cxnLst>
+              <a:rect l="0" t="0" r="r" b="b"/>
+              <a:pathLst>
+                <a:path w="171" h="22">
+                  <a:moveTo>
+                    <a:pt x="160" y="0"/>
+                  </a:moveTo>
+                  <a:lnTo>
+                    <a:pt x="160" y="0"/>
+                  </a:lnTo>
+                  <a:cubicBezTo>
+                    <a:pt x="11" y="0"/>
+                    <a:pt x="11" y="0"/>
+                    <a:pt x="11" y="0"/>
+                  </a:cubicBezTo>
+                  <a:cubicBezTo>
+                    <a:pt x="4" y="0"/>
+                    <a:pt x="0" y="5"/>
+                    <a:pt x="0" y="10"/>
+                  </a:cubicBezTo>
+                  <a:cubicBezTo>
+                    <a:pt x="0" y="16"/>
+                    <a:pt x="4" y="21"/>
+                    <a:pt x="11" y="21"/>
+                  </a:cubicBezTo>
+                  <a:cubicBezTo>
+                    <a:pt x="160" y="21"/>
+                    <a:pt x="160" y="21"/>
+                    <a:pt x="160" y="21"/>
+                  </a:cubicBezTo>
+                  <a:cubicBezTo>
+                    <a:pt x="166" y="21"/>
+                    <a:pt x="170" y="16"/>
+                    <a:pt x="170" y="10"/>
+                  </a:cubicBezTo>
+                  <a:cubicBezTo>
+                    <a:pt x="170" y="5"/>
+                    <a:pt x="166" y="0"/>
+                    <a:pt x="160" y="0"/>
+                  </a:cubicBezTo>
+                </a:path>
+              </a:pathLst>
+            </a:custGeom>
+            <a:solidFill>
+              <a:schemeClr val="bg1"/>
+            </a:solidFill>
+            <a:ln w="19050" cap="flat">
+              <a:solidFill>
+                <a:srgbClr val="98B6FE"/>
+              </a:solidFill>
+              <a:bevel/>
+              <a:headEnd/>
+              <a:tailEnd/>
+            </a:ln>
+            <a:effectLst/>
+            <a:extLst>
+              <a:ext uri="{AF507438-7753-43E0-B8FC-AC1667EBCBE1}">
+                <a14:hiddenEffects xmlns:a14="http://schemas.microsoft.com/office/drawing/2010/main">
+                  <a:effectLst>
+                    <a:outerShdw blurRad="63500" dist="38099" dir="2700000" algn="ctr" rotWithShape="0">
+                      <a:srgbClr val="000000">
+                        <a:alpha val="74998"/>
+                      </a:srgbClr>
+                    </a:outerShdw>
+                  </a:effectLst>
+                </a14:hiddenEffects>
+              </a:ext>
+            </a:extLst>
+          </p:spPr>
+          <p:txBody>
+            <a:bodyPr wrap="none" anchor="ctr"/>
+            <a:lstStyle/>
+            <a:p>
+              <a:endParaRPr lang="en-US" sz="964"/>
+            </a:p>
+          </p:txBody>
+        </p:sp>
+        <p:sp>
+          <p:nvSpPr>
+            <p:cNvPr id="38" name="Freeform 121">
+              <a:extLst>
+                <a:ext uri="{FF2B5EF4-FFF2-40B4-BE49-F238E27FC236}">
+                  <a16:creationId xmlns="" xmlns:a16="http://schemas.microsoft.com/office/drawing/2014/main" id="{169A2FBC-0956-4DC7-ADF8-83D5DC60949B}"/>
+                </a:ext>
+              </a:extLst>
+            </p:cNvPr>
+            <p:cNvSpPr>
+              <a:spLocks noChangeArrowheads="1"/>
+            </p:cNvSpPr>
+            <p:nvPr/>
+          </p:nvSpPr>
+          <p:spPr bwMode="auto">
+            <a:xfrm>
+              <a:off x="9799787" y="4217714"/>
+              <a:ext cx="81940" cy="92051"/>
+            </a:xfrm>
+            <a:custGeom>
+              <a:avLst/>
+              <a:gdLst>
+                <a:gd name="T0" fmla="*/ 39 w 76"/>
+                <a:gd name="T1" fmla="*/ 0 h 76"/>
+                <a:gd name="T2" fmla="*/ 39 w 76"/>
+                <a:gd name="T3" fmla="*/ 0 h 76"/>
+                <a:gd name="T4" fmla="*/ 0 w 76"/>
+                <a:gd name="T5" fmla="*/ 37 h 76"/>
+                <a:gd name="T6" fmla="*/ 39 w 76"/>
+                <a:gd name="T7" fmla="*/ 75 h 76"/>
+                <a:gd name="T8" fmla="*/ 75 w 76"/>
+                <a:gd name="T9" fmla="*/ 37 h 76"/>
+                <a:gd name="T10" fmla="*/ 39 w 76"/>
+                <a:gd name="T11" fmla="*/ 0 h 76"/>
+                <a:gd name="T12" fmla="*/ 39 w 76"/>
+                <a:gd name="T13" fmla="*/ 54 h 76"/>
+                <a:gd name="T14" fmla="*/ 39 w 76"/>
+                <a:gd name="T15" fmla="*/ 54 h 76"/>
+                <a:gd name="T16" fmla="*/ 22 w 76"/>
+                <a:gd name="T17" fmla="*/ 37 h 76"/>
+                <a:gd name="T18" fmla="*/ 39 w 76"/>
+                <a:gd name="T19" fmla="*/ 21 h 76"/>
+                <a:gd name="T20" fmla="*/ 53 w 76"/>
+                <a:gd name="T21" fmla="*/ 37 h 76"/>
+                <a:gd name="T22" fmla="*/ 39 w 76"/>
+                <a:gd name="T23" fmla="*/ 54 h 76"/>
+              </a:gdLst>
+              <a:ahLst/>
+              <a:cxnLst>
+                <a:cxn ang="0">
+                  <a:pos x="T0" y="T1"/>
+                </a:cxn>
+                <a:cxn ang="0">
+                  <a:pos x="T2" y="T3"/>
+                </a:cxn>
+                <a:cxn ang="0">
+                  <a:pos x="T4" y="T5"/>
+                </a:cxn>
+                <a:cxn ang="0">
+                  <a:pos x="T6" y="T7"/>
+                </a:cxn>
+                <a:cxn ang="0">
+                  <a:pos x="T8" y="T9"/>
+                </a:cxn>
+                <a:cxn ang="0">
+                  <a:pos x="T10" y="T11"/>
+                </a:cxn>
+                <a:cxn ang="0">
+                  <a:pos x="T12" y="T13"/>
+                </a:cxn>
+                <a:cxn ang="0">
+                  <a:pos x="T14" y="T15"/>
+                </a:cxn>
+                <a:cxn ang="0">
+                  <a:pos x="T16" y="T17"/>
+                </a:cxn>
+                <a:cxn ang="0">
+                  <a:pos x="T18" y="T19"/>
+                </a:cxn>
+                <a:cxn ang="0">
+                  <a:pos x="T20" y="T21"/>
+                </a:cxn>
+                <a:cxn ang="0">
+                  <a:pos x="T22" y="T23"/>
+                </a:cxn>
+              </a:cxnLst>
+              <a:rect l="0" t="0" r="r" b="b"/>
+              <a:pathLst>
+                <a:path w="76" h="76">
+                  <a:moveTo>
+                    <a:pt x="39" y="0"/>
+                  </a:moveTo>
+                  <a:lnTo>
+                    <a:pt x="39" y="0"/>
+                  </a:lnTo>
+                  <a:cubicBezTo>
+                    <a:pt x="18" y="0"/>
+                    <a:pt x="0" y="16"/>
+                    <a:pt x="0" y="37"/>
+                  </a:cubicBezTo>
+                  <a:cubicBezTo>
+                    <a:pt x="0" y="58"/>
+                    <a:pt x="18" y="75"/>
+                    <a:pt x="39" y="75"/>
+                  </a:cubicBezTo>
+                  <a:cubicBezTo>
+                    <a:pt x="59" y="75"/>
+                    <a:pt x="75" y="58"/>
+                    <a:pt x="75" y="37"/>
+                  </a:cubicBezTo>
+                  <a:cubicBezTo>
+                    <a:pt x="75" y="16"/>
+                    <a:pt x="59" y="0"/>
+                    <a:pt x="39" y="0"/>
+                  </a:cubicBezTo>
+                  <a:close/>
+                  <a:moveTo>
+                    <a:pt x="39" y="54"/>
+                  </a:moveTo>
+                  <a:lnTo>
+                    <a:pt x="39" y="54"/>
+                  </a:lnTo>
+                  <a:cubicBezTo>
+                    <a:pt x="29" y="54"/>
+                    <a:pt x="22" y="45"/>
+                    <a:pt x="22" y="37"/>
+                  </a:cubicBezTo>
+                  <a:cubicBezTo>
+                    <a:pt x="22" y="29"/>
+                    <a:pt x="29" y="21"/>
+                    <a:pt x="39" y="21"/>
+                  </a:cubicBezTo>
+                  <a:cubicBezTo>
+                    <a:pt x="47" y="21"/>
+                    <a:pt x="53" y="29"/>
+                    <a:pt x="53" y="37"/>
+                  </a:cubicBezTo>
+                  <a:cubicBezTo>
+                    <a:pt x="53" y="45"/>
+                    <a:pt x="47" y="54"/>
+                    <a:pt x="39" y="54"/>
+                  </a:cubicBezTo>
+                  <a:close/>
+                </a:path>
+              </a:pathLst>
+            </a:custGeom>
+            <a:solidFill>
+              <a:schemeClr val="bg1"/>
+            </a:solidFill>
+            <a:ln w="19050" cap="flat">
+              <a:solidFill>
+                <a:srgbClr val="98B6FE"/>
+              </a:solidFill>
+              <a:bevel/>
+              <a:headEnd/>
+              <a:tailEnd/>
+            </a:ln>
+            <a:effectLst/>
+            <a:extLst>
+              <a:ext uri="{AF507438-7753-43E0-B8FC-AC1667EBCBE1}">
+                <a14:hiddenEffects xmlns:a14="http://schemas.microsoft.com/office/drawing/2010/main">
+                  <a:effectLst>
+                    <a:outerShdw blurRad="63500" dist="38099" dir="2700000" algn="ctr" rotWithShape="0">
+                      <a:srgbClr val="000000">
+                        <a:alpha val="74998"/>
+                      </a:srgbClr>
+                    </a:outerShdw>
+                  </a:effectLst>
+                </a14:hiddenEffects>
+              </a:ext>
+            </a:extLst>
+          </p:spPr>
+          <p:txBody>
+            <a:bodyPr wrap="none" anchor="ctr"/>
+            <a:lstStyle/>
+            <a:p>
+              <a:endParaRPr lang="en-US" sz="964"/>
+            </a:p>
+          </p:txBody>
+        </p:sp>
+        <p:sp>
+          <p:nvSpPr>
+            <p:cNvPr id="39" name="Freeform 122">
+              <a:extLst>
+                <a:ext uri="{FF2B5EF4-FFF2-40B4-BE49-F238E27FC236}">
+                  <a16:creationId xmlns="" xmlns:a16="http://schemas.microsoft.com/office/drawing/2014/main" id="{59EA31B7-D7DB-4DBF-B245-2AE82627F51A}"/>
+                </a:ext>
+              </a:extLst>
+            </p:cNvPr>
+            <p:cNvSpPr>
+              <a:spLocks noChangeArrowheads="1"/>
+            </p:cNvSpPr>
+            <p:nvPr/>
+          </p:nvSpPr>
+          <p:spPr bwMode="auto">
+            <a:xfrm>
+              <a:off x="9560812" y="4244993"/>
+              <a:ext cx="216000" cy="36000"/>
+            </a:xfrm>
+            <a:custGeom>
+              <a:avLst/>
+              <a:gdLst>
+                <a:gd name="T0" fmla="*/ 160 w 171"/>
+                <a:gd name="T1" fmla="*/ 0 h 23"/>
+                <a:gd name="T2" fmla="*/ 160 w 171"/>
+                <a:gd name="T3" fmla="*/ 0 h 23"/>
+                <a:gd name="T4" fmla="*/ 11 w 171"/>
+                <a:gd name="T5" fmla="*/ 0 h 23"/>
+                <a:gd name="T6" fmla="*/ 0 w 171"/>
+                <a:gd name="T7" fmla="*/ 10 h 23"/>
+                <a:gd name="T8" fmla="*/ 11 w 171"/>
+                <a:gd name="T9" fmla="*/ 22 h 23"/>
+                <a:gd name="T10" fmla="*/ 160 w 171"/>
+                <a:gd name="T11" fmla="*/ 22 h 23"/>
+                <a:gd name="T12" fmla="*/ 170 w 171"/>
+                <a:gd name="T13" fmla="*/ 10 h 23"/>
+                <a:gd name="T14" fmla="*/ 160 w 171"/>
+                <a:gd name="T15" fmla="*/ 0 h 23"/>
+              </a:gdLst>
+              <a:ahLst/>
+              <a:cxnLst>
+                <a:cxn ang="0">
+                  <a:pos x="T0" y="T1"/>
+                </a:cxn>
+                <a:cxn ang="0">
+                  <a:pos x="T2" y="T3"/>
+                </a:cxn>
+                <a:cxn ang="0">
+                  <a:pos x="T4" y="T5"/>
+                </a:cxn>
+                <a:cxn ang="0">
+                  <a:pos x="T6" y="T7"/>
+                </a:cxn>
+                <a:cxn ang="0">
+                  <a:pos x="T8" y="T9"/>
+                </a:cxn>
+                <a:cxn ang="0">
+                  <a:pos x="T10" y="T11"/>
+                </a:cxn>
+                <a:cxn ang="0">
+                  <a:pos x="T12" y="T13"/>
+                </a:cxn>
+                <a:cxn ang="0">
+                  <a:pos x="T14" y="T15"/>
+                </a:cxn>
+              </a:cxnLst>
+              <a:rect l="0" t="0" r="r" b="b"/>
+              <a:pathLst>
+                <a:path w="171" h="23">
+                  <a:moveTo>
+                    <a:pt x="160" y="0"/>
+                  </a:moveTo>
+                  <a:lnTo>
+                    <a:pt x="160" y="0"/>
+                  </a:lnTo>
+                  <a:cubicBezTo>
+                    <a:pt x="11" y="0"/>
+                    <a:pt x="11" y="0"/>
+                    <a:pt x="11" y="0"/>
+                  </a:cubicBezTo>
+                  <a:cubicBezTo>
+                    <a:pt x="4" y="0"/>
+                    <a:pt x="0" y="5"/>
+                    <a:pt x="0" y="10"/>
+                  </a:cubicBezTo>
+                  <a:cubicBezTo>
+                    <a:pt x="0" y="18"/>
+                    <a:pt x="4" y="22"/>
+                    <a:pt x="11" y="22"/>
+                  </a:cubicBezTo>
+                  <a:cubicBezTo>
+                    <a:pt x="160" y="22"/>
+                    <a:pt x="160" y="22"/>
+                    <a:pt x="160" y="22"/>
+                  </a:cubicBezTo>
+                  <a:cubicBezTo>
+                    <a:pt x="166" y="22"/>
+                    <a:pt x="170" y="18"/>
+                    <a:pt x="170" y="10"/>
+                  </a:cubicBezTo>
+                  <a:cubicBezTo>
+                    <a:pt x="170" y="5"/>
+                    <a:pt x="166" y="0"/>
+                    <a:pt x="160" y="0"/>
+                  </a:cubicBezTo>
+                </a:path>
+              </a:pathLst>
+            </a:custGeom>
+            <a:solidFill>
+              <a:schemeClr val="bg1"/>
+            </a:solidFill>
+            <a:ln w="19050" cap="flat">
+              <a:solidFill>
+                <a:srgbClr val="98B6FE"/>
+              </a:solidFill>
+              <a:bevel/>
+              <a:headEnd/>
+              <a:tailEnd/>
+            </a:ln>
+            <a:effectLst/>
+            <a:extLst>
+              <a:ext uri="{AF507438-7753-43E0-B8FC-AC1667EBCBE1}">
+                <a14:hiddenEffects xmlns:a14="http://schemas.microsoft.com/office/drawing/2010/main">
+                  <a:effectLst>
+                    <a:outerShdw blurRad="63500" dist="38099" dir="2700000" algn="ctr" rotWithShape="0">
+                      <a:srgbClr val="000000">
+                        <a:alpha val="74998"/>
+                      </a:srgbClr>
+                    </a:outerShdw>
+                  </a:effectLst>
+                </a14:hiddenEffects>
+              </a:ext>
+            </a:extLst>
+          </p:spPr>
+          <p:txBody>
+            <a:bodyPr wrap="none" anchor="ctr"/>
+            <a:lstStyle/>
+            <a:p>
+              <a:endParaRPr lang="en-US" sz="964"/>
+            </a:p>
+          </p:txBody>
+        </p:sp>
+        <p:sp>
+          <p:nvSpPr>
+            <p:cNvPr id="40" name="Freeform 123">
+              <a:extLst>
+                <a:ext uri="{FF2B5EF4-FFF2-40B4-BE49-F238E27FC236}">
+                  <a16:creationId xmlns="" xmlns:a16="http://schemas.microsoft.com/office/drawing/2014/main" id="{07115F20-4892-4DCD-A419-4CD8D03F5E62}"/>
+                </a:ext>
+              </a:extLst>
+            </p:cNvPr>
+            <p:cNvSpPr>
+              <a:spLocks noChangeArrowheads="1"/>
+            </p:cNvSpPr>
+            <p:nvPr/>
+          </p:nvSpPr>
+          <p:spPr bwMode="auto">
+            <a:xfrm>
+              <a:off x="9486498" y="3832860"/>
+              <a:ext cx="526182" cy="785151"/>
+            </a:xfrm>
+            <a:custGeom>
+              <a:avLst/>
+              <a:gdLst>
+                <a:gd name="T0" fmla="*/ 398 w 426"/>
+                <a:gd name="T1" fmla="*/ 640 h 641"/>
+                <a:gd name="T2" fmla="*/ 398 w 426"/>
+                <a:gd name="T3" fmla="*/ 640 h 641"/>
+                <a:gd name="T4" fmla="*/ 425 w 426"/>
+                <a:gd name="T5" fmla="*/ 612 h 641"/>
+                <a:gd name="T6" fmla="*/ 425 w 426"/>
+                <a:gd name="T7" fmla="*/ 544 h 641"/>
+                <a:gd name="T8" fmla="*/ 425 w 426"/>
+                <a:gd name="T9" fmla="*/ 416 h 641"/>
+                <a:gd name="T10" fmla="*/ 425 w 426"/>
+                <a:gd name="T11" fmla="*/ 288 h 641"/>
+                <a:gd name="T12" fmla="*/ 425 w 426"/>
+                <a:gd name="T13" fmla="*/ 139 h 641"/>
+                <a:gd name="T14" fmla="*/ 425 w 426"/>
+                <a:gd name="T15" fmla="*/ 27 h 641"/>
+                <a:gd name="T16" fmla="*/ 398 w 426"/>
+                <a:gd name="T17" fmla="*/ 0 h 641"/>
+                <a:gd name="T18" fmla="*/ 27 w 426"/>
+                <a:gd name="T19" fmla="*/ 0 h 641"/>
+                <a:gd name="T20" fmla="*/ 0 w 426"/>
+                <a:gd name="T21" fmla="*/ 27 h 641"/>
+                <a:gd name="T22" fmla="*/ 0 w 426"/>
+                <a:gd name="T23" fmla="*/ 139 h 641"/>
+                <a:gd name="T24" fmla="*/ 0 w 426"/>
+                <a:gd name="T25" fmla="*/ 288 h 641"/>
+                <a:gd name="T26" fmla="*/ 0 w 426"/>
+                <a:gd name="T27" fmla="*/ 416 h 641"/>
+                <a:gd name="T28" fmla="*/ 0 w 426"/>
+                <a:gd name="T29" fmla="*/ 544 h 641"/>
+                <a:gd name="T30" fmla="*/ 0 w 426"/>
+                <a:gd name="T31" fmla="*/ 612 h 641"/>
+                <a:gd name="T32" fmla="*/ 27 w 426"/>
+                <a:gd name="T33" fmla="*/ 640 h 641"/>
+                <a:gd name="T34" fmla="*/ 398 w 426"/>
+                <a:gd name="T35" fmla="*/ 640 h 641"/>
+                <a:gd name="T36" fmla="*/ 21 w 426"/>
+                <a:gd name="T37" fmla="*/ 27 h 641"/>
+                <a:gd name="T38" fmla="*/ 21 w 426"/>
+                <a:gd name="T39" fmla="*/ 27 h 641"/>
+                <a:gd name="T40" fmla="*/ 27 w 426"/>
+                <a:gd name="T41" fmla="*/ 22 h 641"/>
+                <a:gd name="T42" fmla="*/ 398 w 426"/>
+                <a:gd name="T43" fmla="*/ 22 h 641"/>
+                <a:gd name="T44" fmla="*/ 404 w 426"/>
+                <a:gd name="T45" fmla="*/ 27 h 641"/>
+                <a:gd name="T46" fmla="*/ 404 w 426"/>
+                <a:gd name="T47" fmla="*/ 129 h 641"/>
+                <a:gd name="T48" fmla="*/ 21 w 426"/>
+                <a:gd name="T49" fmla="*/ 129 h 641"/>
+                <a:gd name="T50" fmla="*/ 21 w 426"/>
+                <a:gd name="T51" fmla="*/ 27 h 641"/>
+                <a:gd name="T52" fmla="*/ 21 w 426"/>
+                <a:gd name="T53" fmla="*/ 150 h 641"/>
+                <a:gd name="T54" fmla="*/ 21 w 426"/>
+                <a:gd name="T55" fmla="*/ 150 h 641"/>
+                <a:gd name="T56" fmla="*/ 404 w 426"/>
+                <a:gd name="T57" fmla="*/ 150 h 641"/>
+                <a:gd name="T58" fmla="*/ 404 w 426"/>
+                <a:gd name="T59" fmla="*/ 277 h 641"/>
+                <a:gd name="T60" fmla="*/ 21 w 426"/>
+                <a:gd name="T61" fmla="*/ 277 h 641"/>
+                <a:gd name="T62" fmla="*/ 21 w 426"/>
+                <a:gd name="T63" fmla="*/ 150 h 641"/>
+                <a:gd name="T64" fmla="*/ 21 w 426"/>
+                <a:gd name="T65" fmla="*/ 298 h 641"/>
+                <a:gd name="T66" fmla="*/ 21 w 426"/>
+                <a:gd name="T67" fmla="*/ 298 h 641"/>
+                <a:gd name="T68" fmla="*/ 404 w 426"/>
+                <a:gd name="T69" fmla="*/ 298 h 641"/>
+                <a:gd name="T70" fmla="*/ 404 w 426"/>
+                <a:gd name="T71" fmla="*/ 406 h 641"/>
+                <a:gd name="T72" fmla="*/ 21 w 426"/>
+                <a:gd name="T73" fmla="*/ 406 h 641"/>
+                <a:gd name="T74" fmla="*/ 21 w 426"/>
+                <a:gd name="T75" fmla="*/ 298 h 641"/>
+                <a:gd name="T76" fmla="*/ 21 w 426"/>
+                <a:gd name="T77" fmla="*/ 427 h 641"/>
+                <a:gd name="T78" fmla="*/ 21 w 426"/>
+                <a:gd name="T79" fmla="*/ 427 h 641"/>
+                <a:gd name="T80" fmla="*/ 404 w 426"/>
+                <a:gd name="T81" fmla="*/ 427 h 641"/>
+                <a:gd name="T82" fmla="*/ 404 w 426"/>
+                <a:gd name="T83" fmla="*/ 533 h 641"/>
+                <a:gd name="T84" fmla="*/ 21 w 426"/>
+                <a:gd name="T85" fmla="*/ 533 h 641"/>
+                <a:gd name="T86" fmla="*/ 21 w 426"/>
+                <a:gd name="T87" fmla="*/ 427 h 641"/>
+                <a:gd name="T88" fmla="*/ 21 w 426"/>
+                <a:gd name="T89" fmla="*/ 612 h 641"/>
+                <a:gd name="T90" fmla="*/ 21 w 426"/>
+                <a:gd name="T91" fmla="*/ 612 h 641"/>
+                <a:gd name="T92" fmla="*/ 21 w 426"/>
+                <a:gd name="T93" fmla="*/ 554 h 641"/>
+                <a:gd name="T94" fmla="*/ 404 w 426"/>
+                <a:gd name="T95" fmla="*/ 554 h 641"/>
+                <a:gd name="T96" fmla="*/ 404 w 426"/>
+                <a:gd name="T97" fmla="*/ 612 h 641"/>
+                <a:gd name="T98" fmla="*/ 398 w 426"/>
+                <a:gd name="T99" fmla="*/ 619 h 641"/>
+                <a:gd name="T100" fmla="*/ 27 w 426"/>
+                <a:gd name="T101" fmla="*/ 619 h 641"/>
+                <a:gd name="T102" fmla="*/ 21 w 426"/>
+                <a:gd name="T103" fmla="*/ 612 h 641"/>
+              </a:gdLst>
+              <a:ahLst/>
+              <a:cxnLst>
+                <a:cxn ang="0">
+                  <a:pos x="T0" y="T1"/>
+                </a:cxn>
+                <a:cxn ang="0">
+                  <a:pos x="T2" y="T3"/>
+                </a:cxn>
+                <a:cxn ang="0">
+                  <a:pos x="T4" y="T5"/>
+                </a:cxn>
+                <a:cxn ang="0">
+                  <a:pos x="T6" y="T7"/>
+                </a:cxn>
+                <a:cxn ang="0">
+                  <a:pos x="T8" y="T9"/>
+                </a:cxn>
+                <a:cxn ang="0">
+                  <a:pos x="T10" y="T11"/>
+                </a:cxn>
+                <a:cxn ang="0">
+                  <a:pos x="T12" y="T13"/>
+                </a:cxn>
+                <a:cxn ang="0">
+                  <a:pos x="T14" y="T15"/>
+                </a:cxn>
+                <a:cxn ang="0">
+                  <a:pos x="T16" y="T17"/>
+                </a:cxn>
+                <a:cxn ang="0">
+                  <a:pos x="T18" y="T19"/>
+                </a:cxn>
+                <a:cxn ang="0">
+                  <a:pos x="T20" y="T21"/>
+                </a:cxn>
+                <a:cxn ang="0">
+                  <a:pos x="T22" y="T23"/>
+                </a:cxn>
+                <a:cxn ang="0">
+                  <a:pos x="T24" y="T25"/>
+                </a:cxn>
+                <a:cxn ang="0">
+                  <a:pos x="T26" y="T27"/>
+                </a:cxn>
+                <a:cxn ang="0">
+                  <a:pos x="T28" y="T29"/>
+                </a:cxn>
+                <a:cxn ang="0">
+                  <a:pos x="T30" y="T31"/>
+                </a:cxn>
+                <a:cxn ang="0">
+                  <a:pos x="T32" y="T33"/>
+                </a:cxn>
+                <a:cxn ang="0">
+                  <a:pos x="T34" y="T35"/>
+                </a:cxn>
+                <a:cxn ang="0">
+                  <a:pos x="T36" y="T37"/>
+                </a:cxn>
+                <a:cxn ang="0">
+                  <a:pos x="T38" y="T39"/>
+                </a:cxn>
+                <a:cxn ang="0">
+                  <a:pos x="T40" y="T41"/>
+                </a:cxn>
+                <a:cxn ang="0">
+                  <a:pos x="T42" y="T43"/>
+                </a:cxn>
+                <a:cxn ang="0">
+                  <a:pos x="T44" y="T45"/>
+                </a:cxn>
+                <a:cxn ang="0">
+                  <a:pos x="T46" y="T47"/>
+                </a:cxn>
+                <a:cxn ang="0">
+                  <a:pos x="T48" y="T49"/>
+                </a:cxn>
+                <a:cxn ang="0">
+                  <a:pos x="T50" y="T51"/>
+                </a:cxn>
+                <a:cxn ang="0">
+                  <a:pos x="T52" y="T53"/>
+                </a:cxn>
+                <a:cxn ang="0">
+                  <a:pos x="T54" y="T55"/>
+                </a:cxn>
+                <a:cxn ang="0">
+                  <a:pos x="T56" y="T57"/>
+                </a:cxn>
+                <a:cxn ang="0">
+                  <a:pos x="T58" y="T59"/>
+                </a:cxn>
+                <a:cxn ang="0">
+                  <a:pos x="T60" y="T61"/>
+                </a:cxn>
+                <a:cxn ang="0">
+                  <a:pos x="T62" y="T63"/>
+                </a:cxn>
+                <a:cxn ang="0">
+                  <a:pos x="T64" y="T65"/>
+                </a:cxn>
+                <a:cxn ang="0">
+                  <a:pos x="T66" y="T67"/>
+                </a:cxn>
+                <a:cxn ang="0">
+                  <a:pos x="T68" y="T69"/>
+                </a:cxn>
+                <a:cxn ang="0">
+                  <a:pos x="T70" y="T71"/>
+                </a:cxn>
+                <a:cxn ang="0">
+                  <a:pos x="T72" y="T73"/>
+                </a:cxn>
+                <a:cxn ang="0">
+                  <a:pos x="T74" y="T75"/>
+                </a:cxn>
+                <a:cxn ang="0">
+                  <a:pos x="T76" y="T77"/>
+                </a:cxn>
+                <a:cxn ang="0">
+                  <a:pos x="T78" y="T79"/>
+                </a:cxn>
+                <a:cxn ang="0">
+                  <a:pos x="T80" y="T81"/>
+                </a:cxn>
+                <a:cxn ang="0">
+                  <a:pos x="T82" y="T83"/>
+                </a:cxn>
+                <a:cxn ang="0">
+                  <a:pos x="T84" y="T85"/>
+                </a:cxn>
+                <a:cxn ang="0">
+                  <a:pos x="T86" y="T87"/>
+                </a:cxn>
+                <a:cxn ang="0">
+                  <a:pos x="T88" y="T89"/>
+                </a:cxn>
+                <a:cxn ang="0">
+                  <a:pos x="T90" y="T91"/>
+                </a:cxn>
+                <a:cxn ang="0">
+                  <a:pos x="T92" y="T93"/>
+                </a:cxn>
+                <a:cxn ang="0">
+                  <a:pos x="T94" y="T95"/>
+                </a:cxn>
+                <a:cxn ang="0">
+                  <a:pos x="T96" y="T97"/>
+                </a:cxn>
+                <a:cxn ang="0">
+                  <a:pos x="T98" y="T99"/>
+                </a:cxn>
+                <a:cxn ang="0">
+                  <a:pos x="T100" y="T101"/>
+                </a:cxn>
+                <a:cxn ang="0">
+                  <a:pos x="T102" y="T103"/>
+                </a:cxn>
+              </a:cxnLst>
+              <a:rect l="0" t="0" r="r" b="b"/>
+              <a:pathLst>
+                <a:path w="426" h="641">
+                  <a:moveTo>
+                    <a:pt x="398" y="640"/>
+                  </a:moveTo>
+                  <a:lnTo>
+                    <a:pt x="398" y="640"/>
+                  </a:lnTo>
+                  <a:cubicBezTo>
+                    <a:pt x="413" y="640"/>
+                    <a:pt x="425" y="627"/>
+                    <a:pt x="425" y="612"/>
+                  </a:cubicBezTo>
+                  <a:cubicBezTo>
+                    <a:pt x="425" y="544"/>
+                    <a:pt x="425" y="544"/>
+                    <a:pt x="425" y="544"/>
+                  </a:cubicBezTo>
+                  <a:cubicBezTo>
+                    <a:pt x="425" y="416"/>
+                    <a:pt x="425" y="416"/>
+                    <a:pt x="425" y="416"/>
+                  </a:cubicBezTo>
+                  <a:cubicBezTo>
+                    <a:pt x="425" y="288"/>
+                    <a:pt x="425" y="288"/>
+                    <a:pt x="425" y="288"/>
+                  </a:cubicBezTo>
+                  <a:cubicBezTo>
+                    <a:pt x="425" y="139"/>
+                    <a:pt x="425" y="139"/>
+                    <a:pt x="425" y="139"/>
+                  </a:cubicBezTo>
+                  <a:cubicBezTo>
+                    <a:pt x="425" y="27"/>
+                    <a:pt x="425" y="27"/>
+                    <a:pt x="425" y="27"/>
+                  </a:cubicBezTo>
+                  <a:cubicBezTo>
+                    <a:pt x="425" y="13"/>
+                    <a:pt x="413" y="0"/>
+                    <a:pt x="398" y="0"/>
+                  </a:cubicBezTo>
+                  <a:cubicBezTo>
+                    <a:pt x="27" y="0"/>
+                    <a:pt x="27" y="0"/>
+                    <a:pt x="27" y="0"/>
+                  </a:cubicBezTo>
+                  <a:cubicBezTo>
+                    <a:pt x="12" y="0"/>
+                    <a:pt x="0" y="13"/>
+                    <a:pt x="0" y="27"/>
+                  </a:cubicBezTo>
+                  <a:cubicBezTo>
+                    <a:pt x="0" y="139"/>
+                    <a:pt x="0" y="139"/>
+                    <a:pt x="0" y="139"/>
+                  </a:cubicBezTo>
+                  <a:cubicBezTo>
+                    <a:pt x="0" y="288"/>
+                    <a:pt x="0" y="288"/>
+                    <a:pt x="0" y="288"/>
+                  </a:cubicBezTo>
+                  <a:cubicBezTo>
+                    <a:pt x="0" y="416"/>
+                    <a:pt x="0" y="416"/>
+                    <a:pt x="0" y="416"/>
+                  </a:cubicBezTo>
+                  <a:cubicBezTo>
+                    <a:pt x="0" y="544"/>
+                    <a:pt x="0" y="544"/>
+                    <a:pt x="0" y="544"/>
+                  </a:cubicBezTo>
+                  <a:cubicBezTo>
+                    <a:pt x="0" y="612"/>
+                    <a:pt x="0" y="612"/>
+                    <a:pt x="0" y="612"/>
+                  </a:cubicBezTo>
+                  <a:cubicBezTo>
+                    <a:pt x="0" y="627"/>
+                    <a:pt x="12" y="640"/>
+                    <a:pt x="27" y="640"/>
+                  </a:cubicBezTo>
+                  <a:lnTo>
+                    <a:pt x="398" y="640"/>
+                  </a:lnTo>
+                  <a:close/>
+                  <a:moveTo>
+                    <a:pt x="21" y="27"/>
+                  </a:moveTo>
+                  <a:lnTo>
+                    <a:pt x="21" y="27"/>
+                  </a:lnTo>
+                  <a:cubicBezTo>
+                    <a:pt x="21" y="25"/>
+                    <a:pt x="23" y="22"/>
+                    <a:pt x="27" y="22"/>
+                  </a:cubicBezTo>
+                  <a:cubicBezTo>
+                    <a:pt x="398" y="22"/>
+                    <a:pt x="398" y="22"/>
+                    <a:pt x="398" y="22"/>
+                  </a:cubicBezTo>
+                  <a:cubicBezTo>
+                    <a:pt x="401" y="22"/>
+                    <a:pt x="404" y="25"/>
+                    <a:pt x="404" y="27"/>
+                  </a:cubicBezTo>
+                  <a:cubicBezTo>
+                    <a:pt x="404" y="129"/>
+                    <a:pt x="404" y="129"/>
+                    <a:pt x="404" y="129"/>
+                  </a:cubicBezTo>
+                  <a:cubicBezTo>
+                    <a:pt x="21" y="129"/>
+                    <a:pt x="21" y="129"/>
+                    <a:pt x="21" y="129"/>
+                  </a:cubicBezTo>
+                  <a:lnTo>
+                    <a:pt x="21" y="27"/>
+                  </a:lnTo>
+                  <a:close/>
+                  <a:moveTo>
+                    <a:pt x="21" y="150"/>
+                  </a:moveTo>
+                  <a:lnTo>
+                    <a:pt x="21" y="150"/>
+                  </a:lnTo>
+                  <a:cubicBezTo>
+                    <a:pt x="404" y="150"/>
+                    <a:pt x="404" y="150"/>
+                    <a:pt x="404" y="150"/>
+                  </a:cubicBezTo>
+                  <a:cubicBezTo>
+                    <a:pt x="404" y="277"/>
+                    <a:pt x="404" y="277"/>
+                    <a:pt x="404" y="277"/>
+                  </a:cubicBezTo>
+                  <a:cubicBezTo>
+                    <a:pt x="21" y="277"/>
+                    <a:pt x="21" y="277"/>
+                    <a:pt x="21" y="277"/>
+                  </a:cubicBezTo>
+                  <a:lnTo>
+                    <a:pt x="21" y="150"/>
+                  </a:lnTo>
+                  <a:close/>
+                  <a:moveTo>
+                    <a:pt x="21" y="298"/>
+                  </a:moveTo>
+                  <a:lnTo>
+                    <a:pt x="21" y="298"/>
+                  </a:lnTo>
+                  <a:cubicBezTo>
+                    <a:pt x="404" y="298"/>
+                    <a:pt x="404" y="298"/>
+                    <a:pt x="404" y="298"/>
+                  </a:cubicBezTo>
+                  <a:cubicBezTo>
+                    <a:pt x="404" y="406"/>
+                    <a:pt x="404" y="406"/>
+                    <a:pt x="404" y="406"/>
+                  </a:cubicBezTo>
+                  <a:cubicBezTo>
+                    <a:pt x="21" y="406"/>
+                    <a:pt x="21" y="406"/>
+                    <a:pt x="21" y="406"/>
+                  </a:cubicBezTo>
+                  <a:lnTo>
+                    <a:pt x="21" y="298"/>
+                  </a:lnTo>
+                  <a:close/>
+                  <a:moveTo>
+                    <a:pt x="21" y="427"/>
+                  </a:moveTo>
+                  <a:lnTo>
+                    <a:pt x="21" y="427"/>
+                  </a:lnTo>
+                  <a:cubicBezTo>
+                    <a:pt x="404" y="427"/>
+                    <a:pt x="404" y="427"/>
+                    <a:pt x="404" y="427"/>
+                  </a:cubicBezTo>
+                  <a:cubicBezTo>
+                    <a:pt x="404" y="533"/>
+                    <a:pt x="404" y="533"/>
+                    <a:pt x="404" y="533"/>
+                  </a:cubicBezTo>
+                  <a:cubicBezTo>
+                    <a:pt x="21" y="533"/>
+                    <a:pt x="21" y="533"/>
+                    <a:pt x="21" y="533"/>
+                  </a:cubicBezTo>
+                  <a:lnTo>
+                    <a:pt x="21" y="427"/>
+                  </a:lnTo>
+                  <a:close/>
+                  <a:moveTo>
+                    <a:pt x="21" y="612"/>
+                  </a:moveTo>
+                  <a:lnTo>
+                    <a:pt x="21" y="612"/>
+                  </a:lnTo>
+                  <a:cubicBezTo>
+                    <a:pt x="21" y="554"/>
+                    <a:pt x="21" y="554"/>
+                    <a:pt x="21" y="554"/>
+                  </a:cubicBezTo>
+                  <a:cubicBezTo>
+                    <a:pt x="404" y="554"/>
+                    <a:pt x="404" y="554"/>
+                    <a:pt x="404" y="554"/>
+                  </a:cubicBezTo>
+                  <a:cubicBezTo>
+                    <a:pt x="404" y="612"/>
+                    <a:pt x="404" y="612"/>
+                    <a:pt x="404" y="612"/>
+                  </a:cubicBezTo>
+                  <a:cubicBezTo>
+                    <a:pt x="404" y="616"/>
+                    <a:pt x="401" y="619"/>
+                    <a:pt x="398" y="619"/>
+                  </a:cubicBezTo>
+                  <a:cubicBezTo>
+                    <a:pt x="27" y="619"/>
+                    <a:pt x="27" y="619"/>
+                    <a:pt x="27" y="619"/>
+                  </a:cubicBezTo>
+                  <a:cubicBezTo>
+                    <a:pt x="23" y="619"/>
+                    <a:pt x="21" y="616"/>
+                    <a:pt x="21" y="612"/>
+                  </a:cubicBezTo>
+                  <a:close/>
+                </a:path>
+              </a:pathLst>
+            </a:custGeom>
+            <a:solidFill>
+              <a:schemeClr val="bg1"/>
+            </a:solidFill>
+            <a:ln w="19050" cap="flat">
+              <a:solidFill>
+                <a:srgbClr val="98B6FE"/>
+              </a:solidFill>
+              <a:bevel/>
+              <a:headEnd/>
+              <a:tailEnd/>
+            </a:ln>
+            <a:effectLst/>
+            <a:extLst>
+              <a:ext uri="{AF507438-7753-43E0-B8FC-AC1667EBCBE1}">
+                <a14:hiddenEffects xmlns:a14="http://schemas.microsoft.com/office/drawing/2010/main">
+                  <a:effectLst>
+                    <a:outerShdw blurRad="63500" dist="38099" dir="2700000" algn="ctr" rotWithShape="0">
+                      <a:srgbClr val="000000">
+                        <a:alpha val="74998"/>
+                      </a:srgbClr>
+                    </a:outerShdw>
+                  </a:effectLst>
+                </a14:hiddenEffects>
+              </a:ext>
+            </a:extLst>
+          </p:spPr>
+          <p:txBody>
+            <a:bodyPr wrap="none" anchor="ctr"/>
+            <a:lstStyle/>
+            <a:p>
+              <a:endParaRPr lang="en-US" sz="964"/>
+            </a:p>
+          </p:txBody>
+        </p:sp>
+        <p:sp>
+          <p:nvSpPr>
+            <p:cNvPr id="41" name="Freeform 124">
+              <a:extLst>
+                <a:ext uri="{FF2B5EF4-FFF2-40B4-BE49-F238E27FC236}">
+                  <a16:creationId xmlns="" xmlns:a16="http://schemas.microsoft.com/office/drawing/2014/main" id="{9EA60E95-59DD-4A01-B0FA-42513BEAF8E7}"/>
+                </a:ext>
+              </a:extLst>
+            </p:cNvPr>
+            <p:cNvSpPr>
+              <a:spLocks noChangeArrowheads="1"/>
+            </p:cNvSpPr>
+            <p:nvPr/>
+          </p:nvSpPr>
+          <p:spPr bwMode="auto">
+            <a:xfrm>
+              <a:off x="9799787" y="4381963"/>
+              <a:ext cx="81940" cy="92054"/>
+            </a:xfrm>
+            <a:custGeom>
+              <a:avLst/>
+              <a:gdLst>
+                <a:gd name="T0" fmla="*/ 39 w 76"/>
+                <a:gd name="T1" fmla="*/ 0 h 75"/>
+                <a:gd name="T2" fmla="*/ 39 w 76"/>
+                <a:gd name="T3" fmla="*/ 0 h 75"/>
+                <a:gd name="T4" fmla="*/ 0 w 76"/>
+                <a:gd name="T5" fmla="*/ 37 h 75"/>
+                <a:gd name="T6" fmla="*/ 39 w 76"/>
+                <a:gd name="T7" fmla="*/ 74 h 75"/>
+                <a:gd name="T8" fmla="*/ 75 w 76"/>
+                <a:gd name="T9" fmla="*/ 37 h 75"/>
+                <a:gd name="T10" fmla="*/ 39 w 76"/>
+                <a:gd name="T11" fmla="*/ 0 h 75"/>
+                <a:gd name="T12" fmla="*/ 39 w 76"/>
+                <a:gd name="T13" fmla="*/ 54 h 75"/>
+                <a:gd name="T14" fmla="*/ 39 w 76"/>
+                <a:gd name="T15" fmla="*/ 54 h 75"/>
+                <a:gd name="T16" fmla="*/ 22 w 76"/>
+                <a:gd name="T17" fmla="*/ 37 h 75"/>
+                <a:gd name="T18" fmla="*/ 39 w 76"/>
+                <a:gd name="T19" fmla="*/ 21 h 75"/>
+                <a:gd name="T20" fmla="*/ 53 w 76"/>
+                <a:gd name="T21" fmla="*/ 37 h 75"/>
+                <a:gd name="T22" fmla="*/ 39 w 76"/>
+                <a:gd name="T23" fmla="*/ 54 h 75"/>
+              </a:gdLst>
+              <a:ahLst/>
+              <a:cxnLst>
+                <a:cxn ang="0">
+                  <a:pos x="T0" y="T1"/>
+                </a:cxn>
+                <a:cxn ang="0">
+                  <a:pos x="T2" y="T3"/>
+                </a:cxn>
+                <a:cxn ang="0">
+                  <a:pos x="T4" y="T5"/>
+                </a:cxn>
+                <a:cxn ang="0">
+                  <a:pos x="T6" y="T7"/>
+                </a:cxn>
+                <a:cxn ang="0">
+                  <a:pos x="T8" y="T9"/>
+                </a:cxn>
+                <a:cxn ang="0">
+                  <a:pos x="T10" y="T11"/>
+                </a:cxn>
+                <a:cxn ang="0">
+                  <a:pos x="T12" y="T13"/>
+                </a:cxn>
+                <a:cxn ang="0">
+                  <a:pos x="T14" y="T15"/>
+                </a:cxn>
+                <a:cxn ang="0">
+                  <a:pos x="T16" y="T17"/>
+                </a:cxn>
+                <a:cxn ang="0">
+                  <a:pos x="T18" y="T19"/>
+                </a:cxn>
+                <a:cxn ang="0">
+                  <a:pos x="T20" y="T21"/>
+                </a:cxn>
+                <a:cxn ang="0">
+                  <a:pos x="T22" y="T23"/>
+                </a:cxn>
+              </a:cxnLst>
+              <a:rect l="0" t="0" r="r" b="b"/>
+              <a:pathLst>
+                <a:path w="76" h="75">
+                  <a:moveTo>
+                    <a:pt x="39" y="0"/>
+                  </a:moveTo>
+                  <a:lnTo>
+                    <a:pt x="39" y="0"/>
+                  </a:lnTo>
+                  <a:cubicBezTo>
+                    <a:pt x="18" y="0"/>
+                    <a:pt x="0" y="17"/>
+                    <a:pt x="0" y="37"/>
+                  </a:cubicBezTo>
+                  <a:cubicBezTo>
+                    <a:pt x="0" y="58"/>
+                    <a:pt x="18" y="74"/>
+                    <a:pt x="39" y="74"/>
+                  </a:cubicBezTo>
+                  <a:cubicBezTo>
+                    <a:pt x="59" y="74"/>
+                    <a:pt x="75" y="58"/>
+                    <a:pt x="75" y="37"/>
+                  </a:cubicBezTo>
+                  <a:cubicBezTo>
+                    <a:pt x="75" y="17"/>
+                    <a:pt x="59" y="0"/>
+                    <a:pt x="39" y="0"/>
+                  </a:cubicBezTo>
+                  <a:close/>
+                  <a:moveTo>
+                    <a:pt x="39" y="54"/>
+                  </a:moveTo>
+                  <a:lnTo>
+                    <a:pt x="39" y="54"/>
+                  </a:lnTo>
+                  <a:cubicBezTo>
+                    <a:pt x="29" y="54"/>
+                    <a:pt x="22" y="46"/>
+                    <a:pt x="22" y="37"/>
+                  </a:cubicBezTo>
+                  <a:cubicBezTo>
+                    <a:pt x="22" y="28"/>
+                    <a:pt x="29" y="21"/>
+                    <a:pt x="39" y="21"/>
+                  </a:cubicBezTo>
+                  <a:cubicBezTo>
+                    <a:pt x="47" y="21"/>
+                    <a:pt x="53" y="28"/>
+                    <a:pt x="53" y="37"/>
+                  </a:cubicBezTo>
+                  <a:cubicBezTo>
+                    <a:pt x="53" y="46"/>
+                    <a:pt x="47" y="54"/>
+                    <a:pt x="39" y="54"/>
+                  </a:cubicBezTo>
+                  <a:close/>
+                </a:path>
+              </a:pathLst>
+            </a:custGeom>
+            <a:solidFill>
+              <a:schemeClr val="bg1"/>
+            </a:solidFill>
+            <a:ln w="19050" cap="flat">
+              <a:solidFill>
+                <a:srgbClr val="98B6FE"/>
+              </a:solidFill>
+              <a:bevel/>
+              <a:headEnd/>
+              <a:tailEnd/>
+            </a:ln>
+            <a:effectLst/>
+            <a:extLst>
+              <a:ext uri="{AF507438-7753-43E0-B8FC-AC1667EBCBE1}">
+                <a14:hiddenEffects xmlns:a14="http://schemas.microsoft.com/office/drawing/2010/main">
+                  <a:effectLst>
+                    <a:outerShdw blurRad="63500" dist="38099" dir="2700000" algn="ctr" rotWithShape="0">
+                      <a:srgbClr val="000000">
+                        <a:alpha val="74998"/>
+                      </a:srgbClr>
+                    </a:outerShdw>
+                  </a:effectLst>
+                </a14:hiddenEffects>
+              </a:ext>
+            </a:extLst>
+          </p:spPr>
+          <p:txBody>
+            <a:bodyPr wrap="none" anchor="ctr"/>
+            <a:lstStyle/>
+            <a:p>
+              <a:endParaRPr lang="en-US" sz="964"/>
+            </a:p>
+          </p:txBody>
+        </p:sp>
+        <p:sp>
+          <p:nvSpPr>
+            <p:cNvPr id="42" name="Freeform 125">
+              <a:extLst>
+                <a:ext uri="{FF2B5EF4-FFF2-40B4-BE49-F238E27FC236}">
+                  <a16:creationId xmlns="" xmlns:a16="http://schemas.microsoft.com/office/drawing/2014/main" id="{277C2BFE-7B2E-4B06-836A-8103FB641491}"/>
+                </a:ext>
+              </a:extLst>
+            </p:cNvPr>
+            <p:cNvSpPr>
+              <a:spLocks noChangeArrowheads="1"/>
+            </p:cNvSpPr>
+            <p:nvPr/>
+          </p:nvSpPr>
+          <p:spPr bwMode="auto">
+            <a:xfrm>
+              <a:off x="9560812" y="4411046"/>
+              <a:ext cx="216000" cy="36000"/>
+            </a:xfrm>
+            <a:custGeom>
+              <a:avLst/>
+              <a:gdLst>
+                <a:gd name="T0" fmla="*/ 160 w 171"/>
+                <a:gd name="T1" fmla="*/ 0 h 23"/>
+                <a:gd name="T2" fmla="*/ 160 w 171"/>
+                <a:gd name="T3" fmla="*/ 0 h 23"/>
+                <a:gd name="T4" fmla="*/ 11 w 171"/>
+                <a:gd name="T5" fmla="*/ 0 h 23"/>
+                <a:gd name="T6" fmla="*/ 0 w 171"/>
+                <a:gd name="T7" fmla="*/ 11 h 23"/>
+                <a:gd name="T8" fmla="*/ 11 w 171"/>
+                <a:gd name="T9" fmla="*/ 22 h 23"/>
+                <a:gd name="T10" fmla="*/ 160 w 171"/>
+                <a:gd name="T11" fmla="*/ 22 h 23"/>
+                <a:gd name="T12" fmla="*/ 170 w 171"/>
+                <a:gd name="T13" fmla="*/ 11 h 23"/>
+                <a:gd name="T14" fmla="*/ 160 w 171"/>
+                <a:gd name="T15" fmla="*/ 0 h 23"/>
+              </a:gdLst>
+              <a:ahLst/>
+              <a:cxnLst>
+                <a:cxn ang="0">
+                  <a:pos x="T0" y="T1"/>
+                </a:cxn>
+                <a:cxn ang="0">
+                  <a:pos x="T2" y="T3"/>
+                </a:cxn>
+                <a:cxn ang="0">
+                  <a:pos x="T4" y="T5"/>
+                </a:cxn>
+                <a:cxn ang="0">
+                  <a:pos x="T6" y="T7"/>
+                </a:cxn>
+                <a:cxn ang="0">
+                  <a:pos x="T8" y="T9"/>
+                </a:cxn>
+                <a:cxn ang="0">
+                  <a:pos x="T10" y="T11"/>
+                </a:cxn>
+                <a:cxn ang="0">
+                  <a:pos x="T12" y="T13"/>
+                </a:cxn>
+                <a:cxn ang="0">
+                  <a:pos x="T14" y="T15"/>
+                </a:cxn>
+              </a:cxnLst>
+              <a:rect l="0" t="0" r="r" b="b"/>
+              <a:pathLst>
+                <a:path w="171" h="23">
+                  <a:moveTo>
+                    <a:pt x="160" y="0"/>
+                  </a:moveTo>
+                  <a:lnTo>
+                    <a:pt x="160" y="0"/>
+                  </a:lnTo>
+                  <a:cubicBezTo>
+                    <a:pt x="11" y="0"/>
+                    <a:pt x="11" y="0"/>
+                    <a:pt x="11" y="0"/>
+                  </a:cubicBezTo>
+                  <a:cubicBezTo>
+                    <a:pt x="4" y="0"/>
+                    <a:pt x="0" y="6"/>
+                    <a:pt x="0" y="11"/>
+                  </a:cubicBezTo>
+                  <a:cubicBezTo>
+                    <a:pt x="0" y="17"/>
+                    <a:pt x="4" y="22"/>
+                    <a:pt x="11" y="22"/>
+                  </a:cubicBezTo>
+                  <a:cubicBezTo>
+                    <a:pt x="160" y="22"/>
+                    <a:pt x="160" y="22"/>
+                    <a:pt x="160" y="22"/>
+                  </a:cubicBezTo>
+                  <a:cubicBezTo>
+                    <a:pt x="166" y="22"/>
+                    <a:pt x="170" y="17"/>
+                    <a:pt x="170" y="11"/>
+                  </a:cubicBezTo>
+                  <a:cubicBezTo>
+                    <a:pt x="170" y="6"/>
+                    <a:pt x="166" y="0"/>
+                    <a:pt x="160" y="0"/>
+                  </a:cubicBezTo>
+                </a:path>
+              </a:pathLst>
+            </a:custGeom>
+            <a:solidFill>
+              <a:schemeClr val="bg1"/>
+            </a:solidFill>
+            <a:ln w="19050" cap="flat">
+              <a:solidFill>
+                <a:srgbClr val="98B6FE"/>
+              </a:solidFill>
+              <a:bevel/>
+              <a:headEnd/>
+              <a:tailEnd/>
+            </a:ln>
+            <a:effectLst/>
+            <a:extLst>
+              <a:ext uri="{AF507438-7753-43E0-B8FC-AC1667EBCBE1}">
+                <a14:hiddenEffects xmlns:a14="http://schemas.microsoft.com/office/drawing/2010/main">
+                  <a:effectLst>
+                    <a:outerShdw blurRad="63500" dist="38099" dir="2700000" algn="ctr" rotWithShape="0">
+                      <a:srgbClr val="000000">
+                        <a:alpha val="74998"/>
+                      </a:srgbClr>
+                    </a:outerShdw>
+                  </a:effectLst>
+                </a14:hiddenEffects>
+              </a:ext>
+            </a:extLst>
+          </p:spPr>
+          <p:txBody>
+            <a:bodyPr wrap="none" anchor="ctr"/>
+            <a:lstStyle/>
+            <a:p>
+              <a:endParaRPr lang="en-US" sz="964"/>
+            </a:p>
+          </p:txBody>
+        </p:sp>
       </p:grpSp>
       <p:grpSp>
         <p:nvGrpSpPr>
-          <p:cNvPr id="49" name="그룹 48"/>
+          <p:cNvPr id="9" name="그룹 8"/>
           <p:cNvGrpSpPr/>
           <p:nvPr/>
         </p:nvGrpSpPr>
         <p:grpSpPr>
           <a:xfrm>
-            <a:off x="7290435" y="965835"/>
-            <a:ext cx="1569720" cy="1059180"/>
-            <a:chOff x="7338060" y="975360"/>
-            <a:chExt cx="1569720" cy="1059180"/>
+            <a:off x="7635025" y="3649683"/>
+            <a:ext cx="368625" cy="545911"/>
+            <a:chOff x="7539389" y="3807187"/>
+            <a:chExt cx="416888" cy="451880"/>
           </a:xfrm>
         </p:grpSpPr>
         <p:sp>
           <p:nvSpPr>
-            <p:cNvPr id="47" name="직사각형 46"/>
-            <p:cNvSpPr/>
+            <p:cNvPr id="32" name="Freeform 111">
+              <a:extLst>
+                <a:ext uri="{FF2B5EF4-FFF2-40B4-BE49-F238E27FC236}">
+                  <a16:creationId xmlns="" xmlns:a16="http://schemas.microsoft.com/office/drawing/2014/main" id="{BC11850A-92B9-404F-BF5E-D6215717A644}"/>
+                </a:ext>
+              </a:extLst>
+            </p:cNvPr>
+            <p:cNvSpPr>
+              <a:spLocks noChangeArrowheads="1"/>
+            </p:cNvSpPr>
             <p:nvPr/>
           </p:nvSpPr>
-          <p:spPr>
+          <p:spPr bwMode="auto">
             <a:xfrm>
-              <a:off x="7534819" y="975360"/>
-              <a:ext cx="1188000" cy="1059180"/>
+              <a:off x="7649742" y="3926802"/>
+              <a:ext cx="193118" cy="209326"/>
             </a:xfrm>
-            <a:prstGeom prst="rect">
+            <a:custGeom>
               <a:avLst/>
-            </a:prstGeom>
+              <a:gdLst>
+                <a:gd name="T0" fmla="*/ 268 w 279"/>
+                <a:gd name="T1" fmla="*/ 0 h 278"/>
+                <a:gd name="T2" fmla="*/ 268 w 279"/>
+                <a:gd name="T3" fmla="*/ 0 h 278"/>
+                <a:gd name="T4" fmla="*/ 12 w 279"/>
+                <a:gd name="T5" fmla="*/ 0 h 278"/>
+                <a:gd name="T6" fmla="*/ 0 w 279"/>
+                <a:gd name="T7" fmla="*/ 11 h 278"/>
+                <a:gd name="T8" fmla="*/ 0 w 279"/>
+                <a:gd name="T9" fmla="*/ 266 h 278"/>
+                <a:gd name="T10" fmla="*/ 12 w 279"/>
+                <a:gd name="T11" fmla="*/ 277 h 278"/>
+                <a:gd name="T12" fmla="*/ 268 w 279"/>
+                <a:gd name="T13" fmla="*/ 277 h 278"/>
+                <a:gd name="T14" fmla="*/ 278 w 279"/>
+                <a:gd name="T15" fmla="*/ 266 h 278"/>
+                <a:gd name="T16" fmla="*/ 278 w 279"/>
+                <a:gd name="T17" fmla="*/ 11 h 278"/>
+                <a:gd name="T18" fmla="*/ 268 w 279"/>
+                <a:gd name="T19" fmla="*/ 0 h 278"/>
+                <a:gd name="T20" fmla="*/ 256 w 279"/>
+                <a:gd name="T21" fmla="*/ 255 h 278"/>
+                <a:gd name="T22" fmla="*/ 256 w 279"/>
+                <a:gd name="T23" fmla="*/ 255 h 278"/>
+                <a:gd name="T24" fmla="*/ 22 w 279"/>
+                <a:gd name="T25" fmla="*/ 255 h 278"/>
+                <a:gd name="T26" fmla="*/ 22 w 279"/>
+                <a:gd name="T27" fmla="*/ 21 h 278"/>
+                <a:gd name="T28" fmla="*/ 256 w 279"/>
+                <a:gd name="T29" fmla="*/ 21 h 278"/>
+                <a:gd name="T30" fmla="*/ 256 w 279"/>
+                <a:gd name="T31" fmla="*/ 255 h 278"/>
+              </a:gdLst>
+              <a:ahLst/>
+              <a:cxnLst>
+                <a:cxn ang="0">
+                  <a:pos x="T0" y="T1"/>
+                </a:cxn>
+                <a:cxn ang="0">
+                  <a:pos x="T2" y="T3"/>
+                </a:cxn>
+                <a:cxn ang="0">
+                  <a:pos x="T4" y="T5"/>
+                </a:cxn>
+                <a:cxn ang="0">
+                  <a:pos x="T6" y="T7"/>
+                </a:cxn>
+                <a:cxn ang="0">
+                  <a:pos x="T8" y="T9"/>
+                </a:cxn>
+                <a:cxn ang="0">
+                  <a:pos x="T10" y="T11"/>
+                </a:cxn>
+                <a:cxn ang="0">
+                  <a:pos x="T12" y="T13"/>
+                </a:cxn>
+                <a:cxn ang="0">
+                  <a:pos x="T14" y="T15"/>
+                </a:cxn>
+                <a:cxn ang="0">
+                  <a:pos x="T16" y="T17"/>
+                </a:cxn>
+                <a:cxn ang="0">
+                  <a:pos x="T18" y="T19"/>
+                </a:cxn>
+                <a:cxn ang="0">
+                  <a:pos x="T20" y="T21"/>
+                </a:cxn>
+                <a:cxn ang="0">
+                  <a:pos x="T22" y="T23"/>
+                </a:cxn>
+                <a:cxn ang="0">
+                  <a:pos x="T24" y="T25"/>
+                </a:cxn>
+                <a:cxn ang="0">
+                  <a:pos x="T26" y="T27"/>
+                </a:cxn>
+                <a:cxn ang="0">
+                  <a:pos x="T28" y="T29"/>
+                </a:cxn>
+                <a:cxn ang="0">
+                  <a:pos x="T30" y="T31"/>
+                </a:cxn>
+              </a:cxnLst>
+              <a:rect l="0" t="0" r="r" b="b"/>
+              <a:pathLst>
+                <a:path w="279" h="278">
+                  <a:moveTo>
+                    <a:pt x="268" y="0"/>
+                  </a:moveTo>
+                  <a:lnTo>
+                    <a:pt x="268" y="0"/>
+                  </a:lnTo>
+                  <a:cubicBezTo>
+                    <a:pt x="12" y="0"/>
+                    <a:pt x="12" y="0"/>
+                    <a:pt x="12" y="0"/>
+                  </a:cubicBezTo>
+                  <a:cubicBezTo>
+                    <a:pt x="5" y="0"/>
+                    <a:pt x="0" y="4"/>
+                    <a:pt x="0" y="11"/>
+                  </a:cubicBezTo>
+                  <a:cubicBezTo>
+                    <a:pt x="0" y="266"/>
+                    <a:pt x="0" y="266"/>
+                    <a:pt x="0" y="266"/>
+                  </a:cubicBezTo>
+                  <a:cubicBezTo>
+                    <a:pt x="0" y="273"/>
+                    <a:pt x="5" y="277"/>
+                    <a:pt x="12" y="277"/>
+                  </a:cubicBezTo>
+                  <a:cubicBezTo>
+                    <a:pt x="268" y="277"/>
+                    <a:pt x="268" y="277"/>
+                    <a:pt x="268" y="277"/>
+                  </a:cubicBezTo>
+                  <a:cubicBezTo>
+                    <a:pt x="273" y="277"/>
+                    <a:pt x="278" y="273"/>
+                    <a:pt x="278" y="266"/>
+                  </a:cubicBezTo>
+                  <a:cubicBezTo>
+                    <a:pt x="278" y="11"/>
+                    <a:pt x="278" y="11"/>
+                    <a:pt x="278" y="11"/>
+                  </a:cubicBezTo>
+                  <a:cubicBezTo>
+                    <a:pt x="278" y="4"/>
+                    <a:pt x="273" y="0"/>
+                    <a:pt x="268" y="0"/>
+                  </a:cubicBezTo>
+                  <a:close/>
+                  <a:moveTo>
+                    <a:pt x="256" y="255"/>
+                  </a:moveTo>
+                  <a:lnTo>
+                    <a:pt x="256" y="255"/>
+                  </a:lnTo>
+                  <a:cubicBezTo>
+                    <a:pt x="22" y="255"/>
+                    <a:pt x="22" y="255"/>
+                    <a:pt x="22" y="255"/>
+                  </a:cubicBezTo>
+                  <a:cubicBezTo>
+                    <a:pt x="22" y="21"/>
+                    <a:pt x="22" y="21"/>
+                    <a:pt x="22" y="21"/>
+                  </a:cubicBezTo>
+                  <a:cubicBezTo>
+                    <a:pt x="256" y="21"/>
+                    <a:pt x="256" y="21"/>
+                    <a:pt x="256" y="21"/>
+                  </a:cubicBezTo>
+                  <a:lnTo>
+                    <a:pt x="256" y="255"/>
+                  </a:lnTo>
+                  <a:close/>
+                </a:path>
+              </a:pathLst>
+            </a:custGeom>
             <a:solidFill>
               <a:schemeClr val="bg1"/>
             </a:solidFill>
-            <a:ln>
-              <a:noFill/>
+            <a:ln w="19050" cap="flat">
+              <a:solidFill>
+                <a:srgbClr val="98B6FE"/>
+              </a:solidFill>
+              <a:bevel/>
+              <a:headEnd/>
+              <a:tailEnd/>
             </a:ln>
+            <a:effectLst/>
+            <a:extLst>
+              <a:ext uri="{AF507438-7753-43E0-B8FC-AC1667EBCBE1}">
+                <a14:hiddenEffects xmlns:a14="http://schemas.microsoft.com/office/drawing/2010/main">
+                  <a:effectLst>
+                    <a:outerShdw blurRad="63500" dist="38099" dir="2700000" algn="ctr" rotWithShape="0">
+                      <a:srgbClr val="000000">
+                        <a:alpha val="74998"/>
+                      </a:srgbClr>
+                    </a:outerShdw>
+                  </a:effectLst>
+                </a14:hiddenEffects>
+              </a:ext>
+            </a:extLst>
           </p:spPr>
-          <p:style>
-            <a:lnRef idx="2">
-              <a:schemeClr val="accent1">
-                <a:shade val="50000"/>
-              </a:schemeClr>
-            </a:lnRef>
-            <a:fillRef idx="1">
-              <a:schemeClr val="accent1"/>
-            </a:fillRef>
-            <a:effectRef idx="0">
-              <a:schemeClr val="accent1"/>
-            </a:effectRef>
-            <a:fontRef idx="minor">
-              <a:schemeClr val="lt1"/>
-            </a:fontRef>
-          </p:style>
           <p:txBody>
-            <a:bodyPr rtlCol="0" anchor="ctr"/>
+            <a:bodyPr wrap="none" anchor="ctr"/>
             <a:lstStyle/>
             <a:p>
-              <a:pPr algn="ctr"/>
-              <a:endParaRPr lang="ko-KR" altLang="en-US"/>
+              <a:endParaRPr lang="en-US" sz="964"/>
             </a:p>
           </p:txBody>
         </p:sp>
-        <p:pic>
-          <p:nvPicPr>
-            <p:cNvPr id="44" name="Picture 47"/>
-            <p:cNvPicPr>
-              <a:picLocks noChangeAspect="1"/>
-            </p:cNvPicPr>
-            <p:nvPr/>
-          </p:nvPicPr>
-          <p:blipFill>
-            <a:blip r:embed="rId7" cstate="print">
-              <a:duotone>
-                <a:prstClr val="black"/>
-                <a:schemeClr val="accent6">
-                  <a:tint val="45000"/>
-                  <a:satMod val="400000"/>
-                </a:schemeClr>
-              </a:duotone>
+        <p:sp>
+          <p:nvSpPr>
+            <p:cNvPr id="33" name="Freeform 112">
               <a:extLst>
-                <a:ext uri="{BEBA8EAE-BF5A-486C-A8C5-ECC9F3942E4B}">
-                  <a14:imgProps xmlns:a14="http://schemas.microsoft.com/office/drawing/2010/main">
-                    <a14:imgLayer r:embed="rId8">
-                      <a14:imgEffect>
-                        <a14:brightnessContrast bright="-50000"/>
-                      </a14:imgEffect>
-                    </a14:imgLayer>
-                  </a14:imgProps>
-                </a:ext>
-                <a:ext uri="{28A0092B-C50C-407E-A947-70E740481C1C}">
-                  <a14:useLocalDpi xmlns:a14="http://schemas.microsoft.com/office/drawing/2010/main" val="0"/>
+                <a:ext uri="{FF2B5EF4-FFF2-40B4-BE49-F238E27FC236}">
+                  <a16:creationId xmlns="" xmlns:a16="http://schemas.microsoft.com/office/drawing/2014/main" id="{9BB65042-15E8-4757-A437-CB30B736B658}"/>
                 </a:ext>
               </a:extLst>
-            </a:blip>
-            <a:stretch>
-              <a:fillRect/>
-            </a:stretch>
-          </p:blipFill>
-          <p:spPr>
-            <a:xfrm>
-              <a:off x="7338060" y="1045996"/>
-              <a:ext cx="1569720" cy="914492"/>
-            </a:xfrm>
-            <a:prstGeom prst="rect">
-              <a:avLst/>
-            </a:prstGeom>
-          </p:spPr>
-        </p:pic>
-      </p:grpSp>
-      <p:grpSp>
-        <p:nvGrpSpPr>
-          <p:cNvPr id="50" name="그룹 49"/>
-          <p:cNvGrpSpPr/>
-          <p:nvPr/>
-        </p:nvGrpSpPr>
-        <p:grpSpPr>
-          <a:xfrm>
-            <a:off x="7481295" y="2170902"/>
-            <a:ext cx="1188000" cy="1144923"/>
-            <a:chOff x="7550059" y="2170902"/>
-            <a:chExt cx="1188000" cy="1144923"/>
-          </a:xfrm>
-        </p:grpSpPr>
-        <p:sp>
-          <p:nvSpPr>
-            <p:cNvPr id="46" name="직사각형 45"/>
-            <p:cNvSpPr/>
+            </p:cNvPr>
+            <p:cNvSpPr>
+              <a:spLocks noChangeArrowheads="1"/>
+            </p:cNvSpPr>
             <p:nvPr/>
           </p:nvSpPr>
-          <p:spPr>
+          <p:spPr bwMode="auto">
             <a:xfrm>
-              <a:off x="7550059" y="2221792"/>
-              <a:ext cx="1188000" cy="1059180"/>
+              <a:off x="7539389" y="3807187"/>
+              <a:ext cx="416888" cy="451880"/>
             </a:xfrm>
-            <a:prstGeom prst="rect">
+            <a:custGeom>
               <a:avLst/>
-            </a:prstGeom>
+              <a:gdLst>
+                <a:gd name="T0" fmla="*/ 11 w 598"/>
+                <a:gd name="T1" fmla="*/ 501 h 598"/>
+                <a:gd name="T2" fmla="*/ 96 w 598"/>
+                <a:gd name="T3" fmla="*/ 522 h 598"/>
+                <a:gd name="T4" fmla="*/ 117 w 598"/>
+                <a:gd name="T5" fmla="*/ 522 h 598"/>
+                <a:gd name="T6" fmla="*/ 160 w 598"/>
+                <a:gd name="T7" fmla="*/ 586 h 598"/>
+                <a:gd name="T8" fmla="*/ 192 w 598"/>
+                <a:gd name="T9" fmla="*/ 597 h 598"/>
+                <a:gd name="T10" fmla="*/ 225 w 598"/>
+                <a:gd name="T11" fmla="*/ 586 h 598"/>
+                <a:gd name="T12" fmla="*/ 267 w 598"/>
+                <a:gd name="T13" fmla="*/ 522 h 598"/>
+                <a:gd name="T14" fmla="*/ 289 w 598"/>
+                <a:gd name="T15" fmla="*/ 522 h 598"/>
+                <a:gd name="T16" fmla="*/ 331 w 598"/>
+                <a:gd name="T17" fmla="*/ 586 h 598"/>
+                <a:gd name="T18" fmla="*/ 363 w 598"/>
+                <a:gd name="T19" fmla="*/ 597 h 598"/>
+                <a:gd name="T20" fmla="*/ 395 w 598"/>
+                <a:gd name="T21" fmla="*/ 586 h 598"/>
+                <a:gd name="T22" fmla="*/ 438 w 598"/>
+                <a:gd name="T23" fmla="*/ 522 h 598"/>
+                <a:gd name="T24" fmla="*/ 459 w 598"/>
+                <a:gd name="T25" fmla="*/ 522 h 598"/>
+                <a:gd name="T26" fmla="*/ 501 w 598"/>
+                <a:gd name="T27" fmla="*/ 586 h 598"/>
+                <a:gd name="T28" fmla="*/ 523 w 598"/>
+                <a:gd name="T29" fmla="*/ 501 h 598"/>
+                <a:gd name="T30" fmla="*/ 523 w 598"/>
+                <a:gd name="T31" fmla="*/ 479 h 598"/>
+                <a:gd name="T32" fmla="*/ 586 w 598"/>
+                <a:gd name="T33" fmla="*/ 437 h 598"/>
+                <a:gd name="T34" fmla="*/ 597 w 598"/>
+                <a:gd name="T35" fmla="*/ 405 h 598"/>
+                <a:gd name="T36" fmla="*/ 586 w 598"/>
+                <a:gd name="T37" fmla="*/ 372 h 598"/>
+                <a:gd name="T38" fmla="*/ 523 w 598"/>
+                <a:gd name="T39" fmla="*/ 329 h 598"/>
+                <a:gd name="T40" fmla="*/ 523 w 598"/>
+                <a:gd name="T41" fmla="*/ 308 h 598"/>
+                <a:gd name="T42" fmla="*/ 586 w 598"/>
+                <a:gd name="T43" fmla="*/ 266 h 598"/>
+                <a:gd name="T44" fmla="*/ 597 w 598"/>
+                <a:gd name="T45" fmla="*/ 234 h 598"/>
+                <a:gd name="T46" fmla="*/ 586 w 598"/>
+                <a:gd name="T47" fmla="*/ 202 h 598"/>
+                <a:gd name="T48" fmla="*/ 523 w 598"/>
+                <a:gd name="T49" fmla="*/ 160 h 598"/>
+                <a:gd name="T50" fmla="*/ 523 w 598"/>
+                <a:gd name="T51" fmla="*/ 139 h 598"/>
+                <a:gd name="T52" fmla="*/ 586 w 598"/>
+                <a:gd name="T53" fmla="*/ 96 h 598"/>
+                <a:gd name="T54" fmla="*/ 501 w 598"/>
+                <a:gd name="T55" fmla="*/ 74 h 598"/>
+                <a:gd name="T56" fmla="*/ 480 w 598"/>
+                <a:gd name="T57" fmla="*/ 74 h 598"/>
+                <a:gd name="T58" fmla="*/ 438 w 598"/>
+                <a:gd name="T59" fmla="*/ 11 h 598"/>
+                <a:gd name="T60" fmla="*/ 406 w 598"/>
+                <a:gd name="T61" fmla="*/ 0 h 598"/>
+                <a:gd name="T62" fmla="*/ 374 w 598"/>
+                <a:gd name="T63" fmla="*/ 11 h 598"/>
+                <a:gd name="T64" fmla="*/ 331 w 598"/>
+                <a:gd name="T65" fmla="*/ 74 h 598"/>
+                <a:gd name="T66" fmla="*/ 309 w 598"/>
+                <a:gd name="T67" fmla="*/ 74 h 598"/>
+                <a:gd name="T68" fmla="*/ 267 w 598"/>
+                <a:gd name="T69" fmla="*/ 11 h 598"/>
+                <a:gd name="T70" fmla="*/ 235 w 598"/>
+                <a:gd name="T71" fmla="*/ 0 h 598"/>
+                <a:gd name="T72" fmla="*/ 203 w 598"/>
+                <a:gd name="T73" fmla="*/ 11 h 598"/>
+                <a:gd name="T74" fmla="*/ 160 w 598"/>
+                <a:gd name="T75" fmla="*/ 74 h 598"/>
+                <a:gd name="T76" fmla="*/ 139 w 598"/>
+                <a:gd name="T77" fmla="*/ 74 h 598"/>
+                <a:gd name="T78" fmla="*/ 96 w 598"/>
+                <a:gd name="T79" fmla="*/ 11 h 598"/>
+                <a:gd name="T80" fmla="*/ 75 w 598"/>
+                <a:gd name="T81" fmla="*/ 96 h 598"/>
+                <a:gd name="T82" fmla="*/ 75 w 598"/>
+                <a:gd name="T83" fmla="*/ 117 h 598"/>
+                <a:gd name="T84" fmla="*/ 11 w 598"/>
+                <a:gd name="T85" fmla="*/ 160 h 598"/>
+                <a:gd name="T86" fmla="*/ 0 w 598"/>
+                <a:gd name="T87" fmla="*/ 192 h 598"/>
+                <a:gd name="T88" fmla="*/ 11 w 598"/>
+                <a:gd name="T89" fmla="*/ 223 h 598"/>
+                <a:gd name="T90" fmla="*/ 75 w 598"/>
+                <a:gd name="T91" fmla="*/ 266 h 598"/>
+                <a:gd name="T92" fmla="*/ 75 w 598"/>
+                <a:gd name="T93" fmla="*/ 288 h 598"/>
+                <a:gd name="T94" fmla="*/ 11 w 598"/>
+                <a:gd name="T95" fmla="*/ 329 h 598"/>
+                <a:gd name="T96" fmla="*/ 0 w 598"/>
+                <a:gd name="T97" fmla="*/ 362 h 598"/>
+                <a:gd name="T98" fmla="*/ 11 w 598"/>
+                <a:gd name="T99" fmla="*/ 394 h 598"/>
+                <a:gd name="T100" fmla="*/ 75 w 598"/>
+                <a:gd name="T101" fmla="*/ 437 h 598"/>
+                <a:gd name="T102" fmla="*/ 75 w 598"/>
+                <a:gd name="T103" fmla="*/ 458 h 598"/>
+                <a:gd name="T104" fmla="*/ 96 w 598"/>
+                <a:gd name="T105" fmla="*/ 96 h 598"/>
+                <a:gd name="T106" fmla="*/ 96 w 598"/>
+                <a:gd name="T107" fmla="*/ 96 h 598"/>
+              </a:gdLst>
+              <a:ahLst/>
+              <a:cxnLst>
+                <a:cxn ang="0">
+                  <a:pos x="T0" y="T1"/>
+                </a:cxn>
+                <a:cxn ang="0">
+                  <a:pos x="T2" y="T3"/>
+                </a:cxn>
+                <a:cxn ang="0">
+                  <a:pos x="T4" y="T5"/>
+                </a:cxn>
+                <a:cxn ang="0">
+                  <a:pos x="T6" y="T7"/>
+                </a:cxn>
+                <a:cxn ang="0">
+                  <a:pos x="T8" y="T9"/>
+                </a:cxn>
+                <a:cxn ang="0">
+                  <a:pos x="T10" y="T11"/>
+                </a:cxn>
+                <a:cxn ang="0">
+                  <a:pos x="T12" y="T13"/>
+                </a:cxn>
+                <a:cxn ang="0">
+                  <a:pos x="T14" y="T15"/>
+                </a:cxn>
+                <a:cxn ang="0">
+                  <a:pos x="T16" y="T17"/>
+                </a:cxn>
+                <a:cxn ang="0">
+                  <a:pos x="T18" y="T19"/>
+                </a:cxn>
+                <a:cxn ang="0">
+                  <a:pos x="T20" y="T21"/>
+                </a:cxn>
+                <a:cxn ang="0">
+                  <a:pos x="T22" y="T23"/>
+                </a:cxn>
+                <a:cxn ang="0">
+                  <a:pos x="T24" y="T25"/>
+                </a:cxn>
+                <a:cxn ang="0">
+                  <a:pos x="T26" y="T27"/>
+                </a:cxn>
+                <a:cxn ang="0">
+                  <a:pos x="T28" y="T29"/>
+                </a:cxn>
+                <a:cxn ang="0">
+                  <a:pos x="T30" y="T31"/>
+                </a:cxn>
+                <a:cxn ang="0">
+                  <a:pos x="T32" y="T33"/>
+                </a:cxn>
+                <a:cxn ang="0">
+                  <a:pos x="T34" y="T35"/>
+                </a:cxn>
+                <a:cxn ang="0">
+                  <a:pos x="T36" y="T37"/>
+                </a:cxn>
+                <a:cxn ang="0">
+                  <a:pos x="T38" y="T39"/>
+                </a:cxn>
+                <a:cxn ang="0">
+                  <a:pos x="T40" y="T41"/>
+                </a:cxn>
+                <a:cxn ang="0">
+                  <a:pos x="T42" y="T43"/>
+                </a:cxn>
+                <a:cxn ang="0">
+                  <a:pos x="T44" y="T45"/>
+                </a:cxn>
+                <a:cxn ang="0">
+                  <a:pos x="T46" y="T47"/>
+                </a:cxn>
+                <a:cxn ang="0">
+                  <a:pos x="T48" y="T49"/>
+                </a:cxn>
+                <a:cxn ang="0">
+                  <a:pos x="T50" y="T51"/>
+                </a:cxn>
+                <a:cxn ang="0">
+                  <a:pos x="T52" y="T53"/>
+                </a:cxn>
+                <a:cxn ang="0">
+                  <a:pos x="T54" y="T55"/>
+                </a:cxn>
+                <a:cxn ang="0">
+                  <a:pos x="T56" y="T57"/>
+                </a:cxn>
+                <a:cxn ang="0">
+                  <a:pos x="T58" y="T59"/>
+                </a:cxn>
+                <a:cxn ang="0">
+                  <a:pos x="T60" y="T61"/>
+                </a:cxn>
+                <a:cxn ang="0">
+                  <a:pos x="T62" y="T63"/>
+                </a:cxn>
+                <a:cxn ang="0">
+                  <a:pos x="T64" y="T65"/>
+                </a:cxn>
+                <a:cxn ang="0">
+                  <a:pos x="T66" y="T67"/>
+                </a:cxn>
+                <a:cxn ang="0">
+                  <a:pos x="T68" y="T69"/>
+                </a:cxn>
+                <a:cxn ang="0">
+                  <a:pos x="T70" y="T71"/>
+                </a:cxn>
+                <a:cxn ang="0">
+                  <a:pos x="T72" y="T73"/>
+                </a:cxn>
+                <a:cxn ang="0">
+                  <a:pos x="T74" y="T75"/>
+                </a:cxn>
+                <a:cxn ang="0">
+                  <a:pos x="T76" y="T77"/>
+                </a:cxn>
+                <a:cxn ang="0">
+                  <a:pos x="T78" y="T79"/>
+                </a:cxn>
+                <a:cxn ang="0">
+                  <a:pos x="T80" y="T81"/>
+                </a:cxn>
+                <a:cxn ang="0">
+                  <a:pos x="T82" y="T83"/>
+                </a:cxn>
+                <a:cxn ang="0">
+                  <a:pos x="T84" y="T85"/>
+                </a:cxn>
+                <a:cxn ang="0">
+                  <a:pos x="T86" y="T87"/>
+                </a:cxn>
+                <a:cxn ang="0">
+                  <a:pos x="T88" y="T89"/>
+                </a:cxn>
+                <a:cxn ang="0">
+                  <a:pos x="T90" y="T91"/>
+                </a:cxn>
+                <a:cxn ang="0">
+                  <a:pos x="T92" y="T93"/>
+                </a:cxn>
+                <a:cxn ang="0">
+                  <a:pos x="T94" y="T95"/>
+                </a:cxn>
+                <a:cxn ang="0">
+                  <a:pos x="T96" y="T97"/>
+                </a:cxn>
+                <a:cxn ang="0">
+                  <a:pos x="T98" y="T99"/>
+                </a:cxn>
+                <a:cxn ang="0">
+                  <a:pos x="T100" y="T101"/>
+                </a:cxn>
+                <a:cxn ang="0">
+                  <a:pos x="T102" y="T103"/>
+                </a:cxn>
+                <a:cxn ang="0">
+                  <a:pos x="T104" y="T105"/>
+                </a:cxn>
+                <a:cxn ang="0">
+                  <a:pos x="T106" y="T107"/>
+                </a:cxn>
+              </a:cxnLst>
+              <a:rect l="0" t="0" r="r" b="b"/>
+              <a:pathLst>
+                <a:path w="598" h="598">
+                  <a:moveTo>
+                    <a:pt x="11" y="479"/>
+                  </a:moveTo>
+                  <a:lnTo>
+                    <a:pt x="11" y="479"/>
+                  </a:lnTo>
+                  <a:cubicBezTo>
+                    <a:pt x="5" y="479"/>
+                    <a:pt x="0" y="484"/>
+                    <a:pt x="0" y="490"/>
+                  </a:cubicBezTo>
+                  <a:cubicBezTo>
+                    <a:pt x="0" y="496"/>
+                    <a:pt x="5" y="501"/>
+                    <a:pt x="11" y="501"/>
+                  </a:cubicBezTo>
+                  <a:cubicBezTo>
+                    <a:pt x="75" y="501"/>
+                    <a:pt x="75" y="501"/>
+                    <a:pt x="75" y="501"/>
+                  </a:cubicBezTo>
+                  <a:cubicBezTo>
+                    <a:pt x="75" y="511"/>
+                    <a:pt x="75" y="511"/>
+                    <a:pt x="75" y="511"/>
+                  </a:cubicBezTo>
+                  <a:cubicBezTo>
+                    <a:pt x="75" y="517"/>
+                    <a:pt x="81" y="522"/>
+                    <a:pt x="86" y="522"/>
+                  </a:cubicBezTo>
+                  <a:cubicBezTo>
+                    <a:pt x="96" y="522"/>
+                    <a:pt x="96" y="522"/>
+                    <a:pt x="96" y="522"/>
+                  </a:cubicBezTo>
+                  <a:cubicBezTo>
+                    <a:pt x="96" y="586"/>
+                    <a:pt x="96" y="586"/>
+                    <a:pt x="96" y="586"/>
+                  </a:cubicBezTo>
+                  <a:cubicBezTo>
+                    <a:pt x="96" y="592"/>
+                    <a:pt x="101" y="597"/>
+                    <a:pt x="107" y="597"/>
+                  </a:cubicBezTo>
+                  <a:cubicBezTo>
+                    <a:pt x="113" y="597"/>
+                    <a:pt x="117" y="592"/>
+                    <a:pt x="117" y="586"/>
+                  </a:cubicBezTo>
+                  <a:cubicBezTo>
+                    <a:pt x="117" y="522"/>
+                    <a:pt x="117" y="522"/>
+                    <a:pt x="117" y="522"/>
+                  </a:cubicBezTo>
+                  <a:cubicBezTo>
+                    <a:pt x="139" y="522"/>
+                    <a:pt x="139" y="522"/>
+                    <a:pt x="139" y="522"/>
+                  </a:cubicBezTo>
+                  <a:cubicBezTo>
+                    <a:pt x="139" y="586"/>
+                    <a:pt x="139" y="586"/>
+                    <a:pt x="139" y="586"/>
+                  </a:cubicBezTo>
+                  <a:cubicBezTo>
+                    <a:pt x="139" y="592"/>
+                    <a:pt x="144" y="597"/>
+                    <a:pt x="150" y="597"/>
+                  </a:cubicBezTo>
+                  <a:cubicBezTo>
+                    <a:pt x="155" y="597"/>
+                    <a:pt x="160" y="592"/>
+                    <a:pt x="160" y="586"/>
+                  </a:cubicBezTo>
+                  <a:cubicBezTo>
+                    <a:pt x="160" y="522"/>
+                    <a:pt x="160" y="522"/>
+                    <a:pt x="160" y="522"/>
+                  </a:cubicBezTo>
+                  <a:cubicBezTo>
+                    <a:pt x="182" y="522"/>
+                    <a:pt x="182" y="522"/>
+                    <a:pt x="182" y="522"/>
+                  </a:cubicBezTo>
+                  <a:cubicBezTo>
+                    <a:pt x="182" y="586"/>
+                    <a:pt x="182" y="586"/>
+                    <a:pt x="182" y="586"/>
+                  </a:cubicBezTo>
+                  <a:cubicBezTo>
+                    <a:pt x="182" y="592"/>
+                    <a:pt x="187" y="597"/>
+                    <a:pt x="192" y="597"/>
+                  </a:cubicBezTo>
+                  <a:cubicBezTo>
+                    <a:pt x="198" y="597"/>
+                    <a:pt x="203" y="592"/>
+                    <a:pt x="203" y="586"/>
+                  </a:cubicBezTo>
+                  <a:cubicBezTo>
+                    <a:pt x="203" y="522"/>
+                    <a:pt x="203" y="522"/>
+                    <a:pt x="203" y="522"/>
+                  </a:cubicBezTo>
+                  <a:cubicBezTo>
+                    <a:pt x="225" y="522"/>
+                    <a:pt x="225" y="522"/>
+                    <a:pt x="225" y="522"/>
+                  </a:cubicBezTo>
+                  <a:cubicBezTo>
+                    <a:pt x="225" y="586"/>
+                    <a:pt x="225" y="586"/>
+                    <a:pt x="225" y="586"/>
+                  </a:cubicBezTo>
+                  <a:cubicBezTo>
+                    <a:pt x="225" y="592"/>
+                    <a:pt x="229" y="597"/>
+                    <a:pt x="235" y="597"/>
+                  </a:cubicBezTo>
+                  <a:cubicBezTo>
+                    <a:pt x="241" y="597"/>
+                    <a:pt x="246" y="592"/>
+                    <a:pt x="246" y="586"/>
+                  </a:cubicBezTo>
+                  <a:cubicBezTo>
+                    <a:pt x="246" y="522"/>
+                    <a:pt x="246" y="522"/>
+                    <a:pt x="246" y="522"/>
+                  </a:cubicBezTo>
+                  <a:cubicBezTo>
+                    <a:pt x="267" y="522"/>
+                    <a:pt x="267" y="522"/>
+                    <a:pt x="267" y="522"/>
+                  </a:cubicBezTo>
+                  <a:cubicBezTo>
+                    <a:pt x="267" y="586"/>
+                    <a:pt x="267" y="586"/>
+                    <a:pt x="267" y="586"/>
+                  </a:cubicBezTo>
+                  <a:cubicBezTo>
+                    <a:pt x="267" y="592"/>
+                    <a:pt x="271" y="597"/>
+                    <a:pt x="278" y="597"/>
+                  </a:cubicBezTo>
+                  <a:cubicBezTo>
+                    <a:pt x="283" y="597"/>
+                    <a:pt x="289" y="592"/>
+                    <a:pt x="289" y="586"/>
+                  </a:cubicBezTo>
+                  <a:cubicBezTo>
+                    <a:pt x="289" y="522"/>
+                    <a:pt x="289" y="522"/>
+                    <a:pt x="289" y="522"/>
+                  </a:cubicBezTo>
+                  <a:cubicBezTo>
+                    <a:pt x="309" y="522"/>
+                    <a:pt x="309" y="522"/>
+                    <a:pt x="309" y="522"/>
+                  </a:cubicBezTo>
+                  <a:cubicBezTo>
+                    <a:pt x="309" y="586"/>
+                    <a:pt x="309" y="586"/>
+                    <a:pt x="309" y="586"/>
+                  </a:cubicBezTo>
+                  <a:cubicBezTo>
+                    <a:pt x="309" y="592"/>
+                    <a:pt x="314" y="597"/>
+                    <a:pt x="320" y="597"/>
+                  </a:cubicBezTo>
+                  <a:cubicBezTo>
+                    <a:pt x="326" y="597"/>
+                    <a:pt x="331" y="592"/>
+                    <a:pt x="331" y="586"/>
+                  </a:cubicBezTo>
+                  <a:cubicBezTo>
+                    <a:pt x="331" y="522"/>
+                    <a:pt x="331" y="522"/>
+                    <a:pt x="331" y="522"/>
+                  </a:cubicBezTo>
+                  <a:cubicBezTo>
+                    <a:pt x="352" y="522"/>
+                    <a:pt x="352" y="522"/>
+                    <a:pt x="352" y="522"/>
+                  </a:cubicBezTo>
+                  <a:cubicBezTo>
+                    <a:pt x="352" y="586"/>
+                    <a:pt x="352" y="586"/>
+                    <a:pt x="352" y="586"/>
+                  </a:cubicBezTo>
+                  <a:cubicBezTo>
+                    <a:pt x="352" y="592"/>
+                    <a:pt x="357" y="597"/>
+                    <a:pt x="363" y="597"/>
+                  </a:cubicBezTo>
+                  <a:cubicBezTo>
+                    <a:pt x="369" y="597"/>
+                    <a:pt x="374" y="592"/>
+                    <a:pt x="374" y="586"/>
+                  </a:cubicBezTo>
+                  <a:cubicBezTo>
+                    <a:pt x="374" y="522"/>
+                    <a:pt x="374" y="522"/>
+                    <a:pt x="374" y="522"/>
+                  </a:cubicBezTo>
+                  <a:cubicBezTo>
+                    <a:pt x="395" y="522"/>
+                    <a:pt x="395" y="522"/>
+                    <a:pt x="395" y="522"/>
+                  </a:cubicBezTo>
+                  <a:cubicBezTo>
+                    <a:pt x="395" y="586"/>
+                    <a:pt x="395" y="586"/>
+                    <a:pt x="395" y="586"/>
+                  </a:cubicBezTo>
+                  <a:cubicBezTo>
+                    <a:pt x="395" y="592"/>
+                    <a:pt x="399" y="597"/>
+                    <a:pt x="406" y="597"/>
+                  </a:cubicBezTo>
+                  <a:cubicBezTo>
+                    <a:pt x="411" y="597"/>
+                    <a:pt x="416" y="592"/>
+                    <a:pt x="416" y="586"/>
+                  </a:cubicBezTo>
+                  <a:cubicBezTo>
+                    <a:pt x="416" y="522"/>
+                    <a:pt x="416" y="522"/>
+                    <a:pt x="416" y="522"/>
+                  </a:cubicBezTo>
+                  <a:cubicBezTo>
+                    <a:pt x="438" y="522"/>
+                    <a:pt x="438" y="522"/>
+                    <a:pt x="438" y="522"/>
+                  </a:cubicBezTo>
+                  <a:cubicBezTo>
+                    <a:pt x="438" y="586"/>
+                    <a:pt x="438" y="586"/>
+                    <a:pt x="438" y="586"/>
+                  </a:cubicBezTo>
+                  <a:cubicBezTo>
+                    <a:pt x="438" y="592"/>
+                    <a:pt x="442" y="597"/>
+                    <a:pt x="448" y="597"/>
+                  </a:cubicBezTo>
+                  <a:cubicBezTo>
+                    <a:pt x="454" y="597"/>
+                    <a:pt x="459" y="592"/>
+                    <a:pt x="459" y="586"/>
+                  </a:cubicBezTo>
+                  <a:cubicBezTo>
+                    <a:pt x="459" y="522"/>
+                    <a:pt x="459" y="522"/>
+                    <a:pt x="459" y="522"/>
+                  </a:cubicBezTo>
+                  <a:cubicBezTo>
+                    <a:pt x="480" y="522"/>
+                    <a:pt x="480" y="522"/>
+                    <a:pt x="480" y="522"/>
+                  </a:cubicBezTo>
+                  <a:cubicBezTo>
+                    <a:pt x="480" y="586"/>
+                    <a:pt x="480" y="586"/>
+                    <a:pt x="480" y="586"/>
+                  </a:cubicBezTo>
+                  <a:cubicBezTo>
+                    <a:pt x="480" y="592"/>
+                    <a:pt x="485" y="597"/>
+                    <a:pt x="491" y="597"/>
+                  </a:cubicBezTo>
+                  <a:cubicBezTo>
+                    <a:pt x="497" y="597"/>
+                    <a:pt x="501" y="592"/>
+                    <a:pt x="501" y="586"/>
+                  </a:cubicBezTo>
+                  <a:cubicBezTo>
+                    <a:pt x="501" y="522"/>
+                    <a:pt x="501" y="522"/>
+                    <a:pt x="501" y="522"/>
+                  </a:cubicBezTo>
+                  <a:cubicBezTo>
+                    <a:pt x="512" y="522"/>
+                    <a:pt x="512" y="522"/>
+                    <a:pt x="512" y="522"/>
+                  </a:cubicBezTo>
+                  <a:cubicBezTo>
+                    <a:pt x="519" y="522"/>
+                    <a:pt x="523" y="517"/>
+                    <a:pt x="523" y="511"/>
+                  </a:cubicBezTo>
+                  <a:cubicBezTo>
+                    <a:pt x="523" y="501"/>
+                    <a:pt x="523" y="501"/>
+                    <a:pt x="523" y="501"/>
+                  </a:cubicBezTo>
+                  <a:cubicBezTo>
+                    <a:pt x="586" y="501"/>
+                    <a:pt x="586" y="501"/>
+                    <a:pt x="586" y="501"/>
+                  </a:cubicBezTo>
+                  <a:cubicBezTo>
+                    <a:pt x="593" y="501"/>
+                    <a:pt x="597" y="496"/>
+                    <a:pt x="597" y="490"/>
+                  </a:cubicBezTo>
+                  <a:cubicBezTo>
+                    <a:pt x="597" y="484"/>
+                    <a:pt x="593" y="479"/>
+                    <a:pt x="586" y="479"/>
+                  </a:cubicBezTo>
+                  <a:cubicBezTo>
+                    <a:pt x="523" y="479"/>
+                    <a:pt x="523" y="479"/>
+                    <a:pt x="523" y="479"/>
+                  </a:cubicBezTo>
+                  <a:cubicBezTo>
+                    <a:pt x="523" y="458"/>
+                    <a:pt x="523" y="458"/>
+                    <a:pt x="523" y="458"/>
+                  </a:cubicBezTo>
+                  <a:cubicBezTo>
+                    <a:pt x="586" y="458"/>
+                    <a:pt x="586" y="458"/>
+                    <a:pt x="586" y="458"/>
+                  </a:cubicBezTo>
+                  <a:cubicBezTo>
+                    <a:pt x="593" y="458"/>
+                    <a:pt x="597" y="454"/>
+                    <a:pt x="597" y="448"/>
+                  </a:cubicBezTo>
+                  <a:cubicBezTo>
+                    <a:pt x="597" y="442"/>
+                    <a:pt x="593" y="437"/>
+                    <a:pt x="586" y="437"/>
+                  </a:cubicBezTo>
+                  <a:cubicBezTo>
+                    <a:pt x="523" y="437"/>
+                    <a:pt x="523" y="437"/>
+                    <a:pt x="523" y="437"/>
+                  </a:cubicBezTo>
+                  <a:cubicBezTo>
+                    <a:pt x="523" y="415"/>
+                    <a:pt x="523" y="415"/>
+                    <a:pt x="523" y="415"/>
+                  </a:cubicBezTo>
+                  <a:cubicBezTo>
+                    <a:pt x="586" y="415"/>
+                    <a:pt x="586" y="415"/>
+                    <a:pt x="586" y="415"/>
+                  </a:cubicBezTo>
+                  <a:cubicBezTo>
+                    <a:pt x="593" y="415"/>
+                    <a:pt x="597" y="411"/>
+                    <a:pt x="597" y="405"/>
+                  </a:cubicBezTo>
+                  <a:cubicBezTo>
+                    <a:pt x="597" y="399"/>
+                    <a:pt x="593" y="394"/>
+                    <a:pt x="586" y="394"/>
+                  </a:cubicBezTo>
+                  <a:cubicBezTo>
+                    <a:pt x="523" y="394"/>
+                    <a:pt x="523" y="394"/>
+                    <a:pt x="523" y="394"/>
+                  </a:cubicBezTo>
+                  <a:cubicBezTo>
+                    <a:pt x="523" y="372"/>
+                    <a:pt x="523" y="372"/>
+                    <a:pt x="523" y="372"/>
+                  </a:cubicBezTo>
+                  <a:cubicBezTo>
+                    <a:pt x="586" y="372"/>
+                    <a:pt x="586" y="372"/>
+                    <a:pt x="586" y="372"/>
+                  </a:cubicBezTo>
+                  <a:cubicBezTo>
+                    <a:pt x="593" y="372"/>
+                    <a:pt x="597" y="368"/>
+                    <a:pt x="597" y="362"/>
+                  </a:cubicBezTo>
+                  <a:cubicBezTo>
+                    <a:pt x="597" y="357"/>
+                    <a:pt x="593" y="351"/>
+                    <a:pt x="586" y="351"/>
+                  </a:cubicBezTo>
+                  <a:cubicBezTo>
+                    <a:pt x="523" y="351"/>
+                    <a:pt x="523" y="351"/>
+                    <a:pt x="523" y="351"/>
+                  </a:cubicBezTo>
+                  <a:cubicBezTo>
+                    <a:pt x="523" y="329"/>
+                    <a:pt x="523" y="329"/>
+                    <a:pt x="523" y="329"/>
+                  </a:cubicBezTo>
+                  <a:cubicBezTo>
+                    <a:pt x="586" y="329"/>
+                    <a:pt x="586" y="329"/>
+                    <a:pt x="586" y="329"/>
+                  </a:cubicBezTo>
+                  <a:cubicBezTo>
+                    <a:pt x="593" y="329"/>
+                    <a:pt x="597" y="325"/>
+                    <a:pt x="597" y="319"/>
+                  </a:cubicBezTo>
+                  <a:cubicBezTo>
+                    <a:pt x="597" y="314"/>
+                    <a:pt x="593" y="308"/>
+                    <a:pt x="586" y="308"/>
+                  </a:cubicBezTo>
+                  <a:cubicBezTo>
+                    <a:pt x="523" y="308"/>
+                    <a:pt x="523" y="308"/>
+                    <a:pt x="523" y="308"/>
+                  </a:cubicBezTo>
+                  <a:cubicBezTo>
+                    <a:pt x="523" y="288"/>
+                    <a:pt x="523" y="288"/>
+                    <a:pt x="523" y="288"/>
+                  </a:cubicBezTo>
+                  <a:cubicBezTo>
+                    <a:pt x="586" y="288"/>
+                    <a:pt x="586" y="288"/>
+                    <a:pt x="586" y="288"/>
+                  </a:cubicBezTo>
+                  <a:cubicBezTo>
+                    <a:pt x="593" y="288"/>
+                    <a:pt x="597" y="283"/>
+                    <a:pt x="597" y="276"/>
+                  </a:cubicBezTo>
+                  <a:cubicBezTo>
+                    <a:pt x="597" y="271"/>
+                    <a:pt x="593" y="266"/>
+                    <a:pt x="586" y="266"/>
+                  </a:cubicBezTo>
+                  <a:cubicBezTo>
+                    <a:pt x="523" y="266"/>
+                    <a:pt x="523" y="266"/>
+                    <a:pt x="523" y="266"/>
+                  </a:cubicBezTo>
+                  <a:cubicBezTo>
+                    <a:pt x="523" y="245"/>
+                    <a:pt x="523" y="245"/>
+                    <a:pt x="523" y="245"/>
+                  </a:cubicBezTo>
+                  <a:cubicBezTo>
+                    <a:pt x="586" y="245"/>
+                    <a:pt x="586" y="245"/>
+                    <a:pt x="586" y="245"/>
+                  </a:cubicBezTo>
+                  <a:cubicBezTo>
+                    <a:pt x="593" y="245"/>
+                    <a:pt x="597" y="241"/>
+                    <a:pt x="597" y="234"/>
+                  </a:cubicBezTo>
+                  <a:cubicBezTo>
+                    <a:pt x="597" y="228"/>
+                    <a:pt x="593" y="223"/>
+                    <a:pt x="586" y="223"/>
+                  </a:cubicBezTo>
+                  <a:cubicBezTo>
+                    <a:pt x="523" y="223"/>
+                    <a:pt x="523" y="223"/>
+                    <a:pt x="523" y="223"/>
+                  </a:cubicBezTo>
+                  <a:cubicBezTo>
+                    <a:pt x="523" y="202"/>
+                    <a:pt x="523" y="202"/>
+                    <a:pt x="523" y="202"/>
+                  </a:cubicBezTo>
+                  <a:cubicBezTo>
+                    <a:pt x="586" y="202"/>
+                    <a:pt x="586" y="202"/>
+                    <a:pt x="586" y="202"/>
+                  </a:cubicBezTo>
+                  <a:cubicBezTo>
+                    <a:pt x="593" y="202"/>
+                    <a:pt x="597" y="198"/>
+                    <a:pt x="597" y="192"/>
+                  </a:cubicBezTo>
+                  <a:cubicBezTo>
+                    <a:pt x="597" y="186"/>
+                    <a:pt x="593" y="181"/>
+                    <a:pt x="586" y="181"/>
+                  </a:cubicBezTo>
+                  <a:cubicBezTo>
+                    <a:pt x="523" y="181"/>
+                    <a:pt x="523" y="181"/>
+                    <a:pt x="523" y="181"/>
+                  </a:cubicBezTo>
+                  <a:cubicBezTo>
+                    <a:pt x="523" y="160"/>
+                    <a:pt x="523" y="160"/>
+                    <a:pt x="523" y="160"/>
+                  </a:cubicBezTo>
+                  <a:cubicBezTo>
+                    <a:pt x="586" y="160"/>
+                    <a:pt x="586" y="160"/>
+                    <a:pt x="586" y="160"/>
+                  </a:cubicBezTo>
+                  <a:cubicBezTo>
+                    <a:pt x="593" y="160"/>
+                    <a:pt x="597" y="155"/>
+                    <a:pt x="597" y="150"/>
+                  </a:cubicBezTo>
+                  <a:cubicBezTo>
+                    <a:pt x="597" y="143"/>
+                    <a:pt x="593" y="139"/>
+                    <a:pt x="586" y="139"/>
+                  </a:cubicBezTo>
+                  <a:cubicBezTo>
+                    <a:pt x="523" y="139"/>
+                    <a:pt x="523" y="139"/>
+                    <a:pt x="523" y="139"/>
+                  </a:cubicBezTo>
+                  <a:cubicBezTo>
+                    <a:pt x="523" y="117"/>
+                    <a:pt x="523" y="117"/>
+                    <a:pt x="523" y="117"/>
+                  </a:cubicBezTo>
+                  <a:cubicBezTo>
+                    <a:pt x="586" y="117"/>
+                    <a:pt x="586" y="117"/>
+                    <a:pt x="586" y="117"/>
+                  </a:cubicBezTo>
+                  <a:cubicBezTo>
+                    <a:pt x="593" y="117"/>
+                    <a:pt x="597" y="112"/>
+                    <a:pt x="597" y="107"/>
+                  </a:cubicBezTo>
+                  <a:cubicBezTo>
+                    <a:pt x="597" y="101"/>
+                    <a:pt x="593" y="96"/>
+                    <a:pt x="586" y="96"/>
+                  </a:cubicBezTo>
+                  <a:cubicBezTo>
+                    <a:pt x="523" y="96"/>
+                    <a:pt x="523" y="96"/>
+                    <a:pt x="523" y="96"/>
+                  </a:cubicBezTo>
+                  <a:cubicBezTo>
+                    <a:pt x="523" y="86"/>
+                    <a:pt x="523" y="86"/>
+                    <a:pt x="523" y="86"/>
+                  </a:cubicBezTo>
+                  <a:cubicBezTo>
+                    <a:pt x="523" y="79"/>
+                    <a:pt x="519" y="74"/>
+                    <a:pt x="512" y="74"/>
+                  </a:cubicBezTo>
+                  <a:cubicBezTo>
+                    <a:pt x="501" y="74"/>
+                    <a:pt x="501" y="74"/>
+                    <a:pt x="501" y="74"/>
+                  </a:cubicBezTo>
+                  <a:cubicBezTo>
+                    <a:pt x="501" y="11"/>
+                    <a:pt x="501" y="11"/>
+                    <a:pt x="501" y="11"/>
+                  </a:cubicBezTo>
+                  <a:cubicBezTo>
+                    <a:pt x="501" y="4"/>
+                    <a:pt x="497" y="0"/>
+                    <a:pt x="491" y="0"/>
+                  </a:cubicBezTo>
+                  <a:cubicBezTo>
+                    <a:pt x="485" y="0"/>
+                    <a:pt x="480" y="4"/>
+                    <a:pt x="480" y="11"/>
+                  </a:cubicBezTo>
+                  <a:cubicBezTo>
+                    <a:pt x="480" y="74"/>
+                    <a:pt x="480" y="74"/>
+                    <a:pt x="480" y="74"/>
+                  </a:cubicBezTo>
+                  <a:cubicBezTo>
+                    <a:pt x="459" y="74"/>
+                    <a:pt x="459" y="74"/>
+                    <a:pt x="459" y="74"/>
+                  </a:cubicBezTo>
+                  <a:cubicBezTo>
+                    <a:pt x="459" y="11"/>
+                    <a:pt x="459" y="11"/>
+                    <a:pt x="459" y="11"/>
+                  </a:cubicBezTo>
+                  <a:cubicBezTo>
+                    <a:pt x="459" y="4"/>
+                    <a:pt x="454" y="0"/>
+                    <a:pt x="448" y="0"/>
+                  </a:cubicBezTo>
+                  <a:cubicBezTo>
+                    <a:pt x="442" y="0"/>
+                    <a:pt x="438" y="4"/>
+                    <a:pt x="438" y="11"/>
+                  </a:cubicBezTo>
+                  <a:cubicBezTo>
+                    <a:pt x="438" y="74"/>
+                    <a:pt x="438" y="74"/>
+                    <a:pt x="438" y="74"/>
+                  </a:cubicBezTo>
+                  <a:cubicBezTo>
+                    <a:pt x="416" y="74"/>
+                    <a:pt x="416" y="74"/>
+                    <a:pt x="416" y="74"/>
+                  </a:cubicBezTo>
+                  <a:cubicBezTo>
+                    <a:pt x="416" y="11"/>
+                    <a:pt x="416" y="11"/>
+                    <a:pt x="416" y="11"/>
+                  </a:cubicBezTo>
+                  <a:cubicBezTo>
+                    <a:pt x="416" y="4"/>
+                    <a:pt x="411" y="0"/>
+                    <a:pt x="406" y="0"/>
+                  </a:cubicBezTo>
+                  <a:cubicBezTo>
+                    <a:pt x="399" y="0"/>
+                    <a:pt x="395" y="4"/>
+                    <a:pt x="395" y="11"/>
+                  </a:cubicBezTo>
+                  <a:cubicBezTo>
+                    <a:pt x="395" y="74"/>
+                    <a:pt x="395" y="74"/>
+                    <a:pt x="395" y="74"/>
+                  </a:cubicBezTo>
+                  <a:cubicBezTo>
+                    <a:pt x="374" y="74"/>
+                    <a:pt x="374" y="74"/>
+                    <a:pt x="374" y="74"/>
+                  </a:cubicBezTo>
+                  <a:cubicBezTo>
+                    <a:pt x="374" y="11"/>
+                    <a:pt x="374" y="11"/>
+                    <a:pt x="374" y="11"/>
+                  </a:cubicBezTo>
+                  <a:cubicBezTo>
+                    <a:pt x="374" y="4"/>
+                    <a:pt x="369" y="0"/>
+                    <a:pt x="363" y="0"/>
+                  </a:cubicBezTo>
+                  <a:cubicBezTo>
+                    <a:pt x="357" y="0"/>
+                    <a:pt x="352" y="4"/>
+                    <a:pt x="352" y="11"/>
+                  </a:cubicBezTo>
+                  <a:cubicBezTo>
+                    <a:pt x="352" y="74"/>
+                    <a:pt x="352" y="74"/>
+                    <a:pt x="352" y="74"/>
+                  </a:cubicBezTo>
+                  <a:cubicBezTo>
+                    <a:pt x="331" y="74"/>
+                    <a:pt x="331" y="74"/>
+                    <a:pt x="331" y="74"/>
+                  </a:cubicBezTo>
+                  <a:cubicBezTo>
+                    <a:pt x="331" y="11"/>
+                    <a:pt x="331" y="11"/>
+                    <a:pt x="331" y="11"/>
+                  </a:cubicBezTo>
+                  <a:cubicBezTo>
+                    <a:pt x="331" y="4"/>
+                    <a:pt x="326" y="0"/>
+                    <a:pt x="320" y="0"/>
+                  </a:cubicBezTo>
+                  <a:cubicBezTo>
+                    <a:pt x="314" y="0"/>
+                    <a:pt x="309" y="4"/>
+                    <a:pt x="309" y="11"/>
+                  </a:cubicBezTo>
+                  <a:cubicBezTo>
+                    <a:pt x="309" y="74"/>
+                    <a:pt x="309" y="74"/>
+                    <a:pt x="309" y="74"/>
+                  </a:cubicBezTo>
+                  <a:cubicBezTo>
+                    <a:pt x="289" y="74"/>
+                    <a:pt x="289" y="74"/>
+                    <a:pt x="289" y="74"/>
+                  </a:cubicBezTo>
+                  <a:cubicBezTo>
+                    <a:pt x="289" y="11"/>
+                    <a:pt x="289" y="11"/>
+                    <a:pt x="289" y="11"/>
+                  </a:cubicBezTo>
+                  <a:cubicBezTo>
+                    <a:pt x="289" y="4"/>
+                    <a:pt x="283" y="0"/>
+                    <a:pt x="278" y="0"/>
+                  </a:cubicBezTo>
+                  <a:cubicBezTo>
+                    <a:pt x="271" y="0"/>
+                    <a:pt x="267" y="4"/>
+                    <a:pt x="267" y="11"/>
+                  </a:cubicBezTo>
+                  <a:cubicBezTo>
+                    <a:pt x="267" y="74"/>
+                    <a:pt x="267" y="74"/>
+                    <a:pt x="267" y="74"/>
+                  </a:cubicBezTo>
+                  <a:cubicBezTo>
+                    <a:pt x="246" y="74"/>
+                    <a:pt x="246" y="74"/>
+                    <a:pt x="246" y="74"/>
+                  </a:cubicBezTo>
+                  <a:cubicBezTo>
+                    <a:pt x="246" y="11"/>
+                    <a:pt x="246" y="11"/>
+                    <a:pt x="246" y="11"/>
+                  </a:cubicBezTo>
+                  <a:cubicBezTo>
+                    <a:pt x="246" y="4"/>
+                    <a:pt x="241" y="0"/>
+                    <a:pt x="235" y="0"/>
+                  </a:cubicBezTo>
+                  <a:cubicBezTo>
+                    <a:pt x="229" y="0"/>
+                    <a:pt x="225" y="4"/>
+                    <a:pt x="225" y="11"/>
+                  </a:cubicBezTo>
+                  <a:cubicBezTo>
+                    <a:pt x="225" y="74"/>
+                    <a:pt x="225" y="74"/>
+                    <a:pt x="225" y="74"/>
+                  </a:cubicBezTo>
+                  <a:cubicBezTo>
+                    <a:pt x="203" y="74"/>
+                    <a:pt x="203" y="74"/>
+                    <a:pt x="203" y="74"/>
+                  </a:cubicBezTo>
+                  <a:cubicBezTo>
+                    <a:pt x="203" y="11"/>
+                    <a:pt x="203" y="11"/>
+                    <a:pt x="203" y="11"/>
+                  </a:cubicBezTo>
+                  <a:cubicBezTo>
+                    <a:pt x="203" y="4"/>
+                    <a:pt x="198" y="0"/>
+                    <a:pt x="192" y="0"/>
+                  </a:cubicBezTo>
+                  <a:cubicBezTo>
+                    <a:pt x="187" y="0"/>
+                    <a:pt x="182" y="4"/>
+                    <a:pt x="182" y="11"/>
+                  </a:cubicBezTo>
+                  <a:cubicBezTo>
+                    <a:pt x="182" y="74"/>
+                    <a:pt x="182" y="74"/>
+                    <a:pt x="182" y="74"/>
+                  </a:cubicBezTo>
+                  <a:cubicBezTo>
+                    <a:pt x="160" y="74"/>
+                    <a:pt x="160" y="74"/>
+                    <a:pt x="160" y="74"/>
+                  </a:cubicBezTo>
+                  <a:cubicBezTo>
+                    <a:pt x="160" y="11"/>
+                    <a:pt x="160" y="11"/>
+                    <a:pt x="160" y="11"/>
+                  </a:cubicBezTo>
+                  <a:cubicBezTo>
+                    <a:pt x="160" y="4"/>
+                    <a:pt x="155" y="0"/>
+                    <a:pt x="150" y="0"/>
+                  </a:cubicBezTo>
+                  <a:cubicBezTo>
+                    <a:pt x="144" y="0"/>
+                    <a:pt x="139" y="4"/>
+                    <a:pt x="139" y="11"/>
+                  </a:cubicBezTo>
+                  <a:cubicBezTo>
+                    <a:pt x="139" y="74"/>
+                    <a:pt x="139" y="74"/>
+                    <a:pt x="139" y="74"/>
+                  </a:cubicBezTo>
+                  <a:cubicBezTo>
+                    <a:pt x="117" y="74"/>
+                    <a:pt x="117" y="74"/>
+                    <a:pt x="117" y="74"/>
+                  </a:cubicBezTo>
+                  <a:cubicBezTo>
+                    <a:pt x="117" y="11"/>
+                    <a:pt x="117" y="11"/>
+                    <a:pt x="117" y="11"/>
+                  </a:cubicBezTo>
+                  <a:cubicBezTo>
+                    <a:pt x="117" y="4"/>
+                    <a:pt x="113" y="0"/>
+                    <a:pt x="107" y="0"/>
+                  </a:cubicBezTo>
+                  <a:cubicBezTo>
+                    <a:pt x="101" y="0"/>
+                    <a:pt x="96" y="4"/>
+                    <a:pt x="96" y="11"/>
+                  </a:cubicBezTo>
+                  <a:cubicBezTo>
+                    <a:pt x="96" y="74"/>
+                    <a:pt x="96" y="74"/>
+                    <a:pt x="96" y="74"/>
+                  </a:cubicBezTo>
+                  <a:cubicBezTo>
+                    <a:pt x="86" y="74"/>
+                    <a:pt x="86" y="74"/>
+                    <a:pt x="86" y="74"/>
+                  </a:cubicBezTo>
+                  <a:cubicBezTo>
+                    <a:pt x="81" y="74"/>
+                    <a:pt x="75" y="79"/>
+                    <a:pt x="75" y="86"/>
+                  </a:cubicBezTo>
+                  <a:cubicBezTo>
+                    <a:pt x="75" y="96"/>
+                    <a:pt x="75" y="96"/>
+                    <a:pt x="75" y="96"/>
+                  </a:cubicBezTo>
+                  <a:cubicBezTo>
+                    <a:pt x="11" y="96"/>
+                    <a:pt x="11" y="96"/>
+                    <a:pt x="11" y="96"/>
+                  </a:cubicBezTo>
+                  <a:cubicBezTo>
+                    <a:pt x="5" y="96"/>
+                    <a:pt x="0" y="101"/>
+                    <a:pt x="0" y="107"/>
+                  </a:cubicBezTo>
+                  <a:cubicBezTo>
+                    <a:pt x="0" y="112"/>
+                    <a:pt x="5" y="117"/>
+                    <a:pt x="11" y="117"/>
+                  </a:cubicBezTo>
+                  <a:cubicBezTo>
+                    <a:pt x="75" y="117"/>
+                    <a:pt x="75" y="117"/>
+                    <a:pt x="75" y="117"/>
+                  </a:cubicBezTo>
+                  <a:cubicBezTo>
+                    <a:pt x="75" y="139"/>
+                    <a:pt x="75" y="139"/>
+                    <a:pt x="75" y="139"/>
+                  </a:cubicBezTo>
+                  <a:cubicBezTo>
+                    <a:pt x="11" y="139"/>
+                    <a:pt x="11" y="139"/>
+                    <a:pt x="11" y="139"/>
+                  </a:cubicBezTo>
+                  <a:cubicBezTo>
+                    <a:pt x="5" y="139"/>
+                    <a:pt x="0" y="143"/>
+                    <a:pt x="0" y="150"/>
+                  </a:cubicBezTo>
+                  <a:cubicBezTo>
+                    <a:pt x="0" y="155"/>
+                    <a:pt x="5" y="160"/>
+                    <a:pt x="11" y="160"/>
+                  </a:cubicBezTo>
+                  <a:cubicBezTo>
+                    <a:pt x="75" y="160"/>
+                    <a:pt x="75" y="160"/>
+                    <a:pt x="75" y="160"/>
+                  </a:cubicBezTo>
+                  <a:cubicBezTo>
+                    <a:pt x="75" y="181"/>
+                    <a:pt x="75" y="181"/>
+                    <a:pt x="75" y="181"/>
+                  </a:cubicBezTo>
+                  <a:cubicBezTo>
+                    <a:pt x="11" y="181"/>
+                    <a:pt x="11" y="181"/>
+                    <a:pt x="11" y="181"/>
+                  </a:cubicBezTo>
+                  <a:cubicBezTo>
+                    <a:pt x="5" y="181"/>
+                    <a:pt x="0" y="186"/>
+                    <a:pt x="0" y="192"/>
+                  </a:cubicBezTo>
+                  <a:cubicBezTo>
+                    <a:pt x="0" y="198"/>
+                    <a:pt x="5" y="202"/>
+                    <a:pt x="11" y="202"/>
+                  </a:cubicBezTo>
+                  <a:cubicBezTo>
+                    <a:pt x="75" y="202"/>
+                    <a:pt x="75" y="202"/>
+                    <a:pt x="75" y="202"/>
+                  </a:cubicBezTo>
+                  <a:cubicBezTo>
+                    <a:pt x="75" y="223"/>
+                    <a:pt x="75" y="223"/>
+                    <a:pt x="75" y="223"/>
+                  </a:cubicBezTo>
+                  <a:cubicBezTo>
+                    <a:pt x="11" y="223"/>
+                    <a:pt x="11" y="223"/>
+                    <a:pt x="11" y="223"/>
+                  </a:cubicBezTo>
+                  <a:cubicBezTo>
+                    <a:pt x="5" y="223"/>
+                    <a:pt x="0" y="228"/>
+                    <a:pt x="0" y="234"/>
+                  </a:cubicBezTo>
+                  <a:cubicBezTo>
+                    <a:pt x="0" y="241"/>
+                    <a:pt x="5" y="245"/>
+                    <a:pt x="11" y="245"/>
+                  </a:cubicBezTo>
+                  <a:cubicBezTo>
+                    <a:pt x="75" y="245"/>
+                    <a:pt x="75" y="245"/>
+                    <a:pt x="75" y="245"/>
+                  </a:cubicBezTo>
+                  <a:cubicBezTo>
+                    <a:pt x="75" y="266"/>
+                    <a:pt x="75" y="266"/>
+                    <a:pt x="75" y="266"/>
+                  </a:cubicBezTo>
+                  <a:cubicBezTo>
+                    <a:pt x="11" y="266"/>
+                    <a:pt x="11" y="266"/>
+                    <a:pt x="11" y="266"/>
+                  </a:cubicBezTo>
+                  <a:cubicBezTo>
+                    <a:pt x="5" y="266"/>
+                    <a:pt x="0" y="271"/>
+                    <a:pt x="0" y="276"/>
+                  </a:cubicBezTo>
+                  <a:cubicBezTo>
+                    <a:pt x="0" y="283"/>
+                    <a:pt x="5" y="288"/>
+                    <a:pt x="11" y="288"/>
+                  </a:cubicBezTo>
+                  <a:cubicBezTo>
+                    <a:pt x="75" y="288"/>
+                    <a:pt x="75" y="288"/>
+                    <a:pt x="75" y="288"/>
+                  </a:cubicBezTo>
+                  <a:cubicBezTo>
+                    <a:pt x="75" y="308"/>
+                    <a:pt x="75" y="308"/>
+                    <a:pt x="75" y="308"/>
+                  </a:cubicBezTo>
+                  <a:cubicBezTo>
+                    <a:pt x="11" y="308"/>
+                    <a:pt x="11" y="308"/>
+                    <a:pt x="11" y="308"/>
+                  </a:cubicBezTo>
+                  <a:cubicBezTo>
+                    <a:pt x="5" y="308"/>
+                    <a:pt x="0" y="314"/>
+                    <a:pt x="0" y="319"/>
+                  </a:cubicBezTo>
+                  <a:cubicBezTo>
+                    <a:pt x="0" y="325"/>
+                    <a:pt x="5" y="329"/>
+                    <a:pt x="11" y="329"/>
+                  </a:cubicBezTo>
+                  <a:cubicBezTo>
+                    <a:pt x="75" y="329"/>
+                    <a:pt x="75" y="329"/>
+                    <a:pt x="75" y="329"/>
+                  </a:cubicBezTo>
+                  <a:cubicBezTo>
+                    <a:pt x="75" y="351"/>
+                    <a:pt x="75" y="351"/>
+                    <a:pt x="75" y="351"/>
+                  </a:cubicBezTo>
+                  <a:cubicBezTo>
+                    <a:pt x="11" y="351"/>
+                    <a:pt x="11" y="351"/>
+                    <a:pt x="11" y="351"/>
+                  </a:cubicBezTo>
+                  <a:cubicBezTo>
+                    <a:pt x="5" y="351"/>
+                    <a:pt x="0" y="357"/>
+                    <a:pt x="0" y="362"/>
+                  </a:cubicBezTo>
+                  <a:cubicBezTo>
+                    <a:pt x="0" y="368"/>
+                    <a:pt x="5" y="372"/>
+                    <a:pt x="11" y="372"/>
+                  </a:cubicBezTo>
+                  <a:cubicBezTo>
+                    <a:pt x="75" y="372"/>
+                    <a:pt x="75" y="372"/>
+                    <a:pt x="75" y="372"/>
+                  </a:cubicBezTo>
+                  <a:cubicBezTo>
+                    <a:pt x="75" y="394"/>
+                    <a:pt x="75" y="394"/>
+                    <a:pt x="75" y="394"/>
+                  </a:cubicBezTo>
+                  <a:cubicBezTo>
+                    <a:pt x="11" y="394"/>
+                    <a:pt x="11" y="394"/>
+                    <a:pt x="11" y="394"/>
+                  </a:cubicBezTo>
+                  <a:cubicBezTo>
+                    <a:pt x="5" y="394"/>
+                    <a:pt x="0" y="399"/>
+                    <a:pt x="0" y="405"/>
+                  </a:cubicBezTo>
+                  <a:cubicBezTo>
+                    <a:pt x="0" y="411"/>
+                    <a:pt x="5" y="415"/>
+                    <a:pt x="11" y="415"/>
+                  </a:cubicBezTo>
+                  <a:cubicBezTo>
+                    <a:pt x="75" y="415"/>
+                    <a:pt x="75" y="415"/>
+                    <a:pt x="75" y="415"/>
+                  </a:cubicBezTo>
+                  <a:cubicBezTo>
+                    <a:pt x="75" y="437"/>
+                    <a:pt x="75" y="437"/>
+                    <a:pt x="75" y="437"/>
+                  </a:cubicBezTo>
+                  <a:cubicBezTo>
+                    <a:pt x="11" y="437"/>
+                    <a:pt x="11" y="437"/>
+                    <a:pt x="11" y="437"/>
+                  </a:cubicBezTo>
+                  <a:cubicBezTo>
+                    <a:pt x="5" y="437"/>
+                    <a:pt x="0" y="442"/>
+                    <a:pt x="0" y="448"/>
+                  </a:cubicBezTo>
+                  <a:cubicBezTo>
+                    <a:pt x="0" y="454"/>
+                    <a:pt x="5" y="458"/>
+                    <a:pt x="11" y="458"/>
+                  </a:cubicBezTo>
+                  <a:cubicBezTo>
+                    <a:pt x="75" y="458"/>
+                    <a:pt x="75" y="458"/>
+                    <a:pt x="75" y="458"/>
+                  </a:cubicBezTo>
+                  <a:cubicBezTo>
+                    <a:pt x="75" y="479"/>
+                    <a:pt x="75" y="479"/>
+                    <a:pt x="75" y="479"/>
+                  </a:cubicBezTo>
+                  <a:lnTo>
+                    <a:pt x="11" y="479"/>
+                  </a:lnTo>
+                  <a:close/>
+                  <a:moveTo>
+                    <a:pt x="96" y="96"/>
+                  </a:moveTo>
+                  <a:lnTo>
+                    <a:pt x="96" y="96"/>
+                  </a:lnTo>
+                  <a:cubicBezTo>
+                    <a:pt x="501" y="96"/>
+                    <a:pt x="501" y="96"/>
+                    <a:pt x="501" y="96"/>
+                  </a:cubicBezTo>
+                  <a:cubicBezTo>
+                    <a:pt x="501" y="501"/>
+                    <a:pt x="501" y="501"/>
+                    <a:pt x="501" y="501"/>
+                  </a:cubicBezTo>
+                  <a:cubicBezTo>
+                    <a:pt x="96" y="501"/>
+                    <a:pt x="96" y="501"/>
+                    <a:pt x="96" y="501"/>
+                  </a:cubicBezTo>
+                  <a:lnTo>
+                    <a:pt x="96" y="96"/>
+                  </a:lnTo>
+                  <a:close/>
+                </a:path>
+              </a:pathLst>
+            </a:custGeom>
             <a:solidFill>
               <a:schemeClr val="bg1"/>
             </a:solidFill>
-            <a:ln>
-              <a:noFill/>
+            <a:ln w="19050" cap="flat">
+              <a:solidFill>
+                <a:srgbClr val="98B6FE"/>
+              </a:solidFill>
+              <a:bevel/>
+              <a:headEnd/>
+              <a:tailEnd/>
             </a:ln>
+            <a:effectLst/>
+            <a:extLst>
+              <a:ext uri="{AF507438-7753-43E0-B8FC-AC1667EBCBE1}">
+                <a14:hiddenEffects xmlns:a14="http://schemas.microsoft.com/office/drawing/2010/main">
+                  <a:effectLst>
+                    <a:outerShdw blurRad="63500" dist="38099" dir="2700000" algn="ctr" rotWithShape="0">
+                      <a:srgbClr val="000000">
+                        <a:alpha val="74998"/>
+                      </a:srgbClr>
+                    </a:outerShdw>
+                  </a:effectLst>
+                </a14:hiddenEffects>
+              </a:ext>
+            </a:extLst>
           </p:spPr>
-          <p:style>
-            <a:lnRef idx="2">
-              <a:schemeClr val="accent1">
-                <a:shade val="50000"/>
-              </a:schemeClr>
-            </a:lnRef>
-            <a:fillRef idx="1">
-              <a:schemeClr val="accent1"/>
-            </a:fillRef>
-            <a:effectRef idx="0">
-              <a:schemeClr val="accent1"/>
-            </a:effectRef>
-            <a:fontRef idx="minor">
-              <a:schemeClr val="lt1"/>
-            </a:fontRef>
-          </p:style>
           <p:txBody>
-            <a:bodyPr rtlCol="0" anchor="ctr"/>
+            <a:bodyPr wrap="none" anchor="ctr"/>
             <a:lstStyle/>
             <a:p>
-              <a:pPr algn="ctr"/>
-              <a:endParaRPr lang="ko-KR" altLang="en-US"/>
+              <a:endParaRPr lang="en-US" sz="964"/>
             </a:p>
           </p:txBody>
         </p:sp>
-        <p:pic>
-          <p:nvPicPr>
-            <p:cNvPr id="45" name="Picture 45"/>
-            <p:cNvPicPr>
-              <a:picLocks noChangeAspect="1"/>
-            </p:cNvPicPr>
-            <p:nvPr/>
-          </p:nvPicPr>
-          <p:blipFill>
-            <a:blip r:embed="rId9" cstate="print">
-              <a:duotone>
-                <a:prstClr val="black"/>
-                <a:schemeClr val="accent6">
-                  <a:tint val="45000"/>
-                  <a:satMod val="400000"/>
-                </a:schemeClr>
-              </a:duotone>
-              <a:extLst>
-                <a:ext uri="{BEBA8EAE-BF5A-486C-A8C5-ECC9F3942E4B}">
-                  <a14:imgProps xmlns:a14="http://schemas.microsoft.com/office/drawing/2010/main">
-                    <a14:imgLayer r:embed="rId10">
-                      <a14:imgEffect>
-                        <a14:brightnessContrast bright="-50000"/>
-                      </a14:imgEffect>
-                    </a14:imgLayer>
-                  </a14:imgProps>
-                </a:ext>
-                <a:ext uri="{28A0092B-C50C-407E-A947-70E740481C1C}">
-                  <a14:useLocalDpi xmlns:a14="http://schemas.microsoft.com/office/drawing/2010/main" val="0"/>
-                </a:ext>
-              </a:extLst>
-            </a:blip>
-            <a:stretch>
-              <a:fillRect/>
-            </a:stretch>
-          </p:blipFill>
-          <p:spPr>
-            <a:xfrm>
-              <a:off x="7608578" y="2170902"/>
-              <a:ext cx="1062982" cy="1144923"/>
-            </a:xfrm>
-            <a:prstGeom prst="rect">
-              <a:avLst/>
-            </a:prstGeom>
-          </p:spPr>
-        </p:pic>
       </p:grpSp>
+      <p:cxnSp>
+        <p:nvCxnSpPr>
+          <p:cNvPr id="43" name="Straight Connector 64">
+            <a:extLst>
+              <a:ext uri="{FF2B5EF4-FFF2-40B4-BE49-F238E27FC236}">
+                <a16:creationId xmlns="" xmlns:a16="http://schemas.microsoft.com/office/drawing/2014/main" id="{D22F4E57-90BA-4899-909E-5829E7A9C72A}"/>
+              </a:ext>
+            </a:extLst>
+          </p:cNvPr>
+          <p:cNvCxnSpPr/>
+          <p:nvPr/>
+        </p:nvCxnSpPr>
+        <p:spPr>
+          <a:xfrm flipH="1">
+            <a:off x="8050338" y="3658863"/>
+            <a:ext cx="1" cy="530443"/>
+          </a:xfrm>
+          <a:prstGeom prst="line">
+            <a:avLst/>
+          </a:prstGeom>
+          <a:ln w="19050">
+            <a:solidFill>
+              <a:srgbClr val="98B6FE"/>
+            </a:solidFill>
+          </a:ln>
+        </p:spPr>
+        <p:style>
+          <a:lnRef idx="1">
+            <a:schemeClr val="accent1"/>
+          </a:lnRef>
+          <a:fillRef idx="0">
+            <a:schemeClr val="accent1"/>
+          </a:fillRef>
+          <a:effectRef idx="0">
+            <a:schemeClr val="accent1"/>
+          </a:effectRef>
+          <a:fontRef idx="minor">
+            <a:schemeClr val="tx1"/>
+          </a:fontRef>
+        </p:style>
+      </p:cxnSp>
+      <p:sp>
+        <p:nvSpPr>
+          <p:cNvPr id="47" name="직사각형 46"/>
+          <p:cNvSpPr/>
+          <p:nvPr/>
+        </p:nvSpPr>
+        <p:spPr>
+          <a:xfrm>
+            <a:off x="7605660" y="1072515"/>
+            <a:ext cx="948691" cy="845820"/>
+          </a:xfrm>
+          <a:prstGeom prst="rect">
+            <a:avLst/>
+          </a:prstGeom>
+          <a:solidFill>
+            <a:schemeClr val="bg1"/>
+          </a:solidFill>
+          <a:ln>
+            <a:noFill/>
+          </a:ln>
+        </p:spPr>
+        <p:style>
+          <a:lnRef idx="2">
+            <a:schemeClr val="accent1">
+              <a:shade val="50000"/>
+            </a:schemeClr>
+          </a:lnRef>
+          <a:fillRef idx="1">
+            <a:schemeClr val="accent1"/>
+          </a:fillRef>
+          <a:effectRef idx="0">
+            <a:schemeClr val="accent1"/>
+          </a:effectRef>
+          <a:fontRef idx="minor">
+            <a:schemeClr val="lt1"/>
+          </a:fontRef>
+        </p:style>
+        <p:txBody>
+          <a:bodyPr rtlCol="0" anchor="ctr"/>
+          <a:lstStyle/>
+          <a:p>
+            <a:pPr algn="ctr"/>
+            <a:endParaRPr lang="ko-KR" altLang="en-US"/>
+          </a:p>
+        </p:txBody>
+      </p:sp>
+      <p:pic>
+        <p:nvPicPr>
+          <p:cNvPr id="44" name="Picture 47"/>
+          <p:cNvPicPr>
+            <a:picLocks noChangeAspect="1"/>
+          </p:cNvPicPr>
+          <p:nvPr/>
+        </p:nvPicPr>
+        <p:blipFill>
+          <a:blip r:embed="rId7" cstate="print">
+            <a:duotone>
+              <a:prstClr val="black"/>
+              <a:schemeClr val="accent5">
+                <a:tint val="45000"/>
+                <a:satMod val="400000"/>
+              </a:schemeClr>
+            </a:duotone>
+            <a:extLst>
+              <a:ext uri="{BEBA8EAE-BF5A-486C-A8C5-ECC9F3942E4B}">
+                <a14:imgProps xmlns:a14="http://schemas.microsoft.com/office/drawing/2010/main">
+                  <a14:imgLayer r:embed="rId8">
+                    <a14:imgEffect>
+                      <a14:brightnessContrast contrast="-40000"/>
+                    </a14:imgEffect>
+                  </a14:imgLayer>
+                </a14:imgProps>
+              </a:ext>
+              <a:ext uri="{28A0092B-C50C-407E-A947-70E740481C1C}">
+                <a14:useLocalDpi xmlns:a14="http://schemas.microsoft.com/office/drawing/2010/main" val="0"/>
+              </a:ext>
+            </a:extLst>
+          </a:blip>
+          <a:stretch>
+            <a:fillRect/>
+          </a:stretch>
+        </p:blipFill>
+        <p:spPr>
+          <a:xfrm>
+            <a:off x="7448536" y="1128922"/>
+            <a:ext cx="1253518" cy="730278"/>
+          </a:xfrm>
+          <a:prstGeom prst="rect">
+            <a:avLst/>
+          </a:prstGeom>
+          <a:ln>
+            <a:noFill/>
+          </a:ln>
+        </p:spPr>
+      </p:pic>
+      <p:sp>
+        <p:nvSpPr>
+          <p:cNvPr id="46" name="직사각형 45"/>
+          <p:cNvSpPr/>
+          <p:nvPr/>
+        </p:nvSpPr>
+        <p:spPr>
+          <a:xfrm>
+            <a:off x="7600950" y="2326857"/>
+            <a:ext cx="948690" cy="845821"/>
+          </a:xfrm>
+          <a:prstGeom prst="rect">
+            <a:avLst/>
+          </a:prstGeom>
+          <a:solidFill>
+            <a:schemeClr val="bg1"/>
+          </a:solidFill>
+          <a:ln>
+            <a:noFill/>
+          </a:ln>
+        </p:spPr>
+        <p:style>
+          <a:lnRef idx="2">
+            <a:schemeClr val="accent1">
+              <a:shade val="50000"/>
+            </a:schemeClr>
+          </a:lnRef>
+          <a:fillRef idx="1">
+            <a:schemeClr val="accent1"/>
+          </a:fillRef>
+          <a:effectRef idx="0">
+            <a:schemeClr val="accent1"/>
+          </a:effectRef>
+          <a:fontRef idx="minor">
+            <a:schemeClr val="lt1"/>
+          </a:fontRef>
+        </p:style>
+        <p:txBody>
+          <a:bodyPr rtlCol="0" anchor="ctr"/>
+          <a:lstStyle/>
+          <a:p>
+            <a:pPr algn="ctr"/>
+            <a:endParaRPr lang="ko-KR" altLang="en-US"/>
+          </a:p>
+        </p:txBody>
+      </p:sp>
+      <p:pic>
+        <p:nvPicPr>
+          <p:cNvPr id="45" name="Picture 45"/>
+          <p:cNvPicPr>
+            <a:picLocks noChangeAspect="1"/>
+          </p:cNvPicPr>
+          <p:nvPr/>
+        </p:nvPicPr>
+        <p:blipFill>
+          <a:blip r:embed="rId9" cstate="print">
+            <a:duotone>
+              <a:prstClr val="black"/>
+              <a:schemeClr val="accent5">
+                <a:tint val="45000"/>
+                <a:satMod val="400000"/>
+              </a:schemeClr>
+            </a:duotone>
+            <a:extLst>
+              <a:ext uri="{BEBA8EAE-BF5A-486C-A8C5-ECC9F3942E4B}">
+                <a14:imgProps xmlns:a14="http://schemas.microsoft.com/office/drawing/2010/main">
+                  <a14:imgLayer r:embed="rId10">
+                    <a14:imgEffect>
+                      <a14:brightnessContrast contrast="-40000"/>
+                    </a14:imgEffect>
+                  </a14:imgLayer>
+                </a14:imgProps>
+              </a:ext>
+              <a:ext uri="{28A0092B-C50C-407E-A947-70E740481C1C}">
+                <a14:useLocalDpi xmlns:a14="http://schemas.microsoft.com/office/drawing/2010/main" val="0"/>
+              </a:ext>
+            </a:extLst>
+          </a:blip>
+          <a:stretch>
+            <a:fillRect/>
+          </a:stretch>
+        </p:blipFill>
+        <p:spPr>
+          <a:xfrm>
+            <a:off x="7647681" y="2286218"/>
+            <a:ext cx="848856" cy="914292"/>
+          </a:xfrm>
+          <a:prstGeom prst="rect">
+            <a:avLst/>
+          </a:prstGeom>
+          <a:ln>
+            <a:noFill/>
+          </a:ln>
+        </p:spPr>
+      </p:pic>
     </p:spTree>
     <p:extLst>
       <p:ext uri="{BB962C8B-B14F-4D97-AF65-F5344CB8AC3E}">
@@ -27003,7 +26964,7 @@
             <p:cNvPr id="97" name="타원 96">
               <a:extLst>
                 <a:ext uri="{FF2B5EF4-FFF2-40B4-BE49-F238E27FC236}">
-                  <a16:creationId xmlns="" xmlns:a16="http://schemas.microsoft.com/office/drawing/2014/main" id="{2A6A11AC-31D1-C238-469B-B8065561C8B3}"/>
+                  <a16:creationId xmlns:a16="http://schemas.microsoft.com/office/drawing/2014/main" xmlns="" id="{2A6A11AC-31D1-C238-469B-B8065561C8B3}"/>
                 </a:ext>
               </a:extLst>
             </p:cNvPr>
@@ -27074,7 +27035,7 @@
             <p:cNvPr id="98" name="TextBox 97">
               <a:extLst>
                 <a:ext uri="{FF2B5EF4-FFF2-40B4-BE49-F238E27FC236}">
-                  <a16:creationId xmlns="" xmlns:a16="http://schemas.microsoft.com/office/drawing/2014/main" id="{370FDDD1-392F-C3F6-7926-8F5450602B51}"/>
+                  <a16:creationId xmlns:a16="http://schemas.microsoft.com/office/drawing/2014/main" xmlns="" id="{370FDDD1-392F-C3F6-7926-8F5450602B51}"/>
                 </a:ext>
               </a:extLst>
             </p:cNvPr>
@@ -27245,7 +27206,7 @@
             <p:cNvPr id="99" name="타원 98">
               <a:extLst>
                 <a:ext uri="{FF2B5EF4-FFF2-40B4-BE49-F238E27FC236}">
-                  <a16:creationId xmlns="" xmlns:a16="http://schemas.microsoft.com/office/drawing/2014/main" id="{8A596585-4EFC-7C6C-63D0-E577FBF1E255}"/>
+                  <a16:creationId xmlns:a16="http://schemas.microsoft.com/office/drawing/2014/main" xmlns="" id="{8A596585-4EFC-7C6C-63D0-E577FBF1E255}"/>
                 </a:ext>
               </a:extLst>
             </p:cNvPr>
@@ -27329,7 +27290,7 @@
             <p:cNvPr id="100" name="TextBox 99">
               <a:extLst>
                 <a:ext uri="{FF2B5EF4-FFF2-40B4-BE49-F238E27FC236}">
-                  <a16:creationId xmlns="" xmlns:a16="http://schemas.microsoft.com/office/drawing/2014/main" id="{A2DBD73D-1544-9997-4B5E-7BE89DA70BD5}"/>
+                  <a16:creationId xmlns:a16="http://schemas.microsoft.com/office/drawing/2014/main" xmlns="" id="{A2DBD73D-1544-9997-4B5E-7BE89DA70BD5}"/>
                 </a:ext>
               </a:extLst>
             </p:cNvPr>
@@ -27445,7 +27406,7 @@
             <p:cNvPr id="101" name="타원 100">
               <a:extLst>
                 <a:ext uri="{FF2B5EF4-FFF2-40B4-BE49-F238E27FC236}">
-                  <a16:creationId xmlns="" xmlns:a16="http://schemas.microsoft.com/office/drawing/2014/main" id="{D7536991-A61A-F58E-EC18-61A6F108717B}"/>
+                  <a16:creationId xmlns:a16="http://schemas.microsoft.com/office/drawing/2014/main" xmlns="" id="{D7536991-A61A-F58E-EC18-61A6F108717B}"/>
                 </a:ext>
               </a:extLst>
             </p:cNvPr>
@@ -27529,7 +27490,7 @@
             <p:cNvPr id="102" name="TextBox 101">
               <a:extLst>
                 <a:ext uri="{FF2B5EF4-FFF2-40B4-BE49-F238E27FC236}">
-                  <a16:creationId xmlns="" xmlns:a16="http://schemas.microsoft.com/office/drawing/2014/main" id="{688289CD-94AD-1B72-1500-6EAFBCF42BA0}"/>
+                  <a16:creationId xmlns:a16="http://schemas.microsoft.com/office/drawing/2014/main" xmlns="" id="{688289CD-94AD-1B72-1500-6EAFBCF42BA0}"/>
                 </a:ext>
               </a:extLst>
             </p:cNvPr>
@@ -27792,7 +27753,7 @@
             <p:cNvPr id="103" name="타원 102">
               <a:extLst>
                 <a:ext uri="{FF2B5EF4-FFF2-40B4-BE49-F238E27FC236}">
-                  <a16:creationId xmlns="" xmlns:a16="http://schemas.microsoft.com/office/drawing/2014/main" id="{F74DE22F-BE57-990F-10C7-5A28137FF97D}"/>
+                  <a16:creationId xmlns:a16="http://schemas.microsoft.com/office/drawing/2014/main" xmlns="" id="{F74DE22F-BE57-990F-10C7-5A28137FF97D}"/>
                 </a:ext>
               </a:extLst>
             </p:cNvPr>
@@ -27876,7 +27837,7 @@
             <p:cNvPr id="104" name="TextBox 103">
               <a:extLst>
                 <a:ext uri="{FF2B5EF4-FFF2-40B4-BE49-F238E27FC236}">
-                  <a16:creationId xmlns="" xmlns:a16="http://schemas.microsoft.com/office/drawing/2014/main" id="{2709A4DE-7D99-060B-4332-72EAE25DA559}"/>
+                  <a16:creationId xmlns:a16="http://schemas.microsoft.com/office/drawing/2014/main" xmlns="" id="{2709A4DE-7D99-060B-4332-72EAE25DA559}"/>
                 </a:ext>
               </a:extLst>
             </p:cNvPr>
@@ -28970,7 +28931,7 @@
             <p:cNvPr id="6" name="Picture 11" descr="Sandbox Software – In the Cloud | FortiSandbox Cloud">
               <a:extLst>
                 <a:ext uri="{FF2B5EF4-FFF2-40B4-BE49-F238E27FC236}">
-                  <a16:creationId xmlns:a16="http://schemas.microsoft.com/office/drawing/2014/main" xmlns="" id="{73BBF3D0-6B40-E280-BA30-1E77B5C4F45A}"/>
+                  <a16:creationId xmlns="" xmlns:a16="http://schemas.microsoft.com/office/drawing/2014/main" id="{73BBF3D0-6B40-E280-BA30-1E77B5C4F45A}"/>
                 </a:ext>
               </a:extLst>
             </p:cNvPr>
@@ -29088,7 +29049,7 @@
             <p:cNvPr id="7" name="Picture 8" descr="cost Icon - Free PNG &amp; SVG 930448 - Noun Project">
               <a:extLst>
                 <a:ext uri="{FF2B5EF4-FFF2-40B4-BE49-F238E27FC236}">
-                  <a16:creationId xmlns:a16="http://schemas.microsoft.com/office/drawing/2014/main" xmlns="" id="{B89FFE28-AD15-4FA1-FDD1-8DF6F4744923}"/>
+                  <a16:creationId xmlns="" xmlns:a16="http://schemas.microsoft.com/office/drawing/2014/main" id="{B89FFE28-AD15-4FA1-FDD1-8DF6F4744923}"/>
                 </a:ext>
               </a:extLst>
             </p:cNvPr>
@@ -29218,7 +29179,7 @@
             <p:cNvPr id="8" name="Picture 6" descr="Project Cargo Services | CFA">
               <a:extLst>
                 <a:ext uri="{FF2B5EF4-FFF2-40B4-BE49-F238E27FC236}">
-                  <a16:creationId xmlns:a16="http://schemas.microsoft.com/office/drawing/2014/main" xmlns="" id="{A9578F59-39A1-6B09-C1A4-24DA78C49B39}"/>
+                  <a16:creationId xmlns="" xmlns:a16="http://schemas.microsoft.com/office/drawing/2014/main" id="{A9578F59-39A1-6B09-C1A4-24DA78C49B39}"/>
                 </a:ext>
               </a:extLst>
             </p:cNvPr>

--- a/99ref/버티카_blog.pptx
+++ b/99ref/버티카_blog.pptx
@@ -6029,9 +6029,7 @@
               <a:avLst/>
             </a:prstGeom>
             <a:ln>
-              <a:solidFill>
-                <a:srgbClr val="99B7FF"/>
-              </a:solidFill>
+              <a:noFill/>
             </a:ln>
           </p:spPr>
         </p:pic>
@@ -18211,7 +18209,7 @@
           <p:cNvPr id="5" name="그림 4">
             <a:extLst>
               <a:ext uri="{FF2B5EF4-FFF2-40B4-BE49-F238E27FC236}">
-                <a16:creationId xmlns="" xmlns:a16="http://schemas.microsoft.com/office/drawing/2014/main" id="{F25A3B3A-32C8-4401-A476-E8CCEB3258D5}"/>
+                <a16:creationId xmlns:a16="http://schemas.microsoft.com/office/drawing/2014/main" xmlns="" id="{F25A3B3A-32C8-4401-A476-E8CCEB3258D5}"/>
               </a:ext>
             </a:extLst>
           </p:cNvPr>
@@ -18254,7 +18252,7 @@
           <p:cNvPr id="6" name="Picture 4">
             <a:extLst>
               <a:ext uri="{FF2B5EF4-FFF2-40B4-BE49-F238E27FC236}">
-                <a16:creationId xmlns="" xmlns:a16="http://schemas.microsoft.com/office/drawing/2014/main" id="{051FB3A4-C7F9-45D0-A73B-557A6E1C4FDF}"/>
+                <a16:creationId xmlns:a16="http://schemas.microsoft.com/office/drawing/2014/main" xmlns="" id="{051FB3A4-C7F9-45D0-A73B-557A6E1C4FDF}"/>
               </a:ext>
             </a:extLst>
           </p:cNvPr>
@@ -19363,7 +19361,7 @@
             <p:cNvPr id="34" name="Freeform 117">
               <a:extLst>
                 <a:ext uri="{FF2B5EF4-FFF2-40B4-BE49-F238E27FC236}">
-                  <a16:creationId xmlns="" xmlns:a16="http://schemas.microsoft.com/office/drawing/2014/main" id="{ACB5F511-0467-4F80-BCD6-94BAC36031EE}"/>
+                  <a16:creationId xmlns:a16="http://schemas.microsoft.com/office/drawing/2014/main" xmlns="" id="{ACB5F511-0467-4F80-BCD6-94BAC36031EE}"/>
                 </a:ext>
               </a:extLst>
             </p:cNvPr>
@@ -19543,7 +19541,7 @@
             <p:cNvPr id="35" name="Freeform 118">
               <a:extLst>
                 <a:ext uri="{FF2B5EF4-FFF2-40B4-BE49-F238E27FC236}">
-                  <a16:creationId xmlns="" xmlns:a16="http://schemas.microsoft.com/office/drawing/2014/main" id="{8F3B04C3-D501-4070-B0AC-5FB6C26F8066}"/>
+                  <a16:creationId xmlns:a16="http://schemas.microsoft.com/office/drawing/2014/main" xmlns="" id="{8F3B04C3-D501-4070-B0AC-5FB6C26F8066}"/>
                 </a:ext>
               </a:extLst>
             </p:cNvPr>
@@ -19685,7 +19683,7 @@
             <p:cNvPr id="36" name="Freeform 119">
               <a:extLst>
                 <a:ext uri="{FF2B5EF4-FFF2-40B4-BE49-F238E27FC236}">
-                  <a16:creationId xmlns="" xmlns:a16="http://schemas.microsoft.com/office/drawing/2014/main" id="{36E9553A-4692-4D5B-A665-94CC09C4A62F}"/>
+                  <a16:creationId xmlns:a16="http://schemas.microsoft.com/office/drawing/2014/main" xmlns="" id="{36E9553A-4692-4D5B-A665-94CC09C4A62F}"/>
                 </a:ext>
               </a:extLst>
             </p:cNvPr>
@@ -19865,7 +19863,7 @@
             <p:cNvPr id="37" name="Freeform 120">
               <a:extLst>
                 <a:ext uri="{FF2B5EF4-FFF2-40B4-BE49-F238E27FC236}">
-                  <a16:creationId xmlns="" xmlns:a16="http://schemas.microsoft.com/office/drawing/2014/main" id="{936475C6-EBDB-47C8-8ADD-312FB8E3E615}"/>
+                  <a16:creationId xmlns:a16="http://schemas.microsoft.com/office/drawing/2014/main" xmlns="" id="{936475C6-EBDB-47C8-8ADD-312FB8E3E615}"/>
                 </a:ext>
               </a:extLst>
             </p:cNvPr>
@@ -20007,7 +20005,7 @@
             <p:cNvPr id="38" name="Freeform 121">
               <a:extLst>
                 <a:ext uri="{FF2B5EF4-FFF2-40B4-BE49-F238E27FC236}">
-                  <a16:creationId xmlns="" xmlns:a16="http://schemas.microsoft.com/office/drawing/2014/main" id="{169A2FBC-0956-4DC7-ADF8-83D5DC60949B}"/>
+                  <a16:creationId xmlns:a16="http://schemas.microsoft.com/office/drawing/2014/main" xmlns="" id="{169A2FBC-0956-4DC7-ADF8-83D5DC60949B}"/>
                 </a:ext>
               </a:extLst>
             </p:cNvPr>
@@ -20187,7 +20185,7 @@
             <p:cNvPr id="39" name="Freeform 122">
               <a:extLst>
                 <a:ext uri="{FF2B5EF4-FFF2-40B4-BE49-F238E27FC236}">
-                  <a16:creationId xmlns="" xmlns:a16="http://schemas.microsoft.com/office/drawing/2014/main" id="{59EA31B7-D7DB-4DBF-B245-2AE82627F51A}"/>
+                  <a16:creationId xmlns:a16="http://schemas.microsoft.com/office/drawing/2014/main" xmlns="" id="{59EA31B7-D7DB-4DBF-B245-2AE82627F51A}"/>
                 </a:ext>
               </a:extLst>
             </p:cNvPr>
@@ -20329,7 +20327,7 @@
             <p:cNvPr id="40" name="Freeform 123">
               <a:extLst>
                 <a:ext uri="{FF2B5EF4-FFF2-40B4-BE49-F238E27FC236}">
-                  <a16:creationId xmlns="" xmlns:a16="http://schemas.microsoft.com/office/drawing/2014/main" id="{07115F20-4892-4DCD-A419-4CD8D03F5E62}"/>
+                  <a16:creationId xmlns:a16="http://schemas.microsoft.com/office/drawing/2014/main" xmlns="" id="{07115F20-4892-4DCD-A419-4CD8D03F5E62}"/>
                 </a:ext>
               </a:extLst>
             </p:cNvPr>
@@ -20887,7 +20885,7 @@
             <p:cNvPr id="41" name="Freeform 124">
               <a:extLst>
                 <a:ext uri="{FF2B5EF4-FFF2-40B4-BE49-F238E27FC236}">
-                  <a16:creationId xmlns="" xmlns:a16="http://schemas.microsoft.com/office/drawing/2014/main" id="{9EA60E95-59DD-4A01-B0FA-42513BEAF8E7}"/>
+                  <a16:creationId xmlns:a16="http://schemas.microsoft.com/office/drawing/2014/main" xmlns="" id="{9EA60E95-59DD-4A01-B0FA-42513BEAF8E7}"/>
                 </a:ext>
               </a:extLst>
             </p:cNvPr>
@@ -21067,7 +21065,7 @@
             <p:cNvPr id="42" name="Freeform 125">
               <a:extLst>
                 <a:ext uri="{FF2B5EF4-FFF2-40B4-BE49-F238E27FC236}">
-                  <a16:creationId xmlns="" xmlns:a16="http://schemas.microsoft.com/office/drawing/2014/main" id="{277C2BFE-7B2E-4B06-836A-8103FB641491}"/>
+                  <a16:creationId xmlns:a16="http://schemas.microsoft.com/office/drawing/2014/main" xmlns="" id="{277C2BFE-7B2E-4B06-836A-8103FB641491}"/>
                 </a:ext>
               </a:extLst>
             </p:cNvPr>
@@ -21224,7 +21222,7 @@
             <p:cNvPr id="32" name="Freeform 111">
               <a:extLst>
                 <a:ext uri="{FF2B5EF4-FFF2-40B4-BE49-F238E27FC236}">
-                  <a16:creationId xmlns="" xmlns:a16="http://schemas.microsoft.com/office/drawing/2014/main" id="{BC11850A-92B9-404F-BF5E-D6215717A644}"/>
+                  <a16:creationId xmlns:a16="http://schemas.microsoft.com/office/drawing/2014/main" xmlns="" id="{BC11850A-92B9-404F-BF5E-D6215717A644}"/>
                 </a:ext>
               </a:extLst>
             </p:cNvPr>
@@ -21442,7 +21440,7 @@
             <p:cNvPr id="33" name="Freeform 112">
               <a:extLst>
                 <a:ext uri="{FF2B5EF4-FFF2-40B4-BE49-F238E27FC236}">
-                  <a16:creationId xmlns="" xmlns:a16="http://schemas.microsoft.com/office/drawing/2014/main" id="{9BB65042-15E8-4757-A437-CB30B736B658}"/>
+                  <a16:creationId xmlns:a16="http://schemas.microsoft.com/office/drawing/2014/main" xmlns="" id="{9BB65042-15E8-4757-A437-CB30B736B658}"/>
                 </a:ext>
               </a:extLst>
             </p:cNvPr>
@@ -22849,7 +22847,7 @@
           <p:cNvPr id="43" name="Straight Connector 64">
             <a:extLst>
               <a:ext uri="{FF2B5EF4-FFF2-40B4-BE49-F238E27FC236}">
-                <a16:creationId xmlns="" xmlns:a16="http://schemas.microsoft.com/office/drawing/2014/main" id="{D22F4E57-90BA-4899-909E-5829E7A9C72A}"/>
+                <a16:creationId xmlns:a16="http://schemas.microsoft.com/office/drawing/2014/main" xmlns="" id="{D22F4E57-90BA-4899-909E-5829E7A9C72A}"/>
               </a:ext>
             </a:extLst>
           </p:cNvPr>
@@ -23450,10 +23448,10 @@
         </p:nvGrpSpPr>
         <p:grpSpPr>
           <a:xfrm>
-            <a:off x="769050" y="2034553"/>
-            <a:ext cx="3192971" cy="1393647"/>
-            <a:chOff x="5918698" y="2256619"/>
-            <a:chExt cx="3192971" cy="1393647"/>
+            <a:off x="750763" y="2034553"/>
+            <a:ext cx="3114726" cy="1393647"/>
+            <a:chOff x="5942513" y="2256619"/>
+            <a:chExt cx="3114726" cy="1393647"/>
           </a:xfrm>
         </p:grpSpPr>
         <p:sp>
@@ -24171,7 +24169,7 @@
           </p:nvSpPr>
           <p:spPr>
             <a:xfrm>
-              <a:off x="5934531" y="2264314"/>
+              <a:off x="5958346" y="2264314"/>
               <a:ext cx="1032656" cy="246221"/>
             </a:xfrm>
             <a:prstGeom prst="rect">
@@ -24213,7 +24211,7 @@
           </p:nvSpPr>
           <p:spPr>
             <a:xfrm>
-              <a:off x="5918698" y="3081590"/>
+              <a:off x="5942513" y="3081590"/>
               <a:ext cx="306371" cy="327398"/>
             </a:xfrm>
             <a:prstGeom prst="roundRect">
@@ -24260,7 +24258,7 @@
           </p:nvSpPr>
           <p:spPr>
             <a:xfrm>
-              <a:off x="6286882" y="3081590"/>
+              <a:off x="6310697" y="3081590"/>
               <a:ext cx="306371" cy="327398"/>
             </a:xfrm>
             <a:prstGeom prst="roundRect">
@@ -24307,7 +24305,7 @@
           </p:nvSpPr>
           <p:spPr>
             <a:xfrm>
-              <a:off x="6655065" y="3081590"/>
+              <a:off x="6678880" y="3081590"/>
               <a:ext cx="306371" cy="327398"/>
             </a:xfrm>
             <a:prstGeom prst="roundRect">
@@ -24354,7 +24352,7 @@
           </p:nvCxnSpPr>
           <p:spPr>
             <a:xfrm>
-              <a:off x="5918698" y="2973457"/>
+              <a:off x="5942513" y="2973457"/>
               <a:ext cx="1042738" cy="0"/>
             </a:xfrm>
             <a:prstGeom prst="line">
@@ -24392,7 +24390,7 @@
           </p:nvCxnSpPr>
           <p:spPr>
             <a:xfrm>
-              <a:off x="6071884" y="2968694"/>
+              <a:off x="6095699" y="2968694"/>
               <a:ext cx="0" cy="112896"/>
             </a:xfrm>
             <a:prstGeom prst="line">
@@ -24428,7 +24426,7 @@
           </p:nvCxnSpPr>
           <p:spPr>
             <a:xfrm>
-              <a:off x="6440066" y="2973457"/>
+              <a:off x="6463881" y="2973457"/>
               <a:ext cx="0" cy="127809"/>
             </a:xfrm>
             <a:prstGeom prst="line">
@@ -24464,7 +24462,7 @@
           </p:nvCxnSpPr>
           <p:spPr>
             <a:xfrm>
-              <a:off x="6808250" y="2973457"/>
+              <a:off x="6832065" y="2973457"/>
               <a:ext cx="0" cy="127809"/>
             </a:xfrm>
             <a:prstGeom prst="line">
@@ -24500,7 +24498,7 @@
           </p:nvSpPr>
           <p:spPr>
             <a:xfrm>
-              <a:off x="6094207" y="2529655"/>
+              <a:off x="6118022" y="2529655"/>
               <a:ext cx="306371" cy="327398"/>
             </a:xfrm>
             <a:prstGeom prst="roundRect">
@@ -24547,7 +24545,7 @@
           </p:nvCxnSpPr>
           <p:spPr>
             <a:xfrm>
-              <a:off x="6247393" y="2847527"/>
+              <a:off x="6271208" y="2847527"/>
               <a:ext cx="1" cy="125930"/>
             </a:xfrm>
             <a:prstGeom prst="line">
@@ -24585,7 +24583,7 @@
           </p:nvCxnSpPr>
           <p:spPr>
             <a:xfrm>
-              <a:off x="6646483" y="2857053"/>
+              <a:off x="6670298" y="2857053"/>
               <a:ext cx="2654" cy="125930"/>
             </a:xfrm>
             <a:prstGeom prst="line">
@@ -24621,7 +24619,7 @@
           </p:nvSpPr>
           <p:spPr>
             <a:xfrm>
-              <a:off x="6493297" y="2529655"/>
+              <a:off x="6517112" y="2529655"/>
               <a:ext cx="306371" cy="327398"/>
             </a:xfrm>
             <a:prstGeom prst="roundRect">
@@ -24668,7 +24666,7 @@
           </p:nvCxnSpPr>
           <p:spPr>
             <a:xfrm>
-              <a:off x="6225622" y="2682059"/>
+              <a:off x="6249437" y="2682059"/>
               <a:ext cx="429996" cy="0"/>
             </a:xfrm>
             <a:prstGeom prst="straightConnector1">
@@ -24706,7 +24704,7 @@
           </p:nvSpPr>
           <p:spPr>
             <a:xfrm>
-              <a:off x="6021140" y="3396350"/>
+              <a:off x="6044955" y="3396350"/>
               <a:ext cx="846707" cy="246221"/>
             </a:xfrm>
             <a:prstGeom prst="rect">
@@ -24748,7 +24746,7 @@
           </p:nvSpPr>
           <p:spPr>
             <a:xfrm>
-              <a:off x="8489978" y="3081590"/>
+              <a:off x="8435548" y="3081590"/>
               <a:ext cx="306372" cy="327398"/>
             </a:xfrm>
             <a:prstGeom prst="roundRect">
@@ -24795,7 +24793,7 @@
           </p:nvSpPr>
           <p:spPr>
             <a:xfrm>
-              <a:off x="8284451" y="2529655"/>
+              <a:off x="8230021" y="2529655"/>
               <a:ext cx="306372" cy="327398"/>
             </a:xfrm>
             <a:prstGeom prst="roundRect">
@@ -24850,7 +24848,7 @@
           </p:nvCxnSpPr>
           <p:spPr>
             <a:xfrm>
-              <a:off x="8428166" y="2845775"/>
+              <a:off x="8373736" y="2845775"/>
               <a:ext cx="214998" cy="235815"/>
             </a:xfrm>
             <a:prstGeom prst="line">
@@ -24891,7 +24889,7 @@
           </p:nvCxnSpPr>
           <p:spPr>
             <a:xfrm flipH="1">
-              <a:off x="8643164" y="2857053"/>
+              <a:off x="8588734" y="2857053"/>
               <a:ext cx="193562" cy="224537"/>
             </a:xfrm>
             <a:prstGeom prst="line">
@@ -24929,7 +24927,7 @@
           </p:nvSpPr>
           <p:spPr>
             <a:xfrm>
-              <a:off x="8683540" y="2529655"/>
+              <a:off x="8629110" y="2529655"/>
               <a:ext cx="306372" cy="327398"/>
             </a:xfrm>
             <a:prstGeom prst="roundRect">
@@ -24976,7 +24974,7 @@
           </p:nvSpPr>
           <p:spPr>
             <a:xfrm>
-              <a:off x="8212704" y="2256619"/>
+              <a:off x="8158274" y="2256619"/>
               <a:ext cx="445957" cy="253916"/>
             </a:xfrm>
             <a:prstGeom prst="rect">
@@ -25014,7 +25012,7 @@
           </p:nvSpPr>
           <p:spPr>
             <a:xfrm>
-              <a:off x="8312160" y="3396350"/>
+              <a:off x="8257730" y="3396350"/>
               <a:ext cx="686407" cy="253916"/>
             </a:xfrm>
             <a:prstGeom prst="rect">
@@ -25052,7 +25050,7 @@
           </p:nvSpPr>
           <p:spPr>
             <a:xfrm>
-              <a:off x="8543884" y="2256619"/>
+              <a:off x="8489454" y="2256619"/>
               <a:ext cx="567785" cy="253916"/>
             </a:xfrm>
             <a:prstGeom prst="rect">
@@ -25091,7 +25089,7 @@
         </p:nvSpPr>
         <p:spPr>
           <a:xfrm>
-            <a:off x="1548645" y="1694192"/>
+            <a:off x="1491236" y="1694192"/>
             <a:ext cx="1633781" cy="338554"/>
           </a:xfrm>
           <a:prstGeom prst="rect">
@@ -25128,10 +25126,10 @@
         </p:nvGrpSpPr>
         <p:grpSpPr>
           <a:xfrm>
-            <a:off x="6229146" y="2059520"/>
-            <a:ext cx="2514330" cy="1482492"/>
+            <a:off x="6232561" y="2059520"/>
+            <a:ext cx="2514330" cy="1467252"/>
             <a:chOff x="6385195" y="3966698"/>
-            <a:chExt cx="2514330" cy="1482492"/>
+            <a:chExt cx="2514330" cy="1467252"/>
           </a:xfrm>
         </p:grpSpPr>
         <p:cxnSp>
@@ -25178,7 +25176,7 @@
           </p:nvSpPr>
           <p:spPr>
             <a:xfrm>
-              <a:off x="6435120" y="4342287"/>
+              <a:off x="6435120" y="4326412"/>
               <a:ext cx="383479" cy="380228"/>
             </a:xfrm>
             <a:prstGeom prst="roundRect">
@@ -25261,7 +25259,7 @@
           </p:nvSpPr>
           <p:spPr>
             <a:xfrm>
-              <a:off x="7055513" y="4342287"/>
+              <a:off x="7055513" y="4326412"/>
               <a:ext cx="383479" cy="380228"/>
             </a:xfrm>
             <a:prstGeom prst="roundRect">
@@ -25344,7 +25342,7 @@
           </p:nvSpPr>
           <p:spPr>
             <a:xfrm>
-              <a:off x="7675905" y="4348637"/>
+              <a:off x="7675905" y="4332762"/>
               <a:ext cx="383479" cy="380228"/>
             </a:xfrm>
             <a:prstGeom prst="roundRect">
@@ -25427,7 +25425,7 @@
           </p:nvSpPr>
           <p:spPr>
             <a:xfrm>
-              <a:off x="8296297" y="4342287"/>
+              <a:off x="8296297" y="4326412"/>
               <a:ext cx="383479" cy="380228"/>
             </a:xfrm>
             <a:prstGeom prst="roundRect">
@@ -25552,7 +25550,7 @@
           </p:nvSpPr>
           <p:spPr>
             <a:xfrm>
-              <a:off x="6576328" y="4422186"/>
+              <a:off x="6576328" y="4406311"/>
               <a:ext cx="1965634" cy="230834"/>
             </a:xfrm>
             <a:prstGeom prst="rect">
@@ -25596,7 +25594,7 @@
           </p:nvSpPr>
           <p:spPr>
             <a:xfrm>
-              <a:off x="6385195" y="4741304"/>
+              <a:off x="6385195" y="4726064"/>
               <a:ext cx="2514330" cy="707886"/>
             </a:xfrm>
             <a:prstGeom prst="rect">
@@ -25688,7 +25686,7 @@
         </p:nvSpPr>
         <p:spPr>
           <a:xfrm>
-            <a:off x="6945137" y="1694192"/>
+            <a:off x="6948552" y="1694192"/>
             <a:ext cx="1082348" cy="338554"/>
           </a:xfrm>
           <a:prstGeom prst="rect">
@@ -26964,7 +26962,7 @@
             <p:cNvPr id="97" name="타원 96">
               <a:extLst>
                 <a:ext uri="{FF2B5EF4-FFF2-40B4-BE49-F238E27FC236}">
-                  <a16:creationId xmlns:a16="http://schemas.microsoft.com/office/drawing/2014/main" xmlns="" id="{2A6A11AC-31D1-C238-469B-B8065561C8B3}"/>
+                  <a16:creationId xmlns="" xmlns:a16="http://schemas.microsoft.com/office/drawing/2014/main" id="{2A6A11AC-31D1-C238-469B-B8065561C8B3}"/>
                 </a:ext>
               </a:extLst>
             </p:cNvPr>
@@ -27035,7 +27033,7 @@
             <p:cNvPr id="98" name="TextBox 97">
               <a:extLst>
                 <a:ext uri="{FF2B5EF4-FFF2-40B4-BE49-F238E27FC236}">
-                  <a16:creationId xmlns:a16="http://schemas.microsoft.com/office/drawing/2014/main" xmlns="" id="{370FDDD1-392F-C3F6-7926-8F5450602B51}"/>
+                  <a16:creationId xmlns="" xmlns:a16="http://schemas.microsoft.com/office/drawing/2014/main" id="{370FDDD1-392F-C3F6-7926-8F5450602B51}"/>
                 </a:ext>
               </a:extLst>
             </p:cNvPr>
@@ -27206,7 +27204,7 @@
             <p:cNvPr id="99" name="타원 98">
               <a:extLst>
                 <a:ext uri="{FF2B5EF4-FFF2-40B4-BE49-F238E27FC236}">
-                  <a16:creationId xmlns:a16="http://schemas.microsoft.com/office/drawing/2014/main" xmlns="" id="{8A596585-4EFC-7C6C-63D0-E577FBF1E255}"/>
+                  <a16:creationId xmlns="" xmlns:a16="http://schemas.microsoft.com/office/drawing/2014/main" id="{8A596585-4EFC-7C6C-63D0-E577FBF1E255}"/>
                 </a:ext>
               </a:extLst>
             </p:cNvPr>
@@ -27290,7 +27288,7 @@
             <p:cNvPr id="100" name="TextBox 99">
               <a:extLst>
                 <a:ext uri="{FF2B5EF4-FFF2-40B4-BE49-F238E27FC236}">
-                  <a16:creationId xmlns:a16="http://schemas.microsoft.com/office/drawing/2014/main" xmlns="" id="{A2DBD73D-1544-9997-4B5E-7BE89DA70BD5}"/>
+                  <a16:creationId xmlns="" xmlns:a16="http://schemas.microsoft.com/office/drawing/2014/main" id="{A2DBD73D-1544-9997-4B5E-7BE89DA70BD5}"/>
                 </a:ext>
               </a:extLst>
             </p:cNvPr>
@@ -27406,7 +27404,7 @@
             <p:cNvPr id="101" name="타원 100">
               <a:extLst>
                 <a:ext uri="{FF2B5EF4-FFF2-40B4-BE49-F238E27FC236}">
-                  <a16:creationId xmlns:a16="http://schemas.microsoft.com/office/drawing/2014/main" xmlns="" id="{D7536991-A61A-F58E-EC18-61A6F108717B}"/>
+                  <a16:creationId xmlns="" xmlns:a16="http://schemas.microsoft.com/office/drawing/2014/main" id="{D7536991-A61A-F58E-EC18-61A6F108717B}"/>
                 </a:ext>
               </a:extLst>
             </p:cNvPr>
@@ -27490,7 +27488,7 @@
             <p:cNvPr id="102" name="TextBox 101">
               <a:extLst>
                 <a:ext uri="{FF2B5EF4-FFF2-40B4-BE49-F238E27FC236}">
-                  <a16:creationId xmlns:a16="http://schemas.microsoft.com/office/drawing/2014/main" xmlns="" id="{688289CD-94AD-1B72-1500-6EAFBCF42BA0}"/>
+                  <a16:creationId xmlns="" xmlns:a16="http://schemas.microsoft.com/office/drawing/2014/main" id="{688289CD-94AD-1B72-1500-6EAFBCF42BA0}"/>
                 </a:ext>
               </a:extLst>
             </p:cNvPr>
@@ -27753,7 +27751,7 @@
             <p:cNvPr id="103" name="타원 102">
               <a:extLst>
                 <a:ext uri="{FF2B5EF4-FFF2-40B4-BE49-F238E27FC236}">
-                  <a16:creationId xmlns:a16="http://schemas.microsoft.com/office/drawing/2014/main" xmlns="" id="{F74DE22F-BE57-990F-10C7-5A28137FF97D}"/>
+                  <a16:creationId xmlns="" xmlns:a16="http://schemas.microsoft.com/office/drawing/2014/main" id="{F74DE22F-BE57-990F-10C7-5A28137FF97D}"/>
                 </a:ext>
               </a:extLst>
             </p:cNvPr>
@@ -27837,7 +27835,7 @@
             <p:cNvPr id="104" name="TextBox 103">
               <a:extLst>
                 <a:ext uri="{FF2B5EF4-FFF2-40B4-BE49-F238E27FC236}">
-                  <a16:creationId xmlns:a16="http://schemas.microsoft.com/office/drawing/2014/main" xmlns="" id="{2709A4DE-7D99-060B-4332-72EAE25DA559}"/>
+                  <a16:creationId xmlns="" xmlns:a16="http://schemas.microsoft.com/office/drawing/2014/main" id="{2709A4DE-7D99-060B-4332-72EAE25DA559}"/>
                 </a:ext>
               </a:extLst>
             </p:cNvPr>
@@ -28931,7 +28929,7 @@
             <p:cNvPr id="6" name="Picture 11" descr="Sandbox Software – In the Cloud | FortiSandbox Cloud">
               <a:extLst>
                 <a:ext uri="{FF2B5EF4-FFF2-40B4-BE49-F238E27FC236}">
-                  <a16:creationId xmlns="" xmlns:a16="http://schemas.microsoft.com/office/drawing/2014/main" id="{73BBF3D0-6B40-E280-BA30-1E77B5C4F45A}"/>
+                  <a16:creationId xmlns:a16="http://schemas.microsoft.com/office/drawing/2014/main" xmlns="" id="{73BBF3D0-6B40-E280-BA30-1E77B5C4F45A}"/>
                 </a:ext>
               </a:extLst>
             </p:cNvPr>
@@ -29049,7 +29047,7 @@
             <p:cNvPr id="7" name="Picture 8" descr="cost Icon - Free PNG &amp; SVG 930448 - Noun Project">
               <a:extLst>
                 <a:ext uri="{FF2B5EF4-FFF2-40B4-BE49-F238E27FC236}">
-                  <a16:creationId xmlns="" xmlns:a16="http://schemas.microsoft.com/office/drawing/2014/main" id="{B89FFE28-AD15-4FA1-FDD1-8DF6F4744923}"/>
+                  <a16:creationId xmlns:a16="http://schemas.microsoft.com/office/drawing/2014/main" xmlns="" id="{B89FFE28-AD15-4FA1-FDD1-8DF6F4744923}"/>
                 </a:ext>
               </a:extLst>
             </p:cNvPr>
@@ -29179,7 +29177,7 @@
             <p:cNvPr id="8" name="Picture 6" descr="Project Cargo Services | CFA">
               <a:extLst>
                 <a:ext uri="{FF2B5EF4-FFF2-40B4-BE49-F238E27FC236}">
-                  <a16:creationId xmlns="" xmlns:a16="http://schemas.microsoft.com/office/drawing/2014/main" id="{A9578F59-39A1-6B09-C1A4-24DA78C49B39}"/>
+                  <a16:creationId xmlns:a16="http://schemas.microsoft.com/office/drawing/2014/main" xmlns="" id="{A9578F59-39A1-6B09-C1A4-24DA78C49B39}"/>
                 </a:ext>
               </a:extLst>
             </p:cNvPr>

--- a/99ref/버티카_blog.pptx
+++ b/99ref/버티카_blog.pptx
@@ -5,7 +5,7 @@
     <p:sldMasterId id="2147483672" r:id="rId1"/>
   </p:sldMasterIdLst>
   <p:notesMasterIdLst>
-    <p:notesMasterId r:id="rId27"/>
+    <p:notesMasterId r:id="rId28"/>
   </p:notesMasterIdLst>
   <p:sldIdLst>
     <p:sldId id="268" r:id="rId2"/>
@@ -13,26 +13,27 @@
     <p:sldId id="257" r:id="rId4"/>
     <p:sldId id="262" r:id="rId5"/>
     <p:sldId id="259" r:id="rId6"/>
-    <p:sldId id="260" r:id="rId7"/>
-    <p:sldId id="269" r:id="rId8"/>
-    <p:sldId id="266" r:id="rId9"/>
-    <p:sldId id="283" r:id="rId10"/>
-    <p:sldId id="263" r:id="rId11"/>
-    <p:sldId id="264" r:id="rId12"/>
-    <p:sldId id="265" r:id="rId13"/>
-    <p:sldId id="270" r:id="rId14"/>
-    <p:sldId id="271" r:id="rId15"/>
-    <p:sldId id="282" r:id="rId16"/>
-    <p:sldId id="274" r:id="rId17"/>
-    <p:sldId id="272" r:id="rId18"/>
-    <p:sldId id="273" r:id="rId19"/>
-    <p:sldId id="275" r:id="rId20"/>
-    <p:sldId id="276" r:id="rId21"/>
-    <p:sldId id="277" r:id="rId22"/>
-    <p:sldId id="278" r:id="rId23"/>
-    <p:sldId id="279" r:id="rId24"/>
-    <p:sldId id="280" r:id="rId25"/>
-    <p:sldId id="281" r:id="rId26"/>
+    <p:sldId id="284" r:id="rId7"/>
+    <p:sldId id="260" r:id="rId8"/>
+    <p:sldId id="269" r:id="rId9"/>
+    <p:sldId id="266" r:id="rId10"/>
+    <p:sldId id="283" r:id="rId11"/>
+    <p:sldId id="263" r:id="rId12"/>
+    <p:sldId id="264" r:id="rId13"/>
+    <p:sldId id="265" r:id="rId14"/>
+    <p:sldId id="270" r:id="rId15"/>
+    <p:sldId id="271" r:id="rId16"/>
+    <p:sldId id="282" r:id="rId17"/>
+    <p:sldId id="274" r:id="rId18"/>
+    <p:sldId id="272" r:id="rId19"/>
+    <p:sldId id="273" r:id="rId20"/>
+    <p:sldId id="275" r:id="rId21"/>
+    <p:sldId id="276" r:id="rId22"/>
+    <p:sldId id="277" r:id="rId23"/>
+    <p:sldId id="278" r:id="rId24"/>
+    <p:sldId id="279" r:id="rId25"/>
+    <p:sldId id="280" r:id="rId26"/>
+    <p:sldId id="281" r:id="rId27"/>
   </p:sldIdLst>
   <p:sldSz cx="9720263" cy="8999538"/>
   <p:notesSz cx="6858000" cy="9144000"/>
@@ -235,7 +236,7 @@
           <a:p>
             <a:fld id="{69E94B31-9877-4AE9-B54F-895ACA0C6140}" type="datetimeFigureOut">
               <a:rPr lang="ko-KR" altLang="en-US" smtClean="0"/>
-              <a:t>2026-04-29</a:t>
+              <a:t>2026-04-30</a:t>
             </a:fld>
             <a:endParaRPr lang="ko-KR" altLang="en-US"/>
           </a:p>
@@ -568,7 +569,7 @@
           <a:p>
             <a:fld id="{C8D2AA42-8EDB-4A54-A102-9CFDB0A822F4}" type="slidenum">
               <a:rPr lang="ko-KR" altLang="en-US" smtClean="0"/>
-              <a:t>8</a:t>
+              <a:t>9</a:t>
             </a:fld>
             <a:endParaRPr lang="ko-KR" altLang="en-US"/>
           </a:p>
@@ -718,7 +719,7 @@
           <a:p>
             <a:fld id="{7BB46140-E90A-48B1-9E02-0E867CD1ADA8}" type="datetimeFigureOut">
               <a:rPr lang="ko-KR" altLang="en-US" smtClean="0"/>
-              <a:t>2026-04-29</a:t>
+              <a:t>2026-04-30</a:t>
             </a:fld>
             <a:endParaRPr lang="ko-KR" altLang="en-US"/>
           </a:p>
@@ -888,7 +889,7 @@
           <a:p>
             <a:fld id="{7BB46140-E90A-48B1-9E02-0E867CD1ADA8}" type="datetimeFigureOut">
               <a:rPr lang="ko-KR" altLang="en-US" smtClean="0"/>
-              <a:t>2026-04-29</a:t>
+              <a:t>2026-04-30</a:t>
             </a:fld>
             <a:endParaRPr lang="ko-KR" altLang="en-US"/>
           </a:p>
@@ -1068,7 +1069,7 @@
           <a:p>
             <a:fld id="{7BB46140-E90A-48B1-9E02-0E867CD1ADA8}" type="datetimeFigureOut">
               <a:rPr lang="ko-KR" altLang="en-US" smtClean="0"/>
-              <a:t>2026-04-29</a:t>
+              <a:t>2026-04-30</a:t>
             </a:fld>
             <a:endParaRPr lang="ko-KR" altLang="en-US"/>
           </a:p>
@@ -1238,7 +1239,7 @@
           <a:p>
             <a:fld id="{7BB46140-E90A-48B1-9E02-0E867CD1ADA8}" type="datetimeFigureOut">
               <a:rPr lang="ko-KR" altLang="en-US" smtClean="0"/>
-              <a:t>2026-04-29</a:t>
+              <a:t>2026-04-30</a:t>
             </a:fld>
             <a:endParaRPr lang="ko-KR" altLang="en-US"/>
           </a:p>
@@ -1482,7 +1483,7 @@
           <a:p>
             <a:fld id="{7BB46140-E90A-48B1-9E02-0E867CD1ADA8}" type="datetimeFigureOut">
               <a:rPr lang="ko-KR" altLang="en-US" smtClean="0"/>
-              <a:t>2026-04-29</a:t>
+              <a:t>2026-04-30</a:t>
             </a:fld>
             <a:endParaRPr lang="ko-KR" altLang="en-US"/>
           </a:p>
@@ -1714,7 +1715,7 @@
           <a:p>
             <a:fld id="{7BB46140-E90A-48B1-9E02-0E867CD1ADA8}" type="datetimeFigureOut">
               <a:rPr lang="ko-KR" altLang="en-US" smtClean="0"/>
-              <a:t>2026-04-29</a:t>
+              <a:t>2026-04-30</a:t>
             </a:fld>
             <a:endParaRPr lang="ko-KR" altLang="en-US"/>
           </a:p>
@@ -2081,7 +2082,7 @@
           <a:p>
             <a:fld id="{7BB46140-E90A-48B1-9E02-0E867CD1ADA8}" type="datetimeFigureOut">
               <a:rPr lang="ko-KR" altLang="en-US" smtClean="0"/>
-              <a:t>2026-04-29</a:t>
+              <a:t>2026-04-30</a:t>
             </a:fld>
             <a:endParaRPr lang="ko-KR" altLang="en-US"/>
           </a:p>
@@ -2199,7 +2200,7 @@
           <a:p>
             <a:fld id="{7BB46140-E90A-48B1-9E02-0E867CD1ADA8}" type="datetimeFigureOut">
               <a:rPr lang="ko-KR" altLang="en-US" smtClean="0"/>
-              <a:t>2026-04-29</a:t>
+              <a:t>2026-04-30</a:t>
             </a:fld>
             <a:endParaRPr lang="ko-KR" altLang="en-US"/>
           </a:p>
@@ -2294,7 +2295,7 @@
           <a:p>
             <a:fld id="{7BB46140-E90A-48B1-9E02-0E867CD1ADA8}" type="datetimeFigureOut">
               <a:rPr lang="ko-KR" altLang="en-US" smtClean="0"/>
-              <a:t>2026-04-29</a:t>
+              <a:t>2026-04-30</a:t>
             </a:fld>
             <a:endParaRPr lang="ko-KR" altLang="en-US"/>
           </a:p>
@@ -2571,7 +2572,7 @@
           <a:p>
             <a:fld id="{7BB46140-E90A-48B1-9E02-0E867CD1ADA8}" type="datetimeFigureOut">
               <a:rPr lang="ko-KR" altLang="en-US" smtClean="0"/>
-              <a:t>2026-04-29</a:t>
+              <a:t>2026-04-30</a:t>
             </a:fld>
             <a:endParaRPr lang="ko-KR" altLang="en-US"/>
           </a:p>
@@ -2828,7 +2829,7 @@
           <a:p>
             <a:fld id="{7BB46140-E90A-48B1-9E02-0E867CD1ADA8}" type="datetimeFigureOut">
               <a:rPr lang="ko-KR" altLang="en-US" smtClean="0"/>
-              <a:t>2026-04-29</a:t>
+              <a:t>2026-04-30</a:t>
             </a:fld>
             <a:endParaRPr lang="ko-KR" altLang="en-US"/>
           </a:p>
@@ -3041,7 +3042,7 @@
           <a:p>
             <a:fld id="{7BB46140-E90A-48B1-9E02-0E867CD1ADA8}" type="datetimeFigureOut">
               <a:rPr lang="ko-KR" altLang="en-US" smtClean="0"/>
-              <a:t>2026-04-29</a:t>
+              <a:t>2026-04-30</a:t>
             </a:fld>
             <a:endParaRPr lang="ko-KR" altLang="en-US"/>
           </a:p>
@@ -3586,7 +3587,7 @@
                 </a:solidFill>
                 <a:latin typeface="+mn-ea"/>
               </a:rPr>
-              <a:t>User</a:t>
+              <a:t>Schema</a:t>
             </a:r>
             <a:endParaRPr lang="ko-KR" altLang="en-US" sz="1600" b="1" dirty="0">
               <a:solidFill>
@@ -3608,7 +3609,7 @@
         <p:spPr>
           <a:xfrm>
             <a:off x="301171" y="422730"/>
-            <a:ext cx="9312729" cy="357414"/>
+            <a:ext cx="9312729" cy="878532"/>
           </a:xfrm>
           <a:prstGeom prst="rect">
             <a:avLst/>
@@ -3694,7 +3695,7 @@
     </p:spTree>
     <p:extLst>
       <p:ext uri="{BB962C8B-B14F-4D97-AF65-F5344CB8AC3E}">
-        <p14:creationId xmlns:p14="http://schemas.microsoft.com/office/powerpoint/2010/main" val="1784995460"/>
+        <p14:creationId xmlns:p14="http://schemas.microsoft.com/office/powerpoint/2010/main" val="1622312844"/>
       </p:ext>
     </p:extLst>
   </p:cSld>
@@ -3776,7 +3777,7 @@
                 </a:solidFill>
                 <a:latin typeface="+mn-ea"/>
               </a:rPr>
-              <a:t>Profile</a:t>
+              <a:t>User</a:t>
             </a:r>
             <a:endParaRPr lang="ko-KR" altLang="en-US" sz="1600" b="1" dirty="0">
               <a:solidFill>
@@ -3884,7 +3885,7 @@
     </p:spTree>
     <p:extLst>
       <p:ext uri="{BB962C8B-B14F-4D97-AF65-F5344CB8AC3E}">
-        <p14:creationId xmlns:p14="http://schemas.microsoft.com/office/powerpoint/2010/main" val="1171376132"/>
+        <p14:creationId xmlns:p14="http://schemas.microsoft.com/office/powerpoint/2010/main" val="1784995460"/>
       </p:ext>
     </p:extLst>
   </p:cSld>
@@ -3966,7 +3967,7 @@
                 </a:solidFill>
                 <a:latin typeface="+mn-ea"/>
               </a:rPr>
-              <a:t>Resource Pool</a:t>
+              <a:t>Profile</a:t>
             </a:r>
             <a:endParaRPr lang="ko-KR" altLang="en-US" sz="1600" b="1" dirty="0">
               <a:solidFill>
@@ -4074,7 +4075,7 @@
     </p:spTree>
     <p:extLst>
       <p:ext uri="{BB962C8B-B14F-4D97-AF65-F5344CB8AC3E}">
-        <p14:creationId xmlns:p14="http://schemas.microsoft.com/office/powerpoint/2010/main" val="1177542108"/>
+        <p14:creationId xmlns:p14="http://schemas.microsoft.com/office/powerpoint/2010/main" val="1171376132"/>
       </p:ext>
     </p:extLst>
   </p:cSld>
@@ -4156,7 +4157,7 @@
                 </a:solidFill>
                 <a:latin typeface="+mn-ea"/>
               </a:rPr>
-              <a:t>Privilege</a:t>
+              <a:t>Resource Pool</a:t>
             </a:r>
             <a:endParaRPr lang="ko-KR" altLang="en-US" sz="1600" b="1" dirty="0">
               <a:solidFill>
@@ -4264,7 +4265,7 @@
     </p:spTree>
     <p:extLst>
       <p:ext uri="{BB962C8B-B14F-4D97-AF65-F5344CB8AC3E}">
-        <p14:creationId xmlns:p14="http://schemas.microsoft.com/office/powerpoint/2010/main" val="1515068041"/>
+        <p14:creationId xmlns:p14="http://schemas.microsoft.com/office/powerpoint/2010/main" val="1177542108"/>
       </p:ext>
     </p:extLst>
   </p:cSld>
@@ -4346,6 +4347,196 @@
                 </a:solidFill>
                 <a:latin typeface="+mn-ea"/>
               </a:rPr>
+              <a:t>Privilege</a:t>
+            </a:r>
+            <a:endParaRPr lang="ko-KR" altLang="en-US" sz="1600" b="1" dirty="0">
+              <a:solidFill>
+                <a:schemeClr val="accent1">
+                  <a:lumMod val="75000"/>
+                </a:schemeClr>
+              </a:solidFill>
+              <a:latin typeface="+mn-ea"/>
+            </a:endParaRPr>
+          </a:p>
+        </p:txBody>
+      </p:sp>
+      <p:sp>
+        <p:nvSpPr>
+          <p:cNvPr id="89" name="직사각형 88"/>
+          <p:cNvSpPr/>
+          <p:nvPr/>
+        </p:nvSpPr>
+        <p:spPr>
+          <a:xfrm>
+            <a:off x="301171" y="422730"/>
+            <a:ext cx="9312729" cy="357414"/>
+          </a:xfrm>
+          <a:prstGeom prst="rect">
+            <a:avLst/>
+          </a:prstGeom>
+          <a:noFill/>
+          <a:ln>
+            <a:noFill/>
+          </a:ln>
+        </p:spPr>
+        <p:style>
+          <a:lnRef idx="2">
+            <a:schemeClr val="accent1">
+              <a:shade val="50000"/>
+            </a:schemeClr>
+          </a:lnRef>
+          <a:fillRef idx="1">
+            <a:schemeClr val="accent1"/>
+          </a:fillRef>
+          <a:effectRef idx="0">
+            <a:schemeClr val="accent1"/>
+          </a:effectRef>
+          <a:fontRef idx="minor">
+            <a:schemeClr val="lt1"/>
+          </a:fontRef>
+        </p:style>
+        <p:txBody>
+          <a:bodyPr rtlCol="0" anchor="ctr"/>
+          <a:lstStyle/>
+          <a:p>
+            <a:r>
+              <a:rPr lang="en-US" altLang="ko-KR" sz="1400" dirty="0" smtClean="0">
+                <a:solidFill>
+                  <a:schemeClr val="tx1"/>
+                </a:solidFill>
+                <a:latin typeface="+mn-ea"/>
+              </a:rPr>
+              <a:t>xxx</a:t>
+            </a:r>
+            <a:endParaRPr lang="en-US" altLang="ko-KR" sz="1400" dirty="0">
+              <a:solidFill>
+                <a:schemeClr val="tx1"/>
+              </a:solidFill>
+              <a:latin typeface="+mn-ea"/>
+            </a:endParaRPr>
+          </a:p>
+        </p:txBody>
+      </p:sp>
+      <p:cxnSp>
+        <p:nvCxnSpPr>
+          <p:cNvPr id="90" name="직선 연결선 89"/>
+          <p:cNvCxnSpPr/>
+          <p:nvPr/>
+        </p:nvCxnSpPr>
+        <p:spPr>
+          <a:xfrm flipV="1">
+            <a:off x="215900" y="469900"/>
+            <a:ext cx="9156700" cy="0"/>
+          </a:xfrm>
+          <a:prstGeom prst="line">
+            <a:avLst/>
+          </a:prstGeom>
+          <a:ln w="19050">
+            <a:solidFill>
+              <a:schemeClr val="accent1"/>
+            </a:solidFill>
+          </a:ln>
+        </p:spPr>
+        <p:style>
+          <a:lnRef idx="1">
+            <a:schemeClr val="accent1"/>
+          </a:lnRef>
+          <a:fillRef idx="0">
+            <a:schemeClr val="accent1"/>
+          </a:fillRef>
+          <a:effectRef idx="0">
+            <a:schemeClr val="accent1"/>
+          </a:effectRef>
+          <a:fontRef idx="minor">
+            <a:schemeClr val="tx1"/>
+          </a:fontRef>
+        </p:style>
+      </p:cxnSp>
+    </p:spTree>
+    <p:extLst>
+      <p:ext uri="{BB962C8B-B14F-4D97-AF65-F5344CB8AC3E}">
+        <p14:creationId xmlns:p14="http://schemas.microsoft.com/office/powerpoint/2010/main" val="1515068041"/>
+      </p:ext>
+    </p:extLst>
+  </p:cSld>
+  <p:clrMapOvr>
+    <a:masterClrMapping/>
+  </p:clrMapOvr>
+  <p:timing>
+    <p:tnLst>
+      <p:par>
+        <p:cTn id="1" dur="indefinite" restart="never" nodeType="tmRoot"/>
+      </p:par>
+    </p:tnLst>
+  </p:timing>
+</p:sld>
+</file>
+
+<file path=ppt/slides/slide15.xml><?xml version="1.0" encoding="utf-8"?>
+<p:sld xmlns:a="http://schemas.openxmlformats.org/drawingml/2006/main" xmlns:r="http://schemas.openxmlformats.org/officeDocument/2006/relationships" xmlns:p="http://schemas.openxmlformats.org/presentationml/2006/main">
+  <p:cSld>
+    <p:spTree>
+      <p:nvGrpSpPr>
+        <p:cNvPr id="1" name=""/>
+        <p:cNvGrpSpPr/>
+        <p:nvPr/>
+      </p:nvGrpSpPr>
+      <p:grpSpPr>
+        <a:xfrm>
+          <a:off x="0" y="0"/>
+          <a:ext cx="0" cy="0"/>
+          <a:chOff x="0" y="0"/>
+          <a:chExt cx="0" cy="0"/>
+        </a:xfrm>
+      </p:grpSpPr>
+      <p:sp>
+        <p:nvSpPr>
+          <p:cNvPr id="88" name="직사각형 87"/>
+          <p:cNvSpPr/>
+          <p:nvPr/>
+        </p:nvSpPr>
+        <p:spPr>
+          <a:xfrm>
+            <a:off x="152400" y="125187"/>
+            <a:ext cx="2667000" cy="312964"/>
+          </a:xfrm>
+          <a:prstGeom prst="rect">
+            <a:avLst/>
+          </a:prstGeom>
+          <a:noFill/>
+          <a:ln>
+            <a:noFill/>
+          </a:ln>
+        </p:spPr>
+        <p:style>
+          <a:lnRef idx="2">
+            <a:schemeClr val="accent1">
+              <a:shade val="50000"/>
+            </a:schemeClr>
+          </a:lnRef>
+          <a:fillRef idx="1">
+            <a:schemeClr val="accent1"/>
+          </a:fillRef>
+          <a:effectRef idx="0">
+            <a:schemeClr val="accent1"/>
+          </a:effectRef>
+          <a:fontRef idx="minor">
+            <a:schemeClr val="lt1"/>
+          </a:fontRef>
+        </p:style>
+        <p:txBody>
+          <a:bodyPr rtlCol="0" anchor="ctr"/>
+          <a:lstStyle/>
+          <a:p>
+            <a:r>
+              <a:rPr lang="en-US" altLang="ko-KR" sz="1600" b="1" dirty="0" smtClean="0">
+                <a:solidFill>
+                  <a:schemeClr val="accent1">
+                    <a:lumMod val="75000"/>
+                  </a:schemeClr>
+                </a:solidFill>
+                <a:latin typeface="+mn-ea"/>
+              </a:rPr>
               <a:t>Backup / Restore</a:t>
             </a:r>
             <a:endParaRPr lang="ko-KR" altLang="en-US" sz="1600" b="1" dirty="0">
@@ -4471,7 +4662,7 @@
 </p:sld>
 </file>
 
-<file path=ppt/slides/slide15.xml><?xml version="1.0" encoding="utf-8"?>
+<file path=ppt/slides/slide16.xml><?xml version="1.0" encoding="utf-8"?>
 <p:sld xmlns:a="http://schemas.openxmlformats.org/drawingml/2006/main" xmlns:r="http://schemas.openxmlformats.org/officeDocument/2006/relationships" xmlns:p="http://schemas.openxmlformats.org/presentationml/2006/main">
   <p:cSld>
     <p:spTree>
@@ -5012,7 +5203,7 @@
 </p:sld>
 </file>
 
-<file path=ppt/slides/slide16.xml><?xml version="1.0" encoding="utf-8"?>
+<file path=ppt/slides/slide17.xml><?xml version="1.0" encoding="utf-8"?>
 <p:sld xmlns:a="http://schemas.openxmlformats.org/drawingml/2006/main" xmlns:r="http://schemas.openxmlformats.org/officeDocument/2006/relationships" xmlns:p="http://schemas.openxmlformats.org/presentationml/2006/main">
   <p:cSld>
     <p:spTree>
@@ -5093,196 +5284,6 @@
     <p:extLst>
       <p:ext uri="{BB962C8B-B14F-4D97-AF65-F5344CB8AC3E}">
         <p14:creationId xmlns:p14="http://schemas.microsoft.com/office/powerpoint/2010/main" val="3681055818"/>
-      </p:ext>
-    </p:extLst>
-  </p:cSld>
-  <p:clrMapOvr>
-    <a:masterClrMapping/>
-  </p:clrMapOvr>
-  <p:timing>
-    <p:tnLst>
-      <p:par>
-        <p:cTn id="1" dur="indefinite" restart="never" nodeType="tmRoot"/>
-      </p:par>
-    </p:tnLst>
-  </p:timing>
-</p:sld>
-</file>
-
-<file path=ppt/slides/slide17.xml><?xml version="1.0" encoding="utf-8"?>
-<p:sld xmlns:a="http://schemas.openxmlformats.org/drawingml/2006/main" xmlns:r="http://schemas.openxmlformats.org/officeDocument/2006/relationships" xmlns:p="http://schemas.openxmlformats.org/presentationml/2006/main">
-  <p:cSld>
-    <p:spTree>
-      <p:nvGrpSpPr>
-        <p:cNvPr id="1" name=""/>
-        <p:cNvGrpSpPr/>
-        <p:nvPr/>
-      </p:nvGrpSpPr>
-      <p:grpSpPr>
-        <a:xfrm>
-          <a:off x="0" y="0"/>
-          <a:ext cx="0" cy="0"/>
-          <a:chOff x="0" y="0"/>
-          <a:chExt cx="0" cy="0"/>
-        </a:xfrm>
-      </p:grpSpPr>
-      <p:sp>
-        <p:nvSpPr>
-          <p:cNvPr id="88" name="직사각형 87"/>
-          <p:cNvSpPr/>
-          <p:nvPr/>
-        </p:nvSpPr>
-        <p:spPr>
-          <a:xfrm>
-            <a:off x="152400" y="125187"/>
-            <a:ext cx="2667000" cy="312964"/>
-          </a:xfrm>
-          <a:prstGeom prst="rect">
-            <a:avLst/>
-          </a:prstGeom>
-          <a:noFill/>
-          <a:ln>
-            <a:noFill/>
-          </a:ln>
-        </p:spPr>
-        <p:style>
-          <a:lnRef idx="2">
-            <a:schemeClr val="accent1">
-              <a:shade val="50000"/>
-            </a:schemeClr>
-          </a:lnRef>
-          <a:fillRef idx="1">
-            <a:schemeClr val="accent1"/>
-          </a:fillRef>
-          <a:effectRef idx="0">
-            <a:schemeClr val="accent1"/>
-          </a:effectRef>
-          <a:fontRef idx="minor">
-            <a:schemeClr val="lt1"/>
-          </a:fontRef>
-        </p:style>
-        <p:txBody>
-          <a:bodyPr rtlCol="0" anchor="ctr"/>
-          <a:lstStyle/>
-          <a:p>
-            <a:r>
-              <a:rPr lang="en-US" altLang="ko-KR" sz="1600" b="1" dirty="0" err="1" smtClean="0">
-                <a:solidFill>
-                  <a:schemeClr val="accent1">
-                    <a:lumMod val="75000"/>
-                  </a:schemeClr>
-                </a:solidFill>
-                <a:latin typeface="+mn-ea"/>
-              </a:rPr>
-              <a:t>vsql</a:t>
-            </a:r>
-            <a:endParaRPr lang="ko-KR" altLang="en-US" sz="1600" b="1" dirty="0">
-              <a:solidFill>
-                <a:schemeClr val="accent1">
-                  <a:lumMod val="75000"/>
-                </a:schemeClr>
-              </a:solidFill>
-              <a:latin typeface="+mn-ea"/>
-            </a:endParaRPr>
-          </a:p>
-        </p:txBody>
-      </p:sp>
-      <p:sp>
-        <p:nvSpPr>
-          <p:cNvPr id="89" name="직사각형 88"/>
-          <p:cNvSpPr/>
-          <p:nvPr/>
-        </p:nvSpPr>
-        <p:spPr>
-          <a:xfrm>
-            <a:off x="301171" y="422730"/>
-            <a:ext cx="9312729" cy="357414"/>
-          </a:xfrm>
-          <a:prstGeom prst="rect">
-            <a:avLst/>
-          </a:prstGeom>
-          <a:noFill/>
-          <a:ln>
-            <a:noFill/>
-          </a:ln>
-        </p:spPr>
-        <p:style>
-          <a:lnRef idx="2">
-            <a:schemeClr val="accent1">
-              <a:shade val="50000"/>
-            </a:schemeClr>
-          </a:lnRef>
-          <a:fillRef idx="1">
-            <a:schemeClr val="accent1"/>
-          </a:fillRef>
-          <a:effectRef idx="0">
-            <a:schemeClr val="accent1"/>
-          </a:effectRef>
-          <a:fontRef idx="minor">
-            <a:schemeClr val="lt1"/>
-          </a:fontRef>
-        </p:style>
-        <p:txBody>
-          <a:bodyPr rtlCol="0" anchor="ctr"/>
-          <a:lstStyle/>
-          <a:p>
-            <a:r>
-              <a:rPr lang="en-US" altLang="ko-KR" sz="1400" dirty="0" smtClean="0">
-                <a:solidFill>
-                  <a:schemeClr val="tx1"/>
-                </a:solidFill>
-                <a:latin typeface="+mn-ea"/>
-              </a:rPr>
-              <a:t>xxx</a:t>
-            </a:r>
-            <a:endParaRPr lang="en-US" altLang="ko-KR" sz="1400" dirty="0">
-              <a:solidFill>
-                <a:schemeClr val="tx1"/>
-              </a:solidFill>
-              <a:latin typeface="+mn-ea"/>
-            </a:endParaRPr>
-          </a:p>
-        </p:txBody>
-      </p:sp>
-      <p:cxnSp>
-        <p:nvCxnSpPr>
-          <p:cNvPr id="90" name="직선 연결선 89"/>
-          <p:cNvCxnSpPr/>
-          <p:nvPr/>
-        </p:nvCxnSpPr>
-        <p:spPr>
-          <a:xfrm flipV="1">
-            <a:off x="215900" y="469900"/>
-            <a:ext cx="9156700" cy="0"/>
-          </a:xfrm>
-          <a:prstGeom prst="line">
-            <a:avLst/>
-          </a:prstGeom>
-          <a:ln w="19050">
-            <a:solidFill>
-              <a:schemeClr val="accent1"/>
-            </a:solidFill>
-          </a:ln>
-        </p:spPr>
-        <p:style>
-          <a:lnRef idx="1">
-            <a:schemeClr val="accent1"/>
-          </a:lnRef>
-          <a:fillRef idx="0">
-            <a:schemeClr val="accent1"/>
-          </a:fillRef>
-          <a:effectRef idx="0">
-            <a:schemeClr val="accent1"/>
-          </a:effectRef>
-          <a:fontRef idx="minor">
-            <a:schemeClr val="tx1"/>
-          </a:fontRef>
-        </p:style>
-      </p:cxnSp>
-    </p:spTree>
-    <p:extLst>
-      <p:ext uri="{BB962C8B-B14F-4D97-AF65-F5344CB8AC3E}">
-        <p14:creationId xmlns:p14="http://schemas.microsoft.com/office/powerpoint/2010/main" val="3480977301"/>
       </p:ext>
     </p:extLst>
   </p:cSld>
@@ -5356,7 +5357,7 @@
           <a:lstStyle/>
           <a:p>
             <a:r>
-              <a:rPr lang="en-US" altLang="ko-KR" sz="1600" b="1" dirty="0" smtClean="0">
+              <a:rPr lang="en-US" altLang="ko-KR" sz="1600" b="1" dirty="0" err="1" smtClean="0">
                 <a:solidFill>
                   <a:schemeClr val="accent1">
                     <a:lumMod val="75000"/>
@@ -5364,7 +5365,7 @@
                 </a:solidFill>
                 <a:latin typeface="+mn-ea"/>
               </a:rPr>
-              <a:t>Copy</a:t>
+              <a:t>vsql</a:t>
             </a:r>
             <a:endParaRPr lang="ko-KR" altLang="en-US" sz="1600" b="1" dirty="0">
               <a:solidFill>
@@ -5472,7 +5473,7 @@
     </p:spTree>
     <p:extLst>
       <p:ext uri="{BB962C8B-B14F-4D97-AF65-F5344CB8AC3E}">
-        <p14:creationId xmlns:p14="http://schemas.microsoft.com/office/powerpoint/2010/main" val="3028978472"/>
+        <p14:creationId xmlns:p14="http://schemas.microsoft.com/office/powerpoint/2010/main" val="3480977301"/>
       </p:ext>
     </p:extLst>
   </p:cSld>
@@ -5554,7 +5555,7 @@
                 </a:solidFill>
                 <a:latin typeface="+mn-ea"/>
               </a:rPr>
-              <a:t>Export</a:t>
+              <a:t>Copy</a:t>
             </a:r>
             <a:endParaRPr lang="ko-KR" altLang="en-US" sz="1600" b="1" dirty="0">
               <a:solidFill>
@@ -5662,7 +5663,7 @@
     </p:spTree>
     <p:extLst>
       <p:ext uri="{BB962C8B-B14F-4D97-AF65-F5344CB8AC3E}">
-        <p14:creationId xmlns:p14="http://schemas.microsoft.com/office/powerpoint/2010/main" val="1891172521"/>
+        <p14:creationId xmlns:p14="http://schemas.microsoft.com/office/powerpoint/2010/main" val="3028978472"/>
       </p:ext>
     </p:extLst>
   </p:cSld>
@@ -16979,6 +16980,196 @@
       </p:grpSpPr>
       <p:sp>
         <p:nvSpPr>
+          <p:cNvPr id="88" name="직사각형 87"/>
+          <p:cNvSpPr/>
+          <p:nvPr/>
+        </p:nvSpPr>
+        <p:spPr>
+          <a:xfrm>
+            <a:off x="152400" y="125187"/>
+            <a:ext cx="2667000" cy="312964"/>
+          </a:xfrm>
+          <a:prstGeom prst="rect">
+            <a:avLst/>
+          </a:prstGeom>
+          <a:noFill/>
+          <a:ln>
+            <a:noFill/>
+          </a:ln>
+        </p:spPr>
+        <p:style>
+          <a:lnRef idx="2">
+            <a:schemeClr val="accent1">
+              <a:shade val="50000"/>
+            </a:schemeClr>
+          </a:lnRef>
+          <a:fillRef idx="1">
+            <a:schemeClr val="accent1"/>
+          </a:fillRef>
+          <a:effectRef idx="0">
+            <a:schemeClr val="accent1"/>
+          </a:effectRef>
+          <a:fontRef idx="minor">
+            <a:schemeClr val="lt1"/>
+          </a:fontRef>
+        </p:style>
+        <p:txBody>
+          <a:bodyPr rtlCol="0" anchor="ctr"/>
+          <a:lstStyle/>
+          <a:p>
+            <a:r>
+              <a:rPr lang="en-US" altLang="ko-KR" sz="1600" b="1" dirty="0" smtClean="0">
+                <a:solidFill>
+                  <a:schemeClr val="accent1">
+                    <a:lumMod val="75000"/>
+                  </a:schemeClr>
+                </a:solidFill>
+                <a:latin typeface="+mn-ea"/>
+              </a:rPr>
+              <a:t>Export</a:t>
+            </a:r>
+            <a:endParaRPr lang="ko-KR" altLang="en-US" sz="1600" b="1" dirty="0">
+              <a:solidFill>
+                <a:schemeClr val="accent1">
+                  <a:lumMod val="75000"/>
+                </a:schemeClr>
+              </a:solidFill>
+              <a:latin typeface="+mn-ea"/>
+            </a:endParaRPr>
+          </a:p>
+        </p:txBody>
+      </p:sp>
+      <p:sp>
+        <p:nvSpPr>
+          <p:cNvPr id="89" name="직사각형 88"/>
+          <p:cNvSpPr/>
+          <p:nvPr/>
+        </p:nvSpPr>
+        <p:spPr>
+          <a:xfrm>
+            <a:off x="301171" y="422730"/>
+            <a:ext cx="9312729" cy="357414"/>
+          </a:xfrm>
+          <a:prstGeom prst="rect">
+            <a:avLst/>
+          </a:prstGeom>
+          <a:noFill/>
+          <a:ln>
+            <a:noFill/>
+          </a:ln>
+        </p:spPr>
+        <p:style>
+          <a:lnRef idx="2">
+            <a:schemeClr val="accent1">
+              <a:shade val="50000"/>
+            </a:schemeClr>
+          </a:lnRef>
+          <a:fillRef idx="1">
+            <a:schemeClr val="accent1"/>
+          </a:fillRef>
+          <a:effectRef idx="0">
+            <a:schemeClr val="accent1"/>
+          </a:effectRef>
+          <a:fontRef idx="minor">
+            <a:schemeClr val="lt1"/>
+          </a:fontRef>
+        </p:style>
+        <p:txBody>
+          <a:bodyPr rtlCol="0" anchor="ctr"/>
+          <a:lstStyle/>
+          <a:p>
+            <a:r>
+              <a:rPr lang="en-US" altLang="ko-KR" sz="1400" dirty="0" smtClean="0">
+                <a:solidFill>
+                  <a:schemeClr val="tx1"/>
+                </a:solidFill>
+                <a:latin typeface="+mn-ea"/>
+              </a:rPr>
+              <a:t>xxx</a:t>
+            </a:r>
+            <a:endParaRPr lang="en-US" altLang="ko-KR" sz="1400" dirty="0">
+              <a:solidFill>
+                <a:schemeClr val="tx1"/>
+              </a:solidFill>
+              <a:latin typeface="+mn-ea"/>
+            </a:endParaRPr>
+          </a:p>
+        </p:txBody>
+      </p:sp>
+      <p:cxnSp>
+        <p:nvCxnSpPr>
+          <p:cNvPr id="90" name="직선 연결선 89"/>
+          <p:cNvCxnSpPr/>
+          <p:nvPr/>
+        </p:nvCxnSpPr>
+        <p:spPr>
+          <a:xfrm flipV="1">
+            <a:off x="215900" y="469900"/>
+            <a:ext cx="9156700" cy="0"/>
+          </a:xfrm>
+          <a:prstGeom prst="line">
+            <a:avLst/>
+          </a:prstGeom>
+          <a:ln w="19050">
+            <a:solidFill>
+              <a:schemeClr val="accent1"/>
+            </a:solidFill>
+          </a:ln>
+        </p:spPr>
+        <p:style>
+          <a:lnRef idx="1">
+            <a:schemeClr val="accent1"/>
+          </a:lnRef>
+          <a:fillRef idx="0">
+            <a:schemeClr val="accent1"/>
+          </a:fillRef>
+          <a:effectRef idx="0">
+            <a:schemeClr val="accent1"/>
+          </a:effectRef>
+          <a:fontRef idx="minor">
+            <a:schemeClr val="tx1"/>
+          </a:fontRef>
+        </p:style>
+      </p:cxnSp>
+    </p:spTree>
+    <p:extLst>
+      <p:ext uri="{BB962C8B-B14F-4D97-AF65-F5344CB8AC3E}">
+        <p14:creationId xmlns:p14="http://schemas.microsoft.com/office/powerpoint/2010/main" val="1891172521"/>
+      </p:ext>
+    </p:extLst>
+  </p:cSld>
+  <p:clrMapOvr>
+    <a:masterClrMapping/>
+  </p:clrMapOvr>
+  <p:timing>
+    <p:tnLst>
+      <p:par>
+        <p:cTn id="1" dur="indefinite" restart="never" nodeType="tmRoot"/>
+      </p:par>
+    </p:tnLst>
+  </p:timing>
+</p:sld>
+</file>
+
+<file path=ppt/slides/slide21.xml><?xml version="1.0" encoding="utf-8"?>
+<p:sld xmlns:a="http://schemas.openxmlformats.org/drawingml/2006/main" xmlns:r="http://schemas.openxmlformats.org/officeDocument/2006/relationships" xmlns:p="http://schemas.openxmlformats.org/presentationml/2006/main">
+  <p:cSld>
+    <p:spTree>
+      <p:nvGrpSpPr>
+        <p:cNvPr id="1" name=""/>
+        <p:cNvGrpSpPr/>
+        <p:nvPr/>
+      </p:nvGrpSpPr>
+      <p:grpSpPr>
+        <a:xfrm>
+          <a:off x="0" y="0"/>
+          <a:ext cx="0" cy="0"/>
+          <a:chOff x="0" y="0"/>
+          <a:chExt cx="0" cy="0"/>
+        </a:xfrm>
+      </p:grpSpPr>
+      <p:sp>
+        <p:nvSpPr>
           <p:cNvPr id="89" name="직사각형 88"/>
           <p:cNvSpPr/>
           <p:nvPr/>
@@ -17052,7 +17243,7 @@
 </p:sld>
 </file>
 
-<file path=ppt/slides/slide21.xml><?xml version="1.0" encoding="utf-8"?>
+<file path=ppt/slides/slide22.xml><?xml version="1.0" encoding="utf-8"?>
 <p:sld xmlns:a="http://schemas.openxmlformats.org/drawingml/2006/main" xmlns:r="http://schemas.openxmlformats.org/officeDocument/2006/relationships" xmlns:p="http://schemas.openxmlformats.org/presentationml/2006/main">
   <p:cSld>
     <p:spTree>
@@ -17242,7 +17433,7 @@
 </p:sld>
 </file>
 
-<file path=ppt/slides/slide22.xml><?xml version="1.0" encoding="utf-8"?>
+<file path=ppt/slides/slide23.xml><?xml version="1.0" encoding="utf-8"?>
 <p:sld xmlns:a="http://schemas.openxmlformats.org/drawingml/2006/main" xmlns:r="http://schemas.openxmlformats.org/officeDocument/2006/relationships" xmlns:p="http://schemas.openxmlformats.org/presentationml/2006/main">
   <p:cSld>
     <p:spTree>
@@ -17604,7 +17795,7 @@
 </p:sld>
 </file>
 
-<file path=ppt/slides/slide23.xml><?xml version="1.0" encoding="utf-8"?>
+<file path=ppt/slides/slide24.xml><?xml version="1.0" encoding="utf-8"?>
 <p:sld xmlns:a="http://schemas.openxmlformats.org/drawingml/2006/main" xmlns:r="http://schemas.openxmlformats.org/officeDocument/2006/relationships" xmlns:p="http://schemas.openxmlformats.org/presentationml/2006/main">
   <p:cSld>
     <p:spTree>
@@ -17794,7 +17985,7 @@
 </p:sld>
 </file>
 
-<file path=ppt/slides/slide24.xml><?xml version="1.0" encoding="utf-8"?>
+<file path=ppt/slides/slide25.xml><?xml version="1.0" encoding="utf-8"?>
 <p:sld xmlns:a="http://schemas.openxmlformats.org/drawingml/2006/main" xmlns:r="http://schemas.openxmlformats.org/officeDocument/2006/relationships" xmlns:p="http://schemas.openxmlformats.org/presentationml/2006/main">
   <p:cSld>
     <p:spTree>
@@ -17886,7 +18077,7 @@
 </p:sld>
 </file>
 
-<file path=ppt/slides/slide25.xml><?xml version="1.0" encoding="utf-8"?>
+<file path=ppt/slides/slide26.xml><?xml version="1.0" encoding="utf-8"?>
 <p:sld xmlns:a="http://schemas.openxmlformats.org/drawingml/2006/main" xmlns:r="http://schemas.openxmlformats.org/officeDocument/2006/relationships" xmlns:p="http://schemas.openxmlformats.org/presentationml/2006/main">
   <p:cSld>
     <p:spTree>
@@ -18209,7 +18400,7 @@
           <p:cNvPr id="5" name="그림 4">
             <a:extLst>
               <a:ext uri="{FF2B5EF4-FFF2-40B4-BE49-F238E27FC236}">
-                <a16:creationId xmlns:a16="http://schemas.microsoft.com/office/drawing/2014/main" xmlns="" id="{F25A3B3A-32C8-4401-A476-E8CCEB3258D5}"/>
+                <a16:creationId xmlns="" xmlns:a16="http://schemas.microsoft.com/office/drawing/2014/main" id="{F25A3B3A-32C8-4401-A476-E8CCEB3258D5}"/>
               </a:ext>
             </a:extLst>
           </p:cNvPr>
@@ -18252,7 +18443,7 @@
           <p:cNvPr id="6" name="Picture 4">
             <a:extLst>
               <a:ext uri="{FF2B5EF4-FFF2-40B4-BE49-F238E27FC236}">
-                <a16:creationId xmlns:a16="http://schemas.microsoft.com/office/drawing/2014/main" xmlns="" id="{051FB3A4-C7F9-45D0-A73B-557A6E1C4FDF}"/>
+                <a16:creationId xmlns="" xmlns:a16="http://schemas.microsoft.com/office/drawing/2014/main" id="{051FB3A4-C7F9-45D0-A73B-557A6E1C4FDF}"/>
               </a:ext>
             </a:extLst>
           </p:cNvPr>
@@ -19361,7 +19552,7 @@
             <p:cNvPr id="34" name="Freeform 117">
               <a:extLst>
                 <a:ext uri="{FF2B5EF4-FFF2-40B4-BE49-F238E27FC236}">
-                  <a16:creationId xmlns:a16="http://schemas.microsoft.com/office/drawing/2014/main" xmlns="" id="{ACB5F511-0467-4F80-BCD6-94BAC36031EE}"/>
+                  <a16:creationId xmlns="" xmlns:a16="http://schemas.microsoft.com/office/drawing/2014/main" id="{ACB5F511-0467-4F80-BCD6-94BAC36031EE}"/>
                 </a:ext>
               </a:extLst>
             </p:cNvPr>
@@ -19541,7 +19732,7 @@
             <p:cNvPr id="35" name="Freeform 118">
               <a:extLst>
                 <a:ext uri="{FF2B5EF4-FFF2-40B4-BE49-F238E27FC236}">
-                  <a16:creationId xmlns:a16="http://schemas.microsoft.com/office/drawing/2014/main" xmlns="" id="{8F3B04C3-D501-4070-B0AC-5FB6C26F8066}"/>
+                  <a16:creationId xmlns="" xmlns:a16="http://schemas.microsoft.com/office/drawing/2014/main" id="{8F3B04C3-D501-4070-B0AC-5FB6C26F8066}"/>
                 </a:ext>
               </a:extLst>
             </p:cNvPr>
@@ -19683,7 +19874,7 @@
             <p:cNvPr id="36" name="Freeform 119">
               <a:extLst>
                 <a:ext uri="{FF2B5EF4-FFF2-40B4-BE49-F238E27FC236}">
-                  <a16:creationId xmlns:a16="http://schemas.microsoft.com/office/drawing/2014/main" xmlns="" id="{36E9553A-4692-4D5B-A665-94CC09C4A62F}"/>
+                  <a16:creationId xmlns="" xmlns:a16="http://schemas.microsoft.com/office/drawing/2014/main" id="{36E9553A-4692-4D5B-A665-94CC09C4A62F}"/>
                 </a:ext>
               </a:extLst>
             </p:cNvPr>
@@ -19863,7 +20054,7 @@
             <p:cNvPr id="37" name="Freeform 120">
               <a:extLst>
                 <a:ext uri="{FF2B5EF4-FFF2-40B4-BE49-F238E27FC236}">
-                  <a16:creationId xmlns:a16="http://schemas.microsoft.com/office/drawing/2014/main" xmlns="" id="{936475C6-EBDB-47C8-8ADD-312FB8E3E615}"/>
+                  <a16:creationId xmlns="" xmlns:a16="http://schemas.microsoft.com/office/drawing/2014/main" id="{936475C6-EBDB-47C8-8ADD-312FB8E3E615}"/>
                 </a:ext>
               </a:extLst>
             </p:cNvPr>
@@ -20005,7 +20196,7 @@
             <p:cNvPr id="38" name="Freeform 121">
               <a:extLst>
                 <a:ext uri="{FF2B5EF4-FFF2-40B4-BE49-F238E27FC236}">
-                  <a16:creationId xmlns:a16="http://schemas.microsoft.com/office/drawing/2014/main" xmlns="" id="{169A2FBC-0956-4DC7-ADF8-83D5DC60949B}"/>
+                  <a16:creationId xmlns="" xmlns:a16="http://schemas.microsoft.com/office/drawing/2014/main" id="{169A2FBC-0956-4DC7-ADF8-83D5DC60949B}"/>
                 </a:ext>
               </a:extLst>
             </p:cNvPr>
@@ -20185,7 +20376,7 @@
             <p:cNvPr id="39" name="Freeform 122">
               <a:extLst>
                 <a:ext uri="{FF2B5EF4-FFF2-40B4-BE49-F238E27FC236}">
-                  <a16:creationId xmlns:a16="http://schemas.microsoft.com/office/drawing/2014/main" xmlns="" id="{59EA31B7-D7DB-4DBF-B245-2AE82627F51A}"/>
+                  <a16:creationId xmlns="" xmlns:a16="http://schemas.microsoft.com/office/drawing/2014/main" id="{59EA31B7-D7DB-4DBF-B245-2AE82627F51A}"/>
                 </a:ext>
               </a:extLst>
             </p:cNvPr>
@@ -20327,7 +20518,7 @@
             <p:cNvPr id="40" name="Freeform 123">
               <a:extLst>
                 <a:ext uri="{FF2B5EF4-FFF2-40B4-BE49-F238E27FC236}">
-                  <a16:creationId xmlns:a16="http://schemas.microsoft.com/office/drawing/2014/main" xmlns="" id="{07115F20-4892-4DCD-A419-4CD8D03F5E62}"/>
+                  <a16:creationId xmlns="" xmlns:a16="http://schemas.microsoft.com/office/drawing/2014/main" id="{07115F20-4892-4DCD-A419-4CD8D03F5E62}"/>
                 </a:ext>
               </a:extLst>
             </p:cNvPr>
@@ -20885,7 +21076,7 @@
             <p:cNvPr id="41" name="Freeform 124">
               <a:extLst>
                 <a:ext uri="{FF2B5EF4-FFF2-40B4-BE49-F238E27FC236}">
-                  <a16:creationId xmlns:a16="http://schemas.microsoft.com/office/drawing/2014/main" xmlns="" id="{9EA60E95-59DD-4A01-B0FA-42513BEAF8E7}"/>
+                  <a16:creationId xmlns="" xmlns:a16="http://schemas.microsoft.com/office/drawing/2014/main" id="{9EA60E95-59DD-4A01-B0FA-42513BEAF8E7}"/>
                 </a:ext>
               </a:extLst>
             </p:cNvPr>
@@ -21065,7 +21256,7 @@
             <p:cNvPr id="42" name="Freeform 125">
               <a:extLst>
                 <a:ext uri="{FF2B5EF4-FFF2-40B4-BE49-F238E27FC236}">
-                  <a16:creationId xmlns:a16="http://schemas.microsoft.com/office/drawing/2014/main" xmlns="" id="{277C2BFE-7B2E-4B06-836A-8103FB641491}"/>
+                  <a16:creationId xmlns="" xmlns:a16="http://schemas.microsoft.com/office/drawing/2014/main" id="{277C2BFE-7B2E-4B06-836A-8103FB641491}"/>
                 </a:ext>
               </a:extLst>
             </p:cNvPr>
@@ -21222,7 +21413,7 @@
             <p:cNvPr id="32" name="Freeform 111">
               <a:extLst>
                 <a:ext uri="{FF2B5EF4-FFF2-40B4-BE49-F238E27FC236}">
-                  <a16:creationId xmlns:a16="http://schemas.microsoft.com/office/drawing/2014/main" xmlns="" id="{BC11850A-92B9-404F-BF5E-D6215717A644}"/>
+                  <a16:creationId xmlns="" xmlns:a16="http://schemas.microsoft.com/office/drawing/2014/main" id="{BC11850A-92B9-404F-BF5E-D6215717A644}"/>
                 </a:ext>
               </a:extLst>
             </p:cNvPr>
@@ -21440,7 +21631,7 @@
             <p:cNvPr id="33" name="Freeform 112">
               <a:extLst>
                 <a:ext uri="{FF2B5EF4-FFF2-40B4-BE49-F238E27FC236}">
-                  <a16:creationId xmlns:a16="http://schemas.microsoft.com/office/drawing/2014/main" xmlns="" id="{9BB65042-15E8-4757-A437-CB30B736B658}"/>
+                  <a16:creationId xmlns="" xmlns:a16="http://schemas.microsoft.com/office/drawing/2014/main" id="{9BB65042-15E8-4757-A437-CB30B736B658}"/>
                 </a:ext>
               </a:extLst>
             </p:cNvPr>
@@ -22847,7 +23038,7 @@
           <p:cNvPr id="43" name="Straight Connector 64">
             <a:extLst>
               <a:ext uri="{FF2B5EF4-FFF2-40B4-BE49-F238E27FC236}">
-                <a16:creationId xmlns:a16="http://schemas.microsoft.com/office/drawing/2014/main" xmlns="" id="{D22F4E57-90BA-4899-909E-5829E7A9C72A}"/>
+                <a16:creationId xmlns="" xmlns:a16="http://schemas.microsoft.com/office/drawing/2014/main" id="{D22F4E57-90BA-4899-909E-5829E7A9C72A}"/>
               </a:ext>
             </a:extLst>
           </p:cNvPr>
@@ -26962,7 +27153,7 @@
             <p:cNvPr id="97" name="타원 96">
               <a:extLst>
                 <a:ext uri="{FF2B5EF4-FFF2-40B4-BE49-F238E27FC236}">
-                  <a16:creationId xmlns="" xmlns:a16="http://schemas.microsoft.com/office/drawing/2014/main" id="{2A6A11AC-31D1-C238-469B-B8065561C8B3}"/>
+                  <a16:creationId xmlns:a16="http://schemas.microsoft.com/office/drawing/2014/main" xmlns="" id="{2A6A11AC-31D1-C238-469B-B8065561C8B3}"/>
                 </a:ext>
               </a:extLst>
             </p:cNvPr>
@@ -27033,7 +27224,7 @@
             <p:cNvPr id="98" name="TextBox 97">
               <a:extLst>
                 <a:ext uri="{FF2B5EF4-FFF2-40B4-BE49-F238E27FC236}">
-                  <a16:creationId xmlns="" xmlns:a16="http://schemas.microsoft.com/office/drawing/2014/main" id="{370FDDD1-392F-C3F6-7926-8F5450602B51}"/>
+                  <a16:creationId xmlns:a16="http://schemas.microsoft.com/office/drawing/2014/main" xmlns="" id="{370FDDD1-392F-C3F6-7926-8F5450602B51}"/>
                 </a:ext>
               </a:extLst>
             </p:cNvPr>
@@ -27204,7 +27395,7 @@
             <p:cNvPr id="99" name="타원 98">
               <a:extLst>
                 <a:ext uri="{FF2B5EF4-FFF2-40B4-BE49-F238E27FC236}">
-                  <a16:creationId xmlns="" xmlns:a16="http://schemas.microsoft.com/office/drawing/2014/main" id="{8A596585-4EFC-7C6C-63D0-E577FBF1E255}"/>
+                  <a16:creationId xmlns:a16="http://schemas.microsoft.com/office/drawing/2014/main" xmlns="" id="{8A596585-4EFC-7C6C-63D0-E577FBF1E255}"/>
                 </a:ext>
               </a:extLst>
             </p:cNvPr>
@@ -27288,7 +27479,7 @@
             <p:cNvPr id="100" name="TextBox 99">
               <a:extLst>
                 <a:ext uri="{FF2B5EF4-FFF2-40B4-BE49-F238E27FC236}">
-                  <a16:creationId xmlns="" xmlns:a16="http://schemas.microsoft.com/office/drawing/2014/main" id="{A2DBD73D-1544-9997-4B5E-7BE89DA70BD5}"/>
+                  <a16:creationId xmlns:a16="http://schemas.microsoft.com/office/drawing/2014/main" xmlns="" id="{A2DBD73D-1544-9997-4B5E-7BE89DA70BD5}"/>
                 </a:ext>
               </a:extLst>
             </p:cNvPr>
@@ -27404,7 +27595,7 @@
             <p:cNvPr id="101" name="타원 100">
               <a:extLst>
                 <a:ext uri="{FF2B5EF4-FFF2-40B4-BE49-F238E27FC236}">
-                  <a16:creationId xmlns="" xmlns:a16="http://schemas.microsoft.com/office/drawing/2014/main" id="{D7536991-A61A-F58E-EC18-61A6F108717B}"/>
+                  <a16:creationId xmlns:a16="http://schemas.microsoft.com/office/drawing/2014/main" xmlns="" id="{D7536991-A61A-F58E-EC18-61A6F108717B}"/>
                 </a:ext>
               </a:extLst>
             </p:cNvPr>
@@ -27488,7 +27679,7 @@
             <p:cNvPr id="102" name="TextBox 101">
               <a:extLst>
                 <a:ext uri="{FF2B5EF4-FFF2-40B4-BE49-F238E27FC236}">
-                  <a16:creationId xmlns="" xmlns:a16="http://schemas.microsoft.com/office/drawing/2014/main" id="{688289CD-94AD-1B72-1500-6EAFBCF42BA0}"/>
+                  <a16:creationId xmlns:a16="http://schemas.microsoft.com/office/drawing/2014/main" xmlns="" id="{688289CD-94AD-1B72-1500-6EAFBCF42BA0}"/>
                 </a:ext>
               </a:extLst>
             </p:cNvPr>
@@ -27751,7 +27942,7 @@
             <p:cNvPr id="103" name="타원 102">
               <a:extLst>
                 <a:ext uri="{FF2B5EF4-FFF2-40B4-BE49-F238E27FC236}">
-                  <a16:creationId xmlns="" xmlns:a16="http://schemas.microsoft.com/office/drawing/2014/main" id="{F74DE22F-BE57-990F-10C7-5A28137FF97D}"/>
+                  <a16:creationId xmlns:a16="http://schemas.microsoft.com/office/drawing/2014/main" xmlns="" id="{F74DE22F-BE57-990F-10C7-5A28137FF97D}"/>
                 </a:ext>
               </a:extLst>
             </p:cNvPr>
@@ -27835,7 +28026,7 @@
             <p:cNvPr id="104" name="TextBox 103">
               <a:extLst>
                 <a:ext uri="{FF2B5EF4-FFF2-40B4-BE49-F238E27FC236}">
-                  <a16:creationId xmlns="" xmlns:a16="http://schemas.microsoft.com/office/drawing/2014/main" id="{2709A4DE-7D99-060B-4332-72EAE25DA559}"/>
+                  <a16:creationId xmlns:a16="http://schemas.microsoft.com/office/drawing/2014/main" xmlns="" id="{2709A4DE-7D99-060B-4332-72EAE25DA559}"/>
                 </a:ext>
               </a:extLst>
             </p:cNvPr>
@@ -28463,6 +28654,1492 @@
       </p:grpSpPr>
       <p:sp>
         <p:nvSpPr>
+          <p:cNvPr id="90" name="직사각형 89"/>
+          <p:cNvSpPr/>
+          <p:nvPr/>
+        </p:nvSpPr>
+        <p:spPr>
+          <a:xfrm>
+            <a:off x="152400" y="125187"/>
+            <a:ext cx="2667000" cy="312964"/>
+          </a:xfrm>
+          <a:prstGeom prst="rect">
+            <a:avLst/>
+          </a:prstGeom>
+          <a:noFill/>
+          <a:ln>
+            <a:noFill/>
+          </a:ln>
+        </p:spPr>
+        <p:style>
+          <a:lnRef idx="2">
+            <a:schemeClr val="accent1">
+              <a:shade val="50000"/>
+            </a:schemeClr>
+          </a:lnRef>
+          <a:fillRef idx="1">
+            <a:schemeClr val="accent1"/>
+          </a:fillRef>
+          <a:effectRef idx="0">
+            <a:schemeClr val="accent1"/>
+          </a:effectRef>
+          <a:fontRef idx="minor">
+            <a:schemeClr val="lt1"/>
+          </a:fontRef>
+        </p:style>
+        <p:txBody>
+          <a:bodyPr rtlCol="0" anchor="ctr"/>
+          <a:lstStyle/>
+          <a:p>
+            <a:r>
+              <a:rPr lang="en-US" altLang="ko-KR" sz="1600" b="1" dirty="0" err="1" smtClean="0">
+                <a:solidFill>
+                  <a:schemeClr val="accent1">
+                    <a:lumMod val="75000"/>
+                  </a:schemeClr>
+                </a:solidFill>
+                <a:latin typeface="+mn-ea"/>
+              </a:rPr>
+              <a:t>Vertica</a:t>
+            </a:r>
+            <a:r>
+              <a:rPr lang="en-US" altLang="ko-KR" sz="1600" b="1" dirty="0" smtClean="0">
+                <a:solidFill>
+                  <a:schemeClr val="accent1">
+                    <a:lumMod val="75000"/>
+                  </a:schemeClr>
+                </a:solidFill>
+                <a:latin typeface="+mn-ea"/>
+              </a:rPr>
+              <a:t> </a:t>
+            </a:r>
+            <a:r>
+              <a:rPr lang="en-US" altLang="ko-KR" sz="1600" b="1" dirty="0" smtClean="0">
+                <a:solidFill>
+                  <a:srgbClr val="2E75B6"/>
+                </a:solidFill>
+                <a:latin typeface="+mn-ea"/>
+              </a:rPr>
+              <a:t>MCP</a:t>
+            </a:r>
+            <a:endParaRPr lang="ko-KR" altLang="en-US" sz="1600" b="1" dirty="0">
+              <a:solidFill>
+                <a:srgbClr val="2E75B6"/>
+              </a:solidFill>
+              <a:latin typeface="+mn-ea"/>
+            </a:endParaRPr>
+          </a:p>
+        </p:txBody>
+      </p:sp>
+      <p:cxnSp>
+        <p:nvCxnSpPr>
+          <p:cNvPr id="92" name="직선 연결선 91"/>
+          <p:cNvCxnSpPr/>
+          <p:nvPr/>
+        </p:nvCxnSpPr>
+        <p:spPr>
+          <a:xfrm flipV="1">
+            <a:off x="215900" y="469900"/>
+            <a:ext cx="9156700" cy="0"/>
+          </a:xfrm>
+          <a:prstGeom prst="line">
+            <a:avLst/>
+          </a:prstGeom>
+          <a:ln w="19050">
+            <a:solidFill>
+              <a:schemeClr val="accent1"/>
+            </a:solidFill>
+          </a:ln>
+        </p:spPr>
+        <p:style>
+          <a:lnRef idx="1">
+            <a:schemeClr val="accent1"/>
+          </a:lnRef>
+          <a:fillRef idx="0">
+            <a:schemeClr val="accent1"/>
+          </a:fillRef>
+          <a:effectRef idx="0">
+            <a:schemeClr val="accent1"/>
+          </a:effectRef>
+          <a:fontRef idx="minor">
+            <a:schemeClr val="tx1"/>
+          </a:fontRef>
+        </p:style>
+      </p:cxnSp>
+      <p:grpSp>
+        <p:nvGrpSpPr>
+          <p:cNvPr id="9" name="그룹 8"/>
+          <p:cNvGrpSpPr/>
+          <p:nvPr/>
+        </p:nvGrpSpPr>
+        <p:grpSpPr>
+          <a:xfrm>
+            <a:off x="2412604" y="678493"/>
+            <a:ext cx="4254231" cy="1072145"/>
+            <a:chOff x="590154" y="1135693"/>
+            <a:chExt cx="4254231" cy="1072145"/>
+          </a:xfrm>
+        </p:grpSpPr>
+        <p:sp>
+          <p:nvSpPr>
+            <p:cNvPr id="24" name="Text 6">
+              <a:extLst>
+                <a:ext uri="{FF2B5EF4-FFF2-40B4-BE49-F238E27FC236}">
+                  <a16:creationId xmlns:a16="http://schemas.microsoft.com/office/drawing/2014/main" xmlns="" id="{8D3E6DEC-C401-3EA1-54CE-BF4D583710EC}"/>
+                </a:ext>
+              </a:extLst>
+            </p:cNvPr>
+            <p:cNvSpPr/>
+            <p:nvPr/>
+          </p:nvSpPr>
+          <p:spPr>
+            <a:xfrm>
+              <a:off x="590154" y="1135693"/>
+              <a:ext cx="2729244" cy="136462"/>
+            </a:xfrm>
+            <a:prstGeom prst="rect">
+              <a:avLst/>
+            </a:prstGeom>
+            <a:noFill/>
+            <a:ln/>
+          </p:spPr>
+          <p:txBody>
+            <a:bodyPr wrap="square" rtlCol="0" anchor="ctr"/>
+            <a:lstStyle/>
+            <a:p>
+              <a:r>
+                <a:rPr lang="en-US" sz="900" b="1" dirty="0">
+                  <a:solidFill>
+                    <a:srgbClr val="2E75B6"/>
+                  </a:solidFill>
+                  <a:latin typeface="+mj-ea"/>
+                  <a:ea typeface="+mj-ea"/>
+                </a:rPr>
+                <a:t>AI Host — 다양한 LLM 지원</a:t>
+              </a:r>
+            </a:p>
+          </p:txBody>
+        </p:sp>
+        <p:grpSp>
+          <p:nvGrpSpPr>
+            <p:cNvPr id="8" name="그룹 7"/>
+            <p:cNvGrpSpPr/>
+            <p:nvPr/>
+          </p:nvGrpSpPr>
+          <p:grpSpPr>
+            <a:xfrm>
+              <a:off x="679689" y="1798452"/>
+              <a:ext cx="1129728" cy="409386"/>
+              <a:chOff x="1524239" y="1506352"/>
+              <a:chExt cx="1129728" cy="409386"/>
+            </a:xfrm>
+          </p:grpSpPr>
+          <p:sp>
+            <p:nvSpPr>
+              <p:cNvPr id="37" name="Shape 19">
+                <a:extLst>
+                  <a:ext uri="{FF2B5EF4-FFF2-40B4-BE49-F238E27FC236}">
+                    <a16:creationId xmlns:a16="http://schemas.microsoft.com/office/drawing/2014/main" xmlns="" id="{524917FA-6138-8414-618A-15D8BE85E272}"/>
+                  </a:ext>
+                </a:extLst>
+              </p:cNvPr>
+              <p:cNvSpPr/>
+              <p:nvPr/>
+            </p:nvSpPr>
+            <p:spPr>
+              <a:xfrm>
+                <a:off x="1525285" y="1506352"/>
+                <a:ext cx="1128682" cy="409386"/>
+              </a:xfrm>
+              <a:prstGeom prst="rect">
+                <a:avLst/>
+              </a:prstGeom>
+              <a:solidFill>
+                <a:srgbClr val="6FC8FF">
+                  <a:alpha val="8000"/>
+                </a:srgbClr>
+              </a:solidFill>
+              <a:ln w="12700">
+                <a:solidFill>
+                  <a:srgbClr val="6FC8FF"/>
+                </a:solidFill>
+                <a:prstDash val="solid"/>
+              </a:ln>
+            </p:spPr>
+            <p:txBody>
+              <a:bodyPr/>
+              <a:lstStyle/>
+              <a:p>
+                <a:pPr algn="ctr"/>
+                <a:endParaRPr lang="ko-KR" altLang="en-US" sz="1400" b="1">
+                  <a:solidFill>
+                    <a:srgbClr val="2E75B6"/>
+                  </a:solidFill>
+                  <a:latin typeface="+mj-ea"/>
+                  <a:ea typeface="+mj-ea"/>
+                </a:endParaRPr>
+              </a:p>
+            </p:txBody>
+          </p:sp>
+          <p:sp>
+            <p:nvSpPr>
+              <p:cNvPr id="38" name="Text 20">
+                <a:extLst>
+                  <a:ext uri="{FF2B5EF4-FFF2-40B4-BE49-F238E27FC236}">
+                    <a16:creationId xmlns:a16="http://schemas.microsoft.com/office/drawing/2014/main" xmlns="" id="{96240FBC-3122-C0D1-9CE9-62EFB4846AB5}"/>
+                  </a:ext>
+                </a:extLst>
+              </p:cNvPr>
+              <p:cNvSpPr/>
+              <p:nvPr/>
+            </p:nvSpPr>
+            <p:spPr>
+              <a:xfrm>
+                <a:off x="1530601" y="1514964"/>
+                <a:ext cx="1116000" cy="136462"/>
+              </a:xfrm>
+              <a:prstGeom prst="rect">
+                <a:avLst/>
+              </a:prstGeom>
+              <a:noFill/>
+              <a:ln/>
+            </p:spPr>
+            <p:txBody>
+              <a:bodyPr wrap="square" rtlCol="0" anchor="ctr"/>
+              <a:lstStyle/>
+              <a:p>
+                <a:pPr algn="ctr"/>
+                <a:r>
+                  <a:rPr lang="en-US" sz="700" b="1" kern="0" spc="75" dirty="0">
+                    <a:solidFill>
+                      <a:srgbClr val="2E75B6"/>
+                    </a:solidFill>
+                    <a:latin typeface="+mj-ea"/>
+                    <a:ea typeface="+mj-ea"/>
+                  </a:rPr>
+                  <a:t>AI HOST</a:t>
+                </a:r>
+                <a:endParaRPr lang="en-US" sz="700" b="1" dirty="0">
+                  <a:solidFill>
+                    <a:srgbClr val="2E75B6"/>
+                  </a:solidFill>
+                  <a:latin typeface="+mj-ea"/>
+                  <a:ea typeface="+mj-ea"/>
+                </a:endParaRPr>
+              </a:p>
+            </p:txBody>
+          </p:sp>
+          <p:sp>
+            <p:nvSpPr>
+              <p:cNvPr id="39" name="Text 21">
+                <a:extLst>
+                  <a:ext uri="{FF2B5EF4-FFF2-40B4-BE49-F238E27FC236}">
+                    <a16:creationId xmlns:a16="http://schemas.microsoft.com/office/drawing/2014/main" xmlns="" id="{CC725979-8B46-07F0-DE7A-66E90C38D2E0}"/>
+                  </a:ext>
+                </a:extLst>
+              </p:cNvPr>
+              <p:cNvSpPr/>
+              <p:nvPr/>
+            </p:nvSpPr>
+            <p:spPr>
+              <a:xfrm>
+                <a:off x="1524239" y="1711079"/>
+                <a:ext cx="1116000" cy="191048"/>
+              </a:xfrm>
+              <a:prstGeom prst="rect">
+                <a:avLst/>
+              </a:prstGeom>
+              <a:noFill/>
+              <a:ln/>
+            </p:spPr>
+            <p:txBody>
+              <a:bodyPr wrap="square" rtlCol="0" anchor="ctr"/>
+              <a:lstStyle/>
+              <a:p>
+                <a:pPr algn="ctr"/>
+                <a:r>
+                  <a:rPr lang="en-US" sz="900" b="1" dirty="0">
+                    <a:solidFill>
+                      <a:srgbClr val="2E75B6"/>
+                    </a:solidFill>
+                    <a:latin typeface="+mj-ea"/>
+                    <a:ea typeface="+mj-ea"/>
+                  </a:rPr>
+                  <a:t>LLM Client</a:t>
+                </a:r>
+              </a:p>
+            </p:txBody>
+          </p:sp>
+        </p:grpSp>
+        <p:sp>
+          <p:nvSpPr>
+            <p:cNvPr id="40" name="Text 22">
+              <a:extLst>
+                <a:ext uri="{FF2B5EF4-FFF2-40B4-BE49-F238E27FC236}">
+                  <a16:creationId xmlns:a16="http://schemas.microsoft.com/office/drawing/2014/main" xmlns="" id="{432C866D-BDC9-B209-3D76-6D6D917F63CD}"/>
+                </a:ext>
+              </a:extLst>
+            </p:cNvPr>
+            <p:cNvSpPr/>
+            <p:nvPr/>
+          </p:nvSpPr>
+          <p:spPr>
+            <a:xfrm>
+              <a:off x="1938135" y="1821287"/>
+              <a:ext cx="163754" cy="300216"/>
+            </a:xfrm>
+            <a:prstGeom prst="rect">
+              <a:avLst/>
+            </a:prstGeom>
+            <a:noFill/>
+            <a:ln/>
+          </p:spPr>
+          <p:txBody>
+            <a:bodyPr wrap="square" rtlCol="0" anchor="ctr"/>
+            <a:lstStyle/>
+            <a:p>
+              <a:pPr algn="ctr"/>
+              <a:r>
+                <a:rPr lang="en-US" sz="1800" b="1" dirty="0">
+                  <a:solidFill>
+                    <a:srgbClr val="2E75B6"/>
+                  </a:solidFill>
+                  <a:latin typeface="+mj-ea"/>
+                  <a:ea typeface="+mj-ea"/>
+                </a:rPr>
+                <a:t>›</a:t>
+              </a:r>
+            </a:p>
+          </p:txBody>
+        </p:sp>
+        <p:grpSp>
+          <p:nvGrpSpPr>
+            <p:cNvPr id="7" name="그룹 6"/>
+            <p:cNvGrpSpPr/>
+            <p:nvPr/>
+          </p:nvGrpSpPr>
+          <p:grpSpPr>
+            <a:xfrm>
+              <a:off x="2193429" y="1798452"/>
+              <a:ext cx="1136078" cy="409386"/>
+              <a:chOff x="3067622" y="1525402"/>
+              <a:chExt cx="1136078" cy="409386"/>
+            </a:xfrm>
+          </p:grpSpPr>
+          <p:sp>
+            <p:nvSpPr>
+              <p:cNvPr id="41" name="Shape 23">
+                <a:extLst>
+                  <a:ext uri="{FF2B5EF4-FFF2-40B4-BE49-F238E27FC236}">
+                    <a16:creationId xmlns:a16="http://schemas.microsoft.com/office/drawing/2014/main" xmlns="" id="{2191492C-AB5F-6000-39AB-490DE1117CF6}"/>
+                  </a:ext>
+                </a:extLst>
+              </p:cNvPr>
+              <p:cNvSpPr/>
+              <p:nvPr/>
+            </p:nvSpPr>
+            <p:spPr>
+              <a:xfrm>
+                <a:off x="3075018" y="1525402"/>
+                <a:ext cx="1128682" cy="409386"/>
+              </a:xfrm>
+              <a:prstGeom prst="rect">
+                <a:avLst/>
+              </a:prstGeom>
+              <a:solidFill>
+                <a:srgbClr val="6FC8FF">
+                  <a:alpha val="22000"/>
+                </a:srgbClr>
+              </a:solidFill>
+              <a:ln w="25400">
+                <a:solidFill>
+                  <a:srgbClr val="6FC8FF"/>
+                </a:solidFill>
+                <a:prstDash val="solid"/>
+              </a:ln>
+            </p:spPr>
+            <p:txBody>
+              <a:bodyPr/>
+              <a:lstStyle/>
+              <a:p>
+                <a:pPr algn="ctr"/>
+                <a:endParaRPr lang="ko-KR" altLang="en-US" sz="1400" b="1">
+                  <a:solidFill>
+                    <a:srgbClr val="2E75B6"/>
+                  </a:solidFill>
+                  <a:latin typeface="+mj-ea"/>
+                  <a:ea typeface="+mj-ea"/>
+                </a:endParaRPr>
+              </a:p>
+            </p:txBody>
+          </p:sp>
+          <p:sp>
+            <p:nvSpPr>
+              <p:cNvPr id="42" name="Text 24">
+                <a:extLst>
+                  <a:ext uri="{FF2B5EF4-FFF2-40B4-BE49-F238E27FC236}">
+                    <a16:creationId xmlns:a16="http://schemas.microsoft.com/office/drawing/2014/main" xmlns="" id="{844E4BA8-06CC-D64E-D918-68E5DCEADE6A}"/>
+                  </a:ext>
+                </a:extLst>
+              </p:cNvPr>
+              <p:cNvSpPr/>
+              <p:nvPr/>
+            </p:nvSpPr>
+            <p:spPr>
+              <a:xfrm>
+                <a:off x="3067622" y="1537183"/>
+                <a:ext cx="1116000" cy="136462"/>
+              </a:xfrm>
+              <a:prstGeom prst="rect">
+                <a:avLst/>
+              </a:prstGeom>
+              <a:noFill/>
+              <a:ln/>
+            </p:spPr>
+            <p:txBody>
+              <a:bodyPr wrap="square" rtlCol="0" anchor="ctr"/>
+              <a:lstStyle/>
+              <a:p>
+                <a:pPr algn="ctr"/>
+                <a:r>
+                  <a:rPr lang="en-US" sz="700" b="1" kern="0" spc="75" dirty="0">
+                    <a:solidFill>
+                      <a:srgbClr val="2E75B6"/>
+                    </a:solidFill>
+                    <a:latin typeface="+mj-ea"/>
+                    <a:ea typeface="+mj-ea"/>
+                  </a:rPr>
+                  <a:t>MCP SERVER</a:t>
+                </a:r>
+                <a:endParaRPr lang="en-US" sz="700" b="1" dirty="0">
+                  <a:solidFill>
+                    <a:srgbClr val="2E75B6"/>
+                  </a:solidFill>
+                  <a:latin typeface="+mj-ea"/>
+                  <a:ea typeface="+mj-ea"/>
+                </a:endParaRPr>
+              </a:p>
+            </p:txBody>
+          </p:sp>
+          <p:sp>
+            <p:nvSpPr>
+              <p:cNvPr id="43" name="Text 25">
+                <a:extLst>
+                  <a:ext uri="{FF2B5EF4-FFF2-40B4-BE49-F238E27FC236}">
+                    <a16:creationId xmlns:a16="http://schemas.microsoft.com/office/drawing/2014/main" xmlns="" id="{7698D6DB-B3F6-D3F5-249F-11E4D918C75A}"/>
+                  </a:ext>
+                </a:extLst>
+              </p:cNvPr>
+              <p:cNvSpPr/>
+              <p:nvPr/>
+            </p:nvSpPr>
+            <p:spPr>
+              <a:xfrm>
+                <a:off x="3073972" y="1726948"/>
+                <a:ext cx="1116000" cy="191048"/>
+              </a:xfrm>
+              <a:prstGeom prst="rect">
+                <a:avLst/>
+              </a:prstGeom>
+              <a:noFill/>
+              <a:ln/>
+            </p:spPr>
+            <p:txBody>
+              <a:bodyPr wrap="square" rtlCol="0" anchor="ctr"/>
+              <a:lstStyle/>
+              <a:p>
+                <a:pPr algn="ctr"/>
+                <a:r>
+                  <a:rPr lang="en-US" sz="900" b="1" dirty="0">
+                    <a:solidFill>
+                      <a:srgbClr val="2E75B6"/>
+                    </a:solidFill>
+                    <a:latin typeface="+mj-ea"/>
+                    <a:ea typeface="+mj-ea"/>
+                  </a:rPr>
+                  <a:t>Vertica MCP</a:t>
+                </a:r>
+              </a:p>
+            </p:txBody>
+          </p:sp>
+        </p:grpSp>
+        <p:sp>
+          <p:nvSpPr>
+            <p:cNvPr id="44" name="Text 26">
+              <a:extLst>
+                <a:ext uri="{FF2B5EF4-FFF2-40B4-BE49-F238E27FC236}">
+                  <a16:creationId xmlns:a16="http://schemas.microsoft.com/office/drawing/2014/main" xmlns="" id="{761BE988-57E6-1F55-5A39-D86387C11ADC}"/>
+                </a:ext>
+              </a:extLst>
+            </p:cNvPr>
+            <p:cNvSpPr/>
+            <p:nvPr/>
+          </p:nvSpPr>
+          <p:spPr>
+            <a:xfrm>
+              <a:off x="3459287" y="1821287"/>
+              <a:ext cx="163754" cy="300216"/>
+            </a:xfrm>
+            <a:prstGeom prst="rect">
+              <a:avLst/>
+            </a:prstGeom>
+            <a:noFill/>
+            <a:ln/>
+          </p:spPr>
+          <p:txBody>
+            <a:bodyPr wrap="square" rtlCol="0" anchor="ctr"/>
+            <a:lstStyle/>
+            <a:p>
+              <a:pPr algn="ctr"/>
+              <a:r>
+                <a:rPr lang="en-US" sz="1800" b="1" dirty="0">
+                  <a:solidFill>
+                    <a:srgbClr val="2E75B6"/>
+                  </a:solidFill>
+                  <a:latin typeface="+mj-ea"/>
+                  <a:ea typeface="+mj-ea"/>
+                </a:rPr>
+                <a:t>›</a:t>
+              </a:r>
+            </a:p>
+          </p:txBody>
+        </p:sp>
+        <p:grpSp>
+          <p:nvGrpSpPr>
+            <p:cNvPr id="6" name="그룹 5"/>
+            <p:cNvGrpSpPr/>
+            <p:nvPr/>
+          </p:nvGrpSpPr>
+          <p:grpSpPr>
+            <a:xfrm>
+              <a:off x="3713519" y="1798452"/>
+              <a:ext cx="1130866" cy="409386"/>
+              <a:chOff x="4558069" y="1561067"/>
+              <a:chExt cx="1130866" cy="409386"/>
+            </a:xfrm>
+          </p:grpSpPr>
+          <p:sp>
+            <p:nvSpPr>
+              <p:cNvPr id="23" name="Shape 23">
+                <a:extLst>
+                  <a:ext uri="{FF2B5EF4-FFF2-40B4-BE49-F238E27FC236}">
+                    <a16:creationId xmlns:a16="http://schemas.microsoft.com/office/drawing/2014/main" xmlns="" id="{3E0F4F26-79A5-E8FA-B2EA-98DA3ED3ECB2}"/>
+                  </a:ext>
+                </a:extLst>
+              </p:cNvPr>
+              <p:cNvSpPr/>
+              <p:nvPr/>
+            </p:nvSpPr>
+            <p:spPr>
+              <a:xfrm>
+                <a:off x="4558069" y="1561067"/>
+                <a:ext cx="1128682" cy="409386"/>
+              </a:xfrm>
+              <a:prstGeom prst="rect">
+                <a:avLst/>
+              </a:prstGeom>
+              <a:solidFill>
+                <a:srgbClr val="6FC8FF">
+                  <a:alpha val="22000"/>
+                </a:srgbClr>
+              </a:solidFill>
+              <a:ln w="25400">
+                <a:solidFill>
+                  <a:srgbClr val="6FC8FF"/>
+                </a:solidFill>
+                <a:prstDash val="solid"/>
+              </a:ln>
+            </p:spPr>
+            <p:txBody>
+              <a:bodyPr/>
+              <a:lstStyle/>
+              <a:p>
+                <a:pPr algn="ctr"/>
+                <a:endParaRPr lang="ko-KR" altLang="en-US" sz="1400" b="1">
+                  <a:solidFill>
+                    <a:srgbClr val="2E75B6"/>
+                  </a:solidFill>
+                  <a:latin typeface="+mj-ea"/>
+                  <a:ea typeface="+mj-ea"/>
+                </a:endParaRPr>
+              </a:p>
+            </p:txBody>
+          </p:sp>
+          <p:sp>
+            <p:nvSpPr>
+              <p:cNvPr id="45" name="Text 28">
+                <a:extLst>
+                  <a:ext uri="{FF2B5EF4-FFF2-40B4-BE49-F238E27FC236}">
+                    <a16:creationId xmlns:a16="http://schemas.microsoft.com/office/drawing/2014/main" xmlns="" id="{220D4254-2BA3-A03E-A79C-09BB2B88B97D}"/>
+                  </a:ext>
+                </a:extLst>
+              </p:cNvPr>
+              <p:cNvSpPr/>
+              <p:nvPr/>
+            </p:nvSpPr>
+            <p:spPr>
+              <a:xfrm>
+                <a:off x="4572935" y="1572114"/>
+                <a:ext cx="1116000" cy="136462"/>
+              </a:xfrm>
+              <a:prstGeom prst="rect">
+                <a:avLst/>
+              </a:prstGeom>
+              <a:noFill/>
+              <a:ln/>
+            </p:spPr>
+            <p:txBody>
+              <a:bodyPr wrap="square" rtlCol="0" anchor="ctr"/>
+              <a:lstStyle/>
+              <a:p>
+                <a:pPr algn="ctr"/>
+                <a:r>
+                  <a:rPr lang="en-US" sz="700" b="1" kern="0" spc="75" dirty="0">
+                    <a:solidFill>
+                      <a:srgbClr val="2E75B6"/>
+                    </a:solidFill>
+                    <a:latin typeface="+mj-ea"/>
+                    <a:ea typeface="+mj-ea"/>
+                  </a:rPr>
+                  <a:t>DATA SOURCE</a:t>
+                </a:r>
+                <a:endParaRPr lang="en-US" sz="700" b="1" dirty="0">
+                  <a:solidFill>
+                    <a:srgbClr val="2E75B6"/>
+                  </a:solidFill>
+                  <a:latin typeface="+mj-ea"/>
+                  <a:ea typeface="+mj-ea"/>
+                </a:endParaRPr>
+              </a:p>
+            </p:txBody>
+          </p:sp>
+          <p:sp>
+            <p:nvSpPr>
+              <p:cNvPr id="46" name="Text 29">
+                <a:extLst>
+                  <a:ext uri="{FF2B5EF4-FFF2-40B4-BE49-F238E27FC236}">
+                    <a16:creationId xmlns:a16="http://schemas.microsoft.com/office/drawing/2014/main" xmlns="" id="{A4D8BE61-AE47-2318-A76C-5DC35355AF83}"/>
+                  </a:ext>
+                </a:extLst>
+              </p:cNvPr>
+              <p:cNvSpPr/>
+              <p:nvPr/>
+            </p:nvSpPr>
+            <p:spPr>
+              <a:xfrm>
+                <a:off x="4566561" y="1758698"/>
+                <a:ext cx="1116000" cy="191048"/>
+              </a:xfrm>
+              <a:prstGeom prst="rect">
+                <a:avLst/>
+              </a:prstGeom>
+              <a:noFill/>
+              <a:ln/>
+            </p:spPr>
+            <p:txBody>
+              <a:bodyPr wrap="square" rtlCol="0" anchor="ctr"/>
+              <a:lstStyle/>
+              <a:p>
+                <a:pPr algn="ctr"/>
+                <a:r>
+                  <a:rPr lang="en-US" sz="900" b="1" dirty="0">
+                    <a:solidFill>
+                      <a:srgbClr val="2E75B6"/>
+                    </a:solidFill>
+                    <a:latin typeface="+mj-ea"/>
+                    <a:ea typeface="+mj-ea"/>
+                  </a:rPr>
+                  <a:t>Vertica DB</a:t>
+                </a:r>
+              </a:p>
+            </p:txBody>
+          </p:sp>
+        </p:grpSp>
+        <p:grpSp>
+          <p:nvGrpSpPr>
+            <p:cNvPr id="2" name="그룹 1"/>
+            <p:cNvGrpSpPr/>
+            <p:nvPr/>
+          </p:nvGrpSpPr>
+          <p:grpSpPr>
+            <a:xfrm>
+              <a:off x="673098" y="1393709"/>
+              <a:ext cx="831600" cy="283842"/>
+              <a:chOff x="1695448" y="1742959"/>
+              <a:chExt cx="831600" cy="283842"/>
+            </a:xfrm>
+          </p:grpSpPr>
+          <p:sp>
+            <p:nvSpPr>
+              <p:cNvPr id="25" name="Shape 7">
+                <a:extLst>
+                  <a:ext uri="{FF2B5EF4-FFF2-40B4-BE49-F238E27FC236}">
+                    <a16:creationId xmlns:a16="http://schemas.microsoft.com/office/drawing/2014/main" xmlns="" id="{256B50F2-A338-2564-8C9B-6CEF7512AFC0}"/>
+                  </a:ext>
+                </a:extLst>
+              </p:cNvPr>
+              <p:cNvSpPr/>
+              <p:nvPr/>
+            </p:nvSpPr>
+            <p:spPr>
+              <a:xfrm>
+                <a:off x="1695448" y="1742959"/>
+                <a:ext cx="831600" cy="283842"/>
+              </a:xfrm>
+              <a:prstGeom prst="rect">
+                <a:avLst/>
+              </a:prstGeom>
+              <a:solidFill>
+                <a:srgbClr val="D2823C">
+                  <a:alpha val="12000"/>
+                </a:srgbClr>
+              </a:solidFill>
+              <a:ln w="12700">
+                <a:solidFill>
+                  <a:srgbClr val="D2823C"/>
+                </a:solidFill>
+                <a:prstDash val="solid"/>
+              </a:ln>
+            </p:spPr>
+            <p:txBody>
+              <a:bodyPr/>
+              <a:lstStyle/>
+              <a:p>
+                <a:endParaRPr lang="ko-KR" altLang="en-US" sz="1600" b="1">
+                  <a:latin typeface="+mj-ea"/>
+                  <a:ea typeface="+mj-ea"/>
+                </a:endParaRPr>
+              </a:p>
+            </p:txBody>
+          </p:sp>
+          <p:sp>
+            <p:nvSpPr>
+              <p:cNvPr id="26" name="Text 8">
+                <a:extLst>
+                  <a:ext uri="{FF2B5EF4-FFF2-40B4-BE49-F238E27FC236}">
+                    <a16:creationId xmlns:a16="http://schemas.microsoft.com/office/drawing/2014/main" xmlns="" id="{9D9F2937-7CDE-B92D-73AF-2C23A144E7D0}"/>
+                  </a:ext>
+                </a:extLst>
+              </p:cNvPr>
+              <p:cNvSpPr/>
+              <p:nvPr/>
+            </p:nvSpPr>
+            <p:spPr>
+              <a:xfrm>
+                <a:off x="1725851" y="1751624"/>
+                <a:ext cx="792000" cy="136462"/>
+              </a:xfrm>
+              <a:prstGeom prst="rect">
+                <a:avLst/>
+              </a:prstGeom>
+              <a:noFill/>
+              <a:ln/>
+            </p:spPr>
+            <p:txBody>
+              <a:bodyPr wrap="square" rtlCol="0" anchor="ctr"/>
+              <a:lstStyle/>
+              <a:p>
+                <a:pPr algn="r"/>
+                <a:r>
+                  <a:rPr lang="en-US" sz="900" b="1" dirty="0">
+                    <a:solidFill>
+                      <a:srgbClr val="E8A060"/>
+                    </a:solidFill>
+                    <a:latin typeface="+mj-ea"/>
+                    <a:ea typeface="+mj-ea"/>
+                  </a:rPr>
+                  <a:t>Claude</a:t>
+                </a:r>
+                <a:endParaRPr lang="en-US" sz="900" b="1" dirty="0">
+                  <a:latin typeface="+mj-ea"/>
+                  <a:ea typeface="+mj-ea"/>
+                </a:endParaRPr>
+              </a:p>
+            </p:txBody>
+          </p:sp>
+          <p:sp>
+            <p:nvSpPr>
+              <p:cNvPr id="27" name="Text 9">
+                <a:extLst>
+                  <a:ext uri="{FF2B5EF4-FFF2-40B4-BE49-F238E27FC236}">
+                    <a16:creationId xmlns:a16="http://schemas.microsoft.com/office/drawing/2014/main" xmlns="" id="{6CEC3B19-65CD-C15B-17FB-E89C9EC828A8}"/>
+                  </a:ext>
+                </a:extLst>
+              </p:cNvPr>
+              <p:cNvSpPr/>
+              <p:nvPr/>
+            </p:nvSpPr>
+            <p:spPr>
+              <a:xfrm>
+                <a:off x="1725851" y="1905591"/>
+                <a:ext cx="792000" cy="109170"/>
+              </a:xfrm>
+              <a:prstGeom prst="rect">
+                <a:avLst/>
+              </a:prstGeom>
+              <a:noFill/>
+              <a:ln/>
+            </p:spPr>
+            <p:txBody>
+              <a:bodyPr wrap="square" rtlCol="0" anchor="ctr"/>
+              <a:lstStyle/>
+              <a:p>
+                <a:pPr algn="r"/>
+                <a:r>
+                  <a:rPr lang="en-US" sz="800" b="1" dirty="0">
+                    <a:solidFill>
+                      <a:srgbClr val="96C0E6">
+                        <a:alpha val="60000"/>
+                      </a:srgbClr>
+                    </a:solidFill>
+                    <a:latin typeface="+mj-ea"/>
+                    <a:ea typeface="+mj-ea"/>
+                  </a:rPr>
+                  <a:t>Anthropic</a:t>
+                </a:r>
+                <a:endParaRPr lang="en-US" sz="800" b="1" dirty="0">
+                  <a:latin typeface="+mj-ea"/>
+                  <a:ea typeface="+mj-ea"/>
+                </a:endParaRPr>
+              </a:p>
+            </p:txBody>
+          </p:sp>
+          <p:pic>
+            <p:nvPicPr>
+              <p:cNvPr id="47" name="그림 46" descr="그래픽, 원, 디자인이(가) 표시된 사진&#10;&#10;AI 생성 콘텐츠는 정확하지 않을 수 있습니다.">
+                <a:extLst>
+                  <a:ext uri="{FF2B5EF4-FFF2-40B4-BE49-F238E27FC236}">
+                    <a16:creationId xmlns:a16="http://schemas.microsoft.com/office/drawing/2014/main" xmlns="" id="{C19191C2-9EE4-60A3-4402-14BE8E77464D}"/>
+                  </a:ext>
+                </a:extLst>
+              </p:cNvPr>
+              <p:cNvPicPr>
+                <a:picLocks noChangeAspect="1"/>
+              </p:cNvPicPr>
+              <p:nvPr/>
+            </p:nvPicPr>
+            <p:blipFill>
+              <a:blip r:embed="rId2" cstate="print">
+                <a:extLst>
+                  <a:ext uri="{28A0092B-C50C-407E-A947-70E740481C1C}">
+                    <a14:useLocalDpi xmlns:a14="http://schemas.microsoft.com/office/drawing/2010/main" val="0"/>
+                  </a:ext>
+                </a:extLst>
+              </a:blip>
+              <a:stretch>
+                <a:fillRect/>
+              </a:stretch>
+            </p:blipFill>
+            <p:spPr>
+              <a:xfrm>
+                <a:off x="1720328" y="1807917"/>
+                <a:ext cx="152124" cy="145560"/>
+              </a:xfrm>
+              <a:prstGeom prst="rect">
+                <a:avLst/>
+              </a:prstGeom>
+            </p:spPr>
+          </p:pic>
+        </p:grpSp>
+        <p:grpSp>
+          <p:nvGrpSpPr>
+            <p:cNvPr id="3" name="그룹 2"/>
+            <p:cNvGrpSpPr/>
+            <p:nvPr/>
+          </p:nvGrpSpPr>
+          <p:grpSpPr>
+            <a:xfrm>
+              <a:off x="1780096" y="1393709"/>
+              <a:ext cx="837049" cy="283842"/>
+              <a:chOff x="2736849" y="1723909"/>
+              <a:chExt cx="837049" cy="283842"/>
+            </a:xfrm>
+          </p:grpSpPr>
+          <p:sp>
+            <p:nvSpPr>
+              <p:cNvPr id="28" name="Shape 10">
+                <a:extLst>
+                  <a:ext uri="{FF2B5EF4-FFF2-40B4-BE49-F238E27FC236}">
+                    <a16:creationId xmlns:a16="http://schemas.microsoft.com/office/drawing/2014/main" xmlns="" id="{7C0E40F9-2637-E383-B0CD-0F1B9D7D27D9}"/>
+                  </a:ext>
+                </a:extLst>
+              </p:cNvPr>
+              <p:cNvSpPr/>
+              <p:nvPr/>
+            </p:nvSpPr>
+            <p:spPr>
+              <a:xfrm>
+                <a:off x="2736849" y="1723909"/>
+                <a:ext cx="831851" cy="283842"/>
+              </a:xfrm>
+              <a:prstGeom prst="rect">
+                <a:avLst/>
+              </a:prstGeom>
+              <a:solidFill>
+                <a:srgbClr val="10A37F">
+                  <a:alpha val="12000"/>
+                </a:srgbClr>
+              </a:solidFill>
+              <a:ln w="12700">
+                <a:solidFill>
+                  <a:srgbClr val="10A37F"/>
+                </a:solidFill>
+                <a:prstDash val="solid"/>
+              </a:ln>
+            </p:spPr>
+            <p:txBody>
+              <a:bodyPr/>
+              <a:lstStyle/>
+              <a:p>
+                <a:endParaRPr lang="ko-KR" altLang="en-US" sz="1600" b="1">
+                  <a:latin typeface="+mj-ea"/>
+                  <a:ea typeface="+mj-ea"/>
+                </a:endParaRPr>
+              </a:p>
+            </p:txBody>
+          </p:sp>
+          <p:sp>
+            <p:nvSpPr>
+              <p:cNvPr id="29" name="Text 11">
+                <a:extLst>
+                  <a:ext uri="{FF2B5EF4-FFF2-40B4-BE49-F238E27FC236}">
+                    <a16:creationId xmlns:a16="http://schemas.microsoft.com/office/drawing/2014/main" xmlns="" id="{56ADB28E-AB22-61DD-7E41-79F16423D29D}"/>
+                  </a:ext>
+                </a:extLst>
+              </p:cNvPr>
+              <p:cNvSpPr/>
+              <p:nvPr/>
+            </p:nvSpPr>
+            <p:spPr>
+              <a:xfrm>
+                <a:off x="2781898" y="1732574"/>
+                <a:ext cx="792000" cy="136462"/>
+              </a:xfrm>
+              <a:prstGeom prst="rect">
+                <a:avLst/>
+              </a:prstGeom>
+              <a:noFill/>
+              <a:ln/>
+            </p:spPr>
+            <p:txBody>
+              <a:bodyPr wrap="square" rtlCol="0" anchor="ctr"/>
+              <a:lstStyle/>
+              <a:p>
+                <a:pPr algn="r"/>
+                <a:r>
+                  <a:rPr lang="en-US" sz="900" b="1" dirty="0" err="1" smtClean="0">
+                    <a:solidFill>
+                      <a:srgbClr val="10A37F"/>
+                    </a:solidFill>
+                    <a:latin typeface="+mj-ea"/>
+                    <a:ea typeface="+mj-ea"/>
+                  </a:rPr>
+                  <a:t>ChatGPT</a:t>
+                </a:r>
+                <a:endParaRPr lang="en-US" sz="900" b="1" dirty="0">
+                  <a:latin typeface="+mj-ea"/>
+                  <a:ea typeface="+mj-ea"/>
+                </a:endParaRPr>
+              </a:p>
+            </p:txBody>
+          </p:sp>
+          <p:sp>
+            <p:nvSpPr>
+              <p:cNvPr id="30" name="Text 12">
+                <a:extLst>
+                  <a:ext uri="{FF2B5EF4-FFF2-40B4-BE49-F238E27FC236}">
+                    <a16:creationId xmlns:a16="http://schemas.microsoft.com/office/drawing/2014/main" xmlns="" id="{168052F5-5A84-8E2C-7A1F-1F4F709F31DE}"/>
+                  </a:ext>
+                </a:extLst>
+              </p:cNvPr>
+              <p:cNvSpPr/>
+              <p:nvPr/>
+            </p:nvSpPr>
+            <p:spPr>
+              <a:xfrm>
+                <a:off x="2781898" y="1886541"/>
+                <a:ext cx="792000" cy="109170"/>
+              </a:xfrm>
+              <a:prstGeom prst="rect">
+                <a:avLst/>
+              </a:prstGeom>
+              <a:noFill/>
+              <a:ln/>
+            </p:spPr>
+            <p:txBody>
+              <a:bodyPr wrap="square" rtlCol="0" anchor="ctr"/>
+              <a:lstStyle/>
+              <a:p>
+                <a:pPr algn="r"/>
+                <a:r>
+                  <a:rPr lang="en-US" sz="800" b="1" dirty="0">
+                    <a:solidFill>
+                      <a:srgbClr val="96C0E6">
+                        <a:alpha val="60000"/>
+                      </a:srgbClr>
+                    </a:solidFill>
+                    <a:latin typeface="+mj-ea"/>
+                    <a:ea typeface="+mj-ea"/>
+                  </a:rPr>
+                  <a:t>OpenAI</a:t>
+                </a:r>
+                <a:endParaRPr lang="en-US" sz="800" b="1" dirty="0">
+                  <a:latin typeface="+mj-ea"/>
+                  <a:ea typeface="+mj-ea"/>
+                </a:endParaRPr>
+              </a:p>
+            </p:txBody>
+          </p:sp>
+          <p:pic>
+            <p:nvPicPr>
+              <p:cNvPr id="48" name="그림 47" descr="상징, 로고, 그래픽, 스케치이(가) 표시된 사진&#10;&#10;AI 생성 콘텐츠는 정확하지 않을 수 있습니다.">
+                <a:extLst>
+                  <a:ext uri="{FF2B5EF4-FFF2-40B4-BE49-F238E27FC236}">
+                    <a16:creationId xmlns:a16="http://schemas.microsoft.com/office/drawing/2014/main" xmlns="" id="{A55A431D-03DF-5597-6C0C-4672D09EF22F}"/>
+                  </a:ext>
+                </a:extLst>
+              </p:cNvPr>
+              <p:cNvPicPr>
+                <a:picLocks noChangeAspect="1"/>
+              </p:cNvPicPr>
+              <p:nvPr/>
+            </p:nvPicPr>
+            <p:blipFill>
+              <a:blip r:embed="rId3" cstate="print">
+                <a:extLst>
+                  <a:ext uri="{28A0092B-C50C-407E-A947-70E740481C1C}">
+                    <a14:useLocalDpi xmlns:a14="http://schemas.microsoft.com/office/drawing/2010/main" val="0"/>
+                  </a:ext>
+                </a:extLst>
+              </a:blip>
+              <a:srcRect l="17947" r="17406"/>
+              <a:stretch>
+                <a:fillRect/>
+              </a:stretch>
+            </p:blipFill>
+            <p:spPr>
+              <a:xfrm>
+                <a:off x="2763781" y="1793453"/>
+                <a:ext cx="174834" cy="145560"/>
+              </a:xfrm>
+              <a:prstGeom prst="rect">
+                <a:avLst/>
+              </a:prstGeom>
+            </p:spPr>
+          </p:pic>
+        </p:grpSp>
+        <p:grpSp>
+          <p:nvGrpSpPr>
+            <p:cNvPr id="4" name="그룹 3"/>
+            <p:cNvGrpSpPr/>
+            <p:nvPr/>
+          </p:nvGrpSpPr>
+          <p:grpSpPr>
+            <a:xfrm>
+              <a:off x="2892543" y="1393709"/>
+              <a:ext cx="831600" cy="283842"/>
+              <a:chOff x="3804369" y="1717559"/>
+              <a:chExt cx="831600" cy="283842"/>
+            </a:xfrm>
+          </p:grpSpPr>
+          <p:sp>
+            <p:nvSpPr>
+              <p:cNvPr id="31" name="Shape 13">
+                <a:extLst>
+                  <a:ext uri="{FF2B5EF4-FFF2-40B4-BE49-F238E27FC236}">
+                    <a16:creationId xmlns:a16="http://schemas.microsoft.com/office/drawing/2014/main" xmlns="" id="{7DF576A5-F1A3-D60C-231C-776C2729C512}"/>
+                  </a:ext>
+                </a:extLst>
+              </p:cNvPr>
+              <p:cNvSpPr/>
+              <p:nvPr/>
+            </p:nvSpPr>
+            <p:spPr>
+              <a:xfrm>
+                <a:off x="3804369" y="1717559"/>
+                <a:ext cx="831600" cy="283842"/>
+              </a:xfrm>
+              <a:prstGeom prst="rect">
+                <a:avLst/>
+              </a:prstGeom>
+              <a:solidFill>
+                <a:srgbClr val="4285F4">
+                  <a:alpha val="12000"/>
+                </a:srgbClr>
+              </a:solidFill>
+              <a:ln w="12700">
+                <a:solidFill>
+                  <a:srgbClr val="4285F4"/>
+                </a:solidFill>
+                <a:prstDash val="solid"/>
+              </a:ln>
+            </p:spPr>
+            <p:txBody>
+              <a:bodyPr/>
+              <a:lstStyle/>
+              <a:p>
+                <a:endParaRPr lang="ko-KR" altLang="en-US" sz="1600" b="1">
+                  <a:latin typeface="+mj-ea"/>
+                  <a:ea typeface="+mj-ea"/>
+                </a:endParaRPr>
+              </a:p>
+            </p:txBody>
+          </p:sp>
+          <p:sp>
+            <p:nvSpPr>
+              <p:cNvPr id="32" name="Text 14">
+                <a:extLst>
+                  <a:ext uri="{FF2B5EF4-FFF2-40B4-BE49-F238E27FC236}">
+                    <a16:creationId xmlns:a16="http://schemas.microsoft.com/office/drawing/2014/main" xmlns="" id="{A396E484-F623-F278-EDD1-3EA2CC559BD3}"/>
+                  </a:ext>
+                </a:extLst>
+              </p:cNvPr>
+              <p:cNvSpPr/>
+              <p:nvPr/>
+            </p:nvSpPr>
+            <p:spPr>
+              <a:xfrm>
+                <a:off x="3834946" y="1726224"/>
+                <a:ext cx="792000" cy="136462"/>
+              </a:xfrm>
+              <a:prstGeom prst="rect">
+                <a:avLst/>
+              </a:prstGeom>
+              <a:noFill/>
+              <a:ln/>
+            </p:spPr>
+            <p:txBody>
+              <a:bodyPr wrap="square" rtlCol="0" anchor="ctr"/>
+              <a:lstStyle/>
+              <a:p>
+                <a:pPr algn="r"/>
+                <a:r>
+                  <a:rPr lang="en-US" sz="900" b="1" dirty="0">
+                    <a:solidFill>
+                      <a:srgbClr val="4285F4"/>
+                    </a:solidFill>
+                    <a:latin typeface="+mj-ea"/>
+                    <a:ea typeface="+mj-ea"/>
+                  </a:rPr>
+                  <a:t>Gemini</a:t>
+                </a:r>
+                <a:endParaRPr lang="en-US" sz="900" b="1" dirty="0">
+                  <a:latin typeface="+mj-ea"/>
+                  <a:ea typeface="+mj-ea"/>
+                </a:endParaRPr>
+              </a:p>
+            </p:txBody>
+          </p:sp>
+          <p:sp>
+            <p:nvSpPr>
+              <p:cNvPr id="33" name="Text 15">
+                <a:extLst>
+                  <a:ext uri="{FF2B5EF4-FFF2-40B4-BE49-F238E27FC236}">
+                    <a16:creationId xmlns:a16="http://schemas.microsoft.com/office/drawing/2014/main" xmlns="" id="{7BCC566E-4F58-D7CF-021F-D0ED2C9E4A04}"/>
+                  </a:ext>
+                </a:extLst>
+              </p:cNvPr>
+              <p:cNvSpPr/>
+              <p:nvPr/>
+            </p:nvSpPr>
+            <p:spPr>
+              <a:xfrm>
+                <a:off x="3834946" y="1880191"/>
+                <a:ext cx="792000" cy="109170"/>
+              </a:xfrm>
+              <a:prstGeom prst="rect">
+                <a:avLst/>
+              </a:prstGeom>
+              <a:noFill/>
+              <a:ln/>
+            </p:spPr>
+            <p:txBody>
+              <a:bodyPr wrap="square" rtlCol="0" anchor="ctr"/>
+              <a:lstStyle/>
+              <a:p>
+                <a:pPr algn="r"/>
+                <a:r>
+                  <a:rPr lang="en-US" sz="800" b="1" dirty="0">
+                    <a:solidFill>
+                      <a:srgbClr val="96C0E6">
+                        <a:alpha val="60000"/>
+                      </a:srgbClr>
+                    </a:solidFill>
+                    <a:latin typeface="+mj-ea"/>
+                    <a:ea typeface="+mj-ea"/>
+                  </a:rPr>
+                  <a:t>Google</a:t>
+                </a:r>
+                <a:endParaRPr lang="en-US" sz="800" b="1" dirty="0">
+                  <a:latin typeface="+mj-ea"/>
+                  <a:ea typeface="+mj-ea"/>
+                </a:endParaRPr>
+              </a:p>
+            </p:txBody>
+          </p:sp>
+          <p:pic>
+            <p:nvPicPr>
+              <p:cNvPr id="49" name="그림 48" descr="창의성, 다채로움, 천문학이(가) 표시된 사진&#10;&#10;AI 생성 콘텐츠는 정확하지 않을 수 있습니다.">
+                <a:extLst>
+                  <a:ext uri="{FF2B5EF4-FFF2-40B4-BE49-F238E27FC236}">
+                    <a16:creationId xmlns:a16="http://schemas.microsoft.com/office/drawing/2014/main" xmlns="" id="{251C1661-84DF-0517-2C95-B105ED8C3F82}"/>
+                  </a:ext>
+                </a:extLst>
+              </p:cNvPr>
+              <p:cNvPicPr>
+                <a:picLocks noChangeAspect="1"/>
+              </p:cNvPicPr>
+              <p:nvPr/>
+            </p:nvPicPr>
+            <p:blipFill>
+              <a:blip r:embed="rId4" cstate="print">
+                <a:extLst>
+                  <a:ext uri="{28A0092B-C50C-407E-A947-70E740481C1C}">
+                    <a14:useLocalDpi xmlns:a14="http://schemas.microsoft.com/office/drawing/2010/main" val="0"/>
+                  </a:ext>
+                </a:extLst>
+              </a:blip>
+              <a:stretch>
+                <a:fillRect/>
+              </a:stretch>
+            </p:blipFill>
+            <p:spPr>
+              <a:xfrm>
+                <a:off x="3821424" y="1765064"/>
+                <a:ext cx="187320" cy="179236"/>
+              </a:xfrm>
+              <a:prstGeom prst="rect">
+                <a:avLst/>
+              </a:prstGeom>
+            </p:spPr>
+          </p:pic>
+        </p:grpSp>
+        <p:grpSp>
+          <p:nvGrpSpPr>
+            <p:cNvPr id="5" name="그룹 4"/>
+            <p:cNvGrpSpPr/>
+            <p:nvPr/>
+          </p:nvGrpSpPr>
+          <p:grpSpPr>
+            <a:xfrm>
+              <a:off x="3999542" y="1393709"/>
+              <a:ext cx="832574" cy="283842"/>
+              <a:chOff x="4926642" y="1660409"/>
+              <a:chExt cx="832574" cy="283842"/>
+            </a:xfrm>
+          </p:grpSpPr>
+          <p:sp>
+            <p:nvSpPr>
+              <p:cNvPr id="34" name="Shape 16">
+                <a:extLst>
+                  <a:ext uri="{FF2B5EF4-FFF2-40B4-BE49-F238E27FC236}">
+                    <a16:creationId xmlns:a16="http://schemas.microsoft.com/office/drawing/2014/main" xmlns="" id="{13171D7D-073D-4FAF-0D9E-B5DAAADD17EE}"/>
+                  </a:ext>
+                </a:extLst>
+              </p:cNvPr>
+              <p:cNvSpPr/>
+              <p:nvPr/>
+            </p:nvSpPr>
+            <p:spPr>
+              <a:xfrm>
+                <a:off x="4926642" y="1660409"/>
+                <a:ext cx="831600" cy="283842"/>
+              </a:xfrm>
+              <a:prstGeom prst="rect">
+                <a:avLst/>
+              </a:prstGeom>
+              <a:solidFill>
+                <a:srgbClr val="A050DC">
+                  <a:alpha val="12000"/>
+                </a:srgbClr>
+              </a:solidFill>
+              <a:ln w="12700">
+                <a:solidFill>
+                  <a:srgbClr val="A050DC"/>
+                </a:solidFill>
+                <a:prstDash val="solid"/>
+              </a:ln>
+            </p:spPr>
+            <p:txBody>
+              <a:bodyPr/>
+              <a:lstStyle/>
+              <a:p>
+                <a:endParaRPr lang="ko-KR" altLang="en-US" sz="1600" b="1">
+                  <a:latin typeface="+mj-ea"/>
+                  <a:ea typeface="+mj-ea"/>
+                </a:endParaRPr>
+              </a:p>
+            </p:txBody>
+          </p:sp>
+          <p:sp>
+            <p:nvSpPr>
+              <p:cNvPr id="35" name="Text 17">
+                <a:extLst>
+                  <a:ext uri="{FF2B5EF4-FFF2-40B4-BE49-F238E27FC236}">
+                    <a16:creationId xmlns:a16="http://schemas.microsoft.com/office/drawing/2014/main" xmlns="" id="{835CDA27-D5ED-4E46-0D6B-FF778E464EEA}"/>
+                  </a:ext>
+                </a:extLst>
+              </p:cNvPr>
+              <p:cNvSpPr/>
+              <p:nvPr/>
+            </p:nvSpPr>
+            <p:spPr>
+              <a:xfrm>
+                <a:off x="4967216" y="1669074"/>
+                <a:ext cx="792000" cy="136462"/>
+              </a:xfrm>
+              <a:prstGeom prst="rect">
+                <a:avLst/>
+              </a:prstGeom>
+              <a:noFill/>
+              <a:ln/>
+            </p:spPr>
+            <p:txBody>
+              <a:bodyPr wrap="square" rtlCol="0" anchor="ctr"/>
+              <a:lstStyle/>
+              <a:p>
+                <a:pPr algn="r"/>
+                <a:r>
+                  <a:rPr lang="en-US" sz="900" b="1" dirty="0">
+                    <a:solidFill>
+                      <a:srgbClr val="B060E8"/>
+                    </a:solidFill>
+                    <a:latin typeface="+mj-ea"/>
+                    <a:ea typeface="+mj-ea"/>
+                  </a:rPr>
+                  <a:t>Grok</a:t>
+                </a:r>
+                <a:endParaRPr lang="en-US" sz="900" b="1" dirty="0">
+                  <a:latin typeface="+mj-ea"/>
+                  <a:ea typeface="+mj-ea"/>
+                </a:endParaRPr>
+              </a:p>
+            </p:txBody>
+          </p:sp>
+          <p:sp>
+            <p:nvSpPr>
+              <p:cNvPr id="36" name="Text 18">
+                <a:extLst>
+                  <a:ext uri="{FF2B5EF4-FFF2-40B4-BE49-F238E27FC236}">
+                    <a16:creationId xmlns:a16="http://schemas.microsoft.com/office/drawing/2014/main" xmlns="" id="{3220E7CB-9970-5092-E726-54F04AE27650}"/>
+                  </a:ext>
+                </a:extLst>
+              </p:cNvPr>
+              <p:cNvSpPr/>
+              <p:nvPr/>
+            </p:nvSpPr>
+            <p:spPr>
+              <a:xfrm>
+                <a:off x="4967216" y="1823041"/>
+                <a:ext cx="792000" cy="109170"/>
+              </a:xfrm>
+              <a:prstGeom prst="rect">
+                <a:avLst/>
+              </a:prstGeom>
+              <a:noFill/>
+              <a:ln/>
+            </p:spPr>
+            <p:txBody>
+              <a:bodyPr wrap="square" rtlCol="0" anchor="ctr"/>
+              <a:lstStyle/>
+              <a:p>
+                <a:pPr algn="r"/>
+                <a:r>
+                  <a:rPr lang="en-US" sz="800" b="1" dirty="0" err="1">
+                    <a:solidFill>
+                      <a:srgbClr val="96C0E6">
+                        <a:alpha val="60000"/>
+                      </a:srgbClr>
+                    </a:solidFill>
+                    <a:latin typeface="+mj-ea"/>
+                    <a:ea typeface="+mj-ea"/>
+                  </a:rPr>
+                  <a:t>xAI</a:t>
+                </a:r>
+                <a:endParaRPr lang="en-US" sz="800" b="1" dirty="0">
+                  <a:latin typeface="+mj-ea"/>
+                  <a:ea typeface="+mj-ea"/>
+                </a:endParaRPr>
+              </a:p>
+            </p:txBody>
+          </p:sp>
+          <p:pic>
+            <p:nvPicPr>
+              <p:cNvPr id="50" name="그림 49" descr="그래픽, 상징, 로고, 그래픽 디자인이(가) 표시된 사진&#10;&#10;AI 생성 콘텐츠는 정확하지 않을 수 있습니다.">
+                <a:extLst>
+                  <a:ext uri="{FF2B5EF4-FFF2-40B4-BE49-F238E27FC236}">
+                    <a16:creationId xmlns:a16="http://schemas.microsoft.com/office/drawing/2014/main" xmlns="" id="{212CE61C-5896-6F99-8512-6499B1D20402}"/>
+                  </a:ext>
+                </a:extLst>
+              </p:cNvPr>
+              <p:cNvPicPr>
+                <a:picLocks noChangeAspect="1"/>
+              </p:cNvPicPr>
+              <p:nvPr/>
+            </p:nvPicPr>
+            <p:blipFill>
+              <a:blip r:embed="rId5" cstate="print">
+                <a:extLst>
+                  <a:ext uri="{28A0092B-C50C-407E-A947-70E740481C1C}">
+                    <a14:useLocalDpi xmlns:a14="http://schemas.microsoft.com/office/drawing/2010/main" val="0"/>
+                  </a:ext>
+                </a:extLst>
+              </a:blip>
+              <a:stretch>
+                <a:fillRect/>
+              </a:stretch>
+            </p:blipFill>
+            <p:spPr>
+              <a:xfrm>
+                <a:off x="4950899" y="1713925"/>
+                <a:ext cx="182050" cy="163474"/>
+              </a:xfrm>
+              <a:prstGeom prst="rect">
+                <a:avLst/>
+              </a:prstGeom>
+            </p:spPr>
+          </p:pic>
+        </p:grpSp>
+      </p:grpSp>
+    </p:spTree>
+    <p:extLst>
+      <p:ext uri="{BB962C8B-B14F-4D97-AF65-F5344CB8AC3E}">
+        <p14:creationId xmlns:p14="http://schemas.microsoft.com/office/powerpoint/2010/main" val="2227531095"/>
+      </p:ext>
+    </p:extLst>
+  </p:cSld>
+  <p:clrMapOvr>
+    <a:masterClrMapping/>
+  </p:clrMapOvr>
+  <p:timing>
+    <p:tnLst>
+      <p:par>
+        <p:cTn id="1" dur="indefinite" restart="never" nodeType="tmRoot"/>
+      </p:par>
+    </p:tnLst>
+  </p:timing>
+</p:sld>
+</file>
+
+<file path=ppt/slides/slide7.xml><?xml version="1.0" encoding="utf-8"?>
+<p:sld xmlns:a="http://schemas.openxmlformats.org/drawingml/2006/main" xmlns:r="http://schemas.openxmlformats.org/officeDocument/2006/relationships" xmlns:p="http://schemas.openxmlformats.org/presentationml/2006/main">
+  <p:cSld>
+    <p:spTree>
+      <p:nvGrpSpPr>
+        <p:cNvPr id="1" name=""/>
+        <p:cNvGrpSpPr/>
+        <p:nvPr/>
+      </p:nvGrpSpPr>
+      <p:grpSpPr>
+        <a:xfrm>
+          <a:off x="0" y="0"/>
+          <a:ext cx="0" cy="0"/>
+          <a:chOff x="0" y="0"/>
+          <a:chExt cx="0" cy="0"/>
+        </a:xfrm>
+      </p:grpSpPr>
+      <p:sp>
+        <p:nvSpPr>
           <p:cNvPr id="88" name="직사각형 87"/>
           <p:cNvSpPr/>
           <p:nvPr/>
@@ -28929,7 +30606,7 @@
             <p:cNvPr id="6" name="Picture 11" descr="Sandbox Software – In the Cloud | FortiSandbox Cloud">
               <a:extLst>
                 <a:ext uri="{FF2B5EF4-FFF2-40B4-BE49-F238E27FC236}">
-                  <a16:creationId xmlns:a16="http://schemas.microsoft.com/office/drawing/2014/main" xmlns="" id="{73BBF3D0-6B40-E280-BA30-1E77B5C4F45A}"/>
+                  <a16:creationId xmlns="" xmlns:a16="http://schemas.microsoft.com/office/drawing/2014/main" id="{73BBF3D0-6B40-E280-BA30-1E77B5C4F45A}"/>
                 </a:ext>
               </a:extLst>
             </p:cNvPr>
@@ -29047,7 +30724,7 @@
             <p:cNvPr id="7" name="Picture 8" descr="cost Icon - Free PNG &amp; SVG 930448 - Noun Project">
               <a:extLst>
                 <a:ext uri="{FF2B5EF4-FFF2-40B4-BE49-F238E27FC236}">
-                  <a16:creationId xmlns:a16="http://schemas.microsoft.com/office/drawing/2014/main" xmlns="" id="{B89FFE28-AD15-4FA1-FDD1-8DF6F4744923}"/>
+                  <a16:creationId xmlns="" xmlns:a16="http://schemas.microsoft.com/office/drawing/2014/main" id="{B89FFE28-AD15-4FA1-FDD1-8DF6F4744923}"/>
                 </a:ext>
               </a:extLst>
             </p:cNvPr>
@@ -29177,7 +30854,7 @@
             <p:cNvPr id="8" name="Picture 6" descr="Project Cargo Services | CFA">
               <a:extLst>
                 <a:ext uri="{FF2B5EF4-FFF2-40B4-BE49-F238E27FC236}">
-                  <a16:creationId xmlns:a16="http://schemas.microsoft.com/office/drawing/2014/main" xmlns="" id="{A9578F59-39A1-6B09-C1A4-24DA78C49B39}"/>
+                  <a16:creationId xmlns="" xmlns:a16="http://schemas.microsoft.com/office/drawing/2014/main" id="{A9578F59-39A1-6B09-C1A4-24DA78C49B39}"/>
                 </a:ext>
               </a:extLst>
             </p:cNvPr>
@@ -32209,7 +33886,7 @@
 </p:sld>
 </file>
 
-<file path=ppt/slides/slide7.xml><?xml version="1.0" encoding="utf-8"?>
+<file path=ppt/slides/slide8.xml><?xml version="1.0" encoding="utf-8"?>
 <p:sld xmlns:a="http://schemas.openxmlformats.org/drawingml/2006/main" xmlns:r="http://schemas.openxmlformats.org/officeDocument/2006/relationships" xmlns:p="http://schemas.openxmlformats.org/presentationml/2006/main">
   <p:cSld>
     <p:spTree>
@@ -32301,7 +33978,7 @@
 </p:sld>
 </file>
 
-<file path=ppt/slides/slide8.xml><?xml version="1.0" encoding="utf-8"?>
+<file path=ppt/slides/slide9.xml><?xml version="1.0" encoding="utf-8"?>
 <p:sld xmlns:a="http://schemas.openxmlformats.org/drawingml/2006/main" xmlns:r="http://schemas.openxmlformats.org/officeDocument/2006/relationships" xmlns:p="http://schemas.openxmlformats.org/presentationml/2006/main">
   <p:cSld>
     <p:spTree>
@@ -43637,196 +45314,6 @@
     <p:extLst>
       <p:ext uri="{BB962C8B-B14F-4D97-AF65-F5344CB8AC3E}">
         <p14:creationId xmlns:p14="http://schemas.microsoft.com/office/powerpoint/2010/main" val="2249290787"/>
-      </p:ext>
-    </p:extLst>
-  </p:cSld>
-  <p:clrMapOvr>
-    <a:masterClrMapping/>
-  </p:clrMapOvr>
-  <p:timing>
-    <p:tnLst>
-      <p:par>
-        <p:cTn id="1" dur="indefinite" restart="never" nodeType="tmRoot"/>
-      </p:par>
-    </p:tnLst>
-  </p:timing>
-</p:sld>
-</file>
-
-<file path=ppt/slides/slide9.xml><?xml version="1.0" encoding="utf-8"?>
-<p:sld xmlns:a="http://schemas.openxmlformats.org/drawingml/2006/main" xmlns:r="http://schemas.openxmlformats.org/officeDocument/2006/relationships" xmlns:p="http://schemas.openxmlformats.org/presentationml/2006/main">
-  <p:cSld>
-    <p:spTree>
-      <p:nvGrpSpPr>
-        <p:cNvPr id="1" name=""/>
-        <p:cNvGrpSpPr/>
-        <p:nvPr/>
-      </p:nvGrpSpPr>
-      <p:grpSpPr>
-        <a:xfrm>
-          <a:off x="0" y="0"/>
-          <a:ext cx="0" cy="0"/>
-          <a:chOff x="0" y="0"/>
-          <a:chExt cx="0" cy="0"/>
-        </a:xfrm>
-      </p:grpSpPr>
-      <p:sp>
-        <p:nvSpPr>
-          <p:cNvPr id="88" name="직사각형 87"/>
-          <p:cNvSpPr/>
-          <p:nvPr/>
-        </p:nvSpPr>
-        <p:spPr>
-          <a:xfrm>
-            <a:off x="152400" y="125187"/>
-            <a:ext cx="2667000" cy="312964"/>
-          </a:xfrm>
-          <a:prstGeom prst="rect">
-            <a:avLst/>
-          </a:prstGeom>
-          <a:noFill/>
-          <a:ln>
-            <a:noFill/>
-          </a:ln>
-        </p:spPr>
-        <p:style>
-          <a:lnRef idx="2">
-            <a:schemeClr val="accent1">
-              <a:shade val="50000"/>
-            </a:schemeClr>
-          </a:lnRef>
-          <a:fillRef idx="1">
-            <a:schemeClr val="accent1"/>
-          </a:fillRef>
-          <a:effectRef idx="0">
-            <a:schemeClr val="accent1"/>
-          </a:effectRef>
-          <a:fontRef idx="minor">
-            <a:schemeClr val="lt1"/>
-          </a:fontRef>
-        </p:style>
-        <p:txBody>
-          <a:bodyPr rtlCol="0" anchor="ctr"/>
-          <a:lstStyle/>
-          <a:p>
-            <a:r>
-              <a:rPr lang="en-US" altLang="ko-KR" sz="1600" b="1" dirty="0" smtClean="0">
-                <a:solidFill>
-                  <a:schemeClr val="accent1">
-                    <a:lumMod val="75000"/>
-                  </a:schemeClr>
-                </a:solidFill>
-                <a:latin typeface="+mn-ea"/>
-              </a:rPr>
-              <a:t>Schema</a:t>
-            </a:r>
-            <a:endParaRPr lang="ko-KR" altLang="en-US" sz="1600" b="1" dirty="0">
-              <a:solidFill>
-                <a:schemeClr val="accent1">
-                  <a:lumMod val="75000"/>
-                </a:schemeClr>
-              </a:solidFill>
-              <a:latin typeface="+mn-ea"/>
-            </a:endParaRPr>
-          </a:p>
-        </p:txBody>
-      </p:sp>
-      <p:sp>
-        <p:nvSpPr>
-          <p:cNvPr id="89" name="직사각형 88"/>
-          <p:cNvSpPr/>
-          <p:nvPr/>
-        </p:nvSpPr>
-        <p:spPr>
-          <a:xfrm>
-            <a:off x="301171" y="422730"/>
-            <a:ext cx="9312729" cy="878532"/>
-          </a:xfrm>
-          <a:prstGeom prst="rect">
-            <a:avLst/>
-          </a:prstGeom>
-          <a:noFill/>
-          <a:ln>
-            <a:noFill/>
-          </a:ln>
-        </p:spPr>
-        <p:style>
-          <a:lnRef idx="2">
-            <a:schemeClr val="accent1">
-              <a:shade val="50000"/>
-            </a:schemeClr>
-          </a:lnRef>
-          <a:fillRef idx="1">
-            <a:schemeClr val="accent1"/>
-          </a:fillRef>
-          <a:effectRef idx="0">
-            <a:schemeClr val="accent1"/>
-          </a:effectRef>
-          <a:fontRef idx="minor">
-            <a:schemeClr val="lt1"/>
-          </a:fontRef>
-        </p:style>
-        <p:txBody>
-          <a:bodyPr rtlCol="0" anchor="ctr"/>
-          <a:lstStyle/>
-          <a:p>
-            <a:r>
-              <a:rPr lang="en-US" altLang="ko-KR" sz="1400" dirty="0" smtClean="0">
-                <a:solidFill>
-                  <a:schemeClr val="tx1"/>
-                </a:solidFill>
-                <a:latin typeface="+mn-ea"/>
-              </a:rPr>
-              <a:t>xxx</a:t>
-            </a:r>
-            <a:endParaRPr lang="en-US" altLang="ko-KR" sz="1400" dirty="0">
-              <a:solidFill>
-                <a:schemeClr val="tx1"/>
-              </a:solidFill>
-              <a:latin typeface="+mn-ea"/>
-            </a:endParaRPr>
-          </a:p>
-        </p:txBody>
-      </p:sp>
-      <p:cxnSp>
-        <p:nvCxnSpPr>
-          <p:cNvPr id="90" name="직선 연결선 89"/>
-          <p:cNvCxnSpPr/>
-          <p:nvPr/>
-        </p:nvCxnSpPr>
-        <p:spPr>
-          <a:xfrm flipV="1">
-            <a:off x="215900" y="469900"/>
-            <a:ext cx="9156700" cy="0"/>
-          </a:xfrm>
-          <a:prstGeom prst="line">
-            <a:avLst/>
-          </a:prstGeom>
-          <a:ln w="19050">
-            <a:solidFill>
-              <a:schemeClr val="accent1"/>
-            </a:solidFill>
-          </a:ln>
-        </p:spPr>
-        <p:style>
-          <a:lnRef idx="1">
-            <a:schemeClr val="accent1"/>
-          </a:lnRef>
-          <a:fillRef idx="0">
-            <a:schemeClr val="accent1"/>
-          </a:fillRef>
-          <a:effectRef idx="0">
-            <a:schemeClr val="accent1"/>
-          </a:effectRef>
-          <a:fontRef idx="minor">
-            <a:schemeClr val="tx1"/>
-          </a:fontRef>
-        </p:style>
-      </p:cxnSp>
-    </p:spTree>
-    <p:extLst>
-      <p:ext uri="{BB962C8B-B14F-4D97-AF65-F5344CB8AC3E}">
-        <p14:creationId xmlns:p14="http://schemas.microsoft.com/office/powerpoint/2010/main" val="1622312844"/>
       </p:ext>
     </p:extLst>
   </p:cSld>
